--- a/PostgreSQL_vs_Neo4j_DAngelica_Leone.pptx
+++ b/PostgreSQL_vs_Neo4j_DAngelica_Leone.pptx
@@ -694,10 +694,8 @@
           <a:lstStyle/>
           <a:p>
             <a:r>
-              <a:rPr lang="en-US" dirty="0"/>
-              <a:t>45 sec. Pausa a effetto. Non è tuning: il recursive CTE esplora tutto il fan-out, shortestPath si ferma appena tocca. Complessità diversa, non costante diversa.</a:t>
-            </a:r>
-            <a:endParaRPr lang="en-US" dirty="0"/>
+              <a:t>45 sec. Pausa a effetto. Non è tuning: il recursive CTE esplora tutto il fan-out, SHORTEST 1 si ferma appena tocca. Complessità diversa, non costante diversa.</a:t>
+            </a:r>
           </a:p>
         </p:txBody>
       </p:sp>
@@ -782,10 +780,8 @@
           <a:lstStyle/>
           <a:p>
             <a:r>
-              <a:rPr lang="en-US" dirty="0"/>
-              <a:t>60 sec. La sproporzione visiva È il messaggio: stessa domanda, 21 righe contro 3. Non leggere il codice: indicare solo la CTE ricorsiva a sinistra e shortestPath a destra.</a:t>
-            </a:r>
-            <a:endParaRPr lang="en-US" dirty="0"/>
+              <a:t>60 sec. La sproporzione visiva È il messaggio: stessa domanda, 21 righe contro 5. Non leggere il codice: indicare solo la CTE ricorsiva a sinistra e SHORTEST 1 a destra.</a:t>
+            </a:r>
           </a:p>
         </p:txBody>
       </p:sp>
@@ -870,10 +866,8 @@
           <a:lstStyle/>
           <a:p>
             <a:r>
-              <a:rPr lang="en-US" dirty="0"/>
-              <a:t>60 sec. Due dimensioni non-performance: concisione del codice e agilità dello schema. Q12: ALTER + UPDATE + lock contro un singolo SET — 13.7 volte più veloce, ma il punto vero è il change-management.</a:t>
-            </a:r>
-            <a:endParaRPr lang="en-US" dirty="0"/>
+              <a:t>60 sec. Due dimensioni non-performance: concisione del codice e agilità dello schema. Q12: ALTER + UPDATE + lock contro un singolo SET — 4.5 volte più veloce, ma il punto vero è il change-management.</a:t>
+            </a:r>
           </a:p>
         </p:txBody>
       </p:sp>
@@ -2813,7 +2807,7 @@
                 <a:ea typeface="Space Grotesk" pitchFamily="34" charset="-122"/>
                 <a:cs typeface="Space Grotesk" pitchFamily="34" charset="-120"/>
               </a:rPr>
-              <a:t>The pattern is clean: Postgres wins all of category A, Neo4j takes 7 of the remaining 8</a:t>
+              <a:t>Category A (&lt; 15 ms) is a dead heat; Postgres wins the fixed-depth join (Q09), Neo4j wins every variable-depth traversal and every write</a:t>
             </a:r>
             <a:endParaRPr lang="en-US" sz="4350" dirty="0"/>
           </a:p>
@@ -3113,8 +3107,334 @@
         </p:nvSpPr>
         <p:spPr>
           <a:xfrm>
-            <a:off x="7250079" y="3257536"/>
-            <a:ext cx="161810" cy="285715"/>
+            <a:off x="7424927" y="3257536"/>
+            <a:ext cx="360397" cy="285715"/>
+          </a:xfrm>
+          <a:prstGeom prst="rect">
+            <a:avLst/>
+          </a:prstGeom>
+          <a:solidFill>
+            <a:srgbClr val="1E7A52"/>
+          </a:solidFill>
+          <a:ln/>
+        </p:spPr>
+      </p:sp>
+      <p:sp>
+        <p:nvSpPr>
+          <p:cNvPr id="13" name="Text 11"/>
+          <p:cNvSpPr/>
+          <p:nvPr/>
+        </p:nvSpPr>
+        <p:spPr>
+          <a:xfrm>
+            <a:off x="10860144" y="3181454"/>
+            <a:ext cx="6475430" cy="476115"/>
+          </a:xfrm>
+          <a:prstGeom prst="rect">
+            <a:avLst/>
+          </a:prstGeom>
+          <a:noFill/>
+          <a:ln/>
+        </p:spPr>
+        <p:txBody>
+          <a:bodyPr wrap="square" lIns="25400" tIns="25400" rIns="25400" bIns="25400" rtlCol="0" anchor="ctr">
+            <a:normAutofit/>
+          </a:bodyPr>
+          <a:lstStyle/>
+          <a:p>
+            <a:pPr algn="r" indent="0" marL="0">
+              <a:buNone/>
+            </a:pPr>
+            <a:r>
+              <a:rPr lang="en-US" sz="1725" b="1" dirty="0">
+                <a:solidFill>
+                  <a:srgbClr val="33608F"/>
+                </a:solidFill>
+                <a:latin typeface="IBM Plex Mono" pitchFamily="34" charset="0"/>
+                <a:ea typeface="IBM Plex Mono" pitchFamily="34" charset="-122"/>
+                <a:cs typeface="IBM Plex Mono" pitchFamily="34" charset="-120"/>
+              </a:rPr>
+              <a:t>1.58×*</a:t>
+            </a:r>
+            <a:endParaRPr lang="en-US" sz="1725" dirty="0"/>
+          </a:p>
+        </p:txBody>
+      </p:sp>
+      <p:sp>
+        <p:nvSpPr>
+          <p:cNvPr id="14" name="Text 12"/>
+          <p:cNvSpPr/>
+          <p:nvPr/>
+        </p:nvSpPr>
+        <p:spPr>
+          <a:xfrm>
+            <a:off x="952385" y="3619469"/>
+            <a:ext cx="628610" cy="325038"/>
+          </a:xfrm>
+          <a:prstGeom prst="rect">
+            <a:avLst/>
+          </a:prstGeom>
+          <a:noFill/>
+          <a:ln/>
+        </p:spPr>
+        <p:txBody>
+          <a:bodyPr wrap="square" lIns="25400" tIns="25400" rIns="25400" bIns="25400" rtlCol="0" anchor="t">
+            <a:normAutofit/>
+          </a:bodyPr>
+          <a:lstStyle/>
+          <a:p>
+            <a:pPr algn="l" indent="0" marL="0">
+              <a:buNone/>
+            </a:pPr>
+            <a:r>
+              <a:rPr lang="en-US" sz="1725" b="1" dirty="0">
+                <a:solidFill>
+                  <a:srgbClr val="1A2430"/>
+                </a:solidFill>
+                <a:latin typeface="IBM Plex Mono" pitchFamily="34" charset="0"/>
+                <a:ea typeface="IBM Plex Mono" pitchFamily="34" charset="-122"/>
+                <a:cs typeface="IBM Plex Mono" pitchFamily="34" charset="-120"/>
+              </a:rPr>
+              <a:t>Q02</a:t>
+            </a:r>
+            <a:endParaRPr lang="en-US" sz="1725" dirty="0"/>
+          </a:p>
+        </p:txBody>
+      </p:sp>
+      <p:sp>
+        <p:nvSpPr>
+          <p:cNvPr id="15" name="Text 13"/>
+          <p:cNvSpPr/>
+          <p:nvPr/>
+        </p:nvSpPr>
+        <p:spPr>
+          <a:xfrm>
+            <a:off x="1638074" y="3636859"/>
+            <a:ext cx="1988691" cy="307648"/>
+          </a:xfrm>
+          <a:prstGeom prst="rect">
+            <a:avLst/>
+          </a:prstGeom>
+          <a:noFill/>
+          <a:ln/>
+        </p:spPr>
+        <p:txBody>
+          <a:bodyPr wrap="square" lIns="25400" tIns="25400" rIns="25400" bIns="25400" rtlCol="0" anchor="t">
+            <a:normAutofit/>
+          </a:bodyPr>
+          <a:lstStyle/>
+          <a:p>
+            <a:pPr algn="l" indent="0" marL="0">
+              <a:buNone/>
+            </a:pPr>
+            <a:r>
+              <a:rPr lang="en-US" sz="1650" dirty="0">
+                <a:solidFill>
+                  <a:srgbClr val="6B655C"/>
+                </a:solidFill>
+                <a:latin typeface="Space Grotesk" pitchFamily="34" charset="0"/>
+                <a:ea typeface="Space Grotesk" pitchFamily="34" charset="-122"/>
+                <a:cs typeface="Space Grotesk" pitchFamily="34" charset="-120"/>
+              </a:rPr>
+              <a:t>League standings</a:t>
+            </a:r>
+            <a:endParaRPr lang="en-US" sz="1650" dirty="0"/>
+          </a:p>
+        </p:txBody>
+      </p:sp>
+      <p:sp>
+        <p:nvSpPr>
+          <p:cNvPr id="16" name="Shape 14"/>
+          <p:cNvSpPr/>
+          <p:nvPr/>
+        </p:nvSpPr>
+        <p:spPr>
+          <a:xfrm>
+            <a:off x="7411889" y="3619469"/>
+            <a:ext cx="17390" cy="438015"/>
+          </a:xfrm>
+          <a:prstGeom prst="rect">
+            <a:avLst/>
+          </a:prstGeom>
+          <a:solidFill>
+            <a:srgbClr val="1A2430"/>
+          </a:solidFill>
+          <a:ln/>
+        </p:spPr>
+      </p:sp>
+      <p:sp>
+        <p:nvSpPr>
+          <p:cNvPr id="17" name="Shape 15"/>
+          <p:cNvSpPr/>
+          <p:nvPr/>
+        </p:nvSpPr>
+        <p:spPr>
+          <a:xfrm>
+            <a:off x="7424927" y="3695551"/>
+            <a:ext cx="169482" cy="285715"/>
+          </a:xfrm>
+          <a:prstGeom prst="rect">
+            <a:avLst/>
+          </a:prstGeom>
+          <a:solidFill>
+            <a:srgbClr val="1E7A52"/>
+          </a:solidFill>
+          <a:ln/>
+        </p:spPr>
+      </p:sp>
+      <p:sp>
+        <p:nvSpPr>
+          <p:cNvPr id="18" name="Text 16"/>
+          <p:cNvSpPr/>
+          <p:nvPr/>
+        </p:nvSpPr>
+        <p:spPr>
+          <a:xfrm>
+            <a:off x="10860144" y="3619469"/>
+            <a:ext cx="6475430" cy="476115"/>
+          </a:xfrm>
+          <a:prstGeom prst="rect">
+            <a:avLst/>
+          </a:prstGeom>
+          <a:noFill/>
+          <a:ln/>
+        </p:spPr>
+        <p:txBody>
+          <a:bodyPr wrap="square" lIns="25400" tIns="25400" rIns="25400" bIns="25400" rtlCol="0" anchor="ctr">
+            <a:normAutofit/>
+          </a:bodyPr>
+          <a:lstStyle/>
+          <a:p>
+            <a:pPr algn="r" indent="0" marL="0">
+              <a:buNone/>
+            </a:pPr>
+            <a:r>
+              <a:rPr lang="en-US" sz="1725" b="1" dirty="0">
+                <a:solidFill>
+                  <a:srgbClr val="33608F"/>
+                </a:solidFill>
+                <a:latin typeface="IBM Plex Mono" pitchFamily="34" charset="0"/>
+                <a:ea typeface="IBM Plex Mono" pitchFamily="34" charset="-122"/>
+                <a:cs typeface="IBM Plex Mono" pitchFamily="34" charset="-120"/>
+              </a:rPr>
+              <a:t>1.24×*</a:t>
+            </a:r>
+            <a:endParaRPr lang="en-US" sz="1725" dirty="0"/>
+          </a:p>
+        </p:txBody>
+      </p:sp>
+      <p:sp>
+        <p:nvSpPr>
+          <p:cNvPr id="19" name="Text 17"/>
+          <p:cNvSpPr/>
+          <p:nvPr/>
+        </p:nvSpPr>
+        <p:spPr>
+          <a:xfrm>
+            <a:off x="952385" y="4057485"/>
+            <a:ext cx="628610" cy="325038"/>
+          </a:xfrm>
+          <a:prstGeom prst="rect">
+            <a:avLst/>
+          </a:prstGeom>
+          <a:noFill/>
+          <a:ln/>
+        </p:spPr>
+        <p:txBody>
+          <a:bodyPr wrap="square" lIns="25400" tIns="25400" rIns="25400" bIns="25400" rtlCol="0" anchor="t">
+            <a:normAutofit/>
+          </a:bodyPr>
+          <a:lstStyle/>
+          <a:p>
+            <a:pPr algn="l" indent="0" marL="0">
+              <a:buNone/>
+            </a:pPr>
+            <a:r>
+              <a:rPr lang="en-US" sz="1725" b="1" dirty="0">
+                <a:solidFill>
+                  <a:srgbClr val="1A2430"/>
+                </a:solidFill>
+                <a:latin typeface="IBM Plex Mono" pitchFamily="34" charset="0"/>
+                <a:ea typeface="IBM Plex Mono" pitchFamily="34" charset="-122"/>
+                <a:cs typeface="IBM Plex Mono" pitchFamily="34" charset="-120"/>
+              </a:rPr>
+              <a:t>Q03</a:t>
+            </a:r>
+            <a:endParaRPr lang="en-US" sz="1725" dirty="0"/>
+          </a:p>
+        </p:txBody>
+      </p:sp>
+      <p:sp>
+        <p:nvSpPr>
+          <p:cNvPr id="20" name="Text 18"/>
+          <p:cNvSpPr/>
+          <p:nvPr/>
+        </p:nvSpPr>
+        <p:spPr>
+          <a:xfrm>
+            <a:off x="1638074" y="4074875"/>
+            <a:ext cx="1798893" cy="307648"/>
+          </a:xfrm>
+          <a:prstGeom prst="rect">
+            <a:avLst/>
+          </a:prstGeom>
+          <a:noFill/>
+          <a:ln/>
+        </p:spPr>
+        <p:txBody>
+          <a:bodyPr wrap="square" lIns="25400" tIns="25400" rIns="25400" bIns="25400" rtlCol="0" anchor="t">
+            <a:normAutofit/>
+          </a:bodyPr>
+          <a:lstStyle/>
+          <a:p>
+            <a:pPr algn="l" indent="0" marL="0">
+              <a:buNone/>
+            </a:pPr>
+            <a:r>
+              <a:rPr lang="en-US" sz="1650" dirty="0">
+                <a:solidFill>
+                  <a:srgbClr val="6B655C"/>
+                </a:solidFill>
+                <a:latin typeface="Space Grotesk" pitchFamily="34" charset="0"/>
+                <a:ea typeface="Space Grotesk" pitchFamily="34" charset="-122"/>
+                <a:cs typeface="Space Grotesk" pitchFamily="34" charset="-120"/>
+              </a:rPr>
+              <a:t>Goals per match</a:t>
+            </a:r>
+            <a:endParaRPr lang="en-US" sz="1650" dirty="0"/>
+          </a:p>
+        </p:txBody>
+      </p:sp>
+      <p:sp>
+        <p:nvSpPr>
+          <p:cNvPr id="21" name="Shape 19"/>
+          <p:cNvSpPr/>
+          <p:nvPr/>
+        </p:nvSpPr>
+        <p:spPr>
+          <a:xfrm>
+            <a:off x="7411889" y="4057485"/>
+            <a:ext cx="17390" cy="438015"/>
+          </a:xfrm>
+          <a:prstGeom prst="rect">
+            <a:avLst/>
+          </a:prstGeom>
+          <a:solidFill>
+            <a:srgbClr val="1A2430"/>
+          </a:solidFill>
+          <a:ln/>
+        </p:spPr>
+      </p:sp>
+      <p:sp>
+        <p:nvSpPr>
+          <p:cNvPr id="22" name="Shape 20"/>
+          <p:cNvSpPr/>
+          <p:nvPr/>
+        </p:nvSpPr>
+        <p:spPr>
+          <a:xfrm>
+            <a:off x="7306055" y="4133567"/>
+            <a:ext cx="109728" cy="285715"/>
           </a:xfrm>
           <a:prstGeom prst="rect">
             <a:avLst/>
@@ -3127,13 +3447,13 @@
       </p:sp>
       <p:sp>
         <p:nvSpPr>
-          <p:cNvPr id="13" name="Text 11"/>
-          <p:cNvSpPr/>
-          <p:nvPr/>
-        </p:nvSpPr>
-        <p:spPr>
-          <a:xfrm>
-            <a:off x="10860144" y="3181454"/>
+          <p:cNvPr id="23" name="Text 21"/>
+          <p:cNvSpPr/>
+          <p:nvPr/>
+        </p:nvSpPr>
+        <p:spPr>
+          <a:xfrm>
+            <a:off x="10860144" y="4057485"/>
             <a:ext cx="6475430" cy="476115"/>
           </a:xfrm>
           <a:prstGeom prst="rect">
@@ -3160,7 +3480,7 @@
                 <a:ea typeface="IBM Plex Mono" pitchFamily="34" charset="-122"/>
                 <a:cs typeface="IBM Plex Mono" pitchFamily="34" charset="-120"/>
               </a:rPr>
-              <a:t>1.23×</a:t>
+              <a:t>1.03×</a:t>
             </a:r>
             <a:endParaRPr lang="en-US" sz="1725" dirty="0"/>
           </a:p>
@@ -3168,13 +3488,13 @@
       </p:sp>
       <p:sp>
         <p:nvSpPr>
-          <p:cNvPr id="14" name="Text 12"/>
-          <p:cNvSpPr/>
-          <p:nvPr/>
-        </p:nvSpPr>
-        <p:spPr>
-          <a:xfrm>
-            <a:off x="952385" y="3619469"/>
+          <p:cNvPr id="24" name="Text 22"/>
+          <p:cNvSpPr/>
+          <p:nvPr/>
+        </p:nvSpPr>
+        <p:spPr>
+          <a:xfrm>
+            <a:off x="952385" y="4495500"/>
             <a:ext cx="628610" cy="325038"/>
           </a:xfrm>
           <a:prstGeom prst="rect">
@@ -3201,7 +3521,7 @@
                 <a:ea typeface="IBM Plex Mono" pitchFamily="34" charset="-122"/>
                 <a:cs typeface="IBM Plex Mono" pitchFamily="34" charset="-120"/>
               </a:rPr>
-              <a:t>Q02</a:t>
+              <a:t>Q04</a:t>
             </a:r>
             <a:endParaRPr lang="en-US" sz="1725" dirty="0"/>
           </a:p>
@@ -3209,14 +3529,14 @@
       </p:sp>
       <p:sp>
         <p:nvSpPr>
-          <p:cNvPr id="15" name="Text 13"/>
-          <p:cNvSpPr/>
-          <p:nvPr/>
-        </p:nvSpPr>
-        <p:spPr>
-          <a:xfrm>
-            <a:off x="1638074" y="3636859"/>
-            <a:ext cx="1988691" cy="307648"/>
+          <p:cNvPr id="25" name="Text 23"/>
+          <p:cNvSpPr/>
+          <p:nvPr/>
+        </p:nvSpPr>
+        <p:spPr>
+          <a:xfrm>
+            <a:off x="1638074" y="4512890"/>
+            <a:ext cx="2283251" cy="307648"/>
           </a:xfrm>
           <a:prstGeom prst="rect">
             <a:avLst/>
@@ -3242,7 +3562,7 @@
                 <a:ea typeface="Space Grotesk" pitchFamily="34" charset="-122"/>
                 <a:cs typeface="Space Grotesk" pitchFamily="34" charset="-120"/>
               </a:rPr>
-              <a:t>League standings</a:t>
+              <a:t>Home win % by team</a:t>
             </a:r>
             <a:endParaRPr lang="en-US" sz="1650" dirty="0"/>
           </a:p>
@@ -3250,13 +3570,13 @@
       </p:sp>
       <p:sp>
         <p:nvSpPr>
-          <p:cNvPr id="16" name="Shape 14"/>
-          <p:cNvSpPr/>
-          <p:nvPr/>
-        </p:nvSpPr>
-        <p:spPr>
-          <a:xfrm>
-            <a:off x="7411889" y="3619469"/>
+          <p:cNvPr id="26" name="Shape 24"/>
+          <p:cNvSpPr/>
+          <p:nvPr/>
+        </p:nvSpPr>
+        <p:spPr>
+          <a:xfrm>
+            <a:off x="7411889" y="4495500"/>
             <a:ext cx="17390" cy="438015"/>
           </a:xfrm>
           <a:prstGeom prst="rect">
@@ -3270,14 +3590,14 @@
       </p:sp>
       <p:sp>
         <p:nvSpPr>
-          <p:cNvPr id="17" name="Shape 15"/>
-          <p:cNvSpPr/>
-          <p:nvPr/>
-        </p:nvSpPr>
-        <p:spPr>
-          <a:xfrm>
-            <a:off x="7278610" y="3695551"/>
-            <a:ext cx="133280" cy="285715"/>
+          <p:cNvPr id="27" name="Shape 25"/>
+          <p:cNvSpPr/>
+          <p:nvPr/>
+        </p:nvSpPr>
+        <p:spPr>
+          <a:xfrm>
+            <a:off x="7272135" y="4571582"/>
+            <a:ext cx="143648" cy="285715"/>
           </a:xfrm>
           <a:prstGeom prst="rect">
             <a:avLst/>
@@ -3290,13 +3610,13 @@
       </p:sp>
       <p:sp>
         <p:nvSpPr>
-          <p:cNvPr id="18" name="Text 16"/>
-          <p:cNvSpPr/>
-          <p:nvPr/>
-        </p:nvSpPr>
-        <p:spPr>
-          <a:xfrm>
-            <a:off x="10860144" y="3619469"/>
+          <p:cNvPr id="28" name="Text 26"/>
+          <p:cNvSpPr/>
+          <p:nvPr/>
+        </p:nvSpPr>
+        <p:spPr>
+          <a:xfrm>
+            <a:off x="10860144" y="4495500"/>
             <a:ext cx="6475430" cy="476115"/>
           </a:xfrm>
           <a:prstGeom prst="rect">
@@ -3323,7 +3643,7 @@
                 <a:ea typeface="IBM Plex Mono" pitchFamily="34" charset="-122"/>
                 <a:cs typeface="IBM Plex Mono" pitchFamily="34" charset="-120"/>
               </a:rPr>
-              <a:t>1.19×*</a:t>
+              <a:t>1.20×*</a:t>
             </a:r>
             <a:endParaRPr lang="en-US" sz="1725" dirty="0"/>
           </a:p>
@@ -3331,13 +3651,13 @@
       </p:sp>
       <p:sp>
         <p:nvSpPr>
-          <p:cNvPr id="19" name="Text 17"/>
-          <p:cNvSpPr/>
-          <p:nvPr/>
-        </p:nvSpPr>
-        <p:spPr>
-          <a:xfrm>
-            <a:off x="952385" y="4057485"/>
+          <p:cNvPr id="29" name="Text 27"/>
+          <p:cNvSpPr/>
+          <p:nvPr/>
+        </p:nvSpPr>
+        <p:spPr>
+          <a:xfrm>
+            <a:off x="952385" y="4933516"/>
             <a:ext cx="628610" cy="325038"/>
           </a:xfrm>
           <a:prstGeom prst="rect">
@@ -3364,7 +3684,7 @@
                 <a:ea typeface="IBM Plex Mono" pitchFamily="34" charset="-122"/>
                 <a:cs typeface="IBM Plex Mono" pitchFamily="34" charset="-120"/>
               </a:rPr>
-              <a:t>Q03</a:t>
+              <a:t>Q05</a:t>
             </a:r>
             <a:endParaRPr lang="en-US" sz="1725" dirty="0"/>
           </a:p>
@@ -3372,14 +3692,14 @@
       </p:sp>
       <p:sp>
         <p:nvSpPr>
-          <p:cNvPr id="20" name="Text 18"/>
-          <p:cNvSpPr/>
-          <p:nvPr/>
-        </p:nvSpPr>
-        <p:spPr>
-          <a:xfrm>
-            <a:off x="1638074" y="4074875"/>
-            <a:ext cx="1798893" cy="307648"/>
+          <p:cNvPr id="30" name="Text 28"/>
+          <p:cNvSpPr/>
+          <p:nvPr/>
+        </p:nvSpPr>
+        <p:spPr>
+          <a:xfrm>
+            <a:off x="1638074" y="4950906"/>
+            <a:ext cx="2304920" cy="307648"/>
           </a:xfrm>
           <a:prstGeom prst="rect">
             <a:avLst/>
@@ -3405,7 +3725,7 @@
                 <a:ea typeface="Space Grotesk" pitchFamily="34" charset="-122"/>
                 <a:cs typeface="Space Grotesk" pitchFamily="34" charset="-120"/>
               </a:rPr>
-              <a:t>Goals per match</a:t>
+              <a:t>Goal-assist partnerships</a:t>
             </a:r>
             <a:endParaRPr lang="en-US" sz="1650" dirty="0"/>
           </a:p>
@@ -3413,13 +3733,13 @@
       </p:sp>
       <p:sp>
         <p:nvSpPr>
-          <p:cNvPr id="21" name="Shape 19"/>
-          <p:cNvSpPr/>
-          <p:nvPr/>
-        </p:nvSpPr>
-        <p:spPr>
-          <a:xfrm>
-            <a:off x="7411889" y="4057485"/>
+          <p:cNvPr id="31" name="Shape 29"/>
+          <p:cNvSpPr/>
+          <p:nvPr/>
+        </p:nvSpPr>
+        <p:spPr>
+          <a:xfrm>
+            <a:off x="7411889" y="4933516"/>
             <a:ext cx="17390" cy="438015"/>
           </a:xfrm>
           <a:prstGeom prst="rect">
@@ -3433,14 +3753,666 @@
       </p:sp>
       <p:sp>
         <p:nvSpPr>
-          <p:cNvPr id="22" name="Shape 20"/>
-          <p:cNvSpPr/>
-          <p:nvPr/>
-        </p:nvSpPr>
-        <p:spPr>
-          <a:xfrm>
-            <a:off x="6821438" y="4133567"/>
-            <a:ext cx="590451" cy="285715"/>
+          <p:cNvPr id="32" name="Shape 30"/>
+          <p:cNvSpPr/>
+          <p:nvPr/>
+        </p:nvSpPr>
+        <p:spPr>
+          <a:xfrm>
+            <a:off x="7424927" y="5009598"/>
+            <a:ext cx="200628" cy="285715"/>
+          </a:xfrm>
+          <a:prstGeom prst="rect">
+            <a:avLst/>
+          </a:prstGeom>
+          <a:solidFill>
+            <a:srgbClr val="1E7A52"/>
+          </a:solidFill>
+          <a:ln/>
+        </p:spPr>
+      </p:sp>
+      <p:sp>
+        <p:nvSpPr>
+          <p:cNvPr id="33" name="Text 31"/>
+          <p:cNvSpPr/>
+          <p:nvPr/>
+        </p:nvSpPr>
+        <p:spPr>
+          <a:xfrm>
+            <a:off x="10860144" y="4933516"/>
+            <a:ext cx="6475430" cy="476115"/>
+          </a:xfrm>
+          <a:prstGeom prst="rect">
+            <a:avLst/>
+          </a:prstGeom>
+          <a:noFill/>
+          <a:ln/>
+        </p:spPr>
+        <p:txBody>
+          <a:bodyPr wrap="square" lIns="25400" tIns="25400" rIns="25400" bIns="25400" rtlCol="0" anchor="ctr">
+            <a:normAutofit/>
+          </a:bodyPr>
+          <a:lstStyle/>
+          <a:p>
+            <a:pPr algn="r" indent="0" marL="0">
+              <a:buNone/>
+            </a:pPr>
+            <a:r>
+              <a:rPr lang="en-US" sz="1725" b="1" dirty="0">
+                <a:solidFill>
+                  <a:srgbClr val="1E7A52"/>
+                </a:solidFill>
+                <a:latin typeface="IBM Plex Mono" pitchFamily="34" charset="0"/>
+                <a:ea typeface="IBM Plex Mono" pitchFamily="34" charset="-122"/>
+                <a:cs typeface="IBM Plex Mono" pitchFamily="34" charset="-120"/>
+              </a:rPr>
+              <a:t>1.29×*</a:t>
+            </a:r>
+            <a:endParaRPr lang="en-US" sz="1725" dirty="0"/>
+          </a:p>
+        </p:txBody>
+      </p:sp>
+      <p:sp>
+        <p:nvSpPr>
+          <p:cNvPr id="34" name="Text 32"/>
+          <p:cNvSpPr/>
+          <p:nvPr/>
+        </p:nvSpPr>
+        <p:spPr>
+          <a:xfrm>
+            <a:off x="952385" y="5371531"/>
+            <a:ext cx="628610" cy="325038"/>
+          </a:xfrm>
+          <a:prstGeom prst="rect">
+            <a:avLst/>
+          </a:prstGeom>
+          <a:noFill/>
+          <a:ln/>
+        </p:spPr>
+        <p:txBody>
+          <a:bodyPr wrap="square" lIns="25400" tIns="25400" rIns="25400" bIns="25400" rtlCol="0" anchor="t">
+            <a:normAutofit/>
+          </a:bodyPr>
+          <a:lstStyle/>
+          <a:p>
+            <a:pPr algn="l" indent="0" marL="0">
+              <a:buNone/>
+            </a:pPr>
+            <a:r>
+              <a:rPr lang="en-US" sz="1725" b="1" dirty="0">
+                <a:solidFill>
+                  <a:srgbClr val="1A2430"/>
+                </a:solidFill>
+                <a:latin typeface="IBM Plex Mono" pitchFamily="34" charset="0"/>
+                <a:ea typeface="IBM Plex Mono" pitchFamily="34" charset="-122"/>
+                <a:cs typeface="IBM Plex Mono" pitchFamily="34" charset="-120"/>
+              </a:rPr>
+              <a:t>Q06</a:t>
+            </a:r>
+            <a:endParaRPr lang="en-US" sz="1725" dirty="0"/>
+          </a:p>
+        </p:txBody>
+      </p:sp>
+      <p:sp>
+        <p:nvSpPr>
+          <p:cNvPr id="35" name="Text 33"/>
+          <p:cNvSpPr/>
+          <p:nvPr/>
+        </p:nvSpPr>
+        <p:spPr>
+          <a:xfrm>
+            <a:off x="1638074" y="5388921"/>
+            <a:ext cx="2291918" cy="307648"/>
+          </a:xfrm>
+          <a:prstGeom prst="rect">
+            <a:avLst/>
+          </a:prstGeom>
+          <a:noFill/>
+          <a:ln/>
+        </p:spPr>
+        <p:txBody>
+          <a:bodyPr wrap="square" lIns="25400" tIns="25400" rIns="25400" bIns="25400" rtlCol="0" anchor="t">
+            <a:normAutofit/>
+          </a:bodyPr>
+          <a:lstStyle/>
+          <a:p>
+            <a:pPr algn="l" indent="0" marL="0">
+              <a:buNone/>
+            </a:pPr>
+            <a:r>
+              <a:rPr lang="en-US" sz="1650" dirty="0">
+                <a:solidFill>
+                  <a:srgbClr val="6B655C"/>
+                </a:solidFill>
+                <a:latin typeface="Space Grotesk" pitchFamily="34" charset="0"/>
+                <a:ea typeface="Space Grotesk" pitchFamily="34" charset="-122"/>
+                <a:cs typeface="Space Grotesk" pitchFamily="34" charset="-120"/>
+              </a:rPr>
+              <a:t>Cards vs Real Madrid</a:t>
+            </a:r>
+            <a:endParaRPr lang="en-US" sz="1650" dirty="0"/>
+          </a:p>
+        </p:txBody>
+      </p:sp>
+      <p:sp>
+        <p:nvSpPr>
+          <p:cNvPr id="36" name="Shape 34"/>
+          <p:cNvSpPr/>
+          <p:nvPr/>
+        </p:nvSpPr>
+        <p:spPr>
+          <a:xfrm>
+            <a:off x="7411889" y="5371531"/>
+            <a:ext cx="17390" cy="438015"/>
+          </a:xfrm>
+          <a:prstGeom prst="rect">
+            <a:avLst/>
+          </a:prstGeom>
+          <a:solidFill>
+            <a:srgbClr val="1A2430"/>
+          </a:solidFill>
+          <a:ln/>
+        </p:spPr>
+      </p:sp>
+      <p:sp>
+        <p:nvSpPr>
+          <p:cNvPr id="37" name="Shape 35"/>
+          <p:cNvSpPr/>
+          <p:nvPr/>
+        </p:nvSpPr>
+        <p:spPr>
+          <a:xfrm>
+            <a:off x="7424927" y="5447613"/>
+            <a:ext cx="1017933" cy="285715"/>
+          </a:xfrm>
+          <a:prstGeom prst="rect">
+            <a:avLst/>
+          </a:prstGeom>
+          <a:solidFill>
+            <a:srgbClr val="1E7A52"/>
+          </a:solidFill>
+          <a:ln/>
+        </p:spPr>
+      </p:sp>
+      <p:sp>
+        <p:nvSpPr>
+          <p:cNvPr id="38" name="Text 36"/>
+          <p:cNvSpPr/>
+          <p:nvPr/>
+        </p:nvSpPr>
+        <p:spPr>
+          <a:xfrm>
+            <a:off x="10860144" y="5371531"/>
+            <a:ext cx="6475430" cy="476115"/>
+          </a:xfrm>
+          <a:prstGeom prst="rect">
+            <a:avLst/>
+          </a:prstGeom>
+          <a:noFill/>
+          <a:ln/>
+        </p:spPr>
+        <p:txBody>
+          <a:bodyPr wrap="square" lIns="25400" tIns="25400" rIns="25400" bIns="25400" rtlCol="0" anchor="ctr">
+            <a:normAutofit/>
+          </a:bodyPr>
+          <a:lstStyle/>
+          <a:p>
+            <a:pPr algn="r" indent="0" marL="0">
+              <a:buNone/>
+            </a:pPr>
+            <a:r>
+              <a:rPr lang="en-US" sz="1725" b="1" dirty="0">
+                <a:solidFill>
+                  <a:srgbClr val="1E7A52"/>
+                </a:solidFill>
+                <a:latin typeface="IBM Plex Mono" pitchFamily="34" charset="0"/>
+                <a:ea typeface="IBM Plex Mono" pitchFamily="34" charset="-122"/>
+                <a:cs typeface="IBM Plex Mono" pitchFamily="34" charset="-120"/>
+              </a:rPr>
+              <a:t>3.64×*</a:t>
+            </a:r>
+            <a:endParaRPr lang="en-US" sz="1725" dirty="0"/>
+          </a:p>
+        </p:txBody>
+      </p:sp>
+      <p:sp>
+        <p:nvSpPr>
+          <p:cNvPr id="39" name="Text 37"/>
+          <p:cNvSpPr/>
+          <p:nvPr/>
+        </p:nvSpPr>
+        <p:spPr>
+          <a:xfrm>
+            <a:off x="952385" y="5809547"/>
+            <a:ext cx="628610" cy="325038"/>
+          </a:xfrm>
+          <a:prstGeom prst="rect">
+            <a:avLst/>
+          </a:prstGeom>
+          <a:noFill/>
+          <a:ln/>
+        </p:spPr>
+        <p:txBody>
+          <a:bodyPr wrap="square" lIns="25400" tIns="25400" rIns="25400" bIns="25400" rtlCol="0" anchor="t">
+            <a:normAutofit/>
+          </a:bodyPr>
+          <a:lstStyle/>
+          <a:p>
+            <a:pPr algn="l" indent="0" marL="0">
+              <a:buNone/>
+            </a:pPr>
+            <a:r>
+              <a:rPr lang="en-US" sz="1725" b="1" dirty="0">
+                <a:solidFill>
+                  <a:srgbClr val="1A2430"/>
+                </a:solidFill>
+                <a:latin typeface="IBM Plex Mono" pitchFamily="34" charset="0"/>
+                <a:ea typeface="IBM Plex Mono" pitchFamily="34" charset="-122"/>
+                <a:cs typeface="IBM Plex Mono" pitchFamily="34" charset="-120"/>
+              </a:rPr>
+              <a:t>Q07</a:t>
+            </a:r>
+            <a:endParaRPr lang="en-US" sz="1725" dirty="0"/>
+          </a:p>
+        </p:txBody>
+      </p:sp>
+      <p:sp>
+        <p:nvSpPr>
+          <p:cNvPr id="40" name="Text 38"/>
+          <p:cNvSpPr/>
+          <p:nvPr/>
+        </p:nvSpPr>
+        <p:spPr>
+          <a:xfrm>
+            <a:off x="1638074" y="5826937"/>
+            <a:ext cx="2304920" cy="307648"/>
+          </a:xfrm>
+          <a:prstGeom prst="rect">
+            <a:avLst/>
+          </a:prstGeom>
+          <a:noFill/>
+          <a:ln/>
+        </p:spPr>
+        <p:txBody>
+          <a:bodyPr wrap="square" lIns="25400" tIns="25400" rIns="25400" bIns="25400" rtlCol="0" anchor="t">
+            <a:normAutofit/>
+          </a:bodyPr>
+          <a:lstStyle/>
+          <a:p>
+            <a:pPr algn="l" indent="0" marL="0">
+              <a:buNone/>
+            </a:pPr>
+            <a:r>
+              <a:rPr lang="en-US" sz="1650" dirty="0">
+                <a:solidFill>
+                  <a:srgbClr val="6B655C"/>
+                </a:solidFill>
+                <a:latin typeface="Space Grotesk" pitchFamily="34" charset="0"/>
+                <a:ea typeface="Space Grotesk" pitchFamily="34" charset="-122"/>
+                <a:cs typeface="Space Grotesk" pitchFamily="34" charset="-120"/>
+              </a:rPr>
+              <a:t>Players in all 8 seasons</a:t>
+            </a:r>
+            <a:endParaRPr lang="en-US" sz="1650" dirty="0"/>
+          </a:p>
+        </p:txBody>
+      </p:sp>
+      <p:sp>
+        <p:nvSpPr>
+          <p:cNvPr id="41" name="Shape 39"/>
+          <p:cNvSpPr/>
+          <p:nvPr/>
+        </p:nvSpPr>
+        <p:spPr>
+          <a:xfrm>
+            <a:off x="7411889" y="5809547"/>
+            <a:ext cx="17390" cy="438015"/>
+          </a:xfrm>
+          <a:prstGeom prst="rect">
+            <a:avLst/>
+          </a:prstGeom>
+          <a:solidFill>
+            <a:srgbClr val="1A2430"/>
+          </a:solidFill>
+          <a:ln/>
+        </p:spPr>
+      </p:sp>
+      <p:sp>
+        <p:nvSpPr>
+          <p:cNvPr id="42" name="Shape 40"/>
+          <p:cNvSpPr/>
+          <p:nvPr/>
+        </p:nvSpPr>
+        <p:spPr>
+          <a:xfrm>
+            <a:off x="7424927" y="5885629"/>
+            <a:ext cx="509842" cy="285715"/>
+          </a:xfrm>
+          <a:prstGeom prst="rect">
+            <a:avLst/>
+          </a:prstGeom>
+          <a:solidFill>
+            <a:srgbClr val="1E7A52"/>
+          </a:solidFill>
+          <a:ln/>
+        </p:spPr>
+      </p:sp>
+      <p:sp>
+        <p:nvSpPr>
+          <p:cNvPr id="43" name="Text 41"/>
+          <p:cNvSpPr/>
+          <p:nvPr/>
+        </p:nvSpPr>
+        <p:spPr>
+          <a:xfrm>
+            <a:off x="10860144" y="5809547"/>
+            <a:ext cx="6475430" cy="476115"/>
+          </a:xfrm>
+          <a:prstGeom prst="rect">
+            <a:avLst/>
+          </a:prstGeom>
+          <a:noFill/>
+          <a:ln/>
+        </p:spPr>
+        <p:txBody>
+          <a:bodyPr wrap="square" lIns="25400" tIns="25400" rIns="25400" bIns="25400" rtlCol="0" anchor="ctr">
+            <a:normAutofit/>
+          </a:bodyPr>
+          <a:lstStyle/>
+          <a:p>
+            <a:pPr algn="r" indent="0" marL="0">
+              <a:buNone/>
+            </a:pPr>
+            <a:r>
+              <a:rPr lang="en-US" sz="1725" b="1" dirty="0">
+                <a:solidFill>
+                  <a:srgbClr val="1E7A52"/>
+                </a:solidFill>
+                <a:latin typeface="IBM Plex Mono" pitchFamily="34" charset="0"/>
+                <a:ea typeface="IBM Plex Mono" pitchFamily="34" charset="-122"/>
+                <a:cs typeface="IBM Plex Mono" pitchFamily="34" charset="-120"/>
+              </a:rPr>
+              <a:t>1.91×*</a:t>
+            </a:r>
+            <a:endParaRPr lang="en-US" sz="1725" dirty="0"/>
+          </a:p>
+        </p:txBody>
+      </p:sp>
+      <p:sp>
+        <p:nvSpPr>
+          <p:cNvPr id="44" name="Text 42"/>
+          <p:cNvSpPr/>
+          <p:nvPr/>
+        </p:nvSpPr>
+        <p:spPr>
+          <a:xfrm>
+            <a:off x="952385" y="6247562"/>
+            <a:ext cx="628610" cy="325038"/>
+          </a:xfrm>
+          <a:prstGeom prst="rect">
+            <a:avLst/>
+          </a:prstGeom>
+          <a:noFill/>
+          <a:ln/>
+        </p:spPr>
+        <p:txBody>
+          <a:bodyPr wrap="square" lIns="25400" tIns="25400" rIns="25400" bIns="25400" rtlCol="0" anchor="t">
+            <a:normAutofit/>
+          </a:bodyPr>
+          <a:lstStyle/>
+          <a:p>
+            <a:pPr algn="l" indent="0" marL="0">
+              <a:buNone/>
+            </a:pPr>
+            <a:r>
+              <a:rPr lang="en-US" sz="1725" b="1" dirty="0">
+                <a:solidFill>
+                  <a:srgbClr val="1A2430"/>
+                </a:solidFill>
+                <a:latin typeface="IBM Plex Mono" pitchFamily="34" charset="0"/>
+                <a:ea typeface="IBM Plex Mono" pitchFamily="34" charset="-122"/>
+                <a:cs typeface="IBM Plex Mono" pitchFamily="34" charset="-120"/>
+              </a:rPr>
+              <a:t>Q08</a:t>
+            </a:r>
+            <a:endParaRPr lang="en-US" sz="1725" dirty="0"/>
+          </a:p>
+        </p:txBody>
+      </p:sp>
+      <p:sp>
+        <p:nvSpPr>
+          <p:cNvPr id="45" name="Text 43"/>
+          <p:cNvSpPr/>
+          <p:nvPr/>
+        </p:nvSpPr>
+        <p:spPr>
+          <a:xfrm>
+            <a:off x="1638074" y="6264952"/>
+            <a:ext cx="2255154" cy="307648"/>
+          </a:xfrm>
+          <a:prstGeom prst="rect">
+            <a:avLst/>
+          </a:prstGeom>
+          <a:noFill/>
+          <a:ln/>
+        </p:spPr>
+        <p:txBody>
+          <a:bodyPr wrap="square" lIns="25400" tIns="25400" rIns="25400" bIns="25400" rtlCol="0" anchor="t">
+            <a:normAutofit/>
+          </a:bodyPr>
+          <a:lstStyle/>
+          <a:p>
+            <a:pPr algn="l" indent="0" marL="0">
+              <a:buNone/>
+            </a:pPr>
+            <a:r>
+              <a:rPr lang="en-US" sz="1650" dirty="0">
+                <a:solidFill>
+                  <a:srgbClr val="6B655C"/>
+                </a:solidFill>
+                <a:latin typeface="Space Grotesk" pitchFamily="34" charset="0"/>
+                <a:ea typeface="Space Grotesk" pitchFamily="34" charset="-122"/>
+                <a:cs typeface="Space Grotesk" pitchFamily="34" charset="-120"/>
+              </a:rPr>
+              <a:t>Teammates of Messi</a:t>
+            </a:r>
+            <a:endParaRPr lang="en-US" sz="1650" dirty="0"/>
+          </a:p>
+        </p:txBody>
+      </p:sp>
+      <p:sp>
+        <p:nvSpPr>
+          <p:cNvPr id="46" name="Shape 44"/>
+          <p:cNvSpPr/>
+          <p:nvPr/>
+        </p:nvSpPr>
+        <p:spPr>
+          <a:xfrm>
+            <a:off x="7411889" y="6247562"/>
+            <a:ext cx="17390" cy="438015"/>
+          </a:xfrm>
+          <a:prstGeom prst="rect">
+            <a:avLst/>
+          </a:prstGeom>
+          <a:solidFill>
+            <a:srgbClr val="1A2430"/>
+          </a:solidFill>
+          <a:ln/>
+        </p:spPr>
+      </p:sp>
+      <p:sp>
+        <p:nvSpPr>
+          <p:cNvPr id="47" name="Shape 45"/>
+          <p:cNvSpPr/>
+          <p:nvPr/>
+        </p:nvSpPr>
+        <p:spPr>
+          <a:xfrm>
+            <a:off x="7424927" y="6323644"/>
+            <a:ext cx="770807" cy="285715"/>
+          </a:xfrm>
+          <a:prstGeom prst="rect">
+            <a:avLst/>
+          </a:prstGeom>
+          <a:solidFill>
+            <a:srgbClr val="1E7A52"/>
+          </a:solidFill>
+          <a:ln/>
+        </p:spPr>
+      </p:sp>
+      <p:sp>
+        <p:nvSpPr>
+          <p:cNvPr id="48" name="Text 46"/>
+          <p:cNvSpPr/>
+          <p:nvPr/>
+        </p:nvSpPr>
+        <p:spPr>
+          <a:xfrm>
+            <a:off x="10860144" y="6247562"/>
+            <a:ext cx="6475430" cy="476115"/>
+          </a:xfrm>
+          <a:prstGeom prst="rect">
+            <a:avLst/>
+          </a:prstGeom>
+          <a:noFill/>
+          <a:ln/>
+        </p:spPr>
+        <p:txBody>
+          <a:bodyPr wrap="square" lIns="25400" tIns="25400" rIns="25400" bIns="25400" rtlCol="0" anchor="ctr">
+            <a:normAutofit/>
+          </a:bodyPr>
+          <a:lstStyle/>
+          <a:p>
+            <a:pPr algn="r" indent="0" marL="0">
+              <a:buNone/>
+            </a:pPr>
+            <a:r>
+              <a:rPr lang="en-US" sz="1725" b="1" dirty="0">
+                <a:solidFill>
+                  <a:srgbClr val="1E7A52"/>
+                </a:solidFill>
+                <a:latin typeface="IBM Plex Mono" pitchFamily="34" charset="0"/>
+                <a:ea typeface="IBM Plex Mono" pitchFamily="34" charset="-122"/>
+                <a:cs typeface="IBM Plex Mono" pitchFamily="34" charset="-120"/>
+              </a:rPr>
+              <a:t>2.66×*</a:t>
+            </a:r>
+            <a:endParaRPr lang="en-US" sz="1725" dirty="0"/>
+          </a:p>
+        </p:txBody>
+      </p:sp>
+      <p:sp>
+        <p:nvSpPr>
+          <p:cNvPr id="49" name="Text 47"/>
+          <p:cNvSpPr/>
+          <p:nvPr/>
+        </p:nvSpPr>
+        <p:spPr>
+          <a:xfrm>
+            <a:off x="952385" y="6685577"/>
+            <a:ext cx="628610" cy="325038"/>
+          </a:xfrm>
+          <a:prstGeom prst="rect">
+            <a:avLst/>
+          </a:prstGeom>
+          <a:noFill/>
+          <a:ln/>
+        </p:spPr>
+        <p:txBody>
+          <a:bodyPr wrap="square" lIns="25400" tIns="25400" rIns="25400" bIns="25400" rtlCol="0" anchor="t">
+            <a:normAutofit/>
+          </a:bodyPr>
+          <a:lstStyle/>
+          <a:p>
+            <a:pPr algn="l" indent="0" marL="0">
+              <a:buNone/>
+            </a:pPr>
+            <a:r>
+              <a:rPr lang="en-US" sz="1725" b="1" dirty="0">
+                <a:solidFill>
+                  <a:srgbClr val="1A2430"/>
+                </a:solidFill>
+                <a:latin typeface="IBM Plex Mono" pitchFamily="34" charset="0"/>
+                <a:ea typeface="IBM Plex Mono" pitchFamily="34" charset="-122"/>
+                <a:cs typeface="IBM Plex Mono" pitchFamily="34" charset="-120"/>
+              </a:rPr>
+              <a:t>Q09</a:t>
+            </a:r>
+            <a:endParaRPr lang="en-US" sz="1725" dirty="0"/>
+          </a:p>
+        </p:txBody>
+      </p:sp>
+      <p:sp>
+        <p:nvSpPr>
+          <p:cNvPr id="50" name="Text 48"/>
+          <p:cNvSpPr/>
+          <p:nvPr/>
+        </p:nvSpPr>
+        <p:spPr>
+          <a:xfrm>
+            <a:off x="1638074" y="6702968"/>
+            <a:ext cx="1985403" cy="307648"/>
+          </a:xfrm>
+          <a:prstGeom prst="rect">
+            <a:avLst/>
+          </a:prstGeom>
+          <a:noFill/>
+          <a:ln/>
+        </p:spPr>
+        <p:txBody>
+          <a:bodyPr wrap="square" lIns="25400" tIns="25400" rIns="25400" bIns="25400" rtlCol="0" anchor="t">
+            <a:normAutofit/>
+          </a:bodyPr>
+          <a:lstStyle/>
+          <a:p>
+            <a:pPr algn="l" indent="0" marL="0">
+              <a:buNone/>
+            </a:pPr>
+            <a:r>
+              <a:rPr lang="en-US" sz="1650" dirty="0">
+                <a:solidFill>
+                  <a:srgbClr val="6B655C"/>
+                </a:solidFill>
+                <a:latin typeface="Space Grotesk" pitchFamily="34" charset="0"/>
+                <a:ea typeface="Space Grotesk" pitchFamily="34" charset="-122"/>
+                <a:cs typeface="Space Grotesk" pitchFamily="34" charset="-120"/>
+              </a:rPr>
+              <a:t>2-hop teammates</a:t>
+            </a:r>
+            <a:endParaRPr lang="en-US" sz="1650" dirty="0"/>
+          </a:p>
+        </p:txBody>
+      </p:sp>
+      <p:sp>
+        <p:nvSpPr>
+          <p:cNvPr id="51" name="Shape 49"/>
+          <p:cNvSpPr/>
+          <p:nvPr/>
+        </p:nvSpPr>
+        <p:spPr>
+          <a:xfrm>
+            <a:off x="7411889" y="6685577"/>
+            <a:ext cx="17390" cy="438015"/>
+          </a:xfrm>
+          <a:prstGeom prst="rect">
+            <a:avLst/>
+          </a:prstGeom>
+          <a:solidFill>
+            <a:srgbClr val="1A2430"/>
+          </a:solidFill>
+          <a:ln/>
+        </p:spPr>
+      </p:sp>
+      <p:sp>
+        <p:nvSpPr>
+          <p:cNvPr id="52" name="Shape 50"/>
+          <p:cNvSpPr/>
+          <p:nvPr/>
+        </p:nvSpPr>
+        <p:spPr>
+          <a:xfrm>
+            <a:off x="6834984" y="6761659"/>
+            <a:ext cx="580799" cy="285715"/>
           </a:xfrm>
           <a:prstGeom prst="rect">
             <a:avLst/>
@@ -3453,13 +4425,13 @@
       </p:sp>
       <p:sp>
         <p:nvSpPr>
-          <p:cNvPr id="23" name="Text 21"/>
-          <p:cNvSpPr/>
-          <p:nvPr/>
-        </p:nvSpPr>
-        <p:spPr>
-          <a:xfrm>
-            <a:off x="10860144" y="4057485"/>
+          <p:cNvPr id="53" name="Text 51"/>
+          <p:cNvSpPr/>
+          <p:nvPr/>
+        </p:nvSpPr>
+        <p:spPr>
+          <a:xfrm>
+            <a:off x="10860144" y="6685577"/>
             <a:ext cx="6475430" cy="476115"/>
           </a:xfrm>
           <a:prstGeom prst="rect">
@@ -3486,7 +4458,7 @@
                 <a:ea typeface="IBM Plex Mono" pitchFamily="34" charset="-122"/>
                 <a:cs typeface="IBM Plex Mono" pitchFamily="34" charset="-120"/>
               </a:rPr>
-              <a:t>2.11×*</a:t>
+              <a:t>2.09×*</a:t>
             </a:r>
             <a:endParaRPr lang="en-US" sz="1725" dirty="0"/>
           </a:p>
@@ -3494,13 +4466,13 @@
       </p:sp>
       <p:sp>
         <p:nvSpPr>
-          <p:cNvPr id="24" name="Text 22"/>
-          <p:cNvSpPr/>
-          <p:nvPr/>
-        </p:nvSpPr>
-        <p:spPr>
-          <a:xfrm>
-            <a:off x="952385" y="4495500"/>
+          <p:cNvPr id="54" name="Text 52"/>
+          <p:cNvSpPr/>
+          <p:nvPr/>
+        </p:nvSpPr>
+        <p:spPr>
+          <a:xfrm>
+            <a:off x="952385" y="7123593"/>
             <a:ext cx="628610" cy="325038"/>
           </a:xfrm>
           <a:prstGeom prst="rect">
@@ -3527,7 +4499,7 @@
                 <a:ea typeface="IBM Plex Mono" pitchFamily="34" charset="-122"/>
                 <a:cs typeface="IBM Plex Mono" pitchFamily="34" charset="-120"/>
               </a:rPr>
-              <a:t>Q04</a:t>
+              <a:t>Q10</a:t>
             </a:r>
             <a:endParaRPr lang="en-US" sz="1725" dirty="0"/>
           </a:p>
@@ -3535,14 +4507,14 @@
       </p:sp>
       <p:sp>
         <p:nvSpPr>
-          <p:cNvPr id="25" name="Text 23"/>
-          <p:cNvSpPr/>
-          <p:nvPr/>
-        </p:nvSpPr>
-        <p:spPr>
-          <a:xfrm>
-            <a:off x="1638074" y="4512890"/>
-            <a:ext cx="2283251" cy="307648"/>
+          <p:cNvPr id="55" name="Text 53"/>
+          <p:cNvSpPr/>
+          <p:nvPr/>
+        </p:nvSpPr>
+        <p:spPr>
+          <a:xfrm>
+            <a:off x="1638074" y="7140983"/>
+            <a:ext cx="2304920" cy="307648"/>
           </a:xfrm>
           <a:prstGeom prst="rect">
             <a:avLst/>
@@ -3568,7 +4540,7 @@
                 <a:ea typeface="Space Grotesk" pitchFamily="34" charset="-122"/>
                 <a:cs typeface="Space Grotesk" pitchFamily="34" charset="-120"/>
               </a:rPr>
-              <a:t>Home win % by team</a:t>
+              <a:t>Shortest path Messi→Pirlo</a:t>
             </a:r>
             <a:endParaRPr lang="en-US" sz="1650" dirty="0"/>
           </a:p>
@@ -3576,13 +4548,13 @@
       </p:sp>
       <p:sp>
         <p:nvSpPr>
-          <p:cNvPr id="26" name="Shape 24"/>
-          <p:cNvSpPr/>
-          <p:nvPr/>
-        </p:nvSpPr>
-        <p:spPr>
-          <a:xfrm>
-            <a:off x="7411889" y="4495500"/>
+          <p:cNvPr id="56" name="Shape 54"/>
+          <p:cNvSpPr/>
+          <p:nvPr/>
+        </p:nvSpPr>
+        <p:spPr>
+          <a:xfrm>
+            <a:off x="7411889" y="7123593"/>
             <a:ext cx="17390" cy="438015"/>
           </a:xfrm>
           <a:prstGeom prst="rect">
@@ -3596,33 +4568,33 @@
       </p:sp>
       <p:sp>
         <p:nvSpPr>
-          <p:cNvPr id="27" name="Shape 25"/>
-          <p:cNvSpPr/>
-          <p:nvPr/>
-        </p:nvSpPr>
-        <p:spPr>
-          <a:xfrm>
-            <a:off x="7278610" y="4571582"/>
-            <a:ext cx="133280" cy="285715"/>
+          <p:cNvPr id="57" name="Shape 55"/>
+          <p:cNvSpPr/>
+          <p:nvPr/>
+        </p:nvSpPr>
+        <p:spPr>
+          <a:xfrm>
+            <a:off x="7424927" y="7199674"/>
+            <a:ext cx="3181297" cy="285715"/>
           </a:xfrm>
           <a:prstGeom prst="rect">
             <a:avLst/>
           </a:prstGeom>
           <a:solidFill>
-            <a:srgbClr val="33608F"/>
+            <a:srgbClr val="1E7A52"/>
           </a:solidFill>
           <a:ln/>
         </p:spPr>
       </p:sp>
       <p:sp>
         <p:nvSpPr>
-          <p:cNvPr id="28" name="Text 26"/>
-          <p:cNvSpPr/>
-          <p:nvPr/>
-        </p:nvSpPr>
-        <p:spPr>
-          <a:xfrm>
-            <a:off x="10860144" y="4495500"/>
+          <p:cNvPr id="58" name="Text 56"/>
+          <p:cNvSpPr/>
+          <p:nvPr/>
+        </p:nvSpPr>
+        <p:spPr>
+          <a:xfrm>
+            <a:off x="10860144" y="7123593"/>
             <a:ext cx="6475430" cy="476115"/>
           </a:xfrm>
           <a:prstGeom prst="rect">
@@ -3643,13 +4615,13 @@
             <a:r>
               <a:rPr lang="en-US" sz="1725" b="1" dirty="0">
                 <a:solidFill>
-                  <a:srgbClr val="33608F"/>
+                  <a:srgbClr val="1E7A52"/>
                 </a:solidFill>
                 <a:latin typeface="IBM Plex Mono" pitchFamily="34" charset="0"/>
                 <a:ea typeface="IBM Plex Mono" pitchFamily="34" charset="-122"/>
                 <a:cs typeface="IBM Plex Mono" pitchFamily="34" charset="-120"/>
               </a:rPr>
-              <a:t>1.18×*</a:t>
+              <a:t>56.7×*</a:t>
             </a:r>
             <a:endParaRPr lang="en-US" sz="1725" dirty="0"/>
           </a:p>
@@ -3657,13 +4629,13 @@
       </p:sp>
       <p:sp>
         <p:nvSpPr>
-          <p:cNvPr id="29" name="Text 27"/>
-          <p:cNvSpPr/>
-          <p:nvPr/>
-        </p:nvSpPr>
-        <p:spPr>
-          <a:xfrm>
-            <a:off x="952385" y="4933516"/>
+          <p:cNvPr id="59" name="Text 57"/>
+          <p:cNvSpPr/>
+          <p:nvPr/>
+        </p:nvSpPr>
+        <p:spPr>
+          <a:xfrm>
+            <a:off x="952385" y="7561608"/>
             <a:ext cx="628610" cy="325038"/>
           </a:xfrm>
           <a:prstGeom prst="rect">
@@ -3690,7 +4662,7 @@
                 <a:ea typeface="IBM Plex Mono" pitchFamily="34" charset="-122"/>
                 <a:cs typeface="IBM Plex Mono" pitchFamily="34" charset="-120"/>
               </a:rPr>
-              <a:t>Q05</a:t>
+              <a:t>Q11</a:t>
             </a:r>
             <a:endParaRPr lang="en-US" sz="1725" dirty="0"/>
           </a:p>
@@ -3698,14 +4670,14 @@
       </p:sp>
       <p:sp>
         <p:nvSpPr>
-          <p:cNvPr id="30" name="Text 28"/>
-          <p:cNvSpPr/>
-          <p:nvPr/>
-        </p:nvSpPr>
-        <p:spPr>
-          <a:xfrm>
-            <a:off x="1638074" y="4950906"/>
-            <a:ext cx="2304920" cy="307648"/>
+          <p:cNvPr id="60" name="Text 58"/>
+          <p:cNvSpPr/>
+          <p:nvPr/>
+        </p:nvSpPr>
+        <p:spPr>
+          <a:xfrm>
+            <a:off x="1638074" y="7578998"/>
+            <a:ext cx="2162796" cy="307648"/>
           </a:xfrm>
           <a:prstGeom prst="rect">
             <a:avLst/>
@@ -3731,7 +4703,7 @@
                 <a:ea typeface="Space Grotesk" pitchFamily="34" charset="-122"/>
                 <a:cs typeface="Space Grotesk" pitchFamily="34" charset="-120"/>
               </a:rPr>
-              <a:t>Goal-assist partnerships</a:t>
+              <a:t>Bulk UPDATE (write)</a:t>
             </a:r>
             <a:endParaRPr lang="en-US" sz="1650" dirty="0"/>
           </a:p>
@@ -3739,13 +4711,13 @@
       </p:sp>
       <p:sp>
         <p:nvSpPr>
-          <p:cNvPr id="31" name="Shape 29"/>
-          <p:cNvSpPr/>
-          <p:nvPr/>
-        </p:nvSpPr>
-        <p:spPr>
-          <a:xfrm>
-            <a:off x="7411889" y="4933516"/>
+          <p:cNvPr id="61" name="Shape 59"/>
+          <p:cNvSpPr/>
+          <p:nvPr/>
+        </p:nvSpPr>
+        <p:spPr>
+          <a:xfrm>
+            <a:off x="7411889" y="7561608"/>
             <a:ext cx="17390" cy="438015"/>
           </a:xfrm>
           <a:prstGeom prst="rect">
@@ -3759,14 +4731,14 @@
       </p:sp>
       <p:sp>
         <p:nvSpPr>
-          <p:cNvPr id="32" name="Shape 30"/>
-          <p:cNvSpPr/>
-          <p:nvPr/>
-        </p:nvSpPr>
-        <p:spPr>
-          <a:xfrm>
-            <a:off x="7429280" y="5009598"/>
-            <a:ext cx="342777" cy="285715"/>
+          <p:cNvPr id="62" name="Shape 60"/>
+          <p:cNvSpPr/>
+          <p:nvPr/>
+        </p:nvSpPr>
+        <p:spPr>
+          <a:xfrm>
+            <a:off x="7424927" y="7637690"/>
+            <a:ext cx="324694" cy="285715"/>
           </a:xfrm>
           <a:prstGeom prst="rect">
             <a:avLst/>
@@ -3779,13 +4751,13 @@
       </p:sp>
       <p:sp>
         <p:nvSpPr>
-          <p:cNvPr id="33" name="Text 31"/>
-          <p:cNvSpPr/>
-          <p:nvPr/>
-        </p:nvSpPr>
-        <p:spPr>
-          <a:xfrm>
-            <a:off x="10860144" y="4933516"/>
+          <p:cNvPr id="63" name="Text 61"/>
+          <p:cNvSpPr/>
+          <p:nvPr/>
+        </p:nvSpPr>
+        <p:spPr>
+          <a:xfrm>
+            <a:off x="10860144" y="7561608"/>
             <a:ext cx="6475430" cy="476115"/>
           </a:xfrm>
           <a:prstGeom prst="rect">
@@ -3812,7 +4784,7 @@
                 <a:ea typeface="IBM Plex Mono" pitchFamily="34" charset="-122"/>
                 <a:cs typeface="IBM Plex Mono" pitchFamily="34" charset="-120"/>
               </a:rPr>
-              <a:t>1.54×*</a:t>
+              <a:t>1.51×*</a:t>
             </a:r>
             <a:endParaRPr lang="en-US" sz="1725" dirty="0"/>
           </a:p>
@@ -3820,13 +4792,13 @@
       </p:sp>
       <p:sp>
         <p:nvSpPr>
-          <p:cNvPr id="34" name="Text 32"/>
-          <p:cNvSpPr/>
-          <p:nvPr/>
-        </p:nvSpPr>
-        <p:spPr>
-          <a:xfrm>
-            <a:off x="952385" y="5371531"/>
+          <p:cNvPr id="64" name="Text 62"/>
+          <p:cNvSpPr/>
+          <p:nvPr/>
+        </p:nvSpPr>
+        <p:spPr>
+          <a:xfrm>
+            <a:off x="952385" y="7999623"/>
             <a:ext cx="628610" cy="325038"/>
           </a:xfrm>
           <a:prstGeom prst="rect">
@@ -3853,7 +4825,7 @@
                 <a:ea typeface="IBM Plex Mono" pitchFamily="34" charset="-122"/>
                 <a:cs typeface="IBM Plex Mono" pitchFamily="34" charset="-120"/>
               </a:rPr>
-              <a:t>Q06</a:t>
+              <a:t>Q12</a:t>
             </a:r>
             <a:endParaRPr lang="en-US" sz="1725" dirty="0"/>
           </a:p>
@@ -3861,14 +4833,14 @@
       </p:sp>
       <p:sp>
         <p:nvSpPr>
-          <p:cNvPr id="35" name="Text 33"/>
-          <p:cNvSpPr/>
-          <p:nvPr/>
-        </p:nvSpPr>
-        <p:spPr>
-          <a:xfrm>
-            <a:off x="1638074" y="5388921"/>
-            <a:ext cx="2291918" cy="307648"/>
+          <p:cNvPr id="65" name="Text 63"/>
+          <p:cNvSpPr/>
+          <p:nvPr/>
+        </p:nvSpPr>
+        <p:spPr>
+          <a:xfrm>
+            <a:off x="1638074" y="8017014"/>
+            <a:ext cx="2304920" cy="307648"/>
           </a:xfrm>
           <a:prstGeom prst="rect">
             <a:avLst/>
@@ -3894,7 +4866,7 @@
                 <a:ea typeface="Space Grotesk" pitchFamily="34" charset="-122"/>
                 <a:cs typeface="Space Grotesk" pitchFamily="34" charset="-120"/>
               </a:rPr>
-              <a:t>Cards vs Real Madrid</a:t>
+              <a:t>Schema evolution (write)</a:t>
             </a:r>
             <a:endParaRPr lang="en-US" sz="1650" dirty="0"/>
           </a:p>
@@ -3902,13 +4874,13 @@
       </p:sp>
       <p:sp>
         <p:nvSpPr>
-          <p:cNvPr id="36" name="Shape 34"/>
-          <p:cNvSpPr/>
-          <p:nvPr/>
-        </p:nvSpPr>
-        <p:spPr>
-          <a:xfrm>
-            <a:off x="7411889" y="5371531"/>
+          <p:cNvPr id="66" name="Shape 64"/>
+          <p:cNvSpPr/>
+          <p:nvPr/>
+        </p:nvSpPr>
+        <p:spPr>
+          <a:xfrm>
+            <a:off x="7411889" y="7999623"/>
             <a:ext cx="17390" cy="438015"/>
           </a:xfrm>
           <a:prstGeom prst="rect">
@@ -3922,14 +4894,14 @@
       </p:sp>
       <p:sp>
         <p:nvSpPr>
-          <p:cNvPr id="37" name="Shape 35"/>
-          <p:cNvSpPr/>
-          <p:nvPr/>
-        </p:nvSpPr>
-        <p:spPr>
-          <a:xfrm>
-            <a:off x="7429280" y="5447613"/>
-            <a:ext cx="923854" cy="285715"/>
+          <p:cNvPr id="67" name="Shape 65"/>
+          <p:cNvSpPr/>
+          <p:nvPr/>
+        </p:nvSpPr>
+        <p:spPr>
+          <a:xfrm>
+            <a:off x="7424927" y="8075705"/>
+            <a:ext cx="1183285" cy="285715"/>
           </a:xfrm>
           <a:prstGeom prst="rect">
             <a:avLst/>
@@ -3942,13 +4914,13 @@
       </p:sp>
       <p:sp>
         <p:nvSpPr>
-          <p:cNvPr id="38" name="Text 36"/>
-          <p:cNvSpPr/>
-          <p:nvPr/>
-        </p:nvSpPr>
-        <p:spPr>
-          <a:xfrm>
-            <a:off x="10860144" y="5371531"/>
+          <p:cNvPr id="68" name="Text 66"/>
+          <p:cNvSpPr/>
+          <p:nvPr/>
+        </p:nvSpPr>
+        <p:spPr>
+          <a:xfrm>
+            <a:off x="10860144" y="7999623"/>
             <a:ext cx="6475430" cy="476115"/>
           </a:xfrm>
           <a:prstGeom prst="rect">
@@ -3975,7 +4947,7 @@
                 <a:ea typeface="IBM Plex Mono" pitchFamily="34" charset="-122"/>
                 <a:cs typeface="IBM Plex Mono" pitchFamily="34" charset="-120"/>
               </a:rPr>
-              <a:t>3.24×*</a:t>
+              <a:t>4.49×*</a:t>
             </a:r>
             <a:endParaRPr lang="en-US" sz="1725" dirty="0"/>
           </a:p>
@@ -3983,1100 +4955,122 @@
       </p:sp>
       <p:sp>
         <p:nvSpPr>
-          <p:cNvPr id="39" name="Text 37"/>
-          <p:cNvSpPr/>
-          <p:nvPr/>
-        </p:nvSpPr>
-        <p:spPr>
-          <a:xfrm>
-            <a:off x="952385" y="5809547"/>
-            <a:ext cx="628610" cy="325038"/>
-          </a:xfrm>
-          <a:prstGeom prst="rect">
-            <a:avLst/>
-          </a:prstGeom>
-          <a:noFill/>
-          <a:ln/>
-        </p:spPr>
-        <p:txBody>
-          <a:bodyPr wrap="square" lIns="25400" tIns="25400" rIns="25400" bIns="25400" rtlCol="0" anchor="t">
-            <a:normAutofit/>
-          </a:bodyPr>
-          <a:lstStyle/>
-          <a:p>
-            <a:pPr algn="l" indent="0" marL="0">
-              <a:buNone/>
-            </a:pPr>
-            <a:r>
-              <a:rPr lang="en-US" sz="1725" b="1" dirty="0">
-                <a:solidFill>
-                  <a:srgbClr val="1A2430"/>
+          <p:cNvPr id="69" name="Text 67"/>
+          <p:cNvSpPr/>
+          <p:nvPr/>
+        </p:nvSpPr>
+        <p:spPr>
+          <a:xfrm>
+            <a:off x="952385" y="8818593"/>
+            <a:ext cx="2341086" cy="316343"/>
+          </a:xfrm>
+          <a:prstGeom prst="rect">
+            <a:avLst/>
+          </a:prstGeom>
+          <a:noFill/>
+          <a:ln/>
+        </p:spPr>
+        <p:txBody>
+          <a:bodyPr wrap="square" lIns="25400" tIns="25400" rIns="25400" bIns="25400" rtlCol="0" anchor="t">
+            <a:normAutofit/>
+          </a:bodyPr>
+          <a:lstStyle/>
+          <a:p>
+            <a:pPr algn="l" indent="0" marL="0">
+              <a:buNone/>
+            </a:pPr>
+            <a:r>
+              <a:rPr lang="en-US" sz="1725" dirty="0">
+                <a:solidFill>
+                  <a:srgbClr val="6B655C"/>
+                </a:solidFill>
+                <a:latin typeface="Space Grotesk" pitchFamily="34" charset="0"/>
+                <a:ea typeface="Space Grotesk" pitchFamily="34" charset="-122"/>
+                <a:cs typeface="Space Grotesk" pitchFamily="34" charset="-120"/>
+              </a:rPr>
+              <a:t>Postgres wins (2)</a:t>
+            </a:r>
+            <a:endParaRPr lang="en-US" sz="1725" dirty="0"/>
+          </a:p>
+        </p:txBody>
+      </p:sp>
+      <p:sp>
+        <p:nvSpPr>
+          <p:cNvPr id="70" name="Text 68"/>
+          <p:cNvSpPr/>
+          <p:nvPr/>
+        </p:nvSpPr>
+        <p:spPr>
+          <a:xfrm>
+            <a:off x="3556837" y="8818593"/>
+            <a:ext cx="1974045" cy="316343"/>
+          </a:xfrm>
+          <a:prstGeom prst="rect">
+            <a:avLst/>
+          </a:prstGeom>
+          <a:noFill/>
+          <a:ln/>
+        </p:spPr>
+        <p:txBody>
+          <a:bodyPr wrap="square" lIns="25400" tIns="25400" rIns="25400" bIns="25400" rtlCol="0" anchor="t">
+            <a:normAutofit/>
+          </a:bodyPr>
+          <a:lstStyle/>
+          <a:p>
+            <a:pPr algn="l" indent="0" marL="0">
+              <a:buNone/>
+            </a:pPr>
+            <a:r>
+              <a:rPr lang="en-US" sz="1725" dirty="0">
+                <a:solidFill>
+                  <a:srgbClr val="6B655C"/>
+                </a:solidFill>
+                <a:latin typeface="Space Grotesk" pitchFamily="34" charset="0"/>
+                <a:ea typeface="Space Grotesk" pitchFamily="34" charset="-122"/>
+                <a:cs typeface="Space Grotesk" pitchFamily="34" charset="-120"/>
+              </a:rPr>
+              <a:t>Neo4j wins (9) · not significant (1)</a:t>
+            </a:r>
+            <a:endParaRPr lang="en-US" sz="1725" dirty="0"/>
+          </a:p>
+        </p:txBody>
+      </p:sp>
+      <p:sp>
+        <p:nvSpPr>
+          <p:cNvPr id="71" name="Text 69"/>
+          <p:cNvSpPr/>
+          <p:nvPr/>
+        </p:nvSpPr>
+        <p:spPr>
+          <a:xfrm>
+            <a:off x="5827616" y="8827288"/>
+            <a:ext cx="10031477" cy="298953"/>
+          </a:xfrm>
+          <a:prstGeom prst="rect">
+            <a:avLst/>
+          </a:prstGeom>
+          <a:noFill/>
+          <a:ln/>
+        </p:spPr>
+        <p:txBody>
+          <a:bodyPr wrap="square" lIns="25400" tIns="25400" rIns="25400" bIns="25400" rtlCol="0" anchor="t">
+            <a:normAutofit/>
+          </a:bodyPr>
+          <a:lstStyle/>
+          <a:p>
+            <a:pPr algn="l" indent="0" marL="0">
+              <a:buNone/>
+            </a:pPr>
+            <a:r>
+              <a:rPr lang="en-US" sz="1575" dirty="0">
+                <a:solidFill>
+                  <a:srgbClr val="6B655C"/>
                 </a:solidFill>
                 <a:latin typeface="IBM Plex Mono" pitchFamily="34" charset="0"/>
                 <a:ea typeface="IBM Plex Mono" pitchFamily="34" charset="-122"/>
                 <a:cs typeface="IBM Plex Mono" pitchFamily="34" charset="-120"/>
               </a:rPr>
-              <a:t>Q07</a:t>
-            </a:r>
-            <a:endParaRPr lang="en-US" sz="1725" dirty="0"/>
-          </a:p>
-        </p:txBody>
-      </p:sp>
-      <p:sp>
-        <p:nvSpPr>
-          <p:cNvPr id="40" name="Text 38"/>
-          <p:cNvSpPr/>
-          <p:nvPr/>
-        </p:nvSpPr>
-        <p:spPr>
-          <a:xfrm>
-            <a:off x="1638074" y="5826937"/>
-            <a:ext cx="2304920" cy="307648"/>
-          </a:xfrm>
-          <a:prstGeom prst="rect">
-            <a:avLst/>
-          </a:prstGeom>
-          <a:noFill/>
-          <a:ln/>
-        </p:spPr>
-        <p:txBody>
-          <a:bodyPr wrap="square" lIns="25400" tIns="25400" rIns="25400" bIns="25400" rtlCol="0" anchor="t">
-            <a:normAutofit/>
-          </a:bodyPr>
-          <a:lstStyle/>
-          <a:p>
-            <a:pPr algn="l" indent="0" marL="0">
-              <a:buNone/>
-            </a:pPr>
-            <a:r>
-              <a:rPr lang="en-US" sz="1650" dirty="0">
-                <a:solidFill>
-                  <a:srgbClr val="6B655C"/>
-                </a:solidFill>
-                <a:latin typeface="Space Grotesk" pitchFamily="34" charset="0"/>
-                <a:ea typeface="Space Grotesk" pitchFamily="34" charset="-122"/>
-                <a:cs typeface="Space Grotesk" pitchFamily="34" charset="-120"/>
-              </a:rPr>
-              <a:t>Players in all 8 seasons</a:t>
-            </a:r>
-            <a:endParaRPr lang="en-US" sz="1650" dirty="0"/>
-          </a:p>
-        </p:txBody>
-      </p:sp>
-      <p:sp>
-        <p:nvSpPr>
-          <p:cNvPr id="41" name="Shape 39"/>
-          <p:cNvSpPr/>
-          <p:nvPr/>
-        </p:nvSpPr>
-        <p:spPr>
-          <a:xfrm>
-            <a:off x="7411889" y="5809547"/>
-            <a:ext cx="17390" cy="438015"/>
-          </a:xfrm>
-          <a:prstGeom prst="rect">
-            <a:avLst/>
-          </a:prstGeom>
-          <a:solidFill>
-            <a:srgbClr val="1A2430"/>
-          </a:solidFill>
-          <a:ln/>
-        </p:spPr>
-      </p:sp>
-      <p:sp>
-        <p:nvSpPr>
-          <p:cNvPr id="42" name="Shape 40"/>
-          <p:cNvSpPr/>
-          <p:nvPr/>
-        </p:nvSpPr>
-        <p:spPr>
-          <a:xfrm>
-            <a:off x="7429280" y="5885629"/>
-            <a:ext cx="1438223" cy="285715"/>
-          </a:xfrm>
-          <a:prstGeom prst="rect">
-            <a:avLst/>
-          </a:prstGeom>
-          <a:solidFill>
-            <a:srgbClr val="1E7A52"/>
-          </a:solidFill>
-          <a:ln/>
-        </p:spPr>
-      </p:sp>
-      <p:sp>
-        <p:nvSpPr>
-          <p:cNvPr id="43" name="Text 41"/>
-          <p:cNvSpPr/>
-          <p:nvPr/>
-        </p:nvSpPr>
-        <p:spPr>
-          <a:xfrm>
-            <a:off x="10860144" y="5809547"/>
-            <a:ext cx="6475430" cy="476115"/>
-          </a:xfrm>
-          <a:prstGeom prst="rect">
-            <a:avLst/>
-          </a:prstGeom>
-          <a:noFill/>
-          <a:ln/>
-        </p:spPr>
-        <p:txBody>
-          <a:bodyPr wrap="square" lIns="25400" tIns="25400" rIns="25400" bIns="25400" rtlCol="0" anchor="ctr">
-            <a:normAutofit/>
-          </a:bodyPr>
-          <a:lstStyle/>
-          <a:p>
-            <a:pPr algn="r" indent="0" marL="0">
-              <a:buNone/>
-            </a:pPr>
-            <a:r>
-              <a:rPr lang="en-US" sz="1725" b="1" dirty="0">
-                <a:solidFill>
-                  <a:srgbClr val="1E7A52"/>
-                </a:solidFill>
-                <a:latin typeface="IBM Plex Mono" pitchFamily="34" charset="0"/>
-                <a:ea typeface="IBM Plex Mono" pitchFamily="34" charset="-122"/>
-                <a:cs typeface="IBM Plex Mono" pitchFamily="34" charset="-120"/>
-              </a:rPr>
-              <a:t>6.23×*</a:t>
-            </a:r>
-            <a:endParaRPr lang="en-US" sz="1725" dirty="0"/>
-          </a:p>
-        </p:txBody>
-      </p:sp>
-      <p:sp>
-        <p:nvSpPr>
-          <p:cNvPr id="44" name="Text 42"/>
-          <p:cNvSpPr/>
-          <p:nvPr/>
-        </p:nvSpPr>
-        <p:spPr>
-          <a:xfrm>
-            <a:off x="952385" y="6247562"/>
-            <a:ext cx="628610" cy="325038"/>
-          </a:xfrm>
-          <a:prstGeom prst="rect">
-            <a:avLst/>
-          </a:prstGeom>
-          <a:noFill/>
-          <a:ln/>
-        </p:spPr>
-        <p:txBody>
-          <a:bodyPr wrap="square" lIns="25400" tIns="25400" rIns="25400" bIns="25400" rtlCol="0" anchor="t">
-            <a:normAutofit/>
-          </a:bodyPr>
-          <a:lstStyle/>
-          <a:p>
-            <a:pPr algn="l" indent="0" marL="0">
-              <a:buNone/>
-            </a:pPr>
-            <a:r>
-              <a:rPr lang="en-US" sz="1725" b="1" dirty="0">
-                <a:solidFill>
-                  <a:srgbClr val="1A2430"/>
-                </a:solidFill>
-                <a:latin typeface="IBM Plex Mono" pitchFamily="34" charset="0"/>
-                <a:ea typeface="IBM Plex Mono" pitchFamily="34" charset="-122"/>
-                <a:cs typeface="IBM Plex Mono" pitchFamily="34" charset="-120"/>
-              </a:rPr>
-              <a:t>Q08</a:t>
-            </a:r>
-            <a:endParaRPr lang="en-US" sz="1725" dirty="0"/>
-          </a:p>
-        </p:txBody>
-      </p:sp>
-      <p:sp>
-        <p:nvSpPr>
-          <p:cNvPr id="45" name="Text 43"/>
-          <p:cNvSpPr/>
-          <p:nvPr/>
-        </p:nvSpPr>
-        <p:spPr>
-          <a:xfrm>
-            <a:off x="1638074" y="6264952"/>
-            <a:ext cx="2255154" cy="307648"/>
-          </a:xfrm>
-          <a:prstGeom prst="rect">
-            <a:avLst/>
-          </a:prstGeom>
-          <a:noFill/>
-          <a:ln/>
-        </p:spPr>
-        <p:txBody>
-          <a:bodyPr wrap="square" lIns="25400" tIns="25400" rIns="25400" bIns="25400" rtlCol="0" anchor="t">
-            <a:normAutofit/>
-          </a:bodyPr>
-          <a:lstStyle/>
-          <a:p>
-            <a:pPr algn="l" indent="0" marL="0">
-              <a:buNone/>
-            </a:pPr>
-            <a:r>
-              <a:rPr lang="en-US" sz="1650" dirty="0">
-                <a:solidFill>
-                  <a:srgbClr val="6B655C"/>
-                </a:solidFill>
-                <a:latin typeface="Space Grotesk" pitchFamily="34" charset="0"/>
-                <a:ea typeface="Space Grotesk" pitchFamily="34" charset="-122"/>
-                <a:cs typeface="Space Grotesk" pitchFamily="34" charset="-120"/>
-              </a:rPr>
-              <a:t>Teammates of Messi</a:t>
-            </a:r>
-            <a:endParaRPr lang="en-US" sz="1650" dirty="0"/>
-          </a:p>
-        </p:txBody>
-      </p:sp>
-      <p:sp>
-        <p:nvSpPr>
-          <p:cNvPr id="46" name="Shape 44"/>
-          <p:cNvSpPr/>
-          <p:nvPr/>
-        </p:nvSpPr>
-        <p:spPr>
-          <a:xfrm>
-            <a:off x="7411889" y="6247562"/>
-            <a:ext cx="17390" cy="438015"/>
-          </a:xfrm>
-          <a:prstGeom prst="rect">
-            <a:avLst/>
-          </a:prstGeom>
-          <a:solidFill>
-            <a:srgbClr val="1A2430"/>
-          </a:solidFill>
-          <a:ln/>
-        </p:spPr>
-      </p:sp>
-      <p:sp>
-        <p:nvSpPr>
-          <p:cNvPr id="47" name="Shape 45"/>
-          <p:cNvSpPr/>
-          <p:nvPr/>
-        </p:nvSpPr>
-        <p:spPr>
-          <a:xfrm>
-            <a:off x="7429280" y="6323644"/>
-            <a:ext cx="409485" cy="285715"/>
-          </a:xfrm>
-          <a:prstGeom prst="rect">
-            <a:avLst/>
-          </a:prstGeom>
-          <a:solidFill>
-            <a:srgbClr val="1E7A52"/>
-          </a:solidFill>
-          <a:ln/>
-        </p:spPr>
-      </p:sp>
-      <p:sp>
-        <p:nvSpPr>
-          <p:cNvPr id="48" name="Text 46"/>
-          <p:cNvSpPr/>
-          <p:nvPr/>
-        </p:nvSpPr>
-        <p:spPr>
-          <a:xfrm>
-            <a:off x="10860144" y="6247562"/>
-            <a:ext cx="6475430" cy="476115"/>
-          </a:xfrm>
-          <a:prstGeom prst="rect">
-            <a:avLst/>
-          </a:prstGeom>
-          <a:noFill/>
-          <a:ln/>
-        </p:spPr>
-        <p:txBody>
-          <a:bodyPr wrap="square" lIns="25400" tIns="25400" rIns="25400" bIns="25400" rtlCol="0" anchor="ctr">
-            <a:normAutofit/>
-          </a:bodyPr>
-          <a:lstStyle/>
-          <a:p>
-            <a:pPr algn="r" indent="0" marL="0">
-              <a:buNone/>
-            </a:pPr>
-            <a:r>
-              <a:rPr lang="en-US" sz="1725" b="1" dirty="0">
-                <a:solidFill>
-                  <a:srgbClr val="1E7A52"/>
-                </a:solidFill>
-                <a:latin typeface="IBM Plex Mono" pitchFamily="34" charset="0"/>
-                <a:ea typeface="IBM Plex Mono" pitchFamily="34" charset="-122"/>
-                <a:cs typeface="IBM Plex Mono" pitchFamily="34" charset="-120"/>
-              </a:rPr>
-              <a:t>1.69×*</a:t>
-            </a:r>
-            <a:endParaRPr lang="en-US" sz="1725" dirty="0"/>
-          </a:p>
-        </p:txBody>
-      </p:sp>
-      <p:sp>
-        <p:nvSpPr>
-          <p:cNvPr id="49" name="Text 47"/>
-          <p:cNvSpPr/>
-          <p:nvPr/>
-        </p:nvSpPr>
-        <p:spPr>
-          <a:xfrm>
-            <a:off x="952385" y="6685577"/>
-            <a:ext cx="628610" cy="325038"/>
-          </a:xfrm>
-          <a:prstGeom prst="rect">
-            <a:avLst/>
-          </a:prstGeom>
-          <a:noFill/>
-          <a:ln/>
-        </p:spPr>
-        <p:txBody>
-          <a:bodyPr wrap="square" lIns="25400" tIns="25400" rIns="25400" bIns="25400" rtlCol="0" anchor="t">
-            <a:normAutofit/>
-          </a:bodyPr>
-          <a:lstStyle/>
-          <a:p>
-            <a:pPr algn="l" indent="0" marL="0">
-              <a:buNone/>
-            </a:pPr>
-            <a:r>
-              <a:rPr lang="en-US" sz="1725" b="1" dirty="0">
-                <a:solidFill>
-                  <a:srgbClr val="1A2430"/>
-                </a:solidFill>
-                <a:latin typeface="IBM Plex Mono" pitchFamily="34" charset="0"/>
-                <a:ea typeface="IBM Plex Mono" pitchFamily="34" charset="-122"/>
-                <a:cs typeface="IBM Plex Mono" pitchFamily="34" charset="-120"/>
-              </a:rPr>
-              <a:t>Q09</a:t>
-            </a:r>
-            <a:endParaRPr lang="en-US" sz="1725" dirty="0"/>
-          </a:p>
-        </p:txBody>
-      </p:sp>
-      <p:sp>
-        <p:nvSpPr>
-          <p:cNvPr id="50" name="Text 48"/>
-          <p:cNvSpPr/>
-          <p:nvPr/>
-        </p:nvSpPr>
-        <p:spPr>
-          <a:xfrm>
-            <a:off x="1638074" y="6702968"/>
-            <a:ext cx="1985403" cy="307648"/>
-          </a:xfrm>
-          <a:prstGeom prst="rect">
-            <a:avLst/>
-          </a:prstGeom>
-          <a:noFill/>
-          <a:ln/>
-        </p:spPr>
-        <p:txBody>
-          <a:bodyPr wrap="square" lIns="25400" tIns="25400" rIns="25400" bIns="25400" rtlCol="0" anchor="t">
-            <a:normAutofit/>
-          </a:bodyPr>
-          <a:lstStyle/>
-          <a:p>
-            <a:pPr algn="l" indent="0" marL="0">
-              <a:buNone/>
-            </a:pPr>
-            <a:r>
-              <a:rPr lang="en-US" sz="1650" dirty="0">
-                <a:solidFill>
-                  <a:srgbClr val="6B655C"/>
-                </a:solidFill>
-                <a:latin typeface="Space Grotesk" pitchFamily="34" charset="0"/>
-                <a:ea typeface="Space Grotesk" pitchFamily="34" charset="-122"/>
-                <a:cs typeface="Space Grotesk" pitchFamily="34" charset="-120"/>
-              </a:rPr>
-              <a:t>2-hop teammates</a:t>
-            </a:r>
-            <a:endParaRPr lang="en-US" sz="1650" dirty="0"/>
-          </a:p>
-        </p:txBody>
-      </p:sp>
-      <p:sp>
-        <p:nvSpPr>
-          <p:cNvPr id="51" name="Shape 49"/>
-          <p:cNvSpPr/>
-          <p:nvPr/>
-        </p:nvSpPr>
-        <p:spPr>
-          <a:xfrm>
-            <a:off x="7411889" y="6685577"/>
-            <a:ext cx="17390" cy="438015"/>
-          </a:xfrm>
-          <a:prstGeom prst="rect">
-            <a:avLst/>
-          </a:prstGeom>
-          <a:solidFill>
-            <a:srgbClr val="1A2430"/>
-          </a:solidFill>
-          <a:ln/>
-        </p:spPr>
-      </p:sp>
-      <p:sp>
-        <p:nvSpPr>
-          <p:cNvPr id="52" name="Shape 50"/>
-          <p:cNvSpPr/>
-          <p:nvPr/>
-        </p:nvSpPr>
-        <p:spPr>
-          <a:xfrm>
-            <a:off x="6773751" y="6761659"/>
-            <a:ext cx="638138" cy="285715"/>
-          </a:xfrm>
-          <a:prstGeom prst="rect">
-            <a:avLst/>
-          </a:prstGeom>
-          <a:solidFill>
-            <a:srgbClr val="33608F"/>
-          </a:solidFill>
-          <a:ln/>
-        </p:spPr>
-      </p:sp>
-      <p:sp>
-        <p:nvSpPr>
-          <p:cNvPr id="53" name="Text 51"/>
-          <p:cNvSpPr/>
-          <p:nvPr/>
-        </p:nvSpPr>
-        <p:spPr>
-          <a:xfrm>
-            <a:off x="10860144" y="6685577"/>
-            <a:ext cx="6475430" cy="476115"/>
-          </a:xfrm>
-          <a:prstGeom prst="rect">
-            <a:avLst/>
-          </a:prstGeom>
-          <a:noFill/>
-          <a:ln/>
-        </p:spPr>
-        <p:txBody>
-          <a:bodyPr wrap="square" lIns="25400" tIns="25400" rIns="25400" bIns="25400" rtlCol="0" anchor="ctr">
-            <a:normAutofit/>
-          </a:bodyPr>
-          <a:lstStyle/>
-          <a:p>
-            <a:pPr algn="r" indent="0" marL="0">
-              <a:buNone/>
-            </a:pPr>
-            <a:r>
-              <a:rPr lang="en-US" sz="1725" b="1" dirty="0">
-                <a:solidFill>
-                  <a:srgbClr val="33608F"/>
-                </a:solidFill>
-                <a:latin typeface="IBM Plex Mono" pitchFamily="34" charset="0"/>
-                <a:ea typeface="IBM Plex Mono" pitchFamily="34" charset="-122"/>
-                <a:cs typeface="IBM Plex Mono" pitchFamily="34" charset="-120"/>
-              </a:rPr>
-              <a:t>2.25×*</a:t>
-            </a:r>
-            <a:endParaRPr lang="en-US" sz="1725" dirty="0"/>
-          </a:p>
-        </p:txBody>
-      </p:sp>
-      <p:sp>
-        <p:nvSpPr>
-          <p:cNvPr id="54" name="Text 52"/>
-          <p:cNvSpPr/>
-          <p:nvPr/>
-        </p:nvSpPr>
-        <p:spPr>
-          <a:xfrm>
-            <a:off x="952385" y="7123593"/>
-            <a:ext cx="628610" cy="325038"/>
-          </a:xfrm>
-          <a:prstGeom prst="rect">
-            <a:avLst/>
-          </a:prstGeom>
-          <a:noFill/>
-          <a:ln/>
-        </p:spPr>
-        <p:txBody>
-          <a:bodyPr wrap="square" lIns="25400" tIns="25400" rIns="25400" bIns="25400" rtlCol="0" anchor="t">
-            <a:normAutofit/>
-          </a:bodyPr>
-          <a:lstStyle/>
-          <a:p>
-            <a:pPr algn="l" indent="0" marL="0">
-              <a:buNone/>
-            </a:pPr>
-            <a:r>
-              <a:rPr lang="en-US" sz="1725" b="1" dirty="0">
-                <a:solidFill>
-                  <a:srgbClr val="1A2430"/>
-                </a:solidFill>
-                <a:latin typeface="IBM Plex Mono" pitchFamily="34" charset="0"/>
-                <a:ea typeface="IBM Plex Mono" pitchFamily="34" charset="-122"/>
-                <a:cs typeface="IBM Plex Mono" pitchFamily="34" charset="-120"/>
-              </a:rPr>
-              <a:t>Q10</a:t>
-            </a:r>
-            <a:endParaRPr lang="en-US" sz="1725" dirty="0"/>
-          </a:p>
-        </p:txBody>
-      </p:sp>
-      <p:sp>
-        <p:nvSpPr>
-          <p:cNvPr id="55" name="Text 53"/>
-          <p:cNvSpPr/>
-          <p:nvPr/>
-        </p:nvSpPr>
-        <p:spPr>
-          <a:xfrm>
-            <a:off x="1638074" y="7140983"/>
-            <a:ext cx="2304920" cy="307648"/>
-          </a:xfrm>
-          <a:prstGeom prst="rect">
-            <a:avLst/>
-          </a:prstGeom>
-          <a:noFill/>
-          <a:ln/>
-        </p:spPr>
-        <p:txBody>
-          <a:bodyPr wrap="square" lIns="25400" tIns="25400" rIns="25400" bIns="25400" rtlCol="0" anchor="t">
-            <a:normAutofit/>
-          </a:bodyPr>
-          <a:lstStyle/>
-          <a:p>
-            <a:pPr algn="l" indent="0" marL="0">
-              <a:buNone/>
-            </a:pPr>
-            <a:r>
-              <a:rPr lang="en-US" sz="1650" dirty="0">
-                <a:solidFill>
-                  <a:srgbClr val="6B655C"/>
-                </a:solidFill>
-                <a:latin typeface="Space Grotesk" pitchFamily="34" charset="0"/>
-                <a:ea typeface="Space Grotesk" pitchFamily="34" charset="-122"/>
-                <a:cs typeface="Space Grotesk" pitchFamily="34" charset="-120"/>
-              </a:rPr>
-              <a:t>Shortest path Messi→Pirlo</a:t>
-            </a:r>
-            <a:endParaRPr lang="en-US" sz="1650" dirty="0"/>
-          </a:p>
-        </p:txBody>
-      </p:sp>
-      <p:sp>
-        <p:nvSpPr>
-          <p:cNvPr id="56" name="Shape 54"/>
-          <p:cNvSpPr/>
-          <p:nvPr/>
-        </p:nvSpPr>
-        <p:spPr>
-          <a:xfrm>
-            <a:off x="7411889" y="7123593"/>
-            <a:ext cx="17390" cy="438015"/>
-          </a:xfrm>
-          <a:prstGeom prst="rect">
-            <a:avLst/>
-          </a:prstGeom>
-          <a:solidFill>
-            <a:srgbClr val="1A2430"/>
-          </a:solidFill>
-          <a:ln/>
-        </p:spPr>
-      </p:sp>
-      <p:sp>
-        <p:nvSpPr>
-          <p:cNvPr id="57" name="Shape 55"/>
-          <p:cNvSpPr/>
-          <p:nvPr/>
-        </p:nvSpPr>
-        <p:spPr>
-          <a:xfrm>
-            <a:off x="7429280" y="7199674"/>
-            <a:ext cx="3543251" cy="285715"/>
-          </a:xfrm>
-          <a:prstGeom prst="rect">
-            <a:avLst/>
-          </a:prstGeom>
-          <a:solidFill>
-            <a:srgbClr val="1E7A52"/>
-          </a:solidFill>
-          <a:ln/>
-        </p:spPr>
-      </p:sp>
-      <p:sp>
-        <p:nvSpPr>
-          <p:cNvPr id="58" name="Text 56"/>
-          <p:cNvSpPr/>
-          <p:nvPr/>
-        </p:nvSpPr>
-        <p:spPr>
-          <a:xfrm>
-            <a:off x="10860144" y="7123593"/>
-            <a:ext cx="6475430" cy="476115"/>
-          </a:xfrm>
-          <a:prstGeom prst="rect">
-            <a:avLst/>
-          </a:prstGeom>
-          <a:noFill/>
-          <a:ln/>
-        </p:spPr>
-        <p:txBody>
-          <a:bodyPr wrap="square" lIns="25400" tIns="25400" rIns="25400" bIns="25400" rtlCol="0" anchor="ctr">
-            <a:normAutofit/>
-          </a:bodyPr>
-          <a:lstStyle/>
-          <a:p>
-            <a:pPr algn="r" indent="0" marL="0">
-              <a:buNone/>
-            </a:pPr>
-            <a:r>
-              <a:rPr lang="en-US" sz="1725" b="1" dirty="0">
-                <a:solidFill>
-                  <a:srgbClr val="1E7A52"/>
-                </a:solidFill>
-                <a:latin typeface="IBM Plex Mono" pitchFamily="34" charset="0"/>
-                <a:ea typeface="IBM Plex Mono" pitchFamily="34" charset="-122"/>
-                <a:cs typeface="IBM Plex Mono" pitchFamily="34" charset="-120"/>
-              </a:rPr>
-              <a:t>89.31×*</a:t>
-            </a:r>
-            <a:endParaRPr lang="en-US" sz="1725" dirty="0"/>
-          </a:p>
-        </p:txBody>
-      </p:sp>
-      <p:sp>
-        <p:nvSpPr>
-          <p:cNvPr id="59" name="Text 57"/>
-          <p:cNvSpPr/>
-          <p:nvPr/>
-        </p:nvSpPr>
-        <p:spPr>
-          <a:xfrm>
-            <a:off x="952385" y="7561608"/>
-            <a:ext cx="628610" cy="325038"/>
-          </a:xfrm>
-          <a:prstGeom prst="rect">
-            <a:avLst/>
-          </a:prstGeom>
-          <a:noFill/>
-          <a:ln/>
-        </p:spPr>
-        <p:txBody>
-          <a:bodyPr wrap="square" lIns="25400" tIns="25400" rIns="25400" bIns="25400" rtlCol="0" anchor="t">
-            <a:normAutofit/>
-          </a:bodyPr>
-          <a:lstStyle/>
-          <a:p>
-            <a:pPr algn="l" indent="0" marL="0">
-              <a:buNone/>
-            </a:pPr>
-            <a:r>
-              <a:rPr lang="en-US" sz="1725" b="1" dirty="0">
-                <a:solidFill>
-                  <a:srgbClr val="1A2430"/>
-                </a:solidFill>
-                <a:latin typeface="IBM Plex Mono" pitchFamily="34" charset="0"/>
-                <a:ea typeface="IBM Plex Mono" pitchFamily="34" charset="-122"/>
-                <a:cs typeface="IBM Plex Mono" pitchFamily="34" charset="-120"/>
-              </a:rPr>
-              <a:t>Q11</a:t>
-            </a:r>
-            <a:endParaRPr lang="en-US" sz="1725" dirty="0"/>
-          </a:p>
-        </p:txBody>
-      </p:sp>
-      <p:sp>
-        <p:nvSpPr>
-          <p:cNvPr id="60" name="Text 58"/>
-          <p:cNvSpPr/>
-          <p:nvPr/>
-        </p:nvSpPr>
-        <p:spPr>
-          <a:xfrm>
-            <a:off x="1638074" y="7578998"/>
-            <a:ext cx="2162796" cy="307648"/>
-          </a:xfrm>
-          <a:prstGeom prst="rect">
-            <a:avLst/>
-          </a:prstGeom>
-          <a:noFill/>
-          <a:ln/>
-        </p:spPr>
-        <p:txBody>
-          <a:bodyPr wrap="square" lIns="25400" tIns="25400" rIns="25400" bIns="25400" rtlCol="0" anchor="t">
-            <a:normAutofit/>
-          </a:bodyPr>
-          <a:lstStyle/>
-          <a:p>
-            <a:pPr algn="l" indent="0" marL="0">
-              <a:buNone/>
-            </a:pPr>
-            <a:r>
-              <a:rPr lang="en-US" sz="1650" dirty="0">
-                <a:solidFill>
-                  <a:srgbClr val="6B655C"/>
-                </a:solidFill>
-                <a:latin typeface="Space Grotesk" pitchFamily="34" charset="0"/>
-                <a:ea typeface="Space Grotesk" pitchFamily="34" charset="-122"/>
-                <a:cs typeface="Space Grotesk" pitchFamily="34" charset="-120"/>
-              </a:rPr>
-              <a:t>Bulk UPDATE (write)</a:t>
-            </a:r>
-            <a:endParaRPr lang="en-US" sz="1650" dirty="0"/>
-          </a:p>
-        </p:txBody>
-      </p:sp>
-      <p:sp>
-        <p:nvSpPr>
-          <p:cNvPr id="61" name="Shape 59"/>
-          <p:cNvSpPr/>
-          <p:nvPr/>
-        </p:nvSpPr>
-        <p:spPr>
-          <a:xfrm>
-            <a:off x="7411889" y="7561608"/>
-            <a:ext cx="17390" cy="438015"/>
-          </a:xfrm>
-          <a:prstGeom prst="rect">
-            <a:avLst/>
-          </a:prstGeom>
-          <a:solidFill>
-            <a:srgbClr val="1A2430"/>
-          </a:solidFill>
-          <a:ln/>
-        </p:spPr>
-      </p:sp>
-      <p:sp>
-        <p:nvSpPr>
-          <p:cNvPr id="62" name="Shape 60"/>
-          <p:cNvSpPr/>
-          <p:nvPr/>
-        </p:nvSpPr>
-        <p:spPr>
-          <a:xfrm>
-            <a:off x="7429280" y="7637690"/>
-            <a:ext cx="704846" cy="285715"/>
-          </a:xfrm>
-          <a:prstGeom prst="rect">
-            <a:avLst/>
-          </a:prstGeom>
-          <a:solidFill>
-            <a:srgbClr val="1E7A52"/>
-          </a:solidFill>
-          <a:ln/>
-        </p:spPr>
-      </p:sp>
-      <p:sp>
-        <p:nvSpPr>
-          <p:cNvPr id="63" name="Text 61"/>
-          <p:cNvSpPr/>
-          <p:nvPr/>
-        </p:nvSpPr>
-        <p:spPr>
-          <a:xfrm>
-            <a:off x="10860144" y="7561608"/>
-            <a:ext cx="6475430" cy="476115"/>
-          </a:xfrm>
-          <a:prstGeom prst="rect">
-            <a:avLst/>
-          </a:prstGeom>
-          <a:noFill/>
-          <a:ln/>
-        </p:spPr>
-        <p:txBody>
-          <a:bodyPr wrap="square" lIns="25400" tIns="25400" rIns="25400" bIns="25400" rtlCol="0" anchor="ctr">
-            <a:normAutofit/>
-          </a:bodyPr>
-          <a:lstStyle/>
-          <a:p>
-            <a:pPr algn="r" indent="0" marL="0">
-              <a:buNone/>
-            </a:pPr>
-            <a:r>
-              <a:rPr lang="en-US" sz="1725" b="1" dirty="0">
-                <a:solidFill>
-                  <a:srgbClr val="1E7A52"/>
-                </a:solidFill>
-                <a:latin typeface="IBM Plex Mono" pitchFamily="34" charset="0"/>
-                <a:ea typeface="IBM Plex Mono" pitchFamily="34" charset="-122"/>
-                <a:cs typeface="IBM Plex Mono" pitchFamily="34" charset="-120"/>
-              </a:rPr>
-              <a:t>2.44×*</a:t>
-            </a:r>
-            <a:endParaRPr lang="en-US" sz="1725" dirty="0"/>
-          </a:p>
-        </p:txBody>
-      </p:sp>
-      <p:sp>
-        <p:nvSpPr>
-          <p:cNvPr id="64" name="Text 62"/>
-          <p:cNvSpPr/>
-          <p:nvPr/>
-        </p:nvSpPr>
-        <p:spPr>
-          <a:xfrm>
-            <a:off x="952385" y="7999623"/>
-            <a:ext cx="628610" cy="325038"/>
-          </a:xfrm>
-          <a:prstGeom prst="rect">
-            <a:avLst/>
-          </a:prstGeom>
-          <a:noFill/>
-          <a:ln/>
-        </p:spPr>
-        <p:txBody>
-          <a:bodyPr wrap="square" lIns="25400" tIns="25400" rIns="25400" bIns="25400" rtlCol="0" anchor="t">
-            <a:normAutofit/>
-          </a:bodyPr>
-          <a:lstStyle/>
-          <a:p>
-            <a:pPr algn="l" indent="0" marL="0">
-              <a:buNone/>
-            </a:pPr>
-            <a:r>
-              <a:rPr lang="en-US" sz="1725" b="1" dirty="0">
-                <a:solidFill>
-                  <a:srgbClr val="1A2430"/>
-                </a:solidFill>
-                <a:latin typeface="IBM Plex Mono" pitchFamily="34" charset="0"/>
-                <a:ea typeface="IBM Plex Mono" pitchFamily="34" charset="-122"/>
-                <a:cs typeface="IBM Plex Mono" pitchFamily="34" charset="-120"/>
-              </a:rPr>
-              <a:t>Q12</a:t>
-            </a:r>
-            <a:endParaRPr lang="en-US" sz="1725" dirty="0"/>
-          </a:p>
-        </p:txBody>
-      </p:sp>
-      <p:sp>
-        <p:nvSpPr>
-          <p:cNvPr id="65" name="Text 63"/>
-          <p:cNvSpPr/>
-          <p:nvPr/>
-        </p:nvSpPr>
-        <p:spPr>
-          <a:xfrm>
-            <a:off x="1638074" y="8017014"/>
-            <a:ext cx="2304920" cy="307648"/>
-          </a:xfrm>
-          <a:prstGeom prst="rect">
-            <a:avLst/>
-          </a:prstGeom>
-          <a:noFill/>
-          <a:ln/>
-        </p:spPr>
-        <p:txBody>
-          <a:bodyPr wrap="square" lIns="25400" tIns="25400" rIns="25400" bIns="25400" rtlCol="0" anchor="t">
-            <a:normAutofit/>
-          </a:bodyPr>
-          <a:lstStyle/>
-          <a:p>
-            <a:pPr algn="l" indent="0" marL="0">
-              <a:buNone/>
-            </a:pPr>
-            <a:r>
-              <a:rPr lang="en-US" sz="1650" dirty="0">
-                <a:solidFill>
-                  <a:srgbClr val="6B655C"/>
-                </a:solidFill>
-                <a:latin typeface="Space Grotesk" pitchFamily="34" charset="0"/>
-                <a:ea typeface="Space Grotesk" pitchFamily="34" charset="-122"/>
-                <a:cs typeface="Space Grotesk" pitchFamily="34" charset="-120"/>
-              </a:rPr>
-              <a:t>Schema evolution (write)</a:t>
-            </a:r>
-            <a:endParaRPr lang="en-US" sz="1650" dirty="0"/>
-          </a:p>
-        </p:txBody>
-      </p:sp>
-      <p:sp>
-        <p:nvSpPr>
-          <p:cNvPr id="66" name="Shape 64"/>
-          <p:cNvSpPr/>
-          <p:nvPr/>
-        </p:nvSpPr>
-        <p:spPr>
-          <a:xfrm>
-            <a:off x="7411889" y="7999623"/>
-            <a:ext cx="17390" cy="438015"/>
-          </a:xfrm>
-          <a:prstGeom prst="rect">
-            <a:avLst/>
-          </a:prstGeom>
-          <a:solidFill>
-            <a:srgbClr val="1A2430"/>
-          </a:solidFill>
-          <a:ln/>
-        </p:spPr>
-      </p:sp>
-      <p:sp>
-        <p:nvSpPr>
-          <p:cNvPr id="67" name="Shape 65"/>
-          <p:cNvSpPr/>
-          <p:nvPr/>
-        </p:nvSpPr>
-        <p:spPr>
-          <a:xfrm>
-            <a:off x="7429280" y="8075705"/>
-            <a:ext cx="2066851" cy="285715"/>
-          </a:xfrm>
-          <a:prstGeom prst="rect">
-            <a:avLst/>
-          </a:prstGeom>
-          <a:solidFill>
-            <a:srgbClr val="1E7A52"/>
-          </a:solidFill>
-          <a:ln/>
-        </p:spPr>
-      </p:sp>
-      <p:sp>
-        <p:nvSpPr>
-          <p:cNvPr id="68" name="Text 66"/>
-          <p:cNvSpPr/>
-          <p:nvPr/>
-        </p:nvSpPr>
-        <p:spPr>
-          <a:xfrm>
-            <a:off x="10860144" y="7999623"/>
-            <a:ext cx="6475430" cy="476115"/>
-          </a:xfrm>
-          <a:prstGeom prst="rect">
-            <a:avLst/>
-          </a:prstGeom>
-          <a:noFill/>
-          <a:ln/>
-        </p:spPr>
-        <p:txBody>
-          <a:bodyPr wrap="square" lIns="25400" tIns="25400" rIns="25400" bIns="25400" rtlCol="0" anchor="ctr">
-            <a:normAutofit/>
-          </a:bodyPr>
-          <a:lstStyle/>
-          <a:p>
-            <a:pPr algn="r" indent="0" marL="0">
-              <a:buNone/>
-            </a:pPr>
-            <a:r>
-              <a:rPr lang="en-US" sz="1725" b="1" dirty="0">
-                <a:solidFill>
-                  <a:srgbClr val="1E7A52"/>
-                </a:solidFill>
-                <a:latin typeface="IBM Plex Mono" pitchFamily="34" charset="0"/>
-                <a:ea typeface="IBM Plex Mono" pitchFamily="34" charset="-122"/>
-                <a:cs typeface="IBM Plex Mono" pitchFamily="34" charset="-120"/>
-              </a:rPr>
-              <a:t>13.70×*</a:t>
-            </a:r>
-            <a:endParaRPr lang="en-US" sz="1725" dirty="0"/>
-          </a:p>
-        </p:txBody>
-      </p:sp>
-      <p:sp>
-        <p:nvSpPr>
-          <p:cNvPr id="69" name="Text 67"/>
-          <p:cNvSpPr/>
-          <p:nvPr/>
-        </p:nvSpPr>
-        <p:spPr>
-          <a:xfrm>
-            <a:off x="952385" y="8818593"/>
-            <a:ext cx="2341086" cy="316343"/>
-          </a:xfrm>
-          <a:prstGeom prst="rect">
-            <a:avLst/>
-          </a:prstGeom>
-          <a:noFill/>
-          <a:ln/>
-        </p:spPr>
-        <p:txBody>
-          <a:bodyPr wrap="square" lIns="25400" tIns="25400" rIns="25400" bIns="25400" rtlCol="0" anchor="t">
-            <a:normAutofit/>
-          </a:bodyPr>
-          <a:lstStyle/>
-          <a:p>
-            <a:pPr algn="l" indent="0" marL="0">
-              <a:buNone/>
-            </a:pPr>
-            <a:r>
-              <a:rPr lang="en-US" sz="1725" dirty="0">
-                <a:solidFill>
-                  <a:srgbClr val="6B655C"/>
-                </a:solidFill>
-                <a:latin typeface="Space Grotesk" pitchFamily="34" charset="0"/>
-                <a:ea typeface="Space Grotesk" pitchFamily="34" charset="-122"/>
-                <a:cs typeface="Space Grotesk" pitchFamily="34" charset="-120"/>
-              </a:rPr>
-              <a:t>Postgres wins (4)</a:t>
-            </a:r>
-            <a:endParaRPr lang="en-US" sz="1725" dirty="0"/>
-          </a:p>
-        </p:txBody>
-      </p:sp>
-      <p:sp>
-        <p:nvSpPr>
-          <p:cNvPr id="70" name="Text 68"/>
-          <p:cNvSpPr/>
-          <p:nvPr/>
-        </p:nvSpPr>
-        <p:spPr>
-          <a:xfrm>
-            <a:off x="3556837" y="8818593"/>
-            <a:ext cx="1974045" cy="316343"/>
-          </a:xfrm>
-          <a:prstGeom prst="rect">
-            <a:avLst/>
-          </a:prstGeom>
-          <a:noFill/>
-          <a:ln/>
-        </p:spPr>
-        <p:txBody>
-          <a:bodyPr wrap="square" lIns="25400" tIns="25400" rIns="25400" bIns="25400" rtlCol="0" anchor="t">
-            <a:normAutofit/>
-          </a:bodyPr>
-          <a:lstStyle/>
-          <a:p>
-            <a:pPr algn="l" indent="0" marL="0">
-              <a:buNone/>
-            </a:pPr>
-            <a:r>
-              <a:rPr lang="en-US" sz="1725" dirty="0">
-                <a:solidFill>
-                  <a:srgbClr val="6B655C"/>
-                </a:solidFill>
-                <a:latin typeface="Space Grotesk" pitchFamily="34" charset="0"/>
-                <a:ea typeface="Space Grotesk" pitchFamily="34" charset="-122"/>
-                <a:cs typeface="Space Grotesk" pitchFamily="34" charset="-120"/>
-              </a:rPr>
-              <a:t>Neo4j wins (8)</a:t>
-            </a:r>
-            <a:endParaRPr lang="en-US" sz="1725" dirty="0"/>
-          </a:p>
-        </p:txBody>
-      </p:sp>
-      <p:sp>
-        <p:nvSpPr>
-          <p:cNvPr id="71" name="Text 69"/>
-          <p:cNvSpPr/>
-          <p:nvPr/>
-        </p:nvSpPr>
-        <p:spPr>
-          <a:xfrm>
-            <a:off x="5827616" y="8827288"/>
-            <a:ext cx="10031477" cy="298953"/>
-          </a:xfrm>
-          <a:prstGeom prst="rect">
-            <a:avLst/>
-          </a:prstGeom>
-          <a:noFill/>
-          <a:ln/>
-        </p:spPr>
-        <p:txBody>
-          <a:bodyPr wrap="square" lIns="25400" tIns="25400" rIns="25400" bIns="25400" rtlCol="0" anchor="t">
-            <a:normAutofit/>
-          </a:bodyPr>
-          <a:lstStyle/>
-          <a:p>
-            <a:pPr algn="l" indent="0" marL="0">
-              <a:buNone/>
-            </a:pPr>
-            <a:r>
-              <a:rPr lang="en-US" sz="1575" dirty="0">
-                <a:solidFill>
-                  <a:srgbClr val="6B655C"/>
-                </a:solidFill>
-                <a:latin typeface="IBM Plex Mono" pitchFamily="34" charset="0"/>
-                <a:ea typeface="IBM Plex Mono" pitchFamily="34" charset="-122"/>
-                <a:cs typeface="IBM Plex Mono" pitchFamily="34" charset="-120"/>
-              </a:rPr>
-              <a:t>* 11/12 significant · Mann-Whitney U, p &lt; 0.05 · all read results equivalent</a:t>
+              <a:t>* 11/12 significant · Mann-Whitney U, p &lt; 0.05, Holm-corrected · all results equivalent (multiset)</a:t>
             </a:r>
             <a:endParaRPr lang="en-US" sz="1575" dirty="0"/>
           </a:p>
@@ -5275,7 +5269,7 @@
                 <a:ea typeface="Space Grotesk" pitchFamily="34" charset="-122"/>
                 <a:cs typeface="Space Grotesk" pitchFamily="34" charset="-120"/>
               </a:rPr>
-              <a:t>89×</a:t>
+              <a:t>57×</a:t>
             </a:r>
             <a:endParaRPr lang="en-US" sz="30000" dirty="0"/>
           </a:p>
@@ -5398,7 +5392,7 @@
                 <a:ea typeface="IBM Plex Mono" pitchFamily="34" charset="-122"/>
                 <a:cs typeface="IBM Plex Mono" pitchFamily="34" charset="-120"/>
               </a:rPr>
-              <a:t>712 ms</a:t>
+              <a:t>671 ms</a:t>
             </a:r>
             <a:endParaRPr lang="en-US" sz="4800" dirty="0"/>
           </a:p>
@@ -5521,7 +5515,7 @@
                 <a:ea typeface="IBM Plex Mono" pitchFamily="34" charset="-122"/>
                 <a:cs typeface="IBM Plex Mono" pitchFamily="34" charset="-120"/>
               </a:rPr>
-              <a:t>8 ms</a:t>
+              <a:t>12 ms</a:t>
             </a:r>
             <a:endParaRPr lang="en-US" sz="4800" dirty="0"/>
           </a:p>
@@ -5562,7 +5556,7 @@
                 <a:ea typeface="IBM Plex Mono" pitchFamily="34" charset="-122"/>
                 <a:cs typeface="IBM Plex Mono" pitchFamily="34" charset="-120"/>
               </a:rPr>
-              <a:t>built-in shortestPath()</a:t>
+              <a:t>SHORTEST 1 path pattern</a:t>
             </a:r>
             <a:endParaRPr lang="en-US" sz="1650" dirty="0"/>
           </a:p>
@@ -5761,7 +5755,7 @@
                 <a:ea typeface="Space Grotesk" pitchFamily="34" charset="-122"/>
                 <a:cs typeface="Space Grotesk" pitchFamily="34" charset="-120"/>
               </a:rPr>
-              <a:t>21 lines of recursive CTE vs 3 lines of Cypher — same answer</a:t>
+              <a:t>21 lines of recursive CTE vs 5 lines of Cypher — same answer, same semantics</a:t>
             </a:r>
             <a:endParaRPr lang="en-US" sz="4350" dirty="0"/>
           </a:p>
@@ -5866,860 +5860,591 @@
                 <a:ea typeface="IBM Plex Mono" pitchFamily="34" charset="-122"/>
                 <a:cs typeface="IBM Plex Mono" pitchFamily="34" charset="-120"/>
               </a:rPr>
-              <a:t>WITH RECURSIVE</a:t>
+              <a:t>WITH RECURSIVE bfs (player_api_id, distance) AS (</a:t>
             </a:r>
             <a:endParaRPr lang="en-US" sz="1388" dirty="0"/>
           </a:p>
           <a:p>
-            <a:pPr algn="l" indent="0" marL="0">
-              <a:lnSpc>
-                <a:spcPct val="142000"/>
-              </a:lnSpc>
-              <a:buNone/>
-            </a:pPr>
-            <a:r>
-              <a:rPr lang="en-US" sz="1388" dirty="0">
+            <a:r>
+              <a:rPr sz="1388">
                 <a:solidFill>
                   <a:srgbClr val="B8C4D2"/>
+                </a:solidFill>
+                <a:latin typeface="IBM Plex Mono"/>
+              </a:rPr>
+              <a:t>    SELECT src, 0 FROM endpoints</a:t>
+            </a:r>
+          </a:p>
+          <a:p>
+            <a:r>
+              <a:rPr sz="1388">
+                <a:solidFill>
+                  <a:srgbClr val="B8C4D2"/>
+                </a:solidFill>
+                <a:latin typeface="IBM Plex Mono"/>
+              </a:rPr>
+              <a:t>    UNION</a:t>
+            </a:r>
+          </a:p>
+          <a:p>
+            <a:r>
+              <a:rPr sz="1388">
+                <a:solidFill>
+                  <a:srgbClr val="B8C4D2"/>
+                </a:solidFill>
+                <a:latin typeface="IBM Plex Mono"/>
+              </a:rPr>
+              <a:t>    SELECT pf2.player_api_id, b.distance + 1</a:t>
+            </a:r>
+          </a:p>
+          <a:p>
+            <a:r>
+              <a:rPr sz="1388">
+                <a:solidFill>
+                  <a:srgbClr val="B8C4D2"/>
+                </a:solidFill>
+                <a:latin typeface="IBM Plex Mono"/>
+              </a:rPr>
+              <a:t>    FROM   bfs b</a:t>
+            </a:r>
+          </a:p>
+          <a:p>
+            <a:r>
+              <a:rPr sz="1388">
+                <a:solidFill>
+                  <a:srgbClr val="B8C4D2"/>
+                </a:solidFill>
+                <a:latin typeface="IBM Plex Mono"/>
+              </a:rPr>
+              <a:t>    JOIN   soccer.mv_played_for pf1</a:t>
+            </a:r>
+          </a:p>
+          <a:p>
+            <a:r>
+              <a:rPr sz="1388">
+                <a:solidFill>
+                  <a:srgbClr val="B8C4D2"/>
+                </a:solidFill>
+                <a:latin typeface="IBM Plex Mono"/>
+              </a:rPr>
+              <a:t>           ON pf1.player_api_id = b.player_api_id</a:t>
+            </a:r>
+          </a:p>
+          <a:p>
+            <a:r>
+              <a:rPr sz="1388">
+                <a:solidFill>
+                  <a:srgbClr val="B8C4D2"/>
+                </a:solidFill>
+                <a:latin typeface="IBM Plex Mono"/>
+              </a:rPr>
+              <a:t>    JOIN   soccer.mv_played_for pf2</a:t>
+            </a:r>
+          </a:p>
+          <a:p>
+            <a:r>
+              <a:rPr sz="1388">
+                <a:solidFill>
+                  <a:srgbClr val="B8C4D2"/>
+                </a:solidFill>
+                <a:latin typeface="IBM Plex Mono"/>
+              </a:rPr>
+              <a:t>           ON pf2.team_api_id = pf1.team_api_id</a:t>
+            </a:r>
+          </a:p>
+          <a:p>
+            <a:r>
+              <a:rPr sz="1388">
+                <a:solidFill>
+                  <a:srgbClr val="B8C4D2"/>
+                </a:solidFill>
+                <a:latin typeface="IBM Plex Mono"/>
+              </a:rPr>
+              <a:t>          AND pf2.season      = pf1.season</a:t>
+            </a:r>
+          </a:p>
+          <a:p>
+            <a:r>
+              <a:rPr sz="1388">
+                <a:solidFill>
+                  <a:srgbClr val="B8C4D2"/>
+                </a:solidFill>
+                <a:latin typeface="IBM Plex Mono"/>
+              </a:rPr>
+              <a:t>          AND pf2.player_api_id &lt;&gt; b.player_api_id</a:t>
+            </a:r>
+          </a:p>
+          <a:p>
+            <a:r>
+              <a:rPr sz="1388">
+                <a:solidFill>
+                  <a:srgbClr val="B8C4D2"/>
+                </a:solidFill>
+                <a:latin typeface="IBM Plex Mono"/>
+              </a:rPr>
+              <a:t>    WHERE  b.distance &lt; 6</a:t>
+            </a:r>
+          </a:p>
+          <a:p>
+            <a:r>
+              <a:rPr sz="1388">
+                <a:solidFill>
+                  <a:srgbClr val="B8C4D2"/>
+                </a:solidFill>
+                <a:latin typeface="IBM Plex Mono"/>
+              </a:rPr>
+              <a:t>)</a:t>
+            </a:r>
+          </a:p>
+          <a:p>
+            <a:r>
+              <a:rPr sz="1388">
+                <a:solidFill>
+                  <a:srgbClr val="B8C4D2"/>
+                </a:solidFill>
+                <a:latin typeface="IBM Plex Mono"/>
+              </a:rPr>
+              <a:t>SELECT MIN(distance) FROM bfs</a:t>
+            </a:r>
+          </a:p>
+          <a:p>
+            <a:r>
+              <a:rPr sz="1388">
+                <a:solidFill>
+                  <a:srgbClr val="B8C4D2"/>
+                </a:solidFill>
+                <a:latin typeface="IBM Plex Mono"/>
+              </a:rPr>
+              <a:t>WHERE  player_api_id = dst;</a:t>
+            </a:r>
+          </a:p>
+        </p:txBody>
+      </p:sp>
+      <p:sp>
+        <p:nvSpPr>
+          <p:cNvPr id="7" name="Text 5"/>
+          <p:cNvSpPr/>
+          <p:nvPr/>
+        </p:nvSpPr>
+        <p:spPr>
+          <a:xfrm>
+            <a:off x="7677158" y="3763618"/>
+            <a:ext cx="2933644" cy="751098"/>
+          </a:xfrm>
+          <a:prstGeom prst="rect">
+            <a:avLst/>
+          </a:prstGeom>
+          <a:noFill/>
+          <a:ln/>
+        </p:spPr>
+        <p:txBody>
+          <a:bodyPr wrap="square" lIns="25400" tIns="25400" rIns="25400" bIns="25400" rtlCol="0" anchor="t">
+            <a:normAutofit/>
+          </a:bodyPr>
+          <a:lstStyle/>
+          <a:p>
+            <a:pPr algn="ctr" indent="0" marL="0">
+              <a:buNone/>
+            </a:pPr>
+            <a:r>
+              <a:rPr lang="en-US" sz="4350" b="1" dirty="0">
+                <a:solidFill>
+                  <a:srgbClr val="1E7A52"/>
+                </a:solidFill>
+                <a:latin typeface="Space Grotesk" pitchFamily="34" charset="0"/>
+                <a:ea typeface="Space Grotesk" pitchFamily="34" charset="-122"/>
+                <a:cs typeface="Space Grotesk" pitchFamily="34" charset="-120"/>
+              </a:rPr>
+              <a:t>21 → 5</a:t>
+            </a:r>
+            <a:endParaRPr lang="en-US" sz="4350" dirty="0"/>
+          </a:p>
+        </p:txBody>
+      </p:sp>
+      <p:sp>
+        <p:nvSpPr>
+          <p:cNvPr id="8" name="Text 6"/>
+          <p:cNvSpPr/>
+          <p:nvPr/>
+        </p:nvSpPr>
+        <p:spPr>
+          <a:xfrm>
+            <a:off x="7677158" y="4514656"/>
+            <a:ext cx="2933644" cy="298953"/>
+          </a:xfrm>
+          <a:prstGeom prst="rect">
+            <a:avLst/>
+          </a:prstGeom>
+          <a:noFill/>
+          <a:ln/>
+        </p:spPr>
+        <p:txBody>
+          <a:bodyPr wrap="square" lIns="25400" tIns="25400" rIns="25400" bIns="25400" rtlCol="0" anchor="t">
+            <a:normAutofit/>
+          </a:bodyPr>
+          <a:lstStyle/>
+          <a:p>
+            <a:pPr algn="ctr" indent="0" marL="0">
+              <a:buNone/>
+            </a:pPr>
+            <a:r>
+              <a:rPr lang="en-US" sz="1575" dirty="0">
+                <a:solidFill>
+                  <a:srgbClr val="6B655C"/>
                 </a:solidFill>
                 <a:latin typeface="IBM Plex Mono" pitchFamily="34" charset="0"/>
                 <a:ea typeface="IBM Plex Mono" pitchFamily="34" charset="-122"/>
                 <a:cs typeface="IBM Plex Mono" pitchFamily="34" charset="-120"/>
               </a:rPr>
-              <a:t>played_for AS (</a:t>
-            </a:r>
-            <a:endParaRPr lang="en-US" sz="1388" dirty="0"/>
-          </a:p>
-          <a:p>
-            <a:pPr algn="l" indent="0" marL="0">
-              <a:lnSpc>
-                <a:spcPct val="142000"/>
-              </a:lnSpc>
-              <a:buNone/>
-            </a:pPr>
-            <a:r>
-              <a:rPr lang="en-US" sz="1388" dirty="0">
-                <a:solidFill>
-                  <a:srgbClr val="B8C4D2"/>
+              <a:t>lines of code</a:t>
+            </a:r>
+            <a:endParaRPr lang="en-US" sz="1575" dirty="0"/>
+          </a:p>
+        </p:txBody>
+      </p:sp>
+      <p:sp>
+        <p:nvSpPr>
+          <p:cNvPr id="9" name="Text 7"/>
+          <p:cNvSpPr/>
+          <p:nvPr/>
+        </p:nvSpPr>
+        <p:spPr>
+          <a:xfrm>
+            <a:off x="7677158" y="5118286"/>
+            <a:ext cx="2933644" cy="751098"/>
+          </a:xfrm>
+          <a:prstGeom prst="rect">
+            <a:avLst/>
+          </a:prstGeom>
+          <a:noFill/>
+          <a:ln/>
+        </p:spPr>
+        <p:txBody>
+          <a:bodyPr wrap="square" lIns="25400" tIns="25400" rIns="25400" bIns="25400" rtlCol="0" anchor="t">
+            <a:normAutofit/>
+          </a:bodyPr>
+          <a:lstStyle/>
+          <a:p>
+            <a:pPr algn="ctr" indent="0" marL="0">
+              <a:buNone/>
+            </a:pPr>
+            <a:r>
+              <a:rPr lang="en-US" sz="4350" b="1" dirty="0">
+                <a:solidFill>
+                  <a:srgbClr val="1E7A52"/>
+                </a:solidFill>
+                <a:latin typeface="Space Grotesk" pitchFamily="34" charset="0"/>
+                <a:ea typeface="Space Grotesk" pitchFamily="34" charset="-122"/>
+                <a:cs typeface="Space Grotesk" pitchFamily="34" charset="-120"/>
+              </a:rPr>
+              <a:t>26 → 5</a:t>
+            </a:r>
+            <a:endParaRPr lang="en-US" sz="4350" dirty="0"/>
+          </a:p>
+        </p:txBody>
+      </p:sp>
+      <p:sp>
+        <p:nvSpPr>
+          <p:cNvPr id="10" name="Text 8"/>
+          <p:cNvSpPr/>
+          <p:nvPr/>
+        </p:nvSpPr>
+        <p:spPr>
+          <a:xfrm>
+            <a:off x="7677158" y="5869325"/>
+            <a:ext cx="2933644" cy="298953"/>
+          </a:xfrm>
+          <a:prstGeom prst="rect">
+            <a:avLst/>
+          </a:prstGeom>
+          <a:noFill/>
+          <a:ln/>
+        </p:spPr>
+        <p:txBody>
+          <a:bodyPr wrap="square" lIns="25400" tIns="25400" rIns="25400" bIns="25400" rtlCol="0" anchor="t">
+            <a:normAutofit/>
+          </a:bodyPr>
+          <a:lstStyle/>
+          <a:p>
+            <a:pPr algn="ctr" indent="0" marL="0">
+              <a:buNone/>
+            </a:pPr>
+            <a:r>
+              <a:rPr lang="en-US" sz="1575" dirty="0">
+                <a:solidFill>
+                  <a:srgbClr val="6B655C"/>
                 </a:solidFill>
                 <a:latin typeface="IBM Plex Mono" pitchFamily="34" charset="0"/>
                 <a:ea typeface="IBM Plex Mono" pitchFamily="34" charset="-122"/>
                 <a:cs typeface="IBM Plex Mono" pitchFamily="34" charset="-120"/>
               </a:rPr>
-              <a:t>  SELECT DISTINCT l.player_api_id,</a:t>
-            </a:r>
-            <a:endParaRPr lang="en-US" sz="1388" dirty="0"/>
-          </a:p>
-          <a:p>
-            <a:pPr algn="l" indent="0" marL="0">
-              <a:lnSpc>
-                <a:spcPct val="142000"/>
-              </a:lnSpc>
-              <a:buNone/>
-            </a:pPr>
-            <a:r>
-              <a:rPr lang="en-US" sz="1388" dirty="0">
-                <a:solidFill>
-                  <a:srgbClr val="B8C4D2"/>
+              <a:t>logical operators</a:t>
+            </a:r>
+            <a:endParaRPr lang="en-US" sz="1575" dirty="0"/>
+          </a:p>
+        </p:txBody>
+      </p:sp>
+      <p:sp>
+        <p:nvSpPr>
+          <p:cNvPr id="11" name="Text 9"/>
+          <p:cNvSpPr/>
+          <p:nvPr/>
+        </p:nvSpPr>
+        <p:spPr>
+          <a:xfrm>
+            <a:off x="7677158" y="6472955"/>
+            <a:ext cx="2933644" cy="751098"/>
+          </a:xfrm>
+          <a:prstGeom prst="rect">
+            <a:avLst/>
+          </a:prstGeom>
+          <a:noFill/>
+          <a:ln/>
+        </p:spPr>
+        <p:txBody>
+          <a:bodyPr wrap="square" lIns="25400" tIns="25400" rIns="25400" bIns="25400" rtlCol="0" anchor="t">
+            <a:normAutofit/>
+          </a:bodyPr>
+          <a:lstStyle/>
+          <a:p>
+            <a:pPr algn="ctr" indent="0" marL="0">
+              <a:buNone/>
+            </a:pPr>
+            <a:r>
+              <a:rPr lang="en-US" sz="4350" b="1" dirty="0">
+                <a:solidFill>
+                  <a:srgbClr val="1E7A52"/>
+                </a:solidFill>
+                <a:latin typeface="Space Grotesk" pitchFamily="34" charset="0"/>
+                <a:ea typeface="Space Grotesk" pitchFamily="34" charset="-122"/>
+                <a:cs typeface="Space Grotesk" pitchFamily="34" charset="-120"/>
+              </a:rPr>
+              <a:t>671 → 12</a:t>
+            </a:r>
+            <a:endParaRPr lang="en-US" sz="4350" dirty="0"/>
+          </a:p>
+        </p:txBody>
+      </p:sp>
+      <p:sp>
+        <p:nvSpPr>
+          <p:cNvPr id="12" name="Text 10"/>
+          <p:cNvSpPr/>
+          <p:nvPr/>
+        </p:nvSpPr>
+        <p:spPr>
+          <a:xfrm>
+            <a:off x="7677158" y="7223994"/>
+            <a:ext cx="2933644" cy="298953"/>
+          </a:xfrm>
+          <a:prstGeom prst="rect">
+            <a:avLst/>
+          </a:prstGeom>
+          <a:noFill/>
+          <a:ln/>
+        </p:spPr>
+        <p:txBody>
+          <a:bodyPr wrap="square" lIns="25400" tIns="25400" rIns="25400" bIns="25400" rtlCol="0" anchor="t">
+            <a:normAutofit/>
+          </a:bodyPr>
+          <a:lstStyle/>
+          <a:p>
+            <a:pPr algn="ctr" indent="0" marL="0">
+              <a:buNone/>
+            </a:pPr>
+            <a:r>
+              <a:rPr lang="en-US" sz="1575" dirty="0">
+                <a:solidFill>
+                  <a:srgbClr val="6B655C"/>
                 </a:solidFill>
                 <a:latin typeface="IBM Plex Mono" pitchFamily="34" charset="0"/>
                 <a:ea typeface="IBM Plex Mono" pitchFamily="34" charset="-122"/>
                 <a:cs typeface="IBM Plex Mono" pitchFamily="34" charset="-120"/>
               </a:rPr>
-              <a:t>    CASE WHEN l.side='home'</a:t>
-            </a:r>
-            <a:endParaRPr lang="en-US" sz="1388" dirty="0"/>
-          </a:p>
-          <a:p>
-            <a:pPr algn="l" indent="0" marL="0">
-              <a:lnSpc>
-                <a:spcPct val="142000"/>
-              </a:lnSpc>
-              <a:buNone/>
-            </a:pPr>
-            <a:r>
-              <a:rPr lang="en-US" sz="1388" dirty="0">
-                <a:solidFill>
-                  <a:srgbClr val="B8C4D2"/>
+              <a:t>milliseconds</a:t>
+            </a:r>
+            <a:endParaRPr lang="en-US" sz="1575" dirty="0"/>
+          </a:p>
+        </p:txBody>
+      </p:sp>
+      <p:sp>
+        <p:nvSpPr>
+          <p:cNvPr id="13" name="Shape 11"/>
+          <p:cNvSpPr/>
+          <p:nvPr/>
+        </p:nvSpPr>
+        <p:spPr>
+          <a:xfrm>
+            <a:off x="10858408" y="2208011"/>
+            <a:ext cx="6477167" cy="6832443"/>
+          </a:xfrm>
+          <a:prstGeom prst="rect">
+            <a:avLst/>
+          </a:prstGeom>
+          <a:solidFill>
+            <a:srgbClr val="16202C"/>
+          </a:solidFill>
+          <a:ln/>
+        </p:spPr>
+      </p:sp>
+      <p:sp>
+        <p:nvSpPr>
+          <p:cNvPr id="14" name="Text 12"/>
+          <p:cNvSpPr/>
+          <p:nvPr/>
+        </p:nvSpPr>
+        <p:spPr>
+          <a:xfrm>
+            <a:off x="11239362" y="2531767"/>
+            <a:ext cx="6286785" cy="298953"/>
+          </a:xfrm>
+          <a:prstGeom prst="rect">
+            <a:avLst/>
+          </a:prstGeom>
+          <a:noFill/>
+          <a:ln/>
+        </p:spPr>
+        <p:txBody>
+          <a:bodyPr wrap="square" lIns="25400" tIns="25400" rIns="25400" bIns="25400" rtlCol="0" anchor="t">
+            <a:normAutofit/>
+          </a:bodyPr>
+          <a:lstStyle/>
+          <a:p>
+            <a:pPr algn="l" indent="0" marL="0">
+              <a:buNone/>
+            </a:pPr>
+            <a:r>
+              <a:rPr lang="en-US" sz="1575" spc="158" kern="0" dirty="0">
+                <a:solidFill>
+                  <a:srgbClr val="6FC79B"/>
                 </a:solidFill>
                 <a:latin typeface="IBM Plex Mono" pitchFamily="34" charset="0"/>
                 <a:ea typeface="IBM Plex Mono" pitchFamily="34" charset="-122"/>
                 <a:cs typeface="IBM Plex Mono" pitchFamily="34" charset="-120"/>
               </a:rPr>
-              <a:t>      THEN m.home_team_api_id</a:t>
-            </a:r>
-            <a:endParaRPr lang="en-US" sz="1388" dirty="0"/>
-          </a:p>
+              <a:t>NEO4J — SHORTEST 1 PATH PATTERN (GQL)</a:t>
+            </a:r>
+            <a:endParaRPr lang="en-US" sz="1575" dirty="0"/>
+          </a:p>
+        </p:txBody>
+      </p:sp>
+      <p:sp>
+        <p:nvSpPr>
+          <p:cNvPr id="15" name="Text 13"/>
+          <p:cNvSpPr/>
+          <p:nvPr/>
+        </p:nvSpPr>
+        <p:spPr>
+          <a:xfrm>
+            <a:off x="11239362" y="4926179"/>
+            <a:ext cx="4944243" cy="1866244"/>
+          </a:xfrm>
+          <a:prstGeom prst="rect">
+            <a:avLst/>
+          </a:prstGeom>
+          <a:noFill/>
+          <a:ln/>
+        </p:spPr>
+        <p:txBody>
+          <a:bodyPr wrap="none" lIns="25400" tIns="25400" rIns="25400" bIns="25400" rtlCol="0" anchor="t">
+            <a:normAutofit/>
+          </a:bodyPr>
+          <a:lstStyle/>
           <a:p>
             <a:pPr algn="l" indent="0" marL="0">
               <a:lnSpc>
-                <a:spcPct val="142000"/>
+                <a:spcPct val="160000"/>
               </a:lnSpc>
               <a:buNone/>
             </a:pPr>
             <a:r>
-              <a:rPr lang="en-US" sz="1388" dirty="0">
-                <a:solidFill>
-                  <a:srgbClr val="B8C4D2"/>
+              <a:rPr lang="en-US" sz="2250" dirty="0">
+                <a:solidFill>
+                  <a:srgbClr val="D5E5DC"/>
                 </a:solidFill>
                 <a:latin typeface="IBM Plex Mono" pitchFamily="34" charset="0"/>
                 <a:ea typeface="IBM Plex Mono" pitchFamily="34" charset="-122"/>
                 <a:cs typeface="IBM Plex Mono" pitchFamily="34" charset="-120"/>
               </a:rPr>
-              <a:t>      ELSE m.away_team_api_id END t,</a:t>
-            </a:r>
-            <a:endParaRPr lang="en-US" sz="1388" dirty="0"/>
-          </a:p>
-          <a:p>
-            <a:pPr algn="l" indent="0" marL="0">
-              <a:lnSpc>
-                <a:spcPct val="142000"/>
-              </a:lnSpc>
-              <a:buNone/>
-            </a:pPr>
-            <a:r>
-              <a:rPr lang="en-US" sz="1388" dirty="0">
-                <a:solidFill>
-                  <a:srgbClr val="B8C4D2"/>
-                </a:solidFill>
-                <a:latin typeface="IBM Plex Mono" pitchFamily="34" charset="0"/>
-                <a:ea typeface="IBM Plex Mono" pitchFamily="34" charset="-122"/>
-                <a:cs typeface="IBM Plex Mono" pitchFamily="34" charset="-120"/>
-              </a:rPr>
-              <a:t>    m.season</a:t>
-            </a:r>
-            <a:endParaRPr lang="en-US" sz="1388" dirty="0"/>
-          </a:p>
-          <a:p>
-            <a:pPr algn="l" indent="0" marL="0">
-              <a:lnSpc>
-                <a:spcPct val="142000"/>
-              </a:lnSpc>
-              <a:buNone/>
-            </a:pPr>
-            <a:r>
-              <a:rPr lang="en-US" sz="1388" dirty="0">
-                <a:solidFill>
-                  <a:srgbClr val="B8C4D2"/>
-                </a:solidFill>
-                <a:latin typeface="IBM Plex Mono" pitchFamily="34" charset="0"/>
-                <a:ea typeface="IBM Plex Mono" pitchFamily="34" charset="-122"/>
-                <a:cs typeface="IBM Plex Mono" pitchFamily="34" charset="-120"/>
-              </a:rPr>
-              <a:t>  FROM match_lineup l</a:t>
-            </a:r>
-            <a:endParaRPr lang="en-US" sz="1388" dirty="0"/>
-          </a:p>
-          <a:p>
-            <a:pPr algn="l" indent="0" marL="0">
-              <a:lnSpc>
-                <a:spcPct val="142000"/>
-              </a:lnSpc>
-              <a:buNone/>
-            </a:pPr>
-            <a:r>
-              <a:rPr lang="en-US" sz="1388" dirty="0">
-                <a:solidFill>
-                  <a:srgbClr val="B8C4D2"/>
-                </a:solidFill>
-                <a:latin typeface="IBM Plex Mono" pitchFamily="34" charset="0"/>
-                <a:ea typeface="IBM Plex Mono" pitchFamily="34" charset="-122"/>
-                <a:cs typeface="IBM Plex Mono" pitchFamily="34" charset="-120"/>
-              </a:rPr>
-              <a:t>  JOIN match m USING (match_api_id)</a:t>
-            </a:r>
-            <a:endParaRPr lang="en-US" sz="1388" dirty="0"/>
-          </a:p>
-          <a:p>
-            <a:pPr algn="l" indent="0" marL="0">
-              <a:lnSpc>
-                <a:spcPct val="142000"/>
-              </a:lnSpc>
-              <a:buNone/>
-            </a:pPr>
-            <a:r>
-              <a:rPr lang="en-US" sz="1388" dirty="0">
-                <a:solidFill>
-                  <a:srgbClr val="B8C4D2"/>
-                </a:solidFill>
-                <a:latin typeface="IBM Plex Mono" pitchFamily="34" charset="0"/>
-                <a:ea typeface="IBM Plex Mono" pitchFamily="34" charset="-122"/>
-                <a:cs typeface="IBM Plex Mono" pitchFamily="34" charset="-120"/>
-              </a:rPr>
-              <a:t>),</a:t>
-            </a:r>
-            <a:endParaRPr lang="en-US" sz="1388" dirty="0"/>
-          </a:p>
-          <a:p>
-            <a:pPr algn="l" indent="0" marL="0">
-              <a:lnSpc>
-                <a:spcPct val="142000"/>
-              </a:lnSpc>
-              <a:buNone/>
-            </a:pPr>
-            <a:r>
-              <a:rPr lang="en-US" sz="1388" dirty="0">
-                <a:solidFill>
-                  <a:srgbClr val="B8C4D2"/>
-                </a:solidFill>
-                <a:latin typeface="IBM Plex Mono" pitchFamily="34" charset="0"/>
-                <a:ea typeface="IBM Plex Mono" pitchFamily="34" charset="-122"/>
-                <a:cs typeface="IBM Plex Mono" pitchFamily="34" charset="-120"/>
-              </a:rPr>
-              <a:t>bfs (player_api_id, distance) AS (</a:t>
-            </a:r>
-            <a:endParaRPr lang="en-US" sz="1388" dirty="0"/>
-          </a:p>
-          <a:p>
-            <a:pPr algn="l" indent="0" marL="0">
-              <a:lnSpc>
-                <a:spcPct val="142000"/>
-              </a:lnSpc>
-              <a:buNone/>
-            </a:pPr>
-            <a:r>
-              <a:rPr lang="en-US" sz="1388" dirty="0">
-                <a:solidFill>
-                  <a:srgbClr val="B8C4D2"/>
-                </a:solidFill>
-                <a:latin typeface="IBM Plex Mono" pitchFamily="34" charset="0"/>
-                <a:ea typeface="IBM Plex Mono" pitchFamily="34" charset="-122"/>
-                <a:cs typeface="IBM Plex Mono" pitchFamily="34" charset="-120"/>
-              </a:rPr>
-              <a:t>  SELECT src, 0 FROM endpoints</a:t>
-            </a:r>
-            <a:endParaRPr lang="en-US" sz="1388" dirty="0"/>
-          </a:p>
-          <a:p>
-            <a:pPr algn="l" indent="0" marL="0">
-              <a:lnSpc>
-                <a:spcPct val="142000"/>
-              </a:lnSpc>
-              <a:buNone/>
-            </a:pPr>
-            <a:r>
-              <a:rPr lang="en-US" sz="1388" dirty="0">
-                <a:solidFill>
-                  <a:srgbClr val="B8C4D2"/>
-                </a:solidFill>
-                <a:latin typeface="IBM Plex Mono" pitchFamily="34" charset="0"/>
-                <a:ea typeface="IBM Plex Mono" pitchFamily="34" charset="-122"/>
-                <a:cs typeface="IBM Plex Mono" pitchFamily="34" charset="-120"/>
-              </a:rPr>
-              <a:t>  UNION</a:t>
-            </a:r>
-            <a:endParaRPr lang="en-US" sz="1388" dirty="0"/>
-          </a:p>
-          <a:p>
-            <a:pPr algn="l" indent="0" marL="0">
-              <a:lnSpc>
-                <a:spcPct val="142000"/>
-              </a:lnSpc>
-              <a:buNone/>
-            </a:pPr>
-            <a:r>
-              <a:rPr lang="en-US" sz="1388" dirty="0">
-                <a:solidFill>
-                  <a:srgbClr val="B8C4D2"/>
-                </a:solidFill>
-                <a:latin typeface="IBM Plex Mono" pitchFamily="34" charset="0"/>
-                <a:ea typeface="IBM Plex Mono" pitchFamily="34" charset="-122"/>
-                <a:cs typeface="IBM Plex Mono" pitchFamily="34" charset="-120"/>
-              </a:rPr>
-              <a:t>  SELECT pf2.player_api_id, b.distance + 1</a:t>
-            </a:r>
-            <a:endParaRPr lang="en-US" sz="1388" dirty="0"/>
-          </a:p>
-          <a:p>
-            <a:pPr algn="l" indent="0" marL="0">
-              <a:lnSpc>
-                <a:spcPct val="142000"/>
-              </a:lnSpc>
-              <a:buNone/>
-            </a:pPr>
-            <a:r>
-              <a:rPr lang="en-US" sz="1388" dirty="0">
-                <a:solidFill>
-                  <a:srgbClr val="B8C4D2"/>
-                </a:solidFill>
-                <a:latin typeface="IBM Plex Mono" pitchFamily="34" charset="0"/>
-                <a:ea typeface="IBM Plex Mono" pitchFamily="34" charset="-122"/>
-                <a:cs typeface="IBM Plex Mono" pitchFamily="34" charset="-120"/>
-              </a:rPr>
-              <a:t>  FROM bfs b</a:t>
-            </a:r>
-            <a:endParaRPr lang="en-US" sz="1388" dirty="0"/>
-          </a:p>
-          <a:p>
-            <a:pPr algn="l" indent="0" marL="0">
-              <a:lnSpc>
-                <a:spcPct val="142000"/>
-              </a:lnSpc>
-              <a:buNone/>
-            </a:pPr>
-            <a:r>
-              <a:rPr lang="en-US" sz="1388" dirty="0">
-                <a:solidFill>
-                  <a:srgbClr val="B8C4D2"/>
-                </a:solidFill>
-                <a:latin typeface="IBM Plex Mono" pitchFamily="34" charset="0"/>
-                <a:ea typeface="IBM Plex Mono" pitchFamily="34" charset="-122"/>
-                <a:cs typeface="IBM Plex Mono" pitchFamily="34" charset="-120"/>
-              </a:rPr>
-              <a:t>  JOIN played_for pf1</a:t>
-            </a:r>
-            <a:endParaRPr lang="en-US" sz="1388" dirty="0"/>
-          </a:p>
-          <a:p>
-            <a:pPr algn="l" indent="0" marL="0">
-              <a:lnSpc>
-                <a:spcPct val="142000"/>
-              </a:lnSpc>
-              <a:buNone/>
-            </a:pPr>
-            <a:r>
-              <a:rPr lang="en-US" sz="1388" dirty="0">
-                <a:solidFill>
-                  <a:srgbClr val="B8C4D2"/>
-                </a:solidFill>
-                <a:latin typeface="IBM Plex Mono" pitchFamily="34" charset="0"/>
-                <a:ea typeface="IBM Plex Mono" pitchFamily="34" charset="-122"/>
-                <a:cs typeface="IBM Plex Mono" pitchFamily="34" charset="-120"/>
-              </a:rPr>
-              <a:t>    ON pf1.player_api_id = b.player_api_id</a:t>
-            </a:r>
-            <a:endParaRPr lang="en-US" sz="1388" dirty="0"/>
-          </a:p>
-          <a:p>
-            <a:pPr algn="l" indent="0" marL="0">
-              <a:lnSpc>
-                <a:spcPct val="142000"/>
-              </a:lnSpc>
-              <a:buNone/>
-            </a:pPr>
-            <a:r>
-              <a:rPr lang="en-US" sz="1388" dirty="0">
-                <a:solidFill>
-                  <a:srgbClr val="B8C4D2"/>
-                </a:solidFill>
-                <a:latin typeface="IBM Plex Mono" pitchFamily="34" charset="0"/>
-                <a:ea typeface="IBM Plex Mono" pitchFamily="34" charset="-122"/>
-                <a:cs typeface="IBM Plex Mono" pitchFamily="34" charset="-120"/>
-              </a:rPr>
-              <a:t>  JOIN played_for pf2 ON pf2.t = pf1.t</a:t>
-            </a:r>
-            <a:endParaRPr lang="en-US" sz="1388" dirty="0"/>
-          </a:p>
-          <a:p>
-            <a:pPr algn="l" indent="0" marL="0">
-              <a:lnSpc>
-                <a:spcPct val="142000"/>
-              </a:lnSpc>
-              <a:buNone/>
-            </a:pPr>
-            <a:r>
-              <a:rPr lang="en-US" sz="1388" dirty="0">
-                <a:solidFill>
-                  <a:srgbClr val="B8C4D2"/>
-                </a:solidFill>
-                <a:latin typeface="IBM Plex Mono" pitchFamily="34" charset="0"/>
-                <a:ea typeface="IBM Plex Mono" pitchFamily="34" charset="-122"/>
-                <a:cs typeface="IBM Plex Mono" pitchFamily="34" charset="-120"/>
-              </a:rPr>
-              <a:t>    AND pf2.season = pf1.season</a:t>
-            </a:r>
-            <a:endParaRPr lang="en-US" sz="1388" dirty="0"/>
-          </a:p>
-          <a:p>
-            <a:pPr algn="l" indent="0" marL="0">
-              <a:lnSpc>
-                <a:spcPct val="142000"/>
-              </a:lnSpc>
-              <a:buNone/>
-            </a:pPr>
-            <a:r>
-              <a:rPr lang="en-US" sz="1388" dirty="0">
-                <a:solidFill>
-                  <a:srgbClr val="B8C4D2"/>
-                </a:solidFill>
-                <a:latin typeface="IBM Plex Mono" pitchFamily="34" charset="0"/>
-                <a:ea typeface="IBM Plex Mono" pitchFamily="34" charset="-122"/>
-                <a:cs typeface="IBM Plex Mono" pitchFamily="34" charset="-120"/>
-              </a:rPr>
-              <a:t>    AND pf2.player_api_id &lt;&gt; b.player_api_id</a:t>
-            </a:r>
-            <a:endParaRPr lang="en-US" sz="1388" dirty="0"/>
-          </a:p>
-          <a:p>
-            <a:pPr algn="l" indent="0" marL="0">
-              <a:lnSpc>
-                <a:spcPct val="142000"/>
-              </a:lnSpc>
-              <a:buNone/>
-            </a:pPr>
-            <a:r>
-              <a:rPr lang="en-US" sz="1388" dirty="0">
-                <a:solidFill>
-                  <a:srgbClr val="B8C4D2"/>
-                </a:solidFill>
-                <a:latin typeface="IBM Plex Mono" pitchFamily="34" charset="0"/>
-                <a:ea typeface="IBM Plex Mono" pitchFamily="34" charset="-122"/>
-                <a:cs typeface="IBM Plex Mono" pitchFamily="34" charset="-120"/>
-              </a:rPr>
-              <a:t>  WHERE b.distance &lt; 6</a:t>
-            </a:r>
-            <a:endParaRPr lang="en-US" sz="1388" dirty="0"/>
-          </a:p>
-          <a:p>
-            <a:pPr algn="l" indent="0" marL="0">
-              <a:lnSpc>
-                <a:spcPct val="142000"/>
-              </a:lnSpc>
-              <a:buNone/>
-            </a:pPr>
-            <a:r>
-              <a:rPr lang="en-US" sz="1388" dirty="0">
-                <a:solidFill>
-                  <a:srgbClr val="B8C4D2"/>
-                </a:solidFill>
-                <a:latin typeface="IBM Plex Mono" pitchFamily="34" charset="0"/>
-                <a:ea typeface="IBM Plex Mono" pitchFamily="34" charset="-122"/>
-                <a:cs typeface="IBM Plex Mono" pitchFamily="34" charset="-120"/>
-              </a:rPr>
-              <a:t>)</a:t>
-            </a:r>
-            <a:endParaRPr lang="en-US" sz="1388" dirty="0"/>
-          </a:p>
-          <a:p>
-            <a:pPr algn="l" indent="0" marL="0">
-              <a:lnSpc>
-                <a:spcPct val="142000"/>
-              </a:lnSpc>
-              <a:buNone/>
-            </a:pPr>
-            <a:r>
-              <a:rPr lang="en-US" sz="1388" dirty="0">
-                <a:solidFill>
-                  <a:srgbClr val="B8C4D2"/>
-                </a:solidFill>
-                <a:latin typeface="IBM Plex Mono" pitchFamily="34" charset="0"/>
-                <a:ea typeface="IBM Plex Mono" pitchFamily="34" charset="-122"/>
-                <a:cs typeface="IBM Plex Mono" pitchFamily="34" charset="-120"/>
-              </a:rPr>
-              <a:t>SELECT MIN(distance) FROM bfs ...</a:t>
-            </a:r>
-            <a:endParaRPr lang="en-US" sz="1388" dirty="0"/>
-          </a:p>
-        </p:txBody>
-      </p:sp>
-      <p:sp>
-        <p:nvSpPr>
-          <p:cNvPr id="7" name="Text 5"/>
-          <p:cNvSpPr/>
-          <p:nvPr/>
-        </p:nvSpPr>
-        <p:spPr>
-          <a:xfrm>
-            <a:off x="7677158" y="3763618"/>
-            <a:ext cx="2933644" cy="751098"/>
-          </a:xfrm>
-          <a:prstGeom prst="rect">
-            <a:avLst/>
-          </a:prstGeom>
-          <a:noFill/>
-          <a:ln/>
-        </p:spPr>
-        <p:txBody>
-          <a:bodyPr wrap="square" lIns="25400" tIns="25400" rIns="25400" bIns="25400" rtlCol="0" anchor="t">
-            <a:normAutofit/>
-          </a:bodyPr>
-          <a:lstStyle/>
-          <a:p>
-            <a:pPr algn="ctr" indent="0" marL="0">
-              <a:buNone/>
-            </a:pPr>
-            <a:r>
-              <a:rPr lang="en-US" sz="4350" b="1" dirty="0">
-                <a:solidFill>
-                  <a:srgbClr val="1E7A52"/>
-                </a:solidFill>
-                <a:latin typeface="Space Grotesk" pitchFamily="34" charset="0"/>
-                <a:ea typeface="Space Grotesk" pitchFamily="34" charset="-122"/>
-                <a:cs typeface="Space Grotesk" pitchFamily="34" charset="-120"/>
-              </a:rPr>
-              <a:t>21 → 3</a:t>
-            </a:r>
-            <a:endParaRPr lang="en-US" sz="4350" dirty="0"/>
-          </a:p>
-        </p:txBody>
-      </p:sp>
-      <p:sp>
-        <p:nvSpPr>
-          <p:cNvPr id="8" name="Text 6"/>
-          <p:cNvSpPr/>
-          <p:nvPr/>
-        </p:nvSpPr>
-        <p:spPr>
-          <a:xfrm>
-            <a:off x="7677158" y="4514656"/>
-            <a:ext cx="2933644" cy="298953"/>
-          </a:xfrm>
-          <a:prstGeom prst="rect">
-            <a:avLst/>
-          </a:prstGeom>
-          <a:noFill/>
-          <a:ln/>
-        </p:spPr>
-        <p:txBody>
-          <a:bodyPr wrap="square" lIns="25400" tIns="25400" rIns="25400" bIns="25400" rtlCol="0" anchor="t">
-            <a:normAutofit/>
-          </a:bodyPr>
-          <a:lstStyle/>
-          <a:p>
-            <a:pPr algn="ctr" indent="0" marL="0">
-              <a:buNone/>
-            </a:pPr>
-            <a:r>
-              <a:rPr lang="en-US" sz="1575" dirty="0">
-                <a:solidFill>
-                  <a:srgbClr val="6B655C"/>
-                </a:solidFill>
-                <a:latin typeface="IBM Plex Mono" pitchFamily="34" charset="0"/>
-                <a:ea typeface="IBM Plex Mono" pitchFamily="34" charset="-122"/>
-                <a:cs typeface="IBM Plex Mono" pitchFamily="34" charset="-120"/>
-              </a:rPr>
-              <a:t>lines of code</a:t>
-            </a:r>
-            <a:endParaRPr lang="en-US" sz="1575" dirty="0"/>
-          </a:p>
-        </p:txBody>
-      </p:sp>
-      <p:sp>
-        <p:nvSpPr>
-          <p:cNvPr id="9" name="Text 7"/>
-          <p:cNvSpPr/>
-          <p:nvPr/>
-        </p:nvSpPr>
-        <p:spPr>
-          <a:xfrm>
-            <a:off x="7677158" y="5118286"/>
-            <a:ext cx="2933644" cy="751098"/>
-          </a:xfrm>
-          <a:prstGeom prst="rect">
-            <a:avLst/>
-          </a:prstGeom>
-          <a:noFill/>
-          <a:ln/>
-        </p:spPr>
-        <p:txBody>
-          <a:bodyPr wrap="square" lIns="25400" tIns="25400" rIns="25400" bIns="25400" rtlCol="0" anchor="t">
-            <a:normAutofit/>
-          </a:bodyPr>
-          <a:lstStyle/>
-          <a:p>
-            <a:pPr algn="ctr" indent="0" marL="0">
-              <a:buNone/>
-            </a:pPr>
-            <a:r>
-              <a:rPr lang="en-US" sz="4350" b="1" dirty="0">
-                <a:solidFill>
-                  <a:srgbClr val="1E7A52"/>
-                </a:solidFill>
-                <a:latin typeface="Space Grotesk" pitchFamily="34" charset="0"/>
-                <a:ea typeface="Space Grotesk" pitchFamily="34" charset="-122"/>
-                <a:cs typeface="Space Grotesk" pitchFamily="34" charset="-120"/>
-              </a:rPr>
-              <a:t>26 → 3</a:t>
-            </a:r>
-            <a:endParaRPr lang="en-US" sz="4350" dirty="0"/>
-          </a:p>
-        </p:txBody>
-      </p:sp>
-      <p:sp>
-        <p:nvSpPr>
-          <p:cNvPr id="10" name="Text 8"/>
-          <p:cNvSpPr/>
-          <p:nvPr/>
-        </p:nvSpPr>
-        <p:spPr>
-          <a:xfrm>
-            <a:off x="7677158" y="5869325"/>
-            <a:ext cx="2933644" cy="298953"/>
-          </a:xfrm>
-          <a:prstGeom prst="rect">
-            <a:avLst/>
-          </a:prstGeom>
-          <a:noFill/>
-          <a:ln/>
-        </p:spPr>
-        <p:txBody>
-          <a:bodyPr wrap="square" lIns="25400" tIns="25400" rIns="25400" bIns="25400" rtlCol="0" anchor="t">
-            <a:normAutofit/>
-          </a:bodyPr>
-          <a:lstStyle/>
-          <a:p>
-            <a:pPr algn="ctr" indent="0" marL="0">
-              <a:buNone/>
-            </a:pPr>
-            <a:r>
-              <a:rPr lang="en-US" sz="1575" dirty="0">
-                <a:solidFill>
-                  <a:srgbClr val="6B655C"/>
-                </a:solidFill>
-                <a:latin typeface="IBM Plex Mono" pitchFamily="34" charset="0"/>
-                <a:ea typeface="IBM Plex Mono" pitchFamily="34" charset="-122"/>
-                <a:cs typeface="IBM Plex Mono" pitchFamily="34" charset="-120"/>
-              </a:rPr>
-              <a:t>logical operators</a:t>
-            </a:r>
-            <a:endParaRPr lang="en-US" sz="1575" dirty="0"/>
-          </a:p>
-        </p:txBody>
-      </p:sp>
-      <p:sp>
-        <p:nvSpPr>
-          <p:cNvPr id="11" name="Text 9"/>
-          <p:cNvSpPr/>
-          <p:nvPr/>
-        </p:nvSpPr>
-        <p:spPr>
-          <a:xfrm>
-            <a:off x="7677158" y="6472955"/>
-            <a:ext cx="2933644" cy="751098"/>
-          </a:xfrm>
-          <a:prstGeom prst="rect">
-            <a:avLst/>
-          </a:prstGeom>
-          <a:noFill/>
-          <a:ln/>
-        </p:spPr>
-        <p:txBody>
-          <a:bodyPr wrap="square" lIns="25400" tIns="25400" rIns="25400" bIns="25400" rtlCol="0" anchor="t">
-            <a:normAutofit/>
-          </a:bodyPr>
-          <a:lstStyle/>
-          <a:p>
-            <a:pPr algn="ctr" indent="0" marL="0">
-              <a:buNone/>
-            </a:pPr>
-            <a:r>
-              <a:rPr lang="en-US" sz="4350" b="1" dirty="0">
-                <a:solidFill>
-                  <a:srgbClr val="1E7A52"/>
-                </a:solidFill>
-                <a:latin typeface="Space Grotesk" pitchFamily="34" charset="0"/>
-                <a:ea typeface="Space Grotesk" pitchFamily="34" charset="-122"/>
-                <a:cs typeface="Space Grotesk" pitchFamily="34" charset="-120"/>
-              </a:rPr>
-              <a:t>712 → 8</a:t>
-            </a:r>
-            <a:endParaRPr lang="en-US" sz="4350" dirty="0"/>
-          </a:p>
-        </p:txBody>
-      </p:sp>
-      <p:sp>
-        <p:nvSpPr>
-          <p:cNvPr id="12" name="Text 10"/>
-          <p:cNvSpPr/>
-          <p:nvPr/>
-        </p:nvSpPr>
-        <p:spPr>
-          <a:xfrm>
-            <a:off x="7677158" y="7223994"/>
-            <a:ext cx="2933644" cy="298953"/>
-          </a:xfrm>
-          <a:prstGeom prst="rect">
-            <a:avLst/>
-          </a:prstGeom>
-          <a:noFill/>
-          <a:ln/>
-        </p:spPr>
-        <p:txBody>
-          <a:bodyPr wrap="square" lIns="25400" tIns="25400" rIns="25400" bIns="25400" rtlCol="0" anchor="t">
-            <a:normAutofit/>
-          </a:bodyPr>
-          <a:lstStyle/>
-          <a:p>
-            <a:pPr algn="ctr" indent="0" marL="0">
-              <a:buNone/>
-            </a:pPr>
-            <a:r>
-              <a:rPr lang="en-US" sz="1575" dirty="0">
-                <a:solidFill>
-                  <a:srgbClr val="6B655C"/>
-                </a:solidFill>
-                <a:latin typeface="IBM Plex Mono" pitchFamily="34" charset="0"/>
-                <a:ea typeface="IBM Plex Mono" pitchFamily="34" charset="-122"/>
-                <a:cs typeface="IBM Plex Mono" pitchFamily="34" charset="-120"/>
-              </a:rPr>
-              <a:t>milliseconds</a:t>
-            </a:r>
-            <a:endParaRPr lang="en-US" sz="1575" dirty="0"/>
-          </a:p>
-        </p:txBody>
-      </p:sp>
-      <p:sp>
-        <p:nvSpPr>
-          <p:cNvPr id="13" name="Shape 11"/>
-          <p:cNvSpPr/>
-          <p:nvPr/>
-        </p:nvSpPr>
-        <p:spPr>
-          <a:xfrm>
-            <a:off x="10858408" y="2208011"/>
-            <a:ext cx="6477167" cy="6832443"/>
-          </a:xfrm>
-          <a:prstGeom prst="rect">
-            <a:avLst/>
-          </a:prstGeom>
-          <a:solidFill>
-            <a:srgbClr val="16202C"/>
-          </a:solidFill>
-          <a:ln/>
-        </p:spPr>
-      </p:sp>
-      <p:sp>
-        <p:nvSpPr>
-          <p:cNvPr id="14" name="Text 12"/>
-          <p:cNvSpPr/>
-          <p:nvPr/>
-        </p:nvSpPr>
-        <p:spPr>
-          <a:xfrm>
-            <a:off x="11239362" y="2531767"/>
-            <a:ext cx="6286785" cy="298953"/>
-          </a:xfrm>
-          <a:prstGeom prst="rect">
-            <a:avLst/>
-          </a:prstGeom>
-          <a:noFill/>
-          <a:ln/>
-        </p:spPr>
-        <p:txBody>
-          <a:bodyPr wrap="square" lIns="25400" tIns="25400" rIns="25400" bIns="25400" rtlCol="0" anchor="t">
-            <a:normAutofit/>
-          </a:bodyPr>
-          <a:lstStyle/>
-          <a:p>
-            <a:pPr algn="l" indent="0" marL="0">
-              <a:buNone/>
-            </a:pPr>
-            <a:r>
-              <a:rPr lang="en-US" sz="1575" spc="158" kern="0" dirty="0">
-                <a:solidFill>
-                  <a:srgbClr val="6FC79B"/>
-                </a:solidFill>
-                <a:latin typeface="IBM Plex Mono" pitchFamily="34" charset="0"/>
-                <a:ea typeface="IBM Plex Mono" pitchFamily="34" charset="-122"/>
-                <a:cs typeface="IBM Plex Mono" pitchFamily="34" charset="-120"/>
-              </a:rPr>
-              <a:t>NEO4J — BUILT-IN SHORTESTPATH()</a:t>
-            </a:r>
-            <a:endParaRPr lang="en-US" sz="1575" dirty="0"/>
-          </a:p>
-        </p:txBody>
-      </p:sp>
-      <p:sp>
-        <p:nvSpPr>
-          <p:cNvPr id="15" name="Text 13"/>
-          <p:cNvSpPr/>
-          <p:nvPr/>
-        </p:nvSpPr>
-        <p:spPr>
-          <a:xfrm>
-            <a:off x="11239362" y="4926179"/>
-            <a:ext cx="4944243" cy="1866244"/>
-          </a:xfrm>
-          <a:prstGeom prst="rect">
-            <a:avLst/>
-          </a:prstGeom>
-          <a:noFill/>
-          <a:ln/>
-        </p:spPr>
-        <p:txBody>
-          <a:bodyPr wrap="none" lIns="25400" tIns="25400" rIns="25400" bIns="25400" rtlCol="0" anchor="t">
-            <a:normAutofit/>
-          </a:bodyPr>
-          <a:lstStyle/>
-          <a:p>
-            <a:pPr algn="l" indent="0" marL="0">
-              <a:lnSpc>
-                <a:spcPct val="160000"/>
-              </a:lnSpc>
-              <a:buNone/>
-            </a:pPr>
-            <a:r>
-              <a:rPr lang="en-US" sz="2250" dirty="0">
+              <a:t>MATCH (a:Player {name: $player_a}),</a:t>
+            </a:r>
+            <a:endParaRPr lang="en-US" sz="2250" dirty="0"/>
+          </a:p>
+          <a:p>
+            <a:r>
+              <a:rPr sz="2250">
                 <a:solidFill>
                   <a:srgbClr val="D5E5DC"/>
                 </a:solidFill>
-                <a:latin typeface="IBM Plex Mono" pitchFamily="34" charset="0"/>
-                <a:ea typeface="IBM Plex Mono" pitchFamily="34" charset="-122"/>
-                <a:cs typeface="IBM Plex Mono" pitchFamily="34" charset="-120"/>
-              </a:rPr>
-              <a:t>MATCH path = shortestPath(</a:t>
-            </a:r>
-            <a:endParaRPr lang="en-US" sz="2250" dirty="0"/>
-          </a:p>
-          <a:p>
-            <a:pPr algn="l" indent="0" marL="0">
-              <a:lnSpc>
-                <a:spcPct val="160000"/>
-              </a:lnSpc>
-              <a:buNone/>
-            </a:pPr>
-            <a:r>
-              <a:rPr lang="en-US" sz="2250" dirty="0">
+                <a:latin typeface="IBM Plex Mono"/>
+              </a:rPr>
+              <a:t>      (b:Player {name: $player_b})</a:t>
+            </a:r>
+          </a:p>
+          <a:p>
+            <a:r>
+              <a:rPr sz="2250">
                 <a:solidFill>
                   <a:srgbClr val="D5E5DC"/>
                 </a:solidFill>
-                <a:latin typeface="IBM Plex Mono" pitchFamily="34" charset="0"/>
-                <a:ea typeface="IBM Plex Mono" pitchFamily="34" charset="-122"/>
-                <a:cs typeface="IBM Plex Mono" pitchFamily="34" charset="-120"/>
-              </a:rPr>
-              <a:t>  (a)-[:PLAYED_FOR*..12]-(b)</a:t>
-            </a:r>
-            <a:endParaRPr lang="en-US" sz="2250" dirty="0"/>
-          </a:p>
-          <a:p>
-            <a:pPr algn="l" indent="0" marL="0">
-              <a:lnSpc>
-                <a:spcPct val="160000"/>
-              </a:lnSpc>
-              <a:buNone/>
-            </a:pPr>
-            <a:r>
-              <a:rPr lang="en-US" sz="2250" dirty="0">
+                <a:latin typeface="IBM Plex Mono"/>
+              </a:rPr>
+              <a:t>MATCH path = SHORTEST 1 (a)</a:t>
+            </a:r>
+          </a:p>
+          <a:p>
+            <a:r>
+              <a:rPr sz="2250">
                 <a:solidFill>
                   <a:srgbClr val="D5E5DC"/>
                 </a:solidFill>
-                <a:latin typeface="IBM Plex Mono" pitchFamily="34" charset="0"/>
-                <a:ea typeface="IBM Plex Mono" pitchFamily="34" charset="-122"/>
-                <a:cs typeface="IBM Plex Mono" pitchFamily="34" charset="-120"/>
-              </a:rPr>
-              <a:t>)</a:t>
-            </a:r>
-            <a:endParaRPr lang="en-US" sz="2250" dirty="0"/>
-          </a:p>
-          <a:p>
-            <a:pPr algn="l" indent="0" marL="0">
-              <a:lnSpc>
-                <a:spcPct val="160000"/>
-              </a:lnSpc>
-              <a:buNone/>
-            </a:pPr>
-            <a:r>
-              <a:rPr lang="en-US" sz="2250" dirty="0">
+                <a:latin typeface="IBM Plex Mono"/>
+              </a:rPr>
+              <a:t>  ((x:Player)-[r1:PLAYED_FOR]-&gt;(:Team)</a:t>
+            </a:r>
+          </a:p>
+          <a:p>
+            <a:r>
+              <a:rPr sz="2250">
                 <a:solidFill>
                   <a:srgbClr val="D5E5DC"/>
                 </a:solidFill>
-                <a:latin typeface="IBM Plex Mono" pitchFamily="34" charset="0"/>
-                <a:ea typeface="IBM Plex Mono" pitchFamily="34" charset="-122"/>
-                <a:cs typeface="IBM Plex Mono" pitchFamily="34" charset="-120"/>
+                <a:latin typeface="IBM Plex Mono"/>
+              </a:rPr>
+              <a:t>    &lt;-[r2:PLAYED_FOR]-(y:Player)</a:t>
+            </a:r>
+          </a:p>
+          <a:p>
+            <a:r>
+              <a:rPr sz="2250">
+                <a:solidFill>
+                  <a:srgbClr val="D5E5DC"/>
+                </a:solidFill>
+                <a:latin typeface="IBM Plex Mono"/>
+              </a:rPr>
+              <a:t>    WHERE r1.season = r2.season){1,6}</a:t>
+            </a:r>
+          </a:p>
+          <a:p>
+            <a:r>
+              <a:rPr sz="2250">
+                <a:solidFill>
+                  <a:srgbClr val="D5E5DC"/>
+                </a:solidFill>
+                <a:latin typeface="IBM Plex Mono"/>
+              </a:rPr>
+              <a:t>  (b)</a:t>
+            </a:r>
+          </a:p>
+          <a:p>
+            <a:r>
+              <a:rPr sz="2250">
+                <a:solidFill>
+                  <a:srgbClr val="D5E5DC"/>
+                </a:solidFill>
+                <a:latin typeface="IBM Plex Mono"/>
               </a:rPr>
               <a:t>RETURN length(path) / 2;</a:t>
             </a:r>
-            <a:endParaRPr lang="en-US" sz="2250" dirty="0"/>
           </a:p>
         </p:txBody>
       </p:sp>
@@ -6916,7 +6641,7 @@
                 <a:ea typeface="Space Grotesk" pitchFamily="34" charset="-122"/>
                 <a:cs typeface="Space Grotesk" pitchFamily="34" charset="-120"/>
               </a:rPr>
-              <a:t>Cypher is not just faster: it's 7× shorter — and a schema change is one SET, not a migration</a:t>
+              <a:t>Cypher is not just faster: it's 4× shorter — and a schema change is one SET, not a migration</a:t>
             </a:r>
             <a:endParaRPr lang="en-US" sz="4350" dirty="0"/>
           </a:p>
@@ -7026,7 +6751,7 @@
                 <a:ea typeface="Space Grotesk" pitchFamily="34" charset="-122"/>
                 <a:cs typeface="Space Grotesk" pitchFamily="34" charset="-120"/>
               </a:rPr>
-              <a:t>7×</a:t>
+              <a:t>4×</a:t>
             </a:r>
             <a:endParaRPr lang="en-US" sz="7200" dirty="0"/>
           </a:p>
@@ -7081,7 +6806,7 @@
                 <a:ea typeface="IBM Plex Mono" pitchFamily="34" charset="-122"/>
                 <a:cs typeface="IBM Plex Mono" pitchFamily="34" charset="-120"/>
               </a:rPr>
-              <a:t>21 SQL → 3 Cypher</a:t>
+              <a:t>21 SQL → 5 Cypher</a:t>
             </a:r>
             <a:endParaRPr lang="en-US" sz="2100" dirty="0"/>
           </a:p>
@@ -7125,7 +6850,7 @@
                 <a:ea typeface="Space Grotesk" pitchFamily="34" charset="-122"/>
                 <a:cs typeface="Space Grotesk" pitchFamily="34" charset="-120"/>
               </a:rPr>
-              <a:t>8.7×</a:t>
+              <a:t>5×</a:t>
             </a:r>
             <a:endParaRPr lang="en-US" sz="7200" dirty="0"/>
           </a:p>
@@ -7180,7 +6905,7 @@
                 <a:ea typeface="IBM Plex Mono" pitchFamily="34" charset="-122"/>
                 <a:cs typeface="IBM Plex Mono" pitchFamily="34" charset="-120"/>
               </a:rPr>
-              <a:t>26 SQL → 3 Cypher</a:t>
+              <a:t>26 SQL → 5 Cypher</a:t>
             </a:r>
             <a:endParaRPr lang="en-US" sz="2100" dirty="0"/>
           </a:p>
@@ -7693,7 +7418,7 @@
                 <a:ea typeface="Space Grotesk" pitchFamily="34" charset="-122"/>
                 <a:cs typeface="Space Grotesk" pitchFamily="34" charset="-120"/>
               </a:rPr>
-              <a:t>443 ms vs 32 ms (13.7×) </a:t>
+              <a:t>352 ms vs 78 ms (4.5×, measured through COMMIT) </a:t>
             </a:r>
             <a:pPr algn="l" indent="0" marL="0">
               <a:lnSpc>
@@ -8022,7 +7747,7 @@
                 <a:ea typeface="Space Grotesk" pitchFamily="34" charset="-122"/>
                 <a:cs typeface="Space Grotesk" pitchFamily="34" charset="-120"/>
               </a:rPr>
-              <a:t>Postgres still wins where it has always won</a:t>
+              <a:t>Where the depth is fixed, the relational join still wins</a:t>
             </a:r>
             <a:endParaRPr lang="en-US" sz="2325" dirty="0"/>
           </a:p>
@@ -8066,7 +7791,7 @@
                 <a:ea typeface="Space Grotesk" pitchFamily="34" charset="-122"/>
                 <a:cs typeface="Space Grotesk" pitchFamily="34" charset="-120"/>
               </a:rPr>
-              <a:t>Aggregations and small-fan-out joins (Q02, Q03): 30 years of planner optimisation no graph engine matches.</a:t>
+              <a:t>Two-hop teammates (Q09): with the same precomputed relation, B-tree joins beat the traversal 2.1× — and the gap widens with data. Light aggregations (&lt; 15 ms) are a dead heat: the winner flips between runs.</a:t>
             </a:r>
             <a:endParaRPr lang="en-US" sz="1800" dirty="0"/>
           </a:p>
@@ -8179,7 +7904,7 @@
                 <a:ea typeface="Space Grotesk" pitchFamily="34" charset="-122"/>
                 <a:cs typeface="Space Grotesk" pitchFamily="34" charset="-120"/>
               </a:rPr>
-              <a:t>Neo4j wins graph workloads by an order of magnitude</a:t>
+              <a:t>Neo4j wins where the depth is variable — by a class</a:t>
             </a:r>
             <a:endParaRPr lang="en-US" sz="2325" dirty="0"/>
           </a:p>
@@ -8223,7 +7948,7 @@
                 <a:ea typeface="Space Grotesk" pitchFamily="34" charset="-122"/>
                 <a:cs typeface="Space Grotesk" pitchFamily="34" charset="-120"/>
               </a:rPr>
-              <a:t>Q07 6.2×, Q10 89× — and the Cypher code is dramatically more concise on exactly those queries.</a:t>
+              <a:t>Q10 57× with identical semantics: the recursive CTE explores 44,251 states, SHORTEST 1 touches 4,402 db hits. Q07 (1.9×) and Q06 (3.6×) follow, and Neo4j's edge on Q07 grows with the data.</a:t>
             </a:r>
             <a:endParaRPr lang="en-US" sz="1800" dirty="0"/>
           </a:p>
@@ -8380,7 +8105,7 @@
                 <a:ea typeface="Space Grotesk" pitchFamily="34" charset="-122"/>
                 <a:cs typeface="Space Grotesk" pitchFamily="34" charset="-120"/>
               </a:rPr>
-              <a:t>One SET vs ALTER + UPDATE. In change-heavy environments this matters more than raw milliseconds.</a:t>
+              <a:t>One SET vs ALTER + UPDATE: 4.5× measured through commit. In change-heavy environments this matters more than raw milliseconds.</a:t>
             </a:r>
             <a:endParaRPr lang="en-US" sz="1800" dirty="0"/>
           </a:p>
@@ -8482,7 +8207,7 @@
                 <a:ea typeface="Space Grotesk" pitchFamily="34" charset="-122"/>
                 <a:cs typeface="Space Grotesk" pitchFamily="34" charset="-120"/>
               </a:rPr>
-              <a:t>Single node, single user, default configs, medium scale — full limitations &amp; future work in backup.</a:t>
+              <a:t>Single node, single user, default configs. Four sensitivity analyses in the report: work_mem (no effect), Q10 semantics (fixed), MVCC bloat (VACUUM protocol), scaling on 2/4/8 seasons (measured).</a:t>
             </a:r>
             <a:endParaRPr lang="en-US" sz="1875" dirty="0"/>
           </a:p>
@@ -9440,7 +9165,7 @@
                 <a:ea typeface="IBM Plex Mono" pitchFamily="34" charset="-122"/>
                 <a:cs typeface="IBM Plex Mono" pitchFamily="34" charset="-120"/>
               </a:rPr>
-              <a:t>github.com/g1up3 · github.com/theunick reports/benchmark_report.md</a:t>
+              <a:t>github.com/g1up3/DM-Project-2026 · reports/benchmark_report.md</a:t>
             </a:r>
             <a:endParaRPr lang="en-US" sz="1650" dirty="0"/>
           </a:p>
@@ -11682,7 +11407,7 @@
                 <a:ea typeface="Space Grotesk" pitchFamily="34" charset="-122"/>
                 <a:cs typeface="Space Grotesk" pitchFamily="34" charset="-120"/>
               </a:rPr>
-              <a:t>917k events. LDBC-SNB-style graphs at 10× would stress the traversal advantage further.</a:t>
+              <a:t>Measured on 2/4/8 seasons: Neo4j's aggregation edge widens with data, Postgres' fixed-depth join edge too. LDBC-SNB scale is future work.</a:t>
             </a:r>
             <a:endParaRPr lang="en-US" sz="1800" dirty="0"/>
           </a:p>
@@ -12035,7 +11760,7 @@
                 <a:ea typeface="Space Grotesk" pitchFamily="34" charset="-122"/>
                 <a:cs typeface="Space Grotesk" pitchFamily="34" charset="-120"/>
               </a:rPr>
-              <a:t>No absolute winner: Neo4j dominates traversals — up to 89× — while Postgres wins every aggregation</a:t>
+              <a:t>No absolute winner: Neo4j dominates variable-depth traversals — 57× on shortest path — while light aggregations are a dead heat and Postgres keeps the fixed-depth join</a:t>
             </a:r>
             <a:endParaRPr lang="en-US" sz="4650" dirty="0"/>
           </a:p>
@@ -12104,7 +11829,7 @@
                 <a:ea typeface="Space Grotesk" pitchFamily="34" charset="-122"/>
                 <a:cs typeface="Space Grotesk" pitchFamily="34" charset="-120"/>
               </a:rPr>
-              <a:t>89×</a:t>
+              <a:t>57×</a:t>
             </a:r>
             <a:endParaRPr lang="en-US" sz="9750" dirty="0"/>
           </a:p>
@@ -12189,7 +11914,7 @@
                 <a:ea typeface="Space Grotesk" pitchFamily="34" charset="-122"/>
                 <a:cs typeface="Space Grotesk" pitchFamily="34" charset="-120"/>
               </a:rPr>
-              <a:t>Q10: 712 ms in Postgres, 8 ms in Neo4j — a change of complexity class, not a tuning win.</a:t>
+              <a:t>Q10: 671 ms in Postgres, 12 ms in Neo4j — identical semantics, a change of complexity class.</a:t>
             </a:r>
             <a:endParaRPr lang="en-US" sz="1800" dirty="0"/>
           </a:p>
@@ -12258,7 +11983,7 @@
                 <a:ea typeface="Space Grotesk" pitchFamily="34" charset="-122"/>
                 <a:cs typeface="Space Grotesk" pitchFamily="34" charset="-120"/>
               </a:rPr>
-              <a:t>4/4</a:t>
+              <a:t>2.1×</a:t>
             </a:r>
             <a:endParaRPr lang="en-US" sz="9750" dirty="0"/>
           </a:p>
@@ -12299,7 +12024,7 @@
                 <a:ea typeface="Space Grotesk" pitchFamily="34" charset="-122"/>
                 <a:cs typeface="Space Grotesk" pitchFamily="34" charset="-120"/>
               </a:rPr>
-              <a:t>relational queries won by Postgres</a:t>
+              <a:t>Postgres on the fixed-depth join (Q09)</a:t>
             </a:r>
             <a:endParaRPr lang="en-US" sz="2250" dirty="0"/>
           </a:p>
@@ -12343,7 +12068,7 @@
                 <a:ea typeface="Space Grotesk" pitchFamily="34" charset="-122"/>
                 <a:cs typeface="Space Grotesk" pitchFamily="34" charset="-120"/>
               </a:rPr>
-              <a:t>Aggregations and small joins: 30 years of planner optimisation still pay off.</a:t>
+              <a:t>With the same precomputation, B-tree joins beat the traversal — and the lead widens as data grows. The four light aggregations (&lt; 15 ms) are a dead heat.</a:t>
             </a:r>
             <a:endParaRPr lang="en-US" sz="1800" dirty="0"/>
           </a:p>
@@ -12412,7 +12137,7 @@
                 <a:ea typeface="Space Grotesk" pitchFamily="34" charset="-122"/>
                 <a:cs typeface="Space Grotesk" pitchFamily="34" charset="-120"/>
               </a:rPr>
-              <a:t>7×</a:t>
+              <a:t>4×</a:t>
             </a:r>
             <a:endParaRPr lang="en-US" sz="9750" dirty="0"/>
           </a:p>
@@ -12497,7 +12222,7 @@
                 <a:ea typeface="Space Grotesk" pitchFamily="34" charset="-122"/>
                 <a:cs typeface="Space Grotesk" pitchFamily="34" charset="-120"/>
               </a:rPr>
-              <a:t>21 SQL lines become 3 Cypher lines on graph queries — expressiveness is a result too.</a:t>
+              <a:t>21 SQL lines become 5 Cypher lines on graph queries — expressiveness is a result too.</a:t>
             </a:r>
             <a:endParaRPr lang="en-US" sz="1800" dirty="0"/>
           </a:p>
@@ -17934,7 +17659,7 @@
                 <a:ea typeface="IBM Plex Mono" pitchFamily="34" charset="-122"/>
                 <a:cs typeface="IBM Plex Mono" pitchFamily="34" charset="-120"/>
               </a:rPr>
-              <a:t>PostgreSQL 18.3 </a:t>
+              <a:t>PostgreSQL 18.6 </a:t>
             </a:r>
             <a:pPr algn="l" indent="0" marL="0">
               <a:lnSpc>
@@ -18540,7 +18265,7 @@
                 <a:ea typeface="Space Grotesk" pitchFamily="34" charset="-122"/>
                 <a:cs typeface="Space Grotesk" pitchFamily="34" charset="-120"/>
               </a:rPr>
-              <a:t>Both result-sets normalised (rounding, dates, decimals) and compared as sets. </a:t>
+              <a:t>Both result-sets normalised (rounding, dates, decimals) and compared as multisets. </a:t>
             </a:r>
             <a:pPr algn="l" indent="0" marL="0">
               <a:lnSpc>
@@ -18844,7 +18569,7 @@
                 <a:ea typeface="Space Grotesk" pitchFamily="34" charset="-122"/>
                 <a:cs typeface="Space Grotesk" pitchFamily="34" charset="-120"/>
               </a:rPr>
-              <a:t>on Q08–Q10.</a:t>
+              <a:t>on Q09–Q10.</a:t>
             </a:r>
             <a:endParaRPr lang="en-US" sz="1950" dirty="0"/>
           </a:p>

--- a/PostgreSQL_vs_Neo4j_DAngelica_Leone.pptx
+++ b/PostgreSQL_vs_Neo4j_DAngelica_Leone.pptx
@@ -19,10 +19,12 @@
     <p:sldId id="267" r:id="rId13"/>
     <p:sldId id="268" r:id="rId14"/>
     <p:sldId id="269" r:id="rId15"/>
+    <p:sldId id="274" r:id="rId25"/>
     <p:sldId id="270" r:id="rId16"/>
     <p:sldId id="271" r:id="rId17"/>
     <p:sldId id="272" r:id="rId18"/>
     <p:sldId id="273" r:id="rId19"/>
+    <p:sldId id="275" r:id="rId26"/>
   </p:sldIdLst>
   <p:notesMasterIdLst>
     <p:notesMasterId r:id="rId20"/>
@@ -1347,6 +1349,76 @@
 </p:notes>
 </file>
 
+<file path=ppt/notesSlides/notesSlide19.xml><?xml version="1.0" encoding="utf-8"?>
+<p:notes xmlns:a="http://schemas.openxmlformats.org/drawingml/2006/main" xmlns:p="http://schemas.openxmlformats.org/presentationml/2006/main" xmlns:r="http://schemas.openxmlformats.org/officeDocument/2006/relationships">
+  <p:cSld>
+    <p:spTree>
+      <p:nvGrpSpPr>
+        <p:cNvPr id="1" name=""/>
+        <p:cNvGrpSpPr/>
+        <p:nvPr/>
+      </p:nvGrpSpPr>
+      <p:grpSpPr>
+        <a:xfrm>
+          <a:off x="0" y="0"/>
+          <a:ext cx="0" cy="0"/>
+          <a:chOff x="0" y="0"/>
+          <a:chExt cx="0" cy="0"/>
+        </a:xfrm>
+      </p:grpSpPr>
+      <p:sp>
+        <p:nvSpPr>
+          <p:cNvPr id="2" name="Slide Image Placeholder 1"/>
+          <p:cNvSpPr>
+            <a:spLocks noGrp="1"/>
+          </p:cNvSpPr>
+          <p:nvPr>
+            <p:ph type="sldImg" idx="2"/>
+          </p:nvPr>
+        </p:nvSpPr>
+        <p:spPr/>
+      </p:sp>
+      <p:sp>
+        <p:nvSpPr>
+          <p:cNvPr id="3" name="Notes Placeholder 2"/>
+          <p:cNvSpPr>
+            <a:spLocks noGrp="1"/>
+          </p:cNvSpPr>
+          <p:nvPr>
+            <p:ph type="body" idx="3" sz="quarter"/>
+          </p:nvPr>
+        </p:nvSpPr>
+        <p:spPr/>
+        <p:txBody>
+          <a:bodyPr/>
+          <a:lstStyle/>
+          <a:p>
+            <a:r>
+              <a:t>Two dimensions the benchmark numbers hide. Ease of use: schema-first is a feature, not friction — the FK check caught 5,632 orphan references that Neo4j would have loaded silently; and keeping the two systems side by side caught three more silent bugs. Scalability, measured: on Q07 Postgres grows 3.3x with 4x the data while Neo4j grows 1.3x — the graph edge widens; on Q09 the fixed-depth join keeps its lead at every size. Caveat: all of this is single node — index-free adjacency does not partition for free.</a:t>
+            </a:r>
+          </a:p>
+        </p:txBody>
+      </p:sp>
+      <p:sp>
+        <p:nvSpPr>
+          <p:cNvPr id="4" name="Slide Number Placeholder 3"/>
+          <p:cNvSpPr>
+            <a:spLocks noGrp="1"/>
+          </p:cNvSpPr>
+          <p:nvPr>
+            <p:ph type="sldNum" idx="5" sz="quarter"/>
+          </p:nvPr>
+        </p:nvSpPr>
+        <p:spPr/>
+      </p:sp>
+    </p:spTree>
+  </p:cSld>
+  <p:clrMapOvr>
+    <a:masterClrMapping/>
+  </p:clrMapOvr>
+</p:notes>
+</file>
+
 <file path=ppt/notesSlides/notesSlide2.xml><?xml version="1.0" encoding="utf-8"?>
 <p:notes xmlns:a="http://schemas.openxmlformats.org/drawingml/2006/main" xmlns:r="http://schemas.openxmlformats.org/officeDocument/2006/relationships" xmlns:p="http://schemas.openxmlformats.org/presentationml/2006/main">
   <p:cSld>
@@ -1428,6 +1500,76 @@
         <p14:creationId xmlns:p14="http://schemas.microsoft.com/office/powerpoint/2010/main" val="1024086991"/>
       </p:ext>
     </p:extLst>
+  </p:cSld>
+  <p:clrMapOvr>
+    <a:masterClrMapping/>
+  </p:clrMapOvr>
+</p:notes>
+</file>
+
+<file path=ppt/notesSlides/notesSlide20.xml><?xml version="1.0" encoding="utf-8"?>
+<p:notes xmlns:a="http://schemas.openxmlformats.org/drawingml/2006/main" xmlns:p="http://schemas.openxmlformats.org/presentationml/2006/main" xmlns:r="http://schemas.openxmlformats.org/officeDocument/2006/relationships">
+  <p:cSld>
+    <p:spTree>
+      <p:nvGrpSpPr>
+        <p:cNvPr id="1" name=""/>
+        <p:cNvGrpSpPr/>
+        <p:nvPr/>
+      </p:nvGrpSpPr>
+      <p:grpSpPr>
+        <a:xfrm>
+          <a:off x="0" y="0"/>
+          <a:ext cx="0" cy="0"/>
+          <a:chOff x="0" y="0"/>
+          <a:chExt cx="0" cy="0"/>
+        </a:xfrm>
+      </p:grpSpPr>
+      <p:sp>
+        <p:nvSpPr>
+          <p:cNvPr id="2" name="Slide Image Placeholder 1"/>
+          <p:cNvSpPr>
+            <a:spLocks noGrp="1"/>
+          </p:cNvSpPr>
+          <p:nvPr>
+            <p:ph type="sldImg" idx="2"/>
+          </p:nvPr>
+        </p:nvSpPr>
+        <p:spPr/>
+      </p:sp>
+      <p:sp>
+        <p:nvSpPr>
+          <p:cNvPr id="3" name="Notes Placeholder 2"/>
+          <p:cNvSpPr>
+            <a:spLocks noGrp="1"/>
+          </p:cNvSpPr>
+          <p:nvPr>
+            <p:ph type="body" idx="3" sz="quarter"/>
+          </p:nvPr>
+        </p:nvSpPr>
+        <p:spPr/>
+        <p:txBody>
+          <a:bodyPr/>
+          <a:lstStyle/>
+          <a:p>
+            <a:r>
+              <a:t>Backup for the Q&amp;A: one line per query, with the category. Use it if the professor asks what a specific query does before asking us to write it live.</a:t>
+            </a:r>
+          </a:p>
+        </p:txBody>
+      </p:sp>
+      <p:sp>
+        <p:nvSpPr>
+          <p:cNvPr id="4" name="Slide Number Placeholder 3"/>
+          <p:cNvSpPr>
+            <a:spLocks noGrp="1"/>
+          </p:cNvSpPr>
+          <p:nvPr>
+            <p:ph type="sldNum" idx="5" sz="quarter"/>
+          </p:nvPr>
+        </p:nvSpPr>
+        <p:spPr/>
+      </p:sp>
+    </p:spTree>
   </p:cSld>
   <p:clrMapOvr>
     <a:masterClrMapping/>
@@ -2807,7 +2949,7 @@
                 <a:ea typeface="Space Grotesk" pitchFamily="34" charset="-122"/>
                 <a:cs typeface="Space Grotesk" pitchFamily="34" charset="-120"/>
               </a:rPr>
-              <a:t>Category A (&lt; 15 ms) is a dead heat; Postgres wins the fixed-depth join (Q09), Neo4j wins every variable-depth traversal and every write</a:t>
+              <a:t>Category A is a dead heat; Postgres wins the fixed-depth join, Neo4j every variable-depth traversal and every write</a:t>
             </a:r>
             <a:endParaRPr lang="en-US" sz="4350" dirty="0"/>
           </a:p>
@@ -2815,2349 +2957,233 @@
       </p:sp>
       <p:sp>
         <p:nvSpPr>
-          <p:cNvPr id="4" name="Text 2"/>
-          <p:cNvSpPr/>
-          <p:nvPr/>
-        </p:nvSpPr>
-        <p:spPr>
-          <a:xfrm>
-            <a:off x="952385" y="2842753"/>
-            <a:ext cx="2943148" cy="281551"/>
-          </a:xfrm>
-          <a:prstGeom prst="rect">
-            <a:avLst/>
-          </a:prstGeom>
-          <a:noFill/>
-          <a:ln/>
-        </p:spPr>
-        <p:txBody>
-          <a:bodyPr wrap="square" lIns="25400" tIns="25400" rIns="25400" bIns="25400" rtlCol="0" anchor="t">
-            <a:normAutofit/>
-          </a:bodyPr>
-          <a:lstStyle/>
-          <a:p>
-            <a:pPr algn="l" indent="0" marL="0">
-              <a:buNone/>
-            </a:pPr>
-            <a:r>
-              <a:rPr lang="en-US" sz="1500" dirty="0">
-                <a:solidFill>
-                  <a:srgbClr val="9A938A"/>
+          <p:cNvPr id="69" name="Text 67"/>
+          <p:cNvSpPr/>
+          <p:nvPr/>
+        </p:nvSpPr>
+        <p:spPr>
+          <a:xfrm>
+            <a:off x="952385" y="8732520"/>
+            <a:ext cx="2341086" cy="316343"/>
+          </a:xfrm>
+          <a:prstGeom prst="rect">
+            <a:avLst/>
+          </a:prstGeom>
+          <a:noFill/>
+          <a:ln/>
+        </p:spPr>
+        <p:txBody>
+          <a:bodyPr wrap="square" lIns="25400" tIns="25400" rIns="25400" bIns="25400" rtlCol="0" anchor="t">
+            <a:normAutofit/>
+          </a:bodyPr>
+          <a:lstStyle/>
+          <a:p>
+            <a:pPr algn="l" indent="0" marL="0">
+              <a:buNone/>
+            </a:pPr>
+            <a:r>
+              <a:rPr lang="en-US" sz="1725" dirty="0">
+                <a:solidFill>
+                  <a:srgbClr val="6B655C"/>
+                </a:solidFill>
+                <a:latin typeface="Space Grotesk" pitchFamily="34" charset="0"/>
+                <a:ea typeface="Space Grotesk" pitchFamily="34" charset="-122"/>
+                <a:cs typeface="Space Grotesk" pitchFamily="34" charset="-120"/>
+              </a:rPr>
+              <a:t>Postgres wins (2)</a:t>
+            </a:r>
+            <a:endParaRPr lang="en-US" sz="1725" dirty="0"/>
+          </a:p>
+        </p:txBody>
+      </p:sp>
+      <p:sp>
+        <p:nvSpPr>
+          <p:cNvPr id="70" name="Text 68"/>
+          <p:cNvSpPr/>
+          <p:nvPr/>
+        </p:nvSpPr>
+        <p:spPr>
+          <a:xfrm>
+            <a:off x="3556837" y="8732520"/>
+            <a:ext cx="4023360" cy="316343"/>
+          </a:xfrm>
+          <a:prstGeom prst="rect">
+            <a:avLst/>
+          </a:prstGeom>
+          <a:noFill/>
+          <a:ln/>
+        </p:spPr>
+        <p:txBody>
+          <a:bodyPr wrap="square" lIns="25400" tIns="25400" rIns="25400" bIns="25400" rtlCol="0" anchor="t">
+            <a:normAutofit/>
+          </a:bodyPr>
+          <a:lstStyle/>
+          <a:p>
+            <a:pPr algn="l" indent="0" marL="0">
+              <a:buNone/>
+            </a:pPr>
+            <a:r>
+              <a:rPr lang="en-US" sz="1725" dirty="0">
+                <a:solidFill>
+                  <a:srgbClr val="6B655C"/>
+                </a:solidFill>
+                <a:latin typeface="Space Grotesk" pitchFamily="34" charset="0"/>
+                <a:ea typeface="Space Grotesk" pitchFamily="34" charset="-122"/>
+                <a:cs typeface="Space Grotesk" pitchFamily="34" charset="-120"/>
+              </a:rPr>
+              <a:t>Neo4j wins (9) · not significant (1)</a:t>
+            </a:r>
+            <a:endParaRPr lang="en-US" sz="1725" dirty="0"/>
+          </a:p>
+        </p:txBody>
+      </p:sp>
+      <p:sp>
+        <p:nvSpPr>
+          <p:cNvPr id="71" name="Text 69"/>
+          <p:cNvSpPr/>
+          <p:nvPr/>
+        </p:nvSpPr>
+        <p:spPr>
+          <a:xfrm>
+            <a:off x="7680960" y="8741664"/>
+            <a:ext cx="9601200" cy="298953"/>
+          </a:xfrm>
+          <a:prstGeom prst="rect">
+            <a:avLst/>
+          </a:prstGeom>
+          <a:noFill/>
+          <a:ln/>
+        </p:spPr>
+        <p:txBody>
+          <a:bodyPr wrap="square" lIns="25400" tIns="25400" rIns="25400" bIns="25400" rtlCol="0" anchor="t">
+            <a:normAutofit/>
+          </a:bodyPr>
+          <a:lstStyle/>
+          <a:p>
+            <a:pPr algn="l" indent="0" marL="0">
+              <a:buNone/>
+            </a:pPr>
+            <a:r>
+              <a:rPr lang="en-US" sz="1575" dirty="0">
+                <a:solidFill>
+                  <a:srgbClr val="6B655C"/>
                 </a:solidFill>
                 <a:latin typeface="IBM Plex Mono" pitchFamily="34" charset="0"/>
                 <a:ea typeface="IBM Plex Mono" pitchFamily="34" charset="-122"/>
                 <a:cs typeface="IBM Plex Mono" pitchFamily="34" charset="-120"/>
               </a:rPr>
-              <a:t>QUERY</a:t>
-            </a:r>
-            <a:endParaRPr lang="en-US" sz="1500" dirty="0"/>
-          </a:p>
-        </p:txBody>
-      </p:sp>
-      <p:sp>
-        <p:nvSpPr>
-          <p:cNvPr id="5" name="Shape 3"/>
-          <p:cNvSpPr/>
-          <p:nvPr/>
-        </p:nvSpPr>
-        <p:spPr>
-          <a:xfrm>
-            <a:off x="7411889" y="2842753"/>
-            <a:ext cx="17390" cy="338701"/>
-          </a:xfrm>
-          <a:prstGeom prst="rect">
-            <a:avLst/>
-          </a:prstGeom>
-          <a:solidFill>
-            <a:srgbClr val="1A2430"/>
-          </a:solidFill>
-          <a:ln/>
-        </p:spPr>
-      </p:sp>
-      <p:sp>
-        <p:nvSpPr>
-          <p:cNvPr id="6" name="Text 4"/>
-          <p:cNvSpPr/>
-          <p:nvPr/>
-        </p:nvSpPr>
-        <p:spPr>
-          <a:xfrm>
-            <a:off x="3701226" y="2842753"/>
-            <a:ext cx="3577313" cy="281551"/>
-          </a:xfrm>
-          <a:prstGeom prst="rect">
-            <a:avLst/>
-          </a:prstGeom>
-          <a:noFill/>
-          <a:ln/>
-        </p:spPr>
-        <p:txBody>
-          <a:bodyPr wrap="square" lIns="25400" tIns="25400" rIns="25400" bIns="25400" rtlCol="0" anchor="t">
-            <a:normAutofit/>
-          </a:bodyPr>
-          <a:lstStyle/>
-          <a:p>
-            <a:pPr algn="r" indent="0" marL="0">
-              <a:buNone/>
-            </a:pPr>
-            <a:r>
-              <a:rPr lang="en-US" sz="1500" dirty="0">
-                <a:solidFill>
-                  <a:srgbClr val="33608F"/>
+              <a:t>saturated bars = significant (11/12) · Mann-Whitney U, p &lt; 0.05, Holm-corrected · all results equivalent (multiset)</a:t>
+            </a:r>
+            <a:endParaRPr lang="en-US" sz="1575" dirty="0"/>
+          </a:p>
+        </p:txBody>
+      </p:sp>
+      <p:sp>
+        <p:nvSpPr>
+          <p:cNvPr id="72" name="Text 70"/>
+          <p:cNvSpPr/>
+          <p:nvPr/>
+        </p:nvSpPr>
+        <p:spPr>
+          <a:xfrm>
+            <a:off x="952385" y="9633214"/>
+            <a:ext cx="6329527" cy="272868"/>
+          </a:xfrm>
+          <a:prstGeom prst="rect">
+            <a:avLst/>
+          </a:prstGeom>
+          <a:noFill/>
+          <a:ln/>
+        </p:spPr>
+        <p:txBody>
+          <a:bodyPr wrap="square" lIns="25400" tIns="25400" rIns="25400" bIns="25400" rtlCol="0" anchor="t">
+            <a:normAutofit/>
+          </a:bodyPr>
+          <a:lstStyle/>
+          <a:p>
+            <a:pPr algn="l" indent="0" marL="0">
+              <a:buNone/>
+            </a:pPr>
+            <a:r>
+              <a:rPr lang="en-US" sz="1425" dirty="0">
+                <a:solidFill>
+                  <a:srgbClr val="9A938A"/>
                 </a:solidFill>
                 <a:latin typeface="IBM Plex Mono" pitchFamily="34" charset="0"/>
                 <a:ea typeface="IBM Plex Mono" pitchFamily="34" charset="-122"/>
                 <a:cs typeface="IBM Plex Mono" pitchFamily="34" charset="-120"/>
               </a:rPr>
-              <a:t>◀ POSTGRES FASTER</a:t>
-            </a:r>
-            <a:endParaRPr lang="en-US" sz="1500" dirty="0"/>
-          </a:p>
-        </p:txBody>
-      </p:sp>
-      <p:sp>
-        <p:nvSpPr>
-          <p:cNvPr id="7" name="Text 5"/>
-          <p:cNvSpPr/>
-          <p:nvPr/>
-        </p:nvSpPr>
-        <p:spPr>
-          <a:xfrm>
-            <a:off x="7562630" y="2842753"/>
-            <a:ext cx="3594703" cy="281551"/>
-          </a:xfrm>
-          <a:prstGeom prst="rect">
-            <a:avLst/>
-          </a:prstGeom>
-          <a:noFill/>
-          <a:ln/>
-        </p:spPr>
-        <p:txBody>
-          <a:bodyPr wrap="square" lIns="25400" tIns="25400" rIns="25400" bIns="25400" rtlCol="0" anchor="t">
-            <a:normAutofit/>
-          </a:bodyPr>
-          <a:lstStyle/>
-          <a:p>
-            <a:pPr algn="l" indent="0" marL="0">
-              <a:buNone/>
-            </a:pPr>
-            <a:r>
-              <a:rPr lang="en-US" sz="1500" dirty="0">
-                <a:solidFill>
-                  <a:srgbClr val="1E7A52"/>
+              <a:t>DM 2025/26 · D'Angelica &amp; Leone · PostgreSQL vs Neo4j</a:t>
+            </a:r>
+            <a:endParaRPr lang="en-US" sz="1425" dirty="0"/>
+          </a:p>
+        </p:txBody>
+      </p:sp>
+      <p:sp>
+        <p:nvSpPr>
+          <p:cNvPr id="73" name="Text 71"/>
+          <p:cNvSpPr/>
+          <p:nvPr/>
+        </p:nvSpPr>
+        <p:spPr>
+          <a:xfrm>
+            <a:off x="16575568" y="9633214"/>
+            <a:ext cx="836206" cy="272868"/>
+          </a:xfrm>
+          <a:prstGeom prst="rect">
+            <a:avLst/>
+          </a:prstGeom>
+          <a:noFill/>
+          <a:ln/>
+        </p:spPr>
+        <p:txBody>
+          <a:bodyPr wrap="square" lIns="25400" tIns="25400" rIns="25400" bIns="25400" rtlCol="0" anchor="t">
+            <a:normAutofit/>
+          </a:bodyPr>
+          <a:lstStyle/>
+          <a:p>
+            <a:pPr algn="l" indent="0" marL="0">
+              <a:buNone/>
+            </a:pPr>
+            <a:r>
+              <a:rPr lang="en-US" sz="1425" dirty="0">
+                <a:solidFill>
+                  <a:srgbClr val="9A938A"/>
                 </a:solidFill>
                 <a:latin typeface="IBM Plex Mono" pitchFamily="34" charset="0"/>
                 <a:ea typeface="IBM Plex Mono" pitchFamily="34" charset="-122"/>
                 <a:cs typeface="IBM Plex Mono" pitchFamily="34" charset="-120"/>
               </a:rPr>
-              <a:t>NEO4J FASTER ▶</a:t>
-            </a:r>
-            <a:endParaRPr lang="en-US" sz="1500" dirty="0"/>
-          </a:p>
-        </p:txBody>
-      </p:sp>
-      <p:sp>
-        <p:nvSpPr>
-          <p:cNvPr id="8" name="Text 6"/>
-          <p:cNvSpPr/>
-          <p:nvPr/>
-        </p:nvSpPr>
-        <p:spPr>
-          <a:xfrm>
-            <a:off x="10860144" y="2842753"/>
-            <a:ext cx="6475430" cy="281551"/>
-          </a:xfrm>
-          <a:prstGeom prst="rect">
-            <a:avLst/>
-          </a:prstGeom>
-          <a:noFill/>
-          <a:ln/>
-        </p:spPr>
-        <p:txBody>
-          <a:bodyPr wrap="square" lIns="25400" tIns="25400" rIns="25400" bIns="25400" rtlCol="0" anchor="t">
-            <a:normAutofit/>
-          </a:bodyPr>
-          <a:lstStyle/>
-          <a:p>
-            <a:pPr algn="r" indent="0" marL="0">
-              <a:buNone/>
-            </a:pPr>
-            <a:r>
-              <a:rPr lang="en-US" sz="1500" dirty="0">
-                <a:solidFill>
-                  <a:srgbClr val="9A938A"/>
-                </a:solidFill>
-                <a:latin typeface="IBM Plex Mono" pitchFamily="34" charset="0"/>
-                <a:ea typeface="IBM Plex Mono" pitchFamily="34" charset="-122"/>
-                <a:cs typeface="IBM Plex Mono" pitchFamily="34" charset="-120"/>
-              </a:rPr>
-              <a:t>SPEEDUP</a:t>
-            </a:r>
-            <a:endParaRPr lang="en-US" sz="1500" dirty="0"/>
-          </a:p>
-        </p:txBody>
-      </p:sp>
-      <p:sp>
-        <p:nvSpPr>
-          <p:cNvPr id="9" name="Text 7"/>
-          <p:cNvSpPr/>
-          <p:nvPr/>
-        </p:nvSpPr>
-        <p:spPr>
-          <a:xfrm>
-            <a:off x="952385" y="3181454"/>
-            <a:ext cx="628610" cy="325038"/>
-          </a:xfrm>
-          <a:prstGeom prst="rect">
-            <a:avLst/>
-          </a:prstGeom>
-          <a:noFill/>
-          <a:ln/>
-        </p:spPr>
-        <p:txBody>
-          <a:bodyPr wrap="square" lIns="25400" tIns="25400" rIns="25400" bIns="25400" rtlCol="0" anchor="t">
-            <a:normAutofit/>
-          </a:bodyPr>
-          <a:lstStyle/>
-          <a:p>
-            <a:pPr algn="l" indent="0" marL="0">
-              <a:buNone/>
-            </a:pPr>
-            <a:r>
-              <a:rPr lang="en-US" sz="1725" b="1" dirty="0">
-                <a:solidFill>
-                  <a:srgbClr val="1A2430"/>
-                </a:solidFill>
-                <a:latin typeface="IBM Plex Mono" pitchFamily="34" charset="0"/>
-                <a:ea typeface="IBM Plex Mono" pitchFamily="34" charset="-122"/>
-                <a:cs typeface="IBM Plex Mono" pitchFamily="34" charset="-120"/>
-              </a:rPr>
-              <a:t>Q01</a:t>
-            </a:r>
-            <a:endParaRPr lang="en-US" sz="1725" dirty="0"/>
-          </a:p>
-        </p:txBody>
-      </p:sp>
-      <p:sp>
-        <p:nvSpPr>
-          <p:cNvPr id="10" name="Text 8"/>
-          <p:cNvSpPr/>
-          <p:nvPr/>
-        </p:nvSpPr>
-        <p:spPr>
-          <a:xfrm>
-            <a:off x="1638074" y="3198844"/>
-            <a:ext cx="2304920" cy="307648"/>
-          </a:xfrm>
-          <a:prstGeom prst="rect">
-            <a:avLst/>
-          </a:prstGeom>
-          <a:noFill/>
-          <a:ln/>
-        </p:spPr>
-        <p:txBody>
-          <a:bodyPr wrap="square" lIns="25400" tIns="25400" rIns="25400" bIns="25400" rtlCol="0" anchor="t">
-            <a:normAutofit/>
-          </a:bodyPr>
-          <a:lstStyle/>
-          <a:p>
-            <a:pPr algn="l" indent="0" marL="0">
-              <a:buNone/>
-            </a:pPr>
-            <a:r>
-              <a:rPr lang="en-US" sz="1650" dirty="0">
-                <a:solidFill>
-                  <a:srgbClr val="6B655C"/>
-                </a:solidFill>
-                <a:latin typeface="Space Grotesk" pitchFamily="34" charset="0"/>
-                <a:ea typeface="Space Grotesk" pitchFamily="34" charset="-122"/>
-                <a:cs typeface="Space Grotesk" pitchFamily="34" charset="-120"/>
-              </a:rPr>
-              <a:t>Top scorers by season</a:t>
-            </a:r>
-            <a:endParaRPr lang="en-US" sz="1650" dirty="0"/>
-          </a:p>
-        </p:txBody>
-      </p:sp>
-      <p:sp>
-        <p:nvSpPr>
-          <p:cNvPr id="11" name="Shape 9"/>
-          <p:cNvSpPr/>
-          <p:nvPr/>
-        </p:nvSpPr>
-        <p:spPr>
-          <a:xfrm>
-            <a:off x="7411889" y="3181454"/>
-            <a:ext cx="17390" cy="438015"/>
-          </a:xfrm>
-          <a:prstGeom prst="rect">
-            <a:avLst/>
-          </a:prstGeom>
-          <a:solidFill>
-            <a:srgbClr val="1A2430"/>
-          </a:solidFill>
-          <a:ln/>
-        </p:spPr>
-      </p:sp>
-      <p:sp>
-        <p:nvSpPr>
-          <p:cNvPr id="12" name="Shape 10"/>
-          <p:cNvSpPr/>
-          <p:nvPr/>
-        </p:nvSpPr>
-        <p:spPr>
-          <a:xfrm>
-            <a:off x="7424927" y="3257536"/>
-            <a:ext cx="360397" cy="285715"/>
-          </a:xfrm>
-          <a:prstGeom prst="rect">
-            <a:avLst/>
-          </a:prstGeom>
-          <a:solidFill>
-            <a:srgbClr val="1E7A52"/>
-          </a:solidFill>
-          <a:ln/>
-        </p:spPr>
-      </p:sp>
-      <p:sp>
-        <p:nvSpPr>
-          <p:cNvPr id="13" name="Text 11"/>
-          <p:cNvSpPr/>
-          <p:nvPr/>
-        </p:nvSpPr>
-        <p:spPr>
-          <a:xfrm>
-            <a:off x="10860144" y="3181454"/>
-            <a:ext cx="6475430" cy="476115"/>
-          </a:xfrm>
-          <a:prstGeom prst="rect">
-            <a:avLst/>
-          </a:prstGeom>
-          <a:noFill/>
-          <a:ln/>
-        </p:spPr>
-        <p:txBody>
-          <a:bodyPr wrap="square" lIns="25400" tIns="25400" rIns="25400" bIns="25400" rtlCol="0" anchor="ctr">
-            <a:normAutofit/>
-          </a:bodyPr>
-          <a:lstStyle/>
-          <a:p>
-            <a:pPr algn="r" indent="0" marL="0">
-              <a:buNone/>
-            </a:pPr>
-            <a:r>
-              <a:rPr lang="en-US" sz="1725" b="1" dirty="0">
-                <a:solidFill>
-                  <a:srgbClr val="33608F"/>
-                </a:solidFill>
-                <a:latin typeface="IBM Plex Mono" pitchFamily="34" charset="0"/>
-                <a:ea typeface="IBM Plex Mono" pitchFamily="34" charset="-122"/>
-                <a:cs typeface="IBM Plex Mono" pitchFamily="34" charset="-120"/>
-              </a:rPr>
-              <a:t>1.58×*</a:t>
-            </a:r>
-            <a:endParaRPr lang="en-US" sz="1725" dirty="0"/>
-          </a:p>
-        </p:txBody>
-      </p:sp>
-      <p:sp>
-        <p:nvSpPr>
-          <p:cNvPr id="14" name="Text 12"/>
-          <p:cNvSpPr/>
-          <p:nvPr/>
-        </p:nvSpPr>
-        <p:spPr>
-          <a:xfrm>
-            <a:off x="952385" y="3619469"/>
-            <a:ext cx="628610" cy="325038"/>
-          </a:xfrm>
-          <a:prstGeom prst="rect">
-            <a:avLst/>
-          </a:prstGeom>
-          <a:noFill/>
-          <a:ln/>
-        </p:spPr>
-        <p:txBody>
-          <a:bodyPr wrap="square" lIns="25400" tIns="25400" rIns="25400" bIns="25400" rtlCol="0" anchor="t">
-            <a:normAutofit/>
-          </a:bodyPr>
-          <a:lstStyle/>
-          <a:p>
-            <a:pPr algn="l" indent="0" marL="0">
-              <a:buNone/>
-            </a:pPr>
-            <a:r>
-              <a:rPr lang="en-US" sz="1725" b="1" dirty="0">
-                <a:solidFill>
-                  <a:srgbClr val="1A2430"/>
-                </a:solidFill>
-                <a:latin typeface="IBM Plex Mono" pitchFamily="34" charset="0"/>
-                <a:ea typeface="IBM Plex Mono" pitchFamily="34" charset="-122"/>
-                <a:cs typeface="IBM Plex Mono" pitchFamily="34" charset="-120"/>
-              </a:rPr>
-              <a:t>Q02</a:t>
-            </a:r>
-            <a:endParaRPr lang="en-US" sz="1725" dirty="0"/>
-          </a:p>
-        </p:txBody>
-      </p:sp>
-      <p:sp>
-        <p:nvSpPr>
-          <p:cNvPr id="15" name="Text 13"/>
-          <p:cNvSpPr/>
-          <p:nvPr/>
-        </p:nvSpPr>
-        <p:spPr>
-          <a:xfrm>
-            <a:off x="1638074" y="3636859"/>
-            <a:ext cx="1988691" cy="307648"/>
-          </a:xfrm>
-          <a:prstGeom prst="rect">
-            <a:avLst/>
-          </a:prstGeom>
-          <a:noFill/>
-          <a:ln/>
-        </p:spPr>
-        <p:txBody>
-          <a:bodyPr wrap="square" lIns="25400" tIns="25400" rIns="25400" bIns="25400" rtlCol="0" anchor="t">
-            <a:normAutofit/>
-          </a:bodyPr>
-          <a:lstStyle/>
-          <a:p>
-            <a:pPr algn="l" indent="0" marL="0">
-              <a:buNone/>
-            </a:pPr>
-            <a:r>
-              <a:rPr lang="en-US" sz="1650" dirty="0">
-                <a:solidFill>
-                  <a:srgbClr val="6B655C"/>
-                </a:solidFill>
-                <a:latin typeface="Space Grotesk" pitchFamily="34" charset="0"/>
-                <a:ea typeface="Space Grotesk" pitchFamily="34" charset="-122"/>
-                <a:cs typeface="Space Grotesk" pitchFamily="34" charset="-120"/>
-              </a:rPr>
-              <a:t>League standings</a:t>
-            </a:r>
-            <a:endParaRPr lang="en-US" sz="1650" dirty="0"/>
-          </a:p>
-        </p:txBody>
-      </p:sp>
-      <p:sp>
-        <p:nvSpPr>
-          <p:cNvPr id="16" name="Shape 14"/>
-          <p:cNvSpPr/>
-          <p:nvPr/>
-        </p:nvSpPr>
-        <p:spPr>
-          <a:xfrm>
-            <a:off x="7411889" y="3619469"/>
-            <a:ext cx="17390" cy="438015"/>
-          </a:xfrm>
-          <a:prstGeom prst="rect">
-            <a:avLst/>
-          </a:prstGeom>
-          <a:solidFill>
-            <a:srgbClr val="1A2430"/>
-          </a:solidFill>
-          <a:ln/>
-        </p:spPr>
-      </p:sp>
-      <p:sp>
-        <p:nvSpPr>
-          <p:cNvPr id="17" name="Shape 15"/>
-          <p:cNvSpPr/>
-          <p:nvPr/>
-        </p:nvSpPr>
-        <p:spPr>
-          <a:xfrm>
-            <a:off x="7424927" y="3695551"/>
-            <a:ext cx="169482" cy="285715"/>
-          </a:xfrm>
-          <a:prstGeom prst="rect">
-            <a:avLst/>
-          </a:prstGeom>
-          <a:solidFill>
-            <a:srgbClr val="1E7A52"/>
-          </a:solidFill>
-          <a:ln/>
-        </p:spPr>
-      </p:sp>
-      <p:sp>
-        <p:nvSpPr>
-          <p:cNvPr id="18" name="Text 16"/>
-          <p:cNvSpPr/>
-          <p:nvPr/>
-        </p:nvSpPr>
-        <p:spPr>
-          <a:xfrm>
-            <a:off x="10860144" y="3619469"/>
-            <a:ext cx="6475430" cy="476115"/>
-          </a:xfrm>
-          <a:prstGeom prst="rect">
-            <a:avLst/>
-          </a:prstGeom>
-          <a:noFill/>
-          <a:ln/>
-        </p:spPr>
-        <p:txBody>
-          <a:bodyPr wrap="square" lIns="25400" tIns="25400" rIns="25400" bIns="25400" rtlCol="0" anchor="ctr">
-            <a:normAutofit/>
-          </a:bodyPr>
-          <a:lstStyle/>
-          <a:p>
-            <a:pPr algn="r" indent="0" marL="0">
-              <a:buNone/>
-            </a:pPr>
-            <a:r>
-              <a:rPr lang="en-US" sz="1725" b="1" dirty="0">
-                <a:solidFill>
-                  <a:srgbClr val="33608F"/>
-                </a:solidFill>
-                <a:latin typeface="IBM Plex Mono" pitchFamily="34" charset="0"/>
-                <a:ea typeface="IBM Plex Mono" pitchFamily="34" charset="-122"/>
-                <a:cs typeface="IBM Plex Mono" pitchFamily="34" charset="-120"/>
-              </a:rPr>
-              <a:t>1.24×*</a:t>
-            </a:r>
-            <a:endParaRPr lang="en-US" sz="1725" dirty="0"/>
-          </a:p>
-        </p:txBody>
-      </p:sp>
-      <p:sp>
-        <p:nvSpPr>
-          <p:cNvPr id="19" name="Text 17"/>
-          <p:cNvSpPr/>
-          <p:nvPr/>
-        </p:nvSpPr>
-        <p:spPr>
-          <a:xfrm>
-            <a:off x="952385" y="4057485"/>
-            <a:ext cx="628610" cy="325038"/>
-          </a:xfrm>
-          <a:prstGeom prst="rect">
-            <a:avLst/>
-          </a:prstGeom>
-          <a:noFill/>
-          <a:ln/>
-        </p:spPr>
-        <p:txBody>
-          <a:bodyPr wrap="square" lIns="25400" tIns="25400" rIns="25400" bIns="25400" rtlCol="0" anchor="t">
-            <a:normAutofit/>
-          </a:bodyPr>
-          <a:lstStyle/>
-          <a:p>
-            <a:pPr algn="l" indent="0" marL="0">
-              <a:buNone/>
-            </a:pPr>
-            <a:r>
-              <a:rPr lang="en-US" sz="1725" b="1" dirty="0">
-                <a:solidFill>
-                  <a:srgbClr val="1A2430"/>
-                </a:solidFill>
-                <a:latin typeface="IBM Plex Mono" pitchFamily="34" charset="0"/>
-                <a:ea typeface="IBM Plex Mono" pitchFamily="34" charset="-122"/>
-                <a:cs typeface="IBM Plex Mono" pitchFamily="34" charset="-120"/>
-              </a:rPr>
-              <a:t>Q03</a:t>
-            </a:r>
-            <a:endParaRPr lang="en-US" sz="1725" dirty="0"/>
-          </a:p>
-        </p:txBody>
-      </p:sp>
-      <p:sp>
-        <p:nvSpPr>
-          <p:cNvPr id="20" name="Text 18"/>
-          <p:cNvSpPr/>
-          <p:nvPr/>
-        </p:nvSpPr>
-        <p:spPr>
-          <a:xfrm>
-            <a:off x="1638074" y="4074875"/>
-            <a:ext cx="1798893" cy="307648"/>
-          </a:xfrm>
-          <a:prstGeom prst="rect">
-            <a:avLst/>
-          </a:prstGeom>
-          <a:noFill/>
-          <a:ln/>
-        </p:spPr>
-        <p:txBody>
-          <a:bodyPr wrap="square" lIns="25400" tIns="25400" rIns="25400" bIns="25400" rtlCol="0" anchor="t">
-            <a:normAutofit/>
-          </a:bodyPr>
-          <a:lstStyle/>
-          <a:p>
-            <a:pPr algn="l" indent="0" marL="0">
-              <a:buNone/>
-            </a:pPr>
-            <a:r>
-              <a:rPr lang="en-US" sz="1650" dirty="0">
-                <a:solidFill>
-                  <a:srgbClr val="6B655C"/>
-                </a:solidFill>
-                <a:latin typeface="Space Grotesk" pitchFamily="34" charset="0"/>
-                <a:ea typeface="Space Grotesk" pitchFamily="34" charset="-122"/>
-                <a:cs typeface="Space Grotesk" pitchFamily="34" charset="-120"/>
-              </a:rPr>
-              <a:t>Goals per match</a:t>
-            </a:r>
-            <a:endParaRPr lang="en-US" sz="1650" dirty="0"/>
-          </a:p>
-        </p:txBody>
-      </p:sp>
-      <p:sp>
-        <p:nvSpPr>
-          <p:cNvPr id="21" name="Shape 19"/>
-          <p:cNvSpPr/>
-          <p:nvPr/>
-        </p:nvSpPr>
-        <p:spPr>
-          <a:xfrm>
-            <a:off x="7411889" y="4057485"/>
-            <a:ext cx="17390" cy="438015"/>
-          </a:xfrm>
-          <a:prstGeom prst="rect">
-            <a:avLst/>
-          </a:prstGeom>
-          <a:solidFill>
-            <a:srgbClr val="1A2430"/>
-          </a:solidFill>
-          <a:ln/>
-        </p:spPr>
-      </p:sp>
-      <p:sp>
-        <p:nvSpPr>
-          <p:cNvPr id="22" name="Shape 20"/>
-          <p:cNvSpPr/>
-          <p:nvPr/>
-        </p:nvSpPr>
-        <p:spPr>
-          <a:xfrm>
-            <a:off x="7306055" y="4133567"/>
-            <a:ext cx="109728" cy="285715"/>
-          </a:xfrm>
-          <a:prstGeom prst="rect">
-            <a:avLst/>
-          </a:prstGeom>
-          <a:solidFill>
-            <a:srgbClr val="33608F"/>
-          </a:solidFill>
-          <a:ln/>
-        </p:spPr>
-      </p:sp>
-      <p:sp>
-        <p:nvSpPr>
-          <p:cNvPr id="23" name="Text 21"/>
-          <p:cNvSpPr/>
-          <p:nvPr/>
-        </p:nvSpPr>
-        <p:spPr>
-          <a:xfrm>
-            <a:off x="10860144" y="4057485"/>
-            <a:ext cx="6475430" cy="476115"/>
-          </a:xfrm>
-          <a:prstGeom prst="rect">
-            <a:avLst/>
-          </a:prstGeom>
-          <a:noFill/>
-          <a:ln/>
-        </p:spPr>
-        <p:txBody>
-          <a:bodyPr wrap="square" lIns="25400" tIns="25400" rIns="25400" bIns="25400" rtlCol="0" anchor="ctr">
-            <a:normAutofit/>
-          </a:bodyPr>
-          <a:lstStyle/>
-          <a:p>
-            <a:pPr algn="r" indent="0" marL="0">
-              <a:buNone/>
-            </a:pPr>
-            <a:r>
-              <a:rPr lang="en-US" sz="1725" b="1" dirty="0">
-                <a:solidFill>
-                  <a:srgbClr val="33608F"/>
-                </a:solidFill>
-                <a:latin typeface="IBM Plex Mono" pitchFamily="34" charset="0"/>
-                <a:ea typeface="IBM Plex Mono" pitchFamily="34" charset="-122"/>
-                <a:cs typeface="IBM Plex Mono" pitchFamily="34" charset="-120"/>
-              </a:rPr>
-              <a:t>1.03×</a:t>
-            </a:r>
-            <a:endParaRPr lang="en-US" sz="1725" dirty="0"/>
-          </a:p>
-        </p:txBody>
-      </p:sp>
-      <p:sp>
-        <p:nvSpPr>
-          <p:cNvPr id="24" name="Text 22"/>
-          <p:cNvSpPr/>
-          <p:nvPr/>
-        </p:nvSpPr>
-        <p:spPr>
-          <a:xfrm>
-            <a:off x="952385" y="4495500"/>
-            <a:ext cx="628610" cy="325038"/>
-          </a:xfrm>
-          <a:prstGeom prst="rect">
-            <a:avLst/>
-          </a:prstGeom>
-          <a:noFill/>
-          <a:ln/>
-        </p:spPr>
-        <p:txBody>
-          <a:bodyPr wrap="square" lIns="25400" tIns="25400" rIns="25400" bIns="25400" rtlCol="0" anchor="t">
-            <a:normAutofit/>
-          </a:bodyPr>
-          <a:lstStyle/>
-          <a:p>
-            <a:pPr algn="l" indent="0" marL="0">
-              <a:buNone/>
-            </a:pPr>
-            <a:r>
-              <a:rPr lang="en-US" sz="1725" b="1" dirty="0">
-                <a:solidFill>
-                  <a:srgbClr val="1A2430"/>
-                </a:solidFill>
-                <a:latin typeface="IBM Plex Mono" pitchFamily="34" charset="0"/>
-                <a:ea typeface="IBM Plex Mono" pitchFamily="34" charset="-122"/>
-                <a:cs typeface="IBM Plex Mono" pitchFamily="34" charset="-120"/>
-              </a:rPr>
-              <a:t>Q04</a:t>
-            </a:r>
-            <a:endParaRPr lang="en-US" sz="1725" dirty="0"/>
-          </a:p>
-        </p:txBody>
-      </p:sp>
-      <p:sp>
-        <p:nvSpPr>
-          <p:cNvPr id="25" name="Text 23"/>
-          <p:cNvSpPr/>
-          <p:nvPr/>
-        </p:nvSpPr>
-        <p:spPr>
-          <a:xfrm>
-            <a:off x="1638074" y="4512890"/>
-            <a:ext cx="2283251" cy="307648"/>
-          </a:xfrm>
-          <a:prstGeom prst="rect">
-            <a:avLst/>
-          </a:prstGeom>
-          <a:noFill/>
-          <a:ln/>
-        </p:spPr>
-        <p:txBody>
-          <a:bodyPr wrap="square" lIns="25400" tIns="25400" rIns="25400" bIns="25400" rtlCol="0" anchor="t">
-            <a:normAutofit/>
-          </a:bodyPr>
-          <a:lstStyle/>
-          <a:p>
-            <a:pPr algn="l" indent="0" marL="0">
-              <a:buNone/>
-            </a:pPr>
-            <a:r>
-              <a:rPr lang="en-US" sz="1650" dirty="0">
-                <a:solidFill>
-                  <a:srgbClr val="6B655C"/>
-                </a:solidFill>
-                <a:latin typeface="Space Grotesk" pitchFamily="34" charset="0"/>
-                <a:ea typeface="Space Grotesk" pitchFamily="34" charset="-122"/>
-                <a:cs typeface="Space Grotesk" pitchFamily="34" charset="-120"/>
-              </a:rPr>
-              <a:t>Home win % by team</a:t>
-            </a:r>
-            <a:endParaRPr lang="en-US" sz="1650" dirty="0"/>
-          </a:p>
-        </p:txBody>
-      </p:sp>
-      <p:sp>
-        <p:nvSpPr>
-          <p:cNvPr id="26" name="Shape 24"/>
-          <p:cNvSpPr/>
-          <p:nvPr/>
-        </p:nvSpPr>
-        <p:spPr>
-          <a:xfrm>
-            <a:off x="7411889" y="4495500"/>
-            <a:ext cx="17390" cy="438015"/>
-          </a:xfrm>
-          <a:prstGeom prst="rect">
-            <a:avLst/>
-          </a:prstGeom>
-          <a:solidFill>
-            <a:srgbClr val="1A2430"/>
-          </a:solidFill>
-          <a:ln/>
-        </p:spPr>
-      </p:sp>
-      <p:sp>
-        <p:nvSpPr>
-          <p:cNvPr id="27" name="Shape 25"/>
-          <p:cNvSpPr/>
-          <p:nvPr/>
-        </p:nvSpPr>
-        <p:spPr>
-          <a:xfrm>
-            <a:off x="7272135" y="4571582"/>
-            <a:ext cx="143648" cy="285715"/>
-          </a:xfrm>
-          <a:prstGeom prst="rect">
-            <a:avLst/>
-          </a:prstGeom>
-          <a:solidFill>
-            <a:srgbClr val="33608F"/>
-          </a:solidFill>
-          <a:ln/>
-        </p:spPr>
-      </p:sp>
-      <p:sp>
-        <p:nvSpPr>
-          <p:cNvPr id="28" name="Text 26"/>
-          <p:cNvSpPr/>
-          <p:nvPr/>
-        </p:nvSpPr>
-        <p:spPr>
-          <a:xfrm>
-            <a:off x="10860144" y="4495500"/>
-            <a:ext cx="6475430" cy="476115"/>
-          </a:xfrm>
-          <a:prstGeom prst="rect">
-            <a:avLst/>
-          </a:prstGeom>
-          <a:noFill/>
-          <a:ln/>
-        </p:spPr>
-        <p:txBody>
-          <a:bodyPr wrap="square" lIns="25400" tIns="25400" rIns="25400" bIns="25400" rtlCol="0" anchor="ctr">
-            <a:normAutofit/>
-          </a:bodyPr>
-          <a:lstStyle/>
-          <a:p>
-            <a:pPr algn="r" indent="0" marL="0">
-              <a:buNone/>
-            </a:pPr>
-            <a:r>
-              <a:rPr lang="en-US" sz="1725" b="1" dirty="0">
-                <a:solidFill>
-                  <a:srgbClr val="33608F"/>
-                </a:solidFill>
-                <a:latin typeface="IBM Plex Mono" pitchFamily="34" charset="0"/>
-                <a:ea typeface="IBM Plex Mono" pitchFamily="34" charset="-122"/>
-                <a:cs typeface="IBM Plex Mono" pitchFamily="34" charset="-120"/>
-              </a:rPr>
-              <a:t>1.20×*</a:t>
-            </a:r>
-            <a:endParaRPr lang="en-US" sz="1725" dirty="0"/>
-          </a:p>
-        </p:txBody>
-      </p:sp>
-      <p:sp>
-        <p:nvSpPr>
-          <p:cNvPr id="29" name="Text 27"/>
-          <p:cNvSpPr/>
-          <p:nvPr/>
-        </p:nvSpPr>
-        <p:spPr>
-          <a:xfrm>
-            <a:off x="952385" y="4933516"/>
-            <a:ext cx="628610" cy="325038"/>
-          </a:xfrm>
-          <a:prstGeom prst="rect">
-            <a:avLst/>
-          </a:prstGeom>
-          <a:noFill/>
-          <a:ln/>
-        </p:spPr>
-        <p:txBody>
-          <a:bodyPr wrap="square" lIns="25400" tIns="25400" rIns="25400" bIns="25400" rtlCol="0" anchor="t">
-            <a:normAutofit/>
-          </a:bodyPr>
-          <a:lstStyle/>
-          <a:p>
-            <a:pPr algn="l" indent="0" marL="0">
-              <a:buNone/>
-            </a:pPr>
-            <a:r>
-              <a:rPr lang="en-US" sz="1725" b="1" dirty="0">
-                <a:solidFill>
-                  <a:srgbClr val="1A2430"/>
-                </a:solidFill>
-                <a:latin typeface="IBM Plex Mono" pitchFamily="34" charset="0"/>
-                <a:ea typeface="IBM Plex Mono" pitchFamily="34" charset="-122"/>
-                <a:cs typeface="IBM Plex Mono" pitchFamily="34" charset="-120"/>
-              </a:rPr>
-              <a:t>Q05</a:t>
-            </a:r>
-            <a:endParaRPr lang="en-US" sz="1725" dirty="0"/>
-          </a:p>
-        </p:txBody>
-      </p:sp>
-      <p:sp>
-        <p:nvSpPr>
-          <p:cNvPr id="30" name="Text 28"/>
-          <p:cNvSpPr/>
-          <p:nvPr/>
-        </p:nvSpPr>
-        <p:spPr>
-          <a:xfrm>
-            <a:off x="1638074" y="4950906"/>
-            <a:ext cx="2304920" cy="307648"/>
-          </a:xfrm>
-          <a:prstGeom prst="rect">
-            <a:avLst/>
-          </a:prstGeom>
-          <a:noFill/>
-          <a:ln/>
-        </p:spPr>
-        <p:txBody>
-          <a:bodyPr wrap="square" lIns="25400" tIns="25400" rIns="25400" bIns="25400" rtlCol="0" anchor="t">
-            <a:normAutofit/>
-          </a:bodyPr>
-          <a:lstStyle/>
-          <a:p>
-            <a:pPr algn="l" indent="0" marL="0">
-              <a:buNone/>
-            </a:pPr>
-            <a:r>
-              <a:rPr lang="en-US" sz="1650" dirty="0">
-                <a:solidFill>
-                  <a:srgbClr val="6B655C"/>
-                </a:solidFill>
-                <a:latin typeface="Space Grotesk" pitchFamily="34" charset="0"/>
-                <a:ea typeface="Space Grotesk" pitchFamily="34" charset="-122"/>
-                <a:cs typeface="Space Grotesk" pitchFamily="34" charset="-120"/>
-              </a:rPr>
-              <a:t>Goal-assist partnerships</a:t>
-            </a:r>
-            <a:endParaRPr lang="en-US" sz="1650" dirty="0"/>
-          </a:p>
-        </p:txBody>
-      </p:sp>
-      <p:sp>
-        <p:nvSpPr>
-          <p:cNvPr id="31" name="Shape 29"/>
-          <p:cNvSpPr/>
-          <p:nvPr/>
-        </p:nvSpPr>
-        <p:spPr>
-          <a:xfrm>
-            <a:off x="7411889" y="4933516"/>
-            <a:ext cx="17390" cy="438015"/>
-          </a:xfrm>
-          <a:prstGeom prst="rect">
-            <a:avLst/>
-          </a:prstGeom>
-          <a:solidFill>
-            <a:srgbClr val="1A2430"/>
-          </a:solidFill>
-          <a:ln/>
-        </p:spPr>
-      </p:sp>
-      <p:sp>
-        <p:nvSpPr>
-          <p:cNvPr id="32" name="Shape 30"/>
-          <p:cNvSpPr/>
-          <p:nvPr/>
-        </p:nvSpPr>
-        <p:spPr>
-          <a:xfrm>
-            <a:off x="7424927" y="5009598"/>
-            <a:ext cx="200628" cy="285715"/>
-          </a:xfrm>
-          <a:prstGeom prst="rect">
-            <a:avLst/>
-          </a:prstGeom>
-          <a:solidFill>
-            <a:srgbClr val="1E7A52"/>
-          </a:solidFill>
-          <a:ln/>
-        </p:spPr>
-      </p:sp>
-      <p:sp>
-        <p:nvSpPr>
-          <p:cNvPr id="33" name="Text 31"/>
-          <p:cNvSpPr/>
-          <p:nvPr/>
-        </p:nvSpPr>
-        <p:spPr>
-          <a:xfrm>
-            <a:off x="10860144" y="4933516"/>
-            <a:ext cx="6475430" cy="476115"/>
-          </a:xfrm>
-          <a:prstGeom prst="rect">
-            <a:avLst/>
-          </a:prstGeom>
-          <a:noFill/>
-          <a:ln/>
-        </p:spPr>
-        <p:txBody>
-          <a:bodyPr wrap="square" lIns="25400" tIns="25400" rIns="25400" bIns="25400" rtlCol="0" anchor="ctr">
-            <a:normAutofit/>
-          </a:bodyPr>
-          <a:lstStyle/>
-          <a:p>
-            <a:pPr algn="r" indent="0" marL="0">
-              <a:buNone/>
-            </a:pPr>
-            <a:r>
-              <a:rPr lang="en-US" sz="1725" b="1" dirty="0">
-                <a:solidFill>
-                  <a:srgbClr val="1E7A52"/>
-                </a:solidFill>
-                <a:latin typeface="IBM Plex Mono" pitchFamily="34" charset="0"/>
-                <a:ea typeface="IBM Plex Mono" pitchFamily="34" charset="-122"/>
-                <a:cs typeface="IBM Plex Mono" pitchFamily="34" charset="-120"/>
-              </a:rPr>
-              <a:t>1.29×*</a:t>
-            </a:r>
-            <a:endParaRPr lang="en-US" sz="1725" dirty="0"/>
-          </a:p>
-        </p:txBody>
-      </p:sp>
-      <p:sp>
-        <p:nvSpPr>
-          <p:cNvPr id="34" name="Text 32"/>
-          <p:cNvSpPr/>
-          <p:nvPr/>
-        </p:nvSpPr>
-        <p:spPr>
-          <a:xfrm>
-            <a:off x="952385" y="5371531"/>
-            <a:ext cx="628610" cy="325038"/>
-          </a:xfrm>
-          <a:prstGeom prst="rect">
-            <a:avLst/>
-          </a:prstGeom>
-          <a:noFill/>
-          <a:ln/>
-        </p:spPr>
-        <p:txBody>
-          <a:bodyPr wrap="square" lIns="25400" tIns="25400" rIns="25400" bIns="25400" rtlCol="0" anchor="t">
-            <a:normAutofit/>
-          </a:bodyPr>
-          <a:lstStyle/>
-          <a:p>
-            <a:pPr algn="l" indent="0" marL="0">
-              <a:buNone/>
-            </a:pPr>
-            <a:r>
-              <a:rPr lang="en-US" sz="1725" b="1" dirty="0">
-                <a:solidFill>
-                  <a:srgbClr val="1A2430"/>
-                </a:solidFill>
-                <a:latin typeface="IBM Plex Mono" pitchFamily="34" charset="0"/>
-                <a:ea typeface="IBM Plex Mono" pitchFamily="34" charset="-122"/>
-                <a:cs typeface="IBM Plex Mono" pitchFamily="34" charset="-120"/>
-              </a:rPr>
-              <a:t>Q06</a:t>
-            </a:r>
-            <a:endParaRPr lang="en-US" sz="1725" dirty="0"/>
-          </a:p>
-        </p:txBody>
-      </p:sp>
-      <p:sp>
-        <p:nvSpPr>
-          <p:cNvPr id="35" name="Text 33"/>
-          <p:cNvSpPr/>
-          <p:nvPr/>
-        </p:nvSpPr>
-        <p:spPr>
-          <a:xfrm>
-            <a:off x="1638074" y="5388921"/>
-            <a:ext cx="2291918" cy="307648"/>
-          </a:xfrm>
-          <a:prstGeom prst="rect">
-            <a:avLst/>
-          </a:prstGeom>
-          <a:noFill/>
-          <a:ln/>
-        </p:spPr>
-        <p:txBody>
-          <a:bodyPr wrap="square" lIns="25400" tIns="25400" rIns="25400" bIns="25400" rtlCol="0" anchor="t">
-            <a:normAutofit/>
-          </a:bodyPr>
-          <a:lstStyle/>
-          <a:p>
-            <a:pPr algn="l" indent="0" marL="0">
-              <a:buNone/>
-            </a:pPr>
-            <a:r>
-              <a:rPr lang="en-US" sz="1650" dirty="0">
-                <a:solidFill>
-                  <a:srgbClr val="6B655C"/>
-                </a:solidFill>
-                <a:latin typeface="Space Grotesk" pitchFamily="34" charset="0"/>
-                <a:ea typeface="Space Grotesk" pitchFamily="34" charset="-122"/>
-                <a:cs typeface="Space Grotesk" pitchFamily="34" charset="-120"/>
-              </a:rPr>
-              <a:t>Cards vs Real Madrid</a:t>
-            </a:r>
-            <a:endParaRPr lang="en-US" sz="1650" dirty="0"/>
-          </a:p>
-        </p:txBody>
-      </p:sp>
-      <p:sp>
-        <p:nvSpPr>
-          <p:cNvPr id="36" name="Shape 34"/>
-          <p:cNvSpPr/>
-          <p:nvPr/>
-        </p:nvSpPr>
-        <p:spPr>
-          <a:xfrm>
-            <a:off x="7411889" y="5371531"/>
-            <a:ext cx="17390" cy="438015"/>
-          </a:xfrm>
-          <a:prstGeom prst="rect">
-            <a:avLst/>
-          </a:prstGeom>
-          <a:solidFill>
-            <a:srgbClr val="1A2430"/>
-          </a:solidFill>
-          <a:ln/>
-        </p:spPr>
-      </p:sp>
-      <p:sp>
-        <p:nvSpPr>
-          <p:cNvPr id="37" name="Shape 35"/>
-          <p:cNvSpPr/>
-          <p:nvPr/>
-        </p:nvSpPr>
-        <p:spPr>
-          <a:xfrm>
-            <a:off x="7424927" y="5447613"/>
-            <a:ext cx="1017933" cy="285715"/>
-          </a:xfrm>
-          <a:prstGeom prst="rect">
-            <a:avLst/>
-          </a:prstGeom>
-          <a:solidFill>
-            <a:srgbClr val="1E7A52"/>
-          </a:solidFill>
-          <a:ln/>
-        </p:spPr>
-      </p:sp>
-      <p:sp>
-        <p:nvSpPr>
-          <p:cNvPr id="38" name="Text 36"/>
-          <p:cNvSpPr/>
-          <p:nvPr/>
-        </p:nvSpPr>
-        <p:spPr>
-          <a:xfrm>
-            <a:off x="10860144" y="5371531"/>
-            <a:ext cx="6475430" cy="476115"/>
-          </a:xfrm>
-          <a:prstGeom prst="rect">
-            <a:avLst/>
-          </a:prstGeom>
-          <a:noFill/>
-          <a:ln/>
-        </p:spPr>
-        <p:txBody>
-          <a:bodyPr wrap="square" lIns="25400" tIns="25400" rIns="25400" bIns="25400" rtlCol="0" anchor="ctr">
-            <a:normAutofit/>
-          </a:bodyPr>
-          <a:lstStyle/>
-          <a:p>
-            <a:pPr algn="r" indent="0" marL="0">
-              <a:buNone/>
-            </a:pPr>
-            <a:r>
-              <a:rPr lang="en-US" sz="1725" b="1" dirty="0">
-                <a:solidFill>
-                  <a:srgbClr val="1E7A52"/>
-                </a:solidFill>
-                <a:latin typeface="IBM Plex Mono" pitchFamily="34" charset="0"/>
-                <a:ea typeface="IBM Plex Mono" pitchFamily="34" charset="-122"/>
-                <a:cs typeface="IBM Plex Mono" pitchFamily="34" charset="-120"/>
-              </a:rPr>
-              <a:t>3.64×*</a:t>
-            </a:r>
-            <a:endParaRPr lang="en-US" sz="1725" dirty="0"/>
-          </a:p>
-        </p:txBody>
-      </p:sp>
-      <p:sp>
-        <p:nvSpPr>
-          <p:cNvPr id="39" name="Text 37"/>
-          <p:cNvSpPr/>
-          <p:nvPr/>
-        </p:nvSpPr>
-        <p:spPr>
-          <a:xfrm>
-            <a:off x="952385" y="5809547"/>
-            <a:ext cx="628610" cy="325038"/>
-          </a:xfrm>
-          <a:prstGeom prst="rect">
-            <a:avLst/>
-          </a:prstGeom>
-          <a:noFill/>
-          <a:ln/>
-        </p:spPr>
-        <p:txBody>
-          <a:bodyPr wrap="square" lIns="25400" tIns="25400" rIns="25400" bIns="25400" rtlCol="0" anchor="t">
-            <a:normAutofit/>
-          </a:bodyPr>
-          <a:lstStyle/>
-          <a:p>
-            <a:pPr algn="l" indent="0" marL="0">
-              <a:buNone/>
-            </a:pPr>
-            <a:r>
-              <a:rPr lang="en-US" sz="1725" b="1" dirty="0">
-                <a:solidFill>
-                  <a:srgbClr val="1A2430"/>
-                </a:solidFill>
-                <a:latin typeface="IBM Plex Mono" pitchFamily="34" charset="0"/>
-                <a:ea typeface="IBM Plex Mono" pitchFamily="34" charset="-122"/>
-                <a:cs typeface="IBM Plex Mono" pitchFamily="34" charset="-120"/>
-              </a:rPr>
-              <a:t>Q07</a:t>
-            </a:r>
-            <a:endParaRPr lang="en-US" sz="1725" dirty="0"/>
-          </a:p>
-        </p:txBody>
-      </p:sp>
-      <p:sp>
-        <p:nvSpPr>
-          <p:cNvPr id="40" name="Text 38"/>
-          <p:cNvSpPr/>
-          <p:nvPr/>
-        </p:nvSpPr>
-        <p:spPr>
-          <a:xfrm>
-            <a:off x="1638074" y="5826937"/>
-            <a:ext cx="2304920" cy="307648"/>
-          </a:xfrm>
-          <a:prstGeom prst="rect">
-            <a:avLst/>
-          </a:prstGeom>
-          <a:noFill/>
-          <a:ln/>
-        </p:spPr>
-        <p:txBody>
-          <a:bodyPr wrap="square" lIns="25400" tIns="25400" rIns="25400" bIns="25400" rtlCol="0" anchor="t">
-            <a:normAutofit/>
-          </a:bodyPr>
-          <a:lstStyle/>
-          <a:p>
-            <a:pPr algn="l" indent="0" marL="0">
-              <a:buNone/>
-            </a:pPr>
-            <a:r>
-              <a:rPr lang="en-US" sz="1650" dirty="0">
-                <a:solidFill>
-                  <a:srgbClr val="6B655C"/>
-                </a:solidFill>
-                <a:latin typeface="Space Grotesk" pitchFamily="34" charset="0"/>
-                <a:ea typeface="Space Grotesk" pitchFamily="34" charset="-122"/>
-                <a:cs typeface="Space Grotesk" pitchFamily="34" charset="-120"/>
-              </a:rPr>
-              <a:t>Players in all 8 seasons</a:t>
-            </a:r>
-            <a:endParaRPr lang="en-US" sz="1650" dirty="0"/>
-          </a:p>
-        </p:txBody>
-      </p:sp>
-      <p:sp>
-        <p:nvSpPr>
-          <p:cNvPr id="41" name="Shape 39"/>
-          <p:cNvSpPr/>
-          <p:nvPr/>
-        </p:nvSpPr>
-        <p:spPr>
-          <a:xfrm>
-            <a:off x="7411889" y="5809547"/>
-            <a:ext cx="17390" cy="438015"/>
-          </a:xfrm>
-          <a:prstGeom prst="rect">
-            <a:avLst/>
-          </a:prstGeom>
-          <a:solidFill>
-            <a:srgbClr val="1A2430"/>
-          </a:solidFill>
-          <a:ln/>
-        </p:spPr>
-      </p:sp>
-      <p:sp>
-        <p:nvSpPr>
-          <p:cNvPr id="42" name="Shape 40"/>
-          <p:cNvSpPr/>
-          <p:nvPr/>
-        </p:nvSpPr>
-        <p:spPr>
-          <a:xfrm>
-            <a:off x="7424927" y="5885629"/>
-            <a:ext cx="509842" cy="285715"/>
-          </a:xfrm>
-          <a:prstGeom prst="rect">
-            <a:avLst/>
-          </a:prstGeom>
-          <a:solidFill>
-            <a:srgbClr val="1E7A52"/>
-          </a:solidFill>
-          <a:ln/>
-        </p:spPr>
-      </p:sp>
-      <p:sp>
-        <p:nvSpPr>
-          <p:cNvPr id="43" name="Text 41"/>
-          <p:cNvSpPr/>
-          <p:nvPr/>
-        </p:nvSpPr>
-        <p:spPr>
-          <a:xfrm>
-            <a:off x="10860144" y="5809547"/>
-            <a:ext cx="6475430" cy="476115"/>
-          </a:xfrm>
-          <a:prstGeom prst="rect">
-            <a:avLst/>
-          </a:prstGeom>
-          <a:noFill/>
-          <a:ln/>
-        </p:spPr>
-        <p:txBody>
-          <a:bodyPr wrap="square" lIns="25400" tIns="25400" rIns="25400" bIns="25400" rtlCol="0" anchor="ctr">
-            <a:normAutofit/>
-          </a:bodyPr>
-          <a:lstStyle/>
-          <a:p>
-            <a:pPr algn="r" indent="0" marL="0">
-              <a:buNone/>
-            </a:pPr>
-            <a:r>
-              <a:rPr lang="en-US" sz="1725" b="1" dirty="0">
-                <a:solidFill>
-                  <a:srgbClr val="1E7A52"/>
-                </a:solidFill>
-                <a:latin typeface="IBM Plex Mono" pitchFamily="34" charset="0"/>
-                <a:ea typeface="IBM Plex Mono" pitchFamily="34" charset="-122"/>
-                <a:cs typeface="IBM Plex Mono" pitchFamily="34" charset="-120"/>
-              </a:rPr>
-              <a:t>1.91×*</a:t>
-            </a:r>
-            <a:endParaRPr lang="en-US" sz="1725" dirty="0"/>
-          </a:p>
-        </p:txBody>
-      </p:sp>
-      <p:sp>
-        <p:nvSpPr>
-          <p:cNvPr id="44" name="Text 42"/>
-          <p:cNvSpPr/>
-          <p:nvPr/>
-        </p:nvSpPr>
-        <p:spPr>
-          <a:xfrm>
-            <a:off x="952385" y="6247562"/>
-            <a:ext cx="628610" cy="325038"/>
-          </a:xfrm>
-          <a:prstGeom prst="rect">
-            <a:avLst/>
-          </a:prstGeom>
-          <a:noFill/>
-          <a:ln/>
-        </p:spPr>
-        <p:txBody>
-          <a:bodyPr wrap="square" lIns="25400" tIns="25400" rIns="25400" bIns="25400" rtlCol="0" anchor="t">
-            <a:normAutofit/>
-          </a:bodyPr>
-          <a:lstStyle/>
-          <a:p>
-            <a:pPr algn="l" indent="0" marL="0">
-              <a:buNone/>
-            </a:pPr>
-            <a:r>
-              <a:rPr lang="en-US" sz="1725" b="1" dirty="0">
-                <a:solidFill>
-                  <a:srgbClr val="1A2430"/>
-                </a:solidFill>
-                <a:latin typeface="IBM Plex Mono" pitchFamily="34" charset="0"/>
-                <a:ea typeface="IBM Plex Mono" pitchFamily="34" charset="-122"/>
-                <a:cs typeface="IBM Plex Mono" pitchFamily="34" charset="-120"/>
-              </a:rPr>
-              <a:t>Q08</a:t>
-            </a:r>
-            <a:endParaRPr lang="en-US" sz="1725" dirty="0"/>
-          </a:p>
-        </p:txBody>
-      </p:sp>
-      <p:sp>
-        <p:nvSpPr>
-          <p:cNvPr id="45" name="Text 43"/>
-          <p:cNvSpPr/>
-          <p:nvPr/>
-        </p:nvSpPr>
-        <p:spPr>
-          <a:xfrm>
-            <a:off x="1638074" y="6264952"/>
-            <a:ext cx="2255154" cy="307648"/>
-          </a:xfrm>
-          <a:prstGeom prst="rect">
-            <a:avLst/>
-          </a:prstGeom>
-          <a:noFill/>
-          <a:ln/>
-        </p:spPr>
-        <p:txBody>
-          <a:bodyPr wrap="square" lIns="25400" tIns="25400" rIns="25400" bIns="25400" rtlCol="0" anchor="t">
-            <a:normAutofit/>
-          </a:bodyPr>
-          <a:lstStyle/>
-          <a:p>
-            <a:pPr algn="l" indent="0" marL="0">
-              <a:buNone/>
-            </a:pPr>
-            <a:r>
-              <a:rPr lang="en-US" sz="1650" dirty="0">
-                <a:solidFill>
-                  <a:srgbClr val="6B655C"/>
-                </a:solidFill>
-                <a:latin typeface="Space Grotesk" pitchFamily="34" charset="0"/>
-                <a:ea typeface="Space Grotesk" pitchFamily="34" charset="-122"/>
-                <a:cs typeface="Space Grotesk" pitchFamily="34" charset="-120"/>
-              </a:rPr>
-              <a:t>Teammates of Messi</a:t>
-            </a:r>
-            <a:endParaRPr lang="en-US" sz="1650" dirty="0"/>
-          </a:p>
-        </p:txBody>
-      </p:sp>
-      <p:sp>
-        <p:nvSpPr>
-          <p:cNvPr id="46" name="Shape 44"/>
-          <p:cNvSpPr/>
-          <p:nvPr/>
-        </p:nvSpPr>
-        <p:spPr>
-          <a:xfrm>
-            <a:off x="7411889" y="6247562"/>
-            <a:ext cx="17390" cy="438015"/>
-          </a:xfrm>
-          <a:prstGeom prst="rect">
-            <a:avLst/>
-          </a:prstGeom>
-          <a:solidFill>
-            <a:srgbClr val="1A2430"/>
-          </a:solidFill>
-          <a:ln/>
-        </p:spPr>
-      </p:sp>
-      <p:sp>
-        <p:nvSpPr>
-          <p:cNvPr id="47" name="Shape 45"/>
-          <p:cNvSpPr/>
-          <p:nvPr/>
-        </p:nvSpPr>
-        <p:spPr>
-          <a:xfrm>
-            <a:off x="7424927" y="6323644"/>
-            <a:ext cx="770807" cy="285715"/>
-          </a:xfrm>
-          <a:prstGeom prst="rect">
-            <a:avLst/>
-          </a:prstGeom>
-          <a:solidFill>
-            <a:srgbClr val="1E7A52"/>
-          </a:solidFill>
-          <a:ln/>
-        </p:spPr>
-      </p:sp>
-      <p:sp>
-        <p:nvSpPr>
-          <p:cNvPr id="48" name="Text 46"/>
-          <p:cNvSpPr/>
-          <p:nvPr/>
-        </p:nvSpPr>
-        <p:spPr>
-          <a:xfrm>
-            <a:off x="10860144" y="6247562"/>
-            <a:ext cx="6475430" cy="476115"/>
-          </a:xfrm>
-          <a:prstGeom prst="rect">
-            <a:avLst/>
-          </a:prstGeom>
-          <a:noFill/>
-          <a:ln/>
-        </p:spPr>
-        <p:txBody>
-          <a:bodyPr wrap="square" lIns="25400" tIns="25400" rIns="25400" bIns="25400" rtlCol="0" anchor="ctr">
-            <a:normAutofit/>
-          </a:bodyPr>
-          <a:lstStyle/>
-          <a:p>
-            <a:pPr algn="r" indent="0" marL="0">
-              <a:buNone/>
-            </a:pPr>
-            <a:r>
-              <a:rPr lang="en-US" sz="1725" b="1" dirty="0">
-                <a:solidFill>
-                  <a:srgbClr val="1E7A52"/>
-                </a:solidFill>
-                <a:latin typeface="IBM Plex Mono" pitchFamily="34" charset="0"/>
-                <a:ea typeface="IBM Plex Mono" pitchFamily="34" charset="-122"/>
-                <a:cs typeface="IBM Plex Mono" pitchFamily="34" charset="-120"/>
-              </a:rPr>
-              <a:t>2.66×*</a:t>
-            </a:r>
-            <a:endParaRPr lang="en-US" sz="1725" dirty="0"/>
-          </a:p>
-        </p:txBody>
-      </p:sp>
-      <p:sp>
-        <p:nvSpPr>
-          <p:cNvPr id="49" name="Text 47"/>
-          <p:cNvSpPr/>
-          <p:nvPr/>
-        </p:nvSpPr>
-        <p:spPr>
-          <a:xfrm>
-            <a:off x="952385" y="6685577"/>
-            <a:ext cx="628610" cy="325038"/>
-          </a:xfrm>
-          <a:prstGeom prst="rect">
-            <a:avLst/>
-          </a:prstGeom>
-          <a:noFill/>
-          <a:ln/>
-        </p:spPr>
-        <p:txBody>
-          <a:bodyPr wrap="square" lIns="25400" tIns="25400" rIns="25400" bIns="25400" rtlCol="0" anchor="t">
-            <a:normAutofit/>
-          </a:bodyPr>
-          <a:lstStyle/>
-          <a:p>
-            <a:pPr algn="l" indent="0" marL="0">
-              <a:buNone/>
-            </a:pPr>
-            <a:r>
-              <a:rPr lang="en-US" sz="1725" b="1" dirty="0">
-                <a:solidFill>
-                  <a:srgbClr val="1A2430"/>
-                </a:solidFill>
-                <a:latin typeface="IBM Plex Mono" pitchFamily="34" charset="0"/>
-                <a:ea typeface="IBM Plex Mono" pitchFamily="34" charset="-122"/>
-                <a:cs typeface="IBM Plex Mono" pitchFamily="34" charset="-120"/>
-              </a:rPr>
-              <a:t>Q09</a:t>
-            </a:r>
-            <a:endParaRPr lang="en-US" sz="1725" dirty="0"/>
-          </a:p>
-        </p:txBody>
-      </p:sp>
-      <p:sp>
-        <p:nvSpPr>
-          <p:cNvPr id="50" name="Text 48"/>
-          <p:cNvSpPr/>
-          <p:nvPr/>
-        </p:nvSpPr>
-        <p:spPr>
-          <a:xfrm>
-            <a:off x="1638074" y="6702968"/>
-            <a:ext cx="1985403" cy="307648"/>
-          </a:xfrm>
-          <a:prstGeom prst="rect">
-            <a:avLst/>
-          </a:prstGeom>
-          <a:noFill/>
-          <a:ln/>
-        </p:spPr>
-        <p:txBody>
-          <a:bodyPr wrap="square" lIns="25400" tIns="25400" rIns="25400" bIns="25400" rtlCol="0" anchor="t">
-            <a:normAutofit/>
-          </a:bodyPr>
-          <a:lstStyle/>
-          <a:p>
-            <a:pPr algn="l" indent="0" marL="0">
-              <a:buNone/>
-            </a:pPr>
-            <a:r>
-              <a:rPr lang="en-US" sz="1650" dirty="0">
-                <a:solidFill>
-                  <a:srgbClr val="6B655C"/>
-                </a:solidFill>
-                <a:latin typeface="Space Grotesk" pitchFamily="34" charset="0"/>
-                <a:ea typeface="Space Grotesk" pitchFamily="34" charset="-122"/>
-                <a:cs typeface="Space Grotesk" pitchFamily="34" charset="-120"/>
-              </a:rPr>
-              <a:t>2-hop teammates</a:t>
-            </a:r>
-            <a:endParaRPr lang="en-US" sz="1650" dirty="0"/>
-          </a:p>
-        </p:txBody>
-      </p:sp>
-      <p:sp>
-        <p:nvSpPr>
-          <p:cNvPr id="51" name="Shape 49"/>
-          <p:cNvSpPr/>
-          <p:nvPr/>
-        </p:nvSpPr>
-        <p:spPr>
-          <a:xfrm>
-            <a:off x="7411889" y="6685577"/>
-            <a:ext cx="17390" cy="438015"/>
-          </a:xfrm>
-          <a:prstGeom prst="rect">
-            <a:avLst/>
-          </a:prstGeom>
-          <a:solidFill>
-            <a:srgbClr val="1A2430"/>
-          </a:solidFill>
-          <a:ln/>
-        </p:spPr>
-      </p:sp>
-      <p:sp>
-        <p:nvSpPr>
-          <p:cNvPr id="52" name="Shape 50"/>
-          <p:cNvSpPr/>
-          <p:nvPr/>
-        </p:nvSpPr>
-        <p:spPr>
-          <a:xfrm>
-            <a:off x="6834984" y="6761659"/>
-            <a:ext cx="580799" cy="285715"/>
-          </a:xfrm>
-          <a:prstGeom prst="rect">
-            <a:avLst/>
-          </a:prstGeom>
-          <a:solidFill>
-            <a:srgbClr val="33608F"/>
-          </a:solidFill>
-          <a:ln/>
-        </p:spPr>
-      </p:sp>
-      <p:sp>
-        <p:nvSpPr>
-          <p:cNvPr id="53" name="Text 51"/>
-          <p:cNvSpPr/>
-          <p:nvPr/>
-        </p:nvSpPr>
-        <p:spPr>
-          <a:xfrm>
-            <a:off x="10860144" y="6685577"/>
-            <a:ext cx="6475430" cy="476115"/>
-          </a:xfrm>
-          <a:prstGeom prst="rect">
-            <a:avLst/>
-          </a:prstGeom>
-          <a:noFill/>
-          <a:ln/>
-        </p:spPr>
-        <p:txBody>
-          <a:bodyPr wrap="square" lIns="25400" tIns="25400" rIns="25400" bIns="25400" rtlCol="0" anchor="ctr">
-            <a:normAutofit/>
-          </a:bodyPr>
-          <a:lstStyle/>
-          <a:p>
-            <a:pPr algn="r" indent="0" marL="0">
-              <a:buNone/>
-            </a:pPr>
-            <a:r>
-              <a:rPr lang="en-US" sz="1725" b="1" dirty="0">
-                <a:solidFill>
-                  <a:srgbClr val="33608F"/>
-                </a:solidFill>
-                <a:latin typeface="IBM Plex Mono" pitchFamily="34" charset="0"/>
-                <a:ea typeface="IBM Plex Mono" pitchFamily="34" charset="-122"/>
-                <a:cs typeface="IBM Plex Mono" pitchFamily="34" charset="-120"/>
-              </a:rPr>
-              <a:t>2.09×*</a:t>
-            </a:r>
-            <a:endParaRPr lang="en-US" sz="1725" dirty="0"/>
-          </a:p>
-        </p:txBody>
-      </p:sp>
-      <p:sp>
-        <p:nvSpPr>
-          <p:cNvPr id="54" name="Text 52"/>
-          <p:cNvSpPr/>
-          <p:nvPr/>
-        </p:nvSpPr>
-        <p:spPr>
-          <a:xfrm>
-            <a:off x="952385" y="7123593"/>
-            <a:ext cx="628610" cy="325038"/>
-          </a:xfrm>
-          <a:prstGeom prst="rect">
-            <a:avLst/>
-          </a:prstGeom>
-          <a:noFill/>
-          <a:ln/>
-        </p:spPr>
-        <p:txBody>
-          <a:bodyPr wrap="square" lIns="25400" tIns="25400" rIns="25400" bIns="25400" rtlCol="0" anchor="t">
-            <a:normAutofit/>
-          </a:bodyPr>
-          <a:lstStyle/>
-          <a:p>
-            <a:pPr algn="l" indent="0" marL="0">
-              <a:buNone/>
-            </a:pPr>
-            <a:r>
-              <a:rPr lang="en-US" sz="1725" b="1" dirty="0">
-                <a:solidFill>
-                  <a:srgbClr val="1A2430"/>
-                </a:solidFill>
-                <a:latin typeface="IBM Plex Mono" pitchFamily="34" charset="0"/>
-                <a:ea typeface="IBM Plex Mono" pitchFamily="34" charset="-122"/>
-                <a:cs typeface="IBM Plex Mono" pitchFamily="34" charset="-120"/>
-              </a:rPr>
-              <a:t>Q10</a:t>
-            </a:r>
-            <a:endParaRPr lang="en-US" sz="1725" dirty="0"/>
-          </a:p>
-        </p:txBody>
-      </p:sp>
-      <p:sp>
-        <p:nvSpPr>
-          <p:cNvPr id="55" name="Text 53"/>
-          <p:cNvSpPr/>
-          <p:nvPr/>
-        </p:nvSpPr>
-        <p:spPr>
-          <a:xfrm>
-            <a:off x="1638074" y="7140983"/>
-            <a:ext cx="2304920" cy="307648"/>
-          </a:xfrm>
-          <a:prstGeom prst="rect">
-            <a:avLst/>
-          </a:prstGeom>
-          <a:noFill/>
-          <a:ln/>
-        </p:spPr>
-        <p:txBody>
-          <a:bodyPr wrap="square" lIns="25400" tIns="25400" rIns="25400" bIns="25400" rtlCol="0" anchor="t">
-            <a:normAutofit/>
-          </a:bodyPr>
-          <a:lstStyle/>
-          <a:p>
-            <a:pPr algn="l" indent="0" marL="0">
-              <a:buNone/>
-            </a:pPr>
-            <a:r>
-              <a:rPr lang="en-US" sz="1650" dirty="0">
-                <a:solidFill>
-                  <a:srgbClr val="6B655C"/>
-                </a:solidFill>
-                <a:latin typeface="Space Grotesk" pitchFamily="34" charset="0"/>
-                <a:ea typeface="Space Grotesk" pitchFamily="34" charset="-122"/>
-                <a:cs typeface="Space Grotesk" pitchFamily="34" charset="-120"/>
-              </a:rPr>
-              <a:t>Shortest path Messi→Pirlo</a:t>
-            </a:r>
-            <a:endParaRPr lang="en-US" sz="1650" dirty="0"/>
-          </a:p>
-        </p:txBody>
-      </p:sp>
-      <p:sp>
-        <p:nvSpPr>
-          <p:cNvPr id="56" name="Shape 54"/>
-          <p:cNvSpPr/>
-          <p:nvPr/>
-        </p:nvSpPr>
-        <p:spPr>
-          <a:xfrm>
-            <a:off x="7411889" y="7123593"/>
-            <a:ext cx="17390" cy="438015"/>
-          </a:xfrm>
-          <a:prstGeom prst="rect">
-            <a:avLst/>
-          </a:prstGeom>
-          <a:solidFill>
-            <a:srgbClr val="1A2430"/>
-          </a:solidFill>
-          <a:ln/>
-        </p:spPr>
-      </p:sp>
-      <p:sp>
-        <p:nvSpPr>
-          <p:cNvPr id="57" name="Shape 55"/>
-          <p:cNvSpPr/>
-          <p:nvPr/>
-        </p:nvSpPr>
-        <p:spPr>
-          <a:xfrm>
-            <a:off x="7424927" y="7199674"/>
-            <a:ext cx="3181297" cy="285715"/>
-          </a:xfrm>
-          <a:prstGeom prst="rect">
-            <a:avLst/>
-          </a:prstGeom>
-          <a:solidFill>
-            <a:srgbClr val="1E7A52"/>
-          </a:solidFill>
-          <a:ln/>
-        </p:spPr>
-      </p:sp>
-      <p:sp>
-        <p:nvSpPr>
-          <p:cNvPr id="58" name="Text 56"/>
-          <p:cNvSpPr/>
-          <p:nvPr/>
-        </p:nvSpPr>
-        <p:spPr>
-          <a:xfrm>
-            <a:off x="10860144" y="7123593"/>
-            <a:ext cx="6475430" cy="476115"/>
-          </a:xfrm>
-          <a:prstGeom prst="rect">
-            <a:avLst/>
-          </a:prstGeom>
-          <a:noFill/>
-          <a:ln/>
-        </p:spPr>
-        <p:txBody>
-          <a:bodyPr wrap="square" lIns="25400" tIns="25400" rIns="25400" bIns="25400" rtlCol="0" anchor="ctr">
-            <a:normAutofit/>
-          </a:bodyPr>
-          <a:lstStyle/>
-          <a:p>
-            <a:pPr algn="r" indent="0" marL="0">
-              <a:buNone/>
-            </a:pPr>
-            <a:r>
-              <a:rPr lang="en-US" sz="1725" b="1" dirty="0">
-                <a:solidFill>
-                  <a:srgbClr val="1E7A52"/>
-                </a:solidFill>
-                <a:latin typeface="IBM Plex Mono" pitchFamily="34" charset="0"/>
-                <a:ea typeface="IBM Plex Mono" pitchFamily="34" charset="-122"/>
-                <a:cs typeface="IBM Plex Mono" pitchFamily="34" charset="-120"/>
-              </a:rPr>
-              <a:t>56.7×*</a:t>
-            </a:r>
-            <a:endParaRPr lang="en-US" sz="1725" dirty="0"/>
-          </a:p>
-        </p:txBody>
-      </p:sp>
-      <p:sp>
-        <p:nvSpPr>
-          <p:cNvPr id="59" name="Text 57"/>
-          <p:cNvSpPr/>
-          <p:nvPr/>
-        </p:nvSpPr>
-        <p:spPr>
-          <a:xfrm>
-            <a:off x="952385" y="7561608"/>
-            <a:ext cx="628610" cy="325038"/>
-          </a:xfrm>
-          <a:prstGeom prst="rect">
-            <a:avLst/>
-          </a:prstGeom>
-          <a:noFill/>
-          <a:ln/>
-        </p:spPr>
-        <p:txBody>
-          <a:bodyPr wrap="square" lIns="25400" tIns="25400" rIns="25400" bIns="25400" rtlCol="0" anchor="t">
-            <a:normAutofit/>
-          </a:bodyPr>
-          <a:lstStyle/>
-          <a:p>
-            <a:pPr algn="l" indent="0" marL="0">
-              <a:buNone/>
-            </a:pPr>
-            <a:r>
-              <a:rPr lang="en-US" sz="1725" b="1" dirty="0">
-                <a:solidFill>
-                  <a:srgbClr val="1A2430"/>
-                </a:solidFill>
-                <a:latin typeface="IBM Plex Mono" pitchFamily="34" charset="0"/>
-                <a:ea typeface="IBM Plex Mono" pitchFamily="34" charset="-122"/>
-                <a:cs typeface="IBM Plex Mono" pitchFamily="34" charset="-120"/>
-              </a:rPr>
-              <a:t>Q11</a:t>
-            </a:r>
-            <a:endParaRPr lang="en-US" sz="1725" dirty="0"/>
-          </a:p>
-        </p:txBody>
-      </p:sp>
-      <p:sp>
-        <p:nvSpPr>
-          <p:cNvPr id="60" name="Text 58"/>
-          <p:cNvSpPr/>
-          <p:nvPr/>
-        </p:nvSpPr>
-        <p:spPr>
-          <a:xfrm>
-            <a:off x="1638074" y="7578998"/>
-            <a:ext cx="2162796" cy="307648"/>
-          </a:xfrm>
-          <a:prstGeom prst="rect">
-            <a:avLst/>
-          </a:prstGeom>
-          <a:noFill/>
-          <a:ln/>
-        </p:spPr>
-        <p:txBody>
-          <a:bodyPr wrap="square" lIns="25400" tIns="25400" rIns="25400" bIns="25400" rtlCol="0" anchor="t">
-            <a:normAutofit/>
-          </a:bodyPr>
-          <a:lstStyle/>
-          <a:p>
-            <a:pPr algn="l" indent="0" marL="0">
-              <a:buNone/>
-            </a:pPr>
-            <a:r>
-              <a:rPr lang="en-US" sz="1650" dirty="0">
-                <a:solidFill>
-                  <a:srgbClr val="6B655C"/>
-                </a:solidFill>
-                <a:latin typeface="Space Grotesk" pitchFamily="34" charset="0"/>
-                <a:ea typeface="Space Grotesk" pitchFamily="34" charset="-122"/>
-                <a:cs typeface="Space Grotesk" pitchFamily="34" charset="-120"/>
-              </a:rPr>
-              <a:t>Bulk UPDATE (write)</a:t>
-            </a:r>
-            <a:endParaRPr lang="en-US" sz="1650" dirty="0"/>
-          </a:p>
-        </p:txBody>
-      </p:sp>
-      <p:sp>
-        <p:nvSpPr>
-          <p:cNvPr id="61" name="Shape 59"/>
-          <p:cNvSpPr/>
-          <p:nvPr/>
-        </p:nvSpPr>
-        <p:spPr>
-          <a:xfrm>
-            <a:off x="7411889" y="7561608"/>
-            <a:ext cx="17390" cy="438015"/>
-          </a:xfrm>
-          <a:prstGeom prst="rect">
-            <a:avLst/>
-          </a:prstGeom>
-          <a:solidFill>
-            <a:srgbClr val="1A2430"/>
-          </a:solidFill>
-          <a:ln/>
-        </p:spPr>
-      </p:sp>
-      <p:sp>
-        <p:nvSpPr>
-          <p:cNvPr id="62" name="Shape 60"/>
-          <p:cNvSpPr/>
-          <p:nvPr/>
-        </p:nvSpPr>
-        <p:spPr>
-          <a:xfrm>
-            <a:off x="7424927" y="7637690"/>
-            <a:ext cx="324694" cy="285715"/>
-          </a:xfrm>
-          <a:prstGeom prst="rect">
-            <a:avLst/>
-          </a:prstGeom>
-          <a:solidFill>
-            <a:srgbClr val="1E7A52"/>
-          </a:solidFill>
-          <a:ln/>
-        </p:spPr>
-      </p:sp>
-      <p:sp>
-        <p:nvSpPr>
-          <p:cNvPr id="63" name="Text 61"/>
-          <p:cNvSpPr/>
-          <p:nvPr/>
-        </p:nvSpPr>
-        <p:spPr>
-          <a:xfrm>
-            <a:off x="10860144" y="7561608"/>
-            <a:ext cx="6475430" cy="476115"/>
-          </a:xfrm>
-          <a:prstGeom prst="rect">
-            <a:avLst/>
-          </a:prstGeom>
-          <a:noFill/>
-          <a:ln/>
-        </p:spPr>
-        <p:txBody>
-          <a:bodyPr wrap="square" lIns="25400" tIns="25400" rIns="25400" bIns="25400" rtlCol="0" anchor="ctr">
-            <a:normAutofit/>
-          </a:bodyPr>
-          <a:lstStyle/>
-          <a:p>
-            <a:pPr algn="r" indent="0" marL="0">
-              <a:buNone/>
-            </a:pPr>
-            <a:r>
-              <a:rPr lang="en-US" sz="1725" b="1" dirty="0">
-                <a:solidFill>
-                  <a:srgbClr val="1E7A52"/>
-                </a:solidFill>
-                <a:latin typeface="IBM Plex Mono" pitchFamily="34" charset="0"/>
-                <a:ea typeface="IBM Plex Mono" pitchFamily="34" charset="-122"/>
-                <a:cs typeface="IBM Plex Mono" pitchFamily="34" charset="-120"/>
-              </a:rPr>
-              <a:t>1.51×*</a:t>
-            </a:r>
-            <a:endParaRPr lang="en-US" sz="1725" dirty="0"/>
-          </a:p>
-        </p:txBody>
-      </p:sp>
-      <p:sp>
-        <p:nvSpPr>
-          <p:cNvPr id="64" name="Text 62"/>
-          <p:cNvSpPr/>
-          <p:nvPr/>
-        </p:nvSpPr>
-        <p:spPr>
-          <a:xfrm>
-            <a:off x="952385" y="7999623"/>
-            <a:ext cx="628610" cy="325038"/>
-          </a:xfrm>
-          <a:prstGeom prst="rect">
-            <a:avLst/>
-          </a:prstGeom>
-          <a:noFill/>
-          <a:ln/>
-        </p:spPr>
-        <p:txBody>
-          <a:bodyPr wrap="square" lIns="25400" tIns="25400" rIns="25400" bIns="25400" rtlCol="0" anchor="t">
-            <a:normAutofit/>
-          </a:bodyPr>
-          <a:lstStyle/>
-          <a:p>
-            <a:pPr algn="l" indent="0" marL="0">
-              <a:buNone/>
-            </a:pPr>
-            <a:r>
-              <a:rPr lang="en-US" sz="1725" b="1" dirty="0">
-                <a:solidFill>
-                  <a:srgbClr val="1A2430"/>
-                </a:solidFill>
-                <a:latin typeface="IBM Plex Mono" pitchFamily="34" charset="0"/>
-                <a:ea typeface="IBM Plex Mono" pitchFamily="34" charset="-122"/>
-                <a:cs typeface="IBM Plex Mono" pitchFamily="34" charset="-120"/>
-              </a:rPr>
-              <a:t>Q12</a:t>
-            </a:r>
-            <a:endParaRPr lang="en-US" sz="1725" dirty="0"/>
-          </a:p>
-        </p:txBody>
-      </p:sp>
-      <p:sp>
-        <p:nvSpPr>
-          <p:cNvPr id="65" name="Text 63"/>
-          <p:cNvSpPr/>
-          <p:nvPr/>
-        </p:nvSpPr>
-        <p:spPr>
-          <a:xfrm>
-            <a:off x="1638074" y="8017014"/>
-            <a:ext cx="2304920" cy="307648"/>
-          </a:xfrm>
-          <a:prstGeom prst="rect">
-            <a:avLst/>
-          </a:prstGeom>
-          <a:noFill/>
-          <a:ln/>
-        </p:spPr>
-        <p:txBody>
-          <a:bodyPr wrap="square" lIns="25400" tIns="25400" rIns="25400" bIns="25400" rtlCol="0" anchor="t">
-            <a:normAutofit/>
-          </a:bodyPr>
-          <a:lstStyle/>
-          <a:p>
-            <a:pPr algn="l" indent="0" marL="0">
-              <a:buNone/>
-            </a:pPr>
-            <a:r>
-              <a:rPr lang="en-US" sz="1650" dirty="0">
-                <a:solidFill>
-                  <a:srgbClr val="6B655C"/>
-                </a:solidFill>
-                <a:latin typeface="Space Grotesk" pitchFamily="34" charset="0"/>
-                <a:ea typeface="Space Grotesk" pitchFamily="34" charset="-122"/>
-                <a:cs typeface="Space Grotesk" pitchFamily="34" charset="-120"/>
-              </a:rPr>
-              <a:t>Schema evolution (write)</a:t>
-            </a:r>
-            <a:endParaRPr lang="en-US" sz="1650" dirty="0"/>
-          </a:p>
-        </p:txBody>
-      </p:sp>
-      <p:sp>
-        <p:nvSpPr>
-          <p:cNvPr id="66" name="Shape 64"/>
-          <p:cNvSpPr/>
-          <p:nvPr/>
-        </p:nvSpPr>
-        <p:spPr>
-          <a:xfrm>
-            <a:off x="7411889" y="7999623"/>
-            <a:ext cx="17390" cy="438015"/>
-          </a:xfrm>
-          <a:prstGeom prst="rect">
-            <a:avLst/>
-          </a:prstGeom>
-          <a:solidFill>
-            <a:srgbClr val="1A2430"/>
-          </a:solidFill>
-          <a:ln/>
-        </p:spPr>
-      </p:sp>
-      <p:sp>
-        <p:nvSpPr>
-          <p:cNvPr id="67" name="Shape 65"/>
-          <p:cNvSpPr/>
-          <p:nvPr/>
-        </p:nvSpPr>
-        <p:spPr>
-          <a:xfrm>
-            <a:off x="7424927" y="8075705"/>
-            <a:ext cx="1183285" cy="285715"/>
-          </a:xfrm>
-          <a:prstGeom prst="rect">
-            <a:avLst/>
-          </a:prstGeom>
-          <a:solidFill>
-            <a:srgbClr val="1E7A52"/>
-          </a:solidFill>
-          <a:ln/>
-        </p:spPr>
-      </p:sp>
-      <p:sp>
-        <p:nvSpPr>
-          <p:cNvPr id="68" name="Text 66"/>
-          <p:cNvSpPr/>
-          <p:nvPr/>
-        </p:nvSpPr>
-        <p:spPr>
-          <a:xfrm>
-            <a:off x="10860144" y="7999623"/>
-            <a:ext cx="6475430" cy="476115"/>
-          </a:xfrm>
-          <a:prstGeom prst="rect">
-            <a:avLst/>
-          </a:prstGeom>
-          <a:noFill/>
-          <a:ln/>
-        </p:spPr>
-        <p:txBody>
-          <a:bodyPr wrap="square" lIns="25400" tIns="25400" rIns="25400" bIns="25400" rtlCol="0" anchor="ctr">
-            <a:normAutofit/>
-          </a:bodyPr>
-          <a:lstStyle/>
-          <a:p>
-            <a:pPr algn="r" indent="0" marL="0">
-              <a:buNone/>
-            </a:pPr>
-            <a:r>
-              <a:rPr lang="en-US" sz="1725" b="1" dirty="0">
-                <a:solidFill>
-                  <a:srgbClr val="1E7A52"/>
-                </a:solidFill>
-                <a:latin typeface="IBM Plex Mono" pitchFamily="34" charset="0"/>
-                <a:ea typeface="IBM Plex Mono" pitchFamily="34" charset="-122"/>
-                <a:cs typeface="IBM Plex Mono" pitchFamily="34" charset="-120"/>
-              </a:rPr>
-              <a:t>4.49×*</a:t>
-            </a:r>
-            <a:endParaRPr lang="en-US" sz="1725" dirty="0"/>
-          </a:p>
-        </p:txBody>
-      </p:sp>
-      <p:sp>
-        <p:nvSpPr>
-          <p:cNvPr id="69" name="Text 67"/>
-          <p:cNvSpPr/>
-          <p:nvPr/>
-        </p:nvSpPr>
-        <p:spPr>
-          <a:xfrm>
-            <a:off x="952385" y="8818593"/>
-            <a:ext cx="2341086" cy="316343"/>
-          </a:xfrm>
-          <a:prstGeom prst="rect">
-            <a:avLst/>
-          </a:prstGeom>
-          <a:noFill/>
-          <a:ln/>
-        </p:spPr>
-        <p:txBody>
-          <a:bodyPr wrap="square" lIns="25400" tIns="25400" rIns="25400" bIns="25400" rtlCol="0" anchor="t">
-            <a:normAutofit/>
-          </a:bodyPr>
-          <a:lstStyle/>
-          <a:p>
-            <a:pPr algn="l" indent="0" marL="0">
-              <a:buNone/>
-            </a:pPr>
-            <a:r>
-              <a:rPr lang="en-US" sz="1725" dirty="0">
-                <a:solidFill>
-                  <a:srgbClr val="6B655C"/>
-                </a:solidFill>
-                <a:latin typeface="Space Grotesk" pitchFamily="34" charset="0"/>
-                <a:ea typeface="Space Grotesk" pitchFamily="34" charset="-122"/>
-                <a:cs typeface="Space Grotesk" pitchFamily="34" charset="-120"/>
-              </a:rPr>
-              <a:t>Postgres wins (2)</a:t>
-            </a:r>
-            <a:endParaRPr lang="en-US" sz="1725" dirty="0"/>
-          </a:p>
-        </p:txBody>
-      </p:sp>
-      <p:sp>
-        <p:nvSpPr>
-          <p:cNvPr id="70" name="Text 68"/>
-          <p:cNvSpPr/>
-          <p:nvPr/>
-        </p:nvSpPr>
-        <p:spPr>
-          <a:xfrm>
-            <a:off x="3556837" y="8818593"/>
-            <a:ext cx="1974045" cy="316343"/>
-          </a:xfrm>
-          <a:prstGeom prst="rect">
-            <a:avLst/>
-          </a:prstGeom>
-          <a:noFill/>
-          <a:ln/>
-        </p:spPr>
-        <p:txBody>
-          <a:bodyPr wrap="square" lIns="25400" tIns="25400" rIns="25400" bIns="25400" rtlCol="0" anchor="t">
-            <a:normAutofit/>
-          </a:bodyPr>
-          <a:lstStyle/>
-          <a:p>
-            <a:pPr algn="l" indent="0" marL="0">
-              <a:buNone/>
-            </a:pPr>
-            <a:r>
-              <a:rPr lang="en-US" sz="1725" dirty="0">
-                <a:solidFill>
-                  <a:srgbClr val="6B655C"/>
-                </a:solidFill>
-                <a:latin typeface="Space Grotesk" pitchFamily="34" charset="0"/>
-                <a:ea typeface="Space Grotesk" pitchFamily="34" charset="-122"/>
-                <a:cs typeface="Space Grotesk" pitchFamily="34" charset="-120"/>
-              </a:rPr>
-              <a:t>Neo4j wins (9) · not significant (1)</a:t>
-            </a:r>
-            <a:endParaRPr lang="en-US" sz="1725" dirty="0"/>
-          </a:p>
-        </p:txBody>
-      </p:sp>
-      <p:sp>
-        <p:nvSpPr>
-          <p:cNvPr id="71" name="Text 69"/>
-          <p:cNvSpPr/>
-          <p:nvPr/>
-        </p:nvSpPr>
-        <p:spPr>
-          <a:xfrm>
-            <a:off x="5827616" y="8827288"/>
-            <a:ext cx="10031477" cy="298953"/>
-          </a:xfrm>
-          <a:prstGeom prst="rect">
-            <a:avLst/>
-          </a:prstGeom>
-          <a:noFill/>
-          <a:ln/>
-        </p:spPr>
-        <p:txBody>
-          <a:bodyPr wrap="square" lIns="25400" tIns="25400" rIns="25400" bIns="25400" rtlCol="0" anchor="t">
-            <a:normAutofit/>
-          </a:bodyPr>
-          <a:lstStyle/>
-          <a:p>
-            <a:pPr algn="l" indent="0" marL="0">
-              <a:buNone/>
-            </a:pPr>
-            <a:r>
-              <a:rPr lang="en-US" sz="1575" dirty="0">
-                <a:solidFill>
-                  <a:srgbClr val="6B655C"/>
-                </a:solidFill>
-                <a:latin typeface="IBM Plex Mono" pitchFamily="34" charset="0"/>
-                <a:ea typeface="IBM Plex Mono" pitchFamily="34" charset="-122"/>
-                <a:cs typeface="IBM Plex Mono" pitchFamily="34" charset="-120"/>
-              </a:rPr>
-              <a:t>* 11/12 significant · Mann-Whitney U, p &lt; 0.05, Holm-corrected · all results equivalent (multiset)</a:t>
-            </a:r>
-            <a:endParaRPr lang="en-US" sz="1575" dirty="0"/>
-          </a:p>
-        </p:txBody>
-      </p:sp>
-      <p:sp>
-        <p:nvSpPr>
-          <p:cNvPr id="72" name="Text 70"/>
-          <p:cNvSpPr/>
-          <p:nvPr/>
-        </p:nvSpPr>
-        <p:spPr>
-          <a:xfrm>
-            <a:off x="952385" y="9633214"/>
-            <a:ext cx="6329527" cy="272868"/>
-          </a:xfrm>
-          <a:prstGeom prst="rect">
-            <a:avLst/>
-          </a:prstGeom>
-          <a:noFill/>
-          <a:ln/>
-        </p:spPr>
-        <p:txBody>
-          <a:bodyPr wrap="square" lIns="25400" tIns="25400" rIns="25400" bIns="25400" rtlCol="0" anchor="t">
-            <a:normAutofit/>
-          </a:bodyPr>
-          <a:lstStyle/>
-          <a:p>
-            <a:pPr algn="l" indent="0" marL="0">
-              <a:buNone/>
-            </a:pPr>
-            <a:r>
-              <a:rPr lang="en-US" sz="1425" dirty="0">
-                <a:solidFill>
-                  <a:srgbClr val="9A938A"/>
-                </a:solidFill>
-                <a:latin typeface="IBM Plex Mono" pitchFamily="34" charset="0"/>
-                <a:ea typeface="IBM Plex Mono" pitchFamily="34" charset="-122"/>
-                <a:cs typeface="IBM Plex Mono" pitchFamily="34" charset="-120"/>
-              </a:rPr>
-              <a:t>DM 2025/26 · D'Angelica &amp; Leone · PostgreSQL vs Neo4j</a:t>
+              <a:t>10 / 16</a:t>
             </a:r>
             <a:endParaRPr lang="en-US" sz="1425" dirty="0"/>
           </a:p>
         </p:txBody>
       </p:sp>
-      <p:sp>
-        <p:nvSpPr>
-          <p:cNvPr id="73" name="Text 71"/>
-          <p:cNvSpPr/>
-          <p:nvPr/>
-        </p:nvSpPr>
-        <p:spPr>
-          <a:xfrm>
-            <a:off x="16575568" y="9633214"/>
-            <a:ext cx="836206" cy="272868"/>
-          </a:xfrm>
-          <a:prstGeom prst="rect">
-            <a:avLst/>
-          </a:prstGeom>
-          <a:noFill/>
-          <a:ln/>
-        </p:spPr>
-        <p:txBody>
-          <a:bodyPr wrap="square" lIns="25400" tIns="25400" rIns="25400" bIns="25400" rtlCol="0" anchor="t">
-            <a:normAutofit/>
-          </a:bodyPr>
-          <a:lstStyle/>
-          <a:p>
-            <a:pPr algn="l" indent="0" marL="0">
-              <a:buNone/>
-            </a:pPr>
-            <a:r>
-              <a:rPr lang="en-US" sz="1425" dirty="0">
-                <a:solidFill>
-                  <a:srgbClr val="9A938A"/>
-                </a:solidFill>
-                <a:latin typeface="IBM Plex Mono" pitchFamily="34" charset="0"/>
-                <a:ea typeface="IBM Plex Mono" pitchFamily="34" charset="-122"/>
-                <a:cs typeface="IBM Plex Mono" pitchFamily="34" charset="-120"/>
-              </a:rPr>
-              <a:t>10 / 15</a:t>
-            </a:r>
-            <a:endParaRPr lang="en-US" sz="1425" dirty="0"/>
-          </a:p>
-        </p:txBody>
-      </p:sp>
+      <p:pic>
+        <p:nvPicPr>
+          <p:cNvPr id="74" name="Picture 73" descr="results.png"/>
+          <p:cNvPicPr>
+            <a:picLocks noChangeAspect="1"/>
+          </p:cNvPicPr>
+          <p:nvPr/>
+        </p:nvPicPr>
+        <p:blipFill>
+          <a:blip r:embed="rId3"/>
+          <a:stretch>
+            <a:fillRect/>
+          </a:stretch>
+        </p:blipFill>
+        <p:spPr>
+          <a:xfrm>
+            <a:off x="950976" y="2697480"/>
+            <a:ext cx="16386048" cy="5715000"/>
+          </a:xfrm>
+          <a:prstGeom prst="rect">
+            <a:avLst/>
+          </a:prstGeom>
+        </p:spPr>
+      </p:pic>
     </p:spTree>
   </p:cSld>
   <p:clrMapOvr>
@@ -5324,7 +3350,7 @@
         </p:nvSpPr>
         <p:spPr>
           <a:xfrm>
-            <a:off x="5813642" y="7192882"/>
+            <a:off x="1463040" y="7192882"/>
             <a:ext cx="2626829" cy="359819"/>
           </a:xfrm>
           <a:prstGeom prst="rect">
@@ -5365,7 +3391,7 @@
         </p:nvSpPr>
         <p:spPr>
           <a:xfrm>
-            <a:off x="5813642" y="7590682"/>
+            <a:off x="1463040" y="7590682"/>
             <a:ext cx="2626829" cy="829354"/>
           </a:xfrm>
           <a:prstGeom prst="rect">
@@ -5406,7 +3432,7 @@
         </p:nvSpPr>
         <p:spPr>
           <a:xfrm>
-            <a:off x="5813642" y="8438998"/>
+            <a:off x="1463040" y="8438998"/>
             <a:ext cx="2626829" cy="316343"/>
           </a:xfrm>
           <a:prstGeom prst="rect">
@@ -5447,7 +3473,7 @@
         </p:nvSpPr>
         <p:spPr>
           <a:xfrm>
-            <a:off x="9319532" y="7192882"/>
+            <a:off x="4846320" y="7192882"/>
             <a:ext cx="3179783" cy="359819"/>
           </a:xfrm>
           <a:prstGeom prst="rect">
@@ -5488,7 +3514,7 @@
         </p:nvSpPr>
         <p:spPr>
           <a:xfrm>
-            <a:off x="9319532" y="7590682"/>
+            <a:off x="4846320" y="7590682"/>
             <a:ext cx="3179783" cy="829354"/>
           </a:xfrm>
           <a:prstGeom prst="rect">
@@ -5529,7 +3555,7 @@
         </p:nvSpPr>
         <p:spPr>
           <a:xfrm>
-            <a:off x="9319532" y="8438998"/>
+            <a:off x="4846320" y="8438998"/>
             <a:ext cx="3179783" cy="316343"/>
           </a:xfrm>
           <a:prstGeom prst="rect">
@@ -5638,12 +3664,36 @@
                 <a:ea typeface="IBM Plex Mono" pitchFamily="34" charset="-122"/>
                 <a:cs typeface="IBM Plex Mono" pitchFamily="34" charset="-120"/>
               </a:rPr>
-              <a:t>11 / 15</a:t>
+              <a:t>11 / 16</a:t>
             </a:r>
             <a:endParaRPr lang="en-US" sz="1425" dirty="0"/>
           </a:p>
         </p:txBody>
       </p:sp>
+      <p:pic>
+        <p:nvPicPr>
+          <p:cNvPr id="13" name="Picture 12" descr="work.png"/>
+          <p:cNvPicPr>
+            <a:picLocks noChangeAspect="1"/>
+          </p:cNvPicPr>
+          <p:nvPr/>
+        </p:nvPicPr>
+        <p:blipFill>
+          <a:blip r:embed="rId3"/>
+          <a:stretch>
+            <a:fillRect/>
+          </a:stretch>
+        </p:blipFill>
+        <p:spPr>
+          <a:xfrm>
+            <a:off x="8732520" y="6675120"/>
+            <a:ext cx="8558784" cy="2743200"/>
+          </a:xfrm>
+          <a:prstGeom prst="rect">
+            <a:avLst/>
+          </a:prstGeom>
+        </p:spPr>
+      </p:pic>
     </p:spTree>
   </p:cSld>
   <p:clrMapOvr>
@@ -5755,7 +3805,7 @@
                 <a:ea typeface="Space Grotesk" pitchFamily="34" charset="-122"/>
                 <a:cs typeface="Space Grotesk" pitchFamily="34" charset="-120"/>
               </a:rPr>
-              <a:t>21 lines of recursive CTE vs 5 lines of Cypher — same answer, same semantics</a:t>
+              <a:t>21 lines of SQL vs 5 of Cypher — same answer, same semantics</a:t>
             </a:r>
             <a:endParaRPr lang="en-US" sz="4350" dirty="0"/>
           </a:p>
@@ -5780,6 +3830,10 @@
           </a:solidFill>
           <a:ln/>
         </p:spPr>
+        <p:txBody>
+          <a:bodyPr/>
+          <a:p/>
+        </p:txBody>
       </p:sp>
       <p:sp>
         <p:nvSpPr>
@@ -6285,6 +4339,10 @@
           </a:solidFill>
           <a:ln/>
         </p:spPr>
+        <p:txBody>
+          <a:bodyPr/>
+          <a:p/>
+        </p:txBody>
       </p:sp>
       <p:sp>
         <p:nvSpPr>
@@ -6357,7 +4415,7 @@
               <a:buNone/>
             </a:pPr>
             <a:r>
-              <a:rPr lang="en-US" sz="2250" dirty="0">
+              <a:rPr lang="en-US" sz="1538" dirty="0">
                 <a:solidFill>
                   <a:srgbClr val="D5E5DC"/>
                 </a:solidFill>
@@ -6371,7 +4429,7 @@
           </a:p>
           <a:p>
             <a:r>
-              <a:rPr sz="2250">
+              <a:rPr sz="1538">
                 <a:solidFill>
                   <a:srgbClr val="D5E5DC"/>
                 </a:solidFill>
@@ -6382,7 +4440,7 @@
           </a:p>
           <a:p>
             <a:r>
-              <a:rPr sz="2250">
+              <a:rPr sz="1538">
                 <a:solidFill>
                   <a:srgbClr val="D5E5DC"/>
                 </a:solidFill>
@@ -6393,7 +4451,7 @@
           </a:p>
           <a:p>
             <a:r>
-              <a:rPr sz="2250">
+              <a:rPr sz="1538">
                 <a:solidFill>
                   <a:srgbClr val="D5E5DC"/>
                 </a:solidFill>
@@ -6404,7 +4462,7 @@
           </a:p>
           <a:p>
             <a:r>
-              <a:rPr sz="2250">
+              <a:rPr sz="1538">
                 <a:solidFill>
                   <a:srgbClr val="D5E5DC"/>
                 </a:solidFill>
@@ -6415,7 +4473,7 @@
           </a:p>
           <a:p>
             <a:r>
-              <a:rPr sz="2250">
+              <a:rPr sz="1538">
                 <a:solidFill>
                   <a:srgbClr val="D5E5DC"/>
                 </a:solidFill>
@@ -6426,7 +4484,7 @@
           </a:p>
           <a:p>
             <a:r>
-              <a:rPr sz="2250">
+              <a:rPr sz="1538">
                 <a:solidFill>
                   <a:srgbClr val="D5E5DC"/>
                 </a:solidFill>
@@ -6437,7 +4495,7 @@
           </a:p>
           <a:p>
             <a:r>
-              <a:rPr sz="2250">
+              <a:rPr sz="1538">
                 <a:solidFill>
                   <a:srgbClr val="D5E5DC"/>
                 </a:solidFill>
@@ -6524,7 +4582,7 @@
                 <a:ea typeface="IBM Plex Mono" pitchFamily="34" charset="-122"/>
                 <a:cs typeface="IBM Plex Mono" pitchFamily="34" charset="-120"/>
               </a:rPr>
-              <a:t>12 / 15</a:t>
+              <a:t>12 / 16</a:t>
             </a:r>
             <a:endParaRPr lang="en-US" sz="1425" dirty="0"/>
           </a:p>
@@ -6671,6 +4729,10 @@
             <a:prstDash val="solid"/>
           </a:ln>
         </p:spPr>
+        <p:txBody>
+          <a:bodyPr/>
+          <a:p/>
+        </p:txBody>
       </p:sp>
       <p:sp>
         <p:nvSpPr>
@@ -6721,8 +4783,8 @@
         </p:nvSpPr>
         <p:spPr>
           <a:xfrm>
-            <a:off x="1437272" y="3893093"/>
-            <a:ext cx="1149773" cy="952444"/>
+            <a:off x="1435608" y="3703320"/>
+            <a:ext cx="1417320" cy="914400"/>
           </a:xfrm>
           <a:prstGeom prst="rect">
             <a:avLst/>
@@ -6743,7 +4805,7 @@
               <a:buNone/>
             </a:pPr>
             <a:r>
-              <a:rPr lang="en-US" sz="7200" b="1" dirty="0">
+              <a:rPr lang="en-US" sz="6000" b="1" dirty="0">
                 <a:solidFill>
                   <a:srgbClr val="1E7A52"/>
                 </a:solidFill>
@@ -6765,26 +4827,26 @@
         </p:nvSpPr>
         <p:spPr>
           <a:xfrm>
-            <a:off x="2739362" y="4397409"/>
-            <a:ext cx="2541124" cy="716317"/>
-          </a:xfrm>
-          <a:prstGeom prst="rect">
-            <a:avLst/>
-          </a:prstGeom>
-          <a:noFill/>
-          <a:ln/>
-        </p:spPr>
-        <p:txBody>
-          <a:bodyPr wrap="square" lIns="25400" tIns="25400" rIns="25400" bIns="25400" rtlCol="0" anchor="t">
-            <a:normAutofit/>
-          </a:bodyPr>
-          <a:lstStyle/>
-          <a:p>
-            <a:pPr algn="l" indent="0" marL="0">
-              <a:buNone/>
-            </a:pPr>
-            <a:r>
-              <a:rPr lang="en-US" sz="2100" dirty="0">
+            <a:off x="2834640" y="3858768"/>
+            <a:ext cx="2011680" cy="731520"/>
+          </a:xfrm>
+          <a:prstGeom prst="rect">
+            <a:avLst/>
+          </a:prstGeom>
+          <a:noFill/>
+          <a:ln/>
+        </p:spPr>
+        <p:txBody>
+          <a:bodyPr wrap="square" lIns="25400" tIns="25400" rIns="25400" bIns="25400" rtlCol="0" anchor="t">
+            <a:normAutofit/>
+          </a:bodyPr>
+          <a:lstStyle/>
+          <a:p>
+            <a:pPr algn="l" indent="0" marL="0">
+              <a:buNone/>
+            </a:pPr>
+            <a:r>
+              <a:rPr lang="en-US" sz="1500" dirty="0">
                 <a:solidFill>
                   <a:srgbClr val="3D4652"/>
                 </a:solidFill>
@@ -6792,22 +4854,31 @@
                 <a:ea typeface="Space Grotesk" pitchFamily="34" charset="-122"/>
                 <a:cs typeface="Space Grotesk" pitchFamily="34" charset="-120"/>
               </a:rPr>
-              <a:t>fewer lines of code </a:t>
-            </a:r>
-            <a:pPr algn="l" indent="0" marL="0">
-              <a:buNone/>
-            </a:pPr>
-            <a:r>
-              <a:rPr lang="en-US" sz="1650" dirty="0">
-                <a:solidFill>
-                  <a:srgbClr val="9A938A"/>
-                </a:solidFill>
-                <a:latin typeface="IBM Plex Mono" pitchFamily="34" charset="0"/>
-                <a:ea typeface="IBM Plex Mono" pitchFamily="34" charset="-122"/>
-                <a:cs typeface="IBM Plex Mono" pitchFamily="34" charset="-120"/>
+              <a:t>fewer lines of code</a:t>
+            </a:r>
+            <a:pPr algn="l" indent="0" marL="0">
+              <a:buNone/>
+            </a:pPr>
+            <a:endParaRPr lang="en-US" sz="2100" dirty="0"/>
+          </a:p>
+          <a:p>
+            <a:pPr algn="l" indent="0" marL="0">
+              <a:buNone/>
+            </a:pPr>
+            <a:r>
+              <a:rPr lang="en-US" sz="1500" dirty="0">
+                <a:solidFill>
+                  <a:srgbClr val="3D4652"/>
+                </a:solidFill>
+                <a:latin typeface="Space Grotesk" pitchFamily="34" charset="0"/>
+                <a:ea typeface="Space Grotesk" pitchFamily="34" charset="-122"/>
+                <a:cs typeface="Space Grotesk" pitchFamily="34" charset="-120"/>
               </a:rPr>
               <a:t>21 SQL → 5 Cypher</a:t>
             </a:r>
+            <a:pPr algn="l" indent="0" marL="0">
+              <a:buNone/>
+            </a:pPr>
             <a:endParaRPr lang="en-US" sz="2100" dirty="0"/>
           </a:p>
         </p:txBody>
@@ -6820,8 +4891,8 @@
         </p:nvSpPr>
         <p:spPr>
           <a:xfrm>
-            <a:off x="1437272" y="5418403"/>
-            <a:ext cx="2049964" cy="952444"/>
+            <a:off x="4754880" y="3703320"/>
+            <a:ext cx="1371600" cy="914400"/>
           </a:xfrm>
           <a:prstGeom prst="rect">
             <a:avLst/>
@@ -6842,7 +4913,7 @@
               <a:buNone/>
             </a:pPr>
             <a:r>
-              <a:rPr lang="en-US" sz="7200" b="1" dirty="0">
+              <a:rPr lang="en-US" sz="6000" b="1" dirty="0">
                 <a:solidFill>
                   <a:srgbClr val="1E7A52"/>
                 </a:solidFill>
@@ -6864,26 +4935,26 @@
         </p:nvSpPr>
         <p:spPr>
           <a:xfrm>
-            <a:off x="3529394" y="5922718"/>
-            <a:ext cx="3063074" cy="716317"/>
-          </a:xfrm>
-          <a:prstGeom prst="rect">
-            <a:avLst/>
-          </a:prstGeom>
-          <a:noFill/>
-          <a:ln/>
-        </p:spPr>
-        <p:txBody>
-          <a:bodyPr wrap="square" lIns="25400" tIns="25400" rIns="25400" bIns="25400" rtlCol="0" anchor="t">
-            <a:normAutofit/>
-          </a:bodyPr>
-          <a:lstStyle/>
-          <a:p>
-            <a:pPr algn="l" indent="0" marL="0">
-              <a:buNone/>
-            </a:pPr>
-            <a:r>
-              <a:rPr lang="en-US" sz="2100" dirty="0">
+            <a:off x="6053328" y="3858768"/>
+            <a:ext cx="1828800" cy="731520"/>
+          </a:xfrm>
+          <a:prstGeom prst="rect">
+            <a:avLst/>
+          </a:prstGeom>
+          <a:noFill/>
+          <a:ln/>
+        </p:spPr>
+        <p:txBody>
+          <a:bodyPr wrap="square" lIns="25400" tIns="25400" rIns="25400" bIns="25400" rtlCol="0" anchor="t">
+            <a:normAutofit/>
+          </a:bodyPr>
+          <a:lstStyle/>
+          <a:p>
+            <a:pPr algn="l" indent="0" marL="0">
+              <a:buNone/>
+            </a:pPr>
+            <a:r>
+              <a:rPr lang="en-US" sz="1500" dirty="0">
                 <a:solidFill>
                   <a:srgbClr val="3D4652"/>
                 </a:solidFill>
@@ -6891,22 +4962,31 @@
                 <a:ea typeface="Space Grotesk" pitchFamily="34" charset="-122"/>
                 <a:cs typeface="Space Grotesk" pitchFamily="34" charset="-120"/>
               </a:rPr>
-              <a:t>fewer logical operators </a:t>
-            </a:r>
-            <a:pPr algn="l" indent="0" marL="0">
-              <a:buNone/>
-            </a:pPr>
-            <a:r>
-              <a:rPr lang="en-US" sz="1650" dirty="0">
-                <a:solidFill>
-                  <a:srgbClr val="9A938A"/>
-                </a:solidFill>
-                <a:latin typeface="IBM Plex Mono" pitchFamily="34" charset="0"/>
-                <a:ea typeface="IBM Plex Mono" pitchFamily="34" charset="-122"/>
-                <a:cs typeface="IBM Plex Mono" pitchFamily="34" charset="-120"/>
+              <a:t>fewer operators</a:t>
+            </a:r>
+            <a:pPr algn="l" indent="0" marL="0">
+              <a:buNone/>
+            </a:pPr>
+            <a:endParaRPr lang="en-US" sz="2100" dirty="0"/>
+          </a:p>
+          <a:p>
+            <a:pPr algn="l" indent="0" marL="0">
+              <a:buNone/>
+            </a:pPr>
+            <a:r>
+              <a:rPr lang="en-US" sz="1500" dirty="0">
+                <a:solidFill>
+                  <a:srgbClr val="3D4652"/>
+                </a:solidFill>
+                <a:latin typeface="Space Grotesk" pitchFamily="34" charset="0"/>
+                <a:ea typeface="Space Grotesk" pitchFamily="34" charset="-122"/>
+                <a:cs typeface="Space Grotesk" pitchFamily="34" charset="-120"/>
               </a:rPr>
               <a:t>26 SQL → 5 Cypher</a:t>
             </a:r>
+            <a:pPr algn="l" indent="0" marL="0">
+              <a:buNone/>
+            </a:pPr>
             <a:endParaRPr lang="en-US" sz="2100" dirty="0"/>
           </a:p>
         </p:txBody>
@@ -6919,8 +4999,8 @@
         </p:nvSpPr>
         <p:spPr>
           <a:xfrm>
-            <a:off x="1437272" y="6943713"/>
-            <a:ext cx="6167290" cy="701101"/>
+            <a:off x="1435608" y="4846320"/>
+            <a:ext cx="6309360" cy="301752"/>
           </a:xfrm>
           <a:prstGeom prst="rect">
             <a:avLst/>
@@ -6941,15 +5021,15 @@
               <a:buNone/>
             </a:pPr>
             <a:r>
-              <a:rPr lang="en-US" sz="1800" dirty="0">
-                <a:solidFill>
-                  <a:srgbClr val="6B655C"/>
-                </a:solidFill>
-                <a:latin typeface="Space Grotesk" pitchFamily="34" charset="0"/>
+              <a:rPr lang="en-US" sz="1300" dirty="0">
+                <a:solidFill>
+                  <a:srgbClr val="9A938A"/>
+                </a:solidFill>
+                <a:latin typeface="IBM Plex Mono" pitchFamily="34" charset="0"/>
                 <a:ea typeface="Space Grotesk" pitchFamily="34" charset="-122"/>
                 <a:cs typeface="Space Grotesk" pitchFamily="34" charset="-120"/>
               </a:rPr>
-              <a:t>Verbosity measured on both axes across all 12 queries — Cypher wins on graph workloads on both.</a:t>
+              <a:t>LINES OF CODE PER QUERY — ALL 12, SQL VS CYPHER</a:t>
             </a:r>
             <a:endParaRPr lang="en-US" sz="1800" dirty="0"/>
           </a:p>
@@ -6979,6 +5059,10 @@
             <a:prstDash val="solid"/>
           </a:ln>
         </p:spPr>
+        <p:txBody>
+          <a:bodyPr/>
+          <a:p/>
+        </p:txBody>
       </p:sp>
       <p:sp>
         <p:nvSpPr>
@@ -7081,6 +5165,10 @@
           </a:solidFill>
           <a:ln/>
         </p:spPr>
+        <p:txBody>
+          <a:bodyPr/>
+          <a:p/>
+        </p:txBody>
       </p:sp>
       <p:sp>
         <p:nvSpPr>
@@ -7151,6 +5239,17 @@
               </a:lnSpc>
               <a:buNone/>
             </a:pPr>
+            <a:r>
+              <a:rPr lang="en-US" sz="1500" dirty="0">
+                <a:solidFill>
+                  <a:srgbClr val="B8C4D2"/>
+                </a:solidFill>
+                <a:latin typeface="IBM Plex Mono" pitchFamily="34" charset="0"/>
+                <a:ea typeface="IBM Plex Mono" pitchFamily="34" charset="-122"/>
+                <a:cs typeface="IBM Plex Mono" pitchFamily="34" charset="-120"/>
+              </a:rPr>
+              <a:t>UPDATE match</a:t>
+            </a:r>
             <a:endParaRPr lang="en-US" sz="1500" dirty="0"/>
           </a:p>
           <a:p>
@@ -7169,7 +5268,7 @@
                 <a:ea typeface="IBM Plex Mono" pitchFamily="34" charset="-122"/>
                 <a:cs typeface="IBM Plex Mono" pitchFamily="34" charset="-120"/>
               </a:rPr>
-              <a:t>UPDATE match</a:t>
+              <a:t>SET total_goals =</a:t>
             </a:r>
             <a:endParaRPr lang="en-US" sz="1500" dirty="0"/>
           </a:p>
@@ -7189,10 +5288,99 @@
                 <a:ea typeface="IBM Plex Mono" pitchFamily="34" charset="-122"/>
                 <a:cs typeface="IBM Plex Mono" pitchFamily="34" charset="-120"/>
               </a:rPr>
-              <a:t>SET total_goals =</a:t>
+              <a:t>  home_goal + away_goal;</a:t>
             </a:r>
             <a:endParaRPr lang="en-US" sz="1500" dirty="0"/>
           </a:p>
+        </p:txBody>
+      </p:sp>
+      <p:sp>
+        <p:nvSpPr>
+          <p:cNvPr id="16" name="Text 14"/>
+          <p:cNvSpPr/>
+          <p:nvPr/>
+        </p:nvSpPr>
+        <p:spPr>
+          <a:xfrm>
+            <a:off x="12946453" y="3817011"/>
+            <a:ext cx="4294657" cy="281563"/>
+          </a:xfrm>
+          <a:prstGeom prst="rect">
+            <a:avLst/>
+          </a:prstGeom>
+          <a:noFill/>
+          <a:ln/>
+        </p:spPr>
+        <p:txBody>
+          <a:bodyPr wrap="square" lIns="25400" tIns="25400" rIns="25400" bIns="25400" rtlCol="0" anchor="t">
+            <a:normAutofit/>
+          </a:bodyPr>
+          <a:lstStyle/>
+          <a:p>
+            <a:pPr algn="l" indent="0" marL="0">
+              <a:buNone/>
+            </a:pPr>
+            <a:r>
+              <a:rPr lang="en-US" sz="1500" dirty="0">
+                <a:solidFill>
+                  <a:srgbClr val="1E7A52"/>
+                </a:solidFill>
+                <a:latin typeface="IBM Plex Mono" pitchFamily="34" charset="0"/>
+                <a:ea typeface="IBM Plex Mono" pitchFamily="34" charset="-122"/>
+                <a:cs typeface="IBM Plex Mono" pitchFamily="34" charset="-120"/>
+              </a:rPr>
+              <a:t>NEO4J — 1 STEP, NO DDL</a:t>
+            </a:r>
+            <a:endParaRPr lang="en-US" sz="1500" dirty="0"/>
+          </a:p>
+        </p:txBody>
+      </p:sp>
+      <p:sp>
+        <p:nvSpPr>
+          <p:cNvPr id="17" name="Shape 15"/>
+          <p:cNvSpPr/>
+          <p:nvPr/>
+        </p:nvSpPr>
+        <p:spPr>
+          <a:xfrm>
+            <a:off x="12946453" y="4174733"/>
+            <a:ext cx="3904233" cy="1599898"/>
+          </a:xfrm>
+          <a:prstGeom prst="rect">
+            <a:avLst/>
+          </a:prstGeom>
+          <a:solidFill>
+            <a:srgbClr val="16202C"/>
+          </a:solidFill>
+          <a:ln/>
+        </p:spPr>
+        <p:txBody>
+          <a:bodyPr/>
+          <a:p/>
+        </p:txBody>
+      </p:sp>
+      <p:sp>
+        <p:nvSpPr>
+          <p:cNvPr id="18" name="Text 16"/>
+          <p:cNvSpPr/>
+          <p:nvPr/>
+        </p:nvSpPr>
+        <p:spPr>
+          <a:xfrm>
+            <a:off x="13194103" y="4403333"/>
+            <a:ext cx="3526060" cy="1180798"/>
+          </a:xfrm>
+          <a:prstGeom prst="rect">
+            <a:avLst/>
+          </a:prstGeom>
+          <a:noFill/>
+          <a:ln/>
+        </p:spPr>
+        <p:txBody>
+          <a:bodyPr wrap="none" lIns="25400" tIns="25400" rIns="25400" bIns="25400" rtlCol="0" anchor="t">
+            <a:normAutofit/>
+          </a:bodyPr>
+          <a:lstStyle/>
           <a:p>
             <a:pPr algn="l" indent="0" marL="0">
               <a:lnSpc>
@@ -7203,101 +5391,36 @@
             <a:r>
               <a:rPr lang="en-US" sz="1500" dirty="0">
                 <a:solidFill>
-                  <a:srgbClr val="B8C4D2"/>
+                  <a:srgbClr val="D5E5DC"/>
                 </a:solidFill>
                 <a:latin typeface="IBM Plex Mono" pitchFamily="34" charset="0"/>
                 <a:ea typeface="IBM Plex Mono" pitchFamily="34" charset="-122"/>
                 <a:cs typeface="IBM Plex Mono" pitchFamily="34" charset="-120"/>
               </a:rPr>
-              <a:t>  home_goal + away_goal;</a:t>
+              <a:t>MATCH (m:Match)</a:t>
             </a:r>
             <a:endParaRPr lang="en-US" sz="1500" dirty="0"/>
           </a:p>
-        </p:txBody>
-      </p:sp>
-      <p:sp>
-        <p:nvSpPr>
-          <p:cNvPr id="16" name="Text 14"/>
-          <p:cNvSpPr/>
-          <p:nvPr/>
-        </p:nvSpPr>
-        <p:spPr>
-          <a:xfrm>
-            <a:off x="12946453" y="3817011"/>
-            <a:ext cx="4294657" cy="281563"/>
-          </a:xfrm>
-          <a:prstGeom prst="rect">
-            <a:avLst/>
-          </a:prstGeom>
-          <a:noFill/>
-          <a:ln/>
-        </p:spPr>
-        <p:txBody>
-          <a:bodyPr wrap="square" lIns="25400" tIns="25400" rIns="25400" bIns="25400" rtlCol="0" anchor="t">
-            <a:normAutofit/>
-          </a:bodyPr>
-          <a:lstStyle/>
-          <a:p>
-            <a:pPr algn="l" indent="0" marL="0">
+          <a:p>
+            <a:pPr algn="l" indent="0" marL="0">
+              <a:lnSpc>
+                <a:spcPct val="150000"/>
+              </a:lnSpc>
               <a:buNone/>
             </a:pPr>
             <a:r>
               <a:rPr lang="en-US" sz="1500" dirty="0">
                 <a:solidFill>
-                  <a:srgbClr val="1E7A52"/>
+                  <a:srgbClr val="D5E5DC"/>
                 </a:solidFill>
                 <a:latin typeface="IBM Plex Mono" pitchFamily="34" charset="0"/>
                 <a:ea typeface="IBM Plex Mono" pitchFamily="34" charset="-122"/>
                 <a:cs typeface="IBM Plex Mono" pitchFamily="34" charset="-120"/>
               </a:rPr>
-              <a:t>NEO4J — 1 STEP, NO DDL</a:t>
+              <a:t>SET m.totalGoals =</a:t>
             </a:r>
             <a:endParaRPr lang="en-US" sz="1500" dirty="0"/>
           </a:p>
-        </p:txBody>
-      </p:sp>
-      <p:sp>
-        <p:nvSpPr>
-          <p:cNvPr id="17" name="Shape 15"/>
-          <p:cNvSpPr/>
-          <p:nvPr/>
-        </p:nvSpPr>
-        <p:spPr>
-          <a:xfrm>
-            <a:off x="12946453" y="4174733"/>
-            <a:ext cx="3904233" cy="1599898"/>
-          </a:xfrm>
-          <a:prstGeom prst="rect">
-            <a:avLst/>
-          </a:prstGeom>
-          <a:solidFill>
-            <a:srgbClr val="16202C"/>
-          </a:solidFill>
-          <a:ln/>
-        </p:spPr>
-      </p:sp>
-      <p:sp>
-        <p:nvSpPr>
-          <p:cNvPr id="18" name="Text 16"/>
-          <p:cNvSpPr/>
-          <p:nvPr/>
-        </p:nvSpPr>
-        <p:spPr>
-          <a:xfrm>
-            <a:off x="13194103" y="4403333"/>
-            <a:ext cx="3526060" cy="1180798"/>
-          </a:xfrm>
-          <a:prstGeom prst="rect">
-            <a:avLst/>
-          </a:prstGeom>
-          <a:noFill/>
-          <a:ln/>
-        </p:spPr>
-        <p:txBody>
-          <a:bodyPr wrap="none" lIns="25400" tIns="25400" rIns="25400" bIns="25400" rtlCol="0" anchor="t">
-            <a:normAutofit/>
-          </a:bodyPr>
-          <a:lstStyle/>
           <a:p>
             <a:pPr algn="l" indent="0" marL="0">
               <a:lnSpc>
@@ -7314,7 +5437,7 @@
                 <a:ea typeface="IBM Plex Mono" pitchFamily="34" charset="-122"/>
                 <a:cs typeface="IBM Plex Mono" pitchFamily="34" charset="-120"/>
               </a:rPr>
-              <a:t>MATCH (m:Match)</a:t>
+              <a:t>  m.homeGoals</a:t>
             </a:r>
             <a:endParaRPr lang="en-US" sz="1500" dirty="0"/>
           </a:p>
@@ -7334,195 +5457,179 @@
                 <a:ea typeface="IBM Plex Mono" pitchFamily="34" charset="-122"/>
                 <a:cs typeface="IBM Plex Mono" pitchFamily="34" charset="-120"/>
               </a:rPr>
-              <a:t>SET m.totalGoals =</a:t>
+              <a:t>+ m.awayGoals;</a:t>
             </a:r>
             <a:endParaRPr lang="en-US" sz="1500" dirty="0"/>
           </a:p>
+        </p:txBody>
+      </p:sp>
+      <p:sp>
+        <p:nvSpPr>
+          <p:cNvPr id="19" name="Text 17"/>
+          <p:cNvSpPr/>
+          <p:nvPr/>
+        </p:nvSpPr>
+        <p:spPr>
+          <a:xfrm>
+            <a:off x="8775661" y="6612756"/>
+            <a:ext cx="8317277" cy="728545"/>
+          </a:xfrm>
+          <a:prstGeom prst="rect">
+            <a:avLst/>
+          </a:prstGeom>
+          <a:noFill/>
+          <a:ln/>
+        </p:spPr>
+        <p:txBody>
+          <a:bodyPr wrap="square" lIns="25400" tIns="25400" rIns="25400" bIns="25400" rtlCol="0" anchor="t">
+            <a:normAutofit/>
+          </a:bodyPr>
+          <a:lstStyle/>
           <a:p>
             <a:pPr algn="l" indent="0" marL="0">
               <a:lnSpc>
-                <a:spcPct val="150000"/>
+                <a:spcPct val="145000"/>
               </a:lnSpc>
               <a:buNone/>
             </a:pPr>
             <a:r>
-              <a:rPr lang="en-US" sz="1500" dirty="0">
-                <a:solidFill>
-                  <a:srgbClr val="D5E5DC"/>
+              <a:rPr lang="en-US" sz="1875" b="1" dirty="0">
+                <a:solidFill>
+                  <a:srgbClr val="3D4652"/>
+                </a:solidFill>
+                <a:latin typeface="Space Grotesk" pitchFamily="34" charset="0"/>
+                <a:ea typeface="Space Grotesk" pitchFamily="34" charset="-122"/>
+                <a:cs typeface="Space Grotesk" pitchFamily="34" charset="-120"/>
+              </a:rPr>
+              <a:t>352 ms vs 78 ms (4.5×, measured through COMMIT) </a:t>
+            </a:r>
+            <a:pPr algn="l" indent="0" marL="0">
+              <a:lnSpc>
+                <a:spcPct val="145000"/>
+              </a:lnSpc>
+              <a:buNone/>
+            </a:pPr>
+            <a:r>
+              <a:rPr lang="en-US" sz="1875" dirty="0">
+                <a:solidFill>
+                  <a:srgbClr val="3D4652"/>
+                </a:solidFill>
+                <a:latin typeface="Space Grotesk" pitchFamily="34" charset="0"/>
+                <a:ea typeface="Space Grotesk" pitchFamily="34" charset="-122"/>
+                <a:cs typeface="Space Grotesk" pitchFamily="34" charset="-120"/>
+              </a:rPr>
+              <a:t>— same CPU work, radically different change-management: schema-on-write vs schema-on-read.</a:t>
+            </a:r>
+            <a:endParaRPr lang="en-US" sz="1875" dirty="0"/>
+          </a:p>
+        </p:txBody>
+      </p:sp>
+      <p:sp>
+        <p:nvSpPr>
+          <p:cNvPr id="20" name="Text 18"/>
+          <p:cNvSpPr/>
+          <p:nvPr/>
+        </p:nvSpPr>
+        <p:spPr>
+          <a:xfrm>
+            <a:off x="952385" y="9633214"/>
+            <a:ext cx="6329527" cy="272868"/>
+          </a:xfrm>
+          <a:prstGeom prst="rect">
+            <a:avLst/>
+          </a:prstGeom>
+          <a:noFill/>
+          <a:ln/>
+        </p:spPr>
+        <p:txBody>
+          <a:bodyPr wrap="square" lIns="25400" tIns="25400" rIns="25400" bIns="25400" rtlCol="0" anchor="t">
+            <a:normAutofit/>
+          </a:bodyPr>
+          <a:lstStyle/>
+          <a:p>
+            <a:pPr algn="l" indent="0" marL="0">
+              <a:buNone/>
+            </a:pPr>
+            <a:r>
+              <a:rPr lang="en-US" sz="1425" dirty="0">
+                <a:solidFill>
+                  <a:srgbClr val="9A938A"/>
                 </a:solidFill>
                 <a:latin typeface="IBM Plex Mono" pitchFamily="34" charset="0"/>
                 <a:ea typeface="IBM Plex Mono" pitchFamily="34" charset="-122"/>
                 <a:cs typeface="IBM Plex Mono" pitchFamily="34" charset="-120"/>
               </a:rPr>
-              <a:t>  m.homeGoals</a:t>
-            </a:r>
-            <a:endParaRPr lang="en-US" sz="1500" dirty="0"/>
-          </a:p>
-          <a:p>
-            <a:pPr algn="l" indent="0" marL="0">
-              <a:lnSpc>
-                <a:spcPct val="150000"/>
-              </a:lnSpc>
-              <a:buNone/>
-            </a:pPr>
-            <a:r>
-              <a:rPr lang="en-US" sz="1500" dirty="0">
-                <a:solidFill>
-                  <a:srgbClr val="D5E5DC"/>
+              <a:t>DM 2025/26 · D'Angelica &amp; Leone · PostgreSQL vs Neo4j</a:t>
+            </a:r>
+            <a:endParaRPr lang="en-US" sz="1425" dirty="0"/>
+          </a:p>
+        </p:txBody>
+      </p:sp>
+      <p:sp>
+        <p:nvSpPr>
+          <p:cNvPr id="21" name="Text 19"/>
+          <p:cNvSpPr/>
+          <p:nvPr/>
+        </p:nvSpPr>
+        <p:spPr>
+          <a:xfrm>
+            <a:off x="16575568" y="9633214"/>
+            <a:ext cx="836206" cy="272868"/>
+          </a:xfrm>
+          <a:prstGeom prst="rect">
+            <a:avLst/>
+          </a:prstGeom>
+          <a:noFill/>
+          <a:ln/>
+        </p:spPr>
+        <p:txBody>
+          <a:bodyPr wrap="square" lIns="25400" tIns="25400" rIns="25400" bIns="25400" rtlCol="0" anchor="t">
+            <a:normAutofit/>
+          </a:bodyPr>
+          <a:lstStyle/>
+          <a:p>
+            <a:pPr algn="l" indent="0" marL="0">
+              <a:buNone/>
+            </a:pPr>
+            <a:r>
+              <a:rPr lang="en-US" sz="1425" dirty="0">
+                <a:solidFill>
+                  <a:srgbClr val="9A938A"/>
                 </a:solidFill>
                 <a:latin typeface="IBM Plex Mono" pitchFamily="34" charset="0"/>
                 <a:ea typeface="IBM Plex Mono" pitchFamily="34" charset="-122"/>
                 <a:cs typeface="IBM Plex Mono" pitchFamily="34" charset="-120"/>
               </a:rPr>
-              <a:t>+ m.awayGoals;</a:t>
-            </a:r>
-            <a:endParaRPr lang="en-US" sz="1500" dirty="0"/>
-          </a:p>
-        </p:txBody>
-      </p:sp>
-      <p:sp>
-        <p:nvSpPr>
-          <p:cNvPr id="19" name="Text 17"/>
-          <p:cNvSpPr/>
-          <p:nvPr/>
-        </p:nvSpPr>
-        <p:spPr>
-          <a:xfrm>
-            <a:off x="8775661" y="6612756"/>
-            <a:ext cx="8317277" cy="728545"/>
-          </a:xfrm>
-          <a:prstGeom prst="rect">
-            <a:avLst/>
-          </a:prstGeom>
-          <a:noFill/>
-          <a:ln/>
-        </p:spPr>
-        <p:txBody>
-          <a:bodyPr wrap="square" lIns="25400" tIns="25400" rIns="25400" bIns="25400" rtlCol="0" anchor="t">
-            <a:normAutofit/>
-          </a:bodyPr>
-          <a:lstStyle/>
-          <a:p>
-            <a:pPr algn="l" indent="0" marL="0">
-              <a:lnSpc>
-                <a:spcPct val="145000"/>
-              </a:lnSpc>
-              <a:buNone/>
-            </a:pPr>
-            <a:r>
-              <a:rPr lang="en-US" sz="1875" b="1" dirty="0">
-                <a:solidFill>
-                  <a:srgbClr val="3D4652"/>
-                </a:solidFill>
-                <a:latin typeface="Space Grotesk" pitchFamily="34" charset="0"/>
-                <a:ea typeface="Space Grotesk" pitchFamily="34" charset="-122"/>
-                <a:cs typeface="Space Grotesk" pitchFamily="34" charset="-120"/>
-              </a:rPr>
-              <a:t>352 ms vs 78 ms (4.5×, measured through COMMIT) </a:t>
-            </a:r>
-            <a:pPr algn="l" indent="0" marL="0">
-              <a:lnSpc>
-                <a:spcPct val="145000"/>
-              </a:lnSpc>
-              <a:buNone/>
-            </a:pPr>
-            <a:r>
-              <a:rPr lang="en-US" sz="1875" dirty="0">
-                <a:solidFill>
-                  <a:srgbClr val="3D4652"/>
-                </a:solidFill>
-                <a:latin typeface="Space Grotesk" pitchFamily="34" charset="0"/>
-                <a:ea typeface="Space Grotesk" pitchFamily="34" charset="-122"/>
-                <a:cs typeface="Space Grotesk" pitchFamily="34" charset="-120"/>
-              </a:rPr>
-              <a:t>— same CPU work, radically different change-management: schema-on-write vs schema-on-read.</a:t>
-            </a:r>
-            <a:endParaRPr lang="en-US" sz="1875" dirty="0"/>
-          </a:p>
-        </p:txBody>
-      </p:sp>
-      <p:sp>
-        <p:nvSpPr>
-          <p:cNvPr id="20" name="Text 18"/>
-          <p:cNvSpPr/>
-          <p:nvPr/>
-        </p:nvSpPr>
-        <p:spPr>
-          <a:xfrm>
-            <a:off x="952385" y="9633214"/>
-            <a:ext cx="6329527" cy="272868"/>
-          </a:xfrm>
-          <a:prstGeom prst="rect">
-            <a:avLst/>
-          </a:prstGeom>
-          <a:noFill/>
-          <a:ln/>
-        </p:spPr>
-        <p:txBody>
-          <a:bodyPr wrap="square" lIns="25400" tIns="25400" rIns="25400" bIns="25400" rtlCol="0" anchor="t">
-            <a:normAutofit/>
-          </a:bodyPr>
-          <a:lstStyle/>
-          <a:p>
-            <a:pPr algn="l" indent="0" marL="0">
-              <a:buNone/>
-            </a:pPr>
-            <a:r>
-              <a:rPr lang="en-US" sz="1425" dirty="0">
-                <a:solidFill>
-                  <a:srgbClr val="9A938A"/>
-                </a:solidFill>
-                <a:latin typeface="IBM Plex Mono" pitchFamily="34" charset="0"/>
-                <a:ea typeface="IBM Plex Mono" pitchFamily="34" charset="-122"/>
-                <a:cs typeface="IBM Plex Mono" pitchFamily="34" charset="-120"/>
-              </a:rPr>
-              <a:t>DM 2025/26 · D'Angelica &amp; Leone · PostgreSQL vs Neo4j</a:t>
+              <a:t>13 / 16</a:t>
             </a:r>
             <a:endParaRPr lang="en-US" sz="1425" dirty="0"/>
           </a:p>
         </p:txBody>
       </p:sp>
-      <p:sp>
-        <p:nvSpPr>
-          <p:cNvPr id="21" name="Text 19"/>
-          <p:cNvSpPr/>
-          <p:nvPr/>
-        </p:nvSpPr>
-        <p:spPr>
-          <a:xfrm>
-            <a:off x="16575568" y="9633214"/>
-            <a:ext cx="836206" cy="272868"/>
-          </a:xfrm>
-          <a:prstGeom prst="rect">
-            <a:avLst/>
-          </a:prstGeom>
-          <a:noFill/>
-          <a:ln/>
-        </p:spPr>
-        <p:txBody>
-          <a:bodyPr wrap="square" lIns="25400" tIns="25400" rIns="25400" bIns="25400" rtlCol="0" anchor="t">
-            <a:normAutofit/>
-          </a:bodyPr>
-          <a:lstStyle/>
-          <a:p>
-            <a:pPr algn="l" indent="0" marL="0">
-              <a:buNone/>
-            </a:pPr>
-            <a:r>
-              <a:rPr lang="en-US" sz="1425" dirty="0">
-                <a:solidFill>
-                  <a:srgbClr val="9A938A"/>
-                </a:solidFill>
-                <a:latin typeface="IBM Plex Mono" pitchFamily="34" charset="0"/>
-                <a:ea typeface="IBM Plex Mono" pitchFamily="34" charset="-122"/>
-                <a:cs typeface="IBM Plex Mono" pitchFamily="34" charset="-120"/>
-              </a:rPr>
-              <a:t>13 / 15</a:t>
-            </a:r>
-            <a:endParaRPr lang="en-US" sz="1425" dirty="0"/>
-          </a:p>
-        </p:txBody>
-      </p:sp>
+      <p:pic>
+        <p:nvPicPr>
+          <p:cNvPr id="22" name="Picture 21" descr="loc.png"/>
+          <p:cNvPicPr>
+            <a:picLocks noChangeAspect="1"/>
+          </p:cNvPicPr>
+          <p:nvPr/>
+        </p:nvPicPr>
+        <p:blipFill>
+          <a:blip r:embed="rId3"/>
+          <a:stretch>
+            <a:fillRect/>
+          </a:stretch>
+        </p:blipFill>
+        <p:spPr>
+          <a:xfrm>
+            <a:off x="1371600" y="5212080"/>
+            <a:ext cx="6126480" cy="2331720"/>
+          </a:xfrm>
+          <a:prstGeom prst="rect">
+            <a:avLst/>
+          </a:prstGeom>
+        </p:spPr>
+      </p:pic>
     </p:spTree>
   </p:cSld>
   <p:clrMapOvr>
@@ -7649,7 +5756,7 @@
         <p:spPr>
           <a:xfrm>
             <a:off x="952385" y="2590595"/>
-            <a:ext cx="5207004" cy="3749896"/>
+            <a:ext cx="5207004" cy="4160520"/>
           </a:xfrm>
           <a:prstGeom prst="rect">
             <a:avLst/>
@@ -7664,6 +5771,10 @@
             <a:prstDash val="solid"/>
           </a:ln>
         </p:spPr>
+        <p:txBody>
+          <a:bodyPr/>
+          <a:p/>
+        </p:txBody>
       </p:sp>
       <p:sp>
         <p:nvSpPr>
@@ -7783,7 +5894,7 @@
               <a:buNone/>
             </a:pPr>
             <a:r>
-              <a:rPr lang="en-US" sz="1800" dirty="0">
+              <a:rPr lang="en-US" sz="1700" dirty="0">
                 <a:solidFill>
                   <a:srgbClr val="6B655C"/>
                 </a:solidFill>
@@ -7791,7 +5902,7 @@
                 <a:ea typeface="Space Grotesk" pitchFamily="34" charset="-122"/>
                 <a:cs typeface="Space Grotesk" pitchFamily="34" charset="-120"/>
               </a:rPr>
-              <a:t>Two-hop teammates (Q09): with the same precomputed relation, B-tree joins beat the traversal 2.1× — and the gap widens with data. Light aggregations (&lt; 15 ms) are a dead heat: the winner flips between runs.</a:t>
+              <a:t>Two-hop teammates (Q09): same precomputed relation, B-tree joins beat the traversal 2.1× — and the gap widens with data. Light aggregations (&lt; 15 ms): a dead heat.</a:t>
             </a:r>
             <a:endParaRPr lang="en-US" sz="1800" dirty="0"/>
           </a:p>
@@ -7806,7 +5917,7 @@
         <p:spPr>
           <a:xfrm>
             <a:off x="6540342" y="2590595"/>
-            <a:ext cx="5207139" cy="3749896"/>
+            <a:ext cx="5207139" cy="4160520"/>
           </a:xfrm>
           <a:prstGeom prst="rect">
             <a:avLst/>
@@ -7821,6 +5932,10 @@
             <a:prstDash val="solid"/>
           </a:ln>
         </p:spPr>
+        <p:txBody>
+          <a:bodyPr/>
+          <a:p/>
+        </p:txBody>
       </p:sp>
       <p:sp>
         <p:nvSpPr>
@@ -7940,7 +6055,7 @@
               <a:buNone/>
             </a:pPr>
             <a:r>
-              <a:rPr lang="en-US" sz="1800" dirty="0">
+              <a:rPr lang="en-US" sz="1700" dirty="0">
                 <a:solidFill>
                   <a:srgbClr val="6B655C"/>
                 </a:solidFill>
@@ -7948,7 +6063,7 @@
                 <a:ea typeface="Space Grotesk" pitchFamily="34" charset="-122"/>
                 <a:cs typeface="Space Grotesk" pitchFamily="34" charset="-120"/>
               </a:rPr>
-              <a:t>Q10 57× with identical semantics: the recursive CTE explores 44,251 states, SHORTEST 1 touches 4,402 db hits. Q07 (1.9×) and Q06 (3.6×) follow, and Neo4j's edge on Q07 grows with the data.</a:t>
+              <a:t>Q10: 57× with identical semantics — the CTE explores 44,251 states, SHORTEST 1 touches 4,402 db hits. Q06 (3.6×) and Q07 (1.9×) follow; Q07's edge grows with data.</a:t>
             </a:r>
             <a:endParaRPr lang="en-US" sz="1800" dirty="0"/>
           </a:p>
@@ -7963,7 +6078,7 @@
         <p:spPr>
           <a:xfrm>
             <a:off x="12128435" y="2590595"/>
-            <a:ext cx="5207139" cy="3749896"/>
+            <a:ext cx="5207139" cy="4160520"/>
           </a:xfrm>
           <a:prstGeom prst="rect">
             <a:avLst/>
@@ -7978,6 +6093,10 @@
             <a:prstDash val="solid"/>
           </a:ln>
         </p:spPr>
+        <p:txBody>
+          <a:bodyPr/>
+          <a:p/>
+        </p:txBody>
       </p:sp>
       <p:sp>
         <p:nvSpPr>
@@ -8097,7 +6216,7 @@
               <a:buNone/>
             </a:pPr>
             <a:r>
-              <a:rPr lang="en-US" sz="1800" dirty="0">
+              <a:rPr lang="en-US" sz="1700" dirty="0">
                 <a:solidFill>
                   <a:srgbClr val="6B655C"/>
                 </a:solidFill>
@@ -8119,7 +6238,7 @@
         </p:nvSpPr>
         <p:spPr>
           <a:xfrm>
-            <a:off x="952385" y="7007160"/>
+            <a:off x="952385" y="7178040"/>
             <a:ext cx="16383190" cy="875759"/>
           </a:xfrm>
           <a:prstGeom prst="rect">
@@ -8130,6 +6249,10 @@
           </a:solidFill>
           <a:ln/>
         </p:spPr>
+        <p:txBody>
+          <a:bodyPr/>
+          <a:p/>
+        </p:txBody>
       </p:sp>
       <p:sp>
         <p:nvSpPr>
@@ -8139,7 +6262,7 @@
         </p:nvSpPr>
         <p:spPr>
           <a:xfrm>
-            <a:off x="1371380" y="7318960"/>
+            <a:off x="1371380" y="7488936"/>
             <a:ext cx="916228" cy="298953"/>
           </a:xfrm>
           <a:prstGeom prst="rect">
@@ -8180,8 +6303,8 @@
         </p:nvSpPr>
         <p:spPr>
           <a:xfrm>
-            <a:off x="2401884" y="7292875"/>
-            <a:ext cx="11404561" cy="342429"/>
+            <a:off x="2401884" y="7470648"/>
+            <a:ext cx="14630400" cy="342429"/>
           </a:xfrm>
           <a:prstGeom prst="rect">
             <a:avLst/>
@@ -8207,7 +6330,7 @@
                 <a:ea typeface="Space Grotesk" pitchFamily="34" charset="-122"/>
                 <a:cs typeface="Space Grotesk" pitchFamily="34" charset="-120"/>
               </a:rPr>
-              <a:t>Single node, single user, default configs. Four sensitivity analyses in the report: work_mem (no effect), Q10 semantics (fixed), MVCC bloat (VACUUM protocol), scaling on 2/4/8 seasons (measured).</a:t>
+              <a:t>Single node, single user, default configs. Four sensitivity analyses in the report: work_mem, Q10 semantics, MVCC bloat (VACUUM protocol), scaling on 2/4/8 seasons.</a:t>
             </a:r>
             <a:endParaRPr lang="en-US" sz="1875" dirty="0"/>
           </a:p>
@@ -8289,7 +6412,7 @@
                 <a:ea typeface="IBM Plex Mono" pitchFamily="34" charset="-122"/>
                 <a:cs typeface="IBM Plex Mono" pitchFamily="34" charset="-120"/>
               </a:rPr>
-              <a:t>14 / 15</a:t>
+              <a:t>14 / 16</a:t>
             </a:r>
             <a:endParaRPr lang="en-US" sz="1425" dirty="0"/>
           </a:p>
@@ -8436,6 +6559,10 @@
             <a:prstDash val="solid"/>
           </a:ln>
         </p:spPr>
+        <p:txBody>
+          <a:bodyPr/>
+          <a:p/>
+        </p:txBody>
       </p:sp>
       <p:sp>
         <p:nvSpPr>
@@ -8456,6 +6583,10 @@
           </a:solidFill>
           <a:ln/>
         </p:spPr>
+        <p:txBody>
+          <a:bodyPr/>
+          <a:p/>
+        </p:txBody>
       </p:sp>
       <p:sp>
         <p:nvSpPr>
@@ -8476,6 +6607,10 @@
           </a:solidFill>
           <a:ln/>
         </p:spPr>
+        <p:txBody>
+          <a:bodyPr/>
+          <a:p/>
+        </p:txBody>
       </p:sp>
       <p:sp>
         <p:nvSpPr>
@@ -8537,6 +6672,10 @@
           </a:solidFill>
           <a:ln/>
         </p:spPr>
+        <p:txBody>
+          <a:bodyPr/>
+          <a:p/>
+        </p:txBody>
       </p:sp>
       <p:sp>
         <p:nvSpPr>
@@ -8598,6 +6737,10 @@
           </a:solidFill>
           <a:ln/>
         </p:spPr>
+        <p:txBody>
+          <a:bodyPr/>
+          <a:p/>
+        </p:txBody>
       </p:sp>
       <p:sp>
         <p:nvSpPr>
@@ -8659,6 +6802,10 @@
           </a:solidFill>
           <a:ln/>
         </p:spPr>
+        <p:txBody>
+          <a:bodyPr/>
+          <a:p/>
+        </p:txBody>
       </p:sp>
       <p:sp>
         <p:nvSpPr>
@@ -8723,6 +6870,10 @@
           </a:solidFill>
           <a:ln/>
         </p:spPr>
+        <p:txBody>
+          <a:bodyPr/>
+          <a:p/>
+        </p:txBody>
       </p:sp>
       <p:sp>
         <p:nvSpPr>
@@ -8787,6 +6938,10 @@
           </a:solidFill>
           <a:ln/>
         </p:spPr>
+        <p:txBody>
+          <a:bodyPr/>
+          <a:p/>
+        </p:txBody>
       </p:sp>
       <p:sp>
         <p:nvSpPr>
@@ -8848,6 +7003,10 @@
           </a:solidFill>
           <a:ln/>
         </p:spPr>
+        <p:txBody>
+          <a:bodyPr/>
+          <a:p/>
+        </p:txBody>
       </p:sp>
       <p:sp>
         <p:nvSpPr>
@@ -8912,6 +7071,10 @@
           </a:solidFill>
           <a:ln/>
         </p:spPr>
+        <p:txBody>
+          <a:bodyPr/>
+          <a:p/>
+        </p:txBody>
       </p:sp>
       <p:sp>
         <p:nvSpPr>
@@ -9247,9 +7410,77 @@
                 <a:ea typeface="IBM Plex Mono" pitchFamily="34" charset="-122"/>
                 <a:cs typeface="IBM Plex Mono" pitchFamily="34" charset="-120"/>
               </a:rPr>
-              <a:t>15 / 15</a:t>
+              <a:t>16 / 16</a:t>
             </a:r>
             <a:endParaRPr lang="en-US" sz="1425" dirty="0"/>
+          </a:p>
+        </p:txBody>
+      </p:sp>
+      <p:pic>
+        <p:nvPicPr>
+          <p:cNvPr id="29" name="Picture 28" descr="qr.png"/>
+          <p:cNvPicPr>
+            <a:picLocks noChangeAspect="1"/>
+          </p:cNvPicPr>
+          <p:nvPr/>
+        </p:nvPicPr>
+        <p:blipFill>
+          <a:blip r:embed="rId3"/>
+          <a:stretch>
+            <a:fillRect/>
+          </a:stretch>
+        </p:blipFill>
+        <p:spPr>
+          <a:xfrm>
+            <a:off x="15416784" y="6812280"/>
+            <a:ext cx="1920240" cy="1920240"/>
+          </a:xfrm>
+          <a:prstGeom prst="rect">
+            <a:avLst/>
+          </a:prstGeom>
+        </p:spPr>
+      </p:pic>
+      <p:sp>
+        <p:nvSpPr>
+          <p:cNvPr id="1001" name="Text 24"/>
+          <p:cNvSpPr/>
+          <p:nvPr/>
+        </p:nvSpPr>
+        <p:spPr>
+          <a:xfrm>
+            <a:off x="11887200" y="8778240"/>
+            <a:ext cx="5449824" cy="274320"/>
+          </a:xfrm>
+          <a:prstGeom prst="rect">
+            <a:avLst/>
+          </a:prstGeom>
+          <a:noFill/>
+          <a:ln/>
+        </p:spPr>
+        <p:txBody>
+          <a:bodyPr wrap="square" lIns="25400" tIns="25400" rIns="25400" bIns="25400" rtlCol="0" anchor="t">
+            <a:normAutofit/>
+          </a:bodyPr>
+          <a:lstStyle/>
+          <a:p>
+            <a:pPr algn="r" indent="0" marL="0">
+              <a:lnSpc>
+                <a:spcPct val="160000"/>
+              </a:lnSpc>
+              <a:buNone/>
+            </a:pPr>
+            <a:r>
+              <a:rPr lang="en-US" sz="1250" dirty="0">
+                <a:solidFill>
+                  <a:srgbClr val="9A938A"/>
+                </a:solidFill>
+                <a:latin typeface="IBM Plex Mono" pitchFamily="34" charset="0"/>
+                <a:ea typeface="IBM Plex Mono" pitchFamily="34" charset="-122"/>
+                <a:cs typeface="IBM Plex Mono" pitchFamily="34" charset="-120"/>
+              </a:rPr>
+              <a:t>scan — report, harness, plans, sensitivity analyses</a:t>
+            </a:r>
+            <a:endParaRPr lang="en-US" sz="1650" dirty="0"/>
           </a:p>
         </p:txBody>
       </p:sp>
@@ -9394,6 +7625,10 @@
             <a:prstDash val="solid"/>
           </a:ln>
         </p:spPr>
+        <p:txBody>
+          <a:bodyPr/>
+          <a:p/>
+        </p:txBody>
       </p:sp>
       <p:sp>
         <p:nvSpPr>
@@ -9643,6 +7878,10 @@
             <a:prstDash val="solid"/>
           </a:ln>
         </p:spPr>
+        <p:txBody>
+          <a:bodyPr/>
+          <a:p/>
+        </p:txBody>
       </p:sp>
       <p:sp>
         <p:nvSpPr>
@@ -9892,6 +8131,10 @@
             <a:prstDash val="solid"/>
           </a:ln>
         </p:spPr>
+        <p:txBody>
+          <a:bodyPr/>
+          <a:p/>
+        </p:txBody>
       </p:sp>
       <p:sp>
         <p:nvSpPr>
@@ -10422,6 +8665,10 @@
             <a:prstDash val="solid"/>
           </a:ln>
         </p:spPr>
+        <p:txBody>
+          <a:bodyPr/>
+          <a:p/>
+        </p:txBody>
       </p:sp>
       <p:sp>
         <p:nvSpPr>
@@ -10538,6 +8785,10 @@
           </a:solidFill>
           <a:ln/>
         </p:spPr>
+        <p:txBody>
+          <a:bodyPr/>
+          <a:p/>
+        </p:txBody>
       </p:sp>
       <p:sp>
         <p:nvSpPr>
@@ -10599,6 +8850,10 @@
           </a:solidFill>
           <a:ln/>
         </p:spPr>
+        <p:txBody>
+          <a:bodyPr/>
+          <a:p/>
+        </p:txBody>
       </p:sp>
       <p:sp>
         <p:nvSpPr>
@@ -10665,6 +8920,10 @@
             <a:prstDash val="solid"/>
           </a:ln>
         </p:spPr>
+        <p:txBody>
+          <a:bodyPr/>
+          <a:p/>
+        </p:txBody>
       </p:sp>
       <p:sp>
         <p:nvSpPr>
@@ -10781,6 +9040,10 @@
           </a:solidFill>
           <a:ln/>
         </p:spPr>
+        <p:txBody>
+          <a:bodyPr/>
+          <a:p/>
+        </p:txBody>
       </p:sp>
       <p:sp>
         <p:nvSpPr>
@@ -10842,6 +9105,10 @@
           </a:solidFill>
           <a:ln/>
         </p:spPr>
+        <p:txBody>
+          <a:bodyPr/>
+          <a:p/>
+        </p:txBody>
       </p:sp>
       <p:sp>
         <p:nvSpPr>
@@ -11107,6 +9374,10 @@
             <a:prstDash val="solid"/>
           </a:ln>
         </p:spPr>
+        <p:txBody>
+          <a:bodyPr/>
+          <a:p/>
+        </p:txBody>
       </p:sp>
       <p:sp>
         <p:nvSpPr>
@@ -11217,6 +9488,10 @@
             <a:prstDash val="solid"/>
           </a:ln>
         </p:spPr>
+        <p:txBody>
+          <a:bodyPr/>
+          <a:p/>
+        </p:txBody>
       </p:sp>
       <p:sp>
         <p:nvSpPr>
@@ -11327,6 +9602,10 @@
             <a:prstDash val="solid"/>
           </a:ln>
         </p:spPr>
+        <p:txBody>
+          <a:bodyPr/>
+          <a:p/>
+        </p:txBody>
       </p:sp>
       <p:sp>
         <p:nvSpPr>
@@ -11437,6 +9716,10 @@
             <a:prstDash val="dash"/>
           </a:ln>
         </p:spPr>
+        <p:txBody>
+          <a:bodyPr/>
+          <a:p/>
+        </p:txBody>
       </p:sp>
       <p:sp>
         <p:nvSpPr>
@@ -11644,6 +9927,656 @@
                 <a:cs typeface="IBM Plex Mono" pitchFamily="34" charset="-120"/>
               </a:rPr>
               <a:t>BACKUP</a:t>
+            </a:r>
+            <a:endParaRPr lang="en-US" sz="1425" dirty="0"/>
+          </a:p>
+        </p:txBody>
+      </p:sp>
+    </p:spTree>
+  </p:cSld>
+  <p:clrMapOvr>
+    <a:masterClrMapping/>
+  </p:clrMapOvr>
+</p:sld>
+</file>
+
+<file path=ppt/slides/slide19.xml><?xml version="1.0" encoding="utf-8"?>
+<p:sld xmlns:a="http://schemas.openxmlformats.org/drawingml/2006/main" xmlns:p="http://schemas.openxmlformats.org/presentationml/2006/main" xmlns:r="http://schemas.openxmlformats.org/officeDocument/2006/relationships">
+  <p:cSld>
+    <p:bg>
+      <p:bgPr>
+        <a:solidFill>
+          <a:srgbClr val="F7F5F1"/>
+        </a:solidFill>
+        <a:effectLst/>
+      </p:bgPr>
+    </p:bg>
+    <p:spTree>
+      <p:nvGrpSpPr>
+        <p:cNvPr id="1" name=""/>
+        <p:cNvGrpSpPr/>
+        <p:nvPr/>
+      </p:nvGrpSpPr>
+      <p:grpSpPr/>
+      <p:sp>
+        <p:nvSpPr>
+          <p:cNvPr id="1002" name="Text 0"/>
+          <p:cNvSpPr/>
+          <p:nvPr/>
+        </p:nvSpPr>
+        <p:spPr>
+          <a:xfrm>
+            <a:off x="952385" y="857146"/>
+            <a:ext cx="18021508" cy="316343"/>
+          </a:xfrm>
+          <a:prstGeom prst="rect">
+            <a:avLst/>
+          </a:prstGeom>
+          <a:noFill/>
+          <a:ln/>
+        </p:spPr>
+        <p:txBody>
+          <a:bodyPr wrap="square" lIns="25400" tIns="25400" rIns="25400" bIns="25400" rtlCol="0" anchor="t">
+            <a:normAutofit/>
+          </a:bodyPr>
+          <a:lstStyle/>
+          <a:p>
+            <a:pPr algn="l" indent="0" marL="0">
+              <a:buNone/>
+            </a:pPr>
+            <a:r>
+              <a:rPr lang="en-US" sz="1650" spc="264" kern="0" dirty="0">
+                <a:solidFill>
+                  <a:srgbClr val="33608F"/>
+                </a:solidFill>
+                <a:latin typeface="IBM Plex Mono" pitchFamily="34" charset="0"/>
+                <a:ea typeface="IBM Plex Mono" pitchFamily="34" charset="-122"/>
+                <a:cs typeface="IBM Plex Mono" pitchFamily="34" charset="-120"/>
+              </a:rPr>
+              <a:t>EASE-OF-USE &amp; SCALABILITY</a:t>
+            </a:r>
+            <a:endParaRPr lang="en-US" sz="1650" dirty="0"/>
+          </a:p>
+        </p:txBody>
+      </p:sp>
+      <p:sp>
+        <p:nvSpPr>
+          <p:cNvPr id="1003" name="Text 1"/>
+          <p:cNvSpPr/>
+          <p:nvPr/>
+        </p:nvSpPr>
+        <p:spPr>
+          <a:xfrm>
+            <a:off x="952385" y="1306710"/>
+            <a:ext cx="18021508" cy="655316"/>
+          </a:xfrm>
+          <a:prstGeom prst="rect">
+            <a:avLst/>
+          </a:prstGeom>
+          <a:noFill/>
+          <a:ln/>
+        </p:spPr>
+        <p:txBody>
+          <a:bodyPr wrap="square" lIns="25400" tIns="25400" rIns="25400" bIns="25400" rtlCol="0" anchor="t">
+            <a:normAutofit/>
+          </a:bodyPr>
+          <a:lstStyle/>
+          <a:p>
+            <a:pPr algn="l" indent="0" marL="0">
+              <a:lnSpc>
+                <a:spcPct val="108000"/>
+              </a:lnSpc>
+              <a:buNone/>
+            </a:pPr>
+            <a:r>
+              <a:rPr lang="en-US" sz="4500" b="1" spc="-67" kern="0" dirty="0">
+                <a:solidFill>
+                  <a:srgbClr val="1A2430"/>
+                </a:solidFill>
+                <a:latin typeface="Space Grotesk" pitchFamily="34" charset="0"/>
+                <a:ea typeface="Space Grotesk" pitchFamily="34" charset="-122"/>
+                <a:cs typeface="Space Grotesk" pitchFamily="34" charset="-120"/>
+              </a:rPr>
+              <a:t>Two more dimensions: ease of use and scalability</a:t>
+            </a:r>
+            <a:endParaRPr lang="en-US" sz="4500" dirty="0"/>
+          </a:p>
+        </p:txBody>
+      </p:sp>
+      <p:sp>
+        <p:nvSpPr>
+          <p:cNvPr id="1004" name="Shape 2"/>
+          <p:cNvSpPr/>
+          <p:nvPr/>
+        </p:nvSpPr>
+        <p:spPr>
+          <a:xfrm>
+            <a:off x="950976" y="2587752"/>
+            <a:ext cx="7406640" cy="5440680"/>
+          </a:xfrm>
+          <a:prstGeom prst="rect">
+            <a:avLst/>
+          </a:prstGeom>
+          <a:solidFill>
+            <a:srgbClr val="FFFFFF"/>
+          </a:solidFill>
+          <a:ln w="8695">
+            <a:solidFill>
+              <a:srgbClr val="E4DFD6"/>
+            </a:solidFill>
+            <a:prstDash val="solid"/>
+          </a:ln>
+        </p:spPr>
+        <p:txBody>
+          <a:bodyPr/>
+          <a:p/>
+        </p:txBody>
+      </p:sp>
+      <p:sp>
+        <p:nvSpPr>
+          <p:cNvPr id="1005" name="Text 3"/>
+          <p:cNvSpPr/>
+          <p:nvPr/>
+        </p:nvSpPr>
+        <p:spPr>
+          <a:xfrm>
+            <a:off x="1399032" y="3017520"/>
+            <a:ext cx="4572000" cy="758952"/>
+          </a:xfrm>
+          <a:prstGeom prst="rect">
+            <a:avLst/>
+          </a:prstGeom>
+          <a:noFill/>
+          <a:ln/>
+        </p:spPr>
+        <p:txBody>
+          <a:bodyPr wrap="square" lIns="25400" tIns="25400" rIns="25400" bIns="25400" rtlCol="0" anchor="t">
+            <a:normAutofit/>
+          </a:bodyPr>
+          <a:lstStyle/>
+          <a:p>
+            <a:pPr algn="l" indent="0" marL="0">
+              <a:lnSpc>
+                <a:spcPct val="100000"/>
+              </a:lnSpc>
+              <a:buNone/>
+            </a:pPr>
+            <a:r>
+              <a:rPr lang="en-US" sz="5700" b="1" dirty="0">
+                <a:solidFill>
+                  <a:srgbClr val="33608F"/>
+                </a:solidFill>
+                <a:latin typeface="Space Grotesk" pitchFamily="34" charset="0"/>
+                <a:ea typeface="Space Grotesk" pitchFamily="34" charset="-122"/>
+                <a:cs typeface="Space Grotesk" pitchFamily="34" charset="-120"/>
+              </a:rPr>
+              <a:t>5,632</a:t>
+            </a:r>
+            <a:endParaRPr lang="en-US" sz="5700" dirty="0"/>
+          </a:p>
+        </p:txBody>
+      </p:sp>
+      <p:sp>
+        <p:nvSpPr>
+          <p:cNvPr id="1006" name="Text 4"/>
+          <p:cNvSpPr/>
+          <p:nvPr/>
+        </p:nvSpPr>
+        <p:spPr>
+          <a:xfrm>
+            <a:off x="1399032" y="3931920"/>
+            <a:ext cx="6583680" cy="457200"/>
+          </a:xfrm>
+          <a:prstGeom prst="rect">
+            <a:avLst/>
+          </a:prstGeom>
+          <a:noFill/>
+          <a:ln/>
+        </p:spPr>
+        <p:txBody>
+          <a:bodyPr wrap="square" lIns="25400" tIns="25400" rIns="25400" bIns="25400" rtlCol="0" anchor="t">
+            <a:normAutofit/>
+          </a:bodyPr>
+          <a:lstStyle/>
+          <a:p>
+            <a:pPr algn="l" indent="0" marL="0">
+              <a:lnSpc>
+                <a:spcPct val="125000"/>
+              </a:lnSpc>
+              <a:buNone/>
+            </a:pPr>
+            <a:r>
+              <a:rPr lang="en-US" sz="2325" b="1" dirty="0">
+                <a:solidFill>
+                  <a:srgbClr val="1A2430"/>
+                </a:solidFill>
+                <a:latin typeface="Space Grotesk" pitchFamily="34" charset="0"/>
+                <a:ea typeface="Space Grotesk" pitchFamily="34" charset="-122"/>
+                <a:cs typeface="Space Grotesk" pitchFamily="34" charset="-120"/>
+              </a:rPr>
+              <a:t>Schema-first found our bugs</a:t>
+            </a:r>
+            <a:endParaRPr lang="en-US" sz="2325" dirty="0"/>
+          </a:p>
+        </p:txBody>
+      </p:sp>
+      <p:sp>
+        <p:nvSpPr>
+          <p:cNvPr id="1007" name="Text 5"/>
+          <p:cNvSpPr/>
+          <p:nvPr/>
+        </p:nvSpPr>
+        <p:spPr>
+          <a:xfrm>
+            <a:off x="1399032" y="4526280"/>
+            <a:ext cx="6629400" cy="3291840"/>
+          </a:xfrm>
+          <a:prstGeom prst="rect">
+            <a:avLst/>
+          </a:prstGeom>
+          <a:noFill/>
+          <a:ln/>
+        </p:spPr>
+        <p:txBody>
+          <a:bodyPr wrap="square" lIns="25400" tIns="25400" rIns="25400" bIns="25400" rtlCol="0" anchor="t">
+            <a:normAutofit/>
+          </a:bodyPr>
+          <a:lstStyle/>
+          <a:p>
+            <a:pPr algn="l" indent="0" marL="0">
+              <a:lnSpc>
+                <a:spcPct val="145000"/>
+              </a:lnSpc>
+              <a:spcAft>
+                <a:spcPts val="600"/>
+              </a:spcAft>
+              <a:buNone/>
+            </a:pPr>
+            <a:r>
+              <a:rPr lang="en-US" sz="1700" dirty="0">
+                <a:solidFill>
+                  <a:srgbClr val="6B655C"/>
+                </a:solidFill>
+                <a:latin typeface="Space Grotesk" pitchFamily="34" charset="0"/>
+                <a:ea typeface="Space Grotesk" pitchFamily="34" charset="-122"/>
+                <a:cs typeface="Space Grotesk" pitchFamily="34" charset="-120"/>
+              </a:rPr>
+              <a:t>· Postgres' FK check rejected 5,632 orphan player references — Neo4j would have loaded them silently.</a:t>
+            </a:r>
+            <a:endParaRPr lang="en-US" sz="1800" dirty="0"/>
+          </a:p>
+          <a:p>
+            <a:pPr algn="l" indent="0" marL="0">
+              <a:lnSpc>
+                <a:spcPct val="145000"/>
+              </a:lnSpc>
+              <a:spcAft>
+                <a:spcPts val="600"/>
+              </a:spcAft>
+              <a:buNone/>
+            </a:pPr>
+            <a:r>
+              <a:rPr lang="en-US" sz="1700" dirty="0">
+                <a:solidFill>
+                  <a:srgbClr val="6B655C"/>
+                </a:solidFill>
+                <a:latin typeface="Space Grotesk" pitchFamily="34" charset="0"/>
+                <a:ea typeface="Space Grotesk" pitchFamily="34" charset="-122"/>
+                <a:cs typeface="Space Grotesk" pitchFamily="34" charset="-120"/>
+              </a:rPr>
+              <a:t>· Running both systems side by side caught three more silent bugs: NULL semantics (Q05), path semantics (Q10), name-based grouping (Q07).</a:t>
+            </a:r>
+            <a:endParaRPr lang="en-US" sz="1800" dirty="0"/>
+          </a:p>
+          <a:p>
+            <a:pPr algn="l" indent="0" marL="0">
+              <a:lnSpc>
+                <a:spcPct val="145000"/>
+              </a:lnSpc>
+              <a:spcAft>
+                <a:spcPts val="600"/>
+              </a:spcAft>
+              <a:buNone/>
+            </a:pPr>
+            <a:r>
+              <a:rPr lang="en-US" sz="1700" dirty="0">
+                <a:solidFill>
+                  <a:srgbClr val="6B655C"/>
+                </a:solidFill>
+                <a:latin typeface="Space Grotesk" pitchFamily="34" charset="0"/>
+                <a:ea typeface="Space Grotesk" pitchFamily="34" charset="-122"/>
+                <a:cs typeface="Space Grotesk" pitchFamily="34" charset="-120"/>
+              </a:rPr>
+              <a:t>· Cypher is 4× shorter on graph queries; SQL's explicit schema is the documentation.</a:t>
+            </a:r>
+            <a:endParaRPr lang="en-US" sz="1800" dirty="0"/>
+          </a:p>
+        </p:txBody>
+      </p:sp>
+      <p:sp>
+        <p:nvSpPr>
+          <p:cNvPr id="1008" name="Shape 6"/>
+          <p:cNvSpPr/>
+          <p:nvPr/>
+        </p:nvSpPr>
+        <p:spPr>
+          <a:xfrm>
+            <a:off x="8631936" y="2587752"/>
+            <a:ext cx="8705088" cy="5440680"/>
+          </a:xfrm>
+          <a:prstGeom prst="rect">
+            <a:avLst/>
+          </a:prstGeom>
+          <a:solidFill>
+            <a:srgbClr val="FFFFFF"/>
+          </a:solidFill>
+          <a:ln w="8695">
+            <a:solidFill>
+              <a:srgbClr val="E4DFD6"/>
+            </a:solidFill>
+            <a:prstDash val="solid"/>
+          </a:ln>
+        </p:spPr>
+        <p:txBody>
+          <a:bodyPr/>
+          <a:p/>
+        </p:txBody>
+      </p:sp>
+      <p:sp>
+        <p:nvSpPr>
+          <p:cNvPr id="1009" name="Text 7"/>
+          <p:cNvSpPr/>
+          <p:nvPr/>
+        </p:nvSpPr>
+        <p:spPr>
+          <a:xfrm>
+            <a:off x="9079992" y="3017520"/>
+            <a:ext cx="4572000" cy="758952"/>
+          </a:xfrm>
+          <a:prstGeom prst="rect">
+            <a:avLst/>
+          </a:prstGeom>
+          <a:noFill/>
+          <a:ln/>
+        </p:spPr>
+        <p:txBody>
+          <a:bodyPr wrap="square" lIns="25400" tIns="25400" rIns="25400" bIns="25400" rtlCol="0" anchor="t">
+            <a:normAutofit/>
+          </a:bodyPr>
+          <a:lstStyle/>
+          <a:p>
+            <a:pPr algn="l" indent="0" marL="0">
+              <a:lnSpc>
+                <a:spcPct val="100000"/>
+              </a:lnSpc>
+              <a:buNone/>
+            </a:pPr>
+            <a:r>
+              <a:rPr lang="en-US" sz="5700" b="1" dirty="0">
+                <a:solidFill>
+                  <a:srgbClr val="1E7A52"/>
+                </a:solidFill>
+                <a:latin typeface="Space Grotesk" pitchFamily="34" charset="0"/>
+                <a:ea typeface="Space Grotesk" pitchFamily="34" charset="-122"/>
+                <a:cs typeface="Space Grotesk" pitchFamily="34" charset="-120"/>
+              </a:rPr>
+              <a:t>3.3×</a:t>
+            </a:r>
+            <a:endParaRPr lang="en-US" sz="5700" dirty="0"/>
+          </a:p>
+        </p:txBody>
+      </p:sp>
+      <p:sp>
+        <p:nvSpPr>
+          <p:cNvPr id="1010" name="Text 8"/>
+          <p:cNvSpPr/>
+          <p:nvPr/>
+        </p:nvSpPr>
+        <p:spPr>
+          <a:xfrm>
+            <a:off x="9079992" y="3931920"/>
+            <a:ext cx="7863840" cy="457200"/>
+          </a:xfrm>
+          <a:prstGeom prst="rect">
+            <a:avLst/>
+          </a:prstGeom>
+          <a:noFill/>
+          <a:ln/>
+        </p:spPr>
+        <p:txBody>
+          <a:bodyPr wrap="square" lIns="25400" tIns="25400" rIns="25400" bIns="25400" rtlCol="0" anchor="t">
+            <a:normAutofit/>
+          </a:bodyPr>
+          <a:lstStyle/>
+          <a:p>
+            <a:pPr algn="l" indent="0" marL="0">
+              <a:lnSpc>
+                <a:spcPct val="125000"/>
+              </a:lnSpc>
+              <a:buNone/>
+            </a:pPr>
+            <a:r>
+              <a:rPr lang="en-US" sz="2325" b="1" dirty="0">
+                <a:solidFill>
+                  <a:srgbClr val="1A2430"/>
+                </a:solidFill>
+                <a:latin typeface="Space Grotesk" pitchFamily="34" charset="0"/>
+                <a:ea typeface="Space Grotesk" pitchFamily="34" charset="-122"/>
+                <a:cs typeface="Space Grotesk" pitchFamily="34" charset="-120"/>
+              </a:rPr>
+              <a:t>Measured on 2, 4 and 8 seasons: the graph edge widens</a:t>
+            </a:r>
+            <a:endParaRPr lang="en-US" sz="2325" dirty="0"/>
+          </a:p>
+        </p:txBody>
+      </p:sp>
+      <p:pic>
+        <p:nvPicPr>
+          <p:cNvPr id="1011" name="Picture 1010" descr="scale.png"/>
+          <p:cNvPicPr>
+            <a:picLocks noChangeAspect="1"/>
+          </p:cNvPicPr>
+          <p:nvPr/>
+        </p:nvPicPr>
+        <p:blipFill>
+          <a:blip r:embed="rId2"/>
+          <a:stretch>
+            <a:fillRect/>
+          </a:stretch>
+        </p:blipFill>
+        <p:spPr>
+          <a:xfrm>
+            <a:off x="8915400" y="4343400"/>
+            <a:ext cx="8229600" cy="3657600"/>
+          </a:xfrm>
+          <a:prstGeom prst="rect">
+            <a:avLst/>
+          </a:prstGeom>
+        </p:spPr>
+      </p:pic>
+      <p:sp>
+        <p:nvSpPr>
+          <p:cNvPr id="1011" name="Shape 14"/>
+          <p:cNvSpPr/>
+          <p:nvPr/>
+        </p:nvSpPr>
+        <p:spPr>
+          <a:xfrm>
+            <a:off x="952385" y="8275320"/>
+            <a:ext cx="16383190" cy="777240"/>
+          </a:xfrm>
+          <a:prstGeom prst="rect">
+            <a:avLst/>
+          </a:prstGeom>
+          <a:solidFill>
+            <a:srgbClr val="EDE9E1"/>
+          </a:solidFill>
+          <a:ln/>
+        </p:spPr>
+        <p:txBody>
+          <a:bodyPr/>
+          <a:p/>
+        </p:txBody>
+      </p:sp>
+      <p:sp>
+        <p:nvSpPr>
+          <p:cNvPr id="1012" name="Text 15"/>
+          <p:cNvSpPr/>
+          <p:nvPr/>
+        </p:nvSpPr>
+        <p:spPr>
+          <a:xfrm>
+            <a:off x="1371380" y="8531352"/>
+            <a:ext cx="916228" cy="298953"/>
+          </a:xfrm>
+          <a:prstGeom prst="rect">
+            <a:avLst/>
+          </a:prstGeom>
+          <a:noFill/>
+          <a:ln/>
+        </p:spPr>
+        <p:txBody>
+          <a:bodyPr wrap="square" lIns="25400" tIns="25400" rIns="25400" bIns="25400" rtlCol="0" anchor="t">
+            <a:normAutofit/>
+          </a:bodyPr>
+          <a:lstStyle/>
+          <a:p>
+            <a:pPr algn="l" indent="0" marL="0">
+              <a:buNone/>
+            </a:pPr>
+            <a:r>
+              <a:rPr lang="en-US" sz="1575" dirty="0">
+                <a:solidFill>
+                  <a:srgbClr val="B0483A"/>
+                </a:solidFill>
+                <a:latin typeface="IBM Plex Mono" pitchFamily="34" charset="0"/>
+                <a:ea typeface="IBM Plex Mono" pitchFamily="34" charset="-122"/>
+                <a:cs typeface="IBM Plex Mono" pitchFamily="34" charset="-120"/>
+              </a:rPr>
+              <a:t>CAVEATS</a:t>
+            </a:r>
+            <a:endParaRPr lang="en-US" sz="1575" dirty="0"/>
+          </a:p>
+        </p:txBody>
+      </p:sp>
+      <p:sp>
+        <p:nvSpPr>
+          <p:cNvPr id="1013" name="Text 16"/>
+          <p:cNvSpPr/>
+          <p:nvPr/>
+        </p:nvSpPr>
+        <p:spPr>
+          <a:xfrm>
+            <a:off x="2401884" y="8513064"/>
+            <a:ext cx="14630400" cy="342429"/>
+          </a:xfrm>
+          <a:prstGeom prst="rect">
+            <a:avLst/>
+          </a:prstGeom>
+          <a:noFill/>
+          <a:ln/>
+        </p:spPr>
+        <p:txBody>
+          <a:bodyPr wrap="square" lIns="0" tIns="0" rIns="0" bIns="0" rtlCol="0" anchor="t">
+            <a:normAutofit/>
+          </a:bodyPr>
+          <a:lstStyle/>
+          <a:p>
+            <a:pPr algn="l" indent="0" marL="0">
+              <a:buNone/>
+            </a:pPr>
+            <a:r>
+              <a:rPr lang="en-US" sz="1875" dirty="0">
+                <a:solidFill>
+                  <a:srgbClr val="3D4652"/>
+                </a:solidFill>
+                <a:latin typeface="Space Grotesk" pitchFamily="34" charset="0"/>
+                <a:ea typeface="Space Grotesk" pitchFamily="34" charset="-122"/>
+                <a:cs typeface="Space Grotesk" pitchFamily="34" charset="-120"/>
+              </a:rPr>
+              <a:t>Index-free adjacency does not partition for free: single-node result. 10 runs per cell, medians; Q09 keeps Postgres' lead at every size.</a:t>
+            </a:r>
+            <a:endParaRPr lang="en-US" sz="1875" dirty="0"/>
+          </a:p>
+        </p:txBody>
+      </p:sp>
+      <p:sp>
+        <p:nvSpPr>
+          <p:cNvPr id="1014" name="Text 17"/>
+          <p:cNvSpPr/>
+          <p:nvPr/>
+        </p:nvSpPr>
+        <p:spPr>
+          <a:xfrm>
+            <a:off x="952385" y="9633214"/>
+            <a:ext cx="6329527" cy="272868"/>
+          </a:xfrm>
+          <a:prstGeom prst="rect">
+            <a:avLst/>
+          </a:prstGeom>
+          <a:noFill/>
+          <a:ln/>
+        </p:spPr>
+        <p:txBody>
+          <a:bodyPr wrap="square" lIns="25400" tIns="25400" rIns="25400" bIns="25400" rtlCol="0" anchor="t">
+            <a:normAutofit/>
+          </a:bodyPr>
+          <a:lstStyle/>
+          <a:p>
+            <a:pPr algn="l" indent="0" marL="0">
+              <a:buNone/>
+            </a:pPr>
+            <a:r>
+              <a:rPr lang="en-US" sz="1425" dirty="0">
+                <a:solidFill>
+                  <a:srgbClr val="9A938A"/>
+                </a:solidFill>
+                <a:latin typeface="IBM Plex Mono" pitchFamily="34" charset="0"/>
+                <a:ea typeface="IBM Plex Mono" pitchFamily="34" charset="-122"/>
+                <a:cs typeface="IBM Plex Mono" pitchFamily="34" charset="-120"/>
+              </a:rPr>
+              <a:t>DM 2025/26 · D'Angelica &amp; Leone · PostgreSQL vs Neo4j</a:t>
+            </a:r>
+            <a:endParaRPr lang="en-US" sz="1425" dirty="0"/>
+          </a:p>
+        </p:txBody>
+      </p:sp>
+      <p:sp>
+        <p:nvSpPr>
+          <p:cNvPr id="1015" name="Text 18"/>
+          <p:cNvSpPr/>
+          <p:nvPr/>
+        </p:nvSpPr>
+        <p:spPr>
+          <a:xfrm>
+            <a:off x="16575568" y="9633214"/>
+            <a:ext cx="836206" cy="272868"/>
+          </a:xfrm>
+          <a:prstGeom prst="rect">
+            <a:avLst/>
+          </a:prstGeom>
+          <a:noFill/>
+          <a:ln/>
+        </p:spPr>
+        <p:txBody>
+          <a:bodyPr wrap="square" lIns="25400" tIns="25400" rIns="25400" bIns="25400" rtlCol="0" anchor="t">
+            <a:normAutofit/>
+          </a:bodyPr>
+          <a:lstStyle/>
+          <a:p>
+            <a:pPr algn="l" indent="0" marL="0">
+              <a:buNone/>
+            </a:pPr>
+            <a:r>
+              <a:rPr lang="en-US" sz="1425" dirty="0">
+                <a:solidFill>
+                  <a:srgbClr val="9A938A"/>
+                </a:solidFill>
+                <a:latin typeface="IBM Plex Mono" pitchFamily="34" charset="0"/>
+                <a:ea typeface="IBM Plex Mono" pitchFamily="34" charset="-122"/>
+                <a:cs typeface="IBM Plex Mono" pitchFamily="34" charset="-120"/>
+              </a:rPr>
+              <a:t>15 / 16</a:t>
             </a:r>
             <a:endParaRPr lang="en-US" sz="1425" dirty="0"/>
           </a:p>
@@ -11752,7 +10685,7 @@
               <a:buNone/>
             </a:pPr>
             <a:r>
-              <a:rPr lang="en-US" sz="4650" b="1" spc="-70" kern="0" dirty="0">
+              <a:rPr lang="en-US" sz="4350" b="1" spc="-70" kern="0" dirty="0">
                 <a:solidFill>
                   <a:srgbClr val="1A2430"/>
                 </a:solidFill>
@@ -11760,7 +10693,7 @@
                 <a:ea typeface="Space Grotesk" pitchFamily="34" charset="-122"/>
                 <a:cs typeface="Space Grotesk" pitchFamily="34" charset="-120"/>
               </a:rPr>
-              <a:t>No absolute winner: Neo4j dominates variable-depth traversals — 57× on shortest path — while light aggregations are a dead heat and Postgres keeps the fixed-depth join</a:t>
+              <a:t>No absolute winner: Neo4j dominates variable-depth traversals (57×), Postgres keeps the fixed-depth join</a:t>
             </a:r>
             <a:endParaRPr lang="en-US" sz="4650" dirty="0"/>
           </a:p>
@@ -11790,6 +10723,10 @@
             <a:prstDash val="solid"/>
           </a:ln>
         </p:spPr>
+        <p:txBody>
+          <a:bodyPr/>
+          <a:p/>
+        </p:txBody>
       </p:sp>
       <p:sp>
         <p:nvSpPr>
@@ -11944,6 +10881,10 @@
             <a:prstDash val="solid"/>
           </a:ln>
         </p:spPr>
+        <p:txBody>
+          <a:bodyPr/>
+          <a:p/>
+        </p:txBody>
       </p:sp>
       <p:sp>
         <p:nvSpPr>
@@ -12068,7 +11009,7 @@
                 <a:ea typeface="Space Grotesk" pitchFamily="34" charset="-122"/>
                 <a:cs typeface="Space Grotesk" pitchFamily="34" charset="-120"/>
               </a:rPr>
-              <a:t>With the same precomputation, B-tree joins beat the traversal — and the lead widens as data grows. The four light aggregations (&lt; 15 ms) are a dead heat.</a:t>
+              <a:t>With the same precomputation, B-tree joins beat the traversal 2.1× — and the lead widens as data grows.</a:t>
             </a:r>
             <a:endParaRPr lang="en-US" sz="1800" dirty="0"/>
           </a:p>
@@ -12098,6 +11039,10 @@
             <a:prstDash val="solid"/>
           </a:ln>
         </p:spPr>
+        <p:txBody>
+          <a:bodyPr/>
+          <a:p/>
+        </p:txBody>
       </p:sp>
       <p:sp>
         <p:nvSpPr>
@@ -12304,7 +11249,1883 @@
                 <a:ea typeface="IBM Plex Mono" pitchFamily="34" charset="-122"/>
                 <a:cs typeface="IBM Plex Mono" pitchFamily="34" charset="-120"/>
               </a:rPr>
-              <a:t>02 / 15</a:t>
+              <a:t>02 / 16</a:t>
+            </a:r>
+            <a:endParaRPr lang="en-US" sz="1425" dirty="0"/>
+          </a:p>
+        </p:txBody>
+      </p:sp>
+    </p:spTree>
+  </p:cSld>
+  <p:clrMapOvr>
+    <a:masterClrMapping/>
+  </p:clrMapOvr>
+</p:sld>
+</file>
+
+<file path=ppt/slides/slide20.xml><?xml version="1.0" encoding="utf-8"?>
+<p:sld xmlns:a="http://schemas.openxmlformats.org/drawingml/2006/main" xmlns:p="http://schemas.openxmlformats.org/presentationml/2006/main" xmlns:r="http://schemas.openxmlformats.org/officeDocument/2006/relationships">
+  <p:cSld>
+    <p:bg>
+      <p:bgPr>
+        <a:solidFill>
+          <a:srgbClr val="EDE9E1"/>
+        </a:solidFill>
+        <a:effectLst/>
+      </p:bgPr>
+    </p:bg>
+    <p:spTree>
+      <p:nvGrpSpPr>
+        <p:cNvPr id="1" name=""/>
+        <p:cNvGrpSpPr/>
+        <p:nvPr/>
+      </p:nvGrpSpPr>
+      <p:grpSpPr/>
+      <p:sp>
+        <p:nvSpPr>
+          <p:cNvPr id="1016" name="Text 0"/>
+          <p:cNvSpPr/>
+          <p:nvPr/>
+        </p:nvSpPr>
+        <p:spPr>
+          <a:xfrm>
+            <a:off x="952385" y="857146"/>
+            <a:ext cx="18021508" cy="316343"/>
+          </a:xfrm>
+          <a:prstGeom prst="rect">
+            <a:avLst/>
+          </a:prstGeom>
+          <a:noFill/>
+          <a:ln/>
+        </p:spPr>
+        <p:txBody>
+          <a:bodyPr wrap="square" lIns="25400" tIns="25400" rIns="25400" bIns="25400" rtlCol="0" anchor="t">
+            <a:normAutofit/>
+          </a:bodyPr>
+          <a:lstStyle/>
+          <a:p>
+            <a:pPr algn="l" indent="0" marL="0">
+              <a:buNone/>
+            </a:pPr>
+            <a:r>
+              <a:rPr lang="en-US" sz="1650" spc="264" kern="0" dirty="0">
+                <a:solidFill>
+                  <a:srgbClr val="B0483A"/>
+                </a:solidFill>
+                <a:latin typeface="IBM Plex Mono" pitchFamily="34" charset="0"/>
+                <a:ea typeface="IBM Plex Mono" pitchFamily="34" charset="-122"/>
+                <a:cs typeface="IBM Plex Mono" pitchFamily="34" charset="-120"/>
+              </a:rPr>
+              <a:t>BACKUP — THE 12 QUERIES IN PLAIN WORDS</a:t>
+            </a:r>
+            <a:endParaRPr lang="en-US" sz="1650" dirty="0"/>
+          </a:p>
+        </p:txBody>
+      </p:sp>
+      <p:sp>
+        <p:nvSpPr>
+          <p:cNvPr id="1017" name="Text 1"/>
+          <p:cNvSpPr/>
+          <p:nvPr/>
+        </p:nvSpPr>
+        <p:spPr>
+          <a:xfrm>
+            <a:off x="952385" y="1306710"/>
+            <a:ext cx="18021508" cy="634665"/>
+          </a:xfrm>
+          <a:prstGeom prst="rect">
+            <a:avLst/>
+          </a:prstGeom>
+          <a:noFill/>
+          <a:ln/>
+        </p:spPr>
+        <p:txBody>
+          <a:bodyPr wrap="square" lIns="25400" tIns="25400" rIns="25400" bIns="25400" rtlCol="0" anchor="t">
+            <a:normAutofit/>
+          </a:bodyPr>
+          <a:lstStyle/>
+          <a:p>
+            <a:pPr algn="l" indent="0" marL="0">
+              <a:lnSpc>
+                <a:spcPct val="108000"/>
+              </a:lnSpc>
+              <a:buNone/>
+            </a:pPr>
+            <a:r>
+              <a:rPr lang="en-US" sz="4350" b="1" spc="-65" kern="0" dirty="0">
+                <a:solidFill>
+                  <a:srgbClr val="1A2430"/>
+                </a:solidFill>
+                <a:latin typeface="Space Grotesk" pitchFamily="34" charset="0"/>
+                <a:ea typeface="Space Grotesk" pitchFamily="34" charset="-122"/>
+                <a:cs typeface="Space Grotesk" pitchFamily="34" charset="-120"/>
+              </a:rPr>
+              <a:t>What each query asks — and what it tests</a:t>
+            </a:r>
+            <a:endParaRPr lang="en-US" sz="4350" dirty="0"/>
+          </a:p>
+        </p:txBody>
+      </p:sp>
+      <p:sp>
+        <p:nvSpPr>
+          <p:cNvPr id="1018" name="Shape 2"/>
+          <p:cNvSpPr/>
+          <p:nvPr/>
+        </p:nvSpPr>
+        <p:spPr>
+          <a:xfrm>
+            <a:off x="950976" y="2569464"/>
+            <a:ext cx="8083296" cy="6446520"/>
+          </a:xfrm>
+          <a:prstGeom prst="rect">
+            <a:avLst/>
+          </a:prstGeom>
+          <a:solidFill>
+            <a:srgbClr val="FFFFFF"/>
+          </a:solidFill>
+          <a:ln w="8695">
+            <a:solidFill>
+              <a:srgbClr val="DDD6CA"/>
+            </a:solidFill>
+            <a:prstDash val="solid"/>
+          </a:ln>
+        </p:spPr>
+        <p:txBody>
+          <a:bodyPr/>
+          <a:p/>
+        </p:txBody>
+      </p:sp>
+      <p:sp>
+        <p:nvSpPr>
+          <p:cNvPr id="1019" name="Text 3"/>
+          <p:cNvSpPr/>
+          <p:nvPr/>
+        </p:nvSpPr>
+        <p:spPr>
+          <a:xfrm>
+            <a:off x="1316736" y="2852928"/>
+            <a:ext cx="1005840" cy="320040"/>
+          </a:xfrm>
+          <a:prstGeom prst="rect">
+            <a:avLst/>
+          </a:prstGeom>
+          <a:noFill/>
+          <a:ln/>
+        </p:spPr>
+        <p:txBody>
+          <a:bodyPr wrap="square" lIns="25400" tIns="25400" rIns="25400" bIns="25400" rtlCol="0" anchor="t">
+            <a:normAutofit/>
+          </a:bodyPr>
+          <a:lstStyle/>
+          <a:p>
+            <a:pPr algn="l" indent="0" marL="0">
+              <a:buNone/>
+            </a:pPr>
+            <a:r>
+              <a:rPr lang="en-US" sz="1700" b="1" dirty="0">
+                <a:solidFill>
+                  <a:srgbClr val="1A2430"/>
+                </a:solidFill>
+                <a:latin typeface="IBM Plex Mono" pitchFamily="34" charset="0"/>
+                <a:ea typeface="IBM Plex Mono" pitchFamily="34" charset="-122"/>
+                <a:cs typeface="IBM Plex Mono" pitchFamily="34" charset="-120"/>
+              </a:rPr>
+              <a:t>Q01</a:t>
+            </a:r>
+            <a:endParaRPr lang="en-US" sz="1650" dirty="0"/>
+          </a:p>
+        </p:txBody>
+      </p:sp>
+      <p:sp>
+        <p:nvSpPr>
+          <p:cNvPr id="1020" name="Text 3"/>
+          <p:cNvSpPr/>
+          <p:nvPr/>
+        </p:nvSpPr>
+        <p:spPr>
+          <a:xfrm>
+            <a:off x="1316736" y="3218688"/>
+            <a:ext cx="1005840" cy="274320"/>
+          </a:xfrm>
+          <a:prstGeom prst="rect">
+            <a:avLst/>
+          </a:prstGeom>
+          <a:noFill/>
+          <a:ln/>
+        </p:spPr>
+        <p:txBody>
+          <a:bodyPr wrap="square" lIns="25400" tIns="25400" rIns="25400" bIns="25400" rtlCol="0" anchor="t">
+            <a:normAutofit/>
+          </a:bodyPr>
+          <a:lstStyle/>
+          <a:p>
+            <a:pPr algn="l" indent="0" marL="0">
+              <a:buNone/>
+            </a:pPr>
+            <a:r>
+              <a:rPr lang="en-US" sz="1200" b="0" dirty="0">
+                <a:solidFill>
+                  <a:srgbClr val="33608F"/>
+                </a:solidFill>
+                <a:latin typeface="IBM Plex Mono" pitchFamily="34" charset="0"/>
+                <a:ea typeface="IBM Plex Mono" pitchFamily="34" charset="-122"/>
+                <a:cs typeface="IBM Plex Mono" pitchFamily="34" charset="-120"/>
+              </a:rPr>
+              <a:t>cat. A</a:t>
+            </a:r>
+            <a:endParaRPr lang="en-US" sz="1650" dirty="0"/>
+          </a:p>
+        </p:txBody>
+      </p:sp>
+      <p:sp>
+        <p:nvSpPr>
+          <p:cNvPr id="1021" name="Text 4"/>
+          <p:cNvSpPr/>
+          <p:nvPr/>
+        </p:nvSpPr>
+        <p:spPr>
+          <a:xfrm>
+            <a:off x="2368296" y="2825496"/>
+            <a:ext cx="6355080" cy="868680"/>
+          </a:xfrm>
+          <a:prstGeom prst="rect">
+            <a:avLst/>
+          </a:prstGeom>
+          <a:noFill/>
+          <a:ln/>
+        </p:spPr>
+        <p:txBody>
+          <a:bodyPr wrap="square" lIns="25400" tIns="25400" rIns="25400" bIns="25400" rtlCol="0" anchor="t">
+            <a:normAutofit/>
+          </a:bodyPr>
+          <a:lstStyle/>
+          <a:p>
+            <a:pPr algn="l" indent="0" marL="0">
+              <a:lnSpc>
+                <a:spcPct val="140000"/>
+              </a:lnSpc>
+              <a:buNone/>
+            </a:pPr>
+            <a:r>
+              <a:rPr lang="en-US" sz="1600" b="0" dirty="0">
+                <a:solidFill>
+                  <a:srgbClr val="3D4652"/>
+                </a:solidFill>
+                <a:latin typeface="Space Grotesk" pitchFamily="34" charset="0"/>
+                <a:ea typeface="Space Grotesk" pitchFamily="34" charset="-122"/>
+                <a:cs typeface="Space Grotesk" pitchFamily="34" charset="-120"/>
+              </a:rPr>
+              <a:t>Top scorers by season — top-N goal scorers of one season. 3-table join + GROUP BY.</a:t>
+            </a:r>
+            <a:pPr algn="l" indent="0" marL="0">
+              <a:lnSpc>
+                <a:spcPct val="140000"/>
+              </a:lnSpc>
+              <a:buNone/>
+            </a:pPr>
+            <a:endParaRPr lang="en-US" sz="1800" dirty="0"/>
+          </a:p>
+        </p:txBody>
+      </p:sp>
+      <p:sp>
+        <p:nvSpPr>
+          <p:cNvPr id="1022" name="Text 3"/>
+          <p:cNvSpPr/>
+          <p:nvPr/>
+        </p:nvSpPr>
+        <p:spPr>
+          <a:xfrm>
+            <a:off x="1316736" y="3886200"/>
+            <a:ext cx="1005840" cy="320040"/>
+          </a:xfrm>
+          <a:prstGeom prst="rect">
+            <a:avLst/>
+          </a:prstGeom>
+          <a:noFill/>
+          <a:ln/>
+        </p:spPr>
+        <p:txBody>
+          <a:bodyPr wrap="square" lIns="25400" tIns="25400" rIns="25400" bIns="25400" rtlCol="0" anchor="t">
+            <a:normAutofit/>
+          </a:bodyPr>
+          <a:lstStyle/>
+          <a:p>
+            <a:pPr algn="l" indent="0" marL="0">
+              <a:buNone/>
+            </a:pPr>
+            <a:r>
+              <a:rPr lang="en-US" sz="1700" b="1" dirty="0">
+                <a:solidFill>
+                  <a:srgbClr val="1A2430"/>
+                </a:solidFill>
+                <a:latin typeface="IBM Plex Mono" pitchFamily="34" charset="0"/>
+                <a:ea typeface="IBM Plex Mono" pitchFamily="34" charset="-122"/>
+                <a:cs typeface="IBM Plex Mono" pitchFamily="34" charset="-120"/>
+              </a:rPr>
+              <a:t>Q02</a:t>
+            </a:r>
+            <a:endParaRPr lang="en-US" sz="1650" dirty="0"/>
+          </a:p>
+        </p:txBody>
+      </p:sp>
+      <p:sp>
+        <p:nvSpPr>
+          <p:cNvPr id="1023" name="Text 3"/>
+          <p:cNvSpPr/>
+          <p:nvPr/>
+        </p:nvSpPr>
+        <p:spPr>
+          <a:xfrm>
+            <a:off x="1316736" y="4251960"/>
+            <a:ext cx="1005840" cy="274320"/>
+          </a:xfrm>
+          <a:prstGeom prst="rect">
+            <a:avLst/>
+          </a:prstGeom>
+          <a:noFill/>
+          <a:ln/>
+        </p:spPr>
+        <p:txBody>
+          <a:bodyPr wrap="square" lIns="25400" tIns="25400" rIns="25400" bIns="25400" rtlCol="0" anchor="t">
+            <a:normAutofit/>
+          </a:bodyPr>
+          <a:lstStyle/>
+          <a:p>
+            <a:pPr algn="l" indent="0" marL="0">
+              <a:buNone/>
+            </a:pPr>
+            <a:r>
+              <a:rPr lang="en-US" sz="1200" b="0" dirty="0">
+                <a:solidFill>
+                  <a:srgbClr val="33608F"/>
+                </a:solidFill>
+                <a:latin typeface="IBM Plex Mono" pitchFamily="34" charset="0"/>
+                <a:ea typeface="IBM Plex Mono" pitchFamily="34" charset="-122"/>
+                <a:cs typeface="IBM Plex Mono" pitchFamily="34" charset="-120"/>
+              </a:rPr>
+              <a:t>cat. A</a:t>
+            </a:r>
+            <a:endParaRPr lang="en-US" sz="1650" dirty="0"/>
+          </a:p>
+        </p:txBody>
+      </p:sp>
+      <p:sp>
+        <p:nvSpPr>
+          <p:cNvPr id="1024" name="Text 4"/>
+          <p:cNvSpPr/>
+          <p:nvPr/>
+        </p:nvSpPr>
+        <p:spPr>
+          <a:xfrm>
+            <a:off x="2368296" y="3858768"/>
+            <a:ext cx="6355080" cy="868680"/>
+          </a:xfrm>
+          <a:prstGeom prst="rect">
+            <a:avLst/>
+          </a:prstGeom>
+          <a:noFill/>
+          <a:ln/>
+        </p:spPr>
+        <p:txBody>
+          <a:bodyPr wrap="square" lIns="25400" tIns="25400" rIns="25400" bIns="25400" rtlCol="0" anchor="t">
+            <a:normAutofit/>
+          </a:bodyPr>
+          <a:lstStyle/>
+          <a:p>
+            <a:pPr algn="l" indent="0" marL="0">
+              <a:lnSpc>
+                <a:spcPct val="140000"/>
+              </a:lnSpc>
+              <a:buNone/>
+            </a:pPr>
+            <a:r>
+              <a:rPr lang="en-US" sz="1600" b="0" dirty="0">
+                <a:solidFill>
+                  <a:srgbClr val="3D4652"/>
+                </a:solidFill>
+                <a:latin typeface="Space Grotesk" pitchFamily="34" charset="0"/>
+                <a:ea typeface="Space Grotesk" pitchFamily="34" charset="-122"/>
+                <a:cs typeface="Space Grotesk" pitchFamily="34" charset="-120"/>
+              </a:rPr>
+              <a:t>League standings — full table of one league-season: points, goal difference. UNION ALL + aggregation.</a:t>
+            </a:r>
+            <a:pPr algn="l" indent="0" marL="0">
+              <a:lnSpc>
+                <a:spcPct val="140000"/>
+              </a:lnSpc>
+              <a:buNone/>
+            </a:pPr>
+            <a:endParaRPr lang="en-US" sz="1800" dirty="0"/>
+          </a:p>
+        </p:txBody>
+      </p:sp>
+      <p:sp>
+        <p:nvSpPr>
+          <p:cNvPr id="1025" name="Text 3"/>
+          <p:cNvSpPr/>
+          <p:nvPr/>
+        </p:nvSpPr>
+        <p:spPr>
+          <a:xfrm>
+            <a:off x="1316736" y="4919472"/>
+            <a:ext cx="1005840" cy="320040"/>
+          </a:xfrm>
+          <a:prstGeom prst="rect">
+            <a:avLst/>
+          </a:prstGeom>
+          <a:noFill/>
+          <a:ln/>
+        </p:spPr>
+        <p:txBody>
+          <a:bodyPr wrap="square" lIns="25400" tIns="25400" rIns="25400" bIns="25400" rtlCol="0" anchor="t">
+            <a:normAutofit/>
+          </a:bodyPr>
+          <a:lstStyle/>
+          <a:p>
+            <a:pPr algn="l" indent="0" marL="0">
+              <a:buNone/>
+            </a:pPr>
+            <a:r>
+              <a:rPr lang="en-US" sz="1700" b="1" dirty="0">
+                <a:solidFill>
+                  <a:srgbClr val="1A2430"/>
+                </a:solidFill>
+                <a:latin typeface="IBM Plex Mono" pitchFamily="34" charset="0"/>
+                <a:ea typeface="IBM Plex Mono" pitchFamily="34" charset="-122"/>
+                <a:cs typeface="IBM Plex Mono" pitchFamily="34" charset="-120"/>
+              </a:rPr>
+              <a:t>Q03</a:t>
+            </a:r>
+            <a:endParaRPr lang="en-US" sz="1650" dirty="0"/>
+          </a:p>
+        </p:txBody>
+      </p:sp>
+      <p:sp>
+        <p:nvSpPr>
+          <p:cNvPr id="1026" name="Text 3"/>
+          <p:cNvSpPr/>
+          <p:nvPr/>
+        </p:nvSpPr>
+        <p:spPr>
+          <a:xfrm>
+            <a:off x="1316736" y="5285232"/>
+            <a:ext cx="1005840" cy="274320"/>
+          </a:xfrm>
+          <a:prstGeom prst="rect">
+            <a:avLst/>
+          </a:prstGeom>
+          <a:noFill/>
+          <a:ln/>
+        </p:spPr>
+        <p:txBody>
+          <a:bodyPr wrap="square" lIns="25400" tIns="25400" rIns="25400" bIns="25400" rtlCol="0" anchor="t">
+            <a:normAutofit/>
+          </a:bodyPr>
+          <a:lstStyle/>
+          <a:p>
+            <a:pPr algn="l" indent="0" marL="0">
+              <a:buNone/>
+            </a:pPr>
+            <a:r>
+              <a:rPr lang="en-US" sz="1200" b="0" dirty="0">
+                <a:solidFill>
+                  <a:srgbClr val="33608F"/>
+                </a:solidFill>
+                <a:latin typeface="IBM Plex Mono" pitchFamily="34" charset="0"/>
+                <a:ea typeface="IBM Plex Mono" pitchFamily="34" charset="-122"/>
+                <a:cs typeface="IBM Plex Mono" pitchFamily="34" charset="-120"/>
+              </a:rPr>
+              <a:t>cat. A</a:t>
+            </a:r>
+            <a:endParaRPr lang="en-US" sz="1650" dirty="0"/>
+          </a:p>
+        </p:txBody>
+      </p:sp>
+      <p:sp>
+        <p:nvSpPr>
+          <p:cNvPr id="1027" name="Text 4"/>
+          <p:cNvSpPr/>
+          <p:nvPr/>
+        </p:nvSpPr>
+        <p:spPr>
+          <a:xfrm>
+            <a:off x="2368296" y="4892040"/>
+            <a:ext cx="6355080" cy="868680"/>
+          </a:xfrm>
+          <a:prstGeom prst="rect">
+            <a:avLst/>
+          </a:prstGeom>
+          <a:noFill/>
+          <a:ln/>
+        </p:spPr>
+        <p:txBody>
+          <a:bodyPr wrap="square" lIns="25400" tIns="25400" rIns="25400" bIns="25400" rtlCol="0" anchor="t">
+            <a:normAutofit/>
+          </a:bodyPr>
+          <a:lstStyle/>
+          <a:p>
+            <a:pPr algn="l" indent="0" marL="0">
+              <a:lnSpc>
+                <a:spcPct val="140000"/>
+              </a:lnSpc>
+              <a:buNone/>
+            </a:pPr>
+            <a:r>
+              <a:rPr lang="en-US" sz="1600" b="0" dirty="0">
+                <a:solidFill>
+                  <a:srgbClr val="3D4652"/>
+                </a:solidFill>
+                <a:latin typeface="Space Grotesk" pitchFamily="34" charset="0"/>
+                <a:ea typeface="Space Grotesk" pitchFamily="34" charset="-122"/>
+                <a:cs typeface="Space Grotesk" pitchFamily="34" charset="-120"/>
+              </a:rPr>
+              <a:t>Goals per match by league — average goals per match in every league, one season. GROUP BY.</a:t>
+            </a:r>
+            <a:pPr algn="l" indent="0" marL="0">
+              <a:lnSpc>
+                <a:spcPct val="140000"/>
+              </a:lnSpc>
+              <a:buNone/>
+            </a:pPr>
+            <a:endParaRPr lang="en-US" sz="1800" dirty="0"/>
+          </a:p>
+        </p:txBody>
+      </p:sp>
+      <p:sp>
+        <p:nvSpPr>
+          <p:cNvPr id="1028" name="Text 3"/>
+          <p:cNvSpPr/>
+          <p:nvPr/>
+        </p:nvSpPr>
+        <p:spPr>
+          <a:xfrm>
+            <a:off x="1316736" y="5952744"/>
+            <a:ext cx="1005840" cy="320040"/>
+          </a:xfrm>
+          <a:prstGeom prst="rect">
+            <a:avLst/>
+          </a:prstGeom>
+          <a:noFill/>
+          <a:ln/>
+        </p:spPr>
+        <p:txBody>
+          <a:bodyPr wrap="square" lIns="25400" tIns="25400" rIns="25400" bIns="25400" rtlCol="0" anchor="t">
+            <a:normAutofit/>
+          </a:bodyPr>
+          <a:lstStyle/>
+          <a:p>
+            <a:pPr algn="l" indent="0" marL="0">
+              <a:buNone/>
+            </a:pPr>
+            <a:r>
+              <a:rPr lang="en-US" sz="1700" b="1" dirty="0">
+                <a:solidFill>
+                  <a:srgbClr val="1A2430"/>
+                </a:solidFill>
+                <a:latin typeface="IBM Plex Mono" pitchFamily="34" charset="0"/>
+                <a:ea typeface="IBM Plex Mono" pitchFamily="34" charset="-122"/>
+                <a:cs typeface="IBM Plex Mono" pitchFamily="34" charset="-120"/>
+              </a:rPr>
+              <a:t>Q04</a:t>
+            </a:r>
+            <a:endParaRPr lang="en-US" sz="1650" dirty="0"/>
+          </a:p>
+        </p:txBody>
+      </p:sp>
+      <p:sp>
+        <p:nvSpPr>
+          <p:cNvPr id="1029" name="Text 3"/>
+          <p:cNvSpPr/>
+          <p:nvPr/>
+        </p:nvSpPr>
+        <p:spPr>
+          <a:xfrm>
+            <a:off x="1316736" y="6318504"/>
+            <a:ext cx="1005840" cy="274320"/>
+          </a:xfrm>
+          <a:prstGeom prst="rect">
+            <a:avLst/>
+          </a:prstGeom>
+          <a:noFill/>
+          <a:ln/>
+        </p:spPr>
+        <p:txBody>
+          <a:bodyPr wrap="square" lIns="25400" tIns="25400" rIns="25400" bIns="25400" rtlCol="0" anchor="t">
+            <a:normAutofit/>
+          </a:bodyPr>
+          <a:lstStyle/>
+          <a:p>
+            <a:pPr algn="l" indent="0" marL="0">
+              <a:buNone/>
+            </a:pPr>
+            <a:r>
+              <a:rPr lang="en-US" sz="1200" b="0" dirty="0">
+                <a:solidFill>
+                  <a:srgbClr val="33608F"/>
+                </a:solidFill>
+                <a:latin typeface="IBM Plex Mono" pitchFamily="34" charset="0"/>
+                <a:ea typeface="IBM Plex Mono" pitchFamily="34" charset="-122"/>
+                <a:cs typeface="IBM Plex Mono" pitchFamily="34" charset="-120"/>
+              </a:rPr>
+              <a:t>cat. A</a:t>
+            </a:r>
+            <a:endParaRPr lang="en-US" sz="1650" dirty="0"/>
+          </a:p>
+        </p:txBody>
+      </p:sp>
+      <p:sp>
+        <p:nvSpPr>
+          <p:cNvPr id="1030" name="Text 4"/>
+          <p:cNvSpPr/>
+          <p:nvPr/>
+        </p:nvSpPr>
+        <p:spPr>
+          <a:xfrm>
+            <a:off x="2368296" y="5925312"/>
+            <a:ext cx="6355080" cy="868680"/>
+          </a:xfrm>
+          <a:prstGeom prst="rect">
+            <a:avLst/>
+          </a:prstGeom>
+          <a:noFill/>
+          <a:ln/>
+        </p:spPr>
+        <p:txBody>
+          <a:bodyPr wrap="square" lIns="25400" tIns="25400" rIns="25400" bIns="25400" rtlCol="0" anchor="t">
+            <a:normAutofit/>
+          </a:bodyPr>
+          <a:lstStyle/>
+          <a:p>
+            <a:pPr algn="l" indent="0" marL="0">
+              <a:lnSpc>
+                <a:spcPct val="140000"/>
+              </a:lnSpc>
+              <a:buNone/>
+            </a:pPr>
+            <a:r>
+              <a:rPr lang="en-US" sz="1600" b="0" dirty="0">
+                <a:solidFill>
+                  <a:srgbClr val="3D4652"/>
+                </a:solidFill>
+                <a:latin typeface="Space Grotesk" pitchFamily="34" charset="0"/>
+                <a:ea typeface="Space Grotesk" pitchFamily="34" charset="-122"/>
+                <a:cs typeface="Space Grotesk" pitchFamily="34" charset="-120"/>
+              </a:rPr>
+              <a:t>Home win % by team — teams with the best home-win rate, min. N home matches. Conditional aggregation.</a:t>
+            </a:r>
+            <a:pPr algn="l" indent="0" marL="0">
+              <a:lnSpc>
+                <a:spcPct val="140000"/>
+              </a:lnSpc>
+              <a:buNone/>
+            </a:pPr>
+            <a:endParaRPr lang="en-US" sz="1800" dirty="0"/>
+          </a:p>
+        </p:txBody>
+      </p:sp>
+      <p:sp>
+        <p:nvSpPr>
+          <p:cNvPr id="1031" name="Text 3"/>
+          <p:cNvSpPr/>
+          <p:nvPr/>
+        </p:nvSpPr>
+        <p:spPr>
+          <a:xfrm>
+            <a:off x="1316736" y="6986016"/>
+            <a:ext cx="1005840" cy="320040"/>
+          </a:xfrm>
+          <a:prstGeom prst="rect">
+            <a:avLst/>
+          </a:prstGeom>
+          <a:noFill/>
+          <a:ln/>
+        </p:spPr>
+        <p:txBody>
+          <a:bodyPr wrap="square" lIns="25400" tIns="25400" rIns="25400" bIns="25400" rtlCol="0" anchor="t">
+            <a:normAutofit/>
+          </a:bodyPr>
+          <a:lstStyle/>
+          <a:p>
+            <a:pPr algn="l" indent="0" marL="0">
+              <a:buNone/>
+            </a:pPr>
+            <a:r>
+              <a:rPr lang="en-US" sz="1700" b="1" dirty="0">
+                <a:solidFill>
+                  <a:srgbClr val="1A2430"/>
+                </a:solidFill>
+                <a:latin typeface="IBM Plex Mono" pitchFamily="34" charset="0"/>
+                <a:ea typeface="IBM Plex Mono" pitchFamily="34" charset="-122"/>
+                <a:cs typeface="IBM Plex Mono" pitchFamily="34" charset="-120"/>
+              </a:rPr>
+              <a:t>Q05</a:t>
+            </a:r>
+            <a:endParaRPr lang="en-US" sz="1650" dirty="0"/>
+          </a:p>
+        </p:txBody>
+      </p:sp>
+      <p:sp>
+        <p:nvSpPr>
+          <p:cNvPr id="1032" name="Text 3"/>
+          <p:cNvSpPr/>
+          <p:nvPr/>
+        </p:nvSpPr>
+        <p:spPr>
+          <a:xfrm>
+            <a:off x="1316736" y="7351775"/>
+            <a:ext cx="1005840" cy="274320"/>
+          </a:xfrm>
+          <a:prstGeom prst="rect">
+            <a:avLst/>
+          </a:prstGeom>
+          <a:noFill/>
+          <a:ln/>
+        </p:spPr>
+        <p:txBody>
+          <a:bodyPr wrap="square" lIns="25400" tIns="25400" rIns="25400" bIns="25400" rtlCol="0" anchor="t">
+            <a:normAutofit/>
+          </a:bodyPr>
+          <a:lstStyle/>
+          <a:p>
+            <a:pPr algn="l" indent="0" marL="0">
+              <a:buNone/>
+            </a:pPr>
+            <a:r>
+              <a:rPr lang="en-US" sz="1200" b="0" dirty="0">
+                <a:solidFill>
+                  <a:srgbClr val="33608F"/>
+                </a:solidFill>
+                <a:latin typeface="IBM Plex Mono" pitchFamily="34" charset="0"/>
+                <a:ea typeface="IBM Plex Mono" pitchFamily="34" charset="-122"/>
+                <a:cs typeface="IBM Plex Mono" pitchFamily="34" charset="-120"/>
+              </a:rPr>
+              <a:t>cat. B</a:t>
+            </a:r>
+            <a:endParaRPr lang="en-US" sz="1650" dirty="0"/>
+          </a:p>
+        </p:txBody>
+      </p:sp>
+      <p:sp>
+        <p:nvSpPr>
+          <p:cNvPr id="1033" name="Text 4"/>
+          <p:cNvSpPr/>
+          <p:nvPr/>
+        </p:nvSpPr>
+        <p:spPr>
+          <a:xfrm>
+            <a:off x="2368296" y="6958583"/>
+            <a:ext cx="6355080" cy="868680"/>
+          </a:xfrm>
+          <a:prstGeom prst="rect">
+            <a:avLst/>
+          </a:prstGeom>
+          <a:noFill/>
+          <a:ln/>
+        </p:spPr>
+        <p:txBody>
+          <a:bodyPr wrap="square" lIns="25400" tIns="25400" rIns="25400" bIns="25400" rtlCol="0" anchor="t">
+            <a:normAutofit/>
+          </a:bodyPr>
+          <a:lstStyle/>
+          <a:p>
+            <a:pPr algn="l" indent="0" marL="0">
+              <a:lnSpc>
+                <a:spcPct val="140000"/>
+              </a:lnSpc>
+              <a:buNone/>
+            </a:pPr>
+            <a:r>
+              <a:rPr lang="en-US" sz="1600" b="0" dirty="0">
+                <a:solidFill>
+                  <a:srgbClr val="3D4652"/>
+                </a:solidFill>
+                <a:latin typeface="Space Grotesk" pitchFamily="34" charset="0"/>
+                <a:ea typeface="Space Grotesk" pitchFamily="34" charset="-122"/>
+                <a:cs typeface="Space Grotesk" pitchFamily="34" charset="-120"/>
+              </a:rPr>
+              <a:t>Goal-assist partnerships — scorer–assister pairs that combined at least N times. Self-join on one event.</a:t>
+            </a:r>
+            <a:pPr algn="l" indent="0" marL="0">
+              <a:lnSpc>
+                <a:spcPct val="140000"/>
+              </a:lnSpc>
+              <a:buNone/>
+            </a:pPr>
+            <a:endParaRPr lang="en-US" sz="1800" dirty="0"/>
+          </a:p>
+        </p:txBody>
+      </p:sp>
+      <p:sp>
+        <p:nvSpPr>
+          <p:cNvPr id="1034" name="Text 3"/>
+          <p:cNvSpPr/>
+          <p:nvPr/>
+        </p:nvSpPr>
+        <p:spPr>
+          <a:xfrm>
+            <a:off x="1316736" y="8019288"/>
+            <a:ext cx="1005840" cy="320040"/>
+          </a:xfrm>
+          <a:prstGeom prst="rect">
+            <a:avLst/>
+          </a:prstGeom>
+          <a:noFill/>
+          <a:ln/>
+        </p:spPr>
+        <p:txBody>
+          <a:bodyPr wrap="square" lIns="25400" tIns="25400" rIns="25400" bIns="25400" rtlCol="0" anchor="t">
+            <a:normAutofit/>
+          </a:bodyPr>
+          <a:lstStyle/>
+          <a:p>
+            <a:pPr algn="l" indent="0" marL="0">
+              <a:buNone/>
+            </a:pPr>
+            <a:r>
+              <a:rPr lang="en-US" sz="1700" b="1" dirty="0">
+                <a:solidFill>
+                  <a:srgbClr val="1A2430"/>
+                </a:solidFill>
+                <a:latin typeface="IBM Plex Mono" pitchFamily="34" charset="0"/>
+                <a:ea typeface="IBM Plex Mono" pitchFamily="34" charset="-122"/>
+                <a:cs typeface="IBM Plex Mono" pitchFamily="34" charset="-120"/>
+              </a:rPr>
+              <a:t>Q06</a:t>
+            </a:r>
+            <a:endParaRPr lang="en-US" sz="1650" dirty="0"/>
+          </a:p>
+        </p:txBody>
+      </p:sp>
+      <p:sp>
+        <p:nvSpPr>
+          <p:cNvPr id="1035" name="Text 3"/>
+          <p:cNvSpPr/>
+          <p:nvPr/>
+        </p:nvSpPr>
+        <p:spPr>
+          <a:xfrm>
+            <a:off x="1316736" y="8385048"/>
+            <a:ext cx="1005840" cy="274320"/>
+          </a:xfrm>
+          <a:prstGeom prst="rect">
+            <a:avLst/>
+          </a:prstGeom>
+          <a:noFill/>
+          <a:ln/>
+        </p:spPr>
+        <p:txBody>
+          <a:bodyPr wrap="square" lIns="25400" tIns="25400" rIns="25400" bIns="25400" rtlCol="0" anchor="t">
+            <a:normAutofit/>
+          </a:bodyPr>
+          <a:lstStyle/>
+          <a:p>
+            <a:pPr algn="l" indent="0" marL="0">
+              <a:buNone/>
+            </a:pPr>
+            <a:r>
+              <a:rPr lang="en-US" sz="1200" b="0" dirty="0">
+                <a:solidFill>
+                  <a:srgbClr val="33608F"/>
+                </a:solidFill>
+                <a:latin typeface="IBM Plex Mono" pitchFamily="34" charset="0"/>
+                <a:ea typeface="IBM Plex Mono" pitchFamily="34" charset="-122"/>
+                <a:cs typeface="IBM Plex Mono" pitchFamily="34" charset="-120"/>
+              </a:rPr>
+              <a:t>cat. B</a:t>
+            </a:r>
+            <a:endParaRPr lang="en-US" sz="1650" dirty="0"/>
+          </a:p>
+        </p:txBody>
+      </p:sp>
+      <p:sp>
+        <p:nvSpPr>
+          <p:cNvPr id="1036" name="Text 4"/>
+          <p:cNvSpPr/>
+          <p:nvPr/>
+        </p:nvSpPr>
+        <p:spPr>
+          <a:xfrm>
+            <a:off x="2368296" y="7991856"/>
+            <a:ext cx="6355080" cy="868680"/>
+          </a:xfrm>
+          <a:prstGeom prst="rect">
+            <a:avLst/>
+          </a:prstGeom>
+          <a:noFill/>
+          <a:ln/>
+        </p:spPr>
+        <p:txBody>
+          <a:bodyPr wrap="square" lIns="25400" tIns="25400" rIns="25400" bIns="25400" rtlCol="0" anchor="t">
+            <a:normAutofit/>
+          </a:bodyPr>
+          <a:lstStyle/>
+          <a:p>
+            <a:pPr algn="l" indent="0" marL="0">
+              <a:lnSpc>
+                <a:spcPct val="140000"/>
+              </a:lnSpc>
+              <a:buNone/>
+            </a:pPr>
+            <a:r>
+              <a:rPr lang="en-US" sz="1600" b="0" dirty="0">
+                <a:solidFill>
+                  <a:srgbClr val="3D4652"/>
+                </a:solidFill>
+                <a:latin typeface="Space Grotesk" pitchFamily="34" charset="0"/>
+                <a:ea typeface="Space Grotesk" pitchFamily="34" charset="-122"/>
+                <a:cs typeface="Space Grotesk" pitchFamily="34" charset="-120"/>
+              </a:rPr>
+              <a:t>Cards vs Real Madrid — players booked most often when playing against a given team. 4-table join.</a:t>
+            </a:r>
+            <a:pPr algn="l" indent="0" marL="0">
+              <a:lnSpc>
+                <a:spcPct val="140000"/>
+              </a:lnSpc>
+              <a:buNone/>
+            </a:pPr>
+            <a:endParaRPr lang="en-US" sz="1800" dirty="0"/>
+          </a:p>
+        </p:txBody>
+      </p:sp>
+      <p:sp>
+        <p:nvSpPr>
+          <p:cNvPr id="1037" name="Shape 2"/>
+          <p:cNvSpPr/>
+          <p:nvPr/>
+        </p:nvSpPr>
+        <p:spPr>
+          <a:xfrm>
+            <a:off x="9253728" y="2569464"/>
+            <a:ext cx="8083296" cy="6446520"/>
+          </a:xfrm>
+          <a:prstGeom prst="rect">
+            <a:avLst/>
+          </a:prstGeom>
+          <a:solidFill>
+            <a:srgbClr val="FFFFFF"/>
+          </a:solidFill>
+          <a:ln w="8695">
+            <a:solidFill>
+              <a:srgbClr val="DDD6CA"/>
+            </a:solidFill>
+            <a:prstDash val="solid"/>
+          </a:ln>
+        </p:spPr>
+        <p:txBody>
+          <a:bodyPr/>
+          <a:p/>
+        </p:txBody>
+      </p:sp>
+      <p:sp>
+        <p:nvSpPr>
+          <p:cNvPr id="1038" name="Text 3"/>
+          <p:cNvSpPr/>
+          <p:nvPr/>
+        </p:nvSpPr>
+        <p:spPr>
+          <a:xfrm>
+            <a:off x="9619488" y="2852928"/>
+            <a:ext cx="1005840" cy="320040"/>
+          </a:xfrm>
+          <a:prstGeom prst="rect">
+            <a:avLst/>
+          </a:prstGeom>
+          <a:noFill/>
+          <a:ln/>
+        </p:spPr>
+        <p:txBody>
+          <a:bodyPr wrap="square" lIns="25400" tIns="25400" rIns="25400" bIns="25400" rtlCol="0" anchor="t">
+            <a:normAutofit/>
+          </a:bodyPr>
+          <a:lstStyle/>
+          <a:p>
+            <a:pPr algn="l" indent="0" marL="0">
+              <a:buNone/>
+            </a:pPr>
+            <a:r>
+              <a:rPr lang="en-US" sz="1700" b="1" dirty="0">
+                <a:solidFill>
+                  <a:srgbClr val="1A2430"/>
+                </a:solidFill>
+                <a:latin typeface="IBM Plex Mono" pitchFamily="34" charset="0"/>
+                <a:ea typeface="IBM Plex Mono" pitchFamily="34" charset="-122"/>
+                <a:cs typeface="IBM Plex Mono" pitchFamily="34" charset="-120"/>
+              </a:rPr>
+              <a:t>Q07</a:t>
+            </a:r>
+            <a:endParaRPr lang="en-US" sz="1650" dirty="0"/>
+          </a:p>
+        </p:txBody>
+      </p:sp>
+      <p:sp>
+        <p:nvSpPr>
+          <p:cNvPr id="1039" name="Text 3"/>
+          <p:cNvSpPr/>
+          <p:nvPr/>
+        </p:nvSpPr>
+        <p:spPr>
+          <a:xfrm>
+            <a:off x="9619488" y="3218688"/>
+            <a:ext cx="1005840" cy="274320"/>
+          </a:xfrm>
+          <a:prstGeom prst="rect">
+            <a:avLst/>
+          </a:prstGeom>
+          <a:noFill/>
+          <a:ln/>
+        </p:spPr>
+        <p:txBody>
+          <a:bodyPr wrap="square" lIns="25400" tIns="25400" rIns="25400" bIns="25400" rtlCol="0" anchor="t">
+            <a:normAutofit/>
+          </a:bodyPr>
+          <a:lstStyle/>
+          <a:p>
+            <a:pPr algn="l" indent="0" marL="0">
+              <a:buNone/>
+            </a:pPr>
+            <a:r>
+              <a:rPr lang="en-US" sz="1200" b="0" dirty="0">
+                <a:solidFill>
+                  <a:srgbClr val="33608F"/>
+                </a:solidFill>
+                <a:latin typeface="IBM Plex Mono" pitchFamily="34" charset="0"/>
+                <a:ea typeface="IBM Plex Mono" pitchFamily="34" charset="-122"/>
+                <a:cs typeface="IBM Plex Mono" pitchFamily="34" charset="-120"/>
+              </a:rPr>
+              <a:t>cat. B</a:t>
+            </a:r>
+            <a:endParaRPr lang="en-US" sz="1650" dirty="0"/>
+          </a:p>
+        </p:txBody>
+      </p:sp>
+      <p:sp>
+        <p:nvSpPr>
+          <p:cNvPr id="1040" name="Text 4"/>
+          <p:cNvSpPr/>
+          <p:nvPr/>
+        </p:nvSpPr>
+        <p:spPr>
+          <a:xfrm>
+            <a:off x="10671048" y="2825496"/>
+            <a:ext cx="6355080" cy="868680"/>
+          </a:xfrm>
+          <a:prstGeom prst="rect">
+            <a:avLst/>
+          </a:prstGeom>
+          <a:noFill/>
+          <a:ln/>
+        </p:spPr>
+        <p:txBody>
+          <a:bodyPr wrap="square" lIns="25400" tIns="25400" rIns="25400" bIns="25400" rtlCol="0" anchor="t">
+            <a:normAutofit/>
+          </a:bodyPr>
+          <a:lstStyle/>
+          <a:p>
+            <a:pPr algn="l" indent="0" marL="0">
+              <a:lnSpc>
+                <a:spcPct val="140000"/>
+              </a:lnSpc>
+              <a:buNone/>
+            </a:pPr>
+            <a:r>
+              <a:rPr lang="en-US" sz="1600" b="0" dirty="0">
+                <a:solidFill>
+                  <a:srgbClr val="3D4652"/>
+                </a:solidFill>
+                <a:latin typeface="Space Grotesk" pitchFamily="34" charset="0"/>
+                <a:ea typeface="Space Grotesk" pitchFamily="34" charset="-122"/>
+                <a:cs typeface="Space Grotesk" pitchFamily="34" charset="-120"/>
+              </a:rPr>
+              <a:t>Players in all 8 seasons — players who appeared in every season of the dataset. COUNT DISTINCT = 8.</a:t>
+            </a:r>
+            <a:pPr algn="l" indent="0" marL="0">
+              <a:lnSpc>
+                <a:spcPct val="140000"/>
+              </a:lnSpc>
+              <a:buNone/>
+            </a:pPr>
+            <a:endParaRPr lang="en-US" sz="1800" dirty="0"/>
+          </a:p>
+        </p:txBody>
+      </p:sp>
+      <p:sp>
+        <p:nvSpPr>
+          <p:cNvPr id="1041" name="Text 3"/>
+          <p:cNvSpPr/>
+          <p:nvPr/>
+        </p:nvSpPr>
+        <p:spPr>
+          <a:xfrm>
+            <a:off x="9619488" y="3886200"/>
+            <a:ext cx="1005840" cy="320040"/>
+          </a:xfrm>
+          <a:prstGeom prst="rect">
+            <a:avLst/>
+          </a:prstGeom>
+          <a:noFill/>
+          <a:ln/>
+        </p:spPr>
+        <p:txBody>
+          <a:bodyPr wrap="square" lIns="25400" tIns="25400" rIns="25400" bIns="25400" rtlCol="0" anchor="t">
+            <a:normAutofit/>
+          </a:bodyPr>
+          <a:lstStyle/>
+          <a:p>
+            <a:pPr algn="l" indent="0" marL="0">
+              <a:buNone/>
+            </a:pPr>
+            <a:r>
+              <a:rPr lang="en-US" sz="1700" b="1" dirty="0">
+                <a:solidFill>
+                  <a:srgbClr val="1A2430"/>
+                </a:solidFill>
+                <a:latin typeface="IBM Plex Mono" pitchFamily="34" charset="0"/>
+                <a:ea typeface="IBM Plex Mono" pitchFamily="34" charset="-122"/>
+                <a:cs typeface="IBM Plex Mono" pitchFamily="34" charset="-120"/>
+              </a:rPr>
+              <a:t>Q08</a:t>
+            </a:r>
+            <a:endParaRPr lang="en-US" sz="1650" dirty="0"/>
+          </a:p>
+        </p:txBody>
+      </p:sp>
+      <p:sp>
+        <p:nvSpPr>
+          <p:cNvPr id="1042" name="Text 3"/>
+          <p:cNvSpPr/>
+          <p:nvPr/>
+        </p:nvSpPr>
+        <p:spPr>
+          <a:xfrm>
+            <a:off x="9619488" y="4251960"/>
+            <a:ext cx="1005840" cy="274320"/>
+          </a:xfrm>
+          <a:prstGeom prst="rect">
+            <a:avLst/>
+          </a:prstGeom>
+          <a:noFill/>
+          <a:ln/>
+        </p:spPr>
+        <p:txBody>
+          <a:bodyPr wrap="square" lIns="25400" tIns="25400" rIns="25400" bIns="25400" rtlCol="0" anchor="t">
+            <a:normAutofit/>
+          </a:bodyPr>
+          <a:lstStyle/>
+          <a:p>
+            <a:pPr algn="l" indent="0" marL="0">
+              <a:buNone/>
+            </a:pPr>
+            <a:r>
+              <a:rPr lang="en-US" sz="1200" b="0" dirty="0">
+                <a:solidFill>
+                  <a:srgbClr val="1E7A52"/>
+                </a:solidFill>
+                <a:latin typeface="IBM Plex Mono" pitchFamily="34" charset="0"/>
+                <a:ea typeface="IBM Plex Mono" pitchFamily="34" charset="-122"/>
+                <a:cs typeface="IBM Plex Mono" pitchFamily="34" charset="-120"/>
+              </a:rPr>
+              <a:t>cat. C</a:t>
+            </a:r>
+            <a:endParaRPr lang="en-US" sz="1650" dirty="0"/>
+          </a:p>
+        </p:txBody>
+      </p:sp>
+      <p:sp>
+        <p:nvSpPr>
+          <p:cNvPr id="1043" name="Text 4"/>
+          <p:cNvSpPr/>
+          <p:nvPr/>
+        </p:nvSpPr>
+        <p:spPr>
+          <a:xfrm>
+            <a:off x="10671048" y="3858768"/>
+            <a:ext cx="6355080" cy="868680"/>
+          </a:xfrm>
+          <a:prstGeom prst="rect">
+            <a:avLst/>
+          </a:prstGeom>
+          <a:noFill/>
+          <a:ln/>
+        </p:spPr>
+        <p:txBody>
+          <a:bodyPr wrap="square" lIns="25400" tIns="25400" rIns="25400" bIns="25400" rtlCol="0" anchor="t">
+            <a:normAutofit/>
+          </a:bodyPr>
+          <a:lstStyle/>
+          <a:p>
+            <a:pPr algn="l" indent="0" marL="0">
+              <a:lnSpc>
+                <a:spcPct val="140000"/>
+              </a:lnSpc>
+              <a:buNone/>
+            </a:pPr>
+            <a:r>
+              <a:rPr lang="en-US" sz="1600" b="0" dirty="0">
+                <a:solidFill>
+                  <a:srgbClr val="3D4652"/>
+                </a:solidFill>
+                <a:latin typeface="Space Grotesk" pitchFamily="34" charset="0"/>
+                <a:ea typeface="Space Grotesk" pitchFamily="34" charset="-122"/>
+                <a:cs typeface="Space Grotesk" pitchFamily="34" charset="-120"/>
+              </a:rPr>
+              <a:t>Teammates of Messi 2015/16 — players who shared a lineup with X in season Y, by shared matches.</a:t>
+            </a:r>
+            <a:pPr algn="l" indent="0" marL="0">
+              <a:lnSpc>
+                <a:spcPct val="140000"/>
+              </a:lnSpc>
+              <a:buNone/>
+            </a:pPr>
+            <a:endParaRPr lang="en-US" sz="1800" dirty="0"/>
+          </a:p>
+        </p:txBody>
+      </p:sp>
+      <p:sp>
+        <p:nvSpPr>
+          <p:cNvPr id="1044" name="Text 3"/>
+          <p:cNvSpPr/>
+          <p:nvPr/>
+        </p:nvSpPr>
+        <p:spPr>
+          <a:xfrm>
+            <a:off x="9619488" y="4919472"/>
+            <a:ext cx="1005840" cy="320040"/>
+          </a:xfrm>
+          <a:prstGeom prst="rect">
+            <a:avLst/>
+          </a:prstGeom>
+          <a:noFill/>
+          <a:ln/>
+        </p:spPr>
+        <p:txBody>
+          <a:bodyPr wrap="square" lIns="25400" tIns="25400" rIns="25400" bIns="25400" rtlCol="0" anchor="t">
+            <a:normAutofit/>
+          </a:bodyPr>
+          <a:lstStyle/>
+          <a:p>
+            <a:pPr algn="l" indent="0" marL="0">
+              <a:buNone/>
+            </a:pPr>
+            <a:r>
+              <a:rPr lang="en-US" sz="1700" b="1" dirty="0">
+                <a:solidFill>
+                  <a:srgbClr val="1A2430"/>
+                </a:solidFill>
+                <a:latin typeface="IBM Plex Mono" pitchFamily="34" charset="0"/>
+                <a:ea typeface="IBM Plex Mono" pitchFamily="34" charset="-122"/>
+                <a:cs typeface="IBM Plex Mono" pitchFamily="34" charset="-120"/>
+              </a:rPr>
+              <a:t>Q09</a:t>
+            </a:r>
+            <a:endParaRPr lang="en-US" sz="1650" dirty="0"/>
+          </a:p>
+        </p:txBody>
+      </p:sp>
+      <p:sp>
+        <p:nvSpPr>
+          <p:cNvPr id="1045" name="Text 3"/>
+          <p:cNvSpPr/>
+          <p:nvPr/>
+        </p:nvSpPr>
+        <p:spPr>
+          <a:xfrm>
+            <a:off x="9619488" y="5285232"/>
+            <a:ext cx="1005840" cy="274320"/>
+          </a:xfrm>
+          <a:prstGeom prst="rect">
+            <a:avLst/>
+          </a:prstGeom>
+          <a:noFill/>
+          <a:ln/>
+        </p:spPr>
+        <p:txBody>
+          <a:bodyPr wrap="square" lIns="25400" tIns="25400" rIns="25400" bIns="25400" rtlCol="0" anchor="t">
+            <a:normAutofit/>
+          </a:bodyPr>
+          <a:lstStyle/>
+          <a:p>
+            <a:pPr algn="l" indent="0" marL="0">
+              <a:buNone/>
+            </a:pPr>
+            <a:r>
+              <a:rPr lang="en-US" sz="1200" b="0" dirty="0">
+                <a:solidFill>
+                  <a:srgbClr val="1E7A52"/>
+                </a:solidFill>
+                <a:latin typeface="IBM Plex Mono" pitchFamily="34" charset="0"/>
+                <a:ea typeface="IBM Plex Mono" pitchFamily="34" charset="-122"/>
+                <a:cs typeface="IBM Plex Mono" pitchFamily="34" charset="-120"/>
+              </a:rPr>
+              <a:t>cat. C</a:t>
+            </a:r>
+            <a:endParaRPr lang="en-US" sz="1650" dirty="0"/>
+          </a:p>
+        </p:txBody>
+      </p:sp>
+      <p:sp>
+        <p:nvSpPr>
+          <p:cNvPr id="1046" name="Text 4"/>
+          <p:cNvSpPr/>
+          <p:nvPr/>
+        </p:nvSpPr>
+        <p:spPr>
+          <a:xfrm>
+            <a:off x="10671048" y="4892040"/>
+            <a:ext cx="6355080" cy="868680"/>
+          </a:xfrm>
+          <a:prstGeom prst="rect">
+            <a:avLst/>
+          </a:prstGeom>
+          <a:noFill/>
+          <a:ln/>
+        </p:spPr>
+        <p:txBody>
+          <a:bodyPr wrap="square" lIns="25400" tIns="25400" rIns="25400" bIns="25400" rtlCol="0" anchor="t">
+            <a:normAutofit/>
+          </a:bodyPr>
+          <a:lstStyle/>
+          <a:p>
+            <a:pPr algn="l" indent="0" marL="0">
+              <a:lnSpc>
+                <a:spcPct val="140000"/>
+              </a:lnSpc>
+              <a:buNone/>
+            </a:pPr>
+            <a:r>
+              <a:rPr lang="en-US" sz="1600" b="0" dirty="0">
+                <a:solidFill>
+                  <a:srgbClr val="3D4652"/>
+                </a:solidFill>
+                <a:latin typeface="Space Grotesk" pitchFamily="34" charset="0"/>
+                <a:ea typeface="Space Grotesk" pitchFamily="34" charset="-122"/>
+                <a:cs typeface="Space Grotesk" pitchFamily="34" charset="-120"/>
+              </a:rPr>
+              <a:t>2-hop teammates — teammates-of-teammates of X, ranked by shared team-seasons. Fixed depth, mv_played_for.</a:t>
+            </a:r>
+            <a:pPr algn="l" indent="0" marL="0">
+              <a:lnSpc>
+                <a:spcPct val="140000"/>
+              </a:lnSpc>
+              <a:buNone/>
+            </a:pPr>
+            <a:endParaRPr lang="en-US" sz="1800" dirty="0"/>
+          </a:p>
+        </p:txBody>
+      </p:sp>
+      <p:sp>
+        <p:nvSpPr>
+          <p:cNvPr id="1047" name="Text 3"/>
+          <p:cNvSpPr/>
+          <p:nvPr/>
+        </p:nvSpPr>
+        <p:spPr>
+          <a:xfrm>
+            <a:off x="9619488" y="5952744"/>
+            <a:ext cx="1005840" cy="320040"/>
+          </a:xfrm>
+          <a:prstGeom prst="rect">
+            <a:avLst/>
+          </a:prstGeom>
+          <a:noFill/>
+          <a:ln/>
+        </p:spPr>
+        <p:txBody>
+          <a:bodyPr wrap="square" lIns="25400" tIns="25400" rIns="25400" bIns="25400" rtlCol="0" anchor="t">
+            <a:normAutofit/>
+          </a:bodyPr>
+          <a:lstStyle/>
+          <a:p>
+            <a:pPr algn="l" indent="0" marL="0">
+              <a:buNone/>
+            </a:pPr>
+            <a:r>
+              <a:rPr lang="en-US" sz="1700" b="1" dirty="0">
+                <a:solidFill>
+                  <a:srgbClr val="1A2430"/>
+                </a:solidFill>
+                <a:latin typeface="IBM Plex Mono" pitchFamily="34" charset="0"/>
+                <a:ea typeface="IBM Plex Mono" pitchFamily="34" charset="-122"/>
+                <a:cs typeface="IBM Plex Mono" pitchFamily="34" charset="-120"/>
+              </a:rPr>
+              <a:t>Q10</a:t>
+            </a:r>
+            <a:endParaRPr lang="en-US" sz="1650" dirty="0"/>
+          </a:p>
+        </p:txBody>
+      </p:sp>
+      <p:sp>
+        <p:nvSpPr>
+          <p:cNvPr id="1048" name="Text 3"/>
+          <p:cNvSpPr/>
+          <p:nvPr/>
+        </p:nvSpPr>
+        <p:spPr>
+          <a:xfrm>
+            <a:off x="9619488" y="6318504"/>
+            <a:ext cx="1005840" cy="274320"/>
+          </a:xfrm>
+          <a:prstGeom prst="rect">
+            <a:avLst/>
+          </a:prstGeom>
+          <a:noFill/>
+          <a:ln/>
+        </p:spPr>
+        <p:txBody>
+          <a:bodyPr wrap="square" lIns="25400" tIns="25400" rIns="25400" bIns="25400" rtlCol="0" anchor="t">
+            <a:normAutofit/>
+          </a:bodyPr>
+          <a:lstStyle/>
+          <a:p>
+            <a:pPr algn="l" indent="0" marL="0">
+              <a:buNone/>
+            </a:pPr>
+            <a:r>
+              <a:rPr lang="en-US" sz="1200" b="0" dirty="0">
+                <a:solidFill>
+                  <a:srgbClr val="1E7A52"/>
+                </a:solidFill>
+                <a:latin typeface="IBM Plex Mono" pitchFamily="34" charset="0"/>
+                <a:ea typeface="IBM Plex Mono" pitchFamily="34" charset="-122"/>
+                <a:cs typeface="IBM Plex Mono" pitchFamily="34" charset="-120"/>
+              </a:rPr>
+              <a:t>cat. C</a:t>
+            </a:r>
+            <a:endParaRPr lang="en-US" sz="1650" dirty="0"/>
+          </a:p>
+        </p:txBody>
+      </p:sp>
+      <p:sp>
+        <p:nvSpPr>
+          <p:cNvPr id="1049" name="Text 4"/>
+          <p:cNvSpPr/>
+          <p:nvPr/>
+        </p:nvSpPr>
+        <p:spPr>
+          <a:xfrm>
+            <a:off x="10671048" y="5925312"/>
+            <a:ext cx="6355080" cy="868680"/>
+          </a:xfrm>
+          <a:prstGeom prst="rect">
+            <a:avLst/>
+          </a:prstGeom>
+          <a:noFill/>
+          <a:ln/>
+        </p:spPr>
+        <p:txBody>
+          <a:bodyPr wrap="square" lIns="25400" tIns="25400" rIns="25400" bIns="25400" rtlCol="0" anchor="t">
+            <a:normAutofit/>
+          </a:bodyPr>
+          <a:lstStyle/>
+          <a:p>
+            <a:pPr algn="l" indent="0" marL="0">
+              <a:lnSpc>
+                <a:spcPct val="140000"/>
+              </a:lnSpc>
+              <a:buNone/>
+            </a:pPr>
+            <a:r>
+              <a:rPr lang="en-US" sz="1600" b="0" dirty="0">
+                <a:solidFill>
+                  <a:srgbClr val="3D4652"/>
+                </a:solidFill>
+                <a:latin typeface="Space Grotesk" pitchFamily="34" charset="0"/>
+                <a:ea typeface="Space Grotesk" pitchFamily="34" charset="-122"/>
+                <a:cs typeface="Space Grotesk" pitchFamily="34" charset="-120"/>
+              </a:rPr>
+              <a:t>Shortest path Messi → Pirlo — degrees of separation on the teammate graph, max 6 hops. Recursive CTE vs SHORTEST 1.</a:t>
+            </a:r>
+            <a:pPr algn="l" indent="0" marL="0">
+              <a:lnSpc>
+                <a:spcPct val="140000"/>
+              </a:lnSpc>
+              <a:buNone/>
+            </a:pPr>
+            <a:endParaRPr lang="en-US" sz="1800" dirty="0"/>
+          </a:p>
+        </p:txBody>
+      </p:sp>
+      <p:sp>
+        <p:nvSpPr>
+          <p:cNvPr id="1050" name="Text 3"/>
+          <p:cNvSpPr/>
+          <p:nvPr/>
+        </p:nvSpPr>
+        <p:spPr>
+          <a:xfrm>
+            <a:off x="9619488" y="6986016"/>
+            <a:ext cx="1005840" cy="320040"/>
+          </a:xfrm>
+          <a:prstGeom prst="rect">
+            <a:avLst/>
+          </a:prstGeom>
+          <a:noFill/>
+          <a:ln/>
+        </p:spPr>
+        <p:txBody>
+          <a:bodyPr wrap="square" lIns="25400" tIns="25400" rIns="25400" bIns="25400" rtlCol="0" anchor="t">
+            <a:normAutofit/>
+          </a:bodyPr>
+          <a:lstStyle/>
+          <a:p>
+            <a:pPr algn="l" indent="0" marL="0">
+              <a:buNone/>
+            </a:pPr>
+            <a:r>
+              <a:rPr lang="en-US" sz="1700" b="1" dirty="0">
+                <a:solidFill>
+                  <a:srgbClr val="1A2430"/>
+                </a:solidFill>
+                <a:latin typeface="IBM Plex Mono" pitchFamily="34" charset="0"/>
+                <a:ea typeface="IBM Plex Mono" pitchFamily="34" charset="-122"/>
+                <a:cs typeface="IBM Plex Mono" pitchFamily="34" charset="-120"/>
+              </a:rPr>
+              <a:t>Q11</a:t>
+            </a:r>
+            <a:endParaRPr lang="en-US" sz="1650" dirty="0"/>
+          </a:p>
+        </p:txBody>
+      </p:sp>
+      <p:sp>
+        <p:nvSpPr>
+          <p:cNvPr id="1051" name="Text 3"/>
+          <p:cNvSpPr/>
+          <p:nvPr/>
+        </p:nvSpPr>
+        <p:spPr>
+          <a:xfrm>
+            <a:off x="9619488" y="7351775"/>
+            <a:ext cx="1005840" cy="274320"/>
+          </a:xfrm>
+          <a:prstGeom prst="rect">
+            <a:avLst/>
+          </a:prstGeom>
+          <a:noFill/>
+          <a:ln/>
+        </p:spPr>
+        <p:txBody>
+          <a:bodyPr wrap="square" lIns="25400" tIns="25400" rIns="25400" bIns="25400" rtlCol="0" anchor="t">
+            <a:normAutofit/>
+          </a:bodyPr>
+          <a:lstStyle/>
+          <a:p>
+            <a:pPr algn="l" indent="0" marL="0">
+              <a:buNone/>
+            </a:pPr>
+            <a:r>
+              <a:rPr lang="en-US" sz="1200" b="0" dirty="0">
+                <a:solidFill>
+                  <a:srgbClr val="1E7A52"/>
+                </a:solidFill>
+                <a:latin typeface="IBM Plex Mono" pitchFamily="34" charset="0"/>
+                <a:ea typeface="IBM Plex Mono" pitchFamily="34" charset="-122"/>
+                <a:cs typeface="IBM Plex Mono" pitchFamily="34" charset="-120"/>
+              </a:rPr>
+              <a:t>cat. D</a:t>
+            </a:r>
+            <a:endParaRPr lang="en-US" sz="1650" dirty="0"/>
+          </a:p>
+        </p:txBody>
+      </p:sp>
+      <p:sp>
+        <p:nvSpPr>
+          <p:cNvPr id="1052" name="Text 4"/>
+          <p:cNvSpPr/>
+          <p:nvPr/>
+        </p:nvSpPr>
+        <p:spPr>
+          <a:xfrm>
+            <a:off x="10671048" y="6958583"/>
+            <a:ext cx="6355080" cy="868680"/>
+          </a:xfrm>
+          <a:prstGeom prst="rect">
+            <a:avLst/>
+          </a:prstGeom>
+          <a:noFill/>
+          <a:ln/>
+        </p:spPr>
+        <p:txBody>
+          <a:bodyPr wrap="square" lIns="25400" tIns="25400" rIns="25400" bIns="25400" rtlCol="0" anchor="t">
+            <a:normAutofit/>
+          </a:bodyPr>
+          <a:lstStyle/>
+          <a:p>
+            <a:pPr algn="l" indent="0" marL="0">
+              <a:lnSpc>
+                <a:spcPct val="140000"/>
+              </a:lnSpc>
+              <a:buNone/>
+            </a:pPr>
+            <a:r>
+              <a:rPr lang="en-US" sz="1600" b="0" dirty="0">
+                <a:solidFill>
+                  <a:srgbClr val="3D4652"/>
+                </a:solidFill>
+                <a:latin typeface="Space Grotesk" pitchFamily="34" charset="0"/>
+                <a:ea typeface="Space Grotesk" pitchFamily="34" charset="-122"/>
+                <a:cs typeface="Space Grotesk" pitchFamily="34" charset="-120"/>
+              </a:rPr>
+              <a:t>Bulk UPDATE — lowercase the subtype of the 21,442 goal events with a known scorer. Measured to COMMIT.</a:t>
+            </a:r>
+            <a:pPr algn="l" indent="0" marL="0">
+              <a:lnSpc>
+                <a:spcPct val="140000"/>
+              </a:lnSpc>
+              <a:buNone/>
+            </a:pPr>
+            <a:endParaRPr lang="en-US" sz="1800" dirty="0"/>
+          </a:p>
+        </p:txBody>
+      </p:sp>
+      <p:sp>
+        <p:nvSpPr>
+          <p:cNvPr id="1053" name="Text 3"/>
+          <p:cNvSpPr/>
+          <p:nvPr/>
+        </p:nvSpPr>
+        <p:spPr>
+          <a:xfrm>
+            <a:off x="9619488" y="8019288"/>
+            <a:ext cx="1005840" cy="320040"/>
+          </a:xfrm>
+          <a:prstGeom prst="rect">
+            <a:avLst/>
+          </a:prstGeom>
+          <a:noFill/>
+          <a:ln/>
+        </p:spPr>
+        <p:txBody>
+          <a:bodyPr wrap="square" lIns="25400" tIns="25400" rIns="25400" bIns="25400" rtlCol="0" anchor="t">
+            <a:normAutofit/>
+          </a:bodyPr>
+          <a:lstStyle/>
+          <a:p>
+            <a:pPr algn="l" indent="0" marL="0">
+              <a:buNone/>
+            </a:pPr>
+            <a:r>
+              <a:rPr lang="en-US" sz="1700" b="1" dirty="0">
+                <a:solidFill>
+                  <a:srgbClr val="1A2430"/>
+                </a:solidFill>
+                <a:latin typeface="IBM Plex Mono" pitchFamily="34" charset="0"/>
+                <a:ea typeface="IBM Plex Mono" pitchFamily="34" charset="-122"/>
+                <a:cs typeface="IBM Plex Mono" pitchFamily="34" charset="-120"/>
+              </a:rPr>
+              <a:t>Q12</a:t>
+            </a:r>
+            <a:endParaRPr lang="en-US" sz="1650" dirty="0"/>
+          </a:p>
+        </p:txBody>
+      </p:sp>
+      <p:sp>
+        <p:nvSpPr>
+          <p:cNvPr id="1054" name="Text 3"/>
+          <p:cNvSpPr/>
+          <p:nvPr/>
+        </p:nvSpPr>
+        <p:spPr>
+          <a:xfrm>
+            <a:off x="9619488" y="8385048"/>
+            <a:ext cx="1005840" cy="274320"/>
+          </a:xfrm>
+          <a:prstGeom prst="rect">
+            <a:avLst/>
+          </a:prstGeom>
+          <a:noFill/>
+          <a:ln/>
+        </p:spPr>
+        <p:txBody>
+          <a:bodyPr wrap="square" lIns="25400" tIns="25400" rIns="25400" bIns="25400" rtlCol="0" anchor="t">
+            <a:normAutofit/>
+          </a:bodyPr>
+          <a:lstStyle/>
+          <a:p>
+            <a:pPr algn="l" indent="0" marL="0">
+              <a:buNone/>
+            </a:pPr>
+            <a:r>
+              <a:rPr lang="en-US" sz="1200" b="0" dirty="0">
+                <a:solidFill>
+                  <a:srgbClr val="1E7A52"/>
+                </a:solidFill>
+                <a:latin typeface="IBM Plex Mono" pitchFamily="34" charset="0"/>
+                <a:ea typeface="IBM Plex Mono" pitchFamily="34" charset="-122"/>
+                <a:cs typeface="IBM Plex Mono" pitchFamily="34" charset="-120"/>
+              </a:rPr>
+              <a:t>cat. D</a:t>
+            </a:r>
+            <a:endParaRPr lang="en-US" sz="1650" dirty="0"/>
+          </a:p>
+        </p:txBody>
+      </p:sp>
+      <p:sp>
+        <p:nvSpPr>
+          <p:cNvPr id="1055" name="Text 4"/>
+          <p:cNvSpPr/>
+          <p:nvPr/>
+        </p:nvSpPr>
+        <p:spPr>
+          <a:xfrm>
+            <a:off x="10671048" y="7991856"/>
+            <a:ext cx="6355080" cy="868680"/>
+          </a:xfrm>
+          <a:prstGeom prst="rect">
+            <a:avLst/>
+          </a:prstGeom>
+          <a:noFill/>
+          <a:ln/>
+        </p:spPr>
+        <p:txBody>
+          <a:bodyPr wrap="square" lIns="25400" tIns="25400" rIns="25400" bIns="25400" rtlCol="0" anchor="t">
+            <a:normAutofit/>
+          </a:bodyPr>
+          <a:lstStyle/>
+          <a:p>
+            <a:pPr algn="l" indent="0" marL="0">
+              <a:lnSpc>
+                <a:spcPct val="140000"/>
+              </a:lnSpc>
+              <a:buNone/>
+            </a:pPr>
+            <a:r>
+              <a:rPr lang="en-US" sz="1600" b="0" dirty="0">
+                <a:solidFill>
+                  <a:srgbClr val="3D4652"/>
+                </a:solidFill>
+                <a:latin typeface="Space Grotesk" pitchFamily="34" charset="0"/>
+                <a:ea typeface="Space Grotesk" pitchFamily="34" charset="-122"/>
+                <a:cs typeface="Space Grotesk" pitchFamily="34" charset="-120"/>
+              </a:rPr>
+              <a:t>Schema evolution — add totalGoals = home + away to all 25,979 matches. ALTER + UPDATE vs one SET.</a:t>
+            </a:r>
+            <a:pPr algn="l" indent="0" marL="0">
+              <a:lnSpc>
+                <a:spcPct val="140000"/>
+              </a:lnSpc>
+              <a:buNone/>
+            </a:pPr>
+            <a:endParaRPr lang="en-US" sz="1800" dirty="0"/>
+          </a:p>
+        </p:txBody>
+      </p:sp>
+      <p:sp>
+        <p:nvSpPr>
+          <p:cNvPr id="1056" name="Text 17"/>
+          <p:cNvSpPr/>
+          <p:nvPr/>
+        </p:nvSpPr>
+        <p:spPr>
+          <a:xfrm>
+            <a:off x="952385" y="9125712"/>
+            <a:ext cx="18021508" cy="351123"/>
+          </a:xfrm>
+          <a:prstGeom prst="rect">
+            <a:avLst/>
+          </a:prstGeom>
+          <a:noFill/>
+          <a:ln/>
+        </p:spPr>
+        <p:txBody>
+          <a:bodyPr wrap="square" lIns="25400" tIns="25400" rIns="25400" bIns="25400" rtlCol="0" anchor="t">
+            <a:normAutofit/>
+          </a:bodyPr>
+          <a:lstStyle/>
+          <a:p>
+            <a:pPr algn="l" indent="0" marL="0">
+              <a:buNone/>
+            </a:pPr>
+            <a:r>
+              <a:rPr lang="en-US" sz="1700" dirty="0">
+                <a:solidFill>
+                  <a:srgbClr val="6B655C"/>
+                </a:solidFill>
+                <a:latin typeface="Space Grotesk" pitchFamily="34" charset="0"/>
+                <a:ea typeface="Space Grotesk" pitchFamily="34" charset="-122"/>
+                <a:cs typeface="Space Grotesk" pitchFamily="34" charset="-120"/>
+              </a:rPr>
+              <a:t>All 12 are parameterised, written twice (queries/sql · queries/cypher) and result-checked as multisets on every run.</a:t>
+            </a:r>
+            <a:endParaRPr lang="en-US" sz="1950" dirty="0"/>
+          </a:p>
+        </p:txBody>
+      </p:sp>
+      <p:sp>
+        <p:nvSpPr>
+          <p:cNvPr id="1057" name="Text 18"/>
+          <p:cNvSpPr/>
+          <p:nvPr/>
+        </p:nvSpPr>
+        <p:spPr>
+          <a:xfrm>
+            <a:off x="952385" y="9633214"/>
+            <a:ext cx="6329527" cy="272868"/>
+          </a:xfrm>
+          <a:prstGeom prst="rect">
+            <a:avLst/>
+          </a:prstGeom>
+          <a:noFill/>
+          <a:ln/>
+        </p:spPr>
+        <p:txBody>
+          <a:bodyPr wrap="square" lIns="25400" tIns="25400" rIns="25400" bIns="25400" rtlCol="0" anchor="t">
+            <a:normAutofit/>
+          </a:bodyPr>
+          <a:lstStyle/>
+          <a:p>
+            <a:pPr algn="l" indent="0" marL="0">
+              <a:buNone/>
+            </a:pPr>
+            <a:r>
+              <a:rPr lang="en-US" sz="1425" dirty="0">
+                <a:solidFill>
+                  <a:srgbClr val="9A938A"/>
+                </a:solidFill>
+                <a:latin typeface="IBM Plex Mono" pitchFamily="34" charset="0"/>
+                <a:ea typeface="IBM Plex Mono" pitchFamily="34" charset="-122"/>
+                <a:cs typeface="IBM Plex Mono" pitchFamily="34" charset="-120"/>
+              </a:rPr>
+              <a:t>DM 2025/26 · D'Angelica &amp; Leone · PostgreSQL vs Neo4j</a:t>
+            </a:r>
+            <a:endParaRPr lang="en-US" sz="1425" dirty="0"/>
+          </a:p>
+        </p:txBody>
+      </p:sp>
+      <p:sp>
+        <p:nvSpPr>
+          <p:cNvPr id="1058" name="Text 19"/>
+          <p:cNvSpPr/>
+          <p:nvPr/>
+        </p:nvSpPr>
+        <p:spPr>
+          <a:xfrm>
+            <a:off x="16684121" y="9633214"/>
+            <a:ext cx="727653" cy="272868"/>
+          </a:xfrm>
+          <a:prstGeom prst="rect">
+            <a:avLst/>
+          </a:prstGeom>
+          <a:noFill/>
+          <a:ln/>
+        </p:spPr>
+        <p:txBody>
+          <a:bodyPr wrap="square" lIns="25400" tIns="25400" rIns="25400" bIns="25400" rtlCol="0" anchor="t">
+            <a:normAutofit/>
+          </a:bodyPr>
+          <a:lstStyle/>
+          <a:p>
+            <a:pPr algn="l" indent="0" marL="0">
+              <a:buNone/>
+            </a:pPr>
+            <a:r>
+              <a:rPr lang="en-US" sz="1425" dirty="0">
+                <a:solidFill>
+                  <a:srgbClr val="9A938A"/>
+                </a:solidFill>
+                <a:latin typeface="IBM Plex Mono" pitchFamily="34" charset="0"/>
+                <a:ea typeface="IBM Plex Mono" pitchFamily="34" charset="-122"/>
+                <a:cs typeface="IBM Plex Mono" pitchFamily="34" charset="-120"/>
+              </a:rPr>
+              <a:t>BACKUP</a:t>
             </a:r>
             <a:endParaRPr lang="en-US" sz="1425" dirty="0"/>
           </a:p>
@@ -12490,6 +13311,10 @@
           </a:solidFill>
           <a:ln/>
         </p:spPr>
+        <p:txBody>
+          <a:bodyPr/>
+          <a:p/>
+        </p:txBody>
       </p:sp>
       <p:sp>
         <p:nvSpPr>
@@ -12510,6 +13335,10 @@
           </a:solidFill>
           <a:ln/>
         </p:spPr>
+        <p:txBody>
+          <a:bodyPr/>
+          <a:p/>
+        </p:txBody>
       </p:sp>
       <p:sp>
         <p:nvSpPr>
@@ -12530,6 +13359,10 @@
           </a:solidFill>
           <a:ln/>
         </p:spPr>
+        <p:txBody>
+          <a:bodyPr/>
+          <a:p/>
+        </p:txBody>
       </p:sp>
       <p:sp>
         <p:nvSpPr>
@@ -12550,6 +13383,10 @@
           </a:solidFill>
           <a:ln/>
         </p:spPr>
+        <p:txBody>
+          <a:bodyPr/>
+          <a:p/>
+        </p:txBody>
       </p:sp>
       <p:sp>
         <p:nvSpPr>
@@ -12570,6 +13407,10 @@
           </a:solidFill>
           <a:ln/>
         </p:spPr>
+        <p:txBody>
+          <a:bodyPr/>
+          <a:p/>
+        </p:txBody>
       </p:sp>
       <p:sp>
         <p:nvSpPr>
@@ -12763,6 +13604,10 @@
           </a:solidFill>
           <a:ln/>
         </p:spPr>
+        <p:txBody>
+          <a:bodyPr/>
+          <a:p/>
+        </p:txBody>
       </p:sp>
       <p:sp>
         <p:nvSpPr>
@@ -12783,6 +13628,10 @@
           </a:solidFill>
           <a:ln/>
         </p:spPr>
+        <p:txBody>
+          <a:bodyPr/>
+          <a:p/>
+        </p:txBody>
       </p:sp>
       <p:sp>
         <p:nvSpPr>
@@ -12803,6 +13652,10 @@
           </a:solidFill>
           <a:ln/>
         </p:spPr>
+        <p:txBody>
+          <a:bodyPr/>
+          <a:p/>
+        </p:txBody>
       </p:sp>
       <p:sp>
         <p:nvSpPr>
@@ -12823,6 +13676,10 @@
           </a:solidFill>
           <a:ln/>
         </p:spPr>
+        <p:txBody>
+          <a:bodyPr/>
+          <a:p/>
+        </p:txBody>
       </p:sp>
       <p:sp>
         <p:nvSpPr>
@@ -12843,6 +13700,10 @@
           </a:solidFill>
           <a:ln/>
         </p:spPr>
+        <p:txBody>
+          <a:bodyPr/>
+          <a:p/>
+        </p:txBody>
       </p:sp>
       <p:sp>
         <p:nvSpPr>
@@ -13093,7 +13954,7 @@
                 <a:ea typeface="IBM Plex Mono" pitchFamily="34" charset="-122"/>
                 <a:cs typeface="IBM Plex Mono" pitchFamily="34" charset="-120"/>
               </a:rPr>
-              <a:t>03 / 15</a:t>
+              <a:t>03 / 16</a:t>
             </a:r>
             <a:endParaRPr lang="en-US" sz="1425" dirty="0"/>
           </a:p>
@@ -13240,6 +14101,10 @@
             <a:prstDash val="solid"/>
           </a:ln>
         </p:spPr>
+        <p:txBody>
+          <a:bodyPr/>
+          <a:p/>
+        </p:txBody>
       </p:sp>
       <p:sp>
         <p:nvSpPr>
@@ -13391,6 +14256,10 @@
             <a:prstDash val="solid"/>
           </a:ln>
         </p:spPr>
+        <p:txBody>
+          <a:bodyPr/>
+          <a:p/>
+        </p:txBody>
       </p:sp>
       <p:sp>
         <p:nvSpPr>
@@ -13542,6 +14411,10 @@
             <a:prstDash val="solid"/>
           </a:ln>
         </p:spPr>
+        <p:txBody>
+          <a:bodyPr/>
+          <a:p/>
+        </p:txBody>
       </p:sp>
       <p:sp>
         <p:nvSpPr>
@@ -13693,6 +14566,10 @@
             <a:prstDash val="solid"/>
           </a:ln>
         </p:spPr>
+        <p:txBody>
+          <a:bodyPr/>
+          <a:p/>
+        </p:txBody>
       </p:sp>
       <p:sp>
         <p:nvSpPr>
@@ -14060,7 +14937,7 @@
                 <a:ea typeface="IBM Plex Mono" pitchFamily="34" charset="-122"/>
                 <a:cs typeface="IBM Plex Mono" pitchFamily="34" charset="-120"/>
               </a:rPr>
-              <a:t>04 / 15</a:t>
+              <a:t>04 / 16</a:t>
             </a:r>
             <a:endParaRPr lang="en-US" sz="1425" dirty="0"/>
           </a:p>
@@ -14191,8 +15068,8 @@
         </p:nvSpPr>
         <p:spPr>
           <a:xfrm>
-            <a:off x="952385" y="3310522"/>
-            <a:ext cx="6927274" cy="2876990"/>
+            <a:off x="952385" y="3209544"/>
+            <a:ext cx="5138928" cy="4206240"/>
           </a:xfrm>
           <a:prstGeom prst="rect">
             <a:avLst/>
@@ -14202,6 +15079,10 @@
           </a:solidFill>
           <a:ln/>
         </p:spPr>
+        <p:txBody>
+          <a:bodyPr/>
+          <a:p/>
+        </p:txBody>
       </p:sp>
       <p:sp>
         <p:nvSpPr>
@@ -14211,8 +15092,8 @@
         </p:nvSpPr>
         <p:spPr>
           <a:xfrm>
-            <a:off x="952385" y="6178816"/>
-            <a:ext cx="6927274" cy="9525"/>
+            <a:off x="952385" y="7406640"/>
+            <a:ext cx="5138928" cy="9525"/>
           </a:xfrm>
           <a:prstGeom prst="rect">
             <a:avLst/>
@@ -14222,6 +15103,10 @@
           </a:solidFill>
           <a:ln/>
         </p:spPr>
+        <p:txBody>
+          <a:bodyPr/>
+          <a:p/>
+        </p:txBody>
       </p:sp>
       <p:sp>
         <p:nvSpPr>
@@ -14231,8 +15116,8 @@
         </p:nvSpPr>
         <p:spPr>
           <a:xfrm>
-            <a:off x="952385" y="3310522"/>
-            <a:ext cx="6927274" cy="52171"/>
+            <a:off x="952385" y="3209544"/>
+            <a:ext cx="5138928" cy="52171"/>
           </a:xfrm>
           <a:prstGeom prst="rect">
             <a:avLst/>
@@ -14242,6 +15127,10 @@
           </a:solidFill>
           <a:ln/>
         </p:spPr>
+        <p:txBody>
+          <a:bodyPr/>
+          <a:p/>
+        </p:txBody>
       </p:sp>
       <p:sp>
         <p:nvSpPr>
@@ -14251,8 +15140,8 @@
         </p:nvSpPr>
         <p:spPr>
           <a:xfrm>
-            <a:off x="952385" y="3310522"/>
-            <a:ext cx="9525" cy="2876990"/>
+            <a:off x="952385" y="3209544"/>
+            <a:ext cx="9525" cy="4206240"/>
           </a:xfrm>
           <a:prstGeom prst="rect">
             <a:avLst/>
@@ -14262,6 +15151,10 @@
           </a:solidFill>
           <a:ln/>
         </p:spPr>
+        <p:txBody>
+          <a:bodyPr/>
+          <a:p/>
+        </p:txBody>
       </p:sp>
       <p:sp>
         <p:nvSpPr>
@@ -14271,8 +15164,8 @@
         </p:nvSpPr>
         <p:spPr>
           <a:xfrm>
-            <a:off x="7870963" y="3310522"/>
-            <a:ext cx="9525" cy="2876990"/>
+            <a:off x="6080760" y="3209544"/>
+            <a:ext cx="9525" cy="4206240"/>
           </a:xfrm>
           <a:prstGeom prst="rect">
             <a:avLst/>
@@ -14282,6 +15175,10 @@
           </a:solidFill>
           <a:ln/>
         </p:spPr>
+        <p:txBody>
+          <a:bodyPr/>
+          <a:p/>
+        </p:txBody>
       </p:sp>
       <p:sp>
         <p:nvSpPr>
@@ -14291,8 +15188,8 @@
         </p:nvSpPr>
         <p:spPr>
           <a:xfrm>
-            <a:off x="1456293" y="3781687"/>
-            <a:ext cx="6511404" cy="316343"/>
+            <a:off x="1456293" y="3675887"/>
+            <a:ext cx="4663440" cy="316343"/>
           </a:xfrm>
           <a:prstGeom prst="rect">
             <a:avLst/>
@@ -14332,8 +15229,8 @@
         </p:nvSpPr>
         <p:spPr>
           <a:xfrm>
-            <a:off x="1456293" y="4231251"/>
-            <a:ext cx="6511404" cy="685749"/>
+            <a:off x="1456293" y="4343400"/>
+            <a:ext cx="4663440" cy="685749"/>
           </a:xfrm>
           <a:prstGeom prst="rect">
             <a:avLst/>
@@ -14376,8 +15273,8 @@
         </p:nvSpPr>
         <p:spPr>
           <a:xfrm>
-            <a:off x="1456293" y="5069377"/>
-            <a:ext cx="6097042" cy="728545"/>
+            <a:off x="1456293" y="5349240"/>
+            <a:ext cx="4343400" cy="1371600"/>
           </a:xfrm>
           <a:prstGeom prst="rect">
             <a:avLst/>
@@ -14398,7 +15295,7 @@
               <a:buNone/>
             </a:pPr>
             <a:r>
-              <a:rPr lang="en-US" sz="1875" dirty="0">
+              <a:rPr lang="en-US" sz="1750" dirty="0">
                 <a:solidFill>
                   <a:srgbClr val="6B655C"/>
                 </a:solidFill>
@@ -14420,7 +15317,7 @@
         </p:nvSpPr>
         <p:spPr>
           <a:xfrm>
-            <a:off x="7841558" y="4362085"/>
+            <a:off x="6144768" y="4892040"/>
             <a:ext cx="1219197" cy="811963"/>
           </a:xfrm>
           <a:prstGeom prst="rect">
@@ -14461,8 +15358,8 @@
         </p:nvSpPr>
         <p:spPr>
           <a:xfrm>
-            <a:off x="9022656" y="3207811"/>
-            <a:ext cx="8312919" cy="3082547"/>
+            <a:off x="7360920" y="3207811"/>
+            <a:ext cx="5074920" cy="4206240"/>
           </a:xfrm>
           <a:prstGeom prst="rect">
             <a:avLst/>
@@ -14472,6 +15369,10 @@
           </a:solidFill>
           <a:ln/>
         </p:spPr>
+        <p:txBody>
+          <a:bodyPr/>
+          <a:p/>
+        </p:txBody>
       </p:sp>
       <p:sp>
         <p:nvSpPr>
@@ -14481,8 +15382,8 @@
         </p:nvSpPr>
         <p:spPr>
           <a:xfrm>
-            <a:off x="9022656" y="6281663"/>
-            <a:ext cx="8312919" cy="9525"/>
+            <a:off x="7360920" y="7406640"/>
+            <a:ext cx="5074920" cy="9525"/>
           </a:xfrm>
           <a:prstGeom prst="rect">
             <a:avLst/>
@@ -14492,6 +15393,10 @@
           </a:solidFill>
           <a:ln/>
         </p:spPr>
+        <p:txBody>
+          <a:bodyPr/>
+          <a:p/>
+        </p:txBody>
       </p:sp>
       <p:sp>
         <p:nvSpPr>
@@ -14501,8 +15406,8 @@
         </p:nvSpPr>
         <p:spPr>
           <a:xfrm>
-            <a:off x="9022656" y="3207811"/>
-            <a:ext cx="8312919" cy="52171"/>
+            <a:off x="7360920" y="3207811"/>
+            <a:ext cx="5074920" cy="52171"/>
           </a:xfrm>
           <a:prstGeom prst="rect">
             <a:avLst/>
@@ -14512,6 +15417,10 @@
           </a:solidFill>
           <a:ln/>
         </p:spPr>
+        <p:txBody>
+          <a:bodyPr/>
+          <a:p/>
+        </p:txBody>
       </p:sp>
       <p:sp>
         <p:nvSpPr>
@@ -14521,8 +15430,8 @@
         </p:nvSpPr>
         <p:spPr>
           <a:xfrm>
-            <a:off x="9022656" y="3207811"/>
-            <a:ext cx="9525" cy="3082547"/>
+            <a:off x="7360920" y="3207811"/>
+            <a:ext cx="9525" cy="4206240"/>
           </a:xfrm>
           <a:prstGeom prst="rect">
             <a:avLst/>
@@ -14532,6 +15441,10 @@
           </a:solidFill>
           <a:ln/>
         </p:spPr>
+        <p:txBody>
+          <a:bodyPr/>
+          <a:p/>
+        </p:txBody>
       </p:sp>
       <p:sp>
         <p:nvSpPr>
@@ -14541,8 +15454,8 @@
         </p:nvSpPr>
         <p:spPr>
           <a:xfrm>
-            <a:off x="17326879" y="3207811"/>
-            <a:ext cx="9525" cy="3082547"/>
+            <a:off x="12426696" y="3207811"/>
+            <a:ext cx="9525" cy="4206240"/>
           </a:xfrm>
           <a:prstGeom prst="rect">
             <a:avLst/>
@@ -14552,6 +15465,10 @@
           </a:solidFill>
           <a:ln/>
         </p:spPr>
+        <p:txBody>
+          <a:bodyPr/>
+          <a:p/>
+        </p:txBody>
       </p:sp>
       <p:sp>
         <p:nvSpPr>
@@ -14561,8 +15478,8 @@
         </p:nvSpPr>
         <p:spPr>
           <a:xfrm>
-            <a:off x="9526564" y="3678976"/>
-            <a:ext cx="8035613" cy="316343"/>
+            <a:off x="7818120" y="3678976"/>
+            <a:ext cx="4572000" cy="316343"/>
           </a:xfrm>
           <a:prstGeom prst="rect">
             <a:avLst/>
@@ -14602,8 +15519,8 @@
         </p:nvSpPr>
         <p:spPr>
           <a:xfrm>
-            <a:off x="9526564" y="4185737"/>
-            <a:ext cx="2112134" cy="377209"/>
+            <a:off x="7818120" y="4370832"/>
+            <a:ext cx="2377440" cy="377209"/>
           </a:xfrm>
           <a:prstGeom prst="rect">
             <a:avLst/>
@@ -14643,8 +15560,8 @@
         </p:nvSpPr>
         <p:spPr>
           <a:xfrm>
-            <a:off x="11751421" y="4194432"/>
-            <a:ext cx="5588270" cy="377209"/>
+            <a:off x="10195560" y="4379976"/>
+            <a:ext cx="2194560" cy="377209"/>
           </a:xfrm>
           <a:prstGeom prst="rect">
             <a:avLst/>
@@ -14684,8 +15601,8 @@
         </p:nvSpPr>
         <p:spPr>
           <a:xfrm>
-            <a:off x="9526564" y="4628780"/>
-            <a:ext cx="2112134" cy="377209"/>
+            <a:off x="7818120" y="5029200"/>
+            <a:ext cx="2377440" cy="377209"/>
           </a:xfrm>
           <a:prstGeom prst="rect">
             <a:avLst/>
@@ -14725,8 +15642,8 @@
         </p:nvSpPr>
         <p:spPr>
           <a:xfrm>
-            <a:off x="11751421" y="4637475"/>
-            <a:ext cx="5588270" cy="377209"/>
+            <a:off x="10195560" y="5038344"/>
+            <a:ext cx="2194560" cy="377209"/>
           </a:xfrm>
           <a:prstGeom prst="rect">
             <a:avLst/>
@@ -14766,8 +15683,8 @@
         </p:nvSpPr>
         <p:spPr>
           <a:xfrm>
-            <a:off x="9526564" y="5071822"/>
-            <a:ext cx="2112134" cy="377209"/>
+            <a:off x="7818120" y="5687568"/>
+            <a:ext cx="2377440" cy="377209"/>
           </a:xfrm>
           <a:prstGeom prst="rect">
             <a:avLst/>
@@ -14807,8 +15724,8 @@
         </p:nvSpPr>
         <p:spPr>
           <a:xfrm>
-            <a:off x="11751421" y="5080517"/>
-            <a:ext cx="5588270" cy="377209"/>
+            <a:off x="10195560" y="5696712"/>
+            <a:ext cx="2194560" cy="377209"/>
           </a:xfrm>
           <a:prstGeom prst="rect">
             <a:avLst/>
@@ -14848,8 +15765,8 @@
         </p:nvSpPr>
         <p:spPr>
           <a:xfrm>
-            <a:off x="9526564" y="5514864"/>
-            <a:ext cx="2112134" cy="377209"/>
+            <a:off x="7818120" y="6345936"/>
+            <a:ext cx="2377440" cy="377209"/>
           </a:xfrm>
           <a:prstGeom prst="rect">
             <a:avLst/>
@@ -14889,8 +15806,8 @@
         </p:nvSpPr>
         <p:spPr>
           <a:xfrm>
-            <a:off x="11751421" y="5523559"/>
-            <a:ext cx="5588270" cy="377209"/>
+            <a:off x="10195560" y="6355080"/>
+            <a:ext cx="2194560" cy="377209"/>
           </a:xfrm>
           <a:prstGeom prst="rect">
             <a:avLst/>
@@ -14930,8 +15847,8 @@
         </p:nvSpPr>
         <p:spPr>
           <a:xfrm>
-            <a:off x="952385" y="6957027"/>
-            <a:ext cx="5257815" cy="863803"/>
+            <a:off x="950976" y="8275320"/>
+            <a:ext cx="5257800" cy="863803"/>
           </a:xfrm>
           <a:prstGeom prst="rect">
             <a:avLst/>
@@ -14941,6 +15858,10 @@
           </a:solidFill>
           <a:ln/>
         </p:spPr>
+        <p:txBody>
+          <a:bodyPr/>
+          <a:p/>
+        </p:txBody>
       </p:sp>
       <p:sp>
         <p:nvSpPr>
@@ -14950,8 +15871,8 @@
         </p:nvSpPr>
         <p:spPr>
           <a:xfrm>
-            <a:off x="1295285" y="7223727"/>
-            <a:ext cx="4729750" cy="368503"/>
+            <a:off x="1298448" y="8540496"/>
+            <a:ext cx="4727448" cy="368503"/>
           </a:xfrm>
           <a:prstGeom prst="rect">
             <a:avLst/>
@@ -15008,8 +15929,8 @@
         </p:nvSpPr>
         <p:spPr>
           <a:xfrm>
-            <a:off x="6514936" y="6957027"/>
-            <a:ext cx="5257951" cy="863803"/>
+            <a:off x="6515100" y="8275320"/>
+            <a:ext cx="5257800" cy="863803"/>
           </a:xfrm>
           <a:prstGeom prst="rect">
             <a:avLst/>
@@ -15019,6 +15940,10 @@
           </a:solidFill>
           <a:ln/>
         </p:spPr>
+        <p:txBody>
+          <a:bodyPr/>
+          <a:p/>
+        </p:txBody>
       </p:sp>
       <p:sp>
         <p:nvSpPr>
@@ -15028,8 +15953,8 @@
         </p:nvSpPr>
         <p:spPr>
           <a:xfrm>
-            <a:off x="6857836" y="7223727"/>
-            <a:ext cx="4729890" cy="368503"/>
+            <a:off x="6862572" y="8540496"/>
+            <a:ext cx="4727448" cy="368503"/>
           </a:xfrm>
           <a:prstGeom prst="rect">
             <a:avLst/>
@@ -15086,8 +16011,8 @@
         </p:nvSpPr>
         <p:spPr>
           <a:xfrm>
-            <a:off x="12077623" y="6957027"/>
-            <a:ext cx="5257951" cy="863803"/>
+            <a:off x="12079224" y="8275320"/>
+            <a:ext cx="5257800" cy="863803"/>
           </a:xfrm>
           <a:prstGeom prst="rect">
             <a:avLst/>
@@ -15097,6 +16022,10 @@
           </a:solidFill>
           <a:ln/>
         </p:spPr>
+        <p:txBody>
+          <a:bodyPr/>
+          <a:p/>
+        </p:txBody>
       </p:sp>
       <p:sp>
         <p:nvSpPr>
@@ -15106,8 +16035,8 @@
         </p:nvSpPr>
         <p:spPr>
           <a:xfrm>
-            <a:off x="12420523" y="7223727"/>
-            <a:ext cx="4729890" cy="368503"/>
+            <a:off x="12426696" y="8540496"/>
+            <a:ext cx="4727448" cy="368503"/>
           </a:xfrm>
           <a:prstGeom prst="rect">
             <a:avLst/>
@@ -15232,9 +16161,74 @@
                 <a:ea typeface="IBM Plex Mono" pitchFamily="34" charset="-122"/>
                 <a:cs typeface="IBM Plex Mono" pitchFamily="34" charset="-120"/>
               </a:rPr>
-              <a:t>05 / 15</a:t>
+              <a:t>05 / 16</a:t>
             </a:r>
             <a:endParaRPr lang="en-US" sz="1425" dirty="0"/>
+          </a:p>
+        </p:txBody>
+      </p:sp>
+      <p:pic>
+        <p:nvPicPr>
+          <p:cNvPr id="35" name="Picture 34" descr="schema_ER_mermaidpng.png"/>
+          <p:cNvPicPr>
+            <a:picLocks noChangeAspect="1"/>
+          </p:cNvPicPr>
+          <p:nvPr/>
+        </p:nvPicPr>
+        <p:blipFill>
+          <a:blip r:embed="rId3"/>
+          <a:stretch>
+            <a:fillRect/>
+          </a:stretch>
+        </p:blipFill>
+        <p:spPr>
+          <a:xfrm>
+            <a:off x="12710160" y="3209544"/>
+            <a:ext cx="4626864" cy="4626864"/>
+          </a:xfrm>
+          <a:prstGeom prst="rect">
+            <a:avLst/>
+          </a:prstGeom>
+        </p:spPr>
+      </p:pic>
+      <p:sp>
+        <p:nvSpPr>
+          <p:cNvPr id="1000" name="Text 16"/>
+          <p:cNvSpPr/>
+          <p:nvPr/>
+        </p:nvSpPr>
+        <p:spPr>
+          <a:xfrm>
+            <a:off x="12710160" y="7882127"/>
+            <a:ext cx="4626864" cy="274320"/>
+          </a:xfrm>
+          <a:prstGeom prst="rect">
+            <a:avLst/>
+          </a:prstGeom>
+          <a:noFill/>
+          <a:ln/>
+        </p:spPr>
+        <p:txBody>
+          <a:bodyPr wrap="square" lIns="25400" tIns="25400" rIns="25400" bIns="25400" rtlCol="0" anchor="t">
+            <a:normAutofit/>
+          </a:bodyPr>
+          <a:lstStyle/>
+          <a:p>
+            <a:pPr algn="l" indent="0" marL="0">
+              <a:buNone/>
+            </a:pPr>
+            <a:r>
+              <a:rPr lang="en-US" sz="1250" spc="198" kern="0" dirty="0">
+                <a:solidFill>
+                  <a:srgbClr val="9A938A"/>
+                </a:solidFill>
+                <a:latin typeface="IBM Plex Mono" pitchFamily="34" charset="0"/>
+                <a:ea typeface="IBM Plex Mono" pitchFamily="34" charset="-122"/>
+                <a:cs typeface="IBM Plex Mono" pitchFamily="34" charset="-120"/>
+              </a:rPr>
+              <a:t>Conceptual ER — shared by both designs</a:t>
+            </a:r>
+            <a:endParaRPr lang="en-US" sz="1650" dirty="0"/>
           </a:p>
         </p:txBody>
       </p:sp>
@@ -15379,6 +16373,10 @@
             <a:prstDash val="solid"/>
           </a:ln>
         </p:spPr>
+        <p:txBody>
+          <a:bodyPr/>
+          <a:p/>
+        </p:txBody>
       </p:sp>
       <p:sp>
         <p:nvSpPr>
@@ -15486,6 +16484,10 @@
             <a:prstDash val="solid"/>
           </a:ln>
         </p:spPr>
+        <p:txBody>
+          <a:bodyPr/>
+          <a:p/>
+        </p:txBody>
       </p:sp>
       <p:sp>
         <p:nvSpPr>
@@ -15593,6 +16595,10 @@
             <a:prstDash val="solid"/>
           </a:ln>
         </p:spPr>
+        <p:txBody>
+          <a:bodyPr/>
+          <a:p/>
+        </p:txBody>
       </p:sp>
       <p:sp>
         <p:nvSpPr>
@@ -15700,6 +16706,10 @@
             <a:prstDash val="solid"/>
           </a:ln>
         </p:spPr>
+        <p:txBody>
+          <a:bodyPr/>
+          <a:p/>
+        </p:txBody>
       </p:sp>
       <p:pic>
         <p:nvPicPr>
@@ -15841,7 +16851,7 @@
                 <a:ea typeface="IBM Plex Mono" pitchFamily="34" charset="-122"/>
                 <a:cs typeface="IBM Plex Mono" pitchFamily="34" charset="-120"/>
               </a:rPr>
-              <a:t>06 / 15</a:t>
+              <a:t>06 / 16</a:t>
             </a:r>
             <a:endParaRPr lang="en-US" sz="1425" dirty="0"/>
           </a:p>
@@ -15988,6 +16998,10 @@
             <a:prstDash val="solid"/>
           </a:ln>
         </p:spPr>
+        <p:txBody>
+          <a:bodyPr/>
+          <a:p/>
+        </p:txBody>
       </p:sp>
       <p:sp>
         <p:nvSpPr>
@@ -16180,6 +17194,10 @@
             <a:prstDash val="solid"/>
           </a:ln>
         </p:spPr>
+        <p:txBody>
+          <a:bodyPr/>
+          <a:p/>
+        </p:txBody>
       </p:sp>
       <p:sp>
         <p:nvSpPr>
@@ -16372,6 +17390,10 @@
             <a:prstDash val="solid"/>
           </a:ln>
         </p:spPr>
+        <p:txBody>
+          <a:bodyPr/>
+          <a:p/>
+        </p:txBody>
       </p:sp>
       <p:sp>
         <p:nvSpPr>
@@ -16559,6 +17581,10 @@
           </a:solidFill>
           <a:ln/>
         </p:spPr>
+        <p:txBody>
+          <a:bodyPr/>
+          <a:p/>
+        </p:txBody>
       </p:sp>
       <p:sp>
         <p:nvSpPr>
@@ -16579,6 +17605,10 @@
           </a:solidFill>
           <a:ln/>
         </p:spPr>
+        <p:txBody>
+          <a:bodyPr/>
+          <a:p/>
+        </p:txBody>
       </p:sp>
       <p:sp>
         <p:nvSpPr>
@@ -16599,6 +17629,10 @@
           </a:solidFill>
           <a:ln/>
         </p:spPr>
+        <p:txBody>
+          <a:bodyPr/>
+          <a:p/>
+        </p:txBody>
       </p:sp>
       <p:sp>
         <p:nvSpPr>
@@ -16619,6 +17653,10 @@
           </a:solidFill>
           <a:ln/>
         </p:spPr>
+        <p:txBody>
+          <a:bodyPr/>
+          <a:p/>
+        </p:txBody>
       </p:sp>
       <p:sp>
         <p:nvSpPr>
@@ -16639,6 +17677,10 @@
           </a:solidFill>
           <a:ln/>
         </p:spPr>
+        <p:txBody>
+          <a:bodyPr/>
+          <a:p/>
+        </p:txBody>
       </p:sp>
       <p:sp>
         <p:nvSpPr>
@@ -16826,6 +17868,10 @@
           </a:solidFill>
           <a:ln/>
         </p:spPr>
+        <p:txBody>
+          <a:bodyPr/>
+          <a:p/>
+        </p:txBody>
       </p:sp>
       <p:sp>
         <p:nvSpPr>
@@ -16846,6 +17892,10 @@
           </a:solidFill>
           <a:ln/>
         </p:spPr>
+        <p:txBody>
+          <a:bodyPr/>
+          <a:p/>
+        </p:txBody>
       </p:sp>
       <p:sp>
         <p:nvSpPr>
@@ -16866,6 +17916,10 @@
           </a:solidFill>
           <a:ln/>
         </p:spPr>
+        <p:txBody>
+          <a:bodyPr/>
+          <a:p/>
+        </p:txBody>
       </p:sp>
       <p:sp>
         <p:nvSpPr>
@@ -16886,6 +17940,10 @@
           </a:solidFill>
           <a:ln/>
         </p:spPr>
+        <p:txBody>
+          <a:bodyPr/>
+          <a:p/>
+        </p:txBody>
       </p:sp>
       <p:sp>
         <p:nvSpPr>
@@ -16906,6 +17964,10 @@
           </a:solidFill>
           <a:ln/>
         </p:spPr>
+        <p:txBody>
+          <a:bodyPr/>
+          <a:p/>
+        </p:txBody>
       </p:sp>
       <p:sp>
         <p:nvSpPr>
@@ -17052,6 +18114,10 @@
           </a:solidFill>
           <a:ln/>
         </p:spPr>
+        <p:txBody>
+          <a:bodyPr/>
+          <a:p/>
+        </p:txBody>
       </p:sp>
       <p:sp>
         <p:nvSpPr>
@@ -17154,6 +18220,10 @@
           </a:solidFill>
           <a:ln/>
         </p:spPr>
+        <p:txBody>
+          <a:bodyPr/>
+          <a:p/>
+        </p:txBody>
       </p:sp>
       <p:sp>
         <p:nvSpPr>
@@ -17256,6 +18326,10 @@
           </a:solidFill>
           <a:ln/>
         </p:spPr>
+        <p:txBody>
+          <a:bodyPr/>
+          <a:p/>
+        </p:txBody>
       </p:sp>
       <p:sp>
         <p:nvSpPr>
@@ -17415,7 +18489,7 @@
                 <a:ea typeface="IBM Plex Mono" pitchFamily="34" charset="-122"/>
                 <a:cs typeface="IBM Plex Mono" pitchFamily="34" charset="-120"/>
               </a:rPr>
-              <a:t>07 / 15</a:t>
+              <a:t>07 / 16</a:t>
             </a:r>
             <a:endParaRPr lang="en-US" sz="1425" dirty="0"/>
           </a:p>
@@ -17562,6 +18636,10 @@
             <a:prstDash val="solid"/>
           </a:ln>
         </p:spPr>
+        <p:txBody>
+          <a:bodyPr/>
+          <a:p/>
+        </p:txBody>
       </p:sp>
       <p:sp>
         <p:nvSpPr>
@@ -17740,6 +18818,10 @@
             <a:prstDash val="solid"/>
           </a:ln>
         </p:spPr>
+        <p:txBody>
+          <a:bodyPr/>
+          <a:p/>
+        </p:txBody>
       </p:sp>
       <p:sp>
         <p:nvSpPr>
@@ -17801,6 +18883,10 @@
           </a:solidFill>
           <a:ln/>
         </p:spPr>
+        <p:txBody>
+          <a:bodyPr/>
+          <a:p/>
+        </p:txBody>
       </p:sp>
       <p:sp>
         <p:nvSpPr>
@@ -17906,6 +18992,10 @@
           </a:solidFill>
           <a:ln/>
         </p:spPr>
+        <p:txBody>
+          <a:bodyPr/>
+          <a:p/>
+        </p:txBody>
       </p:sp>
       <p:sp>
         <p:nvSpPr>
@@ -18011,6 +19101,10 @@
           </a:solidFill>
           <a:ln/>
         </p:spPr>
+        <p:txBody>
+          <a:bodyPr/>
+          <a:p/>
+        </p:txBody>
       </p:sp>
       <p:sp>
         <p:nvSpPr>
@@ -18116,6 +19210,10 @@
           </a:solidFill>
           <a:ln/>
         </p:spPr>
+        <p:txBody>
+          <a:bodyPr/>
+          <a:p/>
+        </p:txBody>
       </p:sp>
       <p:sp>
         <p:nvSpPr>
@@ -18185,6 +19283,10 @@
             <a:prstDash val="solid"/>
           </a:ln>
         </p:spPr>
+        <p:txBody>
+          <a:bodyPr/>
+          <a:p/>
+        </p:txBody>
       </p:sp>
       <p:sp>
         <p:nvSpPr>
@@ -18307,6 +19409,10 @@
           </a:solidFill>
           <a:ln/>
         </p:spPr>
+        <p:txBody>
+          <a:bodyPr/>
+          <a:p/>
+        </p:txBody>
       </p:sp>
       <p:sp>
         <p:nvSpPr>
@@ -18327,6 +19433,10 @@
           </a:solidFill>
           <a:ln/>
         </p:spPr>
+        <p:txBody>
+          <a:bodyPr/>
+          <a:p/>
+        </p:txBody>
       </p:sp>
       <p:sp>
         <p:nvSpPr>
@@ -18347,6 +19457,10 @@
           </a:solidFill>
           <a:ln/>
         </p:spPr>
+        <p:txBody>
+          <a:bodyPr/>
+          <a:p/>
+        </p:txBody>
       </p:sp>
       <p:sp>
         <p:nvSpPr>
@@ -18367,6 +19481,10 @@
           </a:solidFill>
           <a:ln/>
         </p:spPr>
+        <p:txBody>
+          <a:bodyPr/>
+          <a:p/>
+        </p:txBody>
       </p:sp>
       <p:sp>
         <p:nvSpPr>
@@ -18387,6 +19505,10 @@
           </a:solidFill>
           <a:ln/>
         </p:spPr>
+        <p:txBody>
+          <a:bodyPr/>
+          <a:p/>
+        </p:txBody>
       </p:sp>
       <p:sp>
         <p:nvSpPr>
@@ -18651,7 +19773,7 @@
                 <a:ea typeface="IBM Plex Mono" pitchFamily="34" charset="-122"/>
                 <a:cs typeface="IBM Plex Mono" pitchFamily="34" charset="-120"/>
               </a:rPr>
-              <a:t>08 / 15</a:t>
+              <a:t>08 / 16</a:t>
             </a:r>
             <a:endParaRPr lang="en-US" sz="1425" dirty="0"/>
           </a:p>
@@ -18798,6 +19920,10 @@
             <a:prstDash val="solid"/>
           </a:ln>
         </p:spPr>
+        <p:txBody>
+          <a:bodyPr/>
+          <a:p/>
+        </p:txBody>
       </p:sp>
       <p:sp>
         <p:nvSpPr>
@@ -18818,6 +19944,10 @@
           </a:solidFill>
           <a:ln/>
         </p:spPr>
+        <p:txBody>
+          <a:bodyPr/>
+          <a:p/>
+        </p:txBody>
       </p:sp>
       <p:sp>
         <p:nvSpPr>
@@ -18961,6 +20091,10 @@
           </a:solidFill>
           <a:ln/>
         </p:spPr>
+        <p:txBody>
+          <a:bodyPr/>
+          <a:p/>
+        </p:txBody>
       </p:sp>
       <p:sp>
         <p:nvSpPr>
@@ -19027,6 +20161,10 @@
             <a:prstDash val="solid"/>
           </a:ln>
         </p:spPr>
+        <p:txBody>
+          <a:bodyPr/>
+          <a:p/>
+        </p:txBody>
       </p:sp>
       <p:sp>
         <p:nvSpPr>
@@ -19047,6 +20185,10 @@
           </a:solidFill>
           <a:ln/>
         </p:spPr>
+        <p:txBody>
+          <a:bodyPr/>
+          <a:p/>
+        </p:txBody>
       </p:sp>
       <p:sp>
         <p:nvSpPr>
@@ -19190,6 +20332,10 @@
           </a:solidFill>
           <a:ln/>
         </p:spPr>
+        <p:txBody>
+          <a:bodyPr/>
+          <a:p/>
+        </p:txBody>
       </p:sp>
       <p:sp>
         <p:nvSpPr>
@@ -19256,6 +20402,10 @@
             <a:prstDash val="solid"/>
           </a:ln>
         </p:spPr>
+        <p:txBody>
+          <a:bodyPr/>
+          <a:p/>
+        </p:txBody>
       </p:sp>
       <p:sp>
         <p:nvSpPr>
@@ -19276,6 +20426,10 @@
           </a:solidFill>
           <a:ln/>
         </p:spPr>
+        <p:txBody>
+          <a:bodyPr/>
+          <a:p/>
+        </p:txBody>
       </p:sp>
       <p:sp>
         <p:nvSpPr>
@@ -19419,6 +20573,10 @@
           </a:solidFill>
           <a:ln/>
         </p:spPr>
+        <p:txBody>
+          <a:bodyPr/>
+          <a:p/>
+        </p:txBody>
       </p:sp>
       <p:sp>
         <p:nvSpPr>
@@ -19485,6 +20643,10 @@
             <a:prstDash val="solid"/>
           </a:ln>
         </p:spPr>
+        <p:txBody>
+          <a:bodyPr/>
+          <a:p/>
+        </p:txBody>
       </p:sp>
       <p:sp>
         <p:nvSpPr>
@@ -19505,6 +20667,10 @@
           </a:solidFill>
           <a:ln/>
         </p:spPr>
+        <p:txBody>
+          <a:bodyPr/>
+          <a:p/>
+        </p:txBody>
       </p:sp>
       <p:sp>
         <p:nvSpPr>
@@ -19648,6 +20814,10 @@
           </a:solidFill>
           <a:ln/>
         </p:spPr>
+        <p:txBody>
+          <a:bodyPr/>
+          <a:p/>
+        </p:txBody>
       </p:sp>
       <p:sp>
         <p:nvSpPr>
@@ -19821,7 +20991,7 @@
                 <a:ea typeface="IBM Plex Mono" pitchFamily="34" charset="-122"/>
                 <a:cs typeface="IBM Plex Mono" pitchFamily="34" charset="-120"/>
               </a:rPr>
-              <a:t>09 / 15</a:t>
+              <a:t>09 / 16</a:t>
             </a:r>
             <a:endParaRPr lang="en-US" sz="1425" dirty="0"/>
           </a:p>

--- a/PostgreSQL_vs_Neo4j_DAngelica_Leone.pptx
+++ b/PostgreSQL_vs_Neo4j_DAngelica_Leone.pptx
@@ -25,6 +25,8 @@
     <p:sldId id="272" r:id="rId18"/>
     <p:sldId id="273" r:id="rId19"/>
     <p:sldId id="275" r:id="rId26"/>
+    <p:sldId id="276" r:id="rId27"/>
+    <p:sldId id="277" r:id="rId28"/>
   </p:sldIdLst>
   <p:notesMasterIdLst>
     <p:notesMasterId r:id="rId20"/>
@@ -1394,7 +1396,7 @@
           <a:lstStyle/>
           <a:p>
             <a:r>
-              <a:t>Two dimensions the benchmark numbers hide. Ease of use: schema-first is a feature, not friction — the FK check caught 5,632 orphan references that Neo4j would have loaded silently; and keeping the two systems side by side caught three more silent bugs. Scalability, measured: on Q07 Postgres grows 3.3x with 4x the data while Neo4j grows 1.3x — the graph edge widens; on Q09 the fixed-depth join keeps its lead at every size. Caveat: all of this is single node — index-free adjacency does not partition for free.</a:t>
+              <a:t>Two dimensions the benchmark numbers hide. Ease of use: schema-first is a feature, not friction — the FK check caught 5,653 orphan references that Neo4j would have loaded silently; and keeping the two systems side by side caught three more silent bugs. Scalability, measured: on Q07 Postgres grows 3.3x with 4x the data while Neo4j grows 1.4x — the graph edge widens; on Q09 the fixed-depth join keeps its lead at every size. Caveat: all of this is single node — index-free adjacency does not partition for free.</a:t>
             </a:r>
           </a:p>
         </p:txBody>
@@ -1553,6 +1555,146 @@
           <a:p>
             <a:r>
               <a:t>Backup for the Q&amp;A: one line per query, with the category. Use it if the professor asks what a specific query does before asking us to write it live.</a:t>
+            </a:r>
+          </a:p>
+        </p:txBody>
+      </p:sp>
+      <p:sp>
+        <p:nvSpPr>
+          <p:cNvPr id="4" name="Slide Number Placeholder 3"/>
+          <p:cNvSpPr>
+            <a:spLocks noGrp="1"/>
+          </p:cNvSpPr>
+          <p:nvPr>
+            <p:ph type="sldNum" idx="5" sz="quarter"/>
+          </p:nvPr>
+        </p:nvSpPr>
+        <p:spPr/>
+      </p:sp>
+    </p:spTree>
+  </p:cSld>
+  <p:clrMapOvr>
+    <a:masterClrMapping/>
+  </p:clrMapOvr>
+</p:notes>
+</file>
+
+<file path=ppt/notesSlides/notesSlide21.xml><?xml version="1.0" encoding="utf-8"?>
+<p:notes xmlns:a="http://schemas.openxmlformats.org/drawingml/2006/main" xmlns:p="http://schemas.openxmlformats.org/presentationml/2006/main" xmlns:r="http://schemas.openxmlformats.org/officeDocument/2006/relationships">
+  <p:cSld>
+    <p:spTree>
+      <p:nvGrpSpPr>
+        <p:cNvPr id="1" name=""/>
+        <p:cNvGrpSpPr/>
+        <p:nvPr/>
+      </p:nvGrpSpPr>
+      <p:grpSpPr>
+        <a:xfrm>
+          <a:off x="0" y="0"/>
+          <a:ext cx="0" cy="0"/>
+          <a:chOff x="0" y="0"/>
+          <a:chExt cx="0" cy="0"/>
+        </a:xfrm>
+      </p:grpSpPr>
+      <p:sp>
+        <p:nvSpPr>
+          <p:cNvPr id="2" name="Slide Image Placeholder 1"/>
+          <p:cNvSpPr>
+            <a:spLocks noGrp="1"/>
+          </p:cNvSpPr>
+          <p:nvPr>
+            <p:ph type="sldImg" idx="2"/>
+          </p:nvPr>
+        </p:nvSpPr>
+        <p:spPr/>
+      </p:sp>
+      <p:sp>
+        <p:nvSpPr>
+          <p:cNvPr id="3" name="Notes Placeholder 2"/>
+          <p:cNvSpPr>
+            <a:spLocks noGrp="1"/>
+          </p:cNvSpPr>
+          <p:nvPr>
+            <p:ph type="body" idx="3" sz="quarter"/>
+          </p:nvPr>
+        </p:nvSpPr>
+        <p:spPr/>
+        <p:txBody>
+          <a:bodyPr/>
+          <a:lstStyle/>
+          <a:p>
+            <a:r>
+              <a:t>Backup: the complete table behind the chart on slide 10. Use it when asked for a specific number, a p-value or the effect size; the CSVs are in the repository.</a:t>
+            </a:r>
+          </a:p>
+        </p:txBody>
+      </p:sp>
+      <p:sp>
+        <p:nvSpPr>
+          <p:cNvPr id="4" name="Slide Number Placeholder 3"/>
+          <p:cNvSpPr>
+            <a:spLocks noGrp="1"/>
+          </p:cNvSpPr>
+          <p:nvPr>
+            <p:ph type="sldNum" idx="5" sz="quarter"/>
+          </p:nvPr>
+        </p:nvSpPr>
+        <p:spPr/>
+      </p:sp>
+    </p:spTree>
+  </p:cSld>
+  <p:clrMapOvr>
+    <a:masterClrMapping/>
+  </p:clrMapOvr>
+</p:notes>
+</file>
+
+<file path=ppt/notesSlides/notesSlide22.xml><?xml version="1.0" encoding="utf-8"?>
+<p:notes xmlns:a="http://schemas.openxmlformats.org/drawingml/2006/main" xmlns:p="http://schemas.openxmlformats.org/presentationml/2006/main" xmlns:r="http://schemas.openxmlformats.org/officeDocument/2006/relationships">
+  <p:cSld>
+    <p:spTree>
+      <p:nvGrpSpPr>
+        <p:cNvPr id="1" name=""/>
+        <p:cNvGrpSpPr/>
+        <p:nvPr/>
+      </p:nvGrpSpPr>
+      <p:grpSpPr>
+        <a:xfrm>
+          <a:off x="0" y="0"/>
+          <a:ext cx="0" cy="0"/>
+          <a:chOff x="0" y="0"/>
+          <a:chExt cx="0" cy="0"/>
+        </a:xfrm>
+      </p:grpSpPr>
+      <p:sp>
+        <p:nvSpPr>
+          <p:cNvPr id="2" name="Slide Image Placeholder 1"/>
+          <p:cNvSpPr>
+            <a:spLocks noGrp="1"/>
+          </p:cNvSpPr>
+          <p:nvPr>
+            <p:ph type="sldImg" idx="2"/>
+          </p:nvPr>
+        </p:nvSpPr>
+        <p:spPr/>
+      </p:sp>
+      <p:sp>
+        <p:nvSpPr>
+          <p:cNvPr id="3" name="Notes Placeholder 2"/>
+          <p:cNvSpPr>
+            <a:spLocks noGrp="1"/>
+          </p:cNvSpPr>
+          <p:nvPr>
+            <p:ph type="body" idx="3" sz="quarter"/>
+          </p:nvPr>
+        </p:nvSpPr>
+        <p:spPr/>
+        <p:txBody>
+          <a:bodyPr/>
+          <a:lstStyle/>
+          <a:p>
+            <a:r>
+              <a:t>Backup for the fairness question. The view is the relational twin of the derived edge: same tuples, same cardinality, both built once at load time and indexed. Q09 and Q10 read it; Q08 does not, on either side.</a:t>
             </a:r>
           </a:p>
         </p:txBody>
@@ -2949,7 +3091,7 @@
                 <a:ea typeface="Space Grotesk" pitchFamily="34" charset="-122"/>
                 <a:cs typeface="Space Grotesk" pitchFamily="34" charset="-120"/>
               </a:rPr>
-              <a:t>Category A is a dead heat; Postgres wins the fixed-depth join, Neo4j every variable-depth traversal and every write</a:t>
+              <a:t>Category A is a dead heat across runs; Postgres wins the fixed-depth join, Neo4j every variable-depth traversal and every write</a:t>
             </a:r>
             <a:endParaRPr lang="en-US" sz="4350" dirty="0"/>
           </a:p>
@@ -3031,7 +3173,7 @@
                 <a:ea typeface="Space Grotesk" pitchFamily="34" charset="-122"/>
                 <a:cs typeface="Space Grotesk" pitchFamily="34" charset="-120"/>
               </a:rPr>
-              <a:t>Neo4j wins (9) · not significant (1)</a:t>
+              <a:t>Neo4j wins (8) · not significant (2)</a:t>
             </a:r>
             <a:endParaRPr lang="en-US" sz="1725" dirty="0"/>
           </a:p>
@@ -3072,7 +3214,7 @@
                 <a:ea typeface="IBM Plex Mono" pitchFamily="34" charset="-122"/>
                 <a:cs typeface="IBM Plex Mono" pitchFamily="34" charset="-120"/>
               </a:rPr>
-              <a:t>saturated bars = significant (11/12) · Mann-Whitney U, p &lt; 0.05, Holm-corrected · all results equivalent (multiset)</a:t>
+              <a:t>saturated bars = significant after Holm correction (10/12) · Mann-Whitney U, p &lt; 0.05 · all results equivalent (multiset)</a:t>
             </a:r>
             <a:endParaRPr lang="en-US" sz="1575" dirty="0"/>
           </a:p>
@@ -3169,7 +3311,7 @@
           <p:nvPr/>
         </p:nvPicPr>
         <p:blipFill>
-          <a:blip r:embed="rId3"/>
+          <a:blip r:embed="rId4"/>
           <a:stretch>
             <a:fillRect/>
           </a:stretch>
@@ -3295,7 +3437,7 @@
                 <a:ea typeface="Space Grotesk" pitchFamily="34" charset="-122"/>
                 <a:cs typeface="Space Grotesk" pitchFamily="34" charset="-120"/>
               </a:rPr>
-              <a:t>57×</a:t>
+              <a:t>55×</a:t>
             </a:r>
             <a:endParaRPr lang="en-US" sz="30000" dirty="0"/>
           </a:p>
@@ -3418,7 +3560,7 @@
                 <a:ea typeface="IBM Plex Mono" pitchFamily="34" charset="-122"/>
                 <a:cs typeface="IBM Plex Mono" pitchFamily="34" charset="-120"/>
               </a:rPr>
-              <a:t>671 ms</a:t>
+              <a:t>792 ms</a:t>
             </a:r>
             <a:endParaRPr lang="en-US" sz="4800" dirty="0"/>
           </a:p>
@@ -3541,7 +3683,7 @@
                 <a:ea typeface="IBM Plex Mono" pitchFamily="34" charset="-122"/>
                 <a:cs typeface="IBM Plex Mono" pitchFamily="34" charset="-120"/>
               </a:rPr>
-              <a:t>12 ms</a:t>
+              <a:t>14 ms</a:t>
             </a:r>
             <a:endParaRPr lang="en-US" sz="4800" dirty="0"/>
           </a:p>
@@ -4273,7 +4415,7 @@
                 <a:ea typeface="Space Grotesk" pitchFamily="34" charset="-122"/>
                 <a:cs typeface="Space Grotesk" pitchFamily="34" charset="-120"/>
               </a:rPr>
-              <a:t>671 → 12</a:t>
+              <a:t>792 → 14</a:t>
             </a:r>
             <a:endParaRPr lang="en-US" sz="4350" dirty="0"/>
           </a:p>
@@ -5501,7 +5643,7 @@
                 <a:ea typeface="Space Grotesk" pitchFamily="34" charset="-122"/>
                 <a:cs typeface="Space Grotesk" pitchFamily="34" charset="-120"/>
               </a:rPr>
-              <a:t>352 ms vs 78 ms (4.5×, measured through COMMIT) </a:t>
+              <a:t>436 ms vs 85 ms (5.1×, measured through COMMIT) — same CPU work, radically different change-management: schema-on-write vs schema-on-read.</a:t>
             </a:r>
             <a:pPr algn="l" indent="0" marL="0">
               <a:lnSpc>
@@ -5509,17 +5651,6 @@
               </a:lnSpc>
               <a:buNone/>
             </a:pPr>
-            <a:r>
-              <a:rPr lang="en-US" sz="1875" dirty="0">
-                <a:solidFill>
-                  <a:srgbClr val="3D4652"/>
-                </a:solidFill>
-                <a:latin typeface="Space Grotesk" pitchFamily="34" charset="0"/>
-                <a:ea typeface="Space Grotesk" pitchFamily="34" charset="-122"/>
-                <a:cs typeface="Space Grotesk" pitchFamily="34" charset="-120"/>
-              </a:rPr>
-              <a:t>— same CPU work, radically different change-management: schema-on-write vs schema-on-read.</a:t>
-            </a:r>
             <a:endParaRPr lang="en-US" sz="1875" dirty="0"/>
           </a:p>
         </p:txBody>
@@ -5902,7 +6033,7 @@
                 <a:ea typeface="Space Grotesk" pitchFamily="34" charset="-122"/>
                 <a:cs typeface="Space Grotesk" pitchFamily="34" charset="-120"/>
               </a:rPr>
-              <a:t>Two-hop teammates (Q09): same precomputed relation, B-tree joins beat the traversal 2.1× — and the gap widens with data. Light aggregations (&lt; 15 ms): a dead heat.</a:t>
+              <a:t>Two-hop teammates (Q09): same precomputed relation, B-tree joins beat the traversal 2.7× — and the gap widens with data. Light aggregations (&lt; 25 ms): a dead heat across runs.</a:t>
             </a:r>
             <a:endParaRPr lang="en-US" sz="1800" dirty="0"/>
           </a:p>
@@ -6063,7 +6194,7 @@
                 <a:ea typeface="Space Grotesk" pitchFamily="34" charset="-122"/>
                 <a:cs typeface="Space Grotesk" pitchFamily="34" charset="-120"/>
               </a:rPr>
-              <a:t>Q10: 57× with identical semantics — the CTE explores 44,251 states, SHORTEST 1 touches 4,402 db hits. Q06 (3.6×) and Q07 (1.9×) follow; Q07's edge grows with data.</a:t>
+              <a:t>Q10: 55× with identical semantics — the CTE explores 44,251 states, SHORTEST 1 touches 4,402 db hits. Q06 (2.9×) and Q07 (1.9×) follow; Q07's edge grows with data.</a:t>
             </a:r>
             <a:endParaRPr lang="en-US" sz="1800" dirty="0"/>
           </a:p>
@@ -6224,7 +6355,7 @@
                 <a:ea typeface="Space Grotesk" pitchFamily="34" charset="-122"/>
                 <a:cs typeface="Space Grotesk" pitchFamily="34" charset="-120"/>
               </a:rPr>
-              <a:t>One SET vs ALTER + UPDATE: 4.5× measured through commit. In change-heavy environments this matters more than raw milliseconds.</a:t>
+              <a:t>One SET vs ALTER + UPDATE: 5.1× measured through commit. In change-heavy environments this matters more than raw milliseconds.</a:t>
             </a:r>
             <a:endParaRPr lang="en-US" sz="1800" dirty="0"/>
           </a:p>
@@ -6427,6 +6558,656 @@
 </file>
 
 <file path=ppt/slides/slide15.xml><?xml version="1.0" encoding="utf-8"?>
+<p:sld xmlns:a="http://schemas.openxmlformats.org/drawingml/2006/main" xmlns:p="http://schemas.openxmlformats.org/presentationml/2006/main" xmlns:r="http://schemas.openxmlformats.org/officeDocument/2006/relationships">
+  <p:cSld>
+    <p:bg>
+      <p:bgPr>
+        <a:solidFill>
+          <a:srgbClr val="F7F5F1"/>
+        </a:solidFill>
+        <a:effectLst/>
+      </p:bgPr>
+    </p:bg>
+    <p:spTree>
+      <p:nvGrpSpPr>
+        <p:cNvPr id="1" name=""/>
+        <p:cNvGrpSpPr/>
+        <p:nvPr/>
+      </p:nvGrpSpPr>
+      <p:grpSpPr/>
+      <p:sp>
+        <p:nvSpPr>
+          <p:cNvPr id="1002" name="Text 0"/>
+          <p:cNvSpPr/>
+          <p:nvPr/>
+        </p:nvSpPr>
+        <p:spPr>
+          <a:xfrm>
+            <a:off x="952385" y="857146"/>
+            <a:ext cx="18021508" cy="316343"/>
+          </a:xfrm>
+          <a:prstGeom prst="rect">
+            <a:avLst/>
+          </a:prstGeom>
+          <a:noFill/>
+          <a:ln/>
+        </p:spPr>
+        <p:txBody>
+          <a:bodyPr wrap="square" lIns="25400" tIns="25400" rIns="25400" bIns="25400" rtlCol="0" anchor="t">
+            <a:normAutofit/>
+          </a:bodyPr>
+          <a:lstStyle/>
+          <a:p>
+            <a:pPr algn="l" indent="0" marL="0">
+              <a:buNone/>
+            </a:pPr>
+            <a:r>
+              <a:rPr lang="en-US" sz="1650" spc="264" kern="0" dirty="0">
+                <a:solidFill>
+                  <a:srgbClr val="33608F"/>
+                </a:solidFill>
+                <a:latin typeface="IBM Plex Mono" pitchFamily="34" charset="0"/>
+                <a:ea typeface="IBM Plex Mono" pitchFamily="34" charset="-122"/>
+                <a:cs typeface="IBM Plex Mono" pitchFamily="34" charset="-120"/>
+              </a:rPr>
+              <a:t>EASE-OF-USE &amp; SCALABILITY</a:t>
+            </a:r>
+            <a:endParaRPr lang="en-US" sz="1650" dirty="0"/>
+          </a:p>
+        </p:txBody>
+      </p:sp>
+      <p:sp>
+        <p:nvSpPr>
+          <p:cNvPr id="1003" name="Text 1"/>
+          <p:cNvSpPr/>
+          <p:nvPr/>
+        </p:nvSpPr>
+        <p:spPr>
+          <a:xfrm>
+            <a:off x="952385" y="1306710"/>
+            <a:ext cx="18021508" cy="655316"/>
+          </a:xfrm>
+          <a:prstGeom prst="rect">
+            <a:avLst/>
+          </a:prstGeom>
+          <a:noFill/>
+          <a:ln/>
+        </p:spPr>
+        <p:txBody>
+          <a:bodyPr wrap="square" lIns="25400" tIns="25400" rIns="25400" bIns="25400" rtlCol="0" anchor="t">
+            <a:normAutofit/>
+          </a:bodyPr>
+          <a:lstStyle/>
+          <a:p>
+            <a:pPr algn="l" indent="0" marL="0">
+              <a:lnSpc>
+                <a:spcPct val="108000"/>
+              </a:lnSpc>
+              <a:buNone/>
+            </a:pPr>
+            <a:r>
+              <a:rPr lang="en-US" sz="4500" b="1" spc="-67" kern="0" dirty="0">
+                <a:solidFill>
+                  <a:srgbClr val="1A2430"/>
+                </a:solidFill>
+                <a:latin typeface="Space Grotesk" pitchFamily="34" charset="0"/>
+                <a:ea typeface="Space Grotesk" pitchFamily="34" charset="-122"/>
+                <a:cs typeface="Space Grotesk" pitchFamily="34" charset="-120"/>
+              </a:rPr>
+              <a:t>Two more dimensions: ease of use and scalability</a:t>
+            </a:r>
+            <a:endParaRPr lang="en-US" sz="4500" dirty="0"/>
+          </a:p>
+        </p:txBody>
+      </p:sp>
+      <p:sp>
+        <p:nvSpPr>
+          <p:cNvPr id="1004" name="Shape 2"/>
+          <p:cNvSpPr/>
+          <p:nvPr/>
+        </p:nvSpPr>
+        <p:spPr>
+          <a:xfrm>
+            <a:off x="950976" y="2587752"/>
+            <a:ext cx="7406640" cy="5440680"/>
+          </a:xfrm>
+          <a:prstGeom prst="rect">
+            <a:avLst/>
+          </a:prstGeom>
+          <a:solidFill>
+            <a:srgbClr val="FFFFFF"/>
+          </a:solidFill>
+          <a:ln w="8695">
+            <a:solidFill>
+              <a:srgbClr val="E4DFD6"/>
+            </a:solidFill>
+            <a:prstDash val="solid"/>
+          </a:ln>
+        </p:spPr>
+        <p:txBody>
+          <a:bodyPr/>
+          <a:p/>
+        </p:txBody>
+      </p:sp>
+      <p:sp>
+        <p:nvSpPr>
+          <p:cNvPr id="1005" name="Text 3"/>
+          <p:cNvSpPr/>
+          <p:nvPr/>
+        </p:nvSpPr>
+        <p:spPr>
+          <a:xfrm>
+            <a:off x="1399032" y="3017520"/>
+            <a:ext cx="4572000" cy="758952"/>
+          </a:xfrm>
+          <a:prstGeom prst="rect">
+            <a:avLst/>
+          </a:prstGeom>
+          <a:noFill/>
+          <a:ln/>
+        </p:spPr>
+        <p:txBody>
+          <a:bodyPr wrap="square" lIns="25400" tIns="25400" rIns="25400" bIns="25400" rtlCol="0" anchor="t">
+            <a:normAutofit/>
+          </a:bodyPr>
+          <a:lstStyle/>
+          <a:p>
+            <a:pPr algn="l" indent="0" marL="0">
+              <a:lnSpc>
+                <a:spcPct val="100000"/>
+              </a:lnSpc>
+              <a:buNone/>
+            </a:pPr>
+            <a:r>
+              <a:rPr lang="en-US" sz="5700" b="1" dirty="0">
+                <a:solidFill>
+                  <a:srgbClr val="33608F"/>
+                </a:solidFill>
+                <a:latin typeface="Space Grotesk" pitchFamily="34" charset="0"/>
+                <a:ea typeface="Space Grotesk" pitchFamily="34" charset="-122"/>
+                <a:cs typeface="Space Grotesk" pitchFamily="34" charset="-120"/>
+              </a:rPr>
+              <a:t>5,653</a:t>
+            </a:r>
+            <a:endParaRPr lang="en-US" sz="5700" dirty="0"/>
+          </a:p>
+        </p:txBody>
+      </p:sp>
+      <p:sp>
+        <p:nvSpPr>
+          <p:cNvPr id="1006" name="Text 4"/>
+          <p:cNvSpPr/>
+          <p:nvPr/>
+        </p:nvSpPr>
+        <p:spPr>
+          <a:xfrm>
+            <a:off x="1399032" y="3931920"/>
+            <a:ext cx="6583680" cy="457200"/>
+          </a:xfrm>
+          <a:prstGeom prst="rect">
+            <a:avLst/>
+          </a:prstGeom>
+          <a:noFill/>
+          <a:ln/>
+        </p:spPr>
+        <p:txBody>
+          <a:bodyPr wrap="square" lIns="25400" tIns="25400" rIns="25400" bIns="25400" rtlCol="0" anchor="t">
+            <a:normAutofit/>
+          </a:bodyPr>
+          <a:lstStyle/>
+          <a:p>
+            <a:pPr algn="l" indent="0" marL="0">
+              <a:lnSpc>
+                <a:spcPct val="125000"/>
+              </a:lnSpc>
+              <a:buNone/>
+            </a:pPr>
+            <a:r>
+              <a:rPr lang="en-US" sz="2325" b="1" dirty="0">
+                <a:solidFill>
+                  <a:srgbClr val="1A2430"/>
+                </a:solidFill>
+                <a:latin typeface="Space Grotesk" pitchFamily="34" charset="0"/>
+                <a:ea typeface="Space Grotesk" pitchFamily="34" charset="-122"/>
+                <a:cs typeface="Space Grotesk" pitchFamily="34" charset="-120"/>
+              </a:rPr>
+              <a:t>Schema-first found our bugs</a:t>
+            </a:r>
+            <a:endParaRPr lang="en-US" sz="2325" dirty="0"/>
+          </a:p>
+        </p:txBody>
+      </p:sp>
+      <p:sp>
+        <p:nvSpPr>
+          <p:cNvPr id="1007" name="Text 5"/>
+          <p:cNvSpPr/>
+          <p:nvPr/>
+        </p:nvSpPr>
+        <p:spPr>
+          <a:xfrm>
+            <a:off x="1399032" y="4526280"/>
+            <a:ext cx="6629400" cy="3291840"/>
+          </a:xfrm>
+          <a:prstGeom prst="rect">
+            <a:avLst/>
+          </a:prstGeom>
+          <a:noFill/>
+          <a:ln/>
+        </p:spPr>
+        <p:txBody>
+          <a:bodyPr wrap="square" lIns="25400" tIns="25400" rIns="25400" bIns="25400" rtlCol="0" anchor="t">
+            <a:normAutofit/>
+          </a:bodyPr>
+          <a:lstStyle/>
+          <a:p>
+            <a:pPr algn="l" indent="0" marL="0">
+              <a:lnSpc>
+                <a:spcPct val="145000"/>
+              </a:lnSpc>
+              <a:spcAft>
+                <a:spcPts val="600"/>
+              </a:spcAft>
+              <a:buNone/>
+            </a:pPr>
+            <a:r>
+              <a:rPr lang="en-US" sz="1700" dirty="0">
+                <a:solidFill>
+                  <a:srgbClr val="6B655C"/>
+                </a:solidFill>
+                <a:latin typeface="Space Grotesk" pitchFamily="34" charset="0"/>
+                <a:ea typeface="Space Grotesk" pitchFamily="34" charset="-122"/>
+                <a:cs typeface="Space Grotesk" pitchFamily="34" charset="-120"/>
+              </a:rPr>
+              <a:t>· Postgres' FK check rejected 5,653 orphan player references — Neo4j would have loaded them silently.</a:t>
+            </a:r>
+            <a:endParaRPr lang="en-US" sz="1800" dirty="0"/>
+          </a:p>
+          <a:p>
+            <a:pPr algn="l" indent="0" marL="0">
+              <a:lnSpc>
+                <a:spcPct val="145000"/>
+              </a:lnSpc>
+              <a:spcAft>
+                <a:spcPts val="600"/>
+              </a:spcAft>
+              <a:buNone/>
+            </a:pPr>
+            <a:r>
+              <a:rPr lang="en-US" sz="1700" dirty="0">
+                <a:solidFill>
+                  <a:srgbClr val="6B655C"/>
+                </a:solidFill>
+                <a:latin typeface="Space Grotesk" pitchFamily="34" charset="0"/>
+                <a:ea typeface="Space Grotesk" pitchFamily="34" charset="-122"/>
+                <a:cs typeface="Space Grotesk" pitchFamily="34" charset="-120"/>
+              </a:rPr>
+              <a:t>· Running both systems side by side caught three more silent bugs: NULL semantics (Q05), path semantics (Q10), name-based grouping (Q07, Q09).</a:t>
+            </a:r>
+            <a:endParaRPr lang="en-US" sz="1800" dirty="0"/>
+          </a:p>
+          <a:p>
+            <a:pPr algn="l" indent="0" marL="0">
+              <a:lnSpc>
+                <a:spcPct val="145000"/>
+              </a:lnSpc>
+              <a:spcAft>
+                <a:spcPts val="600"/>
+              </a:spcAft>
+              <a:buNone/>
+            </a:pPr>
+            <a:r>
+              <a:rPr lang="en-US" sz="1700" dirty="0">
+                <a:solidFill>
+                  <a:srgbClr val="6B655C"/>
+                </a:solidFill>
+                <a:latin typeface="Space Grotesk" pitchFamily="34" charset="0"/>
+                <a:ea typeface="Space Grotesk" pitchFamily="34" charset="-122"/>
+                <a:cs typeface="Space Grotesk" pitchFamily="34" charset="-120"/>
+              </a:rPr>
+              <a:t>· Cypher is 2× shorter on average, 4× on the shortest path; SQL's explicit schema is the documentation.</a:t>
+            </a:r>
+            <a:endParaRPr lang="en-US" sz="1800" dirty="0"/>
+          </a:p>
+        </p:txBody>
+      </p:sp>
+      <p:sp>
+        <p:nvSpPr>
+          <p:cNvPr id="1008" name="Shape 6"/>
+          <p:cNvSpPr/>
+          <p:nvPr/>
+        </p:nvSpPr>
+        <p:spPr>
+          <a:xfrm>
+            <a:off x="8631936" y="2587752"/>
+            <a:ext cx="8705088" cy="5440680"/>
+          </a:xfrm>
+          <a:prstGeom prst="rect">
+            <a:avLst/>
+          </a:prstGeom>
+          <a:solidFill>
+            <a:srgbClr val="FFFFFF"/>
+          </a:solidFill>
+          <a:ln w="8695">
+            <a:solidFill>
+              <a:srgbClr val="E4DFD6"/>
+            </a:solidFill>
+            <a:prstDash val="solid"/>
+          </a:ln>
+        </p:spPr>
+        <p:txBody>
+          <a:bodyPr/>
+          <a:p/>
+        </p:txBody>
+      </p:sp>
+      <p:sp>
+        <p:nvSpPr>
+          <p:cNvPr id="1009" name="Text 7"/>
+          <p:cNvSpPr/>
+          <p:nvPr/>
+        </p:nvSpPr>
+        <p:spPr>
+          <a:xfrm>
+            <a:off x="9079992" y="3017520"/>
+            <a:ext cx="4572000" cy="758952"/>
+          </a:xfrm>
+          <a:prstGeom prst="rect">
+            <a:avLst/>
+          </a:prstGeom>
+          <a:noFill/>
+          <a:ln/>
+        </p:spPr>
+        <p:txBody>
+          <a:bodyPr wrap="square" lIns="25400" tIns="25400" rIns="25400" bIns="25400" rtlCol="0" anchor="t">
+            <a:normAutofit/>
+          </a:bodyPr>
+          <a:lstStyle/>
+          <a:p>
+            <a:pPr algn="l" indent="0" marL="0">
+              <a:lnSpc>
+                <a:spcPct val="100000"/>
+              </a:lnSpc>
+              <a:buNone/>
+            </a:pPr>
+            <a:r>
+              <a:rPr lang="en-US" sz="5700" b="1" dirty="0">
+                <a:solidFill>
+                  <a:srgbClr val="1E7A52"/>
+                </a:solidFill>
+                <a:latin typeface="Space Grotesk" pitchFamily="34" charset="0"/>
+                <a:ea typeface="Space Grotesk" pitchFamily="34" charset="-122"/>
+                <a:cs typeface="Space Grotesk" pitchFamily="34" charset="-120"/>
+              </a:rPr>
+              <a:t>3.3× vs 1.4×</a:t>
+            </a:r>
+            <a:endParaRPr lang="en-US" sz="5700" dirty="0"/>
+          </a:p>
+        </p:txBody>
+      </p:sp>
+      <p:sp>
+        <p:nvSpPr>
+          <p:cNvPr id="1010" name="Text 8"/>
+          <p:cNvSpPr/>
+          <p:nvPr/>
+        </p:nvSpPr>
+        <p:spPr>
+          <a:xfrm>
+            <a:off x="9079992" y="3931920"/>
+            <a:ext cx="7863840" cy="457200"/>
+          </a:xfrm>
+          <a:prstGeom prst="rect">
+            <a:avLst/>
+          </a:prstGeom>
+          <a:noFill/>
+          <a:ln/>
+        </p:spPr>
+        <p:txBody>
+          <a:bodyPr wrap="square" lIns="25400" tIns="25400" rIns="25400" bIns="25400" rtlCol="0" anchor="t">
+            <a:normAutofit/>
+          </a:bodyPr>
+          <a:lstStyle/>
+          <a:p>
+            <a:pPr algn="l" indent="0" marL="0">
+              <a:lnSpc>
+                <a:spcPct val="125000"/>
+              </a:lnSpc>
+              <a:buNone/>
+            </a:pPr>
+            <a:r>
+              <a:rPr lang="en-US" sz="2325" b="1" dirty="0">
+                <a:solidFill>
+                  <a:srgbClr val="1A2430"/>
+                </a:solidFill>
+                <a:latin typeface="Space Grotesk" pitchFamily="34" charset="0"/>
+                <a:ea typeface="Space Grotesk" pitchFamily="34" charset="-122"/>
+                <a:cs typeface="Space Grotesk" pitchFamily="34" charset="-120"/>
+              </a:rPr>
+              <a:t>How Q07 grows with 4× the data — Postgres vs Neo4j: the graph edge widens</a:t>
+            </a:r>
+            <a:endParaRPr lang="en-US" sz="2325" dirty="0"/>
+          </a:p>
+        </p:txBody>
+      </p:sp>
+      <p:sp>
+        <p:nvSpPr>
+          <p:cNvPr id="1011" name="Shape 14"/>
+          <p:cNvSpPr/>
+          <p:nvPr/>
+        </p:nvSpPr>
+        <p:spPr>
+          <a:xfrm>
+            <a:off x="952385" y="8275320"/>
+            <a:ext cx="16383190" cy="777240"/>
+          </a:xfrm>
+          <a:prstGeom prst="rect">
+            <a:avLst/>
+          </a:prstGeom>
+          <a:solidFill>
+            <a:srgbClr val="EDE9E1"/>
+          </a:solidFill>
+          <a:ln/>
+        </p:spPr>
+        <p:txBody>
+          <a:bodyPr/>
+          <a:p/>
+        </p:txBody>
+      </p:sp>
+      <p:sp>
+        <p:nvSpPr>
+          <p:cNvPr id="1012" name="Text 15"/>
+          <p:cNvSpPr/>
+          <p:nvPr/>
+        </p:nvSpPr>
+        <p:spPr>
+          <a:xfrm>
+            <a:off x="1371380" y="8531352"/>
+            <a:ext cx="916228" cy="298953"/>
+          </a:xfrm>
+          <a:prstGeom prst="rect">
+            <a:avLst/>
+          </a:prstGeom>
+          <a:noFill/>
+          <a:ln/>
+        </p:spPr>
+        <p:txBody>
+          <a:bodyPr wrap="square" lIns="25400" tIns="25400" rIns="25400" bIns="25400" rtlCol="0" anchor="t">
+            <a:normAutofit/>
+          </a:bodyPr>
+          <a:lstStyle/>
+          <a:p>
+            <a:pPr algn="l" indent="0" marL="0">
+              <a:buNone/>
+            </a:pPr>
+            <a:r>
+              <a:rPr lang="en-US" sz="1575" dirty="0">
+                <a:solidFill>
+                  <a:srgbClr val="B0483A"/>
+                </a:solidFill>
+                <a:latin typeface="IBM Plex Mono" pitchFamily="34" charset="0"/>
+                <a:ea typeface="IBM Plex Mono" pitchFamily="34" charset="-122"/>
+                <a:cs typeface="IBM Plex Mono" pitchFamily="34" charset="-120"/>
+              </a:rPr>
+              <a:t>CAVEATS</a:t>
+            </a:r>
+            <a:endParaRPr lang="en-US" sz="1575" dirty="0"/>
+          </a:p>
+        </p:txBody>
+      </p:sp>
+      <p:sp>
+        <p:nvSpPr>
+          <p:cNvPr id="1013" name="Text 16"/>
+          <p:cNvSpPr/>
+          <p:nvPr/>
+        </p:nvSpPr>
+        <p:spPr>
+          <a:xfrm>
+            <a:off x="2401884" y="8513064"/>
+            <a:ext cx="14630400" cy="342429"/>
+          </a:xfrm>
+          <a:prstGeom prst="rect">
+            <a:avLst/>
+          </a:prstGeom>
+          <a:noFill/>
+          <a:ln/>
+        </p:spPr>
+        <p:txBody>
+          <a:bodyPr wrap="square" lIns="0" tIns="0" rIns="0" bIns="0" rtlCol="0" anchor="t">
+            <a:normAutofit/>
+          </a:bodyPr>
+          <a:lstStyle/>
+          <a:p>
+            <a:pPr algn="l" indent="0" marL="0">
+              <a:buNone/>
+            </a:pPr>
+            <a:r>
+              <a:rPr lang="en-US" sz="1875" dirty="0">
+                <a:solidFill>
+                  <a:srgbClr val="3D4652"/>
+                </a:solidFill>
+                <a:latin typeface="Space Grotesk" pitchFamily="34" charset="0"/>
+                <a:ea typeface="Space Grotesk" pitchFamily="34" charset="-122"/>
+                <a:cs typeface="Space Grotesk" pitchFamily="34" charset="-120"/>
+              </a:rPr>
+              <a:t>Index-free adjacency does not partition for free: single-node result. 10 runs per cell, medians; on Q09 Postgres keeps its lead at every size.</a:t>
+            </a:r>
+            <a:endParaRPr lang="en-US" sz="1875" dirty="0"/>
+          </a:p>
+        </p:txBody>
+      </p:sp>
+      <p:sp>
+        <p:nvSpPr>
+          <p:cNvPr id="1014" name="Text 17"/>
+          <p:cNvSpPr/>
+          <p:nvPr/>
+        </p:nvSpPr>
+        <p:spPr>
+          <a:xfrm>
+            <a:off x="952385" y="9633214"/>
+            <a:ext cx="6329527" cy="272868"/>
+          </a:xfrm>
+          <a:prstGeom prst="rect">
+            <a:avLst/>
+          </a:prstGeom>
+          <a:noFill/>
+          <a:ln/>
+        </p:spPr>
+        <p:txBody>
+          <a:bodyPr wrap="square" lIns="25400" tIns="25400" rIns="25400" bIns="25400" rtlCol="0" anchor="t">
+            <a:normAutofit/>
+          </a:bodyPr>
+          <a:lstStyle/>
+          <a:p>
+            <a:pPr algn="l" indent="0" marL="0">
+              <a:buNone/>
+            </a:pPr>
+            <a:r>
+              <a:rPr lang="en-US" sz="1425" dirty="0">
+                <a:solidFill>
+                  <a:srgbClr val="9A938A"/>
+                </a:solidFill>
+                <a:latin typeface="IBM Plex Mono" pitchFamily="34" charset="0"/>
+                <a:ea typeface="IBM Plex Mono" pitchFamily="34" charset="-122"/>
+                <a:cs typeface="IBM Plex Mono" pitchFamily="34" charset="-120"/>
+              </a:rPr>
+              <a:t>DM 2025/26 · D'Angelica &amp; Leone · PostgreSQL vs Neo4j</a:t>
+            </a:r>
+            <a:endParaRPr lang="en-US" sz="1425" dirty="0"/>
+          </a:p>
+        </p:txBody>
+      </p:sp>
+      <p:sp>
+        <p:nvSpPr>
+          <p:cNvPr id="1015" name="Text 18"/>
+          <p:cNvSpPr/>
+          <p:nvPr/>
+        </p:nvSpPr>
+        <p:spPr>
+          <a:xfrm>
+            <a:off x="16575568" y="9633214"/>
+            <a:ext cx="836206" cy="272868"/>
+          </a:xfrm>
+          <a:prstGeom prst="rect">
+            <a:avLst/>
+          </a:prstGeom>
+          <a:noFill/>
+          <a:ln/>
+        </p:spPr>
+        <p:txBody>
+          <a:bodyPr wrap="square" lIns="25400" tIns="25400" rIns="25400" bIns="25400" rtlCol="0" anchor="t">
+            <a:normAutofit/>
+          </a:bodyPr>
+          <a:lstStyle/>
+          <a:p>
+            <a:pPr algn="l" indent="0" marL="0">
+              <a:buNone/>
+            </a:pPr>
+            <a:r>
+              <a:rPr lang="en-US" sz="1425" dirty="0">
+                <a:solidFill>
+                  <a:srgbClr val="9A938A"/>
+                </a:solidFill>
+                <a:latin typeface="IBM Plex Mono" pitchFamily="34" charset="0"/>
+                <a:ea typeface="IBM Plex Mono" pitchFamily="34" charset="-122"/>
+                <a:cs typeface="IBM Plex Mono" pitchFamily="34" charset="-120"/>
+              </a:rPr>
+              <a:t>15 / 16</a:t>
+            </a:r>
+            <a:endParaRPr lang="en-US" sz="1425" dirty="0"/>
+          </a:p>
+        </p:txBody>
+      </p:sp>
+      <p:pic>
+        <p:nvPicPr>
+          <p:cNvPr id="1016" name="Picture 1015" descr="scale.png"/>
+          <p:cNvPicPr>
+            <a:picLocks noChangeAspect="1"/>
+          </p:cNvPicPr>
+          <p:nvPr/>
+        </p:nvPicPr>
+        <p:blipFill>
+          <a:blip r:embed="rId4"/>
+          <a:stretch>
+            <a:fillRect/>
+          </a:stretch>
+        </p:blipFill>
+        <p:spPr>
+          <a:xfrm>
+            <a:off x="8915400" y="4343400"/>
+            <a:ext cx="8229600" cy="3657600"/>
+          </a:xfrm>
+          <a:prstGeom prst="rect">
+            <a:avLst/>
+          </a:prstGeom>
+        </p:spPr>
+      </p:pic>
+    </p:spTree>
+  </p:cSld>
+  <p:clrMapOvr>
+    <a:masterClrMapping/>
+  </p:clrMapOvr>
+</p:sld>
+</file>
+
+<file path=ppt/slides/slide16.xml><?xml version="1.0" encoding="utf-8"?>
 <p:sld xmlns:a="http://schemas.openxmlformats.org/drawingml/2006/main" xmlns:r="http://schemas.openxmlformats.org/officeDocument/2006/relationships" xmlns:p="http://schemas.openxmlformats.org/presentationml/2006/main">
   <p:cSld name="Slide 15">
     <p:bg>
@@ -7492,7 +8273,7 @@
 </p:sld>
 </file>
 
-<file path=ppt/slides/slide16.xml><?xml version="1.0" encoding="utf-8"?>
+<file path=ppt/slides/slide17.xml><?xml version="1.0" encoding="utf-8"?>
 <p:sld xmlns:a="http://schemas.openxmlformats.org/drawingml/2006/main" xmlns:r="http://schemas.openxmlformats.org/officeDocument/2006/relationships" xmlns:p="http://schemas.openxmlformats.org/presentationml/2006/main">
   <p:cSld name="Slide 16">
     <p:bg>
@@ -7665,7 +8446,7 @@
                 <a:ea typeface="IBM Plex Mono" pitchFamily="34" charset="-122"/>
                 <a:cs typeface="IBM Plex Mono" pitchFamily="34" charset="-120"/>
               </a:rPr>
-              <a:t>5,632 orphan player refs</a:t>
+              <a:t>5,653 orphan player refs</a:t>
             </a:r>
             <a:endParaRPr lang="en-US" sz="1650" dirty="0"/>
           </a:p>
@@ -8491,7 +9272,7 @@
 </p:sld>
 </file>
 
-<file path=ppt/slides/slide17.xml><?xml version="1.0" encoding="utf-8"?>
+<file path=ppt/slides/slide18.xml><?xml version="1.0" encoding="utf-8"?>
 <p:sld xmlns:a="http://schemas.openxmlformats.org/drawingml/2006/main" xmlns:r="http://schemas.openxmlformats.org/officeDocument/2006/relationships" xmlns:p="http://schemas.openxmlformats.org/presentationml/2006/main">
   <p:cSld name="Slide 17">
     <p:bg>
@@ -9241,7 +10022,7 @@
 </p:sld>
 </file>
 
-<file path=ppt/slides/slide18.xml><?xml version="1.0" encoding="utf-8"?>
+<file path=ppt/slides/slide19.xml><?xml version="1.0" encoding="utf-8"?>
 <p:sld xmlns:a="http://schemas.openxmlformats.org/drawingml/2006/main" xmlns:r="http://schemas.openxmlformats.org/officeDocument/2006/relationships" xmlns:p="http://schemas.openxmlformats.org/presentationml/2006/main">
   <p:cSld name="Slide 18">
     <p:bg>
@@ -9927,656 +10708,6 @@
                 <a:cs typeface="IBM Plex Mono" pitchFamily="34" charset="-120"/>
               </a:rPr>
               <a:t>BACKUP</a:t>
-            </a:r>
-            <a:endParaRPr lang="en-US" sz="1425" dirty="0"/>
-          </a:p>
-        </p:txBody>
-      </p:sp>
-    </p:spTree>
-  </p:cSld>
-  <p:clrMapOvr>
-    <a:masterClrMapping/>
-  </p:clrMapOvr>
-</p:sld>
-</file>
-
-<file path=ppt/slides/slide19.xml><?xml version="1.0" encoding="utf-8"?>
-<p:sld xmlns:a="http://schemas.openxmlformats.org/drawingml/2006/main" xmlns:p="http://schemas.openxmlformats.org/presentationml/2006/main" xmlns:r="http://schemas.openxmlformats.org/officeDocument/2006/relationships">
-  <p:cSld>
-    <p:bg>
-      <p:bgPr>
-        <a:solidFill>
-          <a:srgbClr val="F7F5F1"/>
-        </a:solidFill>
-        <a:effectLst/>
-      </p:bgPr>
-    </p:bg>
-    <p:spTree>
-      <p:nvGrpSpPr>
-        <p:cNvPr id="1" name=""/>
-        <p:cNvGrpSpPr/>
-        <p:nvPr/>
-      </p:nvGrpSpPr>
-      <p:grpSpPr/>
-      <p:sp>
-        <p:nvSpPr>
-          <p:cNvPr id="1002" name="Text 0"/>
-          <p:cNvSpPr/>
-          <p:nvPr/>
-        </p:nvSpPr>
-        <p:spPr>
-          <a:xfrm>
-            <a:off x="952385" y="857146"/>
-            <a:ext cx="18021508" cy="316343"/>
-          </a:xfrm>
-          <a:prstGeom prst="rect">
-            <a:avLst/>
-          </a:prstGeom>
-          <a:noFill/>
-          <a:ln/>
-        </p:spPr>
-        <p:txBody>
-          <a:bodyPr wrap="square" lIns="25400" tIns="25400" rIns="25400" bIns="25400" rtlCol="0" anchor="t">
-            <a:normAutofit/>
-          </a:bodyPr>
-          <a:lstStyle/>
-          <a:p>
-            <a:pPr algn="l" indent="0" marL="0">
-              <a:buNone/>
-            </a:pPr>
-            <a:r>
-              <a:rPr lang="en-US" sz="1650" spc="264" kern="0" dirty="0">
-                <a:solidFill>
-                  <a:srgbClr val="33608F"/>
-                </a:solidFill>
-                <a:latin typeface="IBM Plex Mono" pitchFamily="34" charset="0"/>
-                <a:ea typeface="IBM Plex Mono" pitchFamily="34" charset="-122"/>
-                <a:cs typeface="IBM Plex Mono" pitchFamily="34" charset="-120"/>
-              </a:rPr>
-              <a:t>EASE-OF-USE &amp; SCALABILITY</a:t>
-            </a:r>
-            <a:endParaRPr lang="en-US" sz="1650" dirty="0"/>
-          </a:p>
-        </p:txBody>
-      </p:sp>
-      <p:sp>
-        <p:nvSpPr>
-          <p:cNvPr id="1003" name="Text 1"/>
-          <p:cNvSpPr/>
-          <p:nvPr/>
-        </p:nvSpPr>
-        <p:spPr>
-          <a:xfrm>
-            <a:off x="952385" y="1306710"/>
-            <a:ext cx="18021508" cy="655316"/>
-          </a:xfrm>
-          <a:prstGeom prst="rect">
-            <a:avLst/>
-          </a:prstGeom>
-          <a:noFill/>
-          <a:ln/>
-        </p:spPr>
-        <p:txBody>
-          <a:bodyPr wrap="square" lIns="25400" tIns="25400" rIns="25400" bIns="25400" rtlCol="0" anchor="t">
-            <a:normAutofit/>
-          </a:bodyPr>
-          <a:lstStyle/>
-          <a:p>
-            <a:pPr algn="l" indent="0" marL="0">
-              <a:lnSpc>
-                <a:spcPct val="108000"/>
-              </a:lnSpc>
-              <a:buNone/>
-            </a:pPr>
-            <a:r>
-              <a:rPr lang="en-US" sz="4500" b="1" spc="-67" kern="0" dirty="0">
-                <a:solidFill>
-                  <a:srgbClr val="1A2430"/>
-                </a:solidFill>
-                <a:latin typeface="Space Grotesk" pitchFamily="34" charset="0"/>
-                <a:ea typeface="Space Grotesk" pitchFamily="34" charset="-122"/>
-                <a:cs typeface="Space Grotesk" pitchFamily="34" charset="-120"/>
-              </a:rPr>
-              <a:t>Two more dimensions: ease of use and scalability</a:t>
-            </a:r>
-            <a:endParaRPr lang="en-US" sz="4500" dirty="0"/>
-          </a:p>
-        </p:txBody>
-      </p:sp>
-      <p:sp>
-        <p:nvSpPr>
-          <p:cNvPr id="1004" name="Shape 2"/>
-          <p:cNvSpPr/>
-          <p:nvPr/>
-        </p:nvSpPr>
-        <p:spPr>
-          <a:xfrm>
-            <a:off x="950976" y="2587752"/>
-            <a:ext cx="7406640" cy="5440680"/>
-          </a:xfrm>
-          <a:prstGeom prst="rect">
-            <a:avLst/>
-          </a:prstGeom>
-          <a:solidFill>
-            <a:srgbClr val="FFFFFF"/>
-          </a:solidFill>
-          <a:ln w="8695">
-            <a:solidFill>
-              <a:srgbClr val="E4DFD6"/>
-            </a:solidFill>
-            <a:prstDash val="solid"/>
-          </a:ln>
-        </p:spPr>
-        <p:txBody>
-          <a:bodyPr/>
-          <a:p/>
-        </p:txBody>
-      </p:sp>
-      <p:sp>
-        <p:nvSpPr>
-          <p:cNvPr id="1005" name="Text 3"/>
-          <p:cNvSpPr/>
-          <p:nvPr/>
-        </p:nvSpPr>
-        <p:spPr>
-          <a:xfrm>
-            <a:off x="1399032" y="3017520"/>
-            <a:ext cx="4572000" cy="758952"/>
-          </a:xfrm>
-          <a:prstGeom prst="rect">
-            <a:avLst/>
-          </a:prstGeom>
-          <a:noFill/>
-          <a:ln/>
-        </p:spPr>
-        <p:txBody>
-          <a:bodyPr wrap="square" lIns="25400" tIns="25400" rIns="25400" bIns="25400" rtlCol="0" anchor="t">
-            <a:normAutofit/>
-          </a:bodyPr>
-          <a:lstStyle/>
-          <a:p>
-            <a:pPr algn="l" indent="0" marL="0">
-              <a:lnSpc>
-                <a:spcPct val="100000"/>
-              </a:lnSpc>
-              <a:buNone/>
-            </a:pPr>
-            <a:r>
-              <a:rPr lang="en-US" sz="5700" b="1" dirty="0">
-                <a:solidFill>
-                  <a:srgbClr val="33608F"/>
-                </a:solidFill>
-                <a:latin typeface="Space Grotesk" pitchFamily="34" charset="0"/>
-                <a:ea typeface="Space Grotesk" pitchFamily="34" charset="-122"/>
-                <a:cs typeface="Space Grotesk" pitchFamily="34" charset="-120"/>
-              </a:rPr>
-              <a:t>5,632</a:t>
-            </a:r>
-            <a:endParaRPr lang="en-US" sz="5700" dirty="0"/>
-          </a:p>
-        </p:txBody>
-      </p:sp>
-      <p:sp>
-        <p:nvSpPr>
-          <p:cNvPr id="1006" name="Text 4"/>
-          <p:cNvSpPr/>
-          <p:nvPr/>
-        </p:nvSpPr>
-        <p:spPr>
-          <a:xfrm>
-            <a:off x="1399032" y="3931920"/>
-            <a:ext cx="6583680" cy="457200"/>
-          </a:xfrm>
-          <a:prstGeom prst="rect">
-            <a:avLst/>
-          </a:prstGeom>
-          <a:noFill/>
-          <a:ln/>
-        </p:spPr>
-        <p:txBody>
-          <a:bodyPr wrap="square" lIns="25400" tIns="25400" rIns="25400" bIns="25400" rtlCol="0" anchor="t">
-            <a:normAutofit/>
-          </a:bodyPr>
-          <a:lstStyle/>
-          <a:p>
-            <a:pPr algn="l" indent="0" marL="0">
-              <a:lnSpc>
-                <a:spcPct val="125000"/>
-              </a:lnSpc>
-              <a:buNone/>
-            </a:pPr>
-            <a:r>
-              <a:rPr lang="en-US" sz="2325" b="1" dirty="0">
-                <a:solidFill>
-                  <a:srgbClr val="1A2430"/>
-                </a:solidFill>
-                <a:latin typeface="Space Grotesk" pitchFamily="34" charset="0"/>
-                <a:ea typeface="Space Grotesk" pitchFamily="34" charset="-122"/>
-                <a:cs typeface="Space Grotesk" pitchFamily="34" charset="-120"/>
-              </a:rPr>
-              <a:t>Schema-first found our bugs</a:t>
-            </a:r>
-            <a:endParaRPr lang="en-US" sz="2325" dirty="0"/>
-          </a:p>
-        </p:txBody>
-      </p:sp>
-      <p:sp>
-        <p:nvSpPr>
-          <p:cNvPr id="1007" name="Text 5"/>
-          <p:cNvSpPr/>
-          <p:nvPr/>
-        </p:nvSpPr>
-        <p:spPr>
-          <a:xfrm>
-            <a:off x="1399032" y="4526280"/>
-            <a:ext cx="6629400" cy="3291840"/>
-          </a:xfrm>
-          <a:prstGeom prst="rect">
-            <a:avLst/>
-          </a:prstGeom>
-          <a:noFill/>
-          <a:ln/>
-        </p:spPr>
-        <p:txBody>
-          <a:bodyPr wrap="square" lIns="25400" tIns="25400" rIns="25400" bIns="25400" rtlCol="0" anchor="t">
-            <a:normAutofit/>
-          </a:bodyPr>
-          <a:lstStyle/>
-          <a:p>
-            <a:pPr algn="l" indent="0" marL="0">
-              <a:lnSpc>
-                <a:spcPct val="145000"/>
-              </a:lnSpc>
-              <a:spcAft>
-                <a:spcPts val="600"/>
-              </a:spcAft>
-              <a:buNone/>
-            </a:pPr>
-            <a:r>
-              <a:rPr lang="en-US" sz="1700" dirty="0">
-                <a:solidFill>
-                  <a:srgbClr val="6B655C"/>
-                </a:solidFill>
-                <a:latin typeface="Space Grotesk" pitchFamily="34" charset="0"/>
-                <a:ea typeface="Space Grotesk" pitchFamily="34" charset="-122"/>
-                <a:cs typeface="Space Grotesk" pitchFamily="34" charset="-120"/>
-              </a:rPr>
-              <a:t>· Postgres' FK check rejected 5,632 orphan player references — Neo4j would have loaded them silently.</a:t>
-            </a:r>
-            <a:endParaRPr lang="en-US" sz="1800" dirty="0"/>
-          </a:p>
-          <a:p>
-            <a:pPr algn="l" indent="0" marL="0">
-              <a:lnSpc>
-                <a:spcPct val="145000"/>
-              </a:lnSpc>
-              <a:spcAft>
-                <a:spcPts val="600"/>
-              </a:spcAft>
-              <a:buNone/>
-            </a:pPr>
-            <a:r>
-              <a:rPr lang="en-US" sz="1700" dirty="0">
-                <a:solidFill>
-                  <a:srgbClr val="6B655C"/>
-                </a:solidFill>
-                <a:latin typeface="Space Grotesk" pitchFamily="34" charset="0"/>
-                <a:ea typeface="Space Grotesk" pitchFamily="34" charset="-122"/>
-                <a:cs typeface="Space Grotesk" pitchFamily="34" charset="-120"/>
-              </a:rPr>
-              <a:t>· Running both systems side by side caught three more silent bugs: NULL semantics (Q05), path semantics (Q10), name-based grouping (Q07).</a:t>
-            </a:r>
-            <a:endParaRPr lang="en-US" sz="1800" dirty="0"/>
-          </a:p>
-          <a:p>
-            <a:pPr algn="l" indent="0" marL="0">
-              <a:lnSpc>
-                <a:spcPct val="145000"/>
-              </a:lnSpc>
-              <a:spcAft>
-                <a:spcPts val="600"/>
-              </a:spcAft>
-              <a:buNone/>
-            </a:pPr>
-            <a:r>
-              <a:rPr lang="en-US" sz="1700" dirty="0">
-                <a:solidFill>
-                  <a:srgbClr val="6B655C"/>
-                </a:solidFill>
-                <a:latin typeface="Space Grotesk" pitchFamily="34" charset="0"/>
-                <a:ea typeface="Space Grotesk" pitchFamily="34" charset="-122"/>
-                <a:cs typeface="Space Grotesk" pitchFamily="34" charset="-120"/>
-              </a:rPr>
-              <a:t>· Cypher is 4× shorter on graph queries; SQL's explicit schema is the documentation.</a:t>
-            </a:r>
-            <a:endParaRPr lang="en-US" sz="1800" dirty="0"/>
-          </a:p>
-        </p:txBody>
-      </p:sp>
-      <p:sp>
-        <p:nvSpPr>
-          <p:cNvPr id="1008" name="Shape 6"/>
-          <p:cNvSpPr/>
-          <p:nvPr/>
-        </p:nvSpPr>
-        <p:spPr>
-          <a:xfrm>
-            <a:off x="8631936" y="2587752"/>
-            <a:ext cx="8705088" cy="5440680"/>
-          </a:xfrm>
-          <a:prstGeom prst="rect">
-            <a:avLst/>
-          </a:prstGeom>
-          <a:solidFill>
-            <a:srgbClr val="FFFFFF"/>
-          </a:solidFill>
-          <a:ln w="8695">
-            <a:solidFill>
-              <a:srgbClr val="E4DFD6"/>
-            </a:solidFill>
-            <a:prstDash val="solid"/>
-          </a:ln>
-        </p:spPr>
-        <p:txBody>
-          <a:bodyPr/>
-          <a:p/>
-        </p:txBody>
-      </p:sp>
-      <p:sp>
-        <p:nvSpPr>
-          <p:cNvPr id="1009" name="Text 7"/>
-          <p:cNvSpPr/>
-          <p:nvPr/>
-        </p:nvSpPr>
-        <p:spPr>
-          <a:xfrm>
-            <a:off x="9079992" y="3017520"/>
-            <a:ext cx="4572000" cy="758952"/>
-          </a:xfrm>
-          <a:prstGeom prst="rect">
-            <a:avLst/>
-          </a:prstGeom>
-          <a:noFill/>
-          <a:ln/>
-        </p:spPr>
-        <p:txBody>
-          <a:bodyPr wrap="square" lIns="25400" tIns="25400" rIns="25400" bIns="25400" rtlCol="0" anchor="t">
-            <a:normAutofit/>
-          </a:bodyPr>
-          <a:lstStyle/>
-          <a:p>
-            <a:pPr algn="l" indent="0" marL="0">
-              <a:lnSpc>
-                <a:spcPct val="100000"/>
-              </a:lnSpc>
-              <a:buNone/>
-            </a:pPr>
-            <a:r>
-              <a:rPr lang="en-US" sz="5700" b="1" dirty="0">
-                <a:solidFill>
-                  <a:srgbClr val="1E7A52"/>
-                </a:solidFill>
-                <a:latin typeface="Space Grotesk" pitchFamily="34" charset="0"/>
-                <a:ea typeface="Space Grotesk" pitchFamily="34" charset="-122"/>
-                <a:cs typeface="Space Grotesk" pitchFamily="34" charset="-120"/>
-              </a:rPr>
-              <a:t>3.3×</a:t>
-            </a:r>
-            <a:endParaRPr lang="en-US" sz="5700" dirty="0"/>
-          </a:p>
-        </p:txBody>
-      </p:sp>
-      <p:sp>
-        <p:nvSpPr>
-          <p:cNvPr id="1010" name="Text 8"/>
-          <p:cNvSpPr/>
-          <p:nvPr/>
-        </p:nvSpPr>
-        <p:spPr>
-          <a:xfrm>
-            <a:off x="9079992" y="3931920"/>
-            <a:ext cx="7863840" cy="457200"/>
-          </a:xfrm>
-          <a:prstGeom prst="rect">
-            <a:avLst/>
-          </a:prstGeom>
-          <a:noFill/>
-          <a:ln/>
-        </p:spPr>
-        <p:txBody>
-          <a:bodyPr wrap="square" lIns="25400" tIns="25400" rIns="25400" bIns="25400" rtlCol="0" anchor="t">
-            <a:normAutofit/>
-          </a:bodyPr>
-          <a:lstStyle/>
-          <a:p>
-            <a:pPr algn="l" indent="0" marL="0">
-              <a:lnSpc>
-                <a:spcPct val="125000"/>
-              </a:lnSpc>
-              <a:buNone/>
-            </a:pPr>
-            <a:r>
-              <a:rPr lang="en-US" sz="2325" b="1" dirty="0">
-                <a:solidFill>
-                  <a:srgbClr val="1A2430"/>
-                </a:solidFill>
-                <a:latin typeface="Space Grotesk" pitchFamily="34" charset="0"/>
-                <a:ea typeface="Space Grotesk" pitchFamily="34" charset="-122"/>
-                <a:cs typeface="Space Grotesk" pitchFamily="34" charset="-120"/>
-              </a:rPr>
-              <a:t>Measured on 2, 4 and 8 seasons: the graph edge widens</a:t>
-            </a:r>
-            <a:endParaRPr lang="en-US" sz="2325" dirty="0"/>
-          </a:p>
-        </p:txBody>
-      </p:sp>
-      <p:pic>
-        <p:nvPicPr>
-          <p:cNvPr id="1011" name="Picture 1010" descr="scale.png"/>
-          <p:cNvPicPr>
-            <a:picLocks noChangeAspect="1"/>
-          </p:cNvPicPr>
-          <p:nvPr/>
-        </p:nvPicPr>
-        <p:blipFill>
-          <a:blip r:embed="rId2"/>
-          <a:stretch>
-            <a:fillRect/>
-          </a:stretch>
-        </p:blipFill>
-        <p:spPr>
-          <a:xfrm>
-            <a:off x="8915400" y="4343400"/>
-            <a:ext cx="8229600" cy="3657600"/>
-          </a:xfrm>
-          <a:prstGeom prst="rect">
-            <a:avLst/>
-          </a:prstGeom>
-        </p:spPr>
-      </p:pic>
-      <p:sp>
-        <p:nvSpPr>
-          <p:cNvPr id="1011" name="Shape 14"/>
-          <p:cNvSpPr/>
-          <p:nvPr/>
-        </p:nvSpPr>
-        <p:spPr>
-          <a:xfrm>
-            <a:off x="952385" y="8275320"/>
-            <a:ext cx="16383190" cy="777240"/>
-          </a:xfrm>
-          <a:prstGeom prst="rect">
-            <a:avLst/>
-          </a:prstGeom>
-          <a:solidFill>
-            <a:srgbClr val="EDE9E1"/>
-          </a:solidFill>
-          <a:ln/>
-        </p:spPr>
-        <p:txBody>
-          <a:bodyPr/>
-          <a:p/>
-        </p:txBody>
-      </p:sp>
-      <p:sp>
-        <p:nvSpPr>
-          <p:cNvPr id="1012" name="Text 15"/>
-          <p:cNvSpPr/>
-          <p:nvPr/>
-        </p:nvSpPr>
-        <p:spPr>
-          <a:xfrm>
-            <a:off x="1371380" y="8531352"/>
-            <a:ext cx="916228" cy="298953"/>
-          </a:xfrm>
-          <a:prstGeom prst="rect">
-            <a:avLst/>
-          </a:prstGeom>
-          <a:noFill/>
-          <a:ln/>
-        </p:spPr>
-        <p:txBody>
-          <a:bodyPr wrap="square" lIns="25400" tIns="25400" rIns="25400" bIns="25400" rtlCol="0" anchor="t">
-            <a:normAutofit/>
-          </a:bodyPr>
-          <a:lstStyle/>
-          <a:p>
-            <a:pPr algn="l" indent="0" marL="0">
-              <a:buNone/>
-            </a:pPr>
-            <a:r>
-              <a:rPr lang="en-US" sz="1575" dirty="0">
-                <a:solidFill>
-                  <a:srgbClr val="B0483A"/>
-                </a:solidFill>
-                <a:latin typeface="IBM Plex Mono" pitchFamily="34" charset="0"/>
-                <a:ea typeface="IBM Plex Mono" pitchFamily="34" charset="-122"/>
-                <a:cs typeface="IBM Plex Mono" pitchFamily="34" charset="-120"/>
-              </a:rPr>
-              <a:t>CAVEATS</a:t>
-            </a:r>
-            <a:endParaRPr lang="en-US" sz="1575" dirty="0"/>
-          </a:p>
-        </p:txBody>
-      </p:sp>
-      <p:sp>
-        <p:nvSpPr>
-          <p:cNvPr id="1013" name="Text 16"/>
-          <p:cNvSpPr/>
-          <p:nvPr/>
-        </p:nvSpPr>
-        <p:spPr>
-          <a:xfrm>
-            <a:off x="2401884" y="8513064"/>
-            <a:ext cx="14630400" cy="342429"/>
-          </a:xfrm>
-          <a:prstGeom prst="rect">
-            <a:avLst/>
-          </a:prstGeom>
-          <a:noFill/>
-          <a:ln/>
-        </p:spPr>
-        <p:txBody>
-          <a:bodyPr wrap="square" lIns="0" tIns="0" rIns="0" bIns="0" rtlCol="0" anchor="t">
-            <a:normAutofit/>
-          </a:bodyPr>
-          <a:lstStyle/>
-          <a:p>
-            <a:pPr algn="l" indent="0" marL="0">
-              <a:buNone/>
-            </a:pPr>
-            <a:r>
-              <a:rPr lang="en-US" sz="1875" dirty="0">
-                <a:solidFill>
-                  <a:srgbClr val="3D4652"/>
-                </a:solidFill>
-                <a:latin typeface="Space Grotesk" pitchFamily="34" charset="0"/>
-                <a:ea typeface="Space Grotesk" pitchFamily="34" charset="-122"/>
-                <a:cs typeface="Space Grotesk" pitchFamily="34" charset="-120"/>
-              </a:rPr>
-              <a:t>Index-free adjacency does not partition for free: single-node result. 10 runs per cell, medians; Q09 keeps Postgres' lead at every size.</a:t>
-            </a:r>
-            <a:endParaRPr lang="en-US" sz="1875" dirty="0"/>
-          </a:p>
-        </p:txBody>
-      </p:sp>
-      <p:sp>
-        <p:nvSpPr>
-          <p:cNvPr id="1014" name="Text 17"/>
-          <p:cNvSpPr/>
-          <p:nvPr/>
-        </p:nvSpPr>
-        <p:spPr>
-          <a:xfrm>
-            <a:off x="952385" y="9633214"/>
-            <a:ext cx="6329527" cy="272868"/>
-          </a:xfrm>
-          <a:prstGeom prst="rect">
-            <a:avLst/>
-          </a:prstGeom>
-          <a:noFill/>
-          <a:ln/>
-        </p:spPr>
-        <p:txBody>
-          <a:bodyPr wrap="square" lIns="25400" tIns="25400" rIns="25400" bIns="25400" rtlCol="0" anchor="t">
-            <a:normAutofit/>
-          </a:bodyPr>
-          <a:lstStyle/>
-          <a:p>
-            <a:pPr algn="l" indent="0" marL="0">
-              <a:buNone/>
-            </a:pPr>
-            <a:r>
-              <a:rPr lang="en-US" sz="1425" dirty="0">
-                <a:solidFill>
-                  <a:srgbClr val="9A938A"/>
-                </a:solidFill>
-                <a:latin typeface="IBM Plex Mono" pitchFamily="34" charset="0"/>
-                <a:ea typeface="IBM Plex Mono" pitchFamily="34" charset="-122"/>
-                <a:cs typeface="IBM Plex Mono" pitchFamily="34" charset="-120"/>
-              </a:rPr>
-              <a:t>DM 2025/26 · D'Angelica &amp; Leone · PostgreSQL vs Neo4j</a:t>
-            </a:r>
-            <a:endParaRPr lang="en-US" sz="1425" dirty="0"/>
-          </a:p>
-        </p:txBody>
-      </p:sp>
-      <p:sp>
-        <p:nvSpPr>
-          <p:cNvPr id="1015" name="Text 18"/>
-          <p:cNvSpPr/>
-          <p:nvPr/>
-        </p:nvSpPr>
-        <p:spPr>
-          <a:xfrm>
-            <a:off x="16575568" y="9633214"/>
-            <a:ext cx="836206" cy="272868"/>
-          </a:xfrm>
-          <a:prstGeom prst="rect">
-            <a:avLst/>
-          </a:prstGeom>
-          <a:noFill/>
-          <a:ln/>
-        </p:spPr>
-        <p:txBody>
-          <a:bodyPr wrap="square" lIns="25400" tIns="25400" rIns="25400" bIns="25400" rtlCol="0" anchor="t">
-            <a:normAutofit/>
-          </a:bodyPr>
-          <a:lstStyle/>
-          <a:p>
-            <a:pPr algn="l" indent="0" marL="0">
-              <a:buNone/>
-            </a:pPr>
-            <a:r>
-              <a:rPr lang="en-US" sz="1425" dirty="0">
-                <a:solidFill>
-                  <a:srgbClr val="9A938A"/>
-                </a:solidFill>
-                <a:latin typeface="IBM Plex Mono" pitchFamily="34" charset="0"/>
-                <a:ea typeface="IBM Plex Mono" pitchFamily="34" charset="-122"/>
-                <a:cs typeface="IBM Plex Mono" pitchFamily="34" charset="-120"/>
-              </a:rPr>
-              <a:t>15 / 16</a:t>
             </a:r>
             <a:endParaRPr lang="en-US" sz="1425" dirty="0"/>
           </a:p>
@@ -10693,7 +10824,7 @@
                 <a:ea typeface="Space Grotesk" pitchFamily="34" charset="-122"/>
                 <a:cs typeface="Space Grotesk" pitchFamily="34" charset="-120"/>
               </a:rPr>
-              <a:t>No absolute winner: Neo4j dominates variable-depth traversals (57×), Postgres keeps the fixed-depth join</a:t>
+              <a:t>No absolute winner: Neo4j dominates variable-depth traversals (55×), Postgres keeps the fixed-depth join</a:t>
             </a:r>
             <a:endParaRPr lang="en-US" sz="4650" dirty="0"/>
           </a:p>
@@ -10766,7 +10897,7 @@
                 <a:ea typeface="Space Grotesk" pitchFamily="34" charset="-122"/>
                 <a:cs typeface="Space Grotesk" pitchFamily="34" charset="-120"/>
               </a:rPr>
-              <a:t>57×</a:t>
+              <a:t>55×</a:t>
             </a:r>
             <a:endParaRPr lang="en-US" sz="9750" dirty="0"/>
           </a:p>
@@ -10851,7 +10982,7 @@
                 <a:ea typeface="Space Grotesk" pitchFamily="34" charset="-122"/>
                 <a:cs typeface="Space Grotesk" pitchFamily="34" charset="-120"/>
               </a:rPr>
-              <a:t>Q10: 671 ms in Postgres, 12 ms in Neo4j — identical semantics, a change of complexity class.</a:t>
+              <a:t>Q10: 792 ms in Postgres, 14 ms in Neo4j — identical semantics, a change of complexity class.</a:t>
             </a:r>
             <a:endParaRPr lang="en-US" sz="1800" dirty="0"/>
           </a:p>
@@ -10924,7 +11055,7 @@
                 <a:ea typeface="Space Grotesk" pitchFamily="34" charset="-122"/>
                 <a:cs typeface="Space Grotesk" pitchFamily="34" charset="-120"/>
               </a:rPr>
-              <a:t>2.1×</a:t>
+              <a:t>2.7×</a:t>
             </a:r>
             <a:endParaRPr lang="en-US" sz="9750" dirty="0"/>
           </a:p>
@@ -11009,7 +11140,7 @@
                 <a:ea typeface="Space Grotesk" pitchFamily="34" charset="-122"/>
                 <a:cs typeface="Space Grotesk" pitchFamily="34" charset="-120"/>
               </a:rPr>
-              <a:t>With the same precomputation, B-tree joins beat the traversal 2.1× — and the lead widens as data grows.</a:t>
+              <a:t>With the same precomputation, B-tree joins beat the traversal 2.7× — and the lead widens as data grows.</a:t>
             </a:r>
             <a:endParaRPr lang="en-US" sz="1800" dirty="0"/>
           </a:p>
@@ -11167,7 +11298,7 @@
                 <a:ea typeface="Space Grotesk" pitchFamily="34" charset="-122"/>
                 <a:cs typeface="Space Grotesk" pitchFamily="34" charset="-120"/>
               </a:rPr>
-              <a:t>21 SQL lines become 5 Cypher lines on graph queries — expressiveness is a result too.</a:t>
+              <a:t>21 SQL lines become 5 Cypher lines on the shortest path; 2× shorter on average across the 12.</a:t>
             </a:r>
             <a:endParaRPr lang="en-US" sz="1800" dirty="0"/>
           </a:p>
@@ -13093,6 +13224,6077 @@
       <p:sp>
         <p:nvSpPr>
           <p:cNvPr id="1058" name="Text 19"/>
+          <p:cNvSpPr/>
+          <p:nvPr/>
+        </p:nvSpPr>
+        <p:spPr>
+          <a:xfrm>
+            <a:off x="16684121" y="9633214"/>
+            <a:ext cx="727653" cy="272868"/>
+          </a:xfrm>
+          <a:prstGeom prst="rect">
+            <a:avLst/>
+          </a:prstGeom>
+          <a:noFill/>
+          <a:ln/>
+        </p:spPr>
+        <p:txBody>
+          <a:bodyPr wrap="square" lIns="25400" tIns="25400" rIns="25400" bIns="25400" rtlCol="0" anchor="t">
+            <a:normAutofit/>
+          </a:bodyPr>
+          <a:lstStyle/>
+          <a:p>
+            <a:pPr algn="l" indent="0" marL="0">
+              <a:buNone/>
+            </a:pPr>
+            <a:r>
+              <a:rPr lang="en-US" sz="1425" dirty="0">
+                <a:solidFill>
+                  <a:srgbClr val="9A938A"/>
+                </a:solidFill>
+                <a:latin typeface="IBM Plex Mono" pitchFamily="34" charset="0"/>
+                <a:ea typeface="IBM Plex Mono" pitchFamily="34" charset="-122"/>
+                <a:cs typeface="IBM Plex Mono" pitchFamily="34" charset="-120"/>
+              </a:rPr>
+              <a:t>BACKUP</a:t>
+            </a:r>
+            <a:endParaRPr lang="en-US" sz="1425" dirty="0"/>
+          </a:p>
+        </p:txBody>
+      </p:sp>
+    </p:spTree>
+  </p:cSld>
+  <p:clrMapOvr>
+    <a:masterClrMapping/>
+  </p:clrMapOvr>
+</p:sld>
+</file>
+
+<file path=ppt/slides/slide21.xml><?xml version="1.0" encoding="utf-8"?>
+<p:sld xmlns:a="http://schemas.openxmlformats.org/drawingml/2006/main" xmlns:p="http://schemas.openxmlformats.org/presentationml/2006/main" xmlns:r="http://schemas.openxmlformats.org/officeDocument/2006/relationships">
+  <p:cSld>
+    <p:bg>
+      <p:bgPr>
+        <a:solidFill>
+          <a:srgbClr val="EDE9E1"/>
+        </a:solidFill>
+        <a:effectLst/>
+      </p:bgPr>
+    </p:bg>
+    <p:spTree>
+      <p:nvGrpSpPr>
+        <p:cNvPr id="1" name=""/>
+        <p:cNvGrpSpPr/>
+        <p:nvPr/>
+      </p:nvGrpSpPr>
+      <p:grpSpPr/>
+      <p:sp>
+        <p:nvSpPr>
+          <p:cNvPr id="2000" name="Text 0"/>
+          <p:cNvSpPr/>
+          <p:nvPr/>
+        </p:nvSpPr>
+        <p:spPr>
+          <a:xfrm>
+            <a:off x="952385" y="857146"/>
+            <a:ext cx="18021508" cy="316343"/>
+          </a:xfrm>
+          <a:prstGeom prst="rect">
+            <a:avLst/>
+          </a:prstGeom>
+          <a:noFill/>
+          <a:ln/>
+        </p:spPr>
+        <p:txBody>
+          <a:bodyPr wrap="square" lIns="25400" tIns="25400" rIns="25400" bIns="25400" rtlCol="0" anchor="t">
+            <a:normAutofit/>
+          </a:bodyPr>
+          <a:lstStyle/>
+          <a:p>
+            <a:pPr algn="l" indent="0" marL="0">
+              <a:buNone/>
+            </a:pPr>
+            <a:r>
+              <a:rPr lang="en-US" sz="1650" spc="264" kern="0" dirty="0">
+                <a:solidFill>
+                  <a:srgbClr val="B0483A"/>
+                </a:solidFill>
+                <a:latin typeface="IBM Plex Mono" pitchFamily="34" charset="0"/>
+                <a:ea typeface="IBM Plex Mono" pitchFamily="34" charset="-122"/>
+                <a:cs typeface="IBM Plex Mono" pitchFamily="34" charset="-120"/>
+              </a:rPr>
+              <a:t>BACKUP — FULL RESULTS TABLE</a:t>
+            </a:r>
+            <a:endParaRPr lang="en-US" sz="1650" dirty="0"/>
+          </a:p>
+        </p:txBody>
+      </p:sp>
+      <p:sp>
+        <p:nvSpPr>
+          <p:cNvPr id="2001" name="Text 1"/>
+          <p:cNvSpPr/>
+          <p:nvPr/>
+        </p:nvSpPr>
+        <p:spPr>
+          <a:xfrm>
+            <a:off x="952385" y="1306710"/>
+            <a:ext cx="18021508" cy="634665"/>
+          </a:xfrm>
+          <a:prstGeom prst="rect">
+            <a:avLst/>
+          </a:prstGeom>
+          <a:noFill/>
+          <a:ln/>
+        </p:spPr>
+        <p:txBody>
+          <a:bodyPr wrap="square" lIns="25400" tIns="25400" rIns="25400" bIns="25400" rtlCol="0" anchor="t">
+            <a:normAutofit/>
+          </a:bodyPr>
+          <a:lstStyle/>
+          <a:p>
+            <a:pPr algn="l" indent="0" marL="0">
+              <a:lnSpc>
+                <a:spcPct val="108000"/>
+              </a:lnSpc>
+              <a:buNone/>
+            </a:pPr>
+            <a:r>
+              <a:rPr lang="en-US" sz="4350" b="1" spc="-65" kern="0" dirty="0">
+                <a:solidFill>
+                  <a:srgbClr val="1A2430"/>
+                </a:solidFill>
+                <a:latin typeface="Space Grotesk" pitchFamily="34" charset="0"/>
+                <a:ea typeface="Space Grotesk" pitchFamily="34" charset="-122"/>
+                <a:cs typeface="Space Grotesk" pitchFamily="34" charset="-120"/>
+              </a:rPr>
+              <a:t>All twelve queries — medians of 15 runs, run_20260921_162704</a:t>
+            </a:r>
+            <a:endParaRPr lang="en-US" sz="4350" dirty="0"/>
+          </a:p>
+        </p:txBody>
+      </p:sp>
+      <p:sp>
+        <p:nvSpPr>
+          <p:cNvPr id="2002" name="Shape 2"/>
+          <p:cNvSpPr/>
+          <p:nvPr/>
+        </p:nvSpPr>
+        <p:spPr>
+          <a:xfrm>
+            <a:off x="950976" y="2514600"/>
+            <a:ext cx="16386048" cy="5989320"/>
+          </a:xfrm>
+          <a:prstGeom prst="rect">
+            <a:avLst/>
+          </a:prstGeom>
+          <a:solidFill>
+            <a:srgbClr val="FFFFFF"/>
+          </a:solidFill>
+          <a:ln w="8695">
+            <a:solidFill>
+              <a:srgbClr val="DDD6CA"/>
+            </a:solidFill>
+            <a:prstDash val="solid"/>
+          </a:ln>
+        </p:spPr>
+        <p:txBody>
+          <a:bodyPr/>
+          <a:p/>
+        </p:txBody>
+      </p:sp>
+      <p:sp>
+        <p:nvSpPr>
+          <p:cNvPr id="2003" name="Text 3"/>
+          <p:cNvSpPr/>
+          <p:nvPr/>
+        </p:nvSpPr>
+        <p:spPr>
+          <a:xfrm>
+            <a:off x="1234440" y="2788920"/>
+            <a:ext cx="822960" cy="274320"/>
+          </a:xfrm>
+          <a:prstGeom prst="rect">
+            <a:avLst/>
+          </a:prstGeom>
+          <a:noFill/>
+          <a:ln/>
+        </p:spPr>
+        <p:txBody>
+          <a:bodyPr wrap="square" lIns="25400" tIns="25400" rIns="25400" bIns="25400" rtlCol="0" anchor="t">
+            <a:normAutofit/>
+          </a:bodyPr>
+          <a:lstStyle/>
+          <a:p>
+            <a:pPr algn="l" indent="0" marL="0">
+              <a:buNone/>
+            </a:pPr>
+            <a:r>
+              <a:rPr lang="en-US" sz="1250" b="0" dirty="0">
+                <a:solidFill>
+                  <a:srgbClr val="9A938A"/>
+                </a:solidFill>
+                <a:latin typeface="IBM Plex Mono" pitchFamily="34" charset="0"/>
+                <a:ea typeface="IBM Plex Mono" pitchFamily="34" charset="-122"/>
+                <a:cs typeface="IBM Plex Mono" pitchFamily="34" charset="-120"/>
+              </a:rPr>
+              <a:t/>
+            </a:r>
+            <a:endParaRPr lang="en-US" sz="1650" dirty="0"/>
+          </a:p>
+        </p:txBody>
+      </p:sp>
+      <p:sp>
+        <p:nvSpPr>
+          <p:cNvPr id="2004" name="Text 3"/>
+          <p:cNvSpPr/>
+          <p:nvPr/>
+        </p:nvSpPr>
+        <p:spPr>
+          <a:xfrm>
+            <a:off x="2057400" y="2788920"/>
+            <a:ext cx="4206240" cy="274320"/>
+          </a:xfrm>
+          <a:prstGeom prst="rect">
+            <a:avLst/>
+          </a:prstGeom>
+          <a:noFill/>
+          <a:ln/>
+        </p:spPr>
+        <p:txBody>
+          <a:bodyPr wrap="square" lIns="25400" tIns="25400" rIns="25400" bIns="25400" rtlCol="0" anchor="t">
+            <a:normAutofit/>
+          </a:bodyPr>
+          <a:lstStyle/>
+          <a:p>
+            <a:pPr algn="l" indent="0" marL="0">
+              <a:buNone/>
+            </a:pPr>
+            <a:r>
+              <a:rPr lang="en-US" sz="1250" b="0" dirty="0">
+                <a:solidFill>
+                  <a:srgbClr val="9A938A"/>
+                </a:solidFill>
+                <a:latin typeface="IBM Plex Mono" pitchFamily="34" charset="0"/>
+                <a:ea typeface="IBM Plex Mono" pitchFamily="34" charset="-122"/>
+                <a:cs typeface="IBM Plex Mono" pitchFamily="34" charset="-120"/>
+              </a:rPr>
+              <a:t>QUERY</a:t>
+            </a:r>
+            <a:endParaRPr lang="en-US" sz="1650" dirty="0"/>
+          </a:p>
+        </p:txBody>
+      </p:sp>
+      <p:sp>
+        <p:nvSpPr>
+          <p:cNvPr id="2005" name="Text 3"/>
+          <p:cNvSpPr/>
+          <p:nvPr/>
+        </p:nvSpPr>
+        <p:spPr>
+          <a:xfrm>
+            <a:off x="6355080" y="2788920"/>
+            <a:ext cx="1463040" cy="274320"/>
+          </a:xfrm>
+          <a:prstGeom prst="rect">
+            <a:avLst/>
+          </a:prstGeom>
+          <a:noFill/>
+          <a:ln/>
+        </p:spPr>
+        <p:txBody>
+          <a:bodyPr wrap="square" lIns="25400" tIns="25400" rIns="25400" bIns="25400" rtlCol="0" anchor="t">
+            <a:normAutofit/>
+          </a:bodyPr>
+          <a:lstStyle/>
+          <a:p>
+            <a:pPr algn="l" indent="0" marL="0">
+              <a:buNone/>
+            </a:pPr>
+            <a:r>
+              <a:rPr lang="en-US" sz="1250" b="0" dirty="0">
+                <a:solidFill>
+                  <a:srgbClr val="9A938A"/>
+                </a:solidFill>
+                <a:latin typeface="IBM Plex Mono" pitchFamily="34" charset="0"/>
+                <a:ea typeface="IBM Plex Mono" pitchFamily="34" charset="-122"/>
+                <a:cs typeface="IBM Plex Mono" pitchFamily="34" charset="-120"/>
+              </a:rPr>
+              <a:t>POSTGRES</a:t>
+            </a:r>
+            <a:endParaRPr lang="en-US" sz="1650" dirty="0"/>
+          </a:p>
+        </p:txBody>
+      </p:sp>
+      <p:sp>
+        <p:nvSpPr>
+          <p:cNvPr id="2006" name="Text 3"/>
+          <p:cNvSpPr/>
+          <p:nvPr/>
+        </p:nvSpPr>
+        <p:spPr>
+          <a:xfrm>
+            <a:off x="7909560" y="2788920"/>
+            <a:ext cx="1463040" cy="274320"/>
+          </a:xfrm>
+          <a:prstGeom prst="rect">
+            <a:avLst/>
+          </a:prstGeom>
+          <a:noFill/>
+          <a:ln/>
+        </p:spPr>
+        <p:txBody>
+          <a:bodyPr wrap="square" lIns="25400" tIns="25400" rIns="25400" bIns="25400" rtlCol="0" anchor="t">
+            <a:normAutofit/>
+          </a:bodyPr>
+          <a:lstStyle/>
+          <a:p>
+            <a:pPr algn="l" indent="0" marL="0">
+              <a:buNone/>
+            </a:pPr>
+            <a:r>
+              <a:rPr lang="en-US" sz="1250" b="0" dirty="0">
+                <a:solidFill>
+                  <a:srgbClr val="9A938A"/>
+                </a:solidFill>
+                <a:latin typeface="IBM Plex Mono" pitchFamily="34" charset="0"/>
+                <a:ea typeface="IBM Plex Mono" pitchFamily="34" charset="-122"/>
+                <a:cs typeface="IBM Plex Mono" pitchFamily="34" charset="-120"/>
+              </a:rPr>
+              <a:t>NEO4J</a:t>
+            </a:r>
+            <a:endParaRPr lang="en-US" sz="1650" dirty="0"/>
+          </a:p>
+        </p:txBody>
+      </p:sp>
+      <p:sp>
+        <p:nvSpPr>
+          <p:cNvPr id="2007" name="Text 3"/>
+          <p:cNvSpPr/>
+          <p:nvPr/>
+        </p:nvSpPr>
+        <p:spPr>
+          <a:xfrm>
+            <a:off x="9464040" y="2788920"/>
+            <a:ext cx="1463040" cy="274320"/>
+          </a:xfrm>
+          <a:prstGeom prst="rect">
+            <a:avLst/>
+          </a:prstGeom>
+          <a:noFill/>
+          <a:ln/>
+        </p:spPr>
+        <p:txBody>
+          <a:bodyPr wrap="square" lIns="25400" tIns="25400" rIns="25400" bIns="25400" rtlCol="0" anchor="t">
+            <a:normAutofit/>
+          </a:bodyPr>
+          <a:lstStyle/>
+          <a:p>
+            <a:pPr algn="l" indent="0" marL="0">
+              <a:buNone/>
+            </a:pPr>
+            <a:r>
+              <a:rPr lang="en-US" sz="1250" b="0" dirty="0">
+                <a:solidFill>
+                  <a:srgbClr val="9A938A"/>
+                </a:solidFill>
+                <a:latin typeface="IBM Plex Mono" pitchFamily="34" charset="0"/>
+                <a:ea typeface="IBM Plex Mono" pitchFamily="34" charset="-122"/>
+                <a:cs typeface="IBM Plex Mono" pitchFamily="34" charset="-120"/>
+              </a:rPr>
+              <a:t>SPEEDUP</a:t>
+            </a:r>
+            <a:endParaRPr lang="en-US" sz="1650" dirty="0"/>
+          </a:p>
+        </p:txBody>
+      </p:sp>
+      <p:sp>
+        <p:nvSpPr>
+          <p:cNvPr id="2008" name="Text 3"/>
+          <p:cNvSpPr/>
+          <p:nvPr/>
+        </p:nvSpPr>
+        <p:spPr>
+          <a:xfrm>
+            <a:off x="11018520" y="2788920"/>
+            <a:ext cx="2011680" cy="274320"/>
+          </a:xfrm>
+          <a:prstGeom prst="rect">
+            <a:avLst/>
+          </a:prstGeom>
+          <a:noFill/>
+          <a:ln/>
+        </p:spPr>
+        <p:txBody>
+          <a:bodyPr wrap="square" lIns="25400" tIns="25400" rIns="25400" bIns="25400" rtlCol="0" anchor="t">
+            <a:normAutofit/>
+          </a:bodyPr>
+          <a:lstStyle/>
+          <a:p>
+            <a:pPr algn="l" indent="0" marL="0">
+              <a:buNone/>
+            </a:pPr>
+            <a:r>
+              <a:rPr lang="en-US" sz="1250" b="0" dirty="0">
+                <a:solidFill>
+                  <a:srgbClr val="9A938A"/>
+                </a:solidFill>
+                <a:latin typeface="IBM Plex Mono" pitchFamily="34" charset="0"/>
+                <a:ea typeface="IBM Plex Mono" pitchFamily="34" charset="-122"/>
+                <a:cs typeface="IBM Plex Mono" pitchFamily="34" charset="-120"/>
+              </a:rPr>
+              <a:t>WINNER</a:t>
+            </a:r>
+            <a:endParaRPr lang="en-US" sz="1650" dirty="0"/>
+          </a:p>
+        </p:txBody>
+      </p:sp>
+      <p:sp>
+        <p:nvSpPr>
+          <p:cNvPr id="2009" name="Text 3"/>
+          <p:cNvSpPr/>
+          <p:nvPr/>
+        </p:nvSpPr>
+        <p:spPr>
+          <a:xfrm>
+            <a:off x="13121640" y="2788920"/>
+            <a:ext cx="1371600" cy="274320"/>
+          </a:xfrm>
+          <a:prstGeom prst="rect">
+            <a:avLst/>
+          </a:prstGeom>
+          <a:noFill/>
+          <a:ln/>
+        </p:spPr>
+        <p:txBody>
+          <a:bodyPr wrap="square" lIns="25400" tIns="25400" rIns="25400" bIns="25400" rtlCol="0" anchor="t">
+            <a:normAutofit/>
+          </a:bodyPr>
+          <a:lstStyle/>
+          <a:p>
+            <a:pPr algn="l" indent="0" marL="0">
+              <a:buNone/>
+            </a:pPr>
+            <a:r>
+              <a:rPr lang="en-US" sz="1250" b="0" dirty="0">
+                <a:solidFill>
+                  <a:srgbClr val="9A938A"/>
+                </a:solidFill>
+                <a:latin typeface="IBM Plex Mono" pitchFamily="34" charset="0"/>
+                <a:ea typeface="IBM Plex Mono" pitchFamily="34" charset="-122"/>
+                <a:cs typeface="IBM Plex Mono" pitchFamily="34" charset="-120"/>
+              </a:rPr>
+              <a:t>p</a:t>
+            </a:r>
+            <a:endParaRPr lang="en-US" sz="1650" dirty="0"/>
+          </a:p>
+        </p:txBody>
+      </p:sp>
+      <p:sp>
+        <p:nvSpPr>
+          <p:cNvPr id="2010" name="Text 3"/>
+          <p:cNvSpPr/>
+          <p:nvPr/>
+        </p:nvSpPr>
+        <p:spPr>
+          <a:xfrm>
+            <a:off x="14584680" y="2788920"/>
+            <a:ext cx="1005840" cy="274320"/>
+          </a:xfrm>
+          <a:prstGeom prst="rect">
+            <a:avLst/>
+          </a:prstGeom>
+          <a:noFill/>
+          <a:ln/>
+        </p:spPr>
+        <p:txBody>
+          <a:bodyPr wrap="square" lIns="25400" tIns="25400" rIns="25400" bIns="25400" rtlCol="0" anchor="t">
+            <a:normAutofit/>
+          </a:bodyPr>
+          <a:lstStyle/>
+          <a:p>
+            <a:pPr algn="l" indent="0" marL="0">
+              <a:buNone/>
+            </a:pPr>
+            <a:r>
+              <a:rPr lang="en-US" sz="1250" b="0" dirty="0">
+                <a:solidFill>
+                  <a:srgbClr val="9A938A"/>
+                </a:solidFill>
+                <a:latin typeface="IBM Plex Mono" pitchFamily="34" charset="0"/>
+                <a:ea typeface="IBM Plex Mono" pitchFamily="34" charset="-122"/>
+                <a:cs typeface="IBM Plex Mono" pitchFamily="34" charset="-120"/>
+              </a:rPr>
+              <a:t>r</a:t>
+            </a:r>
+            <a:endParaRPr lang="en-US" sz="1650" dirty="0"/>
+          </a:p>
+        </p:txBody>
+      </p:sp>
+      <p:sp>
+        <p:nvSpPr>
+          <p:cNvPr id="2011" name="Text 3"/>
+          <p:cNvSpPr/>
+          <p:nvPr/>
+        </p:nvSpPr>
+        <p:spPr>
+          <a:xfrm>
+            <a:off x="15681959" y="2788920"/>
+            <a:ext cx="1463040" cy="274320"/>
+          </a:xfrm>
+          <a:prstGeom prst="rect">
+            <a:avLst/>
+          </a:prstGeom>
+          <a:noFill/>
+          <a:ln/>
+        </p:spPr>
+        <p:txBody>
+          <a:bodyPr wrap="square" lIns="25400" tIns="25400" rIns="25400" bIns="25400" rtlCol="0" anchor="t">
+            <a:normAutofit/>
+          </a:bodyPr>
+          <a:lstStyle/>
+          <a:p>
+            <a:pPr algn="l" indent="0" marL="0">
+              <a:buNone/>
+            </a:pPr>
+            <a:r>
+              <a:rPr lang="en-US" sz="1250" b="0" dirty="0">
+                <a:solidFill>
+                  <a:srgbClr val="9A938A"/>
+                </a:solidFill>
+                <a:latin typeface="IBM Plex Mono" pitchFamily="34" charset="0"/>
+                <a:ea typeface="IBM Plex Mono" pitchFamily="34" charset="-122"/>
+                <a:cs typeface="IBM Plex Mono" pitchFamily="34" charset="-120"/>
+              </a:rPr>
+              <a:t>HOLM</a:t>
+            </a:r>
+            <a:endParaRPr lang="en-US" sz="1650" dirty="0"/>
+          </a:p>
+        </p:txBody>
+      </p:sp>
+      <p:sp>
+        <p:nvSpPr>
+          <p:cNvPr id="2012" name="Text 3"/>
+          <p:cNvSpPr/>
+          <p:nvPr/>
+        </p:nvSpPr>
+        <p:spPr>
+          <a:xfrm>
+            <a:off x="1234440" y="3154680"/>
+            <a:ext cx="822960" cy="329184"/>
+          </a:xfrm>
+          <a:prstGeom prst="rect">
+            <a:avLst/>
+          </a:prstGeom>
+          <a:noFill/>
+          <a:ln/>
+        </p:spPr>
+        <p:txBody>
+          <a:bodyPr wrap="square" lIns="25400" tIns="25400" rIns="25400" bIns="25400" rtlCol="0" anchor="t">
+            <a:normAutofit/>
+          </a:bodyPr>
+          <a:lstStyle/>
+          <a:p>
+            <a:pPr algn="l" indent="0" marL="0">
+              <a:buNone/>
+            </a:pPr>
+            <a:r>
+              <a:rPr lang="en-US" sz="1400" b="1" dirty="0">
+                <a:solidFill>
+                  <a:srgbClr val="1A2430"/>
+                </a:solidFill>
+                <a:latin typeface="IBM Plex Mono" pitchFamily="34" charset="0"/>
+                <a:ea typeface="IBM Plex Mono" pitchFamily="34" charset="-122"/>
+                <a:cs typeface="IBM Plex Mono" pitchFamily="34" charset="-120"/>
+              </a:rPr>
+              <a:t>Q01</a:t>
+            </a:r>
+            <a:endParaRPr lang="en-US" sz="1650" dirty="0"/>
+          </a:p>
+        </p:txBody>
+      </p:sp>
+      <p:sp>
+        <p:nvSpPr>
+          <p:cNvPr id="2013" name="Text 3"/>
+          <p:cNvSpPr/>
+          <p:nvPr/>
+        </p:nvSpPr>
+        <p:spPr>
+          <a:xfrm>
+            <a:off x="2057400" y="3154680"/>
+            <a:ext cx="4206240" cy="329184"/>
+          </a:xfrm>
+          <a:prstGeom prst="rect">
+            <a:avLst/>
+          </a:prstGeom>
+          <a:noFill/>
+          <a:ln/>
+        </p:spPr>
+        <p:txBody>
+          <a:bodyPr wrap="square" lIns="25400" tIns="25400" rIns="25400" bIns="25400" rtlCol="0" anchor="t">
+            <a:normAutofit/>
+          </a:bodyPr>
+          <a:lstStyle/>
+          <a:p>
+            <a:pPr algn="l" indent="0" marL="0">
+              <a:buNone/>
+            </a:pPr>
+            <a:r>
+              <a:rPr lang="en-US" sz="1400" b="0" dirty="0">
+                <a:solidFill>
+                  <a:srgbClr val="3D4652"/>
+                </a:solidFill>
+                <a:latin typeface="Space Grotesk" pitchFamily="34" charset="0"/>
+                <a:ea typeface="IBM Plex Mono" pitchFamily="34" charset="-122"/>
+                <a:cs typeface="IBM Plex Mono" pitchFamily="34" charset="-120"/>
+              </a:rPr>
+              <a:t>Top scorers by season</a:t>
+            </a:r>
+            <a:endParaRPr lang="en-US" sz="1650" dirty="0"/>
+          </a:p>
+        </p:txBody>
+      </p:sp>
+      <p:sp>
+        <p:nvSpPr>
+          <p:cNvPr id="2014" name="Text 3"/>
+          <p:cNvSpPr/>
+          <p:nvPr/>
+        </p:nvSpPr>
+        <p:spPr>
+          <a:xfrm>
+            <a:off x="6355080" y="3154680"/>
+            <a:ext cx="1463040" cy="329184"/>
+          </a:xfrm>
+          <a:prstGeom prst="rect">
+            <a:avLst/>
+          </a:prstGeom>
+          <a:noFill/>
+          <a:ln/>
+        </p:spPr>
+        <p:txBody>
+          <a:bodyPr wrap="square" lIns="25400" tIns="25400" rIns="25400" bIns="25400" rtlCol="0" anchor="t">
+            <a:normAutofit/>
+          </a:bodyPr>
+          <a:lstStyle/>
+          <a:p>
+            <a:pPr algn="l" indent="0" marL="0">
+              <a:buNone/>
+            </a:pPr>
+            <a:r>
+              <a:rPr lang="en-US" sz="1400" b="0" dirty="0">
+                <a:solidFill>
+                  <a:srgbClr val="33608F"/>
+                </a:solidFill>
+                <a:latin typeface="IBM Plex Mono" pitchFamily="34" charset="0"/>
+                <a:ea typeface="IBM Plex Mono" pitchFamily="34" charset="-122"/>
+                <a:cs typeface="IBM Plex Mono" pitchFamily="34" charset="-120"/>
+              </a:rPr>
+              <a:t>10.3 ms</a:t>
+            </a:r>
+            <a:endParaRPr lang="en-US" sz="1650" dirty="0"/>
+          </a:p>
+        </p:txBody>
+      </p:sp>
+      <p:sp>
+        <p:nvSpPr>
+          <p:cNvPr id="2015" name="Text 3"/>
+          <p:cNvSpPr/>
+          <p:nvPr/>
+        </p:nvSpPr>
+        <p:spPr>
+          <a:xfrm>
+            <a:off x="7909560" y="3154680"/>
+            <a:ext cx="1463040" cy="329184"/>
+          </a:xfrm>
+          <a:prstGeom prst="rect">
+            <a:avLst/>
+          </a:prstGeom>
+          <a:noFill/>
+          <a:ln/>
+        </p:spPr>
+        <p:txBody>
+          <a:bodyPr wrap="square" lIns="25400" tIns="25400" rIns="25400" bIns="25400" rtlCol="0" anchor="t">
+            <a:normAutofit/>
+          </a:bodyPr>
+          <a:lstStyle/>
+          <a:p>
+            <a:pPr algn="l" indent="0" marL="0">
+              <a:buNone/>
+            </a:pPr>
+            <a:r>
+              <a:rPr lang="en-US" sz="1400" b="0" dirty="0">
+                <a:solidFill>
+                  <a:srgbClr val="1E7A52"/>
+                </a:solidFill>
+                <a:latin typeface="IBM Plex Mono" pitchFamily="34" charset="0"/>
+                <a:ea typeface="IBM Plex Mono" pitchFamily="34" charset="-122"/>
+                <a:cs typeface="IBM Plex Mono" pitchFamily="34" charset="-120"/>
+              </a:rPr>
+              <a:t>6.9 ms</a:t>
+            </a:r>
+            <a:endParaRPr lang="en-US" sz="1650" dirty="0"/>
+          </a:p>
+        </p:txBody>
+      </p:sp>
+      <p:sp>
+        <p:nvSpPr>
+          <p:cNvPr id="2016" name="Text 3"/>
+          <p:cNvSpPr/>
+          <p:nvPr/>
+        </p:nvSpPr>
+        <p:spPr>
+          <a:xfrm>
+            <a:off x="9464040" y="3154680"/>
+            <a:ext cx="1463040" cy="329184"/>
+          </a:xfrm>
+          <a:prstGeom prst="rect">
+            <a:avLst/>
+          </a:prstGeom>
+          <a:noFill/>
+          <a:ln/>
+        </p:spPr>
+        <p:txBody>
+          <a:bodyPr wrap="square" lIns="25400" tIns="25400" rIns="25400" bIns="25400" rtlCol="0" anchor="t">
+            <a:normAutofit/>
+          </a:bodyPr>
+          <a:lstStyle/>
+          <a:p>
+            <a:pPr algn="l" indent="0" marL="0">
+              <a:buNone/>
+            </a:pPr>
+            <a:r>
+              <a:rPr lang="en-US" sz="1400" b="1" dirty="0">
+                <a:solidFill>
+                  <a:srgbClr val="1E7A52"/>
+                </a:solidFill>
+                <a:latin typeface="IBM Plex Mono" pitchFamily="34" charset="0"/>
+                <a:ea typeface="IBM Plex Mono" pitchFamily="34" charset="-122"/>
+                <a:cs typeface="IBM Plex Mono" pitchFamily="34" charset="-120"/>
+              </a:rPr>
+              <a:t>1.51×</a:t>
+            </a:r>
+            <a:endParaRPr lang="en-US" sz="1650" dirty="0"/>
+          </a:p>
+        </p:txBody>
+      </p:sp>
+      <p:sp>
+        <p:nvSpPr>
+          <p:cNvPr id="2017" name="Text 3"/>
+          <p:cNvSpPr/>
+          <p:nvPr/>
+        </p:nvSpPr>
+        <p:spPr>
+          <a:xfrm>
+            <a:off x="11018520" y="3154680"/>
+            <a:ext cx="2011680" cy="329184"/>
+          </a:xfrm>
+          <a:prstGeom prst="rect">
+            <a:avLst/>
+          </a:prstGeom>
+          <a:noFill/>
+          <a:ln/>
+        </p:spPr>
+        <p:txBody>
+          <a:bodyPr wrap="square" lIns="25400" tIns="25400" rIns="25400" bIns="25400" rtlCol="0" anchor="t">
+            <a:normAutofit/>
+          </a:bodyPr>
+          <a:lstStyle/>
+          <a:p>
+            <a:pPr algn="l" indent="0" marL="0">
+              <a:buNone/>
+            </a:pPr>
+            <a:r>
+              <a:rPr lang="en-US" sz="1400" b="0" dirty="0">
+                <a:solidFill>
+                  <a:srgbClr val="1E7A52"/>
+                </a:solidFill>
+                <a:latin typeface="IBM Plex Mono" pitchFamily="34" charset="0"/>
+                <a:ea typeface="IBM Plex Mono" pitchFamily="34" charset="-122"/>
+                <a:cs typeface="IBM Plex Mono" pitchFamily="34" charset="-120"/>
+              </a:rPr>
+              <a:t>Neo4j</a:t>
+            </a:r>
+            <a:endParaRPr lang="en-US" sz="1650" dirty="0"/>
+          </a:p>
+        </p:txBody>
+      </p:sp>
+      <p:sp>
+        <p:nvSpPr>
+          <p:cNvPr id="2018" name="Text 3"/>
+          <p:cNvSpPr/>
+          <p:nvPr/>
+        </p:nvSpPr>
+        <p:spPr>
+          <a:xfrm>
+            <a:off x="13121640" y="3154680"/>
+            <a:ext cx="1371600" cy="329184"/>
+          </a:xfrm>
+          <a:prstGeom prst="rect">
+            <a:avLst/>
+          </a:prstGeom>
+          <a:noFill/>
+          <a:ln/>
+        </p:spPr>
+        <p:txBody>
+          <a:bodyPr wrap="square" lIns="25400" tIns="25400" rIns="25400" bIns="25400" rtlCol="0" anchor="t">
+            <a:normAutofit/>
+          </a:bodyPr>
+          <a:lstStyle/>
+          <a:p>
+            <a:pPr algn="l" indent="0" marL="0">
+              <a:buNone/>
+            </a:pPr>
+            <a:r>
+              <a:rPr lang="en-US" sz="1400" b="0" dirty="0">
+                <a:solidFill>
+                  <a:srgbClr val="3D4652"/>
+                </a:solidFill>
+                <a:latin typeface="IBM Plex Mono" pitchFamily="34" charset="0"/>
+                <a:ea typeface="IBM Plex Mono" pitchFamily="34" charset="-122"/>
+                <a:cs typeface="IBM Plex Mono" pitchFamily="34" charset="-120"/>
+              </a:rPr>
+              <a:t>&lt; 0.001</a:t>
+            </a:r>
+            <a:endParaRPr lang="en-US" sz="1650" dirty="0"/>
+          </a:p>
+        </p:txBody>
+      </p:sp>
+      <p:sp>
+        <p:nvSpPr>
+          <p:cNvPr id="2019" name="Text 3"/>
+          <p:cNvSpPr/>
+          <p:nvPr/>
+        </p:nvSpPr>
+        <p:spPr>
+          <a:xfrm>
+            <a:off x="14584680" y="3154680"/>
+            <a:ext cx="1005840" cy="329184"/>
+          </a:xfrm>
+          <a:prstGeom prst="rect">
+            <a:avLst/>
+          </a:prstGeom>
+          <a:noFill/>
+          <a:ln/>
+        </p:spPr>
+        <p:txBody>
+          <a:bodyPr wrap="square" lIns="25400" tIns="25400" rIns="25400" bIns="25400" rtlCol="0" anchor="t">
+            <a:normAutofit/>
+          </a:bodyPr>
+          <a:lstStyle/>
+          <a:p>
+            <a:pPr algn="l" indent="0" marL="0">
+              <a:buNone/>
+            </a:pPr>
+            <a:r>
+              <a:rPr lang="en-US" sz="1400" b="0" dirty="0">
+                <a:solidFill>
+                  <a:srgbClr val="3D4652"/>
+                </a:solidFill>
+                <a:latin typeface="IBM Plex Mono" pitchFamily="34" charset="0"/>
+                <a:ea typeface="IBM Plex Mono" pitchFamily="34" charset="-122"/>
+                <a:cs typeface="IBM Plex Mono" pitchFamily="34" charset="-120"/>
+              </a:rPr>
+              <a:t>0.75</a:t>
+            </a:r>
+            <a:endParaRPr lang="en-US" sz="1650" dirty="0"/>
+          </a:p>
+        </p:txBody>
+      </p:sp>
+      <p:sp>
+        <p:nvSpPr>
+          <p:cNvPr id="2020" name="Text 3"/>
+          <p:cNvSpPr/>
+          <p:nvPr/>
+        </p:nvSpPr>
+        <p:spPr>
+          <a:xfrm>
+            <a:off x="15681959" y="3154680"/>
+            <a:ext cx="1463040" cy="329184"/>
+          </a:xfrm>
+          <a:prstGeom prst="rect">
+            <a:avLst/>
+          </a:prstGeom>
+          <a:noFill/>
+          <a:ln/>
+        </p:spPr>
+        <p:txBody>
+          <a:bodyPr wrap="square" lIns="25400" tIns="25400" rIns="25400" bIns="25400" rtlCol="0" anchor="t">
+            <a:normAutofit/>
+          </a:bodyPr>
+          <a:lstStyle/>
+          <a:p>
+            <a:pPr algn="l" indent="0" marL="0">
+              <a:buNone/>
+            </a:pPr>
+            <a:r>
+              <a:rPr lang="en-US" sz="1400" b="1" dirty="0">
+                <a:solidFill>
+                  <a:srgbClr val="1E7A52"/>
+                </a:solidFill>
+                <a:latin typeface="IBM Plex Mono" pitchFamily="34" charset="0"/>
+                <a:ea typeface="IBM Plex Mono" pitchFamily="34" charset="-122"/>
+                <a:cs typeface="IBM Plex Mono" pitchFamily="34" charset="-120"/>
+              </a:rPr>
+              <a:t>yes</a:t>
+            </a:r>
+            <a:endParaRPr lang="en-US" sz="1650" dirty="0"/>
+          </a:p>
+        </p:txBody>
+      </p:sp>
+      <p:sp>
+        <p:nvSpPr>
+          <p:cNvPr id="2021" name="Text 3"/>
+          <p:cNvSpPr/>
+          <p:nvPr/>
+        </p:nvSpPr>
+        <p:spPr>
+          <a:xfrm>
+            <a:off x="1234440" y="3575304"/>
+            <a:ext cx="822960" cy="329184"/>
+          </a:xfrm>
+          <a:prstGeom prst="rect">
+            <a:avLst/>
+          </a:prstGeom>
+          <a:noFill/>
+          <a:ln/>
+        </p:spPr>
+        <p:txBody>
+          <a:bodyPr wrap="square" lIns="25400" tIns="25400" rIns="25400" bIns="25400" rtlCol="0" anchor="t">
+            <a:normAutofit/>
+          </a:bodyPr>
+          <a:lstStyle/>
+          <a:p>
+            <a:pPr algn="l" indent="0" marL="0">
+              <a:buNone/>
+            </a:pPr>
+            <a:r>
+              <a:rPr lang="en-US" sz="1400" b="1" dirty="0">
+                <a:solidFill>
+                  <a:srgbClr val="1A2430"/>
+                </a:solidFill>
+                <a:latin typeface="IBM Plex Mono" pitchFamily="34" charset="0"/>
+                <a:ea typeface="IBM Plex Mono" pitchFamily="34" charset="-122"/>
+                <a:cs typeface="IBM Plex Mono" pitchFamily="34" charset="-120"/>
+              </a:rPr>
+              <a:t>Q02</a:t>
+            </a:r>
+            <a:endParaRPr lang="en-US" sz="1650" dirty="0"/>
+          </a:p>
+        </p:txBody>
+      </p:sp>
+      <p:sp>
+        <p:nvSpPr>
+          <p:cNvPr id="2022" name="Text 3"/>
+          <p:cNvSpPr/>
+          <p:nvPr/>
+        </p:nvSpPr>
+        <p:spPr>
+          <a:xfrm>
+            <a:off x="2057400" y="3575304"/>
+            <a:ext cx="4206240" cy="329184"/>
+          </a:xfrm>
+          <a:prstGeom prst="rect">
+            <a:avLst/>
+          </a:prstGeom>
+          <a:noFill/>
+          <a:ln/>
+        </p:spPr>
+        <p:txBody>
+          <a:bodyPr wrap="square" lIns="25400" tIns="25400" rIns="25400" bIns="25400" rtlCol="0" anchor="t">
+            <a:normAutofit/>
+          </a:bodyPr>
+          <a:lstStyle/>
+          <a:p>
+            <a:pPr algn="l" indent="0" marL="0">
+              <a:buNone/>
+            </a:pPr>
+            <a:r>
+              <a:rPr lang="en-US" sz="1400" b="0" dirty="0">
+                <a:solidFill>
+                  <a:srgbClr val="3D4652"/>
+                </a:solidFill>
+                <a:latin typeface="Space Grotesk" pitchFamily="34" charset="0"/>
+                <a:ea typeface="IBM Plex Mono" pitchFamily="34" charset="-122"/>
+                <a:cs typeface="IBM Plex Mono" pitchFamily="34" charset="-120"/>
+              </a:rPr>
+              <a:t>League standings</a:t>
+            </a:r>
+            <a:endParaRPr lang="en-US" sz="1650" dirty="0"/>
+          </a:p>
+        </p:txBody>
+      </p:sp>
+      <p:sp>
+        <p:nvSpPr>
+          <p:cNvPr id="2023" name="Text 3"/>
+          <p:cNvSpPr/>
+          <p:nvPr/>
+        </p:nvSpPr>
+        <p:spPr>
+          <a:xfrm>
+            <a:off x="6355080" y="3575304"/>
+            <a:ext cx="1463040" cy="329184"/>
+          </a:xfrm>
+          <a:prstGeom prst="rect">
+            <a:avLst/>
+          </a:prstGeom>
+          <a:noFill/>
+          <a:ln/>
+        </p:spPr>
+        <p:txBody>
+          <a:bodyPr wrap="square" lIns="25400" tIns="25400" rIns="25400" bIns="25400" rtlCol="0" anchor="t">
+            <a:normAutofit/>
+          </a:bodyPr>
+          <a:lstStyle/>
+          <a:p>
+            <a:pPr algn="l" indent="0" marL="0">
+              <a:buNone/>
+            </a:pPr>
+            <a:r>
+              <a:rPr lang="en-US" sz="1400" b="0" dirty="0">
+                <a:solidFill>
+                  <a:srgbClr val="33608F"/>
+                </a:solidFill>
+                <a:latin typeface="IBM Plex Mono" pitchFamily="34" charset="0"/>
+                <a:ea typeface="IBM Plex Mono" pitchFamily="34" charset="-122"/>
+                <a:cs typeface="IBM Plex Mono" pitchFamily="34" charset="-120"/>
+              </a:rPr>
+              <a:t>3.7 ms</a:t>
+            </a:r>
+            <a:endParaRPr lang="en-US" sz="1650" dirty="0"/>
+          </a:p>
+        </p:txBody>
+      </p:sp>
+      <p:sp>
+        <p:nvSpPr>
+          <p:cNvPr id="2024" name="Text 3"/>
+          <p:cNvSpPr/>
+          <p:nvPr/>
+        </p:nvSpPr>
+        <p:spPr>
+          <a:xfrm>
+            <a:off x="7909560" y="3575304"/>
+            <a:ext cx="1463040" cy="329184"/>
+          </a:xfrm>
+          <a:prstGeom prst="rect">
+            <a:avLst/>
+          </a:prstGeom>
+          <a:noFill/>
+          <a:ln/>
+        </p:spPr>
+        <p:txBody>
+          <a:bodyPr wrap="square" lIns="25400" tIns="25400" rIns="25400" bIns="25400" rtlCol="0" anchor="t">
+            <a:normAutofit/>
+          </a:bodyPr>
+          <a:lstStyle/>
+          <a:p>
+            <a:pPr algn="l" indent="0" marL="0">
+              <a:buNone/>
+            </a:pPr>
+            <a:r>
+              <a:rPr lang="en-US" sz="1400" b="0" dirty="0">
+                <a:solidFill>
+                  <a:srgbClr val="1E7A52"/>
+                </a:solidFill>
+                <a:latin typeface="IBM Plex Mono" pitchFamily="34" charset="0"/>
+                <a:ea typeface="IBM Plex Mono" pitchFamily="34" charset="-122"/>
+                <a:cs typeface="IBM Plex Mono" pitchFamily="34" charset="-120"/>
+              </a:rPr>
+              <a:t>5.1 ms</a:t>
+            </a:r>
+            <a:endParaRPr lang="en-US" sz="1650" dirty="0"/>
+          </a:p>
+        </p:txBody>
+      </p:sp>
+      <p:sp>
+        <p:nvSpPr>
+          <p:cNvPr id="2025" name="Text 3"/>
+          <p:cNvSpPr/>
+          <p:nvPr/>
+        </p:nvSpPr>
+        <p:spPr>
+          <a:xfrm>
+            <a:off x="9464040" y="3575304"/>
+            <a:ext cx="1463040" cy="329184"/>
+          </a:xfrm>
+          <a:prstGeom prst="rect">
+            <a:avLst/>
+          </a:prstGeom>
+          <a:noFill/>
+          <a:ln/>
+        </p:spPr>
+        <p:txBody>
+          <a:bodyPr wrap="square" lIns="25400" tIns="25400" rIns="25400" bIns="25400" rtlCol="0" anchor="t">
+            <a:normAutofit/>
+          </a:bodyPr>
+          <a:lstStyle/>
+          <a:p>
+            <a:pPr algn="l" indent="0" marL="0">
+              <a:buNone/>
+            </a:pPr>
+            <a:r>
+              <a:rPr lang="en-US" sz="1400" b="1" dirty="0">
+                <a:solidFill>
+                  <a:srgbClr val="9A938A"/>
+                </a:solidFill>
+                <a:latin typeface="IBM Plex Mono" pitchFamily="34" charset="0"/>
+                <a:ea typeface="IBM Plex Mono" pitchFamily="34" charset="-122"/>
+                <a:cs typeface="IBM Plex Mono" pitchFamily="34" charset="-120"/>
+              </a:rPr>
+              <a:t>1.38×</a:t>
+            </a:r>
+            <a:endParaRPr lang="en-US" sz="1650" dirty="0"/>
+          </a:p>
+        </p:txBody>
+      </p:sp>
+      <p:sp>
+        <p:nvSpPr>
+          <p:cNvPr id="2026" name="Text 3"/>
+          <p:cNvSpPr/>
+          <p:nvPr/>
+        </p:nvSpPr>
+        <p:spPr>
+          <a:xfrm>
+            <a:off x="11018520" y="3575304"/>
+            <a:ext cx="2011680" cy="329184"/>
+          </a:xfrm>
+          <a:prstGeom prst="rect">
+            <a:avLst/>
+          </a:prstGeom>
+          <a:noFill/>
+          <a:ln/>
+        </p:spPr>
+        <p:txBody>
+          <a:bodyPr wrap="square" lIns="25400" tIns="25400" rIns="25400" bIns="25400" rtlCol="0" anchor="t">
+            <a:normAutofit/>
+          </a:bodyPr>
+          <a:lstStyle/>
+          <a:p>
+            <a:pPr algn="l" indent="0" marL="0">
+              <a:buNone/>
+            </a:pPr>
+            <a:r>
+              <a:rPr lang="en-US" sz="1400" b="0" dirty="0">
+                <a:solidFill>
+                  <a:srgbClr val="9A938A"/>
+                </a:solidFill>
+                <a:latin typeface="IBM Plex Mono" pitchFamily="34" charset="0"/>
+                <a:ea typeface="IBM Plex Mono" pitchFamily="34" charset="-122"/>
+                <a:cs typeface="IBM Plex Mono" pitchFamily="34" charset="-120"/>
+              </a:rPr>
+              <a:t>—</a:t>
+            </a:r>
+            <a:endParaRPr lang="en-US" sz="1650" dirty="0"/>
+          </a:p>
+        </p:txBody>
+      </p:sp>
+      <p:sp>
+        <p:nvSpPr>
+          <p:cNvPr id="2027" name="Text 3"/>
+          <p:cNvSpPr/>
+          <p:nvPr/>
+        </p:nvSpPr>
+        <p:spPr>
+          <a:xfrm>
+            <a:off x="13121640" y="3575304"/>
+            <a:ext cx="1371600" cy="329184"/>
+          </a:xfrm>
+          <a:prstGeom prst="rect">
+            <a:avLst/>
+          </a:prstGeom>
+          <a:noFill/>
+          <a:ln/>
+        </p:spPr>
+        <p:txBody>
+          <a:bodyPr wrap="square" lIns="25400" tIns="25400" rIns="25400" bIns="25400" rtlCol="0" anchor="t">
+            <a:normAutofit/>
+          </a:bodyPr>
+          <a:lstStyle/>
+          <a:p>
+            <a:pPr algn="l" indent="0" marL="0">
+              <a:buNone/>
+            </a:pPr>
+            <a:r>
+              <a:rPr lang="en-US" sz="1400" b="0" dirty="0">
+                <a:solidFill>
+                  <a:srgbClr val="3D4652"/>
+                </a:solidFill>
+                <a:latin typeface="IBM Plex Mono" pitchFamily="34" charset="0"/>
+                <a:ea typeface="IBM Plex Mono" pitchFamily="34" charset="-122"/>
+                <a:cs typeface="IBM Plex Mono" pitchFamily="34" charset="-120"/>
+              </a:rPr>
+              <a:t>0.229</a:t>
+            </a:r>
+            <a:endParaRPr lang="en-US" sz="1650" dirty="0"/>
+          </a:p>
+        </p:txBody>
+      </p:sp>
+      <p:sp>
+        <p:nvSpPr>
+          <p:cNvPr id="2028" name="Text 3"/>
+          <p:cNvSpPr/>
+          <p:nvPr/>
+        </p:nvSpPr>
+        <p:spPr>
+          <a:xfrm>
+            <a:off x="14584680" y="3575304"/>
+            <a:ext cx="1005840" cy="329184"/>
+          </a:xfrm>
+          <a:prstGeom prst="rect">
+            <a:avLst/>
+          </a:prstGeom>
+          <a:noFill/>
+          <a:ln/>
+        </p:spPr>
+        <p:txBody>
+          <a:bodyPr wrap="square" lIns="25400" tIns="25400" rIns="25400" bIns="25400" rtlCol="0" anchor="t">
+            <a:normAutofit/>
+          </a:bodyPr>
+          <a:lstStyle/>
+          <a:p>
+            <a:pPr algn="l" indent="0" marL="0">
+              <a:buNone/>
+            </a:pPr>
+            <a:r>
+              <a:rPr lang="en-US" sz="1400" b="0" dirty="0">
+                <a:solidFill>
+                  <a:srgbClr val="3D4652"/>
+                </a:solidFill>
+                <a:latin typeface="IBM Plex Mono" pitchFamily="34" charset="0"/>
+                <a:ea typeface="IBM Plex Mono" pitchFamily="34" charset="-122"/>
+                <a:cs typeface="IBM Plex Mono" pitchFamily="34" charset="-120"/>
+              </a:rPr>
+              <a:t>0.26</a:t>
+            </a:r>
+            <a:endParaRPr lang="en-US" sz="1650" dirty="0"/>
+          </a:p>
+        </p:txBody>
+      </p:sp>
+      <p:sp>
+        <p:nvSpPr>
+          <p:cNvPr id="2029" name="Text 3"/>
+          <p:cNvSpPr/>
+          <p:nvPr/>
+        </p:nvSpPr>
+        <p:spPr>
+          <a:xfrm>
+            <a:off x="15681959" y="3575304"/>
+            <a:ext cx="1463040" cy="329184"/>
+          </a:xfrm>
+          <a:prstGeom prst="rect">
+            <a:avLst/>
+          </a:prstGeom>
+          <a:noFill/>
+          <a:ln/>
+        </p:spPr>
+        <p:txBody>
+          <a:bodyPr wrap="square" lIns="25400" tIns="25400" rIns="25400" bIns="25400" rtlCol="0" anchor="t">
+            <a:normAutofit/>
+          </a:bodyPr>
+          <a:lstStyle/>
+          <a:p>
+            <a:pPr algn="l" indent="0" marL="0">
+              <a:buNone/>
+            </a:pPr>
+            <a:r>
+              <a:rPr lang="en-US" sz="1400" b="0" dirty="0">
+                <a:solidFill>
+                  <a:srgbClr val="B0483A"/>
+                </a:solidFill>
+                <a:latin typeface="IBM Plex Mono" pitchFamily="34" charset="0"/>
+                <a:ea typeface="IBM Plex Mono" pitchFamily="34" charset="-122"/>
+                <a:cs typeface="IBM Plex Mono" pitchFamily="34" charset="-120"/>
+              </a:rPr>
+              <a:t>no</a:t>
+            </a:r>
+            <a:endParaRPr lang="en-US" sz="1650" dirty="0"/>
+          </a:p>
+        </p:txBody>
+      </p:sp>
+      <p:sp>
+        <p:nvSpPr>
+          <p:cNvPr id="2030" name="Text 3"/>
+          <p:cNvSpPr/>
+          <p:nvPr/>
+        </p:nvSpPr>
+        <p:spPr>
+          <a:xfrm>
+            <a:off x="1234440" y="3995928"/>
+            <a:ext cx="822960" cy="329184"/>
+          </a:xfrm>
+          <a:prstGeom prst="rect">
+            <a:avLst/>
+          </a:prstGeom>
+          <a:noFill/>
+          <a:ln/>
+        </p:spPr>
+        <p:txBody>
+          <a:bodyPr wrap="square" lIns="25400" tIns="25400" rIns="25400" bIns="25400" rtlCol="0" anchor="t">
+            <a:normAutofit/>
+          </a:bodyPr>
+          <a:lstStyle/>
+          <a:p>
+            <a:pPr algn="l" indent="0" marL="0">
+              <a:buNone/>
+            </a:pPr>
+            <a:r>
+              <a:rPr lang="en-US" sz="1400" b="1" dirty="0">
+                <a:solidFill>
+                  <a:srgbClr val="1A2430"/>
+                </a:solidFill>
+                <a:latin typeface="IBM Plex Mono" pitchFamily="34" charset="0"/>
+                <a:ea typeface="IBM Plex Mono" pitchFamily="34" charset="-122"/>
+                <a:cs typeface="IBM Plex Mono" pitchFamily="34" charset="-120"/>
+              </a:rPr>
+              <a:t>Q03</a:t>
+            </a:r>
+            <a:endParaRPr lang="en-US" sz="1650" dirty="0"/>
+          </a:p>
+        </p:txBody>
+      </p:sp>
+      <p:sp>
+        <p:nvSpPr>
+          <p:cNvPr id="2031" name="Text 3"/>
+          <p:cNvSpPr/>
+          <p:nvPr/>
+        </p:nvSpPr>
+        <p:spPr>
+          <a:xfrm>
+            <a:off x="2057400" y="3995928"/>
+            <a:ext cx="4206240" cy="329184"/>
+          </a:xfrm>
+          <a:prstGeom prst="rect">
+            <a:avLst/>
+          </a:prstGeom>
+          <a:noFill/>
+          <a:ln/>
+        </p:spPr>
+        <p:txBody>
+          <a:bodyPr wrap="square" lIns="25400" tIns="25400" rIns="25400" bIns="25400" rtlCol="0" anchor="t">
+            <a:normAutofit/>
+          </a:bodyPr>
+          <a:lstStyle/>
+          <a:p>
+            <a:pPr algn="l" indent="0" marL="0">
+              <a:buNone/>
+            </a:pPr>
+            <a:r>
+              <a:rPr lang="en-US" sz="1400" b="0" dirty="0">
+                <a:solidFill>
+                  <a:srgbClr val="3D4652"/>
+                </a:solidFill>
+                <a:latin typeface="Space Grotesk" pitchFamily="34" charset="0"/>
+                <a:ea typeface="IBM Plex Mono" pitchFamily="34" charset="-122"/>
+                <a:cs typeface="IBM Plex Mono" pitchFamily="34" charset="-120"/>
+              </a:rPr>
+              <a:t>Goals per match by league</a:t>
+            </a:r>
+            <a:endParaRPr lang="en-US" sz="1650" dirty="0"/>
+          </a:p>
+        </p:txBody>
+      </p:sp>
+      <p:sp>
+        <p:nvSpPr>
+          <p:cNvPr id="2032" name="Text 3"/>
+          <p:cNvSpPr/>
+          <p:nvPr/>
+        </p:nvSpPr>
+        <p:spPr>
+          <a:xfrm>
+            <a:off x="6355080" y="3995928"/>
+            <a:ext cx="1463040" cy="329184"/>
+          </a:xfrm>
+          <a:prstGeom prst="rect">
+            <a:avLst/>
+          </a:prstGeom>
+          <a:noFill/>
+          <a:ln/>
+        </p:spPr>
+        <p:txBody>
+          <a:bodyPr wrap="square" lIns="25400" tIns="25400" rIns="25400" bIns="25400" rtlCol="0" anchor="t">
+            <a:normAutofit/>
+          </a:bodyPr>
+          <a:lstStyle/>
+          <a:p>
+            <a:pPr algn="l" indent="0" marL="0">
+              <a:buNone/>
+            </a:pPr>
+            <a:r>
+              <a:rPr lang="en-US" sz="1400" b="0" dirty="0">
+                <a:solidFill>
+                  <a:srgbClr val="33608F"/>
+                </a:solidFill>
+                <a:latin typeface="IBM Plex Mono" pitchFamily="34" charset="0"/>
+                <a:ea typeface="IBM Plex Mono" pitchFamily="34" charset="-122"/>
+                <a:cs typeface="IBM Plex Mono" pitchFamily="34" charset="-120"/>
+              </a:rPr>
+              <a:t>8.3 ms</a:t>
+            </a:r>
+            <a:endParaRPr lang="en-US" sz="1650" dirty="0"/>
+          </a:p>
+        </p:txBody>
+      </p:sp>
+      <p:sp>
+        <p:nvSpPr>
+          <p:cNvPr id="2033" name="Text 3"/>
+          <p:cNvSpPr/>
+          <p:nvPr/>
+        </p:nvSpPr>
+        <p:spPr>
+          <a:xfrm>
+            <a:off x="7909560" y="3995928"/>
+            <a:ext cx="1463040" cy="329184"/>
+          </a:xfrm>
+          <a:prstGeom prst="rect">
+            <a:avLst/>
+          </a:prstGeom>
+          <a:noFill/>
+          <a:ln/>
+        </p:spPr>
+        <p:txBody>
+          <a:bodyPr wrap="square" lIns="25400" tIns="25400" rIns="25400" bIns="25400" rtlCol="0" anchor="t">
+            <a:normAutofit/>
+          </a:bodyPr>
+          <a:lstStyle/>
+          <a:p>
+            <a:pPr algn="l" indent="0" marL="0">
+              <a:buNone/>
+            </a:pPr>
+            <a:r>
+              <a:rPr lang="en-US" sz="1400" b="0" dirty="0">
+                <a:solidFill>
+                  <a:srgbClr val="1E7A52"/>
+                </a:solidFill>
+                <a:latin typeface="IBM Plex Mono" pitchFamily="34" charset="0"/>
+                <a:ea typeface="IBM Plex Mono" pitchFamily="34" charset="-122"/>
+                <a:cs typeface="IBM Plex Mono" pitchFamily="34" charset="-120"/>
+              </a:rPr>
+              <a:t>5.4 ms</a:t>
+            </a:r>
+            <a:endParaRPr lang="en-US" sz="1650" dirty="0"/>
+          </a:p>
+        </p:txBody>
+      </p:sp>
+      <p:sp>
+        <p:nvSpPr>
+          <p:cNvPr id="2034" name="Text 3"/>
+          <p:cNvSpPr/>
+          <p:nvPr/>
+        </p:nvSpPr>
+        <p:spPr>
+          <a:xfrm>
+            <a:off x="9464040" y="3995928"/>
+            <a:ext cx="1463040" cy="329184"/>
+          </a:xfrm>
+          <a:prstGeom prst="rect">
+            <a:avLst/>
+          </a:prstGeom>
+          <a:noFill/>
+          <a:ln/>
+        </p:spPr>
+        <p:txBody>
+          <a:bodyPr wrap="square" lIns="25400" tIns="25400" rIns="25400" bIns="25400" rtlCol="0" anchor="t">
+            <a:normAutofit/>
+          </a:bodyPr>
+          <a:lstStyle/>
+          <a:p>
+            <a:pPr algn="l" indent="0" marL="0">
+              <a:buNone/>
+            </a:pPr>
+            <a:r>
+              <a:rPr lang="en-US" sz="1400" b="1" dirty="0">
+                <a:solidFill>
+                  <a:srgbClr val="1E7A52"/>
+                </a:solidFill>
+                <a:latin typeface="IBM Plex Mono" pitchFamily="34" charset="0"/>
+                <a:ea typeface="IBM Plex Mono" pitchFamily="34" charset="-122"/>
+                <a:cs typeface="IBM Plex Mono" pitchFamily="34" charset="-120"/>
+              </a:rPr>
+              <a:t>1.54×</a:t>
+            </a:r>
+            <a:endParaRPr lang="en-US" sz="1650" dirty="0"/>
+          </a:p>
+        </p:txBody>
+      </p:sp>
+      <p:sp>
+        <p:nvSpPr>
+          <p:cNvPr id="2035" name="Text 3"/>
+          <p:cNvSpPr/>
+          <p:nvPr/>
+        </p:nvSpPr>
+        <p:spPr>
+          <a:xfrm>
+            <a:off x="11018520" y="3995928"/>
+            <a:ext cx="2011680" cy="329184"/>
+          </a:xfrm>
+          <a:prstGeom prst="rect">
+            <a:avLst/>
+          </a:prstGeom>
+          <a:noFill/>
+          <a:ln/>
+        </p:spPr>
+        <p:txBody>
+          <a:bodyPr wrap="square" lIns="25400" tIns="25400" rIns="25400" bIns="25400" rtlCol="0" anchor="t">
+            <a:normAutofit/>
+          </a:bodyPr>
+          <a:lstStyle/>
+          <a:p>
+            <a:pPr algn="l" indent="0" marL="0">
+              <a:buNone/>
+            </a:pPr>
+            <a:r>
+              <a:rPr lang="en-US" sz="1400" b="0" dirty="0">
+                <a:solidFill>
+                  <a:srgbClr val="1E7A52"/>
+                </a:solidFill>
+                <a:latin typeface="IBM Plex Mono" pitchFamily="34" charset="0"/>
+                <a:ea typeface="IBM Plex Mono" pitchFamily="34" charset="-122"/>
+                <a:cs typeface="IBM Plex Mono" pitchFamily="34" charset="-120"/>
+              </a:rPr>
+              <a:t>Neo4j</a:t>
+            </a:r>
+            <a:endParaRPr lang="en-US" sz="1650" dirty="0"/>
+          </a:p>
+        </p:txBody>
+      </p:sp>
+      <p:sp>
+        <p:nvSpPr>
+          <p:cNvPr id="2036" name="Text 3"/>
+          <p:cNvSpPr/>
+          <p:nvPr/>
+        </p:nvSpPr>
+        <p:spPr>
+          <a:xfrm>
+            <a:off x="13121640" y="3995928"/>
+            <a:ext cx="1371600" cy="329184"/>
+          </a:xfrm>
+          <a:prstGeom prst="rect">
+            <a:avLst/>
+          </a:prstGeom>
+          <a:noFill/>
+          <a:ln/>
+        </p:spPr>
+        <p:txBody>
+          <a:bodyPr wrap="square" lIns="25400" tIns="25400" rIns="25400" bIns="25400" rtlCol="0" anchor="t">
+            <a:normAutofit/>
+          </a:bodyPr>
+          <a:lstStyle/>
+          <a:p>
+            <a:pPr algn="l" indent="0" marL="0">
+              <a:buNone/>
+            </a:pPr>
+            <a:r>
+              <a:rPr lang="en-US" sz="1400" b="0" dirty="0">
+                <a:solidFill>
+                  <a:srgbClr val="3D4652"/>
+                </a:solidFill>
+                <a:latin typeface="IBM Plex Mono" pitchFamily="34" charset="0"/>
+                <a:ea typeface="IBM Plex Mono" pitchFamily="34" charset="-122"/>
+                <a:cs typeface="IBM Plex Mono" pitchFamily="34" charset="-120"/>
+              </a:rPr>
+              <a:t>0.028</a:t>
+            </a:r>
+            <a:endParaRPr lang="en-US" sz="1650" dirty="0"/>
+          </a:p>
+        </p:txBody>
+      </p:sp>
+      <p:sp>
+        <p:nvSpPr>
+          <p:cNvPr id="2037" name="Text 3"/>
+          <p:cNvSpPr/>
+          <p:nvPr/>
+        </p:nvSpPr>
+        <p:spPr>
+          <a:xfrm>
+            <a:off x="14584680" y="3995928"/>
+            <a:ext cx="1005840" cy="329184"/>
+          </a:xfrm>
+          <a:prstGeom prst="rect">
+            <a:avLst/>
+          </a:prstGeom>
+          <a:noFill/>
+          <a:ln/>
+        </p:spPr>
+        <p:txBody>
+          <a:bodyPr wrap="square" lIns="25400" tIns="25400" rIns="25400" bIns="25400" rtlCol="0" anchor="t">
+            <a:normAutofit/>
+          </a:bodyPr>
+          <a:lstStyle/>
+          <a:p>
+            <a:pPr algn="l" indent="0" marL="0">
+              <a:buNone/>
+            </a:pPr>
+            <a:r>
+              <a:rPr lang="en-US" sz="1400" b="0" dirty="0">
+                <a:solidFill>
+                  <a:srgbClr val="3D4652"/>
+                </a:solidFill>
+                <a:latin typeface="IBM Plex Mono" pitchFamily="34" charset="0"/>
+                <a:ea typeface="IBM Plex Mono" pitchFamily="34" charset="-122"/>
+                <a:cs typeface="IBM Plex Mono" pitchFamily="34" charset="-120"/>
+              </a:rPr>
+              <a:t>0.47</a:t>
+            </a:r>
+            <a:endParaRPr lang="en-US" sz="1650" dirty="0"/>
+          </a:p>
+        </p:txBody>
+      </p:sp>
+      <p:sp>
+        <p:nvSpPr>
+          <p:cNvPr id="2038" name="Text 3"/>
+          <p:cNvSpPr/>
+          <p:nvPr/>
+        </p:nvSpPr>
+        <p:spPr>
+          <a:xfrm>
+            <a:off x="15681959" y="3995928"/>
+            <a:ext cx="1463040" cy="329184"/>
+          </a:xfrm>
+          <a:prstGeom prst="rect">
+            <a:avLst/>
+          </a:prstGeom>
+          <a:noFill/>
+          <a:ln/>
+        </p:spPr>
+        <p:txBody>
+          <a:bodyPr wrap="square" lIns="25400" tIns="25400" rIns="25400" bIns="25400" rtlCol="0" anchor="t">
+            <a:normAutofit/>
+          </a:bodyPr>
+          <a:lstStyle/>
+          <a:p>
+            <a:pPr algn="l" indent="0" marL="0">
+              <a:buNone/>
+            </a:pPr>
+            <a:r>
+              <a:rPr lang="en-US" sz="1400" b="0" dirty="0">
+                <a:solidFill>
+                  <a:srgbClr val="B0483A"/>
+                </a:solidFill>
+                <a:latin typeface="IBM Plex Mono" pitchFamily="34" charset="0"/>
+                <a:ea typeface="IBM Plex Mono" pitchFamily="34" charset="-122"/>
+                <a:cs typeface="IBM Plex Mono" pitchFamily="34" charset="-120"/>
+              </a:rPr>
+              <a:t>no</a:t>
+            </a:r>
+            <a:endParaRPr lang="en-US" sz="1650" dirty="0"/>
+          </a:p>
+        </p:txBody>
+      </p:sp>
+      <p:sp>
+        <p:nvSpPr>
+          <p:cNvPr id="2039" name="Text 3"/>
+          <p:cNvSpPr/>
+          <p:nvPr/>
+        </p:nvSpPr>
+        <p:spPr>
+          <a:xfrm>
+            <a:off x="1234440" y="4416552"/>
+            <a:ext cx="822960" cy="329184"/>
+          </a:xfrm>
+          <a:prstGeom prst="rect">
+            <a:avLst/>
+          </a:prstGeom>
+          <a:noFill/>
+          <a:ln/>
+        </p:spPr>
+        <p:txBody>
+          <a:bodyPr wrap="square" lIns="25400" tIns="25400" rIns="25400" bIns="25400" rtlCol="0" anchor="t">
+            <a:normAutofit/>
+          </a:bodyPr>
+          <a:lstStyle/>
+          <a:p>
+            <a:pPr algn="l" indent="0" marL="0">
+              <a:buNone/>
+            </a:pPr>
+            <a:r>
+              <a:rPr lang="en-US" sz="1400" b="1" dirty="0">
+                <a:solidFill>
+                  <a:srgbClr val="1A2430"/>
+                </a:solidFill>
+                <a:latin typeface="IBM Plex Mono" pitchFamily="34" charset="0"/>
+                <a:ea typeface="IBM Plex Mono" pitchFamily="34" charset="-122"/>
+                <a:cs typeface="IBM Plex Mono" pitchFamily="34" charset="-120"/>
+              </a:rPr>
+              <a:t>Q04</a:t>
+            </a:r>
+            <a:endParaRPr lang="en-US" sz="1650" dirty="0"/>
+          </a:p>
+        </p:txBody>
+      </p:sp>
+      <p:sp>
+        <p:nvSpPr>
+          <p:cNvPr id="2040" name="Text 3"/>
+          <p:cNvSpPr/>
+          <p:nvPr/>
+        </p:nvSpPr>
+        <p:spPr>
+          <a:xfrm>
+            <a:off x="2057400" y="4416552"/>
+            <a:ext cx="4206240" cy="329184"/>
+          </a:xfrm>
+          <a:prstGeom prst="rect">
+            <a:avLst/>
+          </a:prstGeom>
+          <a:noFill/>
+          <a:ln/>
+        </p:spPr>
+        <p:txBody>
+          <a:bodyPr wrap="square" lIns="25400" tIns="25400" rIns="25400" bIns="25400" rtlCol="0" anchor="t">
+            <a:normAutofit/>
+          </a:bodyPr>
+          <a:lstStyle/>
+          <a:p>
+            <a:pPr algn="l" indent="0" marL="0">
+              <a:buNone/>
+            </a:pPr>
+            <a:r>
+              <a:rPr lang="en-US" sz="1400" b="0" dirty="0">
+                <a:solidFill>
+                  <a:srgbClr val="3D4652"/>
+                </a:solidFill>
+                <a:latin typeface="Space Grotesk" pitchFamily="34" charset="0"/>
+                <a:ea typeface="IBM Plex Mono" pitchFamily="34" charset="-122"/>
+                <a:cs typeface="IBM Plex Mono" pitchFamily="34" charset="-120"/>
+              </a:rPr>
+              <a:t>Home win % by team</a:t>
+            </a:r>
+            <a:endParaRPr lang="en-US" sz="1650" dirty="0"/>
+          </a:p>
+        </p:txBody>
+      </p:sp>
+      <p:sp>
+        <p:nvSpPr>
+          <p:cNvPr id="2041" name="Text 3"/>
+          <p:cNvSpPr/>
+          <p:nvPr/>
+        </p:nvSpPr>
+        <p:spPr>
+          <a:xfrm>
+            <a:off x="6355080" y="4416552"/>
+            <a:ext cx="1463040" cy="329184"/>
+          </a:xfrm>
+          <a:prstGeom prst="rect">
+            <a:avLst/>
+          </a:prstGeom>
+          <a:noFill/>
+          <a:ln/>
+        </p:spPr>
+        <p:txBody>
+          <a:bodyPr wrap="square" lIns="25400" tIns="25400" rIns="25400" bIns="25400" rtlCol="0" anchor="t">
+            <a:normAutofit/>
+          </a:bodyPr>
+          <a:lstStyle/>
+          <a:p>
+            <a:pPr algn="l" indent="0" marL="0">
+              <a:buNone/>
+            </a:pPr>
+            <a:r>
+              <a:rPr lang="en-US" sz="1400" b="0" dirty="0">
+                <a:solidFill>
+                  <a:srgbClr val="33608F"/>
+                </a:solidFill>
+                <a:latin typeface="IBM Plex Mono" pitchFamily="34" charset="0"/>
+                <a:ea typeface="IBM Plex Mono" pitchFamily="34" charset="-122"/>
+                <a:cs typeface="IBM Plex Mono" pitchFamily="34" charset="-120"/>
+              </a:rPr>
+              <a:t>15.9 ms</a:t>
+            </a:r>
+            <a:endParaRPr lang="en-US" sz="1650" dirty="0"/>
+          </a:p>
+        </p:txBody>
+      </p:sp>
+      <p:sp>
+        <p:nvSpPr>
+          <p:cNvPr id="2042" name="Text 3"/>
+          <p:cNvSpPr/>
+          <p:nvPr/>
+        </p:nvSpPr>
+        <p:spPr>
+          <a:xfrm>
+            <a:off x="7909560" y="4416552"/>
+            <a:ext cx="1463040" cy="329184"/>
+          </a:xfrm>
+          <a:prstGeom prst="rect">
+            <a:avLst/>
+          </a:prstGeom>
+          <a:noFill/>
+          <a:ln/>
+        </p:spPr>
+        <p:txBody>
+          <a:bodyPr wrap="square" lIns="25400" tIns="25400" rIns="25400" bIns="25400" rtlCol="0" anchor="t">
+            <a:normAutofit/>
+          </a:bodyPr>
+          <a:lstStyle/>
+          <a:p>
+            <a:pPr algn="l" indent="0" marL="0">
+              <a:buNone/>
+            </a:pPr>
+            <a:r>
+              <a:rPr lang="en-US" sz="1400" b="0" dirty="0">
+                <a:solidFill>
+                  <a:srgbClr val="1E7A52"/>
+                </a:solidFill>
+                <a:latin typeface="IBM Plex Mono" pitchFamily="34" charset="0"/>
+                <a:ea typeface="IBM Plex Mono" pitchFamily="34" charset="-122"/>
+                <a:cs typeface="IBM Plex Mono" pitchFamily="34" charset="-120"/>
+              </a:rPr>
+              <a:t>20.7 ms</a:t>
+            </a:r>
+            <a:endParaRPr lang="en-US" sz="1650" dirty="0"/>
+          </a:p>
+        </p:txBody>
+      </p:sp>
+      <p:sp>
+        <p:nvSpPr>
+          <p:cNvPr id="2043" name="Text 3"/>
+          <p:cNvSpPr/>
+          <p:nvPr/>
+        </p:nvSpPr>
+        <p:spPr>
+          <a:xfrm>
+            <a:off x="9464040" y="4416552"/>
+            <a:ext cx="1463040" cy="329184"/>
+          </a:xfrm>
+          <a:prstGeom prst="rect">
+            <a:avLst/>
+          </a:prstGeom>
+          <a:noFill/>
+          <a:ln/>
+        </p:spPr>
+        <p:txBody>
+          <a:bodyPr wrap="square" lIns="25400" tIns="25400" rIns="25400" bIns="25400" rtlCol="0" anchor="t">
+            <a:normAutofit/>
+          </a:bodyPr>
+          <a:lstStyle/>
+          <a:p>
+            <a:pPr algn="l" indent="0" marL="0">
+              <a:buNone/>
+            </a:pPr>
+            <a:r>
+              <a:rPr lang="en-US" sz="1400" b="1" dirty="0">
+                <a:solidFill>
+                  <a:srgbClr val="33608F"/>
+                </a:solidFill>
+                <a:latin typeface="IBM Plex Mono" pitchFamily="34" charset="0"/>
+                <a:ea typeface="IBM Plex Mono" pitchFamily="34" charset="-122"/>
+                <a:cs typeface="IBM Plex Mono" pitchFamily="34" charset="-120"/>
+              </a:rPr>
+              <a:t>1.30×</a:t>
+            </a:r>
+            <a:endParaRPr lang="en-US" sz="1650" dirty="0"/>
+          </a:p>
+        </p:txBody>
+      </p:sp>
+      <p:sp>
+        <p:nvSpPr>
+          <p:cNvPr id="2044" name="Text 3"/>
+          <p:cNvSpPr/>
+          <p:nvPr/>
+        </p:nvSpPr>
+        <p:spPr>
+          <a:xfrm>
+            <a:off x="11018520" y="4416552"/>
+            <a:ext cx="2011680" cy="329184"/>
+          </a:xfrm>
+          <a:prstGeom prst="rect">
+            <a:avLst/>
+          </a:prstGeom>
+          <a:noFill/>
+          <a:ln/>
+        </p:spPr>
+        <p:txBody>
+          <a:bodyPr wrap="square" lIns="25400" tIns="25400" rIns="25400" bIns="25400" rtlCol="0" anchor="t">
+            <a:normAutofit/>
+          </a:bodyPr>
+          <a:lstStyle/>
+          <a:p>
+            <a:pPr algn="l" indent="0" marL="0">
+              <a:buNone/>
+            </a:pPr>
+            <a:r>
+              <a:rPr lang="en-US" sz="1400" b="0" dirty="0">
+                <a:solidFill>
+                  <a:srgbClr val="33608F"/>
+                </a:solidFill>
+                <a:latin typeface="IBM Plex Mono" pitchFamily="34" charset="0"/>
+                <a:ea typeface="IBM Plex Mono" pitchFamily="34" charset="-122"/>
+                <a:cs typeface="IBM Plex Mono" pitchFamily="34" charset="-120"/>
+              </a:rPr>
+              <a:t>Postgres</a:t>
+            </a:r>
+            <a:endParaRPr lang="en-US" sz="1650" dirty="0"/>
+          </a:p>
+        </p:txBody>
+      </p:sp>
+      <p:sp>
+        <p:nvSpPr>
+          <p:cNvPr id="2045" name="Text 3"/>
+          <p:cNvSpPr/>
+          <p:nvPr/>
+        </p:nvSpPr>
+        <p:spPr>
+          <a:xfrm>
+            <a:off x="13121640" y="4416552"/>
+            <a:ext cx="1371600" cy="329184"/>
+          </a:xfrm>
+          <a:prstGeom prst="rect">
+            <a:avLst/>
+          </a:prstGeom>
+          <a:noFill/>
+          <a:ln/>
+        </p:spPr>
+        <p:txBody>
+          <a:bodyPr wrap="square" lIns="25400" tIns="25400" rIns="25400" bIns="25400" rtlCol="0" anchor="t">
+            <a:normAutofit/>
+          </a:bodyPr>
+          <a:lstStyle/>
+          <a:p>
+            <a:pPr algn="l" indent="0" marL="0">
+              <a:buNone/>
+            </a:pPr>
+            <a:r>
+              <a:rPr lang="en-US" sz="1400" b="0" dirty="0">
+                <a:solidFill>
+                  <a:srgbClr val="3D4652"/>
+                </a:solidFill>
+                <a:latin typeface="IBM Plex Mono" pitchFamily="34" charset="0"/>
+                <a:ea typeface="IBM Plex Mono" pitchFamily="34" charset="-122"/>
+                <a:cs typeface="IBM Plex Mono" pitchFamily="34" charset="-120"/>
+              </a:rPr>
+              <a:t>0.004</a:t>
+            </a:r>
+            <a:endParaRPr lang="en-US" sz="1650" dirty="0"/>
+          </a:p>
+        </p:txBody>
+      </p:sp>
+      <p:sp>
+        <p:nvSpPr>
+          <p:cNvPr id="2046" name="Text 3"/>
+          <p:cNvSpPr/>
+          <p:nvPr/>
+        </p:nvSpPr>
+        <p:spPr>
+          <a:xfrm>
+            <a:off x="14584680" y="4416552"/>
+            <a:ext cx="1005840" cy="329184"/>
+          </a:xfrm>
+          <a:prstGeom prst="rect">
+            <a:avLst/>
+          </a:prstGeom>
+          <a:noFill/>
+          <a:ln/>
+        </p:spPr>
+        <p:txBody>
+          <a:bodyPr wrap="square" lIns="25400" tIns="25400" rIns="25400" bIns="25400" rtlCol="0" anchor="t">
+            <a:normAutofit/>
+          </a:bodyPr>
+          <a:lstStyle/>
+          <a:p>
+            <a:pPr algn="l" indent="0" marL="0">
+              <a:buNone/>
+            </a:pPr>
+            <a:r>
+              <a:rPr lang="en-US" sz="1400" b="0" dirty="0">
+                <a:solidFill>
+                  <a:srgbClr val="3D4652"/>
+                </a:solidFill>
+                <a:latin typeface="IBM Plex Mono" pitchFamily="34" charset="0"/>
+                <a:ea typeface="IBM Plex Mono" pitchFamily="34" charset="-122"/>
+                <a:cs typeface="IBM Plex Mono" pitchFamily="34" charset="-120"/>
+              </a:rPr>
+              <a:t>0.61</a:t>
+            </a:r>
+            <a:endParaRPr lang="en-US" sz="1650" dirty="0"/>
+          </a:p>
+        </p:txBody>
+      </p:sp>
+      <p:sp>
+        <p:nvSpPr>
+          <p:cNvPr id="2047" name="Text 3"/>
+          <p:cNvSpPr/>
+          <p:nvPr/>
+        </p:nvSpPr>
+        <p:spPr>
+          <a:xfrm>
+            <a:off x="15681959" y="4416552"/>
+            <a:ext cx="1463040" cy="329184"/>
+          </a:xfrm>
+          <a:prstGeom prst="rect">
+            <a:avLst/>
+          </a:prstGeom>
+          <a:noFill/>
+          <a:ln/>
+        </p:spPr>
+        <p:txBody>
+          <a:bodyPr wrap="square" lIns="25400" tIns="25400" rIns="25400" bIns="25400" rtlCol="0" anchor="t">
+            <a:normAutofit/>
+          </a:bodyPr>
+          <a:lstStyle/>
+          <a:p>
+            <a:pPr algn="l" indent="0" marL="0">
+              <a:buNone/>
+            </a:pPr>
+            <a:r>
+              <a:rPr lang="en-US" sz="1400" b="1" dirty="0">
+                <a:solidFill>
+                  <a:srgbClr val="33608F"/>
+                </a:solidFill>
+                <a:latin typeface="IBM Plex Mono" pitchFamily="34" charset="0"/>
+                <a:ea typeface="IBM Plex Mono" pitchFamily="34" charset="-122"/>
+                <a:cs typeface="IBM Plex Mono" pitchFamily="34" charset="-120"/>
+              </a:rPr>
+              <a:t>yes</a:t>
+            </a:r>
+            <a:endParaRPr lang="en-US" sz="1650" dirty="0"/>
+          </a:p>
+        </p:txBody>
+      </p:sp>
+      <p:sp>
+        <p:nvSpPr>
+          <p:cNvPr id="2048" name="Text 3"/>
+          <p:cNvSpPr/>
+          <p:nvPr/>
+        </p:nvSpPr>
+        <p:spPr>
+          <a:xfrm>
+            <a:off x="1234440" y="4837176"/>
+            <a:ext cx="822960" cy="329184"/>
+          </a:xfrm>
+          <a:prstGeom prst="rect">
+            <a:avLst/>
+          </a:prstGeom>
+          <a:noFill/>
+          <a:ln/>
+        </p:spPr>
+        <p:txBody>
+          <a:bodyPr wrap="square" lIns="25400" tIns="25400" rIns="25400" bIns="25400" rtlCol="0" anchor="t">
+            <a:normAutofit/>
+          </a:bodyPr>
+          <a:lstStyle/>
+          <a:p>
+            <a:pPr algn="l" indent="0" marL="0">
+              <a:buNone/>
+            </a:pPr>
+            <a:r>
+              <a:rPr lang="en-US" sz="1400" b="1" dirty="0">
+                <a:solidFill>
+                  <a:srgbClr val="1A2430"/>
+                </a:solidFill>
+                <a:latin typeface="IBM Plex Mono" pitchFamily="34" charset="0"/>
+                <a:ea typeface="IBM Plex Mono" pitchFamily="34" charset="-122"/>
+                <a:cs typeface="IBM Plex Mono" pitchFamily="34" charset="-120"/>
+              </a:rPr>
+              <a:t>Q05</a:t>
+            </a:r>
+            <a:endParaRPr lang="en-US" sz="1650" dirty="0"/>
+          </a:p>
+        </p:txBody>
+      </p:sp>
+      <p:sp>
+        <p:nvSpPr>
+          <p:cNvPr id="2049" name="Text 3"/>
+          <p:cNvSpPr/>
+          <p:nvPr/>
+        </p:nvSpPr>
+        <p:spPr>
+          <a:xfrm>
+            <a:off x="2057400" y="4837176"/>
+            <a:ext cx="4206240" cy="329184"/>
+          </a:xfrm>
+          <a:prstGeom prst="rect">
+            <a:avLst/>
+          </a:prstGeom>
+          <a:noFill/>
+          <a:ln/>
+        </p:spPr>
+        <p:txBody>
+          <a:bodyPr wrap="square" lIns="25400" tIns="25400" rIns="25400" bIns="25400" rtlCol="0" anchor="t">
+            <a:normAutofit/>
+          </a:bodyPr>
+          <a:lstStyle/>
+          <a:p>
+            <a:pPr algn="l" indent="0" marL="0">
+              <a:buNone/>
+            </a:pPr>
+            <a:r>
+              <a:rPr lang="en-US" sz="1400" b="0" dirty="0">
+                <a:solidFill>
+                  <a:srgbClr val="3D4652"/>
+                </a:solidFill>
+                <a:latin typeface="Space Grotesk" pitchFamily="34" charset="0"/>
+                <a:ea typeface="IBM Plex Mono" pitchFamily="34" charset="-122"/>
+                <a:cs typeface="IBM Plex Mono" pitchFamily="34" charset="-120"/>
+              </a:rPr>
+              <a:t>Goal-assist partnerships</a:t>
+            </a:r>
+            <a:endParaRPr lang="en-US" sz="1650" dirty="0"/>
+          </a:p>
+        </p:txBody>
+      </p:sp>
+      <p:sp>
+        <p:nvSpPr>
+          <p:cNvPr id="2050" name="Text 3"/>
+          <p:cNvSpPr/>
+          <p:nvPr/>
+        </p:nvSpPr>
+        <p:spPr>
+          <a:xfrm>
+            <a:off x="6355080" y="4837176"/>
+            <a:ext cx="1463040" cy="329184"/>
+          </a:xfrm>
+          <a:prstGeom prst="rect">
+            <a:avLst/>
+          </a:prstGeom>
+          <a:noFill/>
+          <a:ln/>
+        </p:spPr>
+        <p:txBody>
+          <a:bodyPr wrap="square" lIns="25400" tIns="25400" rIns="25400" bIns="25400" rtlCol="0" anchor="t">
+            <a:normAutofit/>
+          </a:bodyPr>
+          <a:lstStyle/>
+          <a:p>
+            <a:pPr algn="l" indent="0" marL="0">
+              <a:buNone/>
+            </a:pPr>
+            <a:r>
+              <a:rPr lang="en-US" sz="1400" b="0" dirty="0">
+                <a:solidFill>
+                  <a:srgbClr val="33608F"/>
+                </a:solidFill>
+                <a:latin typeface="IBM Plex Mono" pitchFamily="34" charset="0"/>
+                <a:ea typeface="IBM Plex Mono" pitchFamily="34" charset="-122"/>
+                <a:cs typeface="IBM Plex Mono" pitchFamily="34" charset="-120"/>
+              </a:rPr>
+              <a:t>61.5 ms</a:t>
+            </a:r>
+            <a:endParaRPr lang="en-US" sz="1650" dirty="0"/>
+          </a:p>
+        </p:txBody>
+      </p:sp>
+      <p:sp>
+        <p:nvSpPr>
+          <p:cNvPr id="2051" name="Text 3"/>
+          <p:cNvSpPr/>
+          <p:nvPr/>
+        </p:nvSpPr>
+        <p:spPr>
+          <a:xfrm>
+            <a:off x="7909560" y="4837176"/>
+            <a:ext cx="1463040" cy="329184"/>
+          </a:xfrm>
+          <a:prstGeom prst="rect">
+            <a:avLst/>
+          </a:prstGeom>
+          <a:noFill/>
+          <a:ln/>
+        </p:spPr>
+        <p:txBody>
+          <a:bodyPr wrap="square" lIns="25400" tIns="25400" rIns="25400" bIns="25400" rtlCol="0" anchor="t">
+            <a:normAutofit/>
+          </a:bodyPr>
+          <a:lstStyle/>
+          <a:p>
+            <a:pPr algn="l" indent="0" marL="0">
+              <a:buNone/>
+            </a:pPr>
+            <a:r>
+              <a:rPr lang="en-US" sz="1400" b="0" dirty="0">
+                <a:solidFill>
+                  <a:srgbClr val="1E7A52"/>
+                </a:solidFill>
+                <a:latin typeface="IBM Plex Mono" pitchFamily="34" charset="0"/>
+                <a:ea typeface="IBM Plex Mono" pitchFamily="34" charset="-122"/>
+                <a:cs typeface="IBM Plex Mono" pitchFamily="34" charset="-120"/>
+              </a:rPr>
+              <a:t>38.1 ms</a:t>
+            </a:r>
+            <a:endParaRPr lang="en-US" sz="1650" dirty="0"/>
+          </a:p>
+        </p:txBody>
+      </p:sp>
+      <p:sp>
+        <p:nvSpPr>
+          <p:cNvPr id="2052" name="Text 3"/>
+          <p:cNvSpPr/>
+          <p:nvPr/>
+        </p:nvSpPr>
+        <p:spPr>
+          <a:xfrm>
+            <a:off x="9464040" y="4837176"/>
+            <a:ext cx="1463040" cy="329184"/>
+          </a:xfrm>
+          <a:prstGeom prst="rect">
+            <a:avLst/>
+          </a:prstGeom>
+          <a:noFill/>
+          <a:ln/>
+        </p:spPr>
+        <p:txBody>
+          <a:bodyPr wrap="square" lIns="25400" tIns="25400" rIns="25400" bIns="25400" rtlCol="0" anchor="t">
+            <a:normAutofit/>
+          </a:bodyPr>
+          <a:lstStyle/>
+          <a:p>
+            <a:pPr algn="l" indent="0" marL="0">
+              <a:buNone/>
+            </a:pPr>
+            <a:r>
+              <a:rPr lang="en-US" sz="1400" b="1" dirty="0">
+                <a:solidFill>
+                  <a:srgbClr val="1E7A52"/>
+                </a:solidFill>
+                <a:latin typeface="IBM Plex Mono" pitchFamily="34" charset="0"/>
+                <a:ea typeface="IBM Plex Mono" pitchFamily="34" charset="-122"/>
+                <a:cs typeface="IBM Plex Mono" pitchFamily="34" charset="-120"/>
+              </a:rPr>
+              <a:t>1.62×</a:t>
+            </a:r>
+            <a:endParaRPr lang="en-US" sz="1650" dirty="0"/>
+          </a:p>
+        </p:txBody>
+      </p:sp>
+      <p:sp>
+        <p:nvSpPr>
+          <p:cNvPr id="2053" name="Text 3"/>
+          <p:cNvSpPr/>
+          <p:nvPr/>
+        </p:nvSpPr>
+        <p:spPr>
+          <a:xfrm>
+            <a:off x="11018520" y="4837176"/>
+            <a:ext cx="2011680" cy="329184"/>
+          </a:xfrm>
+          <a:prstGeom prst="rect">
+            <a:avLst/>
+          </a:prstGeom>
+          <a:noFill/>
+          <a:ln/>
+        </p:spPr>
+        <p:txBody>
+          <a:bodyPr wrap="square" lIns="25400" tIns="25400" rIns="25400" bIns="25400" rtlCol="0" anchor="t">
+            <a:normAutofit/>
+          </a:bodyPr>
+          <a:lstStyle/>
+          <a:p>
+            <a:pPr algn="l" indent="0" marL="0">
+              <a:buNone/>
+            </a:pPr>
+            <a:r>
+              <a:rPr lang="en-US" sz="1400" b="0" dirty="0">
+                <a:solidFill>
+                  <a:srgbClr val="1E7A52"/>
+                </a:solidFill>
+                <a:latin typeface="IBM Plex Mono" pitchFamily="34" charset="0"/>
+                <a:ea typeface="IBM Plex Mono" pitchFamily="34" charset="-122"/>
+                <a:cs typeface="IBM Plex Mono" pitchFamily="34" charset="-120"/>
+              </a:rPr>
+              <a:t>Neo4j</a:t>
+            </a:r>
+            <a:endParaRPr lang="en-US" sz="1650" dirty="0"/>
+          </a:p>
+        </p:txBody>
+      </p:sp>
+      <p:sp>
+        <p:nvSpPr>
+          <p:cNvPr id="2054" name="Text 3"/>
+          <p:cNvSpPr/>
+          <p:nvPr/>
+        </p:nvSpPr>
+        <p:spPr>
+          <a:xfrm>
+            <a:off x="13121640" y="4837176"/>
+            <a:ext cx="1371600" cy="329184"/>
+          </a:xfrm>
+          <a:prstGeom prst="rect">
+            <a:avLst/>
+          </a:prstGeom>
+          <a:noFill/>
+          <a:ln/>
+        </p:spPr>
+        <p:txBody>
+          <a:bodyPr wrap="square" lIns="25400" tIns="25400" rIns="25400" bIns="25400" rtlCol="0" anchor="t">
+            <a:normAutofit/>
+          </a:bodyPr>
+          <a:lstStyle/>
+          <a:p>
+            <a:pPr algn="l" indent="0" marL="0">
+              <a:buNone/>
+            </a:pPr>
+            <a:r>
+              <a:rPr lang="en-US" sz="1400" b="0" dirty="0">
+                <a:solidFill>
+                  <a:srgbClr val="3D4652"/>
+                </a:solidFill>
+                <a:latin typeface="IBM Plex Mono" pitchFamily="34" charset="0"/>
+                <a:ea typeface="IBM Plex Mono" pitchFamily="34" charset="-122"/>
+                <a:cs typeface="IBM Plex Mono" pitchFamily="34" charset="-120"/>
+              </a:rPr>
+              <a:t>&lt; 0.001</a:t>
+            </a:r>
+            <a:endParaRPr lang="en-US" sz="1650" dirty="0"/>
+          </a:p>
+        </p:txBody>
+      </p:sp>
+      <p:sp>
+        <p:nvSpPr>
+          <p:cNvPr id="2055" name="Text 3"/>
+          <p:cNvSpPr/>
+          <p:nvPr/>
+        </p:nvSpPr>
+        <p:spPr>
+          <a:xfrm>
+            <a:off x="14584680" y="4837176"/>
+            <a:ext cx="1005840" cy="329184"/>
+          </a:xfrm>
+          <a:prstGeom prst="rect">
+            <a:avLst/>
+          </a:prstGeom>
+          <a:noFill/>
+          <a:ln/>
+        </p:spPr>
+        <p:txBody>
+          <a:bodyPr wrap="square" lIns="25400" tIns="25400" rIns="25400" bIns="25400" rtlCol="0" anchor="t">
+            <a:normAutofit/>
+          </a:bodyPr>
+          <a:lstStyle/>
+          <a:p>
+            <a:pPr algn="l" indent="0" marL="0">
+              <a:buNone/>
+            </a:pPr>
+            <a:r>
+              <a:rPr lang="en-US" sz="1400" b="0" dirty="0">
+                <a:solidFill>
+                  <a:srgbClr val="3D4652"/>
+                </a:solidFill>
+                <a:latin typeface="IBM Plex Mono" pitchFamily="34" charset="0"/>
+                <a:ea typeface="IBM Plex Mono" pitchFamily="34" charset="-122"/>
+                <a:cs typeface="IBM Plex Mono" pitchFamily="34" charset="-120"/>
+              </a:rPr>
+              <a:t>0.86</a:t>
+            </a:r>
+            <a:endParaRPr lang="en-US" sz="1650" dirty="0"/>
+          </a:p>
+        </p:txBody>
+      </p:sp>
+      <p:sp>
+        <p:nvSpPr>
+          <p:cNvPr id="2056" name="Text 3"/>
+          <p:cNvSpPr/>
+          <p:nvPr/>
+        </p:nvSpPr>
+        <p:spPr>
+          <a:xfrm>
+            <a:off x="15681959" y="4837176"/>
+            <a:ext cx="1463040" cy="329184"/>
+          </a:xfrm>
+          <a:prstGeom prst="rect">
+            <a:avLst/>
+          </a:prstGeom>
+          <a:noFill/>
+          <a:ln/>
+        </p:spPr>
+        <p:txBody>
+          <a:bodyPr wrap="square" lIns="25400" tIns="25400" rIns="25400" bIns="25400" rtlCol="0" anchor="t">
+            <a:normAutofit/>
+          </a:bodyPr>
+          <a:lstStyle/>
+          <a:p>
+            <a:pPr algn="l" indent="0" marL="0">
+              <a:buNone/>
+            </a:pPr>
+            <a:r>
+              <a:rPr lang="en-US" sz="1400" b="1" dirty="0">
+                <a:solidFill>
+                  <a:srgbClr val="1E7A52"/>
+                </a:solidFill>
+                <a:latin typeface="IBM Plex Mono" pitchFamily="34" charset="0"/>
+                <a:ea typeface="IBM Plex Mono" pitchFamily="34" charset="-122"/>
+                <a:cs typeface="IBM Plex Mono" pitchFamily="34" charset="-120"/>
+              </a:rPr>
+              <a:t>yes</a:t>
+            </a:r>
+            <a:endParaRPr lang="en-US" sz="1650" dirty="0"/>
+          </a:p>
+        </p:txBody>
+      </p:sp>
+      <p:sp>
+        <p:nvSpPr>
+          <p:cNvPr id="2057" name="Text 3"/>
+          <p:cNvSpPr/>
+          <p:nvPr/>
+        </p:nvSpPr>
+        <p:spPr>
+          <a:xfrm>
+            <a:off x="1234440" y="5257800"/>
+            <a:ext cx="822960" cy="329184"/>
+          </a:xfrm>
+          <a:prstGeom prst="rect">
+            <a:avLst/>
+          </a:prstGeom>
+          <a:noFill/>
+          <a:ln/>
+        </p:spPr>
+        <p:txBody>
+          <a:bodyPr wrap="square" lIns="25400" tIns="25400" rIns="25400" bIns="25400" rtlCol="0" anchor="t">
+            <a:normAutofit/>
+          </a:bodyPr>
+          <a:lstStyle/>
+          <a:p>
+            <a:pPr algn="l" indent="0" marL="0">
+              <a:buNone/>
+            </a:pPr>
+            <a:r>
+              <a:rPr lang="en-US" sz="1400" b="1" dirty="0">
+                <a:solidFill>
+                  <a:srgbClr val="1A2430"/>
+                </a:solidFill>
+                <a:latin typeface="IBM Plex Mono" pitchFamily="34" charset="0"/>
+                <a:ea typeface="IBM Plex Mono" pitchFamily="34" charset="-122"/>
+                <a:cs typeface="IBM Plex Mono" pitchFamily="34" charset="-120"/>
+              </a:rPr>
+              <a:t>Q06</a:t>
+            </a:r>
+            <a:endParaRPr lang="en-US" sz="1650" dirty="0"/>
+          </a:p>
+        </p:txBody>
+      </p:sp>
+      <p:sp>
+        <p:nvSpPr>
+          <p:cNvPr id="2058" name="Text 3"/>
+          <p:cNvSpPr/>
+          <p:nvPr/>
+        </p:nvSpPr>
+        <p:spPr>
+          <a:xfrm>
+            <a:off x="2057400" y="5257800"/>
+            <a:ext cx="4206240" cy="329184"/>
+          </a:xfrm>
+          <a:prstGeom prst="rect">
+            <a:avLst/>
+          </a:prstGeom>
+          <a:noFill/>
+          <a:ln/>
+        </p:spPr>
+        <p:txBody>
+          <a:bodyPr wrap="square" lIns="25400" tIns="25400" rIns="25400" bIns="25400" rtlCol="0" anchor="t">
+            <a:normAutofit/>
+          </a:bodyPr>
+          <a:lstStyle/>
+          <a:p>
+            <a:pPr algn="l" indent="0" marL="0">
+              <a:buNone/>
+            </a:pPr>
+            <a:r>
+              <a:rPr lang="en-US" sz="1400" b="0" dirty="0">
+                <a:solidFill>
+                  <a:srgbClr val="3D4652"/>
+                </a:solidFill>
+                <a:latin typeface="Space Grotesk" pitchFamily="34" charset="0"/>
+                <a:ea typeface="IBM Plex Mono" pitchFamily="34" charset="-122"/>
+                <a:cs typeface="IBM Plex Mono" pitchFamily="34" charset="-120"/>
+              </a:rPr>
+              <a:t>Cards vs Real Madrid</a:t>
+            </a:r>
+            <a:endParaRPr lang="en-US" sz="1650" dirty="0"/>
+          </a:p>
+        </p:txBody>
+      </p:sp>
+      <p:sp>
+        <p:nvSpPr>
+          <p:cNvPr id="2059" name="Text 3"/>
+          <p:cNvSpPr/>
+          <p:nvPr/>
+        </p:nvSpPr>
+        <p:spPr>
+          <a:xfrm>
+            <a:off x="6355080" y="5257800"/>
+            <a:ext cx="1463040" cy="329184"/>
+          </a:xfrm>
+          <a:prstGeom prst="rect">
+            <a:avLst/>
+          </a:prstGeom>
+          <a:noFill/>
+          <a:ln/>
+        </p:spPr>
+        <p:txBody>
+          <a:bodyPr wrap="square" lIns="25400" tIns="25400" rIns="25400" bIns="25400" rtlCol="0" anchor="t">
+            <a:normAutofit/>
+          </a:bodyPr>
+          <a:lstStyle/>
+          <a:p>
+            <a:pPr algn="l" indent="0" marL="0">
+              <a:buNone/>
+            </a:pPr>
+            <a:r>
+              <a:rPr lang="en-US" sz="1400" b="0" dirty="0">
+                <a:solidFill>
+                  <a:srgbClr val="33608F"/>
+                </a:solidFill>
+                <a:latin typeface="IBM Plex Mono" pitchFamily="34" charset="0"/>
+                <a:ea typeface="IBM Plex Mono" pitchFamily="34" charset="-122"/>
+                <a:cs typeface="IBM Plex Mono" pitchFamily="34" charset="-120"/>
+              </a:rPr>
+              <a:t>21.8 ms</a:t>
+            </a:r>
+            <a:endParaRPr lang="en-US" sz="1650" dirty="0"/>
+          </a:p>
+        </p:txBody>
+      </p:sp>
+      <p:sp>
+        <p:nvSpPr>
+          <p:cNvPr id="2060" name="Text 3"/>
+          <p:cNvSpPr/>
+          <p:nvPr/>
+        </p:nvSpPr>
+        <p:spPr>
+          <a:xfrm>
+            <a:off x="7909560" y="5257800"/>
+            <a:ext cx="1463040" cy="329184"/>
+          </a:xfrm>
+          <a:prstGeom prst="rect">
+            <a:avLst/>
+          </a:prstGeom>
+          <a:noFill/>
+          <a:ln/>
+        </p:spPr>
+        <p:txBody>
+          <a:bodyPr wrap="square" lIns="25400" tIns="25400" rIns="25400" bIns="25400" rtlCol="0" anchor="t">
+            <a:normAutofit/>
+          </a:bodyPr>
+          <a:lstStyle/>
+          <a:p>
+            <a:pPr algn="l" indent="0" marL="0">
+              <a:buNone/>
+            </a:pPr>
+            <a:r>
+              <a:rPr lang="en-US" sz="1400" b="0" dirty="0">
+                <a:solidFill>
+                  <a:srgbClr val="1E7A52"/>
+                </a:solidFill>
+                <a:latin typeface="IBM Plex Mono" pitchFamily="34" charset="0"/>
+                <a:ea typeface="IBM Plex Mono" pitchFamily="34" charset="-122"/>
+                <a:cs typeface="IBM Plex Mono" pitchFamily="34" charset="-120"/>
+              </a:rPr>
+              <a:t>7.6 ms</a:t>
+            </a:r>
+            <a:endParaRPr lang="en-US" sz="1650" dirty="0"/>
+          </a:p>
+        </p:txBody>
+      </p:sp>
+      <p:sp>
+        <p:nvSpPr>
+          <p:cNvPr id="2061" name="Text 3"/>
+          <p:cNvSpPr/>
+          <p:nvPr/>
+        </p:nvSpPr>
+        <p:spPr>
+          <a:xfrm>
+            <a:off x="9464040" y="5257800"/>
+            <a:ext cx="1463040" cy="329184"/>
+          </a:xfrm>
+          <a:prstGeom prst="rect">
+            <a:avLst/>
+          </a:prstGeom>
+          <a:noFill/>
+          <a:ln/>
+        </p:spPr>
+        <p:txBody>
+          <a:bodyPr wrap="square" lIns="25400" tIns="25400" rIns="25400" bIns="25400" rtlCol="0" anchor="t">
+            <a:normAutofit/>
+          </a:bodyPr>
+          <a:lstStyle/>
+          <a:p>
+            <a:pPr algn="l" indent="0" marL="0">
+              <a:buNone/>
+            </a:pPr>
+            <a:r>
+              <a:rPr lang="en-US" sz="1400" b="1" dirty="0">
+                <a:solidFill>
+                  <a:srgbClr val="1E7A52"/>
+                </a:solidFill>
+                <a:latin typeface="IBM Plex Mono" pitchFamily="34" charset="0"/>
+                <a:ea typeface="IBM Plex Mono" pitchFamily="34" charset="-122"/>
+                <a:cs typeface="IBM Plex Mono" pitchFamily="34" charset="-120"/>
+              </a:rPr>
+              <a:t>2.85×</a:t>
+            </a:r>
+            <a:endParaRPr lang="en-US" sz="1650" dirty="0"/>
+          </a:p>
+        </p:txBody>
+      </p:sp>
+      <p:sp>
+        <p:nvSpPr>
+          <p:cNvPr id="2062" name="Text 3"/>
+          <p:cNvSpPr/>
+          <p:nvPr/>
+        </p:nvSpPr>
+        <p:spPr>
+          <a:xfrm>
+            <a:off x="11018520" y="5257800"/>
+            <a:ext cx="2011680" cy="329184"/>
+          </a:xfrm>
+          <a:prstGeom prst="rect">
+            <a:avLst/>
+          </a:prstGeom>
+          <a:noFill/>
+          <a:ln/>
+        </p:spPr>
+        <p:txBody>
+          <a:bodyPr wrap="square" lIns="25400" tIns="25400" rIns="25400" bIns="25400" rtlCol="0" anchor="t">
+            <a:normAutofit/>
+          </a:bodyPr>
+          <a:lstStyle/>
+          <a:p>
+            <a:pPr algn="l" indent="0" marL="0">
+              <a:buNone/>
+            </a:pPr>
+            <a:r>
+              <a:rPr lang="en-US" sz="1400" b="0" dirty="0">
+                <a:solidFill>
+                  <a:srgbClr val="1E7A52"/>
+                </a:solidFill>
+                <a:latin typeface="IBM Plex Mono" pitchFamily="34" charset="0"/>
+                <a:ea typeface="IBM Plex Mono" pitchFamily="34" charset="-122"/>
+                <a:cs typeface="IBM Plex Mono" pitchFamily="34" charset="-120"/>
+              </a:rPr>
+              <a:t>Neo4j</a:t>
+            </a:r>
+            <a:endParaRPr lang="en-US" sz="1650" dirty="0"/>
+          </a:p>
+        </p:txBody>
+      </p:sp>
+      <p:sp>
+        <p:nvSpPr>
+          <p:cNvPr id="2063" name="Text 3"/>
+          <p:cNvSpPr/>
+          <p:nvPr/>
+        </p:nvSpPr>
+        <p:spPr>
+          <a:xfrm>
+            <a:off x="13121640" y="5257800"/>
+            <a:ext cx="1371600" cy="329184"/>
+          </a:xfrm>
+          <a:prstGeom prst="rect">
+            <a:avLst/>
+          </a:prstGeom>
+          <a:noFill/>
+          <a:ln/>
+        </p:spPr>
+        <p:txBody>
+          <a:bodyPr wrap="square" lIns="25400" tIns="25400" rIns="25400" bIns="25400" rtlCol="0" anchor="t">
+            <a:normAutofit/>
+          </a:bodyPr>
+          <a:lstStyle/>
+          <a:p>
+            <a:pPr algn="l" indent="0" marL="0">
+              <a:buNone/>
+            </a:pPr>
+            <a:r>
+              <a:rPr lang="en-US" sz="1400" b="0" dirty="0">
+                <a:solidFill>
+                  <a:srgbClr val="3D4652"/>
+                </a:solidFill>
+                <a:latin typeface="IBM Plex Mono" pitchFamily="34" charset="0"/>
+                <a:ea typeface="IBM Plex Mono" pitchFamily="34" charset="-122"/>
+                <a:cs typeface="IBM Plex Mono" pitchFamily="34" charset="-120"/>
+              </a:rPr>
+              <a:t>&lt; 0.001</a:t>
+            </a:r>
+            <a:endParaRPr lang="en-US" sz="1650" dirty="0"/>
+          </a:p>
+        </p:txBody>
+      </p:sp>
+      <p:sp>
+        <p:nvSpPr>
+          <p:cNvPr id="2064" name="Text 3"/>
+          <p:cNvSpPr/>
+          <p:nvPr/>
+        </p:nvSpPr>
+        <p:spPr>
+          <a:xfrm>
+            <a:off x="14584680" y="5257800"/>
+            <a:ext cx="1005840" cy="329184"/>
+          </a:xfrm>
+          <a:prstGeom prst="rect">
+            <a:avLst/>
+          </a:prstGeom>
+          <a:noFill/>
+          <a:ln/>
+        </p:spPr>
+        <p:txBody>
+          <a:bodyPr wrap="square" lIns="25400" tIns="25400" rIns="25400" bIns="25400" rtlCol="0" anchor="t">
+            <a:normAutofit/>
+          </a:bodyPr>
+          <a:lstStyle/>
+          <a:p>
+            <a:pPr algn="l" indent="0" marL="0">
+              <a:buNone/>
+            </a:pPr>
+            <a:r>
+              <a:rPr lang="en-US" sz="1400" b="0" dirty="0">
+                <a:solidFill>
+                  <a:srgbClr val="3D4652"/>
+                </a:solidFill>
+                <a:latin typeface="IBM Plex Mono" pitchFamily="34" charset="0"/>
+                <a:ea typeface="IBM Plex Mono" pitchFamily="34" charset="-122"/>
+                <a:cs typeface="IBM Plex Mono" pitchFamily="34" charset="-120"/>
+              </a:rPr>
+              <a:t>1.0</a:t>
+            </a:r>
+            <a:endParaRPr lang="en-US" sz="1650" dirty="0"/>
+          </a:p>
+        </p:txBody>
+      </p:sp>
+      <p:sp>
+        <p:nvSpPr>
+          <p:cNvPr id="2065" name="Text 3"/>
+          <p:cNvSpPr/>
+          <p:nvPr/>
+        </p:nvSpPr>
+        <p:spPr>
+          <a:xfrm>
+            <a:off x="15681959" y="5257800"/>
+            <a:ext cx="1463040" cy="329184"/>
+          </a:xfrm>
+          <a:prstGeom prst="rect">
+            <a:avLst/>
+          </a:prstGeom>
+          <a:noFill/>
+          <a:ln/>
+        </p:spPr>
+        <p:txBody>
+          <a:bodyPr wrap="square" lIns="25400" tIns="25400" rIns="25400" bIns="25400" rtlCol="0" anchor="t">
+            <a:normAutofit/>
+          </a:bodyPr>
+          <a:lstStyle/>
+          <a:p>
+            <a:pPr algn="l" indent="0" marL="0">
+              <a:buNone/>
+            </a:pPr>
+            <a:r>
+              <a:rPr lang="en-US" sz="1400" b="1" dirty="0">
+                <a:solidFill>
+                  <a:srgbClr val="1E7A52"/>
+                </a:solidFill>
+                <a:latin typeface="IBM Plex Mono" pitchFamily="34" charset="0"/>
+                <a:ea typeface="IBM Plex Mono" pitchFamily="34" charset="-122"/>
+                <a:cs typeface="IBM Plex Mono" pitchFamily="34" charset="-120"/>
+              </a:rPr>
+              <a:t>yes</a:t>
+            </a:r>
+            <a:endParaRPr lang="en-US" sz="1650" dirty="0"/>
+          </a:p>
+        </p:txBody>
+      </p:sp>
+      <p:sp>
+        <p:nvSpPr>
+          <p:cNvPr id="2066" name="Text 3"/>
+          <p:cNvSpPr/>
+          <p:nvPr/>
+        </p:nvSpPr>
+        <p:spPr>
+          <a:xfrm>
+            <a:off x="1234440" y="5678424"/>
+            <a:ext cx="822960" cy="329184"/>
+          </a:xfrm>
+          <a:prstGeom prst="rect">
+            <a:avLst/>
+          </a:prstGeom>
+          <a:noFill/>
+          <a:ln/>
+        </p:spPr>
+        <p:txBody>
+          <a:bodyPr wrap="square" lIns="25400" tIns="25400" rIns="25400" bIns="25400" rtlCol="0" anchor="t">
+            <a:normAutofit/>
+          </a:bodyPr>
+          <a:lstStyle/>
+          <a:p>
+            <a:pPr algn="l" indent="0" marL="0">
+              <a:buNone/>
+            </a:pPr>
+            <a:r>
+              <a:rPr lang="en-US" sz="1400" b="1" dirty="0">
+                <a:solidFill>
+                  <a:srgbClr val="1A2430"/>
+                </a:solidFill>
+                <a:latin typeface="IBM Plex Mono" pitchFamily="34" charset="0"/>
+                <a:ea typeface="IBM Plex Mono" pitchFamily="34" charset="-122"/>
+                <a:cs typeface="IBM Plex Mono" pitchFamily="34" charset="-120"/>
+              </a:rPr>
+              <a:t>Q07</a:t>
+            </a:r>
+            <a:endParaRPr lang="en-US" sz="1650" dirty="0"/>
+          </a:p>
+        </p:txBody>
+      </p:sp>
+      <p:sp>
+        <p:nvSpPr>
+          <p:cNvPr id="2067" name="Text 3"/>
+          <p:cNvSpPr/>
+          <p:nvPr/>
+        </p:nvSpPr>
+        <p:spPr>
+          <a:xfrm>
+            <a:off x="2057400" y="5678424"/>
+            <a:ext cx="4206240" cy="329184"/>
+          </a:xfrm>
+          <a:prstGeom prst="rect">
+            <a:avLst/>
+          </a:prstGeom>
+          <a:noFill/>
+          <a:ln/>
+        </p:spPr>
+        <p:txBody>
+          <a:bodyPr wrap="square" lIns="25400" tIns="25400" rIns="25400" bIns="25400" rtlCol="0" anchor="t">
+            <a:normAutofit/>
+          </a:bodyPr>
+          <a:lstStyle/>
+          <a:p>
+            <a:pPr algn="l" indent="0" marL="0">
+              <a:buNone/>
+            </a:pPr>
+            <a:r>
+              <a:rPr lang="en-US" sz="1400" b="0" dirty="0">
+                <a:solidFill>
+                  <a:srgbClr val="3D4652"/>
+                </a:solidFill>
+                <a:latin typeface="Space Grotesk" pitchFamily="34" charset="0"/>
+                <a:ea typeface="IBM Plex Mono" pitchFamily="34" charset="-122"/>
+                <a:cs typeface="IBM Plex Mono" pitchFamily="34" charset="-120"/>
+              </a:rPr>
+              <a:t>Players in all 8 seasons</a:t>
+            </a:r>
+            <a:endParaRPr lang="en-US" sz="1650" dirty="0"/>
+          </a:p>
+        </p:txBody>
+      </p:sp>
+      <p:sp>
+        <p:nvSpPr>
+          <p:cNvPr id="2068" name="Text 3"/>
+          <p:cNvSpPr/>
+          <p:nvPr/>
+        </p:nvSpPr>
+        <p:spPr>
+          <a:xfrm>
+            <a:off x="6355080" y="5678424"/>
+            <a:ext cx="1463040" cy="329184"/>
+          </a:xfrm>
+          <a:prstGeom prst="rect">
+            <a:avLst/>
+          </a:prstGeom>
+          <a:noFill/>
+          <a:ln/>
+        </p:spPr>
+        <p:txBody>
+          <a:bodyPr wrap="square" lIns="25400" tIns="25400" rIns="25400" bIns="25400" rtlCol="0" anchor="t">
+            <a:normAutofit/>
+          </a:bodyPr>
+          <a:lstStyle/>
+          <a:p>
+            <a:pPr algn="l" indent="0" marL="0">
+              <a:buNone/>
+            </a:pPr>
+            <a:r>
+              <a:rPr lang="en-US" sz="1400" b="0" dirty="0">
+                <a:solidFill>
+                  <a:srgbClr val="33608F"/>
+                </a:solidFill>
+                <a:latin typeface="IBM Plex Mono" pitchFamily="34" charset="0"/>
+                <a:ea typeface="IBM Plex Mono" pitchFamily="34" charset="-122"/>
+                <a:cs typeface="IBM Plex Mono" pitchFamily="34" charset="-120"/>
+              </a:rPr>
+              <a:t>400.2 ms</a:t>
+            </a:r>
+            <a:endParaRPr lang="en-US" sz="1650" dirty="0"/>
+          </a:p>
+        </p:txBody>
+      </p:sp>
+      <p:sp>
+        <p:nvSpPr>
+          <p:cNvPr id="2069" name="Text 3"/>
+          <p:cNvSpPr/>
+          <p:nvPr/>
+        </p:nvSpPr>
+        <p:spPr>
+          <a:xfrm>
+            <a:off x="7909560" y="5678424"/>
+            <a:ext cx="1463040" cy="329184"/>
+          </a:xfrm>
+          <a:prstGeom prst="rect">
+            <a:avLst/>
+          </a:prstGeom>
+          <a:noFill/>
+          <a:ln/>
+        </p:spPr>
+        <p:txBody>
+          <a:bodyPr wrap="square" lIns="25400" tIns="25400" rIns="25400" bIns="25400" rtlCol="0" anchor="t">
+            <a:normAutofit/>
+          </a:bodyPr>
+          <a:lstStyle/>
+          <a:p>
+            <a:pPr algn="l" indent="0" marL="0">
+              <a:buNone/>
+            </a:pPr>
+            <a:r>
+              <a:rPr lang="en-US" sz="1400" b="0" dirty="0">
+                <a:solidFill>
+                  <a:srgbClr val="1E7A52"/>
+                </a:solidFill>
+                <a:latin typeface="IBM Plex Mono" pitchFamily="34" charset="0"/>
+                <a:ea typeface="IBM Plex Mono" pitchFamily="34" charset="-122"/>
+                <a:cs typeface="IBM Plex Mono" pitchFamily="34" charset="-120"/>
+              </a:rPr>
+              <a:t>216.1 ms</a:t>
+            </a:r>
+            <a:endParaRPr lang="en-US" sz="1650" dirty="0"/>
+          </a:p>
+        </p:txBody>
+      </p:sp>
+      <p:sp>
+        <p:nvSpPr>
+          <p:cNvPr id="2070" name="Text 3"/>
+          <p:cNvSpPr/>
+          <p:nvPr/>
+        </p:nvSpPr>
+        <p:spPr>
+          <a:xfrm>
+            <a:off x="9464040" y="5678424"/>
+            <a:ext cx="1463040" cy="329184"/>
+          </a:xfrm>
+          <a:prstGeom prst="rect">
+            <a:avLst/>
+          </a:prstGeom>
+          <a:noFill/>
+          <a:ln/>
+        </p:spPr>
+        <p:txBody>
+          <a:bodyPr wrap="square" lIns="25400" tIns="25400" rIns="25400" bIns="25400" rtlCol="0" anchor="t">
+            <a:normAutofit/>
+          </a:bodyPr>
+          <a:lstStyle/>
+          <a:p>
+            <a:pPr algn="l" indent="0" marL="0">
+              <a:buNone/>
+            </a:pPr>
+            <a:r>
+              <a:rPr lang="en-US" sz="1400" b="1" dirty="0">
+                <a:solidFill>
+                  <a:srgbClr val="1E7A52"/>
+                </a:solidFill>
+                <a:latin typeface="IBM Plex Mono" pitchFamily="34" charset="0"/>
+                <a:ea typeface="IBM Plex Mono" pitchFamily="34" charset="-122"/>
+                <a:cs typeface="IBM Plex Mono" pitchFamily="34" charset="-120"/>
+              </a:rPr>
+              <a:t>1.85×</a:t>
+            </a:r>
+            <a:endParaRPr lang="en-US" sz="1650" dirty="0"/>
+          </a:p>
+        </p:txBody>
+      </p:sp>
+      <p:sp>
+        <p:nvSpPr>
+          <p:cNvPr id="2071" name="Text 3"/>
+          <p:cNvSpPr/>
+          <p:nvPr/>
+        </p:nvSpPr>
+        <p:spPr>
+          <a:xfrm>
+            <a:off x="11018520" y="5678424"/>
+            <a:ext cx="2011680" cy="329184"/>
+          </a:xfrm>
+          <a:prstGeom prst="rect">
+            <a:avLst/>
+          </a:prstGeom>
+          <a:noFill/>
+          <a:ln/>
+        </p:spPr>
+        <p:txBody>
+          <a:bodyPr wrap="square" lIns="25400" tIns="25400" rIns="25400" bIns="25400" rtlCol="0" anchor="t">
+            <a:normAutofit/>
+          </a:bodyPr>
+          <a:lstStyle/>
+          <a:p>
+            <a:pPr algn="l" indent="0" marL="0">
+              <a:buNone/>
+            </a:pPr>
+            <a:r>
+              <a:rPr lang="en-US" sz="1400" b="0" dirty="0">
+                <a:solidFill>
+                  <a:srgbClr val="1E7A52"/>
+                </a:solidFill>
+                <a:latin typeface="IBM Plex Mono" pitchFamily="34" charset="0"/>
+                <a:ea typeface="IBM Plex Mono" pitchFamily="34" charset="-122"/>
+                <a:cs typeface="IBM Plex Mono" pitchFamily="34" charset="-120"/>
+              </a:rPr>
+              <a:t>Neo4j</a:t>
+            </a:r>
+            <a:endParaRPr lang="en-US" sz="1650" dirty="0"/>
+          </a:p>
+        </p:txBody>
+      </p:sp>
+      <p:sp>
+        <p:nvSpPr>
+          <p:cNvPr id="2072" name="Text 3"/>
+          <p:cNvSpPr/>
+          <p:nvPr/>
+        </p:nvSpPr>
+        <p:spPr>
+          <a:xfrm>
+            <a:off x="13121640" y="5678424"/>
+            <a:ext cx="1371600" cy="329184"/>
+          </a:xfrm>
+          <a:prstGeom prst="rect">
+            <a:avLst/>
+          </a:prstGeom>
+          <a:noFill/>
+          <a:ln/>
+        </p:spPr>
+        <p:txBody>
+          <a:bodyPr wrap="square" lIns="25400" tIns="25400" rIns="25400" bIns="25400" rtlCol="0" anchor="t">
+            <a:normAutofit/>
+          </a:bodyPr>
+          <a:lstStyle/>
+          <a:p>
+            <a:pPr algn="l" indent="0" marL="0">
+              <a:buNone/>
+            </a:pPr>
+            <a:r>
+              <a:rPr lang="en-US" sz="1400" b="0" dirty="0">
+                <a:solidFill>
+                  <a:srgbClr val="3D4652"/>
+                </a:solidFill>
+                <a:latin typeface="IBM Plex Mono" pitchFamily="34" charset="0"/>
+                <a:ea typeface="IBM Plex Mono" pitchFamily="34" charset="-122"/>
+                <a:cs typeface="IBM Plex Mono" pitchFamily="34" charset="-120"/>
+              </a:rPr>
+              <a:t>&lt; 0.001</a:t>
+            </a:r>
+            <a:endParaRPr lang="en-US" sz="1650" dirty="0"/>
+          </a:p>
+        </p:txBody>
+      </p:sp>
+      <p:sp>
+        <p:nvSpPr>
+          <p:cNvPr id="2073" name="Text 3"/>
+          <p:cNvSpPr/>
+          <p:nvPr/>
+        </p:nvSpPr>
+        <p:spPr>
+          <a:xfrm>
+            <a:off x="14584680" y="5678424"/>
+            <a:ext cx="1005840" cy="329184"/>
+          </a:xfrm>
+          <a:prstGeom prst="rect">
+            <a:avLst/>
+          </a:prstGeom>
+          <a:noFill/>
+          <a:ln/>
+        </p:spPr>
+        <p:txBody>
+          <a:bodyPr wrap="square" lIns="25400" tIns="25400" rIns="25400" bIns="25400" rtlCol="0" anchor="t">
+            <a:normAutofit/>
+          </a:bodyPr>
+          <a:lstStyle/>
+          <a:p>
+            <a:pPr algn="l" indent="0" marL="0">
+              <a:buNone/>
+            </a:pPr>
+            <a:r>
+              <a:rPr lang="en-US" sz="1400" b="0" dirty="0">
+                <a:solidFill>
+                  <a:srgbClr val="3D4652"/>
+                </a:solidFill>
+                <a:latin typeface="IBM Plex Mono" pitchFamily="34" charset="0"/>
+                <a:ea typeface="IBM Plex Mono" pitchFamily="34" charset="-122"/>
+                <a:cs typeface="IBM Plex Mono" pitchFamily="34" charset="-120"/>
+              </a:rPr>
+              <a:t>1.0</a:t>
+            </a:r>
+            <a:endParaRPr lang="en-US" sz="1650" dirty="0"/>
+          </a:p>
+        </p:txBody>
+      </p:sp>
+      <p:sp>
+        <p:nvSpPr>
+          <p:cNvPr id="2074" name="Text 3"/>
+          <p:cNvSpPr/>
+          <p:nvPr/>
+        </p:nvSpPr>
+        <p:spPr>
+          <a:xfrm>
+            <a:off x="15681959" y="5678424"/>
+            <a:ext cx="1463040" cy="329184"/>
+          </a:xfrm>
+          <a:prstGeom prst="rect">
+            <a:avLst/>
+          </a:prstGeom>
+          <a:noFill/>
+          <a:ln/>
+        </p:spPr>
+        <p:txBody>
+          <a:bodyPr wrap="square" lIns="25400" tIns="25400" rIns="25400" bIns="25400" rtlCol="0" anchor="t">
+            <a:normAutofit/>
+          </a:bodyPr>
+          <a:lstStyle/>
+          <a:p>
+            <a:pPr algn="l" indent="0" marL="0">
+              <a:buNone/>
+            </a:pPr>
+            <a:r>
+              <a:rPr lang="en-US" sz="1400" b="1" dirty="0">
+                <a:solidFill>
+                  <a:srgbClr val="1E7A52"/>
+                </a:solidFill>
+                <a:latin typeface="IBM Plex Mono" pitchFamily="34" charset="0"/>
+                <a:ea typeface="IBM Plex Mono" pitchFamily="34" charset="-122"/>
+                <a:cs typeface="IBM Plex Mono" pitchFamily="34" charset="-120"/>
+              </a:rPr>
+              <a:t>yes</a:t>
+            </a:r>
+            <a:endParaRPr lang="en-US" sz="1650" dirty="0"/>
+          </a:p>
+        </p:txBody>
+      </p:sp>
+      <p:sp>
+        <p:nvSpPr>
+          <p:cNvPr id="2075" name="Text 3"/>
+          <p:cNvSpPr/>
+          <p:nvPr/>
+        </p:nvSpPr>
+        <p:spPr>
+          <a:xfrm>
+            <a:off x="1234440" y="6099048"/>
+            <a:ext cx="822960" cy="329184"/>
+          </a:xfrm>
+          <a:prstGeom prst="rect">
+            <a:avLst/>
+          </a:prstGeom>
+          <a:noFill/>
+          <a:ln/>
+        </p:spPr>
+        <p:txBody>
+          <a:bodyPr wrap="square" lIns="25400" tIns="25400" rIns="25400" bIns="25400" rtlCol="0" anchor="t">
+            <a:normAutofit/>
+          </a:bodyPr>
+          <a:lstStyle/>
+          <a:p>
+            <a:pPr algn="l" indent="0" marL="0">
+              <a:buNone/>
+            </a:pPr>
+            <a:r>
+              <a:rPr lang="en-US" sz="1400" b="1" dirty="0">
+                <a:solidFill>
+                  <a:srgbClr val="1A2430"/>
+                </a:solidFill>
+                <a:latin typeface="IBM Plex Mono" pitchFamily="34" charset="0"/>
+                <a:ea typeface="IBM Plex Mono" pitchFamily="34" charset="-122"/>
+                <a:cs typeface="IBM Plex Mono" pitchFamily="34" charset="-120"/>
+              </a:rPr>
+              <a:t>Q08</a:t>
+            </a:r>
+            <a:endParaRPr lang="en-US" sz="1650" dirty="0"/>
+          </a:p>
+        </p:txBody>
+      </p:sp>
+      <p:sp>
+        <p:nvSpPr>
+          <p:cNvPr id="2076" name="Text 3"/>
+          <p:cNvSpPr/>
+          <p:nvPr/>
+        </p:nvSpPr>
+        <p:spPr>
+          <a:xfrm>
+            <a:off x="2057400" y="6099048"/>
+            <a:ext cx="4206240" cy="329184"/>
+          </a:xfrm>
+          <a:prstGeom prst="rect">
+            <a:avLst/>
+          </a:prstGeom>
+          <a:noFill/>
+          <a:ln/>
+        </p:spPr>
+        <p:txBody>
+          <a:bodyPr wrap="square" lIns="25400" tIns="25400" rIns="25400" bIns="25400" rtlCol="0" anchor="t">
+            <a:normAutofit/>
+          </a:bodyPr>
+          <a:lstStyle/>
+          <a:p>
+            <a:pPr algn="l" indent="0" marL="0">
+              <a:buNone/>
+            </a:pPr>
+            <a:r>
+              <a:rPr lang="en-US" sz="1400" b="0" dirty="0">
+                <a:solidFill>
+                  <a:srgbClr val="3D4652"/>
+                </a:solidFill>
+                <a:latin typeface="Space Grotesk" pitchFamily="34" charset="0"/>
+                <a:ea typeface="IBM Plex Mono" pitchFamily="34" charset="-122"/>
+                <a:cs typeface="IBM Plex Mono" pitchFamily="34" charset="-120"/>
+              </a:rPr>
+              <a:t>Teammates of Messi 2015/16</a:t>
+            </a:r>
+            <a:endParaRPr lang="en-US" sz="1650" dirty="0"/>
+          </a:p>
+        </p:txBody>
+      </p:sp>
+      <p:sp>
+        <p:nvSpPr>
+          <p:cNvPr id="2077" name="Text 3"/>
+          <p:cNvSpPr/>
+          <p:nvPr/>
+        </p:nvSpPr>
+        <p:spPr>
+          <a:xfrm>
+            <a:off x="6355080" y="6099048"/>
+            <a:ext cx="1463040" cy="329184"/>
+          </a:xfrm>
+          <a:prstGeom prst="rect">
+            <a:avLst/>
+          </a:prstGeom>
+          <a:noFill/>
+          <a:ln/>
+        </p:spPr>
+        <p:txBody>
+          <a:bodyPr wrap="square" lIns="25400" tIns="25400" rIns="25400" bIns="25400" rtlCol="0" anchor="t">
+            <a:normAutofit/>
+          </a:bodyPr>
+          <a:lstStyle/>
+          <a:p>
+            <a:pPr algn="l" indent="0" marL="0">
+              <a:buNone/>
+            </a:pPr>
+            <a:r>
+              <a:rPr lang="en-US" sz="1400" b="0" dirty="0">
+                <a:solidFill>
+                  <a:srgbClr val="33608F"/>
+                </a:solidFill>
+                <a:latin typeface="IBM Plex Mono" pitchFamily="34" charset="0"/>
+                <a:ea typeface="IBM Plex Mono" pitchFamily="34" charset="-122"/>
+                <a:cs typeface="IBM Plex Mono" pitchFamily="34" charset="-120"/>
+              </a:rPr>
+              <a:t>7.0 ms</a:t>
+            </a:r>
+            <a:endParaRPr lang="en-US" sz="1650" dirty="0"/>
+          </a:p>
+        </p:txBody>
+      </p:sp>
+      <p:sp>
+        <p:nvSpPr>
+          <p:cNvPr id="2078" name="Text 3"/>
+          <p:cNvSpPr/>
+          <p:nvPr/>
+        </p:nvSpPr>
+        <p:spPr>
+          <a:xfrm>
+            <a:off x="7909560" y="6099048"/>
+            <a:ext cx="1463040" cy="329184"/>
+          </a:xfrm>
+          <a:prstGeom prst="rect">
+            <a:avLst/>
+          </a:prstGeom>
+          <a:noFill/>
+          <a:ln/>
+        </p:spPr>
+        <p:txBody>
+          <a:bodyPr wrap="square" lIns="25400" tIns="25400" rIns="25400" bIns="25400" rtlCol="0" anchor="t">
+            <a:normAutofit/>
+          </a:bodyPr>
+          <a:lstStyle/>
+          <a:p>
+            <a:pPr algn="l" indent="0" marL="0">
+              <a:buNone/>
+            </a:pPr>
+            <a:r>
+              <a:rPr lang="en-US" sz="1400" b="0" dirty="0">
+                <a:solidFill>
+                  <a:srgbClr val="1E7A52"/>
+                </a:solidFill>
+                <a:latin typeface="IBM Plex Mono" pitchFamily="34" charset="0"/>
+                <a:ea typeface="IBM Plex Mono" pitchFamily="34" charset="-122"/>
+                <a:cs typeface="IBM Plex Mono" pitchFamily="34" charset="-120"/>
+              </a:rPr>
+              <a:t>4.2 ms</a:t>
+            </a:r>
+            <a:endParaRPr lang="en-US" sz="1650" dirty="0"/>
+          </a:p>
+        </p:txBody>
+      </p:sp>
+      <p:sp>
+        <p:nvSpPr>
+          <p:cNvPr id="2079" name="Text 3"/>
+          <p:cNvSpPr/>
+          <p:nvPr/>
+        </p:nvSpPr>
+        <p:spPr>
+          <a:xfrm>
+            <a:off x="9464040" y="6099048"/>
+            <a:ext cx="1463040" cy="329184"/>
+          </a:xfrm>
+          <a:prstGeom prst="rect">
+            <a:avLst/>
+          </a:prstGeom>
+          <a:noFill/>
+          <a:ln/>
+        </p:spPr>
+        <p:txBody>
+          <a:bodyPr wrap="square" lIns="25400" tIns="25400" rIns="25400" bIns="25400" rtlCol="0" anchor="t">
+            <a:normAutofit/>
+          </a:bodyPr>
+          <a:lstStyle/>
+          <a:p>
+            <a:pPr algn="l" indent="0" marL="0">
+              <a:buNone/>
+            </a:pPr>
+            <a:r>
+              <a:rPr lang="en-US" sz="1400" b="1" dirty="0">
+                <a:solidFill>
+                  <a:srgbClr val="1E7A52"/>
+                </a:solidFill>
+                <a:latin typeface="IBM Plex Mono" pitchFamily="34" charset="0"/>
+                <a:ea typeface="IBM Plex Mono" pitchFamily="34" charset="-122"/>
+                <a:cs typeface="IBM Plex Mono" pitchFamily="34" charset="-120"/>
+              </a:rPr>
+              <a:t>1.66×</a:t>
+            </a:r>
+            <a:endParaRPr lang="en-US" sz="1650" dirty="0"/>
+          </a:p>
+        </p:txBody>
+      </p:sp>
+      <p:sp>
+        <p:nvSpPr>
+          <p:cNvPr id="2080" name="Text 3"/>
+          <p:cNvSpPr/>
+          <p:nvPr/>
+        </p:nvSpPr>
+        <p:spPr>
+          <a:xfrm>
+            <a:off x="11018520" y="6099048"/>
+            <a:ext cx="2011680" cy="329184"/>
+          </a:xfrm>
+          <a:prstGeom prst="rect">
+            <a:avLst/>
+          </a:prstGeom>
+          <a:noFill/>
+          <a:ln/>
+        </p:spPr>
+        <p:txBody>
+          <a:bodyPr wrap="square" lIns="25400" tIns="25400" rIns="25400" bIns="25400" rtlCol="0" anchor="t">
+            <a:normAutofit/>
+          </a:bodyPr>
+          <a:lstStyle/>
+          <a:p>
+            <a:pPr algn="l" indent="0" marL="0">
+              <a:buNone/>
+            </a:pPr>
+            <a:r>
+              <a:rPr lang="en-US" sz="1400" b="0" dirty="0">
+                <a:solidFill>
+                  <a:srgbClr val="1E7A52"/>
+                </a:solidFill>
+                <a:latin typeface="IBM Plex Mono" pitchFamily="34" charset="0"/>
+                <a:ea typeface="IBM Plex Mono" pitchFamily="34" charset="-122"/>
+                <a:cs typeface="IBM Plex Mono" pitchFamily="34" charset="-120"/>
+              </a:rPr>
+              <a:t>Neo4j</a:t>
+            </a:r>
+            <a:endParaRPr lang="en-US" sz="1650" dirty="0"/>
+          </a:p>
+        </p:txBody>
+      </p:sp>
+      <p:sp>
+        <p:nvSpPr>
+          <p:cNvPr id="2081" name="Text 3"/>
+          <p:cNvSpPr/>
+          <p:nvPr/>
+        </p:nvSpPr>
+        <p:spPr>
+          <a:xfrm>
+            <a:off x="13121640" y="6099048"/>
+            <a:ext cx="1371600" cy="329184"/>
+          </a:xfrm>
+          <a:prstGeom prst="rect">
+            <a:avLst/>
+          </a:prstGeom>
+          <a:noFill/>
+          <a:ln/>
+        </p:spPr>
+        <p:txBody>
+          <a:bodyPr wrap="square" lIns="25400" tIns="25400" rIns="25400" bIns="25400" rtlCol="0" anchor="t">
+            <a:normAutofit/>
+          </a:bodyPr>
+          <a:lstStyle/>
+          <a:p>
+            <a:pPr algn="l" indent="0" marL="0">
+              <a:buNone/>
+            </a:pPr>
+            <a:r>
+              <a:rPr lang="en-US" sz="1400" b="0" dirty="0">
+                <a:solidFill>
+                  <a:srgbClr val="3D4652"/>
+                </a:solidFill>
+                <a:latin typeface="IBM Plex Mono" pitchFamily="34" charset="0"/>
+                <a:ea typeface="IBM Plex Mono" pitchFamily="34" charset="-122"/>
+                <a:cs typeface="IBM Plex Mono" pitchFamily="34" charset="-120"/>
+              </a:rPr>
+              <a:t>&lt; 0.001</a:t>
+            </a:r>
+            <a:endParaRPr lang="en-US" sz="1650" dirty="0"/>
+          </a:p>
+        </p:txBody>
+      </p:sp>
+      <p:sp>
+        <p:nvSpPr>
+          <p:cNvPr id="2082" name="Text 3"/>
+          <p:cNvSpPr/>
+          <p:nvPr/>
+        </p:nvSpPr>
+        <p:spPr>
+          <a:xfrm>
+            <a:off x="14584680" y="6099048"/>
+            <a:ext cx="1005840" cy="329184"/>
+          </a:xfrm>
+          <a:prstGeom prst="rect">
+            <a:avLst/>
+          </a:prstGeom>
+          <a:noFill/>
+          <a:ln/>
+        </p:spPr>
+        <p:txBody>
+          <a:bodyPr wrap="square" lIns="25400" tIns="25400" rIns="25400" bIns="25400" rtlCol="0" anchor="t">
+            <a:normAutofit/>
+          </a:bodyPr>
+          <a:lstStyle/>
+          <a:p>
+            <a:pPr algn="l" indent="0" marL="0">
+              <a:buNone/>
+            </a:pPr>
+            <a:r>
+              <a:rPr lang="en-US" sz="1400" b="0" dirty="0">
+                <a:solidFill>
+                  <a:srgbClr val="3D4652"/>
+                </a:solidFill>
+                <a:latin typeface="IBM Plex Mono" pitchFamily="34" charset="0"/>
+                <a:ea typeface="IBM Plex Mono" pitchFamily="34" charset="-122"/>
+                <a:cs typeface="IBM Plex Mono" pitchFamily="34" charset="-120"/>
+              </a:rPr>
+              <a:t>0.93</a:t>
+            </a:r>
+            <a:endParaRPr lang="en-US" sz="1650" dirty="0"/>
+          </a:p>
+        </p:txBody>
+      </p:sp>
+      <p:sp>
+        <p:nvSpPr>
+          <p:cNvPr id="2083" name="Text 3"/>
+          <p:cNvSpPr/>
+          <p:nvPr/>
+        </p:nvSpPr>
+        <p:spPr>
+          <a:xfrm>
+            <a:off x="15681959" y="6099048"/>
+            <a:ext cx="1463040" cy="329184"/>
+          </a:xfrm>
+          <a:prstGeom prst="rect">
+            <a:avLst/>
+          </a:prstGeom>
+          <a:noFill/>
+          <a:ln/>
+        </p:spPr>
+        <p:txBody>
+          <a:bodyPr wrap="square" lIns="25400" tIns="25400" rIns="25400" bIns="25400" rtlCol="0" anchor="t">
+            <a:normAutofit/>
+          </a:bodyPr>
+          <a:lstStyle/>
+          <a:p>
+            <a:pPr algn="l" indent="0" marL="0">
+              <a:buNone/>
+            </a:pPr>
+            <a:r>
+              <a:rPr lang="en-US" sz="1400" b="1" dirty="0">
+                <a:solidFill>
+                  <a:srgbClr val="1E7A52"/>
+                </a:solidFill>
+                <a:latin typeface="IBM Plex Mono" pitchFamily="34" charset="0"/>
+                <a:ea typeface="IBM Plex Mono" pitchFamily="34" charset="-122"/>
+                <a:cs typeface="IBM Plex Mono" pitchFamily="34" charset="-120"/>
+              </a:rPr>
+              <a:t>yes</a:t>
+            </a:r>
+            <a:endParaRPr lang="en-US" sz="1650" dirty="0"/>
+          </a:p>
+        </p:txBody>
+      </p:sp>
+      <p:sp>
+        <p:nvSpPr>
+          <p:cNvPr id="2084" name="Text 3"/>
+          <p:cNvSpPr/>
+          <p:nvPr/>
+        </p:nvSpPr>
+        <p:spPr>
+          <a:xfrm>
+            <a:off x="1234440" y="6519672"/>
+            <a:ext cx="822960" cy="329184"/>
+          </a:xfrm>
+          <a:prstGeom prst="rect">
+            <a:avLst/>
+          </a:prstGeom>
+          <a:noFill/>
+          <a:ln/>
+        </p:spPr>
+        <p:txBody>
+          <a:bodyPr wrap="square" lIns="25400" tIns="25400" rIns="25400" bIns="25400" rtlCol="0" anchor="t">
+            <a:normAutofit/>
+          </a:bodyPr>
+          <a:lstStyle/>
+          <a:p>
+            <a:pPr algn="l" indent="0" marL="0">
+              <a:buNone/>
+            </a:pPr>
+            <a:r>
+              <a:rPr lang="en-US" sz="1400" b="1" dirty="0">
+                <a:solidFill>
+                  <a:srgbClr val="1A2430"/>
+                </a:solidFill>
+                <a:latin typeface="IBM Plex Mono" pitchFamily="34" charset="0"/>
+                <a:ea typeface="IBM Plex Mono" pitchFamily="34" charset="-122"/>
+                <a:cs typeface="IBM Plex Mono" pitchFamily="34" charset="-120"/>
+              </a:rPr>
+              <a:t>Q09</a:t>
+            </a:r>
+            <a:endParaRPr lang="en-US" sz="1650" dirty="0"/>
+          </a:p>
+        </p:txBody>
+      </p:sp>
+      <p:sp>
+        <p:nvSpPr>
+          <p:cNvPr id="2085" name="Text 3"/>
+          <p:cNvSpPr/>
+          <p:nvPr/>
+        </p:nvSpPr>
+        <p:spPr>
+          <a:xfrm>
+            <a:off x="2057400" y="6519672"/>
+            <a:ext cx="4206240" cy="329184"/>
+          </a:xfrm>
+          <a:prstGeom prst="rect">
+            <a:avLst/>
+          </a:prstGeom>
+          <a:noFill/>
+          <a:ln/>
+        </p:spPr>
+        <p:txBody>
+          <a:bodyPr wrap="square" lIns="25400" tIns="25400" rIns="25400" bIns="25400" rtlCol="0" anchor="t">
+            <a:normAutofit/>
+          </a:bodyPr>
+          <a:lstStyle/>
+          <a:p>
+            <a:pPr algn="l" indent="0" marL="0">
+              <a:buNone/>
+            </a:pPr>
+            <a:r>
+              <a:rPr lang="en-US" sz="1400" b="0" dirty="0">
+                <a:solidFill>
+                  <a:srgbClr val="3D4652"/>
+                </a:solidFill>
+                <a:latin typeface="Space Grotesk" pitchFamily="34" charset="0"/>
+                <a:ea typeface="IBM Plex Mono" pitchFamily="34" charset="-122"/>
+                <a:cs typeface="IBM Plex Mono" pitchFamily="34" charset="-120"/>
+              </a:rPr>
+              <a:t>2-hop teammates of Messi</a:t>
+            </a:r>
+            <a:endParaRPr lang="en-US" sz="1650" dirty="0"/>
+          </a:p>
+        </p:txBody>
+      </p:sp>
+      <p:sp>
+        <p:nvSpPr>
+          <p:cNvPr id="2086" name="Text 3"/>
+          <p:cNvSpPr/>
+          <p:nvPr/>
+        </p:nvSpPr>
+        <p:spPr>
+          <a:xfrm>
+            <a:off x="6355080" y="6519672"/>
+            <a:ext cx="1463040" cy="329184"/>
+          </a:xfrm>
+          <a:prstGeom prst="rect">
+            <a:avLst/>
+          </a:prstGeom>
+          <a:noFill/>
+          <a:ln/>
+        </p:spPr>
+        <p:txBody>
+          <a:bodyPr wrap="square" lIns="25400" tIns="25400" rIns="25400" bIns="25400" rtlCol="0" anchor="t">
+            <a:normAutofit/>
+          </a:bodyPr>
+          <a:lstStyle/>
+          <a:p>
+            <a:pPr algn="l" indent="0" marL="0">
+              <a:buNone/>
+            </a:pPr>
+            <a:r>
+              <a:rPr lang="en-US" sz="1400" b="0" dirty="0">
+                <a:solidFill>
+                  <a:srgbClr val="33608F"/>
+                </a:solidFill>
+                <a:latin typeface="IBM Plex Mono" pitchFamily="34" charset="0"/>
+                <a:ea typeface="IBM Plex Mono" pitchFamily="34" charset="-122"/>
+                <a:cs typeface="IBM Plex Mono" pitchFamily="34" charset="-120"/>
+              </a:rPr>
+              <a:t>28.9 ms</a:t>
+            </a:r>
+            <a:endParaRPr lang="en-US" sz="1650" dirty="0"/>
+          </a:p>
+        </p:txBody>
+      </p:sp>
+      <p:sp>
+        <p:nvSpPr>
+          <p:cNvPr id="2087" name="Text 3"/>
+          <p:cNvSpPr/>
+          <p:nvPr/>
+        </p:nvSpPr>
+        <p:spPr>
+          <a:xfrm>
+            <a:off x="7909560" y="6519672"/>
+            <a:ext cx="1463040" cy="329184"/>
+          </a:xfrm>
+          <a:prstGeom prst="rect">
+            <a:avLst/>
+          </a:prstGeom>
+          <a:noFill/>
+          <a:ln/>
+        </p:spPr>
+        <p:txBody>
+          <a:bodyPr wrap="square" lIns="25400" tIns="25400" rIns="25400" bIns="25400" rtlCol="0" anchor="t">
+            <a:normAutofit/>
+          </a:bodyPr>
+          <a:lstStyle/>
+          <a:p>
+            <a:pPr algn="l" indent="0" marL="0">
+              <a:buNone/>
+            </a:pPr>
+            <a:r>
+              <a:rPr lang="en-US" sz="1400" b="0" dirty="0">
+                <a:solidFill>
+                  <a:srgbClr val="1E7A52"/>
+                </a:solidFill>
+                <a:latin typeface="IBM Plex Mono" pitchFamily="34" charset="0"/>
+                <a:ea typeface="IBM Plex Mono" pitchFamily="34" charset="-122"/>
+                <a:cs typeface="IBM Plex Mono" pitchFamily="34" charset="-120"/>
+              </a:rPr>
+              <a:t>77.6 ms</a:t>
+            </a:r>
+            <a:endParaRPr lang="en-US" sz="1650" dirty="0"/>
+          </a:p>
+        </p:txBody>
+      </p:sp>
+      <p:sp>
+        <p:nvSpPr>
+          <p:cNvPr id="2088" name="Text 3"/>
+          <p:cNvSpPr/>
+          <p:nvPr/>
+        </p:nvSpPr>
+        <p:spPr>
+          <a:xfrm>
+            <a:off x="9464040" y="6519672"/>
+            <a:ext cx="1463040" cy="329184"/>
+          </a:xfrm>
+          <a:prstGeom prst="rect">
+            <a:avLst/>
+          </a:prstGeom>
+          <a:noFill/>
+          <a:ln/>
+        </p:spPr>
+        <p:txBody>
+          <a:bodyPr wrap="square" lIns="25400" tIns="25400" rIns="25400" bIns="25400" rtlCol="0" anchor="t">
+            <a:normAutofit/>
+          </a:bodyPr>
+          <a:lstStyle/>
+          <a:p>
+            <a:pPr algn="l" indent="0" marL="0">
+              <a:buNone/>
+            </a:pPr>
+            <a:r>
+              <a:rPr lang="en-US" sz="1400" b="1" dirty="0">
+                <a:solidFill>
+                  <a:srgbClr val="33608F"/>
+                </a:solidFill>
+                <a:latin typeface="IBM Plex Mono" pitchFamily="34" charset="0"/>
+                <a:ea typeface="IBM Plex Mono" pitchFamily="34" charset="-122"/>
+                <a:cs typeface="IBM Plex Mono" pitchFamily="34" charset="-120"/>
+              </a:rPr>
+              <a:t>2.68×</a:t>
+            </a:r>
+            <a:endParaRPr lang="en-US" sz="1650" dirty="0"/>
+          </a:p>
+        </p:txBody>
+      </p:sp>
+      <p:sp>
+        <p:nvSpPr>
+          <p:cNvPr id="2089" name="Text 3"/>
+          <p:cNvSpPr/>
+          <p:nvPr/>
+        </p:nvSpPr>
+        <p:spPr>
+          <a:xfrm>
+            <a:off x="11018520" y="6519672"/>
+            <a:ext cx="2011680" cy="329184"/>
+          </a:xfrm>
+          <a:prstGeom prst="rect">
+            <a:avLst/>
+          </a:prstGeom>
+          <a:noFill/>
+          <a:ln/>
+        </p:spPr>
+        <p:txBody>
+          <a:bodyPr wrap="square" lIns="25400" tIns="25400" rIns="25400" bIns="25400" rtlCol="0" anchor="t">
+            <a:normAutofit/>
+          </a:bodyPr>
+          <a:lstStyle/>
+          <a:p>
+            <a:pPr algn="l" indent="0" marL="0">
+              <a:buNone/>
+            </a:pPr>
+            <a:r>
+              <a:rPr lang="en-US" sz="1400" b="0" dirty="0">
+                <a:solidFill>
+                  <a:srgbClr val="33608F"/>
+                </a:solidFill>
+                <a:latin typeface="IBM Plex Mono" pitchFamily="34" charset="0"/>
+                <a:ea typeface="IBM Plex Mono" pitchFamily="34" charset="-122"/>
+                <a:cs typeface="IBM Plex Mono" pitchFamily="34" charset="-120"/>
+              </a:rPr>
+              <a:t>Postgres</a:t>
+            </a:r>
+            <a:endParaRPr lang="en-US" sz="1650" dirty="0"/>
+          </a:p>
+        </p:txBody>
+      </p:sp>
+      <p:sp>
+        <p:nvSpPr>
+          <p:cNvPr id="2090" name="Text 3"/>
+          <p:cNvSpPr/>
+          <p:nvPr/>
+        </p:nvSpPr>
+        <p:spPr>
+          <a:xfrm>
+            <a:off x="13121640" y="6519672"/>
+            <a:ext cx="1371600" cy="329184"/>
+          </a:xfrm>
+          <a:prstGeom prst="rect">
+            <a:avLst/>
+          </a:prstGeom>
+          <a:noFill/>
+          <a:ln/>
+        </p:spPr>
+        <p:txBody>
+          <a:bodyPr wrap="square" lIns="25400" tIns="25400" rIns="25400" bIns="25400" rtlCol="0" anchor="t">
+            <a:normAutofit/>
+          </a:bodyPr>
+          <a:lstStyle/>
+          <a:p>
+            <a:pPr algn="l" indent="0" marL="0">
+              <a:buNone/>
+            </a:pPr>
+            <a:r>
+              <a:rPr lang="en-US" sz="1400" b="0" dirty="0">
+                <a:solidFill>
+                  <a:srgbClr val="3D4652"/>
+                </a:solidFill>
+                <a:latin typeface="IBM Plex Mono" pitchFamily="34" charset="0"/>
+                <a:ea typeface="IBM Plex Mono" pitchFamily="34" charset="-122"/>
+                <a:cs typeface="IBM Plex Mono" pitchFamily="34" charset="-120"/>
+              </a:rPr>
+              <a:t>&lt; 0.001</a:t>
+            </a:r>
+            <a:endParaRPr lang="en-US" sz="1650" dirty="0"/>
+          </a:p>
+        </p:txBody>
+      </p:sp>
+      <p:sp>
+        <p:nvSpPr>
+          <p:cNvPr id="2091" name="Text 3"/>
+          <p:cNvSpPr/>
+          <p:nvPr/>
+        </p:nvSpPr>
+        <p:spPr>
+          <a:xfrm>
+            <a:off x="14584680" y="6519672"/>
+            <a:ext cx="1005840" cy="329184"/>
+          </a:xfrm>
+          <a:prstGeom prst="rect">
+            <a:avLst/>
+          </a:prstGeom>
+          <a:noFill/>
+          <a:ln/>
+        </p:spPr>
+        <p:txBody>
+          <a:bodyPr wrap="square" lIns="25400" tIns="25400" rIns="25400" bIns="25400" rtlCol="0" anchor="t">
+            <a:normAutofit/>
+          </a:bodyPr>
+          <a:lstStyle/>
+          <a:p>
+            <a:pPr algn="l" indent="0" marL="0">
+              <a:buNone/>
+            </a:pPr>
+            <a:r>
+              <a:rPr lang="en-US" sz="1400" b="0" dirty="0">
+                <a:solidFill>
+                  <a:srgbClr val="3D4652"/>
+                </a:solidFill>
+                <a:latin typeface="IBM Plex Mono" pitchFamily="34" charset="0"/>
+                <a:ea typeface="IBM Plex Mono" pitchFamily="34" charset="-122"/>
+                <a:cs typeface="IBM Plex Mono" pitchFamily="34" charset="-120"/>
+              </a:rPr>
+              <a:t>1.0</a:t>
+            </a:r>
+            <a:endParaRPr lang="en-US" sz="1650" dirty="0"/>
+          </a:p>
+        </p:txBody>
+      </p:sp>
+      <p:sp>
+        <p:nvSpPr>
+          <p:cNvPr id="2092" name="Text 3"/>
+          <p:cNvSpPr/>
+          <p:nvPr/>
+        </p:nvSpPr>
+        <p:spPr>
+          <a:xfrm>
+            <a:off x="15681959" y="6519672"/>
+            <a:ext cx="1463040" cy="329184"/>
+          </a:xfrm>
+          <a:prstGeom prst="rect">
+            <a:avLst/>
+          </a:prstGeom>
+          <a:noFill/>
+          <a:ln/>
+        </p:spPr>
+        <p:txBody>
+          <a:bodyPr wrap="square" lIns="25400" tIns="25400" rIns="25400" bIns="25400" rtlCol="0" anchor="t">
+            <a:normAutofit/>
+          </a:bodyPr>
+          <a:lstStyle/>
+          <a:p>
+            <a:pPr algn="l" indent="0" marL="0">
+              <a:buNone/>
+            </a:pPr>
+            <a:r>
+              <a:rPr lang="en-US" sz="1400" b="1" dirty="0">
+                <a:solidFill>
+                  <a:srgbClr val="33608F"/>
+                </a:solidFill>
+                <a:latin typeface="IBM Plex Mono" pitchFamily="34" charset="0"/>
+                <a:ea typeface="IBM Plex Mono" pitchFamily="34" charset="-122"/>
+                <a:cs typeface="IBM Plex Mono" pitchFamily="34" charset="-120"/>
+              </a:rPr>
+              <a:t>yes</a:t>
+            </a:r>
+            <a:endParaRPr lang="en-US" sz="1650" dirty="0"/>
+          </a:p>
+        </p:txBody>
+      </p:sp>
+      <p:sp>
+        <p:nvSpPr>
+          <p:cNvPr id="2093" name="Text 3"/>
+          <p:cNvSpPr/>
+          <p:nvPr/>
+        </p:nvSpPr>
+        <p:spPr>
+          <a:xfrm>
+            <a:off x="1234440" y="6940296"/>
+            <a:ext cx="822960" cy="329184"/>
+          </a:xfrm>
+          <a:prstGeom prst="rect">
+            <a:avLst/>
+          </a:prstGeom>
+          <a:noFill/>
+          <a:ln/>
+        </p:spPr>
+        <p:txBody>
+          <a:bodyPr wrap="square" lIns="25400" tIns="25400" rIns="25400" bIns="25400" rtlCol="0" anchor="t">
+            <a:normAutofit/>
+          </a:bodyPr>
+          <a:lstStyle/>
+          <a:p>
+            <a:pPr algn="l" indent="0" marL="0">
+              <a:buNone/>
+            </a:pPr>
+            <a:r>
+              <a:rPr lang="en-US" sz="1400" b="1" dirty="0">
+                <a:solidFill>
+                  <a:srgbClr val="1A2430"/>
+                </a:solidFill>
+                <a:latin typeface="IBM Plex Mono" pitchFamily="34" charset="0"/>
+                <a:ea typeface="IBM Plex Mono" pitchFamily="34" charset="-122"/>
+                <a:cs typeface="IBM Plex Mono" pitchFamily="34" charset="-120"/>
+              </a:rPr>
+              <a:t>Q10</a:t>
+            </a:r>
+            <a:endParaRPr lang="en-US" sz="1650" dirty="0"/>
+          </a:p>
+        </p:txBody>
+      </p:sp>
+      <p:sp>
+        <p:nvSpPr>
+          <p:cNvPr id="2094" name="Text 3"/>
+          <p:cNvSpPr/>
+          <p:nvPr/>
+        </p:nvSpPr>
+        <p:spPr>
+          <a:xfrm>
+            <a:off x="2057400" y="6940296"/>
+            <a:ext cx="4206240" cy="329184"/>
+          </a:xfrm>
+          <a:prstGeom prst="rect">
+            <a:avLst/>
+          </a:prstGeom>
+          <a:noFill/>
+          <a:ln/>
+        </p:spPr>
+        <p:txBody>
+          <a:bodyPr wrap="square" lIns="25400" tIns="25400" rIns="25400" bIns="25400" rtlCol="0" anchor="t">
+            <a:normAutofit/>
+          </a:bodyPr>
+          <a:lstStyle/>
+          <a:p>
+            <a:pPr algn="l" indent="0" marL="0">
+              <a:buNone/>
+            </a:pPr>
+            <a:r>
+              <a:rPr lang="en-US" sz="1400" b="0" dirty="0">
+                <a:solidFill>
+                  <a:srgbClr val="3D4652"/>
+                </a:solidFill>
+                <a:latin typeface="Space Grotesk" pitchFamily="34" charset="0"/>
+                <a:ea typeface="IBM Plex Mono" pitchFamily="34" charset="-122"/>
+                <a:cs typeface="IBM Plex Mono" pitchFamily="34" charset="-120"/>
+              </a:rPr>
+              <a:t>Shortest path Messi → Pirlo</a:t>
+            </a:r>
+            <a:endParaRPr lang="en-US" sz="1650" dirty="0"/>
+          </a:p>
+        </p:txBody>
+      </p:sp>
+      <p:sp>
+        <p:nvSpPr>
+          <p:cNvPr id="2095" name="Text 3"/>
+          <p:cNvSpPr/>
+          <p:nvPr/>
+        </p:nvSpPr>
+        <p:spPr>
+          <a:xfrm>
+            <a:off x="6355080" y="6940296"/>
+            <a:ext cx="1463040" cy="329184"/>
+          </a:xfrm>
+          <a:prstGeom prst="rect">
+            <a:avLst/>
+          </a:prstGeom>
+          <a:noFill/>
+          <a:ln/>
+        </p:spPr>
+        <p:txBody>
+          <a:bodyPr wrap="square" lIns="25400" tIns="25400" rIns="25400" bIns="25400" rtlCol="0" anchor="t">
+            <a:normAutofit/>
+          </a:bodyPr>
+          <a:lstStyle/>
+          <a:p>
+            <a:pPr algn="l" indent="0" marL="0">
+              <a:buNone/>
+            </a:pPr>
+            <a:r>
+              <a:rPr lang="en-US" sz="1400" b="0" dirty="0">
+                <a:solidFill>
+                  <a:srgbClr val="33608F"/>
+                </a:solidFill>
+                <a:latin typeface="IBM Plex Mono" pitchFamily="34" charset="0"/>
+                <a:ea typeface="IBM Plex Mono" pitchFamily="34" charset="-122"/>
+                <a:cs typeface="IBM Plex Mono" pitchFamily="34" charset="-120"/>
+              </a:rPr>
+              <a:t>792.1 ms</a:t>
+            </a:r>
+            <a:endParaRPr lang="en-US" sz="1650" dirty="0"/>
+          </a:p>
+        </p:txBody>
+      </p:sp>
+      <p:sp>
+        <p:nvSpPr>
+          <p:cNvPr id="2096" name="Text 3"/>
+          <p:cNvSpPr/>
+          <p:nvPr/>
+        </p:nvSpPr>
+        <p:spPr>
+          <a:xfrm>
+            <a:off x="7909560" y="6940296"/>
+            <a:ext cx="1463040" cy="329184"/>
+          </a:xfrm>
+          <a:prstGeom prst="rect">
+            <a:avLst/>
+          </a:prstGeom>
+          <a:noFill/>
+          <a:ln/>
+        </p:spPr>
+        <p:txBody>
+          <a:bodyPr wrap="square" lIns="25400" tIns="25400" rIns="25400" bIns="25400" rtlCol="0" anchor="t">
+            <a:normAutofit/>
+          </a:bodyPr>
+          <a:lstStyle/>
+          <a:p>
+            <a:pPr algn="l" indent="0" marL="0">
+              <a:buNone/>
+            </a:pPr>
+            <a:r>
+              <a:rPr lang="en-US" sz="1400" b="0" dirty="0">
+                <a:solidFill>
+                  <a:srgbClr val="1E7A52"/>
+                </a:solidFill>
+                <a:latin typeface="IBM Plex Mono" pitchFamily="34" charset="0"/>
+                <a:ea typeface="IBM Plex Mono" pitchFamily="34" charset="-122"/>
+                <a:cs typeface="IBM Plex Mono" pitchFamily="34" charset="-120"/>
+              </a:rPr>
+              <a:t>14.4 ms</a:t>
+            </a:r>
+            <a:endParaRPr lang="en-US" sz="1650" dirty="0"/>
+          </a:p>
+        </p:txBody>
+      </p:sp>
+      <p:sp>
+        <p:nvSpPr>
+          <p:cNvPr id="2097" name="Text 3"/>
+          <p:cNvSpPr/>
+          <p:nvPr/>
+        </p:nvSpPr>
+        <p:spPr>
+          <a:xfrm>
+            <a:off x="9464040" y="6940296"/>
+            <a:ext cx="1463040" cy="329184"/>
+          </a:xfrm>
+          <a:prstGeom prst="rect">
+            <a:avLst/>
+          </a:prstGeom>
+          <a:noFill/>
+          <a:ln/>
+        </p:spPr>
+        <p:txBody>
+          <a:bodyPr wrap="square" lIns="25400" tIns="25400" rIns="25400" bIns="25400" rtlCol="0" anchor="t">
+            <a:normAutofit/>
+          </a:bodyPr>
+          <a:lstStyle/>
+          <a:p>
+            <a:pPr algn="l" indent="0" marL="0">
+              <a:buNone/>
+            </a:pPr>
+            <a:r>
+              <a:rPr lang="en-US" sz="1400" b="1" dirty="0">
+                <a:solidFill>
+                  <a:srgbClr val="1E7A52"/>
+                </a:solidFill>
+                <a:latin typeface="IBM Plex Mono" pitchFamily="34" charset="0"/>
+                <a:ea typeface="IBM Plex Mono" pitchFamily="34" charset="-122"/>
+                <a:cs typeface="IBM Plex Mono" pitchFamily="34" charset="-120"/>
+              </a:rPr>
+              <a:t>54.89×</a:t>
+            </a:r>
+            <a:endParaRPr lang="en-US" sz="1650" dirty="0"/>
+          </a:p>
+        </p:txBody>
+      </p:sp>
+      <p:sp>
+        <p:nvSpPr>
+          <p:cNvPr id="2098" name="Text 3"/>
+          <p:cNvSpPr/>
+          <p:nvPr/>
+        </p:nvSpPr>
+        <p:spPr>
+          <a:xfrm>
+            <a:off x="11018520" y="6940296"/>
+            <a:ext cx="2011680" cy="329184"/>
+          </a:xfrm>
+          <a:prstGeom prst="rect">
+            <a:avLst/>
+          </a:prstGeom>
+          <a:noFill/>
+          <a:ln/>
+        </p:spPr>
+        <p:txBody>
+          <a:bodyPr wrap="square" lIns="25400" tIns="25400" rIns="25400" bIns="25400" rtlCol="0" anchor="t">
+            <a:normAutofit/>
+          </a:bodyPr>
+          <a:lstStyle/>
+          <a:p>
+            <a:pPr algn="l" indent="0" marL="0">
+              <a:buNone/>
+            </a:pPr>
+            <a:r>
+              <a:rPr lang="en-US" sz="1400" b="0" dirty="0">
+                <a:solidFill>
+                  <a:srgbClr val="1E7A52"/>
+                </a:solidFill>
+                <a:latin typeface="IBM Plex Mono" pitchFamily="34" charset="0"/>
+                <a:ea typeface="IBM Plex Mono" pitchFamily="34" charset="-122"/>
+                <a:cs typeface="IBM Plex Mono" pitchFamily="34" charset="-120"/>
+              </a:rPr>
+              <a:t>Neo4j</a:t>
+            </a:r>
+            <a:endParaRPr lang="en-US" sz="1650" dirty="0"/>
+          </a:p>
+        </p:txBody>
+      </p:sp>
+      <p:sp>
+        <p:nvSpPr>
+          <p:cNvPr id="2099" name="Text 3"/>
+          <p:cNvSpPr/>
+          <p:nvPr/>
+        </p:nvSpPr>
+        <p:spPr>
+          <a:xfrm>
+            <a:off x="13121640" y="6940296"/>
+            <a:ext cx="1371600" cy="329184"/>
+          </a:xfrm>
+          <a:prstGeom prst="rect">
+            <a:avLst/>
+          </a:prstGeom>
+          <a:noFill/>
+          <a:ln/>
+        </p:spPr>
+        <p:txBody>
+          <a:bodyPr wrap="square" lIns="25400" tIns="25400" rIns="25400" bIns="25400" rtlCol="0" anchor="t">
+            <a:normAutofit/>
+          </a:bodyPr>
+          <a:lstStyle/>
+          <a:p>
+            <a:pPr algn="l" indent="0" marL="0">
+              <a:buNone/>
+            </a:pPr>
+            <a:r>
+              <a:rPr lang="en-US" sz="1400" b="0" dirty="0">
+                <a:solidFill>
+                  <a:srgbClr val="3D4652"/>
+                </a:solidFill>
+                <a:latin typeface="IBM Plex Mono" pitchFamily="34" charset="0"/>
+                <a:ea typeface="IBM Plex Mono" pitchFamily="34" charset="-122"/>
+                <a:cs typeface="IBM Plex Mono" pitchFamily="34" charset="-120"/>
+              </a:rPr>
+              <a:t>&lt; 0.001</a:t>
+            </a:r>
+            <a:endParaRPr lang="en-US" sz="1650" dirty="0"/>
+          </a:p>
+        </p:txBody>
+      </p:sp>
+      <p:sp>
+        <p:nvSpPr>
+          <p:cNvPr id="2100" name="Text 3"/>
+          <p:cNvSpPr/>
+          <p:nvPr/>
+        </p:nvSpPr>
+        <p:spPr>
+          <a:xfrm>
+            <a:off x="14584680" y="6940296"/>
+            <a:ext cx="1005840" cy="329184"/>
+          </a:xfrm>
+          <a:prstGeom prst="rect">
+            <a:avLst/>
+          </a:prstGeom>
+          <a:noFill/>
+          <a:ln/>
+        </p:spPr>
+        <p:txBody>
+          <a:bodyPr wrap="square" lIns="25400" tIns="25400" rIns="25400" bIns="25400" rtlCol="0" anchor="t">
+            <a:normAutofit/>
+          </a:bodyPr>
+          <a:lstStyle/>
+          <a:p>
+            <a:pPr algn="l" indent="0" marL="0">
+              <a:buNone/>
+            </a:pPr>
+            <a:r>
+              <a:rPr lang="en-US" sz="1400" b="0" dirty="0">
+                <a:solidFill>
+                  <a:srgbClr val="3D4652"/>
+                </a:solidFill>
+                <a:latin typeface="IBM Plex Mono" pitchFamily="34" charset="0"/>
+                <a:ea typeface="IBM Plex Mono" pitchFamily="34" charset="-122"/>
+                <a:cs typeface="IBM Plex Mono" pitchFamily="34" charset="-120"/>
+              </a:rPr>
+              <a:t>1.0</a:t>
+            </a:r>
+            <a:endParaRPr lang="en-US" sz="1650" dirty="0"/>
+          </a:p>
+        </p:txBody>
+      </p:sp>
+      <p:sp>
+        <p:nvSpPr>
+          <p:cNvPr id="2101" name="Text 3"/>
+          <p:cNvSpPr/>
+          <p:nvPr/>
+        </p:nvSpPr>
+        <p:spPr>
+          <a:xfrm>
+            <a:off x="15681959" y="6940296"/>
+            <a:ext cx="1463040" cy="329184"/>
+          </a:xfrm>
+          <a:prstGeom prst="rect">
+            <a:avLst/>
+          </a:prstGeom>
+          <a:noFill/>
+          <a:ln/>
+        </p:spPr>
+        <p:txBody>
+          <a:bodyPr wrap="square" lIns="25400" tIns="25400" rIns="25400" bIns="25400" rtlCol="0" anchor="t">
+            <a:normAutofit/>
+          </a:bodyPr>
+          <a:lstStyle/>
+          <a:p>
+            <a:pPr algn="l" indent="0" marL="0">
+              <a:buNone/>
+            </a:pPr>
+            <a:r>
+              <a:rPr lang="en-US" sz="1400" b="1" dirty="0">
+                <a:solidFill>
+                  <a:srgbClr val="1E7A52"/>
+                </a:solidFill>
+                <a:latin typeface="IBM Plex Mono" pitchFamily="34" charset="0"/>
+                <a:ea typeface="IBM Plex Mono" pitchFamily="34" charset="-122"/>
+                <a:cs typeface="IBM Plex Mono" pitchFamily="34" charset="-120"/>
+              </a:rPr>
+              <a:t>yes</a:t>
+            </a:r>
+            <a:endParaRPr lang="en-US" sz="1650" dirty="0"/>
+          </a:p>
+        </p:txBody>
+      </p:sp>
+      <p:sp>
+        <p:nvSpPr>
+          <p:cNvPr id="2102" name="Text 3"/>
+          <p:cNvSpPr/>
+          <p:nvPr/>
+        </p:nvSpPr>
+        <p:spPr>
+          <a:xfrm>
+            <a:off x="1234440" y="7360920"/>
+            <a:ext cx="822960" cy="329184"/>
+          </a:xfrm>
+          <a:prstGeom prst="rect">
+            <a:avLst/>
+          </a:prstGeom>
+          <a:noFill/>
+          <a:ln/>
+        </p:spPr>
+        <p:txBody>
+          <a:bodyPr wrap="square" lIns="25400" tIns="25400" rIns="25400" bIns="25400" rtlCol="0" anchor="t">
+            <a:normAutofit/>
+          </a:bodyPr>
+          <a:lstStyle/>
+          <a:p>
+            <a:pPr algn="l" indent="0" marL="0">
+              <a:buNone/>
+            </a:pPr>
+            <a:r>
+              <a:rPr lang="en-US" sz="1400" b="1" dirty="0">
+                <a:solidFill>
+                  <a:srgbClr val="1A2430"/>
+                </a:solidFill>
+                <a:latin typeface="IBM Plex Mono" pitchFamily="34" charset="0"/>
+                <a:ea typeface="IBM Plex Mono" pitchFamily="34" charset="-122"/>
+                <a:cs typeface="IBM Plex Mono" pitchFamily="34" charset="-120"/>
+              </a:rPr>
+              <a:t>Q11</a:t>
+            </a:r>
+            <a:endParaRPr lang="en-US" sz="1650" dirty="0"/>
+          </a:p>
+        </p:txBody>
+      </p:sp>
+      <p:sp>
+        <p:nvSpPr>
+          <p:cNvPr id="2103" name="Text 3"/>
+          <p:cNvSpPr/>
+          <p:nvPr/>
+        </p:nvSpPr>
+        <p:spPr>
+          <a:xfrm>
+            <a:off x="2057400" y="7360920"/>
+            <a:ext cx="4206240" cy="329184"/>
+          </a:xfrm>
+          <a:prstGeom prst="rect">
+            <a:avLst/>
+          </a:prstGeom>
+          <a:noFill/>
+          <a:ln/>
+        </p:spPr>
+        <p:txBody>
+          <a:bodyPr wrap="square" lIns="25400" tIns="25400" rIns="25400" bIns="25400" rtlCol="0" anchor="t">
+            <a:normAutofit/>
+          </a:bodyPr>
+          <a:lstStyle/>
+          <a:p>
+            <a:pPr algn="l" indent="0" marL="0">
+              <a:buNone/>
+            </a:pPr>
+            <a:r>
+              <a:rPr lang="en-US" sz="1400" b="0" dirty="0">
+                <a:solidFill>
+                  <a:srgbClr val="3D4652"/>
+                </a:solidFill>
+                <a:latin typeface="Space Grotesk" pitchFamily="34" charset="0"/>
+                <a:ea typeface="IBM Plex Mono" pitchFamily="34" charset="-122"/>
+                <a:cs typeface="IBM Plex Mono" pitchFamily="34" charset="-120"/>
+              </a:rPr>
+              <a:t>Bulk UPDATE (write)</a:t>
+            </a:r>
+            <a:endParaRPr lang="en-US" sz="1650" dirty="0"/>
+          </a:p>
+        </p:txBody>
+      </p:sp>
+      <p:sp>
+        <p:nvSpPr>
+          <p:cNvPr id="2104" name="Text 3"/>
+          <p:cNvSpPr/>
+          <p:nvPr/>
+        </p:nvSpPr>
+        <p:spPr>
+          <a:xfrm>
+            <a:off x="6355080" y="7360920"/>
+            <a:ext cx="1463040" cy="329184"/>
+          </a:xfrm>
+          <a:prstGeom prst="rect">
+            <a:avLst/>
+          </a:prstGeom>
+          <a:noFill/>
+          <a:ln/>
+        </p:spPr>
+        <p:txBody>
+          <a:bodyPr wrap="square" lIns="25400" tIns="25400" rIns="25400" bIns="25400" rtlCol="0" anchor="t">
+            <a:normAutofit/>
+          </a:bodyPr>
+          <a:lstStyle/>
+          <a:p>
+            <a:pPr algn="l" indent="0" marL="0">
+              <a:buNone/>
+            </a:pPr>
+            <a:r>
+              <a:rPr lang="en-US" sz="1400" b="0" dirty="0">
+                <a:solidFill>
+                  <a:srgbClr val="33608F"/>
+                </a:solidFill>
+                <a:latin typeface="IBM Plex Mono" pitchFamily="34" charset="0"/>
+                <a:ea typeface="IBM Plex Mono" pitchFamily="34" charset="-122"/>
+                <a:cs typeface="IBM Plex Mono" pitchFamily="34" charset="-120"/>
+              </a:rPr>
+              <a:t>303.1 ms</a:t>
+            </a:r>
+            <a:endParaRPr lang="en-US" sz="1650" dirty="0"/>
+          </a:p>
+        </p:txBody>
+      </p:sp>
+      <p:sp>
+        <p:nvSpPr>
+          <p:cNvPr id="2105" name="Text 3"/>
+          <p:cNvSpPr/>
+          <p:nvPr/>
+        </p:nvSpPr>
+        <p:spPr>
+          <a:xfrm>
+            <a:off x="7909560" y="7360920"/>
+            <a:ext cx="1463040" cy="329184"/>
+          </a:xfrm>
+          <a:prstGeom prst="rect">
+            <a:avLst/>
+          </a:prstGeom>
+          <a:noFill/>
+          <a:ln/>
+        </p:spPr>
+        <p:txBody>
+          <a:bodyPr wrap="square" lIns="25400" tIns="25400" rIns="25400" bIns="25400" rtlCol="0" anchor="t">
+            <a:normAutofit/>
+          </a:bodyPr>
+          <a:lstStyle/>
+          <a:p>
+            <a:pPr algn="l" indent="0" marL="0">
+              <a:buNone/>
+            </a:pPr>
+            <a:r>
+              <a:rPr lang="en-US" sz="1400" b="0" dirty="0">
+                <a:solidFill>
+                  <a:srgbClr val="1E7A52"/>
+                </a:solidFill>
+                <a:latin typeface="IBM Plex Mono" pitchFamily="34" charset="0"/>
+                <a:ea typeface="IBM Plex Mono" pitchFamily="34" charset="-122"/>
+                <a:cs typeface="IBM Plex Mono" pitchFamily="34" charset="-120"/>
+              </a:rPr>
+              <a:t>195.6 ms</a:t>
+            </a:r>
+            <a:endParaRPr lang="en-US" sz="1650" dirty="0"/>
+          </a:p>
+        </p:txBody>
+      </p:sp>
+      <p:sp>
+        <p:nvSpPr>
+          <p:cNvPr id="2106" name="Text 3"/>
+          <p:cNvSpPr/>
+          <p:nvPr/>
+        </p:nvSpPr>
+        <p:spPr>
+          <a:xfrm>
+            <a:off x="9464040" y="7360920"/>
+            <a:ext cx="1463040" cy="329184"/>
+          </a:xfrm>
+          <a:prstGeom prst="rect">
+            <a:avLst/>
+          </a:prstGeom>
+          <a:noFill/>
+          <a:ln/>
+        </p:spPr>
+        <p:txBody>
+          <a:bodyPr wrap="square" lIns="25400" tIns="25400" rIns="25400" bIns="25400" rtlCol="0" anchor="t">
+            <a:normAutofit/>
+          </a:bodyPr>
+          <a:lstStyle/>
+          <a:p>
+            <a:pPr algn="l" indent="0" marL="0">
+              <a:buNone/>
+            </a:pPr>
+            <a:r>
+              <a:rPr lang="en-US" sz="1400" b="1" dirty="0">
+                <a:solidFill>
+                  <a:srgbClr val="1E7A52"/>
+                </a:solidFill>
+                <a:latin typeface="IBM Plex Mono" pitchFamily="34" charset="0"/>
+                <a:ea typeface="IBM Plex Mono" pitchFamily="34" charset="-122"/>
+                <a:cs typeface="IBM Plex Mono" pitchFamily="34" charset="-120"/>
+              </a:rPr>
+              <a:t>1.55×</a:t>
+            </a:r>
+            <a:endParaRPr lang="en-US" sz="1650" dirty="0"/>
+          </a:p>
+        </p:txBody>
+      </p:sp>
+      <p:sp>
+        <p:nvSpPr>
+          <p:cNvPr id="2107" name="Text 3"/>
+          <p:cNvSpPr/>
+          <p:nvPr/>
+        </p:nvSpPr>
+        <p:spPr>
+          <a:xfrm>
+            <a:off x="11018520" y="7360920"/>
+            <a:ext cx="2011680" cy="329184"/>
+          </a:xfrm>
+          <a:prstGeom prst="rect">
+            <a:avLst/>
+          </a:prstGeom>
+          <a:noFill/>
+          <a:ln/>
+        </p:spPr>
+        <p:txBody>
+          <a:bodyPr wrap="square" lIns="25400" tIns="25400" rIns="25400" bIns="25400" rtlCol="0" anchor="t">
+            <a:normAutofit/>
+          </a:bodyPr>
+          <a:lstStyle/>
+          <a:p>
+            <a:pPr algn="l" indent="0" marL="0">
+              <a:buNone/>
+            </a:pPr>
+            <a:r>
+              <a:rPr lang="en-US" sz="1400" b="0" dirty="0">
+                <a:solidFill>
+                  <a:srgbClr val="1E7A52"/>
+                </a:solidFill>
+                <a:latin typeface="IBM Plex Mono" pitchFamily="34" charset="0"/>
+                <a:ea typeface="IBM Plex Mono" pitchFamily="34" charset="-122"/>
+                <a:cs typeface="IBM Plex Mono" pitchFamily="34" charset="-120"/>
+              </a:rPr>
+              <a:t>Neo4j</a:t>
+            </a:r>
+            <a:endParaRPr lang="en-US" sz="1650" dirty="0"/>
+          </a:p>
+        </p:txBody>
+      </p:sp>
+      <p:sp>
+        <p:nvSpPr>
+          <p:cNvPr id="2108" name="Text 3"/>
+          <p:cNvSpPr/>
+          <p:nvPr/>
+        </p:nvSpPr>
+        <p:spPr>
+          <a:xfrm>
+            <a:off x="13121640" y="7360920"/>
+            <a:ext cx="1371600" cy="329184"/>
+          </a:xfrm>
+          <a:prstGeom prst="rect">
+            <a:avLst/>
+          </a:prstGeom>
+          <a:noFill/>
+          <a:ln/>
+        </p:spPr>
+        <p:txBody>
+          <a:bodyPr wrap="square" lIns="25400" tIns="25400" rIns="25400" bIns="25400" rtlCol="0" anchor="t">
+            <a:normAutofit/>
+          </a:bodyPr>
+          <a:lstStyle/>
+          <a:p>
+            <a:pPr algn="l" indent="0" marL="0">
+              <a:buNone/>
+            </a:pPr>
+            <a:r>
+              <a:rPr lang="en-US" sz="1400" b="0" dirty="0">
+                <a:solidFill>
+                  <a:srgbClr val="3D4652"/>
+                </a:solidFill>
+                <a:latin typeface="IBM Plex Mono" pitchFamily="34" charset="0"/>
+                <a:ea typeface="IBM Plex Mono" pitchFamily="34" charset="-122"/>
+                <a:cs typeface="IBM Plex Mono" pitchFamily="34" charset="-120"/>
+              </a:rPr>
+              <a:t>&lt; 0.001</a:t>
+            </a:r>
+            <a:endParaRPr lang="en-US" sz="1650" dirty="0"/>
+          </a:p>
+        </p:txBody>
+      </p:sp>
+      <p:sp>
+        <p:nvSpPr>
+          <p:cNvPr id="2109" name="Text 3"/>
+          <p:cNvSpPr/>
+          <p:nvPr/>
+        </p:nvSpPr>
+        <p:spPr>
+          <a:xfrm>
+            <a:off x="14584680" y="7360920"/>
+            <a:ext cx="1005840" cy="329184"/>
+          </a:xfrm>
+          <a:prstGeom prst="rect">
+            <a:avLst/>
+          </a:prstGeom>
+          <a:noFill/>
+          <a:ln/>
+        </p:spPr>
+        <p:txBody>
+          <a:bodyPr wrap="square" lIns="25400" tIns="25400" rIns="25400" bIns="25400" rtlCol="0" anchor="t">
+            <a:normAutofit/>
+          </a:bodyPr>
+          <a:lstStyle/>
+          <a:p>
+            <a:pPr algn="l" indent="0" marL="0">
+              <a:buNone/>
+            </a:pPr>
+            <a:r>
+              <a:rPr lang="en-US" sz="1400" b="0" dirty="0">
+                <a:solidFill>
+                  <a:srgbClr val="3D4652"/>
+                </a:solidFill>
+                <a:latin typeface="IBM Plex Mono" pitchFamily="34" charset="0"/>
+                <a:ea typeface="IBM Plex Mono" pitchFamily="34" charset="-122"/>
+                <a:cs typeface="IBM Plex Mono" pitchFamily="34" charset="-120"/>
+              </a:rPr>
+              <a:t>0.95</a:t>
+            </a:r>
+            <a:endParaRPr lang="en-US" sz="1650" dirty="0"/>
+          </a:p>
+        </p:txBody>
+      </p:sp>
+      <p:sp>
+        <p:nvSpPr>
+          <p:cNvPr id="2110" name="Text 3"/>
+          <p:cNvSpPr/>
+          <p:nvPr/>
+        </p:nvSpPr>
+        <p:spPr>
+          <a:xfrm>
+            <a:off x="15681959" y="7360920"/>
+            <a:ext cx="1463040" cy="329184"/>
+          </a:xfrm>
+          <a:prstGeom prst="rect">
+            <a:avLst/>
+          </a:prstGeom>
+          <a:noFill/>
+          <a:ln/>
+        </p:spPr>
+        <p:txBody>
+          <a:bodyPr wrap="square" lIns="25400" tIns="25400" rIns="25400" bIns="25400" rtlCol="0" anchor="t">
+            <a:normAutofit/>
+          </a:bodyPr>
+          <a:lstStyle/>
+          <a:p>
+            <a:pPr algn="l" indent="0" marL="0">
+              <a:buNone/>
+            </a:pPr>
+            <a:r>
+              <a:rPr lang="en-US" sz="1400" b="1" dirty="0">
+                <a:solidFill>
+                  <a:srgbClr val="1E7A52"/>
+                </a:solidFill>
+                <a:latin typeface="IBM Plex Mono" pitchFamily="34" charset="0"/>
+                <a:ea typeface="IBM Plex Mono" pitchFamily="34" charset="-122"/>
+                <a:cs typeface="IBM Plex Mono" pitchFamily="34" charset="-120"/>
+              </a:rPr>
+              <a:t>yes</a:t>
+            </a:r>
+            <a:endParaRPr lang="en-US" sz="1650" dirty="0"/>
+          </a:p>
+        </p:txBody>
+      </p:sp>
+      <p:sp>
+        <p:nvSpPr>
+          <p:cNvPr id="2111" name="Text 3"/>
+          <p:cNvSpPr/>
+          <p:nvPr/>
+        </p:nvSpPr>
+        <p:spPr>
+          <a:xfrm>
+            <a:off x="1234440" y="7781544"/>
+            <a:ext cx="822960" cy="329184"/>
+          </a:xfrm>
+          <a:prstGeom prst="rect">
+            <a:avLst/>
+          </a:prstGeom>
+          <a:noFill/>
+          <a:ln/>
+        </p:spPr>
+        <p:txBody>
+          <a:bodyPr wrap="square" lIns="25400" tIns="25400" rIns="25400" bIns="25400" rtlCol="0" anchor="t">
+            <a:normAutofit/>
+          </a:bodyPr>
+          <a:lstStyle/>
+          <a:p>
+            <a:pPr algn="l" indent="0" marL="0">
+              <a:buNone/>
+            </a:pPr>
+            <a:r>
+              <a:rPr lang="en-US" sz="1400" b="1" dirty="0">
+                <a:solidFill>
+                  <a:srgbClr val="1A2430"/>
+                </a:solidFill>
+                <a:latin typeface="IBM Plex Mono" pitchFamily="34" charset="0"/>
+                <a:ea typeface="IBM Plex Mono" pitchFamily="34" charset="-122"/>
+                <a:cs typeface="IBM Plex Mono" pitchFamily="34" charset="-120"/>
+              </a:rPr>
+              <a:t>Q12</a:t>
+            </a:r>
+            <a:endParaRPr lang="en-US" sz="1650" dirty="0"/>
+          </a:p>
+        </p:txBody>
+      </p:sp>
+      <p:sp>
+        <p:nvSpPr>
+          <p:cNvPr id="2112" name="Text 3"/>
+          <p:cNvSpPr/>
+          <p:nvPr/>
+        </p:nvSpPr>
+        <p:spPr>
+          <a:xfrm>
+            <a:off x="2057400" y="7781544"/>
+            <a:ext cx="4206240" cy="329184"/>
+          </a:xfrm>
+          <a:prstGeom prst="rect">
+            <a:avLst/>
+          </a:prstGeom>
+          <a:noFill/>
+          <a:ln/>
+        </p:spPr>
+        <p:txBody>
+          <a:bodyPr wrap="square" lIns="25400" tIns="25400" rIns="25400" bIns="25400" rtlCol="0" anchor="t">
+            <a:normAutofit/>
+          </a:bodyPr>
+          <a:lstStyle/>
+          <a:p>
+            <a:pPr algn="l" indent="0" marL="0">
+              <a:buNone/>
+            </a:pPr>
+            <a:r>
+              <a:rPr lang="en-US" sz="1400" b="0" dirty="0">
+                <a:solidFill>
+                  <a:srgbClr val="3D4652"/>
+                </a:solidFill>
+                <a:latin typeface="Space Grotesk" pitchFamily="34" charset="0"/>
+                <a:ea typeface="IBM Plex Mono" pitchFamily="34" charset="-122"/>
+                <a:cs typeface="IBM Plex Mono" pitchFamily="34" charset="-120"/>
+              </a:rPr>
+              <a:t>Schema evolution (write)</a:t>
+            </a:r>
+            <a:endParaRPr lang="en-US" sz="1650" dirty="0"/>
+          </a:p>
+        </p:txBody>
+      </p:sp>
+      <p:sp>
+        <p:nvSpPr>
+          <p:cNvPr id="2113" name="Text 3"/>
+          <p:cNvSpPr/>
+          <p:nvPr/>
+        </p:nvSpPr>
+        <p:spPr>
+          <a:xfrm>
+            <a:off x="6355080" y="7781544"/>
+            <a:ext cx="1463040" cy="329184"/>
+          </a:xfrm>
+          <a:prstGeom prst="rect">
+            <a:avLst/>
+          </a:prstGeom>
+          <a:noFill/>
+          <a:ln/>
+        </p:spPr>
+        <p:txBody>
+          <a:bodyPr wrap="square" lIns="25400" tIns="25400" rIns="25400" bIns="25400" rtlCol="0" anchor="t">
+            <a:normAutofit/>
+          </a:bodyPr>
+          <a:lstStyle/>
+          <a:p>
+            <a:pPr algn="l" indent="0" marL="0">
+              <a:buNone/>
+            </a:pPr>
+            <a:r>
+              <a:rPr lang="en-US" sz="1400" b="0" dirty="0">
+                <a:solidFill>
+                  <a:srgbClr val="33608F"/>
+                </a:solidFill>
+                <a:latin typeface="IBM Plex Mono" pitchFamily="34" charset="0"/>
+                <a:ea typeface="IBM Plex Mono" pitchFamily="34" charset="-122"/>
+                <a:cs typeface="IBM Plex Mono" pitchFamily="34" charset="-120"/>
+              </a:rPr>
+              <a:t>435.9 ms</a:t>
+            </a:r>
+            <a:endParaRPr lang="en-US" sz="1650" dirty="0"/>
+          </a:p>
+        </p:txBody>
+      </p:sp>
+      <p:sp>
+        <p:nvSpPr>
+          <p:cNvPr id="2114" name="Text 3"/>
+          <p:cNvSpPr/>
+          <p:nvPr/>
+        </p:nvSpPr>
+        <p:spPr>
+          <a:xfrm>
+            <a:off x="7909560" y="7781544"/>
+            <a:ext cx="1463040" cy="329184"/>
+          </a:xfrm>
+          <a:prstGeom prst="rect">
+            <a:avLst/>
+          </a:prstGeom>
+          <a:noFill/>
+          <a:ln/>
+        </p:spPr>
+        <p:txBody>
+          <a:bodyPr wrap="square" lIns="25400" tIns="25400" rIns="25400" bIns="25400" rtlCol="0" anchor="t">
+            <a:normAutofit/>
+          </a:bodyPr>
+          <a:lstStyle/>
+          <a:p>
+            <a:pPr algn="l" indent="0" marL="0">
+              <a:buNone/>
+            </a:pPr>
+            <a:r>
+              <a:rPr lang="en-US" sz="1400" b="0" dirty="0">
+                <a:solidFill>
+                  <a:srgbClr val="1E7A52"/>
+                </a:solidFill>
+                <a:latin typeface="IBM Plex Mono" pitchFamily="34" charset="0"/>
+                <a:ea typeface="IBM Plex Mono" pitchFamily="34" charset="-122"/>
+                <a:cs typeface="IBM Plex Mono" pitchFamily="34" charset="-120"/>
+              </a:rPr>
+              <a:t>85.4 ms</a:t>
+            </a:r>
+            <a:endParaRPr lang="en-US" sz="1650" dirty="0"/>
+          </a:p>
+        </p:txBody>
+      </p:sp>
+      <p:sp>
+        <p:nvSpPr>
+          <p:cNvPr id="2115" name="Text 3"/>
+          <p:cNvSpPr/>
+          <p:nvPr/>
+        </p:nvSpPr>
+        <p:spPr>
+          <a:xfrm>
+            <a:off x="9464040" y="7781544"/>
+            <a:ext cx="1463040" cy="329184"/>
+          </a:xfrm>
+          <a:prstGeom prst="rect">
+            <a:avLst/>
+          </a:prstGeom>
+          <a:noFill/>
+          <a:ln/>
+        </p:spPr>
+        <p:txBody>
+          <a:bodyPr wrap="square" lIns="25400" tIns="25400" rIns="25400" bIns="25400" rtlCol="0" anchor="t">
+            <a:normAutofit/>
+          </a:bodyPr>
+          <a:lstStyle/>
+          <a:p>
+            <a:pPr algn="l" indent="0" marL="0">
+              <a:buNone/>
+            </a:pPr>
+            <a:r>
+              <a:rPr lang="en-US" sz="1400" b="1" dirty="0">
+                <a:solidFill>
+                  <a:srgbClr val="1E7A52"/>
+                </a:solidFill>
+                <a:latin typeface="IBM Plex Mono" pitchFamily="34" charset="0"/>
+                <a:ea typeface="IBM Plex Mono" pitchFamily="34" charset="-122"/>
+                <a:cs typeface="IBM Plex Mono" pitchFamily="34" charset="-120"/>
+              </a:rPr>
+              <a:t>5.11×</a:t>
+            </a:r>
+            <a:endParaRPr lang="en-US" sz="1650" dirty="0"/>
+          </a:p>
+        </p:txBody>
+      </p:sp>
+      <p:sp>
+        <p:nvSpPr>
+          <p:cNvPr id="2116" name="Text 3"/>
+          <p:cNvSpPr/>
+          <p:nvPr/>
+        </p:nvSpPr>
+        <p:spPr>
+          <a:xfrm>
+            <a:off x="11018520" y="7781544"/>
+            <a:ext cx="2011680" cy="329184"/>
+          </a:xfrm>
+          <a:prstGeom prst="rect">
+            <a:avLst/>
+          </a:prstGeom>
+          <a:noFill/>
+          <a:ln/>
+        </p:spPr>
+        <p:txBody>
+          <a:bodyPr wrap="square" lIns="25400" tIns="25400" rIns="25400" bIns="25400" rtlCol="0" anchor="t">
+            <a:normAutofit/>
+          </a:bodyPr>
+          <a:lstStyle/>
+          <a:p>
+            <a:pPr algn="l" indent="0" marL="0">
+              <a:buNone/>
+            </a:pPr>
+            <a:r>
+              <a:rPr lang="en-US" sz="1400" b="0" dirty="0">
+                <a:solidFill>
+                  <a:srgbClr val="1E7A52"/>
+                </a:solidFill>
+                <a:latin typeface="IBM Plex Mono" pitchFamily="34" charset="0"/>
+                <a:ea typeface="IBM Plex Mono" pitchFamily="34" charset="-122"/>
+                <a:cs typeface="IBM Plex Mono" pitchFamily="34" charset="-120"/>
+              </a:rPr>
+              <a:t>Neo4j</a:t>
+            </a:r>
+            <a:endParaRPr lang="en-US" sz="1650" dirty="0"/>
+          </a:p>
+        </p:txBody>
+      </p:sp>
+      <p:sp>
+        <p:nvSpPr>
+          <p:cNvPr id="2117" name="Text 3"/>
+          <p:cNvSpPr/>
+          <p:nvPr/>
+        </p:nvSpPr>
+        <p:spPr>
+          <a:xfrm>
+            <a:off x="13121640" y="7781544"/>
+            <a:ext cx="1371600" cy="329184"/>
+          </a:xfrm>
+          <a:prstGeom prst="rect">
+            <a:avLst/>
+          </a:prstGeom>
+          <a:noFill/>
+          <a:ln/>
+        </p:spPr>
+        <p:txBody>
+          <a:bodyPr wrap="square" lIns="25400" tIns="25400" rIns="25400" bIns="25400" rtlCol="0" anchor="t">
+            <a:normAutofit/>
+          </a:bodyPr>
+          <a:lstStyle/>
+          <a:p>
+            <a:pPr algn="l" indent="0" marL="0">
+              <a:buNone/>
+            </a:pPr>
+            <a:r>
+              <a:rPr lang="en-US" sz="1400" b="0" dirty="0">
+                <a:solidFill>
+                  <a:srgbClr val="3D4652"/>
+                </a:solidFill>
+                <a:latin typeface="IBM Plex Mono" pitchFamily="34" charset="0"/>
+                <a:ea typeface="IBM Plex Mono" pitchFamily="34" charset="-122"/>
+                <a:cs typeface="IBM Plex Mono" pitchFamily="34" charset="-120"/>
+              </a:rPr>
+              <a:t>&lt; 0.001</a:t>
+            </a:r>
+            <a:endParaRPr lang="en-US" sz="1650" dirty="0"/>
+          </a:p>
+        </p:txBody>
+      </p:sp>
+      <p:sp>
+        <p:nvSpPr>
+          <p:cNvPr id="2118" name="Text 3"/>
+          <p:cNvSpPr/>
+          <p:nvPr/>
+        </p:nvSpPr>
+        <p:spPr>
+          <a:xfrm>
+            <a:off x="14584680" y="7781544"/>
+            <a:ext cx="1005840" cy="329184"/>
+          </a:xfrm>
+          <a:prstGeom prst="rect">
+            <a:avLst/>
+          </a:prstGeom>
+          <a:noFill/>
+          <a:ln/>
+        </p:spPr>
+        <p:txBody>
+          <a:bodyPr wrap="square" lIns="25400" tIns="25400" rIns="25400" bIns="25400" rtlCol="0" anchor="t">
+            <a:normAutofit/>
+          </a:bodyPr>
+          <a:lstStyle/>
+          <a:p>
+            <a:pPr algn="l" indent="0" marL="0">
+              <a:buNone/>
+            </a:pPr>
+            <a:r>
+              <a:rPr lang="en-US" sz="1400" b="0" dirty="0">
+                <a:solidFill>
+                  <a:srgbClr val="3D4652"/>
+                </a:solidFill>
+                <a:latin typeface="IBM Plex Mono" pitchFamily="34" charset="0"/>
+                <a:ea typeface="IBM Plex Mono" pitchFamily="34" charset="-122"/>
+                <a:cs typeface="IBM Plex Mono" pitchFamily="34" charset="-120"/>
+              </a:rPr>
+              <a:t>1.0</a:t>
+            </a:r>
+            <a:endParaRPr lang="en-US" sz="1650" dirty="0"/>
+          </a:p>
+        </p:txBody>
+      </p:sp>
+      <p:sp>
+        <p:nvSpPr>
+          <p:cNvPr id="2119" name="Text 3"/>
+          <p:cNvSpPr/>
+          <p:nvPr/>
+        </p:nvSpPr>
+        <p:spPr>
+          <a:xfrm>
+            <a:off x="15681959" y="7781544"/>
+            <a:ext cx="1463040" cy="329184"/>
+          </a:xfrm>
+          <a:prstGeom prst="rect">
+            <a:avLst/>
+          </a:prstGeom>
+          <a:noFill/>
+          <a:ln/>
+        </p:spPr>
+        <p:txBody>
+          <a:bodyPr wrap="square" lIns="25400" tIns="25400" rIns="25400" bIns="25400" rtlCol="0" anchor="t">
+            <a:normAutofit/>
+          </a:bodyPr>
+          <a:lstStyle/>
+          <a:p>
+            <a:pPr algn="l" indent="0" marL="0">
+              <a:buNone/>
+            </a:pPr>
+            <a:r>
+              <a:rPr lang="en-US" sz="1400" b="1" dirty="0">
+                <a:solidFill>
+                  <a:srgbClr val="1E7A52"/>
+                </a:solidFill>
+                <a:latin typeface="IBM Plex Mono" pitchFamily="34" charset="0"/>
+                <a:ea typeface="IBM Plex Mono" pitchFamily="34" charset="-122"/>
+                <a:cs typeface="IBM Plex Mono" pitchFamily="34" charset="-120"/>
+              </a:rPr>
+              <a:t>yes</a:t>
+            </a:r>
+            <a:endParaRPr lang="en-US" sz="1650" dirty="0"/>
+          </a:p>
+        </p:txBody>
+      </p:sp>
+      <p:sp>
+        <p:nvSpPr>
+          <p:cNvPr id="2120" name="Text 17"/>
+          <p:cNvSpPr/>
+          <p:nvPr/>
+        </p:nvSpPr>
+        <p:spPr>
+          <a:xfrm>
+            <a:off x="952385" y="8686800"/>
+            <a:ext cx="18021508" cy="351123"/>
+          </a:xfrm>
+          <a:prstGeom prst="rect">
+            <a:avLst/>
+          </a:prstGeom>
+          <a:noFill/>
+          <a:ln/>
+        </p:spPr>
+        <p:txBody>
+          <a:bodyPr wrap="square" lIns="25400" tIns="25400" rIns="25400" bIns="25400" rtlCol="0" anchor="t">
+            <a:normAutofit/>
+          </a:bodyPr>
+          <a:lstStyle/>
+          <a:p>
+            <a:pPr algn="l" indent="0" marL="0">
+              <a:buNone/>
+            </a:pPr>
+            <a:r>
+              <a:rPr lang="en-US" sz="1500" dirty="0">
+                <a:solidFill>
+                  <a:srgbClr val="6B655C"/>
+                </a:solidFill>
+                <a:latin typeface="Space Grotesk" pitchFamily="34" charset="0"/>
+                <a:ea typeface="Space Grotesk" pitchFamily="34" charset="-122"/>
+                <a:cs typeface="Space Grotesk" pitchFamily="34" charset="-120"/>
+              </a:rPr>
+              <a:t>Mann-Whitney U two-sided · r = rank-biserial effect size · Holm = significant after Holm-Bonferroni over the 12 tests (10/12) · all 10 read queries return identical multisets</a:t>
+            </a:r>
+            <a:endParaRPr lang="en-US" sz="1950" dirty="0"/>
+          </a:p>
+        </p:txBody>
+      </p:sp>
+      <p:sp>
+        <p:nvSpPr>
+          <p:cNvPr id="2121" name="Text 18"/>
+          <p:cNvSpPr/>
+          <p:nvPr/>
+        </p:nvSpPr>
+        <p:spPr>
+          <a:xfrm>
+            <a:off x="952385" y="9633214"/>
+            <a:ext cx="6329527" cy="272868"/>
+          </a:xfrm>
+          <a:prstGeom prst="rect">
+            <a:avLst/>
+          </a:prstGeom>
+          <a:noFill/>
+          <a:ln/>
+        </p:spPr>
+        <p:txBody>
+          <a:bodyPr wrap="square" lIns="25400" tIns="25400" rIns="25400" bIns="25400" rtlCol="0" anchor="t">
+            <a:normAutofit/>
+          </a:bodyPr>
+          <a:lstStyle/>
+          <a:p>
+            <a:pPr algn="l" indent="0" marL="0">
+              <a:buNone/>
+            </a:pPr>
+            <a:r>
+              <a:rPr lang="en-US" sz="1425" dirty="0">
+                <a:solidFill>
+                  <a:srgbClr val="9A938A"/>
+                </a:solidFill>
+                <a:latin typeface="IBM Plex Mono" pitchFamily="34" charset="0"/>
+                <a:ea typeface="IBM Plex Mono" pitchFamily="34" charset="-122"/>
+                <a:cs typeface="IBM Plex Mono" pitchFamily="34" charset="-120"/>
+              </a:rPr>
+              <a:t>DM 2025/26 · D'Angelica &amp; Leone · PostgreSQL vs Neo4j</a:t>
+            </a:r>
+            <a:endParaRPr lang="en-US" sz="1425" dirty="0"/>
+          </a:p>
+        </p:txBody>
+      </p:sp>
+      <p:sp>
+        <p:nvSpPr>
+          <p:cNvPr id="2122" name="Text 19"/>
+          <p:cNvSpPr/>
+          <p:nvPr/>
+        </p:nvSpPr>
+        <p:spPr>
+          <a:xfrm>
+            <a:off x="16684121" y="9633214"/>
+            <a:ext cx="727653" cy="272868"/>
+          </a:xfrm>
+          <a:prstGeom prst="rect">
+            <a:avLst/>
+          </a:prstGeom>
+          <a:noFill/>
+          <a:ln/>
+        </p:spPr>
+        <p:txBody>
+          <a:bodyPr wrap="square" lIns="25400" tIns="25400" rIns="25400" bIns="25400" rtlCol="0" anchor="t">
+            <a:normAutofit/>
+          </a:bodyPr>
+          <a:lstStyle/>
+          <a:p>
+            <a:pPr algn="l" indent="0" marL="0">
+              <a:buNone/>
+            </a:pPr>
+            <a:r>
+              <a:rPr lang="en-US" sz="1425" dirty="0">
+                <a:solidFill>
+                  <a:srgbClr val="9A938A"/>
+                </a:solidFill>
+                <a:latin typeface="IBM Plex Mono" pitchFamily="34" charset="0"/>
+                <a:ea typeface="IBM Plex Mono" pitchFamily="34" charset="-122"/>
+                <a:cs typeface="IBM Plex Mono" pitchFamily="34" charset="-120"/>
+              </a:rPr>
+              <a:t>BACKUP</a:t>
+            </a:r>
+            <a:endParaRPr lang="en-US" sz="1425" dirty="0"/>
+          </a:p>
+        </p:txBody>
+      </p:sp>
+    </p:spTree>
+  </p:cSld>
+  <p:clrMapOvr>
+    <a:masterClrMapping/>
+  </p:clrMapOvr>
+</p:sld>
+</file>
+
+<file path=ppt/slides/slide22.xml><?xml version="1.0" encoding="utf-8"?>
+<p:sld xmlns:a="http://schemas.openxmlformats.org/drawingml/2006/main" xmlns:p="http://schemas.openxmlformats.org/presentationml/2006/main" xmlns:r="http://schemas.openxmlformats.org/officeDocument/2006/relationships">
+  <p:cSld>
+    <p:bg>
+      <p:bgPr>
+        <a:solidFill>
+          <a:srgbClr val="EDE9E1"/>
+        </a:solidFill>
+        <a:effectLst/>
+      </p:bgPr>
+    </p:bg>
+    <p:spTree>
+      <p:nvGrpSpPr>
+        <p:cNvPr id="1" name=""/>
+        <p:cNvGrpSpPr/>
+        <p:nvPr/>
+      </p:nvGrpSpPr>
+      <p:grpSpPr/>
+      <p:sp>
+        <p:nvSpPr>
+          <p:cNvPr id="2123" name="Text 0"/>
+          <p:cNvSpPr/>
+          <p:nvPr/>
+        </p:nvSpPr>
+        <p:spPr>
+          <a:xfrm>
+            <a:off x="952385" y="857146"/>
+            <a:ext cx="18021508" cy="316343"/>
+          </a:xfrm>
+          <a:prstGeom prst="rect">
+            <a:avLst/>
+          </a:prstGeom>
+          <a:noFill/>
+          <a:ln/>
+        </p:spPr>
+        <p:txBody>
+          <a:bodyPr wrap="square" lIns="25400" tIns="25400" rIns="25400" bIns="25400" rtlCol="0" anchor="t">
+            <a:normAutofit/>
+          </a:bodyPr>
+          <a:lstStyle/>
+          <a:p>
+            <a:pPr algn="l" indent="0" marL="0">
+              <a:buNone/>
+            </a:pPr>
+            <a:r>
+              <a:rPr lang="en-US" sz="1650" spc="264" kern="0" dirty="0">
+                <a:solidFill>
+                  <a:srgbClr val="B0483A"/>
+                </a:solidFill>
+                <a:latin typeface="IBM Plex Mono" pitchFamily="34" charset="0"/>
+                <a:ea typeface="IBM Plex Mono" pitchFamily="34" charset="-122"/>
+                <a:cs typeface="IBM Plex Mono" pitchFamily="34" charset="-120"/>
+              </a:rPr>
+              <a:t>BACKUP — FAIR COMPARISON</a:t>
+            </a:r>
+            <a:endParaRPr lang="en-US" sz="1650" dirty="0"/>
+          </a:p>
+        </p:txBody>
+      </p:sp>
+      <p:sp>
+        <p:nvSpPr>
+          <p:cNvPr id="2124" name="Text 1"/>
+          <p:cNvSpPr/>
+          <p:nvPr/>
+        </p:nvSpPr>
+        <p:spPr>
+          <a:xfrm>
+            <a:off x="952385" y="1306710"/>
+            <a:ext cx="18021508" cy="634665"/>
+          </a:xfrm>
+          <a:prstGeom prst="rect">
+            <a:avLst/>
+          </a:prstGeom>
+          <a:noFill/>
+          <a:ln/>
+        </p:spPr>
+        <p:txBody>
+          <a:bodyPr wrap="square" lIns="25400" tIns="25400" rIns="25400" bIns="25400" rtlCol="0" anchor="t">
+            <a:normAutofit/>
+          </a:bodyPr>
+          <a:lstStyle/>
+          <a:p>
+            <a:pPr algn="l" indent="0" marL="0">
+              <a:lnSpc>
+                <a:spcPct val="108000"/>
+              </a:lnSpc>
+              <a:buNone/>
+            </a:pPr>
+            <a:r>
+              <a:rPr lang="en-US" sz="4350" b="1" spc="-65" kern="0" dirty="0">
+                <a:solidFill>
+                  <a:srgbClr val="1A2430"/>
+                </a:solidFill>
+                <a:latin typeface="Space Grotesk" pitchFamily="34" charset="0"/>
+                <a:ea typeface="Space Grotesk" pitchFamily="34" charset="-122"/>
+                <a:cs typeface="Space Grotesk" pitchFamily="34" charset="-120"/>
+              </a:rPr>
+              <a:t>Fair comparison: the same precomputation on both sides</a:t>
+            </a:r>
+            <a:endParaRPr lang="en-US" sz="4350" dirty="0"/>
+          </a:p>
+        </p:txBody>
+      </p:sp>
+      <p:sp>
+        <p:nvSpPr>
+          <p:cNvPr id="2125" name="Text 11"/>
+          <p:cNvSpPr/>
+          <p:nvPr/>
+        </p:nvSpPr>
+        <p:spPr>
+          <a:xfrm>
+            <a:off x="950976" y="2514600"/>
+            <a:ext cx="7863840" cy="281563"/>
+          </a:xfrm>
+          <a:prstGeom prst="rect">
+            <a:avLst/>
+          </a:prstGeom>
+          <a:noFill/>
+          <a:ln/>
+        </p:spPr>
+        <p:txBody>
+          <a:bodyPr wrap="square" lIns="25400" tIns="25400" rIns="25400" bIns="25400" rtlCol="0" anchor="t">
+            <a:normAutofit/>
+          </a:bodyPr>
+          <a:lstStyle/>
+          <a:p>
+            <a:pPr algn="l" indent="0" marL="0">
+              <a:buNone/>
+            </a:pPr>
+            <a:r>
+              <a:rPr lang="en-US" sz="1500" dirty="0">
+                <a:solidFill>
+                  <a:srgbClr val="33608F"/>
+                </a:solidFill>
+                <a:latin typeface="IBM Plex Mono" pitchFamily="34" charset="0"/>
+                <a:ea typeface="IBM Plex Mono" pitchFamily="34" charset="-122"/>
+                <a:cs typeface="IBM Plex Mono" pitchFamily="34" charset="-120"/>
+              </a:rPr>
+              <a:t>POSTGRES — MATERIALIZED VIEW, BUILT ONCE AT LOAD</a:t>
+            </a:r>
+            <a:endParaRPr lang="en-US" sz="1500" dirty="0"/>
+          </a:p>
+        </p:txBody>
+      </p:sp>
+      <p:sp>
+        <p:nvSpPr>
+          <p:cNvPr id="2126" name="Shape 12"/>
+          <p:cNvSpPr/>
+          <p:nvPr/>
+        </p:nvSpPr>
+        <p:spPr>
+          <a:xfrm>
+            <a:off x="950976" y="2880360"/>
+            <a:ext cx="7863840" cy="3383280"/>
+          </a:xfrm>
+          <a:prstGeom prst="rect">
+            <a:avLst/>
+          </a:prstGeom>
+          <a:solidFill>
+            <a:srgbClr val="16202C"/>
+          </a:solidFill>
+          <a:ln/>
+        </p:spPr>
+        <p:txBody>
+          <a:bodyPr/>
+          <a:p/>
+        </p:txBody>
+      </p:sp>
+      <p:sp>
+        <p:nvSpPr>
+          <p:cNvPr id="2127" name="Text 13"/>
+          <p:cNvSpPr/>
+          <p:nvPr/>
+        </p:nvSpPr>
+        <p:spPr>
+          <a:xfrm>
+            <a:off x="1188720" y="3063240"/>
+            <a:ext cx="7406640" cy="3063240"/>
+          </a:xfrm>
+          <a:prstGeom prst="rect">
+            <a:avLst/>
+          </a:prstGeom>
+          <a:noFill/>
+          <a:ln/>
+        </p:spPr>
+        <p:txBody>
+          <a:bodyPr wrap="none" lIns="25400" tIns="25400" rIns="25400" bIns="25400" rtlCol="0" anchor="t">
+            <a:normAutofit/>
+          </a:bodyPr>
+          <a:lstStyle/>
+          <a:p>
+            <a:pPr algn="l" indent="0" marL="0">
+              <a:lnSpc>
+                <a:spcPct val="150000"/>
+              </a:lnSpc>
+              <a:buNone/>
+            </a:pPr>
+            <a:r>
+              <a:rPr lang="en-US" sz="1500" dirty="0">
+                <a:solidFill>
+                  <a:srgbClr val="B8C4D2"/>
+                </a:solidFill>
+                <a:latin typeface="IBM Plex Mono" pitchFamily="34" charset="0"/>
+                <a:ea typeface="IBM Plex Mono" pitchFamily="34" charset="-122"/>
+                <a:cs typeface="IBM Plex Mono" pitchFamily="34" charset="-120"/>
+              </a:rPr>
+              <a:t>CREATE MATERIALIZED VIEW mv_played_for AS</a:t>
+            </a:r>
+            <a:endParaRPr lang="en-US" sz="1500" dirty="0"/>
+          </a:p>
+          <a:p>
+            <a:pPr algn="l" indent="0" marL="0">
+              <a:lnSpc>
+                <a:spcPct val="150000"/>
+              </a:lnSpc>
+              <a:buNone/>
+            </a:pPr>
+            <a:r>
+              <a:rPr lang="en-US" sz="1500" dirty="0">
+                <a:solidFill>
+                  <a:srgbClr val="B8C4D2"/>
+                </a:solidFill>
+                <a:latin typeface="IBM Plex Mono" pitchFamily="34" charset="0"/>
+                <a:ea typeface="IBM Plex Mono" pitchFamily="34" charset="-122"/>
+                <a:cs typeface="IBM Plex Mono" pitchFamily="34" charset="-120"/>
+              </a:rPr>
+              <a:t>SELECT DISTINCT l.player_api_id,</a:t>
+            </a:r>
+            <a:endParaRPr lang="en-US" sz="1500" dirty="0"/>
+          </a:p>
+          <a:p>
+            <a:pPr algn="l" indent="0" marL="0">
+              <a:lnSpc>
+                <a:spcPct val="150000"/>
+              </a:lnSpc>
+              <a:buNone/>
+            </a:pPr>
+            <a:r>
+              <a:rPr lang="en-US" sz="1500" dirty="0">
+                <a:solidFill>
+                  <a:srgbClr val="B8C4D2"/>
+                </a:solidFill>
+                <a:latin typeface="IBM Plex Mono" pitchFamily="34" charset="0"/>
+                <a:ea typeface="IBM Plex Mono" pitchFamily="34" charset="-122"/>
+                <a:cs typeface="IBM Plex Mono" pitchFamily="34" charset="-120"/>
+              </a:rPr>
+              <a:t>       CASE WHEN l.side = 'home' THEN m.home_team_api_id</a:t>
+            </a:r>
+            <a:endParaRPr lang="en-US" sz="1500" dirty="0"/>
+          </a:p>
+          <a:p>
+            <a:pPr algn="l" indent="0" marL="0">
+              <a:lnSpc>
+                <a:spcPct val="150000"/>
+              </a:lnSpc>
+              <a:buNone/>
+            </a:pPr>
+            <a:r>
+              <a:rPr lang="en-US" sz="1500" dirty="0">
+                <a:solidFill>
+                  <a:srgbClr val="B8C4D2"/>
+                </a:solidFill>
+                <a:latin typeface="IBM Plex Mono" pitchFamily="34" charset="0"/>
+                <a:ea typeface="IBM Plex Mono" pitchFamily="34" charset="-122"/>
+                <a:cs typeface="IBM Plex Mono" pitchFamily="34" charset="-120"/>
+              </a:rPr>
+              <a:t>            ELSE m.away_team_api_id END AS team_api_id,</a:t>
+            </a:r>
+            <a:endParaRPr lang="en-US" sz="1500" dirty="0"/>
+          </a:p>
+          <a:p>
+            <a:pPr algn="l" indent="0" marL="0">
+              <a:lnSpc>
+                <a:spcPct val="150000"/>
+              </a:lnSpc>
+              <a:buNone/>
+            </a:pPr>
+            <a:r>
+              <a:rPr lang="en-US" sz="1500" dirty="0">
+                <a:solidFill>
+                  <a:srgbClr val="B8C4D2"/>
+                </a:solidFill>
+                <a:latin typeface="IBM Plex Mono" pitchFamily="34" charset="0"/>
+                <a:ea typeface="IBM Plex Mono" pitchFamily="34" charset="-122"/>
+                <a:cs typeface="IBM Plex Mono" pitchFamily="34" charset="-120"/>
+              </a:rPr>
+              <a:t>       m.season</a:t>
+            </a:r>
+            <a:endParaRPr lang="en-US" sz="1500" dirty="0"/>
+          </a:p>
+          <a:p>
+            <a:pPr algn="l" indent="0" marL="0">
+              <a:lnSpc>
+                <a:spcPct val="150000"/>
+              </a:lnSpc>
+              <a:buNone/>
+            </a:pPr>
+            <a:r>
+              <a:rPr lang="en-US" sz="1500" dirty="0">
+                <a:solidFill>
+                  <a:srgbClr val="B8C4D2"/>
+                </a:solidFill>
+                <a:latin typeface="IBM Plex Mono" pitchFamily="34" charset="0"/>
+                <a:ea typeface="IBM Plex Mono" pitchFamily="34" charset="-122"/>
+                <a:cs typeface="IBM Plex Mono" pitchFamily="34" charset="-120"/>
+              </a:rPr>
+              <a:t>FROM   match_lineup l</a:t>
+            </a:r>
+            <a:endParaRPr lang="en-US" sz="1500" dirty="0"/>
+          </a:p>
+          <a:p>
+            <a:pPr algn="l" indent="0" marL="0">
+              <a:lnSpc>
+                <a:spcPct val="150000"/>
+              </a:lnSpc>
+              <a:buNone/>
+            </a:pPr>
+            <a:r>
+              <a:rPr lang="en-US" sz="1500" dirty="0">
+                <a:solidFill>
+                  <a:srgbClr val="B8C4D2"/>
+                </a:solidFill>
+                <a:latin typeface="IBM Plex Mono" pitchFamily="34" charset="0"/>
+                <a:ea typeface="IBM Plex Mono" pitchFamily="34" charset="-122"/>
+                <a:cs typeface="IBM Plex Mono" pitchFamily="34" charset="-120"/>
+              </a:rPr>
+              <a:t>JOIN   match m ON m.match_api_id = l.match_api_id;</a:t>
+            </a:r>
+            <a:endParaRPr lang="en-US" sz="1500" dirty="0"/>
+          </a:p>
+          <a:p>
+            <a:pPr algn="l" indent="0" marL="0">
+              <a:lnSpc>
+                <a:spcPct val="150000"/>
+              </a:lnSpc>
+              <a:buNone/>
+            </a:pPr>
+            <a:r>
+              <a:rPr lang="en-US" sz="1500" dirty="0">
+                <a:solidFill>
+                  <a:srgbClr val="B8C4D2"/>
+                </a:solidFill>
+                <a:latin typeface="IBM Plex Mono" pitchFamily="34" charset="0"/>
+                <a:ea typeface="IBM Plex Mono" pitchFamily="34" charset="-122"/>
+                <a:cs typeface="IBM Plex Mono" pitchFamily="34" charset="-120"/>
+              </a:rPr>
+              <a:t>CREATE INDEX ... ON mv_played_for(player_api_id);</a:t>
+            </a:r>
+            <a:endParaRPr lang="en-US" sz="1500" dirty="0"/>
+          </a:p>
+          <a:p>
+            <a:pPr algn="l" indent="0" marL="0">
+              <a:lnSpc>
+                <a:spcPct val="150000"/>
+              </a:lnSpc>
+              <a:buNone/>
+            </a:pPr>
+            <a:r>
+              <a:rPr lang="en-US" sz="1500" dirty="0">
+                <a:solidFill>
+                  <a:srgbClr val="B8C4D2"/>
+                </a:solidFill>
+                <a:latin typeface="IBM Plex Mono" pitchFamily="34" charset="0"/>
+                <a:ea typeface="IBM Plex Mono" pitchFamily="34" charset="-122"/>
+                <a:cs typeface="IBM Plex Mono" pitchFamily="34" charset="-120"/>
+              </a:rPr>
+              <a:t>CREATE INDEX ... ON mv_played_for(team_api_id, season);</a:t>
+            </a:r>
+            <a:endParaRPr lang="en-US" sz="1500" dirty="0"/>
+          </a:p>
+        </p:txBody>
+      </p:sp>
+      <p:sp>
+        <p:nvSpPr>
+          <p:cNvPr id="2128" name="Text 14"/>
+          <p:cNvSpPr/>
+          <p:nvPr/>
+        </p:nvSpPr>
+        <p:spPr>
+          <a:xfrm>
+            <a:off x="9473184" y="2514600"/>
+            <a:ext cx="7863840" cy="281563"/>
+          </a:xfrm>
+          <a:prstGeom prst="rect">
+            <a:avLst/>
+          </a:prstGeom>
+          <a:noFill/>
+          <a:ln/>
+        </p:spPr>
+        <p:txBody>
+          <a:bodyPr wrap="square" lIns="25400" tIns="25400" rIns="25400" bIns="25400" rtlCol="0" anchor="t">
+            <a:normAutofit/>
+          </a:bodyPr>
+          <a:lstStyle/>
+          <a:p>
+            <a:pPr algn="l" indent="0" marL="0">
+              <a:buNone/>
+            </a:pPr>
+            <a:r>
+              <a:rPr lang="en-US" sz="1500" dirty="0">
+                <a:solidFill>
+                  <a:srgbClr val="1E7A52"/>
+                </a:solidFill>
+                <a:latin typeface="IBM Plex Mono" pitchFamily="34" charset="0"/>
+                <a:ea typeface="IBM Plex Mono" pitchFamily="34" charset="-122"/>
+                <a:cs typeface="IBM Plex Mono" pitchFamily="34" charset="-120"/>
+              </a:rPr>
+              <a:t>NEO4J — DERIVED RELATIONSHIP, BUILT ONCE AT LOAD</a:t>
+            </a:r>
+            <a:endParaRPr lang="en-US" sz="1500" dirty="0"/>
+          </a:p>
+        </p:txBody>
+      </p:sp>
+      <p:sp>
+        <p:nvSpPr>
+          <p:cNvPr id="2129" name="Shape 15"/>
+          <p:cNvSpPr/>
+          <p:nvPr/>
+        </p:nvSpPr>
+        <p:spPr>
+          <a:xfrm>
+            <a:off x="9473184" y="2880360"/>
+            <a:ext cx="7863840" cy="3383280"/>
+          </a:xfrm>
+          <a:prstGeom prst="rect">
+            <a:avLst/>
+          </a:prstGeom>
+          <a:solidFill>
+            <a:srgbClr val="16202C"/>
+          </a:solidFill>
+          <a:ln/>
+        </p:spPr>
+        <p:txBody>
+          <a:bodyPr/>
+          <a:p/>
+        </p:txBody>
+      </p:sp>
+      <p:sp>
+        <p:nvSpPr>
+          <p:cNvPr id="2130" name="Text 16"/>
+          <p:cNvSpPr/>
+          <p:nvPr/>
+        </p:nvSpPr>
+        <p:spPr>
+          <a:xfrm>
+            <a:off x="9710928" y="3063240"/>
+            <a:ext cx="7406640" cy="3063240"/>
+          </a:xfrm>
+          <a:prstGeom prst="rect">
+            <a:avLst/>
+          </a:prstGeom>
+          <a:noFill/>
+          <a:ln/>
+        </p:spPr>
+        <p:txBody>
+          <a:bodyPr wrap="none" lIns="25400" tIns="25400" rIns="25400" bIns="25400" rtlCol="0" anchor="t">
+            <a:normAutofit/>
+          </a:bodyPr>
+          <a:lstStyle/>
+          <a:p>
+            <a:pPr algn="l" indent="0" marL="0">
+              <a:lnSpc>
+                <a:spcPct val="150000"/>
+              </a:lnSpc>
+              <a:buNone/>
+            </a:pPr>
+            <a:r>
+              <a:rPr lang="en-US" sz="1500" dirty="0">
+                <a:solidFill>
+                  <a:srgbClr val="D5E5DC"/>
+                </a:solidFill>
+                <a:latin typeface="IBM Plex Mono" pitchFamily="34" charset="0"/>
+                <a:ea typeface="IBM Plex Mono" pitchFamily="34" charset="-122"/>
+                <a:cs typeface="IBM Plex Mono" pitchFamily="34" charset="-120"/>
+              </a:rPr>
+              <a:t>MATCH (p:Player)-[:LINEUP_OF]-&gt;(m:Match)</a:t>
+            </a:r>
+            <a:endParaRPr lang="en-US" sz="1500" dirty="0"/>
+          </a:p>
+          <a:p>
+            <a:pPr algn="l" indent="0" marL="0">
+              <a:lnSpc>
+                <a:spcPct val="150000"/>
+              </a:lnSpc>
+              <a:buNone/>
+            </a:pPr>
+            <a:r>
+              <a:rPr lang="en-US" sz="1500" dirty="0">
+                <a:solidFill>
+                  <a:srgbClr val="D5E5DC"/>
+                </a:solidFill>
+                <a:latin typeface="IBM Plex Mono" pitchFamily="34" charset="0"/>
+                <a:ea typeface="IBM Plex Mono" pitchFamily="34" charset="-122"/>
+                <a:cs typeface="IBM Plex Mono" pitchFamily="34" charset="-120"/>
+              </a:rPr>
+              <a:t>      -[:HOME|AWAY]-&gt;(t:Team)</a:t>
+            </a:r>
+            <a:endParaRPr lang="en-US" sz="1500" dirty="0"/>
+          </a:p>
+          <a:p>
+            <a:pPr algn="l" indent="0" marL="0">
+              <a:lnSpc>
+                <a:spcPct val="150000"/>
+              </a:lnSpc>
+              <a:buNone/>
+            </a:pPr>
+            <a:r>
+              <a:rPr lang="en-US" sz="1500" dirty="0">
+                <a:solidFill>
+                  <a:srgbClr val="D5E5DC"/>
+                </a:solidFill>
+                <a:latin typeface="IBM Plex Mono" pitchFamily="34" charset="0"/>
+                <a:ea typeface="IBM Plex Mono" pitchFamily="34" charset="-122"/>
+                <a:cs typeface="IBM Plex Mono" pitchFamily="34" charset="-120"/>
+              </a:rPr>
+              <a:t>WITH  p, t, m.season AS season, count(*) AS apps</a:t>
+            </a:r>
+            <a:endParaRPr lang="en-US" sz="1500" dirty="0"/>
+          </a:p>
+          <a:p>
+            <a:pPr algn="l" indent="0" marL="0">
+              <a:lnSpc>
+                <a:spcPct val="150000"/>
+              </a:lnSpc>
+              <a:buNone/>
+            </a:pPr>
+            <a:r>
+              <a:rPr lang="en-US" sz="1500" dirty="0">
+                <a:solidFill>
+                  <a:srgbClr val="D5E5DC"/>
+                </a:solidFill>
+                <a:latin typeface="IBM Plex Mono" pitchFamily="34" charset="0"/>
+                <a:ea typeface="IBM Plex Mono" pitchFamily="34" charset="-122"/>
+                <a:cs typeface="IBM Plex Mono" pitchFamily="34" charset="-120"/>
+              </a:rPr>
+              <a:t>MERGE (p)-[r:PLAYED_FOR {season: season}]-&gt;(t)</a:t>
+            </a:r>
+            <a:endParaRPr lang="en-US" sz="1500" dirty="0"/>
+          </a:p>
+          <a:p>
+            <a:pPr algn="l" indent="0" marL="0">
+              <a:lnSpc>
+                <a:spcPct val="150000"/>
+              </a:lnSpc>
+              <a:buNone/>
+            </a:pPr>
+            <a:r>
+              <a:rPr lang="en-US" sz="1500" dirty="0">
+                <a:solidFill>
+                  <a:srgbClr val="D5E5DC"/>
+                </a:solidFill>
+                <a:latin typeface="IBM Plex Mono" pitchFamily="34" charset="0"/>
+                <a:ea typeface="IBM Plex Mono" pitchFamily="34" charset="-122"/>
+                <a:cs typeface="IBM Plex Mono" pitchFamily="34" charset="-120"/>
+              </a:rPr>
+              <a:t>SET   r.appearances = apps</a:t>
+            </a:r>
+            <a:endParaRPr lang="en-US" sz="1500" dirty="0"/>
+          </a:p>
+        </p:txBody>
+      </p:sp>
+      <p:sp>
+        <p:nvSpPr>
+          <p:cNvPr id="2131" name="Shape 2"/>
+          <p:cNvSpPr/>
+          <p:nvPr/>
+        </p:nvSpPr>
+        <p:spPr>
+          <a:xfrm>
+            <a:off x="950976" y="6537960"/>
+            <a:ext cx="5257800" cy="2194560"/>
+          </a:xfrm>
+          <a:prstGeom prst="rect">
+            <a:avLst/>
+          </a:prstGeom>
+          <a:solidFill>
+            <a:srgbClr val="FFFFFF"/>
+          </a:solidFill>
+          <a:ln w="8695">
+            <a:solidFill>
+              <a:srgbClr val="DDD6CA"/>
+            </a:solidFill>
+            <a:prstDash val="solid"/>
+          </a:ln>
+        </p:spPr>
+        <p:txBody>
+          <a:bodyPr/>
+          <a:p/>
+        </p:txBody>
+      </p:sp>
+      <p:sp>
+        <p:nvSpPr>
+          <p:cNvPr id="2132" name="Text 3"/>
+          <p:cNvSpPr/>
+          <p:nvPr/>
+        </p:nvSpPr>
+        <p:spPr>
+          <a:xfrm>
+            <a:off x="1316736" y="6858000"/>
+            <a:ext cx="4572000" cy="365760"/>
+          </a:xfrm>
+          <a:prstGeom prst="rect">
+            <a:avLst/>
+          </a:prstGeom>
+          <a:noFill/>
+          <a:ln/>
+        </p:spPr>
+        <p:txBody>
+          <a:bodyPr wrap="square" lIns="25400" tIns="25400" rIns="25400" bIns="25400" rtlCol="0" anchor="t">
+            <a:normAutofit/>
+          </a:bodyPr>
+          <a:lstStyle/>
+          <a:p>
+            <a:pPr algn="l" indent="0" marL="0">
+              <a:buNone/>
+            </a:pPr>
+            <a:r>
+              <a:rPr lang="en-US" sz="2000" b="1" dirty="0">
+                <a:solidFill>
+                  <a:srgbClr val="33608F"/>
+                </a:solidFill>
+                <a:latin typeface="IBM Plex Mono" pitchFamily="34" charset="0"/>
+                <a:ea typeface="IBM Plex Mono" pitchFamily="34" charset="-122"/>
+                <a:cs typeface="IBM Plex Mono" pitchFamily="34" charset="-120"/>
+              </a:rPr>
+              <a:t>35,002</a:t>
+            </a:r>
+            <a:endParaRPr lang="en-US" sz="1650" dirty="0"/>
+          </a:p>
+        </p:txBody>
+      </p:sp>
+      <p:sp>
+        <p:nvSpPr>
+          <p:cNvPr id="2133" name="Text 4"/>
+          <p:cNvSpPr/>
+          <p:nvPr/>
+        </p:nvSpPr>
+        <p:spPr>
+          <a:xfrm>
+            <a:off x="1316736" y="7360920"/>
+            <a:ext cx="4572000" cy="1280160"/>
+          </a:xfrm>
+          <a:prstGeom prst="rect">
+            <a:avLst/>
+          </a:prstGeom>
+          <a:noFill/>
+          <a:ln/>
+        </p:spPr>
+        <p:txBody>
+          <a:bodyPr wrap="square" lIns="25400" tIns="25400" rIns="25400" bIns="25400" rtlCol="0" anchor="t">
+            <a:normAutofit/>
+          </a:bodyPr>
+          <a:lstStyle/>
+          <a:p>
+            <a:pPr algn="l" indent="0" marL="0">
+              <a:lnSpc>
+                <a:spcPct val="140000"/>
+              </a:lnSpc>
+              <a:buNone/>
+            </a:pPr>
+            <a:r>
+              <a:rPr lang="en-US" sz="1550" b="0" dirty="0">
+                <a:solidFill>
+                  <a:srgbClr val="3D4652"/>
+                </a:solidFill>
+                <a:latin typeface="Space Grotesk" pitchFamily="34" charset="0"/>
+                <a:ea typeface="Space Grotesk" pitchFamily="34" charset="-122"/>
+                <a:cs typeface="Space Grotesk" pitchFamily="34" charset="-120"/>
+              </a:rPr>
+              <a:t>rows in the view = 35,002 PLAYED_FOR relationships — the two populations coincide</a:t>
+            </a:r>
+            <a:pPr algn="l" indent="0" marL="0">
+              <a:lnSpc>
+                <a:spcPct val="140000"/>
+              </a:lnSpc>
+              <a:buNone/>
+            </a:pPr>
+            <a:endParaRPr lang="en-US" sz="1800" dirty="0"/>
+          </a:p>
+        </p:txBody>
+      </p:sp>
+      <p:sp>
+        <p:nvSpPr>
+          <p:cNvPr id="2134" name="Shape 2"/>
+          <p:cNvSpPr/>
+          <p:nvPr/>
+        </p:nvSpPr>
+        <p:spPr>
+          <a:xfrm>
+            <a:off x="6515100" y="6537960"/>
+            <a:ext cx="5257800" cy="2194560"/>
+          </a:xfrm>
+          <a:prstGeom prst="rect">
+            <a:avLst/>
+          </a:prstGeom>
+          <a:solidFill>
+            <a:srgbClr val="FFFFFF"/>
+          </a:solidFill>
+          <a:ln w="8695">
+            <a:solidFill>
+              <a:srgbClr val="DDD6CA"/>
+            </a:solidFill>
+            <a:prstDash val="solid"/>
+          </a:ln>
+        </p:spPr>
+        <p:txBody>
+          <a:bodyPr/>
+          <a:p/>
+        </p:txBody>
+      </p:sp>
+      <p:sp>
+        <p:nvSpPr>
+          <p:cNvPr id="2135" name="Text 3"/>
+          <p:cNvSpPr/>
+          <p:nvPr/>
+        </p:nvSpPr>
+        <p:spPr>
+          <a:xfrm>
+            <a:off x="6880860" y="6858000"/>
+            <a:ext cx="4572000" cy="365760"/>
+          </a:xfrm>
+          <a:prstGeom prst="rect">
+            <a:avLst/>
+          </a:prstGeom>
+          <a:noFill/>
+          <a:ln/>
+        </p:spPr>
+        <p:txBody>
+          <a:bodyPr wrap="square" lIns="25400" tIns="25400" rIns="25400" bIns="25400" rtlCol="0" anchor="t">
+            <a:normAutofit/>
+          </a:bodyPr>
+          <a:lstStyle/>
+          <a:p>
+            <a:pPr algn="l" indent="0" marL="0">
+              <a:buNone/>
+            </a:pPr>
+            <a:r>
+              <a:rPr lang="en-US" sz="2000" b="1" dirty="0">
+                <a:solidFill>
+                  <a:srgbClr val="1E7A52"/>
+                </a:solidFill>
+                <a:latin typeface="IBM Plex Mono" pitchFamily="34" charset="0"/>
+                <a:ea typeface="IBM Plex Mono" pitchFamily="34" charset="-122"/>
+                <a:cs typeface="IBM Plex Mono" pitchFamily="34" charset="-120"/>
+              </a:rPr>
+              <a:t>Q09 · Q10</a:t>
+            </a:r>
+            <a:endParaRPr lang="en-US" sz="1650" dirty="0"/>
+          </a:p>
+        </p:txBody>
+      </p:sp>
+      <p:sp>
+        <p:nvSpPr>
+          <p:cNvPr id="2136" name="Text 4"/>
+          <p:cNvSpPr/>
+          <p:nvPr/>
+        </p:nvSpPr>
+        <p:spPr>
+          <a:xfrm>
+            <a:off x="6880860" y="7360920"/>
+            <a:ext cx="4572000" cy="1280160"/>
+          </a:xfrm>
+          <a:prstGeom prst="rect">
+            <a:avLst/>
+          </a:prstGeom>
+          <a:noFill/>
+          <a:ln/>
+        </p:spPr>
+        <p:txBody>
+          <a:bodyPr wrap="square" lIns="25400" tIns="25400" rIns="25400" bIns="25400" rtlCol="0" anchor="t">
+            <a:normAutofit/>
+          </a:bodyPr>
+          <a:lstStyle/>
+          <a:p>
+            <a:pPr algn="l" indent="0" marL="0">
+              <a:lnSpc>
+                <a:spcPct val="140000"/>
+              </a:lnSpc>
+              <a:buNone/>
+            </a:pPr>
+            <a:r>
+              <a:rPr lang="en-US" sz="1550" b="0" dirty="0">
+                <a:solidFill>
+                  <a:srgbClr val="3D4652"/>
+                </a:solidFill>
+                <a:latin typeface="Space Grotesk" pitchFamily="34" charset="0"/>
+                <a:ea typeface="Space Grotesk" pitchFamily="34" charset="-122"/>
+                <a:cs typeface="Space Grotesk" pitchFamily="34" charset="-120"/>
+              </a:rPr>
+              <a:t>the only queries that use it, on both sides; Q08 walks the raw lineups on both sides</a:t>
+            </a:r>
+            <a:pPr algn="l" indent="0" marL="0">
+              <a:lnSpc>
+                <a:spcPct val="140000"/>
+              </a:lnSpc>
+              <a:buNone/>
+            </a:pPr>
+            <a:endParaRPr lang="en-US" sz="1800" dirty="0"/>
+          </a:p>
+        </p:txBody>
+      </p:sp>
+      <p:sp>
+        <p:nvSpPr>
+          <p:cNvPr id="2137" name="Shape 2"/>
+          <p:cNvSpPr/>
+          <p:nvPr/>
+        </p:nvSpPr>
+        <p:spPr>
+          <a:xfrm>
+            <a:off x="12079224" y="6537960"/>
+            <a:ext cx="5257800" cy="2194560"/>
+          </a:xfrm>
+          <a:prstGeom prst="rect">
+            <a:avLst/>
+          </a:prstGeom>
+          <a:solidFill>
+            <a:srgbClr val="FFFFFF"/>
+          </a:solidFill>
+          <a:ln w="8695">
+            <a:solidFill>
+              <a:srgbClr val="DDD6CA"/>
+            </a:solidFill>
+            <a:prstDash val="solid"/>
+          </a:ln>
+        </p:spPr>
+        <p:txBody>
+          <a:bodyPr/>
+          <a:p/>
+        </p:txBody>
+      </p:sp>
+      <p:sp>
+        <p:nvSpPr>
+          <p:cNvPr id="2138" name="Text 3"/>
+          <p:cNvSpPr/>
+          <p:nvPr/>
+        </p:nvSpPr>
+        <p:spPr>
+          <a:xfrm>
+            <a:off x="12444984" y="6858000"/>
+            <a:ext cx="4572000" cy="365760"/>
+          </a:xfrm>
+          <a:prstGeom prst="rect">
+            <a:avLst/>
+          </a:prstGeom>
+          <a:noFill/>
+          <a:ln/>
+        </p:spPr>
+        <p:txBody>
+          <a:bodyPr wrap="square" lIns="25400" tIns="25400" rIns="25400" bIns="25400" rtlCol="0" anchor="t">
+            <a:normAutofit/>
+          </a:bodyPr>
+          <a:lstStyle/>
+          <a:p>
+            <a:pPr algn="l" indent="0" marL="0">
+              <a:buNone/>
+            </a:pPr>
+            <a:r>
+              <a:rPr lang="en-US" sz="2000" b="1" dirty="0">
+                <a:solidFill>
+                  <a:srgbClr val="1E7A52"/>
+                </a:solidFill>
+                <a:latin typeface="IBM Plex Mono" pitchFamily="34" charset="0"/>
+                <a:ea typeface="IBM Plex Mono" pitchFamily="34" charset="-122"/>
+                <a:cs typeface="IBM Plex Mono" pitchFamily="34" charset="-120"/>
+              </a:rPr>
+              <a:t>why</a:t>
+            </a:r>
+            <a:endParaRPr lang="en-US" sz="1650" dirty="0"/>
+          </a:p>
+        </p:txBody>
+      </p:sp>
+      <p:sp>
+        <p:nvSpPr>
+          <p:cNvPr id="2139" name="Text 4"/>
+          <p:cNvSpPr/>
+          <p:nvPr/>
+        </p:nvSpPr>
+        <p:spPr>
+          <a:xfrm>
+            <a:off x="12444984" y="7360920"/>
+            <a:ext cx="4572000" cy="1280160"/>
+          </a:xfrm>
+          <a:prstGeom prst="rect">
+            <a:avLst/>
+          </a:prstGeom>
+          <a:noFill/>
+          <a:ln/>
+        </p:spPr>
+        <p:txBody>
+          <a:bodyPr wrap="square" lIns="25400" tIns="25400" rIns="25400" bIns="25400" rtlCol="0" anchor="t">
+            <a:normAutofit/>
+          </a:bodyPr>
+          <a:lstStyle/>
+          <a:p>
+            <a:pPr algn="l" indent="0" marL="0">
+              <a:lnSpc>
+                <a:spcPct val="140000"/>
+              </a:lnSpc>
+              <a:buNone/>
+            </a:pPr>
+            <a:r>
+              <a:rPr lang="en-US" sz="1550" b="0" dirty="0">
+                <a:solidFill>
+                  <a:srgbClr val="3D4652"/>
+                </a:solidFill>
+                <a:latin typeface="Space Grotesk" pitchFamily="34" charset="0"/>
+                <a:ea typeface="Space Grotesk" pitchFamily="34" charset="-122"/>
+                <a:cs typeface="Space Grotesk" pitchFamily="34" charset="-120"/>
+              </a:rPr>
+              <a:t>without it Postgres would rebuild played_for with a CTE on every run while Neo4j walks a precomputed edge — asymmetric by design</a:t>
+            </a:r>
+            <a:pPr algn="l" indent="0" marL="0">
+              <a:lnSpc>
+                <a:spcPct val="140000"/>
+              </a:lnSpc>
+              <a:buNone/>
+            </a:pPr>
+            <a:endParaRPr lang="en-US" sz="1800" dirty="0"/>
+          </a:p>
+        </p:txBody>
+      </p:sp>
+      <p:sp>
+        <p:nvSpPr>
+          <p:cNvPr id="2140" name="Text 18"/>
+          <p:cNvSpPr/>
+          <p:nvPr/>
+        </p:nvSpPr>
+        <p:spPr>
+          <a:xfrm>
+            <a:off x="952385" y="9633214"/>
+            <a:ext cx="6329527" cy="272868"/>
+          </a:xfrm>
+          <a:prstGeom prst="rect">
+            <a:avLst/>
+          </a:prstGeom>
+          <a:noFill/>
+          <a:ln/>
+        </p:spPr>
+        <p:txBody>
+          <a:bodyPr wrap="square" lIns="25400" tIns="25400" rIns="25400" bIns="25400" rtlCol="0" anchor="t">
+            <a:normAutofit/>
+          </a:bodyPr>
+          <a:lstStyle/>
+          <a:p>
+            <a:pPr algn="l" indent="0" marL="0">
+              <a:buNone/>
+            </a:pPr>
+            <a:r>
+              <a:rPr lang="en-US" sz="1425" dirty="0">
+                <a:solidFill>
+                  <a:srgbClr val="9A938A"/>
+                </a:solidFill>
+                <a:latin typeface="IBM Plex Mono" pitchFamily="34" charset="0"/>
+                <a:ea typeface="IBM Plex Mono" pitchFamily="34" charset="-122"/>
+                <a:cs typeface="IBM Plex Mono" pitchFamily="34" charset="-120"/>
+              </a:rPr>
+              <a:t>DM 2025/26 · D'Angelica &amp; Leone · PostgreSQL vs Neo4j</a:t>
+            </a:r>
+            <a:endParaRPr lang="en-US" sz="1425" dirty="0"/>
+          </a:p>
+        </p:txBody>
+      </p:sp>
+      <p:sp>
+        <p:nvSpPr>
+          <p:cNvPr id="2141" name="Text 19"/>
           <p:cNvSpPr/>
           <p:nvPr/>
         </p:nvSpPr>
@@ -15303,7 +21505,7 @@
                 <a:ea typeface="Space Grotesk" pitchFamily="34" charset="-122"/>
                 <a:cs typeface="Space Grotesk" pitchFamily="34" charset="-120"/>
               </a:rPr>
-              <a:t>44 lineup columns · 8 raw XML fields · 20 betting odds · base info — all in one Match table</a:t>
+              <a:t>22 player ids + 44 pitch coordinates · 8 raw XML fields · 30 betting odds · 11 base fields — all in one Match table</a:t>
             </a:r>
             <a:endParaRPr lang="en-US" sz="1875" dirty="0"/>
           </a:p>

--- a/PostgreSQL_vs_Neo4j_DAngelica_Leone.pptx
+++ b/PostgreSQL_vs_Neo4j_DAngelica_Leone.pptx
@@ -784,7 +784,7 @@
           <a:lstStyle/>
           <a:p>
             <a:r>
-              <a:t>60 sec. La sproporzione visiva È il messaggio: stessa domanda, 21 righe contro 5. Non leggere il codice: indicare solo la CTE ricorsiva a sinistra e SHORTEST 1 a destra.</a:t>
+              <a:t>60 sec. La sproporzione visiva È il messaggio: stessa domanda, 21 righe contro 5. Non leggere il codice: indicare solo la CTE ricorsiva a sinistra e SHORTEST 1 a destra. If asked how we know the semantics match: we ran both formulations on 8 player pairs; the legacy shortestPath() answered 2 hops on Ibrahimovic-Neuer where the season-aware BFS says 3, so we replaced it. That is how we know the 55x is real and not an artefact of a laxer query.</a:t>
             </a:r>
           </a:p>
         </p:txBody>
@@ -3962,7 +3962,7 @@
         <p:spPr>
           <a:xfrm>
             <a:off x="952385" y="2208011"/>
-            <a:ext cx="6477167" cy="6832443"/>
+            <a:ext cx="6477167" cy="6295909"/>
           </a:xfrm>
           <a:prstGeom prst="rect">
             <a:avLst/>
@@ -4027,7 +4027,7 @@
         <p:spPr>
           <a:xfrm>
             <a:off x="1333339" y="2963941"/>
-            <a:ext cx="5886716" cy="5790856"/>
+            <a:ext cx="5886716" cy="5539979"/>
           </a:xfrm>
           <a:prstGeom prst="rect">
             <a:avLst/>
@@ -4471,7 +4471,7 @@
         <p:spPr>
           <a:xfrm>
             <a:off x="10858408" y="2208011"/>
-            <a:ext cx="6477167" cy="6832443"/>
+            <a:ext cx="6477167" cy="6295909"/>
           </a:xfrm>
           <a:prstGeom prst="rect">
             <a:avLst/>
@@ -4727,6 +4727,47 @@
               <a:t>12 / 16</a:t>
             </a:r>
             <a:endParaRPr lang="en-US" sz="1425" dirty="0"/>
+          </a:p>
+        </p:txBody>
+      </p:sp>
+      <p:sp>
+        <p:nvSpPr>
+          <p:cNvPr id="3001" name="Text 69"/>
+          <p:cNvSpPr/>
+          <p:nvPr/>
+        </p:nvSpPr>
+        <p:spPr>
+          <a:xfrm>
+            <a:off x="950976" y="8686800"/>
+            <a:ext cx="16386048" cy="548640"/>
+          </a:xfrm>
+          <a:prstGeom prst="rect">
+            <a:avLst/>
+          </a:prstGeom>
+          <a:noFill/>
+          <a:ln/>
+        </p:spPr>
+        <p:txBody>
+          <a:bodyPr wrap="square" lIns="25400" tIns="25400" rIns="25400" bIns="25400" rtlCol="0" anchor="t">
+            <a:normAutofit/>
+          </a:bodyPr>
+          <a:lstStyle/>
+          <a:p>
+            <a:pPr algn="l" indent="0" marL="0">
+              <a:buNone/>
+            </a:pPr>
+            <a:r>
+              <a:rPr lang="en-US" sz="1450" dirty="0">
+                <a:solidFill>
+                  <a:srgbClr val="6B655C"/>
+                </a:solidFill>
+                <a:latin typeface="Space Grotesk" pitchFamily="34" charset="0"/>
+                <a:ea typeface="IBM Plex Mono" pitchFamily="34" charset="-122"/>
+                <a:cs typeface="IBM Plex Mono" pitchFamily="34" charset="-120"/>
+              </a:rPr>
+              <a:t>Semantics verified, not assumed: the legacy shortestPath() diverges from the SQL BFS on 1 of 8 player pairs (Ibrahimović → Neuer: 2 hops instead of 3) because it ignores the season between consecutive edges — replaced by the quantified path pattern (report §10.2).</a:t>
+            </a:r>
+            <a:endParaRPr lang="en-US" sz="1575" dirty="0"/>
           </a:p>
         </p:txBody>
       </p:sp>

--- a/PostgreSQL_vs_Neo4j_DAngelica_Leone.pptx
+++ b/PostgreSQL_vs_Neo4j_DAngelica_Leone.pptx
@@ -5787,7 +5787,7 @@
           <p:nvPr/>
         </p:nvPicPr>
         <p:blipFill>
-          <a:blip r:embed="rId3"/>
+          <a:blip r:embed="rId4"/>
           <a:stretch>
             <a:fillRect/>
           </a:stretch>
